--- a/images/icu.pptx
+++ b/images/icu.pptx
@@ -8,6 +8,7 @@
     <p:sldId id="256" r:id="rId2"/>
     <p:sldId id="257" r:id="rId3"/>
     <p:sldId id="258" r:id="rId4"/>
+    <p:sldId id="259" r:id="rId5"/>
   </p:sldIdLst>
   <p:sldSz cx="12192000" cy="6858000"/>
   <p:notesSz cx="6858000" cy="9144000"/>
@@ -106,6 +107,11 @@
       </a:defRPr>
     </a:lvl9pPr>
   </p:defaultTextStyle>
+  <p:extLst>
+    <p:ext uri="{EFAFB233-063F-42B5-8137-9DF3F51BA10A}">
+      <p15:sldGuideLst xmlns:p15="http://schemas.microsoft.com/office/powerpoint/2012/main"/>
+    </p:ext>
+  </p:extLst>
 </p:presentation>
 </file>
 
@@ -258,7 +264,7 @@
           <a:p>
             <a:fld id="{0D21F05F-ACFB-0C4D-9827-53BE568178E4}" type="datetimeFigureOut">
               <a:rPr lang="en-US" smtClean="0"/>
-              <a:t>5/7/26</a:t>
+              <a:t>5/11/26</a:t>
             </a:fld>
             <a:endParaRPr lang="en-US"/>
           </a:p>
@@ -458,7 +464,7 @@
           <a:p>
             <a:fld id="{0D21F05F-ACFB-0C4D-9827-53BE568178E4}" type="datetimeFigureOut">
               <a:rPr lang="en-US" smtClean="0"/>
-              <a:t>5/7/26</a:t>
+              <a:t>5/11/26</a:t>
             </a:fld>
             <a:endParaRPr lang="en-US"/>
           </a:p>
@@ -668,7 +674,7 @@
           <a:p>
             <a:fld id="{0D21F05F-ACFB-0C4D-9827-53BE568178E4}" type="datetimeFigureOut">
               <a:rPr lang="en-US" smtClean="0"/>
-              <a:t>5/7/26</a:t>
+              <a:t>5/11/26</a:t>
             </a:fld>
             <a:endParaRPr lang="en-US"/>
           </a:p>
@@ -868,7 +874,7 @@
           <a:p>
             <a:fld id="{0D21F05F-ACFB-0C4D-9827-53BE568178E4}" type="datetimeFigureOut">
               <a:rPr lang="en-US" smtClean="0"/>
-              <a:t>5/7/26</a:t>
+              <a:t>5/11/26</a:t>
             </a:fld>
             <a:endParaRPr lang="en-US"/>
           </a:p>
@@ -1144,7 +1150,7 @@
           <a:p>
             <a:fld id="{0D21F05F-ACFB-0C4D-9827-53BE568178E4}" type="datetimeFigureOut">
               <a:rPr lang="en-US" smtClean="0"/>
-              <a:t>5/7/26</a:t>
+              <a:t>5/11/26</a:t>
             </a:fld>
             <a:endParaRPr lang="en-US"/>
           </a:p>
@@ -1412,7 +1418,7 @@
           <a:p>
             <a:fld id="{0D21F05F-ACFB-0C4D-9827-53BE568178E4}" type="datetimeFigureOut">
               <a:rPr lang="en-US" smtClean="0"/>
-              <a:t>5/7/26</a:t>
+              <a:t>5/11/26</a:t>
             </a:fld>
             <a:endParaRPr lang="en-US"/>
           </a:p>
@@ -1827,7 +1833,7 @@
           <a:p>
             <a:fld id="{0D21F05F-ACFB-0C4D-9827-53BE568178E4}" type="datetimeFigureOut">
               <a:rPr lang="en-US" smtClean="0"/>
-              <a:t>5/7/26</a:t>
+              <a:t>5/11/26</a:t>
             </a:fld>
             <a:endParaRPr lang="en-US"/>
           </a:p>
@@ -1969,7 +1975,7 @@
           <a:p>
             <a:fld id="{0D21F05F-ACFB-0C4D-9827-53BE568178E4}" type="datetimeFigureOut">
               <a:rPr lang="en-US" smtClean="0"/>
-              <a:t>5/7/26</a:t>
+              <a:t>5/11/26</a:t>
             </a:fld>
             <a:endParaRPr lang="en-US"/>
           </a:p>
@@ -2082,7 +2088,7 @@
           <a:p>
             <a:fld id="{0D21F05F-ACFB-0C4D-9827-53BE568178E4}" type="datetimeFigureOut">
               <a:rPr lang="en-US" smtClean="0"/>
-              <a:t>5/7/26</a:t>
+              <a:t>5/11/26</a:t>
             </a:fld>
             <a:endParaRPr lang="en-US"/>
           </a:p>
@@ -2395,7 +2401,7 @@
           <a:p>
             <a:fld id="{0D21F05F-ACFB-0C4D-9827-53BE568178E4}" type="datetimeFigureOut">
               <a:rPr lang="en-US" smtClean="0"/>
-              <a:t>5/7/26</a:t>
+              <a:t>5/11/26</a:t>
             </a:fld>
             <a:endParaRPr lang="en-US"/>
           </a:p>
@@ -2684,7 +2690,7 @@
           <a:p>
             <a:fld id="{0D21F05F-ACFB-0C4D-9827-53BE568178E4}" type="datetimeFigureOut">
               <a:rPr lang="en-US" smtClean="0"/>
-              <a:t>5/7/26</a:t>
+              <a:t>5/11/26</a:t>
             </a:fld>
             <a:endParaRPr lang="en-US"/>
           </a:p>
@@ -2927,7 +2933,7 @@
           <a:p>
             <a:fld id="{0D21F05F-ACFB-0C4D-9827-53BE568178E4}" type="datetimeFigureOut">
               <a:rPr lang="en-US" smtClean="0"/>
-              <a:t>5/7/26</a:t>
+              <a:t>5/11/26</a:t>
             </a:fld>
             <a:endParaRPr lang="en-US"/>
           </a:p>
@@ -3344,2576 +3350,1992 @@
           <a:chExt cx="0" cy="0"/>
         </a:xfrm>
       </p:grpSpPr>
-      <p:sp>
-        <p:nvSpPr>
-          <p:cNvPr id="4" name="Rounded Rectangle 3">
-            <a:extLst>
-              <a:ext uri="{FF2B5EF4-FFF2-40B4-BE49-F238E27FC236}">
-                <a16:creationId xmlns:a16="http://schemas.microsoft.com/office/drawing/2014/main" id="{42DE4D5E-57BB-AC43-1053-B566DBBAA88C}"/>
-              </a:ext>
-            </a:extLst>
-          </p:cNvPr>
-          <p:cNvSpPr/>
-          <p:nvPr/>
-        </p:nvSpPr>
-        <p:spPr>
-          <a:xfrm>
-            <a:off x="225912" y="1172583"/>
-            <a:ext cx="2667896" cy="5228213"/>
-          </a:xfrm>
-          <a:prstGeom prst="roundRect">
-            <a:avLst>
-              <a:gd name="adj" fmla="val 2957"/>
-            </a:avLst>
-          </a:prstGeom>
-          <a:solidFill>
-            <a:schemeClr val="bg2"/>
-          </a:solidFill>
-          <a:ln w="38100"/>
-        </p:spPr>
-        <p:style>
-          <a:lnRef idx="2">
-            <a:schemeClr val="accent1">
-              <a:shade val="15000"/>
-            </a:schemeClr>
-          </a:lnRef>
-          <a:fillRef idx="1">
-            <a:schemeClr val="accent1"/>
-          </a:fillRef>
-          <a:effectRef idx="0">
-            <a:schemeClr val="accent1"/>
-          </a:effectRef>
-          <a:fontRef idx="minor">
-            <a:schemeClr val="lt1"/>
-          </a:fontRef>
-        </p:style>
-        <p:txBody>
-          <a:bodyPr rtlCol="0" anchor="ctr"/>
-          <a:lstStyle/>
-          <a:p>
-            <a:pPr algn="ctr"/>
-            <a:endParaRPr lang="en-US"/>
-          </a:p>
-        </p:txBody>
-      </p:sp>
-      <p:sp>
-        <p:nvSpPr>
-          <p:cNvPr id="144" name="Rounded Rectangle 143">
-            <a:extLst>
-              <a:ext uri="{FF2B5EF4-FFF2-40B4-BE49-F238E27FC236}">
-                <a16:creationId xmlns:a16="http://schemas.microsoft.com/office/drawing/2014/main" id="{52F20055-F786-E773-F52A-1C7146149B65}"/>
-              </a:ext>
-            </a:extLst>
-          </p:cNvPr>
-          <p:cNvSpPr/>
-          <p:nvPr/>
-        </p:nvSpPr>
-        <p:spPr>
-          <a:xfrm>
-            <a:off x="3239846" y="1172582"/>
-            <a:ext cx="2667896" cy="5228213"/>
-          </a:xfrm>
-          <a:prstGeom prst="roundRect">
-            <a:avLst>
-              <a:gd name="adj" fmla="val 2957"/>
-            </a:avLst>
-          </a:prstGeom>
-          <a:solidFill>
-            <a:schemeClr val="bg2"/>
-          </a:solidFill>
-          <a:ln w="38100"/>
-        </p:spPr>
-        <p:style>
-          <a:lnRef idx="2">
-            <a:schemeClr val="accent1">
-              <a:shade val="15000"/>
-            </a:schemeClr>
-          </a:lnRef>
-          <a:fillRef idx="1">
-            <a:schemeClr val="accent1"/>
-          </a:fillRef>
-          <a:effectRef idx="0">
-            <a:schemeClr val="accent1"/>
-          </a:effectRef>
-          <a:fontRef idx="minor">
-            <a:schemeClr val="lt1"/>
-          </a:fontRef>
-        </p:style>
-        <p:txBody>
-          <a:bodyPr rtlCol="0" anchor="ctr"/>
-          <a:lstStyle/>
-          <a:p>
-            <a:pPr algn="ctr"/>
-            <a:endParaRPr lang="en-US"/>
-          </a:p>
-        </p:txBody>
-      </p:sp>
-      <p:sp>
-        <p:nvSpPr>
-          <p:cNvPr id="145" name="Rounded Rectangle 144">
-            <a:extLst>
-              <a:ext uri="{FF2B5EF4-FFF2-40B4-BE49-F238E27FC236}">
-                <a16:creationId xmlns:a16="http://schemas.microsoft.com/office/drawing/2014/main" id="{0D554BFB-E3C6-E3C9-740C-E06504937DEC}"/>
-              </a:ext>
-            </a:extLst>
-          </p:cNvPr>
-          <p:cNvSpPr/>
-          <p:nvPr/>
-        </p:nvSpPr>
-        <p:spPr>
-          <a:xfrm>
-            <a:off x="6253780" y="1172581"/>
-            <a:ext cx="2667896" cy="5228213"/>
-          </a:xfrm>
-          <a:prstGeom prst="roundRect">
-            <a:avLst>
-              <a:gd name="adj" fmla="val 2957"/>
-            </a:avLst>
-          </a:prstGeom>
-          <a:solidFill>
-            <a:schemeClr val="bg2"/>
-          </a:solidFill>
-          <a:ln w="38100"/>
-        </p:spPr>
-        <p:style>
-          <a:lnRef idx="2">
-            <a:schemeClr val="accent1">
-              <a:shade val="15000"/>
-            </a:schemeClr>
-          </a:lnRef>
-          <a:fillRef idx="1">
-            <a:schemeClr val="accent1"/>
-          </a:fillRef>
-          <a:effectRef idx="0">
-            <a:schemeClr val="accent1"/>
-          </a:effectRef>
-          <a:fontRef idx="minor">
-            <a:schemeClr val="lt1"/>
-          </a:fontRef>
-        </p:style>
-        <p:txBody>
-          <a:bodyPr rtlCol="0" anchor="ctr"/>
-          <a:lstStyle/>
-          <a:p>
-            <a:pPr algn="ctr"/>
-            <a:endParaRPr lang="en-US"/>
-          </a:p>
-        </p:txBody>
-      </p:sp>
-      <p:sp>
-        <p:nvSpPr>
-          <p:cNvPr id="146" name="Rounded Rectangle 145">
-            <a:extLst>
-              <a:ext uri="{FF2B5EF4-FFF2-40B4-BE49-F238E27FC236}">
-                <a16:creationId xmlns:a16="http://schemas.microsoft.com/office/drawing/2014/main" id="{8FFE7B53-D28E-CDC6-1C2C-5A86E5B6E2DC}"/>
-              </a:ext>
-            </a:extLst>
-          </p:cNvPr>
-          <p:cNvSpPr/>
-          <p:nvPr/>
-        </p:nvSpPr>
-        <p:spPr>
-          <a:xfrm>
-            <a:off x="9267714" y="1172581"/>
-            <a:ext cx="2667896" cy="5228213"/>
-          </a:xfrm>
-          <a:prstGeom prst="roundRect">
-            <a:avLst>
-              <a:gd name="adj" fmla="val 2957"/>
-            </a:avLst>
-          </a:prstGeom>
-          <a:solidFill>
-            <a:schemeClr val="bg2"/>
-          </a:solidFill>
-          <a:ln w="38100"/>
-        </p:spPr>
-        <p:style>
-          <a:lnRef idx="2">
-            <a:schemeClr val="accent1">
-              <a:shade val="15000"/>
-            </a:schemeClr>
-          </a:lnRef>
-          <a:fillRef idx="1">
-            <a:schemeClr val="accent1"/>
-          </a:fillRef>
-          <a:effectRef idx="0">
-            <a:schemeClr val="accent1"/>
-          </a:effectRef>
-          <a:fontRef idx="minor">
-            <a:schemeClr val="lt1"/>
-          </a:fontRef>
-        </p:style>
-        <p:txBody>
-          <a:bodyPr rtlCol="0" anchor="ctr"/>
-          <a:lstStyle/>
-          <a:p>
-            <a:pPr algn="ctr"/>
-            <a:endParaRPr lang="en-US"/>
-          </a:p>
-        </p:txBody>
-      </p:sp>
-      <p:sp>
-        <p:nvSpPr>
-          <p:cNvPr id="11" name="TextBox 10">
-            <a:extLst>
-              <a:ext uri="{FF2B5EF4-FFF2-40B4-BE49-F238E27FC236}">
-                <a16:creationId xmlns:a16="http://schemas.microsoft.com/office/drawing/2014/main" id="{AAEE1F89-D019-8E7E-CC55-2567202B6A94}"/>
-              </a:ext>
-            </a:extLst>
-          </p:cNvPr>
-          <p:cNvSpPr txBox="1"/>
-          <p:nvPr/>
-        </p:nvSpPr>
-        <p:spPr>
-          <a:xfrm>
-            <a:off x="786251" y="649363"/>
-            <a:ext cx="1547218" cy="523220"/>
-          </a:xfrm>
-          <a:prstGeom prst="rect">
-            <a:avLst/>
-          </a:prstGeom>
-          <a:noFill/>
-        </p:spPr>
-        <p:txBody>
-          <a:bodyPr wrap="none" rtlCol="0">
-            <a:spAutoFit/>
-          </a:bodyPr>
-          <a:lstStyle/>
-          <a:p>
-            <a:r>
-              <a:rPr lang="en-US" sz="2800" dirty="0"/>
-              <a:t>A3 North</a:t>
-            </a:r>
-          </a:p>
-        </p:txBody>
-      </p:sp>
-      <p:sp>
-        <p:nvSpPr>
-          <p:cNvPr id="12" name="TextBox 11">
-            <a:extLst>
-              <a:ext uri="{FF2B5EF4-FFF2-40B4-BE49-F238E27FC236}">
-                <a16:creationId xmlns:a16="http://schemas.microsoft.com/office/drawing/2014/main" id="{2D37B6F6-3142-6107-53DB-4F17E0B5F2B1}"/>
-              </a:ext>
-            </a:extLst>
-          </p:cNvPr>
-          <p:cNvSpPr txBox="1"/>
-          <p:nvPr/>
-        </p:nvSpPr>
-        <p:spPr>
-          <a:xfrm>
-            <a:off x="6773868" y="649363"/>
-            <a:ext cx="1552028" cy="523220"/>
-          </a:xfrm>
-          <a:prstGeom prst="rect">
-            <a:avLst/>
-          </a:prstGeom>
-          <a:noFill/>
-        </p:spPr>
-        <p:txBody>
-          <a:bodyPr wrap="none" rtlCol="0">
-            <a:spAutoFit/>
-          </a:bodyPr>
-          <a:lstStyle/>
-          <a:p>
-            <a:r>
-              <a:rPr lang="en-US" sz="2800" dirty="0"/>
-              <a:t>B3 North</a:t>
-            </a:r>
-          </a:p>
-        </p:txBody>
-      </p:sp>
-      <p:sp>
-        <p:nvSpPr>
-          <p:cNvPr id="13" name="TextBox 12">
-            <a:extLst>
-              <a:ext uri="{FF2B5EF4-FFF2-40B4-BE49-F238E27FC236}">
-                <a16:creationId xmlns:a16="http://schemas.microsoft.com/office/drawing/2014/main" id="{5874083D-A6A6-359F-55E6-94839F03070E}"/>
-              </a:ext>
-            </a:extLst>
-          </p:cNvPr>
-          <p:cNvSpPr txBox="1"/>
-          <p:nvPr/>
-        </p:nvSpPr>
-        <p:spPr>
-          <a:xfrm>
-            <a:off x="3714247" y="649363"/>
-            <a:ext cx="1582484" cy="523220"/>
-          </a:xfrm>
-          <a:prstGeom prst="rect">
-            <a:avLst/>
-          </a:prstGeom>
-          <a:noFill/>
-        </p:spPr>
-        <p:txBody>
-          <a:bodyPr wrap="none" rtlCol="0">
-            <a:spAutoFit/>
-          </a:bodyPr>
-          <a:lstStyle/>
-          <a:p>
-            <a:r>
-              <a:rPr lang="en-US" sz="2800" dirty="0"/>
-              <a:t>B3 South</a:t>
-            </a:r>
-          </a:p>
-        </p:txBody>
-      </p:sp>
-      <p:sp>
-        <p:nvSpPr>
-          <p:cNvPr id="14" name="TextBox 13">
-            <a:extLst>
-              <a:ext uri="{FF2B5EF4-FFF2-40B4-BE49-F238E27FC236}">
-                <a16:creationId xmlns:a16="http://schemas.microsoft.com/office/drawing/2014/main" id="{6E4C9CBB-941E-E271-2170-6593C098ADB6}"/>
-              </a:ext>
-            </a:extLst>
-          </p:cNvPr>
-          <p:cNvSpPr txBox="1"/>
-          <p:nvPr/>
-        </p:nvSpPr>
-        <p:spPr>
-          <a:xfrm>
-            <a:off x="9742013" y="649363"/>
-            <a:ext cx="1577676" cy="523220"/>
-          </a:xfrm>
-          <a:prstGeom prst="rect">
-            <a:avLst/>
-          </a:prstGeom>
-          <a:noFill/>
-        </p:spPr>
-        <p:txBody>
-          <a:bodyPr wrap="none" rtlCol="0">
-            <a:spAutoFit/>
-          </a:bodyPr>
-          <a:lstStyle/>
-          <a:p>
-            <a:r>
-              <a:rPr lang="en-US" sz="2800" dirty="0"/>
-              <a:t>A3 South</a:t>
-            </a:r>
-          </a:p>
-        </p:txBody>
-      </p:sp>
-      <p:cxnSp>
-        <p:nvCxnSpPr>
-          <p:cNvPr id="23" name="Straight Connector 22">
-            <a:extLst>
-              <a:ext uri="{FF2B5EF4-FFF2-40B4-BE49-F238E27FC236}">
-                <a16:creationId xmlns:a16="http://schemas.microsoft.com/office/drawing/2014/main" id="{1BEF9433-03AC-D6B3-A3B6-38D7FD92F7F8}"/>
-              </a:ext>
-            </a:extLst>
-          </p:cNvPr>
-          <p:cNvCxnSpPr/>
-          <p:nvPr/>
-        </p:nvCxnSpPr>
-        <p:spPr>
-          <a:xfrm>
-            <a:off x="3239846" y="1916653"/>
-            <a:ext cx="2667896" cy="0"/>
-          </a:xfrm>
-          <a:prstGeom prst="line">
-            <a:avLst/>
-          </a:prstGeom>
-          <a:ln w="34925">
+      <p:grpSp>
+        <p:nvGrpSpPr>
+          <p:cNvPr id="16" name="Group 15">
+            <a:extLst>
+              <a:ext uri="{FF2B5EF4-FFF2-40B4-BE49-F238E27FC236}">
+                <a16:creationId xmlns:a16="http://schemas.microsoft.com/office/drawing/2014/main" id="{7FDD478E-B191-BEBF-B7F5-500E150B8800}"/>
+              </a:ext>
+            </a:extLst>
+          </p:cNvPr>
+          <p:cNvGrpSpPr/>
+          <p:nvPr/>
+        </p:nvGrpSpPr>
+        <p:grpSpPr>
+          <a:xfrm>
+            <a:off x="225912" y="649363"/>
+            <a:ext cx="14891756" cy="5751433"/>
+            <a:chOff x="225912" y="649363"/>
+            <a:chExt cx="14891756" cy="5751433"/>
+          </a:xfrm>
+        </p:grpSpPr>
+        <p:sp>
+          <p:nvSpPr>
+            <p:cNvPr id="4" name="Rounded Rectangle 3">
+              <a:extLst>
+                <a:ext uri="{FF2B5EF4-FFF2-40B4-BE49-F238E27FC236}">
+                  <a16:creationId xmlns:a16="http://schemas.microsoft.com/office/drawing/2014/main" id="{42DE4D5E-57BB-AC43-1053-B566DBBAA88C}"/>
+                </a:ext>
+              </a:extLst>
+            </p:cNvPr>
+            <p:cNvSpPr/>
+            <p:nvPr/>
+          </p:nvSpPr>
+          <p:spPr>
+            <a:xfrm>
+              <a:off x="225912" y="1172583"/>
+              <a:ext cx="2667896" cy="5228213"/>
+            </a:xfrm>
+            <a:prstGeom prst="roundRect">
+              <a:avLst>
+                <a:gd name="adj" fmla="val 2957"/>
+              </a:avLst>
+            </a:prstGeom>
             <a:solidFill>
+              <a:schemeClr val="bg2"/>
+            </a:solidFill>
+            <a:ln w="38100"/>
+          </p:spPr>
+          <p:style>
+            <a:lnRef idx="2">
+              <a:schemeClr val="accent1">
+                <a:shade val="15000"/>
+              </a:schemeClr>
+            </a:lnRef>
+            <a:fillRef idx="1">
+              <a:schemeClr val="accent1"/>
+            </a:fillRef>
+            <a:effectRef idx="0">
+              <a:schemeClr val="accent1"/>
+            </a:effectRef>
+            <a:fontRef idx="minor">
+              <a:schemeClr val="lt1"/>
+            </a:fontRef>
+          </p:style>
+          <p:txBody>
+            <a:bodyPr rtlCol="0" anchor="ctr"/>
+            <a:lstStyle/>
+            <a:p>
+              <a:pPr algn="ctr"/>
+              <a:endParaRPr lang="en-US"/>
+            </a:p>
+          </p:txBody>
+        </p:sp>
+        <p:sp>
+          <p:nvSpPr>
+            <p:cNvPr id="144" name="Rounded Rectangle 143">
+              <a:extLst>
+                <a:ext uri="{FF2B5EF4-FFF2-40B4-BE49-F238E27FC236}">
+                  <a16:creationId xmlns:a16="http://schemas.microsoft.com/office/drawing/2014/main" id="{52F20055-F786-E773-F52A-1C7146149B65}"/>
+                </a:ext>
+              </a:extLst>
+            </p:cNvPr>
+            <p:cNvSpPr/>
+            <p:nvPr/>
+          </p:nvSpPr>
+          <p:spPr>
+            <a:xfrm>
+              <a:off x="3239846" y="1172582"/>
+              <a:ext cx="2667896" cy="5228213"/>
+            </a:xfrm>
+            <a:prstGeom prst="roundRect">
+              <a:avLst>
+                <a:gd name="adj" fmla="val 2957"/>
+              </a:avLst>
+            </a:prstGeom>
+            <a:solidFill>
+              <a:schemeClr val="bg2"/>
+            </a:solidFill>
+            <a:ln w="38100"/>
+          </p:spPr>
+          <p:style>
+            <a:lnRef idx="2">
+              <a:schemeClr val="accent1">
+                <a:shade val="15000"/>
+              </a:schemeClr>
+            </a:lnRef>
+            <a:fillRef idx="1">
+              <a:schemeClr val="accent1"/>
+            </a:fillRef>
+            <a:effectRef idx="0">
+              <a:schemeClr val="accent1"/>
+            </a:effectRef>
+            <a:fontRef idx="minor">
+              <a:schemeClr val="lt1"/>
+            </a:fontRef>
+          </p:style>
+          <p:txBody>
+            <a:bodyPr rtlCol="0" anchor="ctr"/>
+            <a:lstStyle/>
+            <a:p>
+              <a:pPr algn="ctr"/>
+              <a:endParaRPr lang="en-US"/>
+            </a:p>
+          </p:txBody>
+        </p:sp>
+        <p:sp>
+          <p:nvSpPr>
+            <p:cNvPr id="145" name="Rounded Rectangle 144">
+              <a:extLst>
+                <a:ext uri="{FF2B5EF4-FFF2-40B4-BE49-F238E27FC236}">
+                  <a16:creationId xmlns:a16="http://schemas.microsoft.com/office/drawing/2014/main" id="{0D554BFB-E3C6-E3C9-740C-E06504937DEC}"/>
+                </a:ext>
+              </a:extLst>
+            </p:cNvPr>
+            <p:cNvSpPr/>
+            <p:nvPr/>
+          </p:nvSpPr>
+          <p:spPr>
+            <a:xfrm>
+              <a:off x="6253780" y="1172581"/>
+              <a:ext cx="2667896" cy="5228213"/>
+            </a:xfrm>
+            <a:prstGeom prst="roundRect">
+              <a:avLst>
+                <a:gd name="adj" fmla="val 2957"/>
+              </a:avLst>
+            </a:prstGeom>
+            <a:solidFill>
+              <a:schemeClr val="bg2"/>
+            </a:solidFill>
+            <a:ln w="38100"/>
+          </p:spPr>
+          <p:style>
+            <a:lnRef idx="2">
+              <a:schemeClr val="accent1">
+                <a:shade val="15000"/>
+              </a:schemeClr>
+            </a:lnRef>
+            <a:fillRef idx="1">
+              <a:schemeClr val="accent1"/>
+            </a:fillRef>
+            <a:effectRef idx="0">
+              <a:schemeClr val="accent1"/>
+            </a:effectRef>
+            <a:fontRef idx="minor">
+              <a:schemeClr val="lt1"/>
+            </a:fontRef>
+          </p:style>
+          <p:txBody>
+            <a:bodyPr rtlCol="0" anchor="ctr"/>
+            <a:lstStyle/>
+            <a:p>
+              <a:pPr algn="ctr"/>
+              <a:endParaRPr lang="en-US"/>
+            </a:p>
+          </p:txBody>
+        </p:sp>
+        <p:sp>
+          <p:nvSpPr>
+            <p:cNvPr id="146" name="Rounded Rectangle 145">
+              <a:extLst>
+                <a:ext uri="{FF2B5EF4-FFF2-40B4-BE49-F238E27FC236}">
+                  <a16:creationId xmlns:a16="http://schemas.microsoft.com/office/drawing/2014/main" id="{8FFE7B53-D28E-CDC6-1C2C-5A86E5B6E2DC}"/>
+                </a:ext>
+              </a:extLst>
+            </p:cNvPr>
+            <p:cNvSpPr/>
+            <p:nvPr/>
+          </p:nvSpPr>
+          <p:spPr>
+            <a:xfrm>
+              <a:off x="9267714" y="1172581"/>
+              <a:ext cx="2667896" cy="5228213"/>
+            </a:xfrm>
+            <a:prstGeom prst="roundRect">
+              <a:avLst>
+                <a:gd name="adj" fmla="val 2957"/>
+              </a:avLst>
+            </a:prstGeom>
+            <a:solidFill>
+              <a:schemeClr val="bg2"/>
+            </a:solidFill>
+            <a:ln w="38100"/>
+          </p:spPr>
+          <p:style>
+            <a:lnRef idx="2">
+              <a:schemeClr val="accent1">
+                <a:shade val="15000"/>
+              </a:schemeClr>
+            </a:lnRef>
+            <a:fillRef idx="1">
+              <a:schemeClr val="accent1"/>
+            </a:fillRef>
+            <a:effectRef idx="0">
+              <a:schemeClr val="accent1"/>
+            </a:effectRef>
+            <a:fontRef idx="minor">
+              <a:schemeClr val="lt1"/>
+            </a:fontRef>
+          </p:style>
+          <p:txBody>
+            <a:bodyPr rtlCol="0" anchor="ctr"/>
+            <a:lstStyle/>
+            <a:p>
+              <a:pPr algn="ctr"/>
+              <a:endParaRPr lang="en-US"/>
+            </a:p>
+          </p:txBody>
+        </p:sp>
+        <p:sp>
+          <p:nvSpPr>
+            <p:cNvPr id="11" name="TextBox 10">
+              <a:extLst>
+                <a:ext uri="{FF2B5EF4-FFF2-40B4-BE49-F238E27FC236}">
+                  <a16:creationId xmlns:a16="http://schemas.microsoft.com/office/drawing/2014/main" id="{AAEE1F89-D019-8E7E-CC55-2567202B6A94}"/>
+                </a:ext>
+              </a:extLst>
+            </p:cNvPr>
+            <p:cNvSpPr txBox="1"/>
+            <p:nvPr/>
+          </p:nvSpPr>
+          <p:spPr>
+            <a:xfrm>
+              <a:off x="786251" y="649363"/>
+              <a:ext cx="1547218" cy="523220"/>
+            </a:xfrm>
+            <a:prstGeom prst="rect">
+              <a:avLst/>
+            </a:prstGeom>
+            <a:noFill/>
+          </p:spPr>
+          <p:txBody>
+            <a:bodyPr wrap="none" rtlCol="0">
+              <a:spAutoFit/>
+            </a:bodyPr>
+            <a:lstStyle/>
+            <a:p>
+              <a:r>
+                <a:rPr lang="en-US" sz="2800" dirty="0"/>
+                <a:t>A3 North</a:t>
+              </a:r>
+            </a:p>
+          </p:txBody>
+        </p:sp>
+        <p:sp>
+          <p:nvSpPr>
+            <p:cNvPr id="12" name="TextBox 11">
+              <a:extLst>
+                <a:ext uri="{FF2B5EF4-FFF2-40B4-BE49-F238E27FC236}">
+                  <a16:creationId xmlns:a16="http://schemas.microsoft.com/office/drawing/2014/main" id="{2D37B6F6-3142-6107-53DB-4F17E0B5F2B1}"/>
+                </a:ext>
+              </a:extLst>
+            </p:cNvPr>
+            <p:cNvSpPr txBox="1"/>
+            <p:nvPr/>
+          </p:nvSpPr>
+          <p:spPr>
+            <a:xfrm>
+              <a:off x="6773868" y="649363"/>
+              <a:ext cx="1552028" cy="523220"/>
+            </a:xfrm>
+            <a:prstGeom prst="rect">
+              <a:avLst/>
+            </a:prstGeom>
+            <a:noFill/>
+          </p:spPr>
+          <p:txBody>
+            <a:bodyPr wrap="none" rtlCol="0">
+              <a:spAutoFit/>
+            </a:bodyPr>
+            <a:lstStyle/>
+            <a:p>
+              <a:r>
+                <a:rPr lang="en-US" sz="2800" dirty="0"/>
+                <a:t>B3 North</a:t>
+              </a:r>
+            </a:p>
+          </p:txBody>
+        </p:sp>
+        <p:sp>
+          <p:nvSpPr>
+            <p:cNvPr id="13" name="TextBox 12">
+              <a:extLst>
+                <a:ext uri="{FF2B5EF4-FFF2-40B4-BE49-F238E27FC236}">
+                  <a16:creationId xmlns:a16="http://schemas.microsoft.com/office/drawing/2014/main" id="{5874083D-A6A6-359F-55E6-94839F03070E}"/>
+                </a:ext>
+              </a:extLst>
+            </p:cNvPr>
+            <p:cNvSpPr txBox="1"/>
+            <p:nvPr/>
+          </p:nvSpPr>
+          <p:spPr>
+            <a:xfrm>
+              <a:off x="3714247" y="649363"/>
+              <a:ext cx="1582484" cy="523220"/>
+            </a:xfrm>
+            <a:prstGeom prst="rect">
+              <a:avLst/>
+            </a:prstGeom>
+            <a:noFill/>
+          </p:spPr>
+          <p:txBody>
+            <a:bodyPr wrap="none" rtlCol="0">
+              <a:spAutoFit/>
+            </a:bodyPr>
+            <a:lstStyle/>
+            <a:p>
+              <a:r>
+                <a:rPr lang="en-US" sz="2800" dirty="0"/>
+                <a:t>B3 South</a:t>
+              </a:r>
+            </a:p>
+          </p:txBody>
+        </p:sp>
+        <p:sp>
+          <p:nvSpPr>
+            <p:cNvPr id="14" name="TextBox 13">
+              <a:extLst>
+                <a:ext uri="{FF2B5EF4-FFF2-40B4-BE49-F238E27FC236}">
+                  <a16:creationId xmlns:a16="http://schemas.microsoft.com/office/drawing/2014/main" id="{6E4C9CBB-941E-E271-2170-6593C098ADB6}"/>
+                </a:ext>
+              </a:extLst>
+            </p:cNvPr>
+            <p:cNvSpPr txBox="1"/>
+            <p:nvPr/>
+          </p:nvSpPr>
+          <p:spPr>
+            <a:xfrm>
+              <a:off x="9742013" y="649363"/>
+              <a:ext cx="1577676" cy="523220"/>
+            </a:xfrm>
+            <a:prstGeom prst="rect">
+              <a:avLst/>
+            </a:prstGeom>
+            <a:noFill/>
+          </p:spPr>
+          <p:txBody>
+            <a:bodyPr wrap="none" rtlCol="0">
+              <a:spAutoFit/>
+            </a:bodyPr>
+            <a:lstStyle/>
+            <a:p>
+              <a:r>
+                <a:rPr lang="en-US" sz="2800" dirty="0"/>
+                <a:t>A3 South</a:t>
+              </a:r>
+            </a:p>
+          </p:txBody>
+        </p:sp>
+        <p:cxnSp>
+          <p:nvCxnSpPr>
+            <p:cNvPr id="23" name="Straight Connector 22">
+              <a:extLst>
+                <a:ext uri="{FF2B5EF4-FFF2-40B4-BE49-F238E27FC236}">
+                  <a16:creationId xmlns:a16="http://schemas.microsoft.com/office/drawing/2014/main" id="{1BEF9433-03AC-D6B3-A3B6-38D7FD92F7F8}"/>
+                </a:ext>
+              </a:extLst>
+            </p:cNvPr>
+            <p:cNvCxnSpPr/>
+            <p:nvPr/>
+          </p:nvCxnSpPr>
+          <p:spPr>
+            <a:xfrm>
+              <a:off x="3239846" y="1916653"/>
+              <a:ext cx="2667896" cy="0"/>
+            </a:xfrm>
+            <a:prstGeom prst="line">
+              <a:avLst/>
+            </a:prstGeom>
+            <a:ln w="34925">
+              <a:solidFill>
+                <a:schemeClr val="tx1"/>
+              </a:solidFill>
+              <a:prstDash val="dash"/>
+            </a:ln>
+          </p:spPr>
+          <p:style>
+            <a:lnRef idx="2">
+              <a:schemeClr val="accent1"/>
+            </a:lnRef>
+            <a:fillRef idx="0">
+              <a:schemeClr val="accent1"/>
+            </a:fillRef>
+            <a:effectRef idx="1">
+              <a:schemeClr val="accent1"/>
+            </a:effectRef>
+            <a:fontRef idx="minor">
               <a:schemeClr val="tx1"/>
+            </a:fontRef>
+          </p:style>
+        </p:cxnSp>
+        <p:cxnSp>
+          <p:nvCxnSpPr>
+            <p:cNvPr id="32" name="Straight Connector 31">
+              <a:extLst>
+                <a:ext uri="{FF2B5EF4-FFF2-40B4-BE49-F238E27FC236}">
+                  <a16:creationId xmlns:a16="http://schemas.microsoft.com/office/drawing/2014/main" id="{7E0D07E9-5C9D-B412-BCED-1F0849BA94C1}"/>
+                </a:ext>
+              </a:extLst>
+            </p:cNvPr>
+            <p:cNvCxnSpPr/>
+            <p:nvPr/>
+          </p:nvCxnSpPr>
+          <p:spPr>
+            <a:xfrm>
+              <a:off x="6253780" y="1909480"/>
+              <a:ext cx="2667896" cy="0"/>
+            </a:xfrm>
+            <a:prstGeom prst="line">
+              <a:avLst/>
+            </a:prstGeom>
+            <a:ln w="34925">
+              <a:solidFill>
+                <a:schemeClr val="tx1"/>
+              </a:solidFill>
+              <a:prstDash val="dash"/>
+            </a:ln>
+          </p:spPr>
+          <p:style>
+            <a:lnRef idx="2">
+              <a:schemeClr val="accent1"/>
+            </a:lnRef>
+            <a:fillRef idx="0">
+              <a:schemeClr val="accent1"/>
+            </a:fillRef>
+            <a:effectRef idx="1">
+              <a:schemeClr val="accent1"/>
+            </a:effectRef>
+            <a:fontRef idx="minor">
+              <a:schemeClr val="tx1"/>
+            </a:fontRef>
+          </p:style>
+        </p:cxnSp>
+        <p:cxnSp>
+          <p:nvCxnSpPr>
+            <p:cNvPr id="33" name="Straight Connector 32">
+              <a:extLst>
+                <a:ext uri="{FF2B5EF4-FFF2-40B4-BE49-F238E27FC236}">
+                  <a16:creationId xmlns:a16="http://schemas.microsoft.com/office/drawing/2014/main" id="{0A6B6FB1-6B06-D93C-DA48-2B45E93F2615}"/>
+                </a:ext>
+              </a:extLst>
+            </p:cNvPr>
+            <p:cNvCxnSpPr/>
+            <p:nvPr/>
+          </p:nvCxnSpPr>
+          <p:spPr>
+            <a:xfrm>
+              <a:off x="9267714" y="1895134"/>
+              <a:ext cx="2667896" cy="0"/>
+            </a:xfrm>
+            <a:prstGeom prst="line">
+              <a:avLst/>
+            </a:prstGeom>
+            <a:ln w="34925">
+              <a:solidFill>
+                <a:schemeClr val="tx1"/>
+              </a:solidFill>
+              <a:prstDash val="dash"/>
+            </a:ln>
+          </p:spPr>
+          <p:style>
+            <a:lnRef idx="2">
+              <a:schemeClr val="accent1"/>
+            </a:lnRef>
+            <a:fillRef idx="0">
+              <a:schemeClr val="accent1"/>
+            </a:fillRef>
+            <a:effectRef idx="1">
+              <a:schemeClr val="accent1"/>
+            </a:effectRef>
+            <a:fontRef idx="minor">
+              <a:schemeClr val="tx1"/>
+            </a:fontRef>
+          </p:style>
+        </p:cxnSp>
+        <p:pic>
+          <p:nvPicPr>
+            <p:cNvPr id="38" name="Graphic 37" descr="Sleep with solid fill">
+              <a:extLst>
+                <a:ext uri="{FF2B5EF4-FFF2-40B4-BE49-F238E27FC236}">
+                  <a16:creationId xmlns:a16="http://schemas.microsoft.com/office/drawing/2014/main" id="{FBEF3889-0D1A-A48A-FF05-07C6710102AC}"/>
+                </a:ext>
+              </a:extLst>
+            </p:cNvPr>
+            <p:cNvPicPr>
+              <a:picLocks noChangeAspect="1"/>
+            </p:cNvPicPr>
+            <p:nvPr/>
+          </p:nvPicPr>
+          <p:blipFill>
+            <a:blip>
+              <a:extLst>
+                <a:ext uri="{96DAC541-7B7A-43D3-8B79-37D633B846F1}">
+                  <asvg:svgBlip xmlns:asvg="http://schemas.microsoft.com/office/drawing/2016/SVG/main" r:embed="rId2"/>
+                </a:ext>
+              </a:extLst>
+            </a:blip>
+            <a:srcRect/>
+            <a:stretch/>
+          </p:blipFill>
+          <p:spPr>
+            <a:xfrm>
+              <a:off x="709596" y="3929217"/>
+              <a:ext cx="634696" cy="634696"/>
+            </a:xfrm>
+            <a:prstGeom prst="rect">
+              <a:avLst/>
+            </a:prstGeom>
+          </p:spPr>
+        </p:pic>
+        <p:pic>
+          <p:nvPicPr>
+            <p:cNvPr id="39" name="Graphic 38" descr="Sleep with solid fill">
+              <a:extLst>
+                <a:ext uri="{FF2B5EF4-FFF2-40B4-BE49-F238E27FC236}">
+                  <a16:creationId xmlns:a16="http://schemas.microsoft.com/office/drawing/2014/main" id="{0C30D739-8C69-6D75-2839-A9CE16256E07}"/>
+                </a:ext>
+              </a:extLst>
+            </p:cNvPr>
+            <p:cNvPicPr>
+              <a:picLocks noChangeAspect="1"/>
+            </p:cNvPicPr>
+            <p:nvPr/>
+          </p:nvPicPr>
+          <p:blipFill>
+            <a:blip>
+              <a:extLst>
+                <a:ext uri="{96DAC541-7B7A-43D3-8B79-37D633B846F1}">
+                  <asvg:svgBlip xmlns:asvg="http://schemas.microsoft.com/office/drawing/2016/SVG/main" r:embed="rId2"/>
+                </a:ext>
+              </a:extLst>
+            </a:blip>
+            <a:srcRect/>
+            <a:stretch/>
+          </p:blipFill>
+          <p:spPr>
+            <a:xfrm>
+              <a:off x="1775428" y="3929217"/>
+              <a:ext cx="634696" cy="634696"/>
+            </a:xfrm>
+            <a:prstGeom prst="rect">
+              <a:avLst/>
+            </a:prstGeom>
+          </p:spPr>
+        </p:pic>
+        <p:pic>
+          <p:nvPicPr>
+            <p:cNvPr id="42" name="Graphic 41" descr="Sleep with solid fill">
+              <a:extLst>
+                <a:ext uri="{FF2B5EF4-FFF2-40B4-BE49-F238E27FC236}">
+                  <a16:creationId xmlns:a16="http://schemas.microsoft.com/office/drawing/2014/main" id="{C3315AB8-5857-66EF-AC9C-731A31F7C6B6}"/>
+                </a:ext>
+              </a:extLst>
+            </p:cNvPr>
+            <p:cNvPicPr>
+              <a:picLocks noChangeAspect="1"/>
+            </p:cNvPicPr>
+            <p:nvPr/>
+          </p:nvPicPr>
+          <p:blipFill>
+            <a:blip>
+              <a:extLst>
+                <a:ext uri="{96DAC541-7B7A-43D3-8B79-37D633B846F1}">
+                  <asvg:svgBlip xmlns:asvg="http://schemas.microsoft.com/office/drawing/2016/SVG/main" r:embed="rId2"/>
+                </a:ext>
+              </a:extLst>
+            </a:blip>
+            <a:srcRect/>
+            <a:stretch/>
+          </p:blipFill>
+          <p:spPr>
+            <a:xfrm>
+              <a:off x="709596" y="4768306"/>
+              <a:ext cx="634696" cy="634696"/>
+            </a:xfrm>
+            <a:prstGeom prst="rect">
+              <a:avLst/>
+            </a:prstGeom>
+          </p:spPr>
+        </p:pic>
+        <p:pic>
+          <p:nvPicPr>
+            <p:cNvPr id="43" name="Graphic 42" descr="Sleep with solid fill">
+              <a:extLst>
+                <a:ext uri="{FF2B5EF4-FFF2-40B4-BE49-F238E27FC236}">
+                  <a16:creationId xmlns:a16="http://schemas.microsoft.com/office/drawing/2014/main" id="{CDDE2129-A6A9-D115-59D4-13173CF8DDA7}"/>
+                </a:ext>
+              </a:extLst>
+            </p:cNvPr>
+            <p:cNvPicPr>
+              <a:picLocks noChangeAspect="1"/>
+            </p:cNvPicPr>
+            <p:nvPr/>
+          </p:nvPicPr>
+          <p:blipFill>
+            <a:blip>
+              <a:extLst>
+                <a:ext uri="{96DAC541-7B7A-43D3-8B79-37D633B846F1}">
+                  <asvg:svgBlip xmlns:asvg="http://schemas.microsoft.com/office/drawing/2016/SVG/main" r:embed="rId2"/>
+                </a:ext>
+              </a:extLst>
+            </a:blip>
+            <a:srcRect/>
+            <a:stretch/>
+          </p:blipFill>
+          <p:spPr>
+            <a:xfrm>
+              <a:off x="1775428" y="4768306"/>
+              <a:ext cx="634696" cy="634696"/>
+            </a:xfrm>
+            <a:prstGeom prst="rect">
+              <a:avLst/>
+            </a:prstGeom>
+          </p:spPr>
+        </p:pic>
+        <p:pic>
+          <p:nvPicPr>
+            <p:cNvPr id="55" name="Graphic 54" descr="Sleep with solid fill">
+              <a:extLst>
+                <a:ext uri="{FF2B5EF4-FFF2-40B4-BE49-F238E27FC236}">
+                  <a16:creationId xmlns:a16="http://schemas.microsoft.com/office/drawing/2014/main" id="{AE93AA88-5FE7-A84B-8EF3-DD4F40DF687D}"/>
+                </a:ext>
+              </a:extLst>
+            </p:cNvPr>
+            <p:cNvPicPr>
+              <a:picLocks noChangeAspect="1"/>
+            </p:cNvPicPr>
+            <p:nvPr/>
+          </p:nvPicPr>
+          <p:blipFill>
+            <a:blip>
+              <a:extLst>
+                <a:ext uri="{96DAC541-7B7A-43D3-8B79-37D633B846F1}">
+                  <asvg:svgBlip xmlns:asvg="http://schemas.microsoft.com/office/drawing/2016/SVG/main" r:embed="rId2"/>
+                </a:ext>
+              </a:extLst>
+            </a:blip>
+            <a:srcRect/>
+            <a:stretch/>
+          </p:blipFill>
+          <p:spPr>
+            <a:xfrm>
+              <a:off x="709596" y="1925641"/>
+              <a:ext cx="634696" cy="634696"/>
+            </a:xfrm>
+            <a:prstGeom prst="rect">
+              <a:avLst/>
+            </a:prstGeom>
+          </p:spPr>
+        </p:pic>
+        <p:pic>
+          <p:nvPicPr>
+            <p:cNvPr id="56" name="Graphic 55" descr="Sleep with solid fill">
+              <a:extLst>
+                <a:ext uri="{FF2B5EF4-FFF2-40B4-BE49-F238E27FC236}">
+                  <a16:creationId xmlns:a16="http://schemas.microsoft.com/office/drawing/2014/main" id="{5934E941-0BE2-65FD-6BFE-D07642B55034}"/>
+                </a:ext>
+              </a:extLst>
+            </p:cNvPr>
+            <p:cNvPicPr>
+              <a:picLocks noChangeAspect="1"/>
+            </p:cNvPicPr>
+            <p:nvPr/>
+          </p:nvPicPr>
+          <p:blipFill>
+            <a:blip>
+              <a:extLst>
+                <a:ext uri="{96DAC541-7B7A-43D3-8B79-37D633B846F1}">
+                  <asvg:svgBlip xmlns:asvg="http://schemas.microsoft.com/office/drawing/2016/SVG/main" r:embed="rId2"/>
+                </a:ext>
+              </a:extLst>
+            </a:blip>
+            <a:srcRect/>
+            <a:stretch/>
+          </p:blipFill>
+          <p:spPr>
+            <a:xfrm>
+              <a:off x="1775428" y="1925641"/>
+              <a:ext cx="634696" cy="634696"/>
+            </a:xfrm>
+            <a:prstGeom prst="rect">
+              <a:avLst/>
+            </a:prstGeom>
+          </p:spPr>
+        </p:pic>
+        <p:pic>
+          <p:nvPicPr>
+            <p:cNvPr id="57" name="Graphic 56" descr="Sleep with solid fill">
+              <a:extLst>
+                <a:ext uri="{FF2B5EF4-FFF2-40B4-BE49-F238E27FC236}">
+                  <a16:creationId xmlns:a16="http://schemas.microsoft.com/office/drawing/2014/main" id="{FE3EE6B8-E09C-535D-5FD7-73FC869A5EC7}"/>
+                </a:ext>
+              </a:extLst>
+            </p:cNvPr>
+            <p:cNvPicPr>
+              <a:picLocks noChangeAspect="1"/>
+            </p:cNvPicPr>
+            <p:nvPr/>
+          </p:nvPicPr>
+          <p:blipFill>
+            <a:blip>
+              <a:extLst>
+                <a:ext uri="{96DAC541-7B7A-43D3-8B79-37D633B846F1}">
+                  <asvg:svgBlip xmlns:asvg="http://schemas.microsoft.com/office/drawing/2016/SVG/main" r:embed="rId2"/>
+                </a:ext>
+              </a:extLst>
+            </a:blip>
+            <a:srcRect/>
+            <a:stretch/>
+          </p:blipFill>
+          <p:spPr>
+            <a:xfrm>
+              <a:off x="709596" y="2764730"/>
+              <a:ext cx="634696" cy="634696"/>
+            </a:xfrm>
+            <a:prstGeom prst="rect">
+              <a:avLst/>
+            </a:prstGeom>
+          </p:spPr>
+        </p:pic>
+        <p:pic>
+          <p:nvPicPr>
+            <p:cNvPr id="58" name="Graphic 57" descr="Sleep with solid fill">
+              <a:extLst>
+                <a:ext uri="{FF2B5EF4-FFF2-40B4-BE49-F238E27FC236}">
+                  <a16:creationId xmlns:a16="http://schemas.microsoft.com/office/drawing/2014/main" id="{50E8B439-85FE-D665-AC20-81E9C6BA7353}"/>
+                </a:ext>
+              </a:extLst>
+            </p:cNvPr>
+            <p:cNvPicPr>
+              <a:picLocks noChangeAspect="1"/>
+            </p:cNvPicPr>
+            <p:nvPr/>
+          </p:nvPicPr>
+          <p:blipFill>
+            <a:blip>
+              <a:extLst>
+                <a:ext uri="{96DAC541-7B7A-43D3-8B79-37D633B846F1}">
+                  <asvg:svgBlip xmlns:asvg="http://schemas.microsoft.com/office/drawing/2016/SVG/main" r:embed="rId2"/>
+                </a:ext>
+              </a:extLst>
+            </a:blip>
+            <a:srcRect/>
+            <a:stretch/>
+          </p:blipFill>
+          <p:spPr>
+            <a:xfrm>
+              <a:off x="1775428" y="2764730"/>
+              <a:ext cx="634696" cy="634696"/>
+            </a:xfrm>
+            <a:prstGeom prst="rect">
+              <a:avLst/>
+            </a:prstGeom>
+          </p:spPr>
+        </p:pic>
+        <p:pic>
+          <p:nvPicPr>
+            <p:cNvPr id="59" name="Graphic 58" descr="Sleep with solid fill">
+              <a:extLst>
+                <a:ext uri="{FF2B5EF4-FFF2-40B4-BE49-F238E27FC236}">
+                  <a16:creationId xmlns:a16="http://schemas.microsoft.com/office/drawing/2014/main" id="{2B70B3A1-B1B2-909D-A783-66CDF98ADDDA}"/>
+                </a:ext>
+              </a:extLst>
+            </p:cNvPr>
+            <p:cNvPicPr>
+              <a:picLocks noChangeAspect="1"/>
+            </p:cNvPicPr>
+            <p:nvPr/>
+          </p:nvPicPr>
+          <p:blipFill>
+            <a:blip>
+              <a:extLst>
+                <a:ext uri="{96DAC541-7B7A-43D3-8B79-37D633B846F1}">
+                  <asvg:svgBlip xmlns:asvg="http://schemas.microsoft.com/office/drawing/2016/SVG/main" r:embed="rId2"/>
+                </a:ext>
+              </a:extLst>
+            </a:blip>
+            <a:srcRect/>
+            <a:stretch/>
+          </p:blipFill>
+          <p:spPr>
+            <a:xfrm>
+              <a:off x="4256446" y="1265370"/>
+              <a:ext cx="634696" cy="634696"/>
+            </a:xfrm>
+            <a:prstGeom prst="rect">
+              <a:avLst/>
+            </a:prstGeom>
+          </p:spPr>
+        </p:pic>
+        <p:pic>
+          <p:nvPicPr>
+            <p:cNvPr id="60" name="Graphic 59" descr="Sleep with solid fill">
+              <a:extLst>
+                <a:ext uri="{FF2B5EF4-FFF2-40B4-BE49-F238E27FC236}">
+                  <a16:creationId xmlns:a16="http://schemas.microsoft.com/office/drawing/2014/main" id="{D95F6D61-AA43-F992-CB00-A74820EA4194}"/>
+                </a:ext>
+              </a:extLst>
+            </p:cNvPr>
+            <p:cNvPicPr>
+              <a:picLocks noChangeAspect="1"/>
+            </p:cNvPicPr>
+            <p:nvPr/>
+          </p:nvPicPr>
+          <p:blipFill>
+            <a:blip>
+              <a:extLst>
+                <a:ext uri="{96DAC541-7B7A-43D3-8B79-37D633B846F1}">
+                  <asvg:svgBlip xmlns:asvg="http://schemas.microsoft.com/office/drawing/2016/SVG/main" r:embed="rId2"/>
+                </a:ext>
+              </a:extLst>
+            </a:blip>
+            <a:srcRect/>
+            <a:stretch/>
+          </p:blipFill>
+          <p:spPr>
+            <a:xfrm>
+              <a:off x="7270380" y="1261784"/>
+              <a:ext cx="634696" cy="634696"/>
+            </a:xfrm>
+            <a:prstGeom prst="rect">
+              <a:avLst/>
+            </a:prstGeom>
+          </p:spPr>
+        </p:pic>
+        <p:pic>
+          <p:nvPicPr>
+            <p:cNvPr id="61" name="Graphic 60" descr="Sleep with solid fill">
+              <a:extLst>
+                <a:ext uri="{FF2B5EF4-FFF2-40B4-BE49-F238E27FC236}">
+                  <a16:creationId xmlns:a16="http://schemas.microsoft.com/office/drawing/2014/main" id="{AC4B699B-1EB0-FD3E-EDE1-C7B19E53033D}"/>
+                </a:ext>
+              </a:extLst>
+            </p:cNvPr>
+            <p:cNvPicPr>
+              <a:picLocks noChangeAspect="1"/>
+            </p:cNvPicPr>
+            <p:nvPr/>
+          </p:nvPicPr>
+          <p:blipFill>
+            <a:blip>
+              <a:extLst>
+                <a:ext uri="{96DAC541-7B7A-43D3-8B79-37D633B846F1}">
+                  <asvg:svgBlip xmlns:asvg="http://schemas.microsoft.com/office/drawing/2016/SVG/main" r:embed="rId2"/>
+                </a:ext>
+              </a:extLst>
+            </a:blip>
+            <a:srcRect/>
+            <a:stretch/>
+          </p:blipFill>
+          <p:spPr>
+            <a:xfrm>
+              <a:off x="10284314" y="1261784"/>
+              <a:ext cx="634696" cy="634696"/>
+            </a:xfrm>
+            <a:prstGeom prst="rect">
+              <a:avLst/>
+            </a:prstGeom>
+          </p:spPr>
+        </p:pic>
+        <p:pic>
+          <p:nvPicPr>
+            <p:cNvPr id="63" name="Graphic 62" descr="Sleep with solid fill">
+              <a:extLst>
+                <a:ext uri="{FF2B5EF4-FFF2-40B4-BE49-F238E27FC236}">
+                  <a16:creationId xmlns:a16="http://schemas.microsoft.com/office/drawing/2014/main" id="{B8E2AE39-B58E-011E-1C50-05AD2C99B124}"/>
+                </a:ext>
+              </a:extLst>
+            </p:cNvPr>
+            <p:cNvPicPr>
+              <a:picLocks noChangeAspect="1"/>
+            </p:cNvPicPr>
+            <p:nvPr/>
+          </p:nvPicPr>
+          <p:blipFill>
+            <a:blip>
+              <a:extLst>
+                <a:ext uri="{96DAC541-7B7A-43D3-8B79-37D633B846F1}">
+                  <asvg:svgBlip xmlns:asvg="http://schemas.microsoft.com/office/drawing/2016/SVG/main" r:embed="rId2"/>
+                </a:ext>
+              </a:extLst>
+            </a:blip>
+            <a:srcRect/>
+            <a:stretch/>
+          </p:blipFill>
+          <p:spPr>
+            <a:xfrm>
+              <a:off x="3723530" y="3030079"/>
+              <a:ext cx="634696" cy="634696"/>
+            </a:xfrm>
+            <a:prstGeom prst="rect">
+              <a:avLst/>
+            </a:prstGeom>
+          </p:spPr>
+        </p:pic>
+        <p:pic>
+          <p:nvPicPr>
+            <p:cNvPr id="64" name="Graphic 63" descr="Sleep with solid fill">
+              <a:extLst>
+                <a:ext uri="{FF2B5EF4-FFF2-40B4-BE49-F238E27FC236}">
+                  <a16:creationId xmlns:a16="http://schemas.microsoft.com/office/drawing/2014/main" id="{1BA287FF-2D89-F29C-4811-7265ADB8A80F}"/>
+                </a:ext>
+              </a:extLst>
+            </p:cNvPr>
+            <p:cNvPicPr>
+              <a:picLocks noChangeAspect="1"/>
+            </p:cNvPicPr>
+            <p:nvPr/>
+          </p:nvPicPr>
+          <p:blipFill>
+            <a:blip>
+              <a:extLst>
+                <a:ext uri="{96DAC541-7B7A-43D3-8B79-37D633B846F1}">
+                  <asvg:svgBlip xmlns:asvg="http://schemas.microsoft.com/office/drawing/2016/SVG/main" r:embed="rId2"/>
+                </a:ext>
+              </a:extLst>
+            </a:blip>
+            <a:srcRect/>
+            <a:stretch/>
+          </p:blipFill>
+          <p:spPr>
+            <a:xfrm>
+              <a:off x="4789362" y="3030079"/>
+              <a:ext cx="634696" cy="634696"/>
+            </a:xfrm>
+            <a:prstGeom prst="rect">
+              <a:avLst/>
+            </a:prstGeom>
+          </p:spPr>
+        </p:pic>
+        <p:pic>
+          <p:nvPicPr>
+            <p:cNvPr id="65" name="Graphic 64" descr="Sleep with solid fill">
+              <a:extLst>
+                <a:ext uri="{FF2B5EF4-FFF2-40B4-BE49-F238E27FC236}">
+                  <a16:creationId xmlns:a16="http://schemas.microsoft.com/office/drawing/2014/main" id="{1DF27AE5-FD61-7D18-7E91-A0FCFDD1CF56}"/>
+                </a:ext>
+              </a:extLst>
+            </p:cNvPr>
+            <p:cNvPicPr>
+              <a:picLocks noChangeAspect="1"/>
+            </p:cNvPicPr>
+            <p:nvPr/>
+          </p:nvPicPr>
+          <p:blipFill>
+            <a:blip>
+              <a:extLst>
+                <a:ext uri="{96DAC541-7B7A-43D3-8B79-37D633B846F1}">
+                  <asvg:svgBlip xmlns:asvg="http://schemas.microsoft.com/office/drawing/2016/SVG/main" r:embed="rId2"/>
+                </a:ext>
+              </a:extLst>
+            </a:blip>
+            <a:srcRect/>
+            <a:stretch/>
+          </p:blipFill>
+          <p:spPr>
+            <a:xfrm>
+              <a:off x="3723530" y="3869168"/>
+              <a:ext cx="634696" cy="634696"/>
+            </a:xfrm>
+            <a:prstGeom prst="rect">
+              <a:avLst/>
+            </a:prstGeom>
+          </p:spPr>
+        </p:pic>
+        <p:pic>
+          <p:nvPicPr>
+            <p:cNvPr id="66" name="Graphic 65" descr="Sleep with solid fill">
+              <a:extLst>
+                <a:ext uri="{FF2B5EF4-FFF2-40B4-BE49-F238E27FC236}">
+                  <a16:creationId xmlns:a16="http://schemas.microsoft.com/office/drawing/2014/main" id="{3BB0E143-4233-B87F-F953-B50153B05652}"/>
+                </a:ext>
+              </a:extLst>
+            </p:cNvPr>
+            <p:cNvPicPr>
+              <a:picLocks noChangeAspect="1"/>
+            </p:cNvPicPr>
+            <p:nvPr/>
+          </p:nvPicPr>
+          <p:blipFill>
+            <a:blip>
+              <a:extLst>
+                <a:ext uri="{96DAC541-7B7A-43D3-8B79-37D633B846F1}">
+                  <asvg:svgBlip xmlns:asvg="http://schemas.microsoft.com/office/drawing/2016/SVG/main" r:embed="rId2"/>
+                </a:ext>
+              </a:extLst>
+            </a:blip>
+            <a:srcRect/>
+            <a:stretch/>
+          </p:blipFill>
+          <p:spPr>
+            <a:xfrm>
+              <a:off x="4789362" y="3869168"/>
+              <a:ext cx="634696" cy="634696"/>
+            </a:xfrm>
+            <a:prstGeom prst="rect">
+              <a:avLst/>
+            </a:prstGeom>
+          </p:spPr>
+        </p:pic>
+        <p:pic>
+          <p:nvPicPr>
+            <p:cNvPr id="75" name="Graphic 74" descr="Sleep with solid fill">
+              <a:extLst>
+                <a:ext uri="{FF2B5EF4-FFF2-40B4-BE49-F238E27FC236}">
+                  <a16:creationId xmlns:a16="http://schemas.microsoft.com/office/drawing/2014/main" id="{14385CE5-6CAE-EF3D-790F-0FA6584C0DFF}"/>
+                </a:ext>
+              </a:extLst>
+            </p:cNvPr>
+            <p:cNvPicPr>
+              <a:picLocks noChangeAspect="1"/>
+            </p:cNvPicPr>
+            <p:nvPr/>
+          </p:nvPicPr>
+          <p:blipFill>
+            <a:blip>
+              <a:extLst>
+                <a:ext uri="{96DAC541-7B7A-43D3-8B79-37D633B846F1}">
+                  <asvg:svgBlip xmlns:asvg="http://schemas.microsoft.com/office/drawing/2016/SVG/main" r:embed="rId2"/>
+                </a:ext>
+              </a:extLst>
+            </a:blip>
+            <a:srcRect/>
+            <a:stretch/>
+          </p:blipFill>
+          <p:spPr>
+            <a:xfrm>
+              <a:off x="3723530" y="4708256"/>
+              <a:ext cx="634696" cy="634696"/>
+            </a:xfrm>
+            <a:prstGeom prst="rect">
+              <a:avLst/>
+            </a:prstGeom>
+          </p:spPr>
+        </p:pic>
+        <p:pic>
+          <p:nvPicPr>
+            <p:cNvPr id="76" name="Graphic 75" descr="Sleep with solid fill">
+              <a:extLst>
+                <a:ext uri="{FF2B5EF4-FFF2-40B4-BE49-F238E27FC236}">
+                  <a16:creationId xmlns:a16="http://schemas.microsoft.com/office/drawing/2014/main" id="{BFE33B39-C141-DDB8-53B2-AC070118DECC}"/>
+                </a:ext>
+              </a:extLst>
+            </p:cNvPr>
+            <p:cNvPicPr>
+              <a:picLocks noChangeAspect="1"/>
+            </p:cNvPicPr>
+            <p:nvPr/>
+          </p:nvPicPr>
+          <p:blipFill>
+            <a:blip>
+              <a:extLst>
+                <a:ext uri="{96DAC541-7B7A-43D3-8B79-37D633B846F1}">
+                  <asvg:svgBlip xmlns:asvg="http://schemas.microsoft.com/office/drawing/2016/SVG/main" r:embed="rId2"/>
+                </a:ext>
+              </a:extLst>
+            </a:blip>
+            <a:srcRect/>
+            <a:stretch/>
+          </p:blipFill>
+          <p:spPr>
+            <a:xfrm>
+              <a:off x="4789362" y="4708256"/>
+              <a:ext cx="634696" cy="634696"/>
+            </a:xfrm>
+            <a:prstGeom prst="rect">
+              <a:avLst/>
+            </a:prstGeom>
+          </p:spPr>
+        </p:pic>
+        <p:pic>
+          <p:nvPicPr>
+            <p:cNvPr id="77" name="Graphic 76" descr="Sleep with solid fill">
+              <a:extLst>
+                <a:ext uri="{FF2B5EF4-FFF2-40B4-BE49-F238E27FC236}">
+                  <a16:creationId xmlns:a16="http://schemas.microsoft.com/office/drawing/2014/main" id="{A60ADB2D-DF81-42F4-0947-DBA4B9CC1F03}"/>
+                </a:ext>
+              </a:extLst>
+            </p:cNvPr>
+            <p:cNvPicPr>
+              <a:picLocks noChangeAspect="1"/>
+            </p:cNvPicPr>
+            <p:nvPr/>
+          </p:nvPicPr>
+          <p:blipFill>
+            <a:blip>
+              <a:extLst>
+                <a:ext uri="{96DAC541-7B7A-43D3-8B79-37D633B846F1}">
+                  <asvg:svgBlip xmlns:asvg="http://schemas.microsoft.com/office/drawing/2016/SVG/main" r:embed="rId2"/>
+                </a:ext>
+              </a:extLst>
+            </a:blip>
+            <a:srcRect/>
+            <a:stretch/>
+          </p:blipFill>
+          <p:spPr>
+            <a:xfrm>
+              <a:off x="3723530" y="5547345"/>
+              <a:ext cx="634696" cy="634696"/>
+            </a:xfrm>
+            <a:prstGeom prst="rect">
+              <a:avLst/>
+            </a:prstGeom>
+          </p:spPr>
+        </p:pic>
+        <p:pic>
+          <p:nvPicPr>
+            <p:cNvPr id="78" name="Graphic 77" descr="Sleep with solid fill">
+              <a:extLst>
+                <a:ext uri="{FF2B5EF4-FFF2-40B4-BE49-F238E27FC236}">
+                  <a16:creationId xmlns:a16="http://schemas.microsoft.com/office/drawing/2014/main" id="{4684E287-1BD1-73D2-19E3-D96DE3E3F336}"/>
+                </a:ext>
+              </a:extLst>
+            </p:cNvPr>
+            <p:cNvPicPr>
+              <a:picLocks noChangeAspect="1"/>
+            </p:cNvPicPr>
+            <p:nvPr/>
+          </p:nvPicPr>
+          <p:blipFill>
+            <a:blip>
+              <a:extLst>
+                <a:ext uri="{96DAC541-7B7A-43D3-8B79-37D633B846F1}">
+                  <asvg:svgBlip xmlns:asvg="http://schemas.microsoft.com/office/drawing/2016/SVG/main" r:embed="rId2"/>
+                </a:ext>
+              </a:extLst>
+            </a:blip>
+            <a:srcRect/>
+            <a:stretch/>
+          </p:blipFill>
+          <p:spPr>
+            <a:xfrm>
+              <a:off x="4789362" y="5547345"/>
+              <a:ext cx="634696" cy="634696"/>
+            </a:xfrm>
+            <a:prstGeom prst="rect">
+              <a:avLst/>
+            </a:prstGeom>
+          </p:spPr>
+        </p:pic>
+        <p:pic>
+          <p:nvPicPr>
+            <p:cNvPr id="103" name="Graphic 102" descr="Sleep with solid fill">
+              <a:extLst>
+                <a:ext uri="{FF2B5EF4-FFF2-40B4-BE49-F238E27FC236}">
+                  <a16:creationId xmlns:a16="http://schemas.microsoft.com/office/drawing/2014/main" id="{F3F2BA80-0346-263C-DE00-1C717BE9D7C6}"/>
+                </a:ext>
+              </a:extLst>
+            </p:cNvPr>
+            <p:cNvPicPr>
+              <a:picLocks noChangeAspect="1"/>
+            </p:cNvPicPr>
+            <p:nvPr/>
+          </p:nvPicPr>
+          <p:blipFill>
+            <a:blip>
+              <a:extLst>
+                <a:ext uri="{96DAC541-7B7A-43D3-8B79-37D633B846F1}">
+                  <asvg:svgBlip xmlns:asvg="http://schemas.microsoft.com/office/drawing/2016/SVG/main" r:embed="rId2"/>
+                </a:ext>
+              </a:extLst>
+            </a:blip>
+            <a:srcRect/>
+            <a:stretch/>
+          </p:blipFill>
+          <p:spPr>
+            <a:xfrm>
+              <a:off x="9781876" y="2444684"/>
+              <a:ext cx="634696" cy="634696"/>
+            </a:xfrm>
+            <a:prstGeom prst="rect">
+              <a:avLst/>
+            </a:prstGeom>
+          </p:spPr>
+        </p:pic>
+        <p:pic>
+          <p:nvPicPr>
+            <p:cNvPr id="104" name="Graphic 103" descr="Sleep with solid fill">
+              <a:extLst>
+                <a:ext uri="{FF2B5EF4-FFF2-40B4-BE49-F238E27FC236}">
+                  <a16:creationId xmlns:a16="http://schemas.microsoft.com/office/drawing/2014/main" id="{C744BE2E-4598-7EBC-A822-CBC8A91BC378}"/>
+                </a:ext>
+              </a:extLst>
+            </p:cNvPr>
+            <p:cNvPicPr>
+              <a:picLocks noChangeAspect="1"/>
+            </p:cNvPicPr>
+            <p:nvPr/>
+          </p:nvPicPr>
+          <p:blipFill>
+            <a:blip>
+              <a:extLst>
+                <a:ext uri="{96DAC541-7B7A-43D3-8B79-37D633B846F1}">
+                  <asvg:svgBlip xmlns:asvg="http://schemas.microsoft.com/office/drawing/2016/SVG/main" r:embed="rId2"/>
+                </a:ext>
+              </a:extLst>
+            </a:blip>
+            <a:srcRect/>
+            <a:stretch/>
+          </p:blipFill>
+          <p:spPr>
+            <a:xfrm>
+              <a:off x="10847708" y="2444684"/>
+              <a:ext cx="634696" cy="634696"/>
+            </a:xfrm>
+            <a:prstGeom prst="rect">
+              <a:avLst/>
+            </a:prstGeom>
+          </p:spPr>
+        </p:pic>
+        <p:pic>
+          <p:nvPicPr>
+            <p:cNvPr id="105" name="Graphic 104" descr="Sleep with solid fill">
+              <a:extLst>
+                <a:ext uri="{FF2B5EF4-FFF2-40B4-BE49-F238E27FC236}">
+                  <a16:creationId xmlns:a16="http://schemas.microsoft.com/office/drawing/2014/main" id="{9D572FB8-31AE-B9A7-B19F-5C5A0368717A}"/>
+                </a:ext>
+              </a:extLst>
+            </p:cNvPr>
+            <p:cNvPicPr>
+              <a:picLocks noChangeAspect="1"/>
+            </p:cNvPicPr>
+            <p:nvPr/>
+          </p:nvPicPr>
+          <p:blipFill>
+            <a:blip>
+              <a:extLst>
+                <a:ext uri="{96DAC541-7B7A-43D3-8B79-37D633B846F1}">
+                  <asvg:svgBlip xmlns:asvg="http://schemas.microsoft.com/office/drawing/2016/SVG/main" r:embed="rId2"/>
+                </a:ext>
+              </a:extLst>
+            </a:blip>
+            <a:srcRect/>
+            <a:stretch/>
+          </p:blipFill>
+          <p:spPr>
+            <a:xfrm>
+              <a:off x="9781876" y="3283773"/>
+              <a:ext cx="634696" cy="634696"/>
+            </a:xfrm>
+            <a:prstGeom prst="rect">
+              <a:avLst/>
+            </a:prstGeom>
+          </p:spPr>
+        </p:pic>
+        <p:pic>
+          <p:nvPicPr>
+            <p:cNvPr id="106" name="Graphic 105" descr="Sleep with solid fill">
+              <a:extLst>
+                <a:ext uri="{FF2B5EF4-FFF2-40B4-BE49-F238E27FC236}">
+                  <a16:creationId xmlns:a16="http://schemas.microsoft.com/office/drawing/2014/main" id="{4ACAD09A-895A-6293-F6E5-B647D16857FF}"/>
+                </a:ext>
+              </a:extLst>
+            </p:cNvPr>
+            <p:cNvPicPr>
+              <a:picLocks noChangeAspect="1"/>
+            </p:cNvPicPr>
+            <p:nvPr/>
+          </p:nvPicPr>
+          <p:blipFill>
+            <a:blip>
+              <a:extLst>
+                <a:ext uri="{96DAC541-7B7A-43D3-8B79-37D633B846F1}">
+                  <asvg:svgBlip xmlns:asvg="http://schemas.microsoft.com/office/drawing/2016/SVG/main" r:embed="rId2"/>
+                </a:ext>
+              </a:extLst>
+            </a:blip>
+            <a:srcRect/>
+            <a:stretch/>
+          </p:blipFill>
+          <p:spPr>
+            <a:xfrm>
+              <a:off x="10847708" y="3283773"/>
+              <a:ext cx="634696" cy="634696"/>
+            </a:xfrm>
+            <a:prstGeom prst="rect">
+              <a:avLst/>
+            </a:prstGeom>
+          </p:spPr>
+        </p:pic>
+        <p:pic>
+          <p:nvPicPr>
+            <p:cNvPr id="107" name="Graphic 106" descr="Sleep with solid fill">
+              <a:extLst>
+                <a:ext uri="{FF2B5EF4-FFF2-40B4-BE49-F238E27FC236}">
+                  <a16:creationId xmlns:a16="http://schemas.microsoft.com/office/drawing/2014/main" id="{03C4CFED-82F3-5A4E-9331-B982B1D146E5}"/>
+                </a:ext>
+              </a:extLst>
+            </p:cNvPr>
+            <p:cNvPicPr>
+              <a:picLocks noChangeAspect="1"/>
+            </p:cNvPicPr>
+            <p:nvPr/>
+          </p:nvPicPr>
+          <p:blipFill>
+            <a:blip>
+              <a:extLst>
+                <a:ext uri="{96DAC541-7B7A-43D3-8B79-37D633B846F1}">
+                  <asvg:svgBlip xmlns:asvg="http://schemas.microsoft.com/office/drawing/2016/SVG/main" r:embed="rId2"/>
+                </a:ext>
+              </a:extLst>
+            </a:blip>
+            <a:srcRect/>
+            <a:stretch/>
+          </p:blipFill>
+          <p:spPr>
+            <a:xfrm>
+              <a:off x="9781876" y="4122861"/>
+              <a:ext cx="634696" cy="634696"/>
+            </a:xfrm>
+            <a:prstGeom prst="rect">
+              <a:avLst/>
+            </a:prstGeom>
+          </p:spPr>
+        </p:pic>
+        <p:pic>
+          <p:nvPicPr>
+            <p:cNvPr id="108" name="Graphic 107" descr="Sleep with solid fill">
+              <a:extLst>
+                <a:ext uri="{FF2B5EF4-FFF2-40B4-BE49-F238E27FC236}">
+                  <a16:creationId xmlns:a16="http://schemas.microsoft.com/office/drawing/2014/main" id="{C617B602-9E9F-6CE4-A7CB-DBBC60A0D87F}"/>
+                </a:ext>
+              </a:extLst>
+            </p:cNvPr>
+            <p:cNvPicPr>
+              <a:picLocks noChangeAspect="1"/>
+            </p:cNvPicPr>
+            <p:nvPr/>
+          </p:nvPicPr>
+          <p:blipFill>
+            <a:blip>
+              <a:extLst>
+                <a:ext uri="{96DAC541-7B7A-43D3-8B79-37D633B846F1}">
+                  <asvg:svgBlip xmlns:asvg="http://schemas.microsoft.com/office/drawing/2016/SVG/main" r:embed="rId2"/>
+                </a:ext>
+              </a:extLst>
+            </a:blip>
+            <a:srcRect/>
+            <a:stretch/>
+          </p:blipFill>
+          <p:spPr>
+            <a:xfrm>
+              <a:off x="10847708" y="4122861"/>
+              <a:ext cx="634696" cy="634696"/>
+            </a:xfrm>
+            <a:prstGeom prst="rect">
+              <a:avLst/>
+            </a:prstGeom>
+          </p:spPr>
+        </p:pic>
+        <p:pic>
+          <p:nvPicPr>
+            <p:cNvPr id="109" name="Graphic 108" descr="Sleep with solid fill">
+              <a:extLst>
+                <a:ext uri="{FF2B5EF4-FFF2-40B4-BE49-F238E27FC236}">
+                  <a16:creationId xmlns:a16="http://schemas.microsoft.com/office/drawing/2014/main" id="{78BE82EC-111C-A974-F5A2-3976C9CEB1A2}"/>
+                </a:ext>
+              </a:extLst>
+            </p:cNvPr>
+            <p:cNvPicPr>
+              <a:picLocks noChangeAspect="1"/>
+            </p:cNvPicPr>
+            <p:nvPr/>
+          </p:nvPicPr>
+          <p:blipFill>
+            <a:blip>
+              <a:extLst>
+                <a:ext uri="{96DAC541-7B7A-43D3-8B79-37D633B846F1}">
+                  <asvg:svgBlip xmlns:asvg="http://schemas.microsoft.com/office/drawing/2016/SVG/main" r:embed="rId2"/>
+                </a:ext>
+              </a:extLst>
+            </a:blip>
+            <a:srcRect/>
+            <a:stretch/>
+          </p:blipFill>
+          <p:spPr>
+            <a:xfrm>
+              <a:off x="9781876" y="4961950"/>
+              <a:ext cx="634696" cy="634696"/>
+            </a:xfrm>
+            <a:prstGeom prst="rect">
+              <a:avLst/>
+            </a:prstGeom>
+          </p:spPr>
+        </p:pic>
+        <p:pic>
+          <p:nvPicPr>
+            <p:cNvPr id="110" name="Graphic 109" descr="Sleep with solid fill">
+              <a:extLst>
+                <a:ext uri="{FF2B5EF4-FFF2-40B4-BE49-F238E27FC236}">
+                  <a16:creationId xmlns:a16="http://schemas.microsoft.com/office/drawing/2014/main" id="{214902D7-E366-BF7C-9866-BFB16C5D854B}"/>
+                </a:ext>
+              </a:extLst>
+            </p:cNvPr>
+            <p:cNvPicPr>
+              <a:picLocks noChangeAspect="1"/>
+            </p:cNvPicPr>
+            <p:nvPr/>
+          </p:nvPicPr>
+          <p:blipFill>
+            <a:blip>
+              <a:extLst>
+                <a:ext uri="{96DAC541-7B7A-43D3-8B79-37D633B846F1}">
+                  <asvg:svgBlip xmlns:asvg="http://schemas.microsoft.com/office/drawing/2016/SVG/main" r:embed="rId2"/>
+                </a:ext>
+              </a:extLst>
+            </a:blip>
+            <a:srcRect/>
+            <a:stretch/>
+          </p:blipFill>
+          <p:spPr>
+            <a:xfrm>
+              <a:off x="10847708" y="4961950"/>
+              <a:ext cx="634696" cy="634696"/>
+            </a:xfrm>
+            <a:prstGeom prst="rect">
+              <a:avLst/>
+            </a:prstGeom>
+          </p:spPr>
+        </p:pic>
+        <p:pic>
+          <p:nvPicPr>
+            <p:cNvPr id="111" name="Graphic 110" descr="Sleep with solid fill">
+              <a:extLst>
+                <a:ext uri="{FF2B5EF4-FFF2-40B4-BE49-F238E27FC236}">
+                  <a16:creationId xmlns:a16="http://schemas.microsoft.com/office/drawing/2014/main" id="{9C91A0BD-49B0-5FBB-C169-F67AC835BDAE}"/>
+                </a:ext>
+              </a:extLst>
+            </p:cNvPr>
+            <p:cNvPicPr>
+              <a:picLocks noChangeAspect="1"/>
+            </p:cNvPicPr>
+            <p:nvPr/>
+          </p:nvPicPr>
+          <p:blipFill>
+            <a:blip>
+              <a:extLst>
+                <a:ext uri="{96DAC541-7B7A-43D3-8B79-37D633B846F1}">
+                  <asvg:svgBlip xmlns:asvg="http://schemas.microsoft.com/office/drawing/2016/SVG/main" r:embed="rId2"/>
+                </a:ext>
+              </a:extLst>
+            </a:blip>
+            <a:srcRect/>
+            <a:stretch/>
+          </p:blipFill>
+          <p:spPr>
+            <a:xfrm>
+              <a:off x="6737464" y="2395383"/>
+              <a:ext cx="634696" cy="634696"/>
+            </a:xfrm>
+            <a:prstGeom prst="rect">
+              <a:avLst/>
+            </a:prstGeom>
+          </p:spPr>
+        </p:pic>
+        <p:pic>
+          <p:nvPicPr>
+            <p:cNvPr id="112" name="Graphic 111" descr="Sleep with solid fill">
+              <a:extLst>
+                <a:ext uri="{FF2B5EF4-FFF2-40B4-BE49-F238E27FC236}">
+                  <a16:creationId xmlns:a16="http://schemas.microsoft.com/office/drawing/2014/main" id="{37523937-B4F4-ABE8-9034-FDA24654743B}"/>
+                </a:ext>
+              </a:extLst>
+            </p:cNvPr>
+            <p:cNvPicPr>
+              <a:picLocks noChangeAspect="1"/>
+            </p:cNvPicPr>
+            <p:nvPr/>
+          </p:nvPicPr>
+          <p:blipFill>
+            <a:blip>
+              <a:extLst>
+                <a:ext uri="{96DAC541-7B7A-43D3-8B79-37D633B846F1}">
+                  <asvg:svgBlip xmlns:asvg="http://schemas.microsoft.com/office/drawing/2016/SVG/main" r:embed="rId2"/>
+                </a:ext>
+              </a:extLst>
+            </a:blip>
+            <a:srcRect/>
+            <a:stretch/>
+          </p:blipFill>
+          <p:spPr>
+            <a:xfrm>
+              <a:off x="7803296" y="2395383"/>
+              <a:ext cx="634696" cy="634696"/>
+            </a:xfrm>
+            <a:prstGeom prst="rect">
+              <a:avLst/>
+            </a:prstGeom>
+          </p:spPr>
+        </p:pic>
+        <p:pic>
+          <p:nvPicPr>
+            <p:cNvPr id="113" name="Graphic 112" descr="Sleep with solid fill">
+              <a:extLst>
+                <a:ext uri="{FF2B5EF4-FFF2-40B4-BE49-F238E27FC236}">
+                  <a16:creationId xmlns:a16="http://schemas.microsoft.com/office/drawing/2014/main" id="{D68E1448-7789-7B20-612A-9F4DB3BD8F5D}"/>
+                </a:ext>
+              </a:extLst>
+            </p:cNvPr>
+            <p:cNvPicPr>
+              <a:picLocks noChangeAspect="1"/>
+            </p:cNvPicPr>
+            <p:nvPr/>
+          </p:nvPicPr>
+          <p:blipFill>
+            <a:blip>
+              <a:extLst>
+                <a:ext uri="{96DAC541-7B7A-43D3-8B79-37D633B846F1}">
+                  <asvg:svgBlip xmlns:asvg="http://schemas.microsoft.com/office/drawing/2016/SVG/main" r:embed="rId2"/>
+                </a:ext>
+              </a:extLst>
+            </a:blip>
+            <a:srcRect/>
+            <a:stretch/>
+          </p:blipFill>
+          <p:spPr>
+            <a:xfrm>
+              <a:off x="6737464" y="3234472"/>
+              <a:ext cx="634696" cy="634696"/>
+            </a:xfrm>
+            <a:prstGeom prst="rect">
+              <a:avLst/>
+            </a:prstGeom>
+          </p:spPr>
+        </p:pic>
+        <p:pic>
+          <p:nvPicPr>
+            <p:cNvPr id="114" name="Graphic 113" descr="Sleep with solid fill">
+              <a:extLst>
+                <a:ext uri="{FF2B5EF4-FFF2-40B4-BE49-F238E27FC236}">
+                  <a16:creationId xmlns:a16="http://schemas.microsoft.com/office/drawing/2014/main" id="{4141B252-B1AE-1D46-F74E-9913BF262908}"/>
+                </a:ext>
+              </a:extLst>
+            </p:cNvPr>
+            <p:cNvPicPr>
+              <a:picLocks noChangeAspect="1"/>
+            </p:cNvPicPr>
+            <p:nvPr/>
+          </p:nvPicPr>
+          <p:blipFill>
+            <a:blip>
+              <a:extLst>
+                <a:ext uri="{96DAC541-7B7A-43D3-8B79-37D633B846F1}">
+                  <asvg:svgBlip xmlns:asvg="http://schemas.microsoft.com/office/drawing/2016/SVG/main" r:embed="rId2"/>
+                </a:ext>
+              </a:extLst>
+            </a:blip>
+            <a:srcRect/>
+            <a:stretch/>
+          </p:blipFill>
+          <p:spPr>
+            <a:xfrm>
+              <a:off x="7803296" y="3234472"/>
+              <a:ext cx="634696" cy="634696"/>
+            </a:xfrm>
+            <a:prstGeom prst="rect">
+              <a:avLst/>
+            </a:prstGeom>
+          </p:spPr>
+        </p:pic>
+        <p:pic>
+          <p:nvPicPr>
+            <p:cNvPr id="115" name="Graphic 114" descr="Sleep with solid fill">
+              <a:extLst>
+                <a:ext uri="{FF2B5EF4-FFF2-40B4-BE49-F238E27FC236}">
+                  <a16:creationId xmlns:a16="http://schemas.microsoft.com/office/drawing/2014/main" id="{3144BFB6-1B0E-D445-BB23-C9FF85111C29}"/>
+                </a:ext>
+              </a:extLst>
+            </p:cNvPr>
+            <p:cNvPicPr>
+              <a:picLocks noChangeAspect="1"/>
+            </p:cNvPicPr>
+            <p:nvPr/>
+          </p:nvPicPr>
+          <p:blipFill>
+            <a:blip>
+              <a:extLst>
+                <a:ext uri="{96DAC541-7B7A-43D3-8B79-37D633B846F1}">
+                  <asvg:svgBlip xmlns:asvg="http://schemas.microsoft.com/office/drawing/2016/SVG/main" r:embed="rId2"/>
+                </a:ext>
+              </a:extLst>
+            </a:blip>
+            <a:srcRect/>
+            <a:stretch/>
+          </p:blipFill>
+          <p:spPr>
+            <a:xfrm>
+              <a:off x="6737464" y="4073560"/>
+              <a:ext cx="634696" cy="634696"/>
+            </a:xfrm>
+            <a:prstGeom prst="rect">
+              <a:avLst/>
+            </a:prstGeom>
+          </p:spPr>
+        </p:pic>
+        <p:pic>
+          <p:nvPicPr>
+            <p:cNvPr id="116" name="Graphic 115" descr="Sleep with solid fill">
+              <a:extLst>
+                <a:ext uri="{FF2B5EF4-FFF2-40B4-BE49-F238E27FC236}">
+                  <a16:creationId xmlns:a16="http://schemas.microsoft.com/office/drawing/2014/main" id="{75324D9F-76A6-A02C-F6B6-E6CDF3AB9185}"/>
+                </a:ext>
+              </a:extLst>
+            </p:cNvPr>
+            <p:cNvPicPr>
+              <a:picLocks noChangeAspect="1"/>
+            </p:cNvPicPr>
+            <p:nvPr/>
+          </p:nvPicPr>
+          <p:blipFill>
+            <a:blip>
+              <a:extLst>
+                <a:ext uri="{96DAC541-7B7A-43D3-8B79-37D633B846F1}">
+                  <asvg:svgBlip xmlns:asvg="http://schemas.microsoft.com/office/drawing/2016/SVG/main" r:embed="rId2"/>
+                </a:ext>
+              </a:extLst>
+            </a:blip>
+            <a:srcRect/>
+            <a:stretch/>
+          </p:blipFill>
+          <p:spPr>
+            <a:xfrm>
+              <a:off x="7803296" y="4073560"/>
+              <a:ext cx="634696" cy="634696"/>
+            </a:xfrm>
+            <a:prstGeom prst="rect">
+              <a:avLst/>
+            </a:prstGeom>
+          </p:spPr>
+        </p:pic>
+        <p:pic>
+          <p:nvPicPr>
+            <p:cNvPr id="117" name="Graphic 116" descr="Sleep with solid fill">
+              <a:extLst>
+                <a:ext uri="{FF2B5EF4-FFF2-40B4-BE49-F238E27FC236}">
+                  <a16:creationId xmlns:a16="http://schemas.microsoft.com/office/drawing/2014/main" id="{55C6267F-A4C7-4B47-6E5E-425C50DC5CF6}"/>
+                </a:ext>
+              </a:extLst>
+            </p:cNvPr>
+            <p:cNvPicPr>
+              <a:picLocks noChangeAspect="1"/>
+            </p:cNvPicPr>
+            <p:nvPr/>
+          </p:nvPicPr>
+          <p:blipFill>
+            <a:blip>
+              <a:extLst>
+                <a:ext uri="{96DAC541-7B7A-43D3-8B79-37D633B846F1}">
+                  <asvg:svgBlip xmlns:asvg="http://schemas.microsoft.com/office/drawing/2016/SVG/main" r:embed="rId2"/>
+                </a:ext>
+              </a:extLst>
+            </a:blip>
+            <a:srcRect/>
+            <a:stretch/>
+          </p:blipFill>
+          <p:spPr>
+            <a:xfrm>
+              <a:off x="7232534" y="4912649"/>
+              <a:ext cx="634696" cy="634696"/>
+            </a:xfrm>
+            <a:prstGeom prst="rect">
+              <a:avLst/>
+            </a:prstGeom>
+          </p:spPr>
+        </p:pic>
+        <p:cxnSp>
+          <p:nvCxnSpPr>
+            <p:cNvPr id="141" name="Straight Connector 140">
+              <a:extLst>
+                <a:ext uri="{FF2B5EF4-FFF2-40B4-BE49-F238E27FC236}">
+                  <a16:creationId xmlns:a16="http://schemas.microsoft.com/office/drawing/2014/main" id="{F85ED1AE-129F-F15E-72DA-824C1F89B163}"/>
+                </a:ext>
+              </a:extLst>
+            </p:cNvPr>
+            <p:cNvCxnSpPr/>
+            <p:nvPr/>
+          </p:nvCxnSpPr>
+          <p:spPr>
+            <a:xfrm>
+              <a:off x="3239846" y="2754416"/>
+              <a:ext cx="2667896" cy="0"/>
+            </a:xfrm>
+            <a:prstGeom prst="line">
+              <a:avLst/>
+            </a:prstGeom>
+            <a:ln w="34925">
+              <a:solidFill>
+                <a:schemeClr val="tx1"/>
+              </a:solidFill>
+              <a:prstDash val="dash"/>
+            </a:ln>
+          </p:spPr>
+          <p:style>
+            <a:lnRef idx="2">
+              <a:schemeClr val="accent1"/>
+            </a:lnRef>
+            <a:fillRef idx="0">
+              <a:schemeClr val="accent1"/>
+            </a:fillRef>
+            <a:effectRef idx="1">
+              <a:schemeClr val="accent1"/>
+            </a:effectRef>
+            <a:fontRef idx="minor">
+              <a:schemeClr val="tx1"/>
+            </a:fontRef>
+          </p:style>
+        </p:cxnSp>
+        <p:pic>
+          <p:nvPicPr>
+            <p:cNvPr id="142" name="Graphic 141" descr="Sleep with solid fill">
+              <a:extLst>
+                <a:ext uri="{FF2B5EF4-FFF2-40B4-BE49-F238E27FC236}">
+                  <a16:creationId xmlns:a16="http://schemas.microsoft.com/office/drawing/2014/main" id="{5EE19132-F4E8-A5E2-7569-6E627930A5F7}"/>
+                </a:ext>
+              </a:extLst>
+            </p:cNvPr>
+            <p:cNvPicPr>
+              <a:picLocks noChangeAspect="1"/>
+            </p:cNvPicPr>
+            <p:nvPr/>
+          </p:nvPicPr>
+          <p:blipFill>
+            <a:blip>
+              <a:extLst>
+                <a:ext uri="{96DAC541-7B7A-43D3-8B79-37D633B846F1}">
+                  <asvg:svgBlip xmlns:asvg="http://schemas.microsoft.com/office/drawing/2016/SVG/main" r:embed="rId2"/>
+                </a:ext>
+              </a:extLst>
+            </a:blip>
+            <a:srcRect/>
+            <a:stretch/>
+          </p:blipFill>
+          <p:spPr>
+            <a:xfrm>
+              <a:off x="4256446" y="2056368"/>
+              <a:ext cx="634696" cy="634696"/>
+            </a:xfrm>
+            <a:prstGeom prst="rect">
+              <a:avLst/>
+            </a:prstGeom>
+          </p:spPr>
+        </p:pic>
+        <p:sp>
+          <p:nvSpPr>
+            <p:cNvPr id="2" name="Rectangle 1">
+              <a:extLst>
+                <a:ext uri="{FF2B5EF4-FFF2-40B4-BE49-F238E27FC236}">
+                  <a16:creationId xmlns:a16="http://schemas.microsoft.com/office/drawing/2014/main" id="{731D39AB-FB46-2F5A-8195-0DEAC8F94096}"/>
+                </a:ext>
+              </a:extLst>
+            </p:cNvPr>
+            <p:cNvSpPr/>
+            <p:nvPr/>
+          </p:nvSpPr>
+          <p:spPr>
+            <a:xfrm>
+              <a:off x="4594032" y="5547344"/>
+              <a:ext cx="1024569" cy="661275"/>
+            </a:xfrm>
+            <a:prstGeom prst="rect">
+              <a:avLst/>
+            </a:prstGeom>
+            <a:noFill/>
+            <a:ln w="34925">
+              <a:prstDash val="sysDot"/>
+            </a:ln>
+          </p:spPr>
+          <p:style>
+            <a:lnRef idx="2">
+              <a:schemeClr val="accent1">
+                <a:shade val="15000"/>
+              </a:schemeClr>
+            </a:lnRef>
+            <a:fillRef idx="1">
+              <a:schemeClr val="accent1"/>
+            </a:fillRef>
+            <a:effectRef idx="0">
+              <a:schemeClr val="accent1"/>
+            </a:effectRef>
+            <a:fontRef idx="minor">
+              <a:schemeClr val="lt1"/>
+            </a:fontRef>
+          </p:style>
+          <p:txBody>
+            <a:bodyPr rtlCol="0" anchor="ctr"/>
+            <a:lstStyle/>
+            <a:p>
+              <a:pPr algn="ctr"/>
+              <a:endParaRPr lang="en-US"/>
+            </a:p>
+          </p:txBody>
+        </p:sp>
+        <p:sp>
+          <p:nvSpPr>
+            <p:cNvPr id="5" name="Rounded Rectangle 4">
+              <a:extLst>
+                <a:ext uri="{FF2B5EF4-FFF2-40B4-BE49-F238E27FC236}">
+                  <a16:creationId xmlns:a16="http://schemas.microsoft.com/office/drawing/2014/main" id="{B1C81C5E-378F-8CF5-8C70-A2544323AA24}"/>
+                </a:ext>
+              </a:extLst>
+            </p:cNvPr>
+            <p:cNvSpPr/>
+            <p:nvPr/>
+          </p:nvSpPr>
+          <p:spPr>
+            <a:xfrm>
+              <a:off x="12449772" y="1172581"/>
+              <a:ext cx="2667896" cy="2061879"/>
+            </a:xfrm>
+            <a:prstGeom prst="roundRect">
+              <a:avLst>
+                <a:gd name="adj" fmla="val 2957"/>
+              </a:avLst>
+            </a:prstGeom>
+            <a:solidFill>
+              <a:schemeClr val="bg2"/>
             </a:solidFill>
-            <a:prstDash val="dash"/>
-          </a:ln>
-        </p:spPr>
-        <p:style>
-          <a:lnRef idx="2">
-            <a:schemeClr val="accent1"/>
-          </a:lnRef>
-          <a:fillRef idx="0">
-            <a:schemeClr val="accent1"/>
-          </a:fillRef>
-          <a:effectRef idx="1">
-            <a:schemeClr val="accent1"/>
-          </a:effectRef>
-          <a:fontRef idx="minor">
-            <a:schemeClr val="tx1"/>
-          </a:fontRef>
-        </p:style>
-      </p:cxnSp>
-      <p:cxnSp>
-        <p:nvCxnSpPr>
-          <p:cNvPr id="32" name="Straight Connector 31">
-            <a:extLst>
-              <a:ext uri="{FF2B5EF4-FFF2-40B4-BE49-F238E27FC236}">
-                <a16:creationId xmlns:a16="http://schemas.microsoft.com/office/drawing/2014/main" id="{7E0D07E9-5C9D-B412-BCED-1F0849BA94C1}"/>
-              </a:ext>
-            </a:extLst>
-          </p:cNvPr>
-          <p:cNvCxnSpPr/>
-          <p:nvPr/>
-        </p:nvCxnSpPr>
-        <p:spPr>
-          <a:xfrm>
-            <a:off x="6253780" y="1909480"/>
-            <a:ext cx="2667896" cy="0"/>
-          </a:xfrm>
-          <a:prstGeom prst="line">
-            <a:avLst/>
-          </a:prstGeom>
-          <a:ln w="34925">
+            <a:ln w="38100"/>
+          </p:spPr>
+          <p:style>
+            <a:lnRef idx="2">
+              <a:schemeClr val="accent1">
+                <a:shade val="15000"/>
+              </a:schemeClr>
+            </a:lnRef>
+            <a:fillRef idx="1">
+              <a:schemeClr val="accent1"/>
+            </a:fillRef>
+            <a:effectRef idx="0">
+              <a:schemeClr val="accent1"/>
+            </a:effectRef>
+            <a:fontRef idx="minor">
+              <a:schemeClr val="lt1"/>
+            </a:fontRef>
+          </p:style>
+          <p:txBody>
+            <a:bodyPr rtlCol="0" anchor="ctr"/>
+            <a:lstStyle/>
+            <a:p>
+              <a:pPr algn="ctr"/>
+              <a:endParaRPr lang="en-US"/>
+            </a:p>
+          </p:txBody>
+        </p:sp>
+        <p:sp>
+          <p:nvSpPr>
+            <p:cNvPr id="9" name="TextBox 8">
+              <a:extLst>
+                <a:ext uri="{FF2B5EF4-FFF2-40B4-BE49-F238E27FC236}">
+                  <a16:creationId xmlns:a16="http://schemas.microsoft.com/office/drawing/2014/main" id="{35F73710-C6E5-98E9-E9D9-548C5BD03132}"/>
+                </a:ext>
+              </a:extLst>
+            </p:cNvPr>
+            <p:cNvSpPr txBox="1"/>
+            <p:nvPr/>
+          </p:nvSpPr>
+          <p:spPr>
+            <a:xfrm>
+              <a:off x="12587302" y="649363"/>
+              <a:ext cx="2392835" cy="523220"/>
+            </a:xfrm>
+            <a:prstGeom prst="rect">
+              <a:avLst/>
+            </a:prstGeom>
+            <a:noFill/>
+          </p:spPr>
+          <p:txBody>
+            <a:bodyPr wrap="none" rtlCol="0">
+              <a:spAutoFit/>
+            </a:bodyPr>
+            <a:lstStyle/>
+            <a:p>
+              <a:r>
+                <a:rPr lang="en-US" sz="2800" dirty="0"/>
+                <a:t>Complex Care</a:t>
+              </a:r>
+            </a:p>
+          </p:txBody>
+        </p:sp>
+        <p:sp>
+          <p:nvSpPr>
+            <p:cNvPr id="10" name="TextBox 9">
+              <a:extLst>
+                <a:ext uri="{FF2B5EF4-FFF2-40B4-BE49-F238E27FC236}">
+                  <a16:creationId xmlns:a16="http://schemas.microsoft.com/office/drawing/2014/main" id="{97B58B42-76AC-D283-F93E-3B55A7F3145E}"/>
+                </a:ext>
+              </a:extLst>
+            </p:cNvPr>
+            <p:cNvSpPr txBox="1"/>
+            <p:nvPr/>
+          </p:nvSpPr>
+          <p:spPr>
+            <a:xfrm>
+              <a:off x="13247867" y="3811950"/>
+              <a:ext cx="1071704" cy="523220"/>
+            </a:xfrm>
+            <a:prstGeom prst="rect">
+              <a:avLst/>
+            </a:prstGeom>
+            <a:noFill/>
+          </p:spPr>
+          <p:txBody>
+            <a:bodyPr wrap="none" rtlCol="0">
+              <a:spAutoFit/>
+            </a:bodyPr>
+            <a:lstStyle/>
+            <a:p>
+              <a:r>
+                <a:rPr lang="en-US" sz="2800" dirty="0"/>
+                <a:t>PACU</a:t>
+              </a:r>
+            </a:p>
+          </p:txBody>
+        </p:sp>
+        <p:sp>
+          <p:nvSpPr>
+            <p:cNvPr id="15" name="Rounded Rectangle 14">
+              <a:extLst>
+                <a:ext uri="{FF2B5EF4-FFF2-40B4-BE49-F238E27FC236}">
+                  <a16:creationId xmlns:a16="http://schemas.microsoft.com/office/drawing/2014/main" id="{E90F25F4-9C75-7D68-11E8-EC6494171B2D}"/>
+                </a:ext>
+              </a:extLst>
+            </p:cNvPr>
+            <p:cNvSpPr/>
+            <p:nvPr/>
+          </p:nvSpPr>
+          <p:spPr>
+            <a:xfrm>
+              <a:off x="12449771" y="4312012"/>
+              <a:ext cx="2667896" cy="2061879"/>
+            </a:xfrm>
+            <a:prstGeom prst="roundRect">
+              <a:avLst>
+                <a:gd name="adj" fmla="val 2957"/>
+              </a:avLst>
+            </a:prstGeom>
             <a:solidFill>
-              <a:schemeClr val="tx1"/>
+              <a:schemeClr val="bg2"/>
             </a:solidFill>
-            <a:prstDash val="dash"/>
-          </a:ln>
-        </p:spPr>
-        <p:style>
-          <a:lnRef idx="2">
-            <a:schemeClr val="accent1"/>
-          </a:lnRef>
-          <a:fillRef idx="0">
-            <a:schemeClr val="accent1"/>
-          </a:fillRef>
-          <a:effectRef idx="1">
-            <a:schemeClr val="accent1"/>
-          </a:effectRef>
-          <a:fontRef idx="minor">
-            <a:schemeClr val="tx1"/>
-          </a:fontRef>
-        </p:style>
-      </p:cxnSp>
-      <p:cxnSp>
-        <p:nvCxnSpPr>
-          <p:cNvPr id="33" name="Straight Connector 32">
-            <a:extLst>
-              <a:ext uri="{FF2B5EF4-FFF2-40B4-BE49-F238E27FC236}">
-                <a16:creationId xmlns:a16="http://schemas.microsoft.com/office/drawing/2014/main" id="{0A6B6FB1-6B06-D93C-DA48-2B45E93F2615}"/>
-              </a:ext>
-            </a:extLst>
-          </p:cNvPr>
-          <p:cNvCxnSpPr/>
-          <p:nvPr/>
-        </p:nvCxnSpPr>
-        <p:spPr>
-          <a:xfrm>
-            <a:off x="9267714" y="1895134"/>
-            <a:ext cx="2667896" cy="0"/>
-          </a:xfrm>
-          <a:prstGeom prst="line">
-            <a:avLst/>
-          </a:prstGeom>
-          <a:ln w="34925">
-            <a:solidFill>
-              <a:schemeClr val="tx1"/>
-            </a:solidFill>
-            <a:prstDash val="dash"/>
-          </a:ln>
-        </p:spPr>
-        <p:style>
-          <a:lnRef idx="2">
-            <a:schemeClr val="accent1"/>
-          </a:lnRef>
-          <a:fillRef idx="0">
-            <a:schemeClr val="accent1"/>
-          </a:fillRef>
-          <a:effectRef idx="1">
-            <a:schemeClr val="accent1"/>
-          </a:effectRef>
-          <a:fontRef idx="minor">
-            <a:schemeClr val="tx1"/>
-          </a:fontRef>
-        </p:style>
-      </p:cxnSp>
-      <p:pic>
-        <p:nvPicPr>
-          <p:cNvPr id="38" name="Graphic 37" descr="Sleep with solid fill">
-            <a:extLst>
-              <a:ext uri="{FF2B5EF4-FFF2-40B4-BE49-F238E27FC236}">
-                <a16:creationId xmlns:a16="http://schemas.microsoft.com/office/drawing/2014/main" id="{FBEF3889-0D1A-A48A-FF05-07C6710102AC}"/>
-              </a:ext>
-            </a:extLst>
-          </p:cNvPr>
-          <p:cNvPicPr>
-            <a:picLocks noChangeAspect="1"/>
-          </p:cNvPicPr>
-          <p:nvPr/>
-        </p:nvPicPr>
-        <p:blipFill>
-          <a:blip>
-            <a:extLst>
-              <a:ext uri="{96DAC541-7B7A-43D3-8B79-37D633B846F1}">
-                <asvg:svgBlip xmlns:asvg="http://schemas.microsoft.com/office/drawing/2016/SVG/main" r:embed="rId2"/>
-              </a:ext>
-            </a:extLst>
-          </a:blip>
-          <a:srcRect/>
-          <a:stretch/>
-        </p:blipFill>
-        <p:spPr>
-          <a:xfrm>
-            <a:off x="709596" y="3929217"/>
-            <a:ext cx="634696" cy="634696"/>
-          </a:xfrm>
-          <a:prstGeom prst="rect">
-            <a:avLst/>
-          </a:prstGeom>
-        </p:spPr>
-      </p:pic>
-      <p:pic>
-        <p:nvPicPr>
-          <p:cNvPr id="39" name="Graphic 38" descr="Sleep with solid fill">
-            <a:extLst>
-              <a:ext uri="{FF2B5EF4-FFF2-40B4-BE49-F238E27FC236}">
-                <a16:creationId xmlns:a16="http://schemas.microsoft.com/office/drawing/2014/main" id="{0C30D739-8C69-6D75-2839-A9CE16256E07}"/>
-              </a:ext>
-            </a:extLst>
-          </p:cNvPr>
-          <p:cNvPicPr>
-            <a:picLocks noChangeAspect="1"/>
-          </p:cNvPicPr>
-          <p:nvPr/>
-        </p:nvPicPr>
-        <p:blipFill>
-          <a:blip>
-            <a:extLst>
-              <a:ext uri="{96DAC541-7B7A-43D3-8B79-37D633B846F1}">
-                <asvg:svgBlip xmlns:asvg="http://schemas.microsoft.com/office/drawing/2016/SVG/main" r:embed="rId2"/>
-              </a:ext>
-            </a:extLst>
-          </a:blip>
-          <a:srcRect/>
-          <a:stretch/>
-        </p:blipFill>
-        <p:spPr>
-          <a:xfrm>
-            <a:off x="1775428" y="3929217"/>
-            <a:ext cx="634696" cy="634696"/>
-          </a:xfrm>
-          <a:prstGeom prst="rect">
-            <a:avLst/>
-          </a:prstGeom>
-        </p:spPr>
-      </p:pic>
-      <p:pic>
-        <p:nvPicPr>
-          <p:cNvPr id="42" name="Graphic 41" descr="Sleep with solid fill">
-            <a:extLst>
-              <a:ext uri="{FF2B5EF4-FFF2-40B4-BE49-F238E27FC236}">
-                <a16:creationId xmlns:a16="http://schemas.microsoft.com/office/drawing/2014/main" id="{C3315AB8-5857-66EF-AC9C-731A31F7C6B6}"/>
-              </a:ext>
-            </a:extLst>
-          </p:cNvPr>
-          <p:cNvPicPr>
-            <a:picLocks noChangeAspect="1"/>
-          </p:cNvPicPr>
-          <p:nvPr/>
-        </p:nvPicPr>
-        <p:blipFill>
-          <a:blip>
-            <a:extLst>
-              <a:ext uri="{96DAC541-7B7A-43D3-8B79-37D633B846F1}">
-                <asvg:svgBlip xmlns:asvg="http://schemas.microsoft.com/office/drawing/2016/SVG/main" r:embed="rId2"/>
-              </a:ext>
-            </a:extLst>
-          </a:blip>
-          <a:srcRect/>
-          <a:stretch/>
-        </p:blipFill>
-        <p:spPr>
-          <a:xfrm>
-            <a:off x="709596" y="4768306"/>
-            <a:ext cx="634696" cy="634696"/>
-          </a:xfrm>
-          <a:prstGeom prst="rect">
-            <a:avLst/>
-          </a:prstGeom>
-        </p:spPr>
-      </p:pic>
-      <p:pic>
-        <p:nvPicPr>
-          <p:cNvPr id="43" name="Graphic 42" descr="Sleep with solid fill">
-            <a:extLst>
-              <a:ext uri="{FF2B5EF4-FFF2-40B4-BE49-F238E27FC236}">
-                <a16:creationId xmlns:a16="http://schemas.microsoft.com/office/drawing/2014/main" id="{CDDE2129-A6A9-D115-59D4-13173CF8DDA7}"/>
-              </a:ext>
-            </a:extLst>
-          </p:cNvPr>
-          <p:cNvPicPr>
-            <a:picLocks noChangeAspect="1"/>
-          </p:cNvPicPr>
-          <p:nvPr/>
-        </p:nvPicPr>
-        <p:blipFill>
-          <a:blip>
-            <a:extLst>
-              <a:ext uri="{96DAC541-7B7A-43D3-8B79-37D633B846F1}">
-                <asvg:svgBlip xmlns:asvg="http://schemas.microsoft.com/office/drawing/2016/SVG/main" r:embed="rId2"/>
-              </a:ext>
-            </a:extLst>
-          </a:blip>
-          <a:srcRect/>
-          <a:stretch/>
-        </p:blipFill>
-        <p:spPr>
-          <a:xfrm>
-            <a:off x="1775428" y="4768306"/>
-            <a:ext cx="634696" cy="634696"/>
-          </a:xfrm>
-          <a:prstGeom prst="rect">
-            <a:avLst/>
-          </a:prstGeom>
-        </p:spPr>
-      </p:pic>
-      <p:pic>
-        <p:nvPicPr>
-          <p:cNvPr id="55" name="Graphic 54" descr="Sleep with solid fill">
-            <a:extLst>
-              <a:ext uri="{FF2B5EF4-FFF2-40B4-BE49-F238E27FC236}">
-                <a16:creationId xmlns:a16="http://schemas.microsoft.com/office/drawing/2014/main" id="{AE93AA88-5FE7-A84B-8EF3-DD4F40DF687D}"/>
-              </a:ext>
-            </a:extLst>
-          </p:cNvPr>
-          <p:cNvPicPr>
-            <a:picLocks noChangeAspect="1"/>
-          </p:cNvPicPr>
-          <p:nvPr/>
-        </p:nvPicPr>
-        <p:blipFill>
-          <a:blip>
-            <a:extLst>
-              <a:ext uri="{96DAC541-7B7A-43D3-8B79-37D633B846F1}">
-                <asvg:svgBlip xmlns:asvg="http://schemas.microsoft.com/office/drawing/2016/SVG/main" r:embed="rId2"/>
-              </a:ext>
-            </a:extLst>
-          </a:blip>
-          <a:srcRect/>
-          <a:stretch/>
-        </p:blipFill>
-        <p:spPr>
-          <a:xfrm>
-            <a:off x="709596" y="1925641"/>
-            <a:ext cx="634696" cy="634696"/>
-          </a:xfrm>
-          <a:prstGeom prst="rect">
-            <a:avLst/>
-          </a:prstGeom>
-        </p:spPr>
-      </p:pic>
-      <p:pic>
-        <p:nvPicPr>
-          <p:cNvPr id="56" name="Graphic 55" descr="Sleep with solid fill">
-            <a:extLst>
-              <a:ext uri="{FF2B5EF4-FFF2-40B4-BE49-F238E27FC236}">
-                <a16:creationId xmlns:a16="http://schemas.microsoft.com/office/drawing/2014/main" id="{5934E941-0BE2-65FD-6BFE-D07642B55034}"/>
-              </a:ext>
-            </a:extLst>
-          </p:cNvPr>
-          <p:cNvPicPr>
-            <a:picLocks noChangeAspect="1"/>
-          </p:cNvPicPr>
-          <p:nvPr/>
-        </p:nvPicPr>
-        <p:blipFill>
-          <a:blip>
-            <a:extLst>
-              <a:ext uri="{96DAC541-7B7A-43D3-8B79-37D633B846F1}">
-                <asvg:svgBlip xmlns:asvg="http://schemas.microsoft.com/office/drawing/2016/SVG/main" r:embed="rId2"/>
-              </a:ext>
-            </a:extLst>
-          </a:blip>
-          <a:srcRect/>
-          <a:stretch/>
-        </p:blipFill>
-        <p:spPr>
-          <a:xfrm>
-            <a:off x="1775428" y="1925641"/>
-            <a:ext cx="634696" cy="634696"/>
-          </a:xfrm>
-          <a:prstGeom prst="rect">
-            <a:avLst/>
-          </a:prstGeom>
-        </p:spPr>
-      </p:pic>
-      <p:pic>
-        <p:nvPicPr>
-          <p:cNvPr id="57" name="Graphic 56" descr="Sleep with solid fill">
-            <a:extLst>
-              <a:ext uri="{FF2B5EF4-FFF2-40B4-BE49-F238E27FC236}">
-                <a16:creationId xmlns:a16="http://schemas.microsoft.com/office/drawing/2014/main" id="{FE3EE6B8-E09C-535D-5FD7-73FC869A5EC7}"/>
-              </a:ext>
-            </a:extLst>
-          </p:cNvPr>
-          <p:cNvPicPr>
-            <a:picLocks noChangeAspect="1"/>
-          </p:cNvPicPr>
-          <p:nvPr/>
-        </p:nvPicPr>
-        <p:blipFill>
-          <a:blip>
-            <a:extLst>
-              <a:ext uri="{96DAC541-7B7A-43D3-8B79-37D633B846F1}">
-                <asvg:svgBlip xmlns:asvg="http://schemas.microsoft.com/office/drawing/2016/SVG/main" r:embed="rId2"/>
-              </a:ext>
-            </a:extLst>
-          </a:blip>
-          <a:srcRect/>
-          <a:stretch/>
-        </p:blipFill>
-        <p:spPr>
-          <a:xfrm>
-            <a:off x="709596" y="2764730"/>
-            <a:ext cx="634696" cy="634696"/>
-          </a:xfrm>
-          <a:prstGeom prst="rect">
-            <a:avLst/>
-          </a:prstGeom>
-        </p:spPr>
-      </p:pic>
-      <p:pic>
-        <p:nvPicPr>
-          <p:cNvPr id="58" name="Graphic 57" descr="Sleep with solid fill">
-            <a:extLst>
-              <a:ext uri="{FF2B5EF4-FFF2-40B4-BE49-F238E27FC236}">
-                <a16:creationId xmlns:a16="http://schemas.microsoft.com/office/drawing/2014/main" id="{50E8B439-85FE-D665-AC20-81E9C6BA7353}"/>
-              </a:ext>
-            </a:extLst>
-          </p:cNvPr>
-          <p:cNvPicPr>
-            <a:picLocks noChangeAspect="1"/>
-          </p:cNvPicPr>
-          <p:nvPr/>
-        </p:nvPicPr>
-        <p:blipFill>
-          <a:blip>
-            <a:extLst>
-              <a:ext uri="{96DAC541-7B7A-43D3-8B79-37D633B846F1}">
-                <asvg:svgBlip xmlns:asvg="http://schemas.microsoft.com/office/drawing/2016/SVG/main" r:embed="rId2"/>
-              </a:ext>
-            </a:extLst>
-          </a:blip>
-          <a:srcRect/>
-          <a:stretch/>
-        </p:blipFill>
-        <p:spPr>
-          <a:xfrm>
-            <a:off x="1775428" y="2764730"/>
-            <a:ext cx="634696" cy="634696"/>
-          </a:xfrm>
-          <a:prstGeom prst="rect">
-            <a:avLst/>
-          </a:prstGeom>
-        </p:spPr>
-      </p:pic>
-      <p:pic>
-        <p:nvPicPr>
-          <p:cNvPr id="59" name="Graphic 58" descr="Sleep with solid fill">
-            <a:extLst>
-              <a:ext uri="{FF2B5EF4-FFF2-40B4-BE49-F238E27FC236}">
-                <a16:creationId xmlns:a16="http://schemas.microsoft.com/office/drawing/2014/main" id="{2B70B3A1-B1B2-909D-A783-66CDF98ADDDA}"/>
-              </a:ext>
-            </a:extLst>
-          </p:cNvPr>
-          <p:cNvPicPr>
-            <a:picLocks noChangeAspect="1"/>
-          </p:cNvPicPr>
-          <p:nvPr/>
-        </p:nvPicPr>
-        <p:blipFill>
-          <a:blip>
-            <a:extLst>
-              <a:ext uri="{96DAC541-7B7A-43D3-8B79-37D633B846F1}">
-                <asvg:svgBlip xmlns:asvg="http://schemas.microsoft.com/office/drawing/2016/SVG/main" r:embed="rId2"/>
-              </a:ext>
-            </a:extLst>
-          </a:blip>
-          <a:srcRect/>
-          <a:stretch/>
-        </p:blipFill>
-        <p:spPr>
-          <a:xfrm>
-            <a:off x="4256446" y="1265370"/>
-            <a:ext cx="634696" cy="634696"/>
-          </a:xfrm>
-          <a:prstGeom prst="rect">
-            <a:avLst/>
-          </a:prstGeom>
-        </p:spPr>
-      </p:pic>
-      <p:pic>
-        <p:nvPicPr>
-          <p:cNvPr id="60" name="Graphic 59" descr="Sleep with solid fill">
-            <a:extLst>
-              <a:ext uri="{FF2B5EF4-FFF2-40B4-BE49-F238E27FC236}">
-                <a16:creationId xmlns:a16="http://schemas.microsoft.com/office/drawing/2014/main" id="{D95F6D61-AA43-F992-CB00-A74820EA4194}"/>
-              </a:ext>
-            </a:extLst>
-          </p:cNvPr>
-          <p:cNvPicPr>
-            <a:picLocks noChangeAspect="1"/>
-          </p:cNvPicPr>
-          <p:nvPr/>
-        </p:nvPicPr>
-        <p:blipFill>
-          <a:blip>
-            <a:extLst>
-              <a:ext uri="{96DAC541-7B7A-43D3-8B79-37D633B846F1}">
-                <asvg:svgBlip xmlns:asvg="http://schemas.microsoft.com/office/drawing/2016/SVG/main" r:embed="rId2"/>
-              </a:ext>
-            </a:extLst>
-          </a:blip>
-          <a:srcRect/>
-          <a:stretch/>
-        </p:blipFill>
-        <p:spPr>
-          <a:xfrm>
-            <a:off x="7270380" y="1261784"/>
-            <a:ext cx="634696" cy="634696"/>
-          </a:xfrm>
-          <a:prstGeom prst="rect">
-            <a:avLst/>
-          </a:prstGeom>
-        </p:spPr>
-      </p:pic>
-      <p:pic>
-        <p:nvPicPr>
-          <p:cNvPr id="61" name="Graphic 60" descr="Sleep with solid fill">
-            <a:extLst>
-              <a:ext uri="{FF2B5EF4-FFF2-40B4-BE49-F238E27FC236}">
-                <a16:creationId xmlns:a16="http://schemas.microsoft.com/office/drawing/2014/main" id="{AC4B699B-1EB0-FD3E-EDE1-C7B19E53033D}"/>
-              </a:ext>
-            </a:extLst>
-          </p:cNvPr>
-          <p:cNvPicPr>
-            <a:picLocks noChangeAspect="1"/>
-          </p:cNvPicPr>
-          <p:nvPr/>
-        </p:nvPicPr>
-        <p:blipFill>
-          <a:blip>
-            <a:extLst>
-              <a:ext uri="{96DAC541-7B7A-43D3-8B79-37D633B846F1}">
-                <asvg:svgBlip xmlns:asvg="http://schemas.microsoft.com/office/drawing/2016/SVG/main" r:embed="rId2"/>
-              </a:ext>
-            </a:extLst>
-          </a:blip>
-          <a:srcRect/>
-          <a:stretch/>
-        </p:blipFill>
-        <p:spPr>
-          <a:xfrm>
-            <a:off x="10284314" y="1261784"/>
-            <a:ext cx="634696" cy="634696"/>
-          </a:xfrm>
-          <a:prstGeom prst="rect">
-            <a:avLst/>
-          </a:prstGeom>
-        </p:spPr>
-      </p:pic>
-      <p:pic>
-        <p:nvPicPr>
-          <p:cNvPr id="63" name="Graphic 62" descr="Sleep with solid fill">
-            <a:extLst>
-              <a:ext uri="{FF2B5EF4-FFF2-40B4-BE49-F238E27FC236}">
-                <a16:creationId xmlns:a16="http://schemas.microsoft.com/office/drawing/2014/main" id="{B8E2AE39-B58E-011E-1C50-05AD2C99B124}"/>
-              </a:ext>
-            </a:extLst>
-          </p:cNvPr>
-          <p:cNvPicPr>
-            <a:picLocks noChangeAspect="1"/>
-          </p:cNvPicPr>
-          <p:nvPr/>
-        </p:nvPicPr>
-        <p:blipFill>
-          <a:blip>
-            <a:extLst>
-              <a:ext uri="{96DAC541-7B7A-43D3-8B79-37D633B846F1}">
-                <asvg:svgBlip xmlns:asvg="http://schemas.microsoft.com/office/drawing/2016/SVG/main" r:embed="rId2"/>
-              </a:ext>
-            </a:extLst>
-          </a:blip>
-          <a:srcRect/>
-          <a:stretch/>
-        </p:blipFill>
-        <p:spPr>
-          <a:xfrm>
-            <a:off x="3723530" y="3030079"/>
-            <a:ext cx="634696" cy="634696"/>
-          </a:xfrm>
-          <a:prstGeom prst="rect">
-            <a:avLst/>
-          </a:prstGeom>
-        </p:spPr>
-      </p:pic>
-      <p:pic>
-        <p:nvPicPr>
-          <p:cNvPr id="64" name="Graphic 63" descr="Sleep with solid fill">
-            <a:extLst>
-              <a:ext uri="{FF2B5EF4-FFF2-40B4-BE49-F238E27FC236}">
-                <a16:creationId xmlns:a16="http://schemas.microsoft.com/office/drawing/2014/main" id="{1BA287FF-2D89-F29C-4811-7265ADB8A80F}"/>
-              </a:ext>
-            </a:extLst>
-          </p:cNvPr>
-          <p:cNvPicPr>
-            <a:picLocks noChangeAspect="1"/>
-          </p:cNvPicPr>
-          <p:nvPr/>
-        </p:nvPicPr>
-        <p:blipFill>
-          <a:blip>
-            <a:extLst>
-              <a:ext uri="{96DAC541-7B7A-43D3-8B79-37D633B846F1}">
-                <asvg:svgBlip xmlns:asvg="http://schemas.microsoft.com/office/drawing/2016/SVG/main" r:embed="rId2"/>
-              </a:ext>
-            </a:extLst>
-          </a:blip>
-          <a:srcRect/>
-          <a:stretch/>
-        </p:blipFill>
-        <p:spPr>
-          <a:xfrm>
-            <a:off x="4789362" y="3030079"/>
-            <a:ext cx="634696" cy="634696"/>
-          </a:xfrm>
-          <a:prstGeom prst="rect">
-            <a:avLst/>
-          </a:prstGeom>
-        </p:spPr>
-      </p:pic>
-      <p:pic>
-        <p:nvPicPr>
-          <p:cNvPr id="65" name="Graphic 64" descr="Sleep with solid fill">
-            <a:extLst>
-              <a:ext uri="{FF2B5EF4-FFF2-40B4-BE49-F238E27FC236}">
-                <a16:creationId xmlns:a16="http://schemas.microsoft.com/office/drawing/2014/main" id="{1DF27AE5-FD61-7D18-7E91-A0FCFDD1CF56}"/>
-              </a:ext>
-            </a:extLst>
-          </p:cNvPr>
-          <p:cNvPicPr>
-            <a:picLocks noChangeAspect="1"/>
-          </p:cNvPicPr>
-          <p:nvPr/>
-        </p:nvPicPr>
-        <p:blipFill>
-          <a:blip>
-            <a:extLst>
-              <a:ext uri="{96DAC541-7B7A-43D3-8B79-37D633B846F1}">
-                <asvg:svgBlip xmlns:asvg="http://schemas.microsoft.com/office/drawing/2016/SVG/main" r:embed="rId2"/>
-              </a:ext>
-            </a:extLst>
-          </a:blip>
-          <a:srcRect/>
-          <a:stretch/>
-        </p:blipFill>
-        <p:spPr>
-          <a:xfrm>
-            <a:off x="3723530" y="3869168"/>
-            <a:ext cx="634696" cy="634696"/>
-          </a:xfrm>
-          <a:prstGeom prst="rect">
-            <a:avLst/>
-          </a:prstGeom>
-        </p:spPr>
-      </p:pic>
-      <p:pic>
-        <p:nvPicPr>
-          <p:cNvPr id="66" name="Graphic 65" descr="Sleep with solid fill">
-            <a:extLst>
-              <a:ext uri="{FF2B5EF4-FFF2-40B4-BE49-F238E27FC236}">
-                <a16:creationId xmlns:a16="http://schemas.microsoft.com/office/drawing/2014/main" id="{3BB0E143-4233-B87F-F953-B50153B05652}"/>
-              </a:ext>
-            </a:extLst>
-          </p:cNvPr>
-          <p:cNvPicPr>
-            <a:picLocks noChangeAspect="1"/>
-          </p:cNvPicPr>
-          <p:nvPr/>
-        </p:nvPicPr>
-        <p:blipFill>
-          <a:blip>
-            <a:extLst>
-              <a:ext uri="{96DAC541-7B7A-43D3-8B79-37D633B846F1}">
-                <asvg:svgBlip xmlns:asvg="http://schemas.microsoft.com/office/drawing/2016/SVG/main" r:embed="rId2"/>
-              </a:ext>
-            </a:extLst>
-          </a:blip>
-          <a:srcRect/>
-          <a:stretch/>
-        </p:blipFill>
-        <p:spPr>
-          <a:xfrm>
-            <a:off x="4789362" y="3869168"/>
-            <a:ext cx="634696" cy="634696"/>
-          </a:xfrm>
-          <a:prstGeom prst="rect">
-            <a:avLst/>
-          </a:prstGeom>
-        </p:spPr>
-      </p:pic>
-      <p:pic>
-        <p:nvPicPr>
-          <p:cNvPr id="75" name="Graphic 74" descr="Sleep with solid fill">
-            <a:extLst>
-              <a:ext uri="{FF2B5EF4-FFF2-40B4-BE49-F238E27FC236}">
-                <a16:creationId xmlns:a16="http://schemas.microsoft.com/office/drawing/2014/main" id="{14385CE5-6CAE-EF3D-790F-0FA6584C0DFF}"/>
-              </a:ext>
-            </a:extLst>
-          </p:cNvPr>
-          <p:cNvPicPr>
-            <a:picLocks noChangeAspect="1"/>
-          </p:cNvPicPr>
-          <p:nvPr/>
-        </p:nvPicPr>
-        <p:blipFill>
-          <a:blip>
-            <a:extLst>
-              <a:ext uri="{96DAC541-7B7A-43D3-8B79-37D633B846F1}">
-                <asvg:svgBlip xmlns:asvg="http://schemas.microsoft.com/office/drawing/2016/SVG/main" r:embed="rId2"/>
-              </a:ext>
-            </a:extLst>
-          </a:blip>
-          <a:srcRect/>
-          <a:stretch/>
-        </p:blipFill>
-        <p:spPr>
-          <a:xfrm>
-            <a:off x="3723530" y="4708256"/>
-            <a:ext cx="634696" cy="634696"/>
-          </a:xfrm>
-          <a:prstGeom prst="rect">
-            <a:avLst/>
-          </a:prstGeom>
-        </p:spPr>
-      </p:pic>
-      <p:pic>
-        <p:nvPicPr>
-          <p:cNvPr id="76" name="Graphic 75" descr="Sleep with solid fill">
-            <a:extLst>
-              <a:ext uri="{FF2B5EF4-FFF2-40B4-BE49-F238E27FC236}">
-                <a16:creationId xmlns:a16="http://schemas.microsoft.com/office/drawing/2014/main" id="{BFE33B39-C141-DDB8-53B2-AC070118DECC}"/>
-              </a:ext>
-            </a:extLst>
-          </p:cNvPr>
-          <p:cNvPicPr>
-            <a:picLocks noChangeAspect="1"/>
-          </p:cNvPicPr>
-          <p:nvPr/>
-        </p:nvPicPr>
-        <p:blipFill>
-          <a:blip>
-            <a:extLst>
-              <a:ext uri="{96DAC541-7B7A-43D3-8B79-37D633B846F1}">
-                <asvg:svgBlip xmlns:asvg="http://schemas.microsoft.com/office/drawing/2016/SVG/main" r:embed="rId2"/>
-              </a:ext>
-            </a:extLst>
-          </a:blip>
-          <a:srcRect/>
-          <a:stretch/>
-        </p:blipFill>
-        <p:spPr>
-          <a:xfrm>
-            <a:off x="4789362" y="4708256"/>
-            <a:ext cx="634696" cy="634696"/>
-          </a:xfrm>
-          <a:prstGeom prst="rect">
-            <a:avLst/>
-          </a:prstGeom>
-        </p:spPr>
-      </p:pic>
-      <p:pic>
-        <p:nvPicPr>
-          <p:cNvPr id="77" name="Graphic 76" descr="Sleep with solid fill">
-            <a:extLst>
-              <a:ext uri="{FF2B5EF4-FFF2-40B4-BE49-F238E27FC236}">
-                <a16:creationId xmlns:a16="http://schemas.microsoft.com/office/drawing/2014/main" id="{A60ADB2D-DF81-42F4-0947-DBA4B9CC1F03}"/>
-              </a:ext>
-            </a:extLst>
-          </p:cNvPr>
-          <p:cNvPicPr>
-            <a:picLocks noChangeAspect="1"/>
-          </p:cNvPicPr>
-          <p:nvPr/>
-        </p:nvPicPr>
-        <p:blipFill>
-          <a:blip>
-            <a:extLst>
-              <a:ext uri="{96DAC541-7B7A-43D3-8B79-37D633B846F1}">
-                <asvg:svgBlip xmlns:asvg="http://schemas.microsoft.com/office/drawing/2016/SVG/main" r:embed="rId2"/>
-              </a:ext>
-            </a:extLst>
-          </a:blip>
-          <a:srcRect/>
-          <a:stretch/>
-        </p:blipFill>
-        <p:spPr>
-          <a:xfrm>
-            <a:off x="3723530" y="5547345"/>
-            <a:ext cx="634696" cy="634696"/>
-          </a:xfrm>
-          <a:prstGeom prst="rect">
-            <a:avLst/>
-          </a:prstGeom>
-        </p:spPr>
-      </p:pic>
-      <p:pic>
-        <p:nvPicPr>
-          <p:cNvPr id="78" name="Graphic 77" descr="Sleep with solid fill">
-            <a:extLst>
-              <a:ext uri="{FF2B5EF4-FFF2-40B4-BE49-F238E27FC236}">
-                <a16:creationId xmlns:a16="http://schemas.microsoft.com/office/drawing/2014/main" id="{4684E287-1BD1-73D2-19E3-D96DE3E3F336}"/>
-              </a:ext>
-            </a:extLst>
-          </p:cNvPr>
-          <p:cNvPicPr>
-            <a:picLocks noChangeAspect="1"/>
-          </p:cNvPicPr>
-          <p:nvPr/>
-        </p:nvPicPr>
-        <p:blipFill>
-          <a:blip>
-            <a:extLst>
-              <a:ext uri="{96DAC541-7B7A-43D3-8B79-37D633B846F1}">
-                <asvg:svgBlip xmlns:asvg="http://schemas.microsoft.com/office/drawing/2016/SVG/main" r:embed="rId2"/>
-              </a:ext>
-            </a:extLst>
-          </a:blip>
-          <a:srcRect/>
-          <a:stretch/>
-        </p:blipFill>
-        <p:spPr>
-          <a:xfrm>
-            <a:off x="4789362" y="5547345"/>
-            <a:ext cx="634696" cy="634696"/>
-          </a:xfrm>
-          <a:prstGeom prst="rect">
-            <a:avLst/>
-          </a:prstGeom>
-        </p:spPr>
-      </p:pic>
-      <p:pic>
-        <p:nvPicPr>
-          <p:cNvPr id="103" name="Graphic 102" descr="Sleep with solid fill">
-            <a:extLst>
-              <a:ext uri="{FF2B5EF4-FFF2-40B4-BE49-F238E27FC236}">
-                <a16:creationId xmlns:a16="http://schemas.microsoft.com/office/drawing/2014/main" id="{F3F2BA80-0346-263C-DE00-1C717BE9D7C6}"/>
-              </a:ext>
-            </a:extLst>
-          </p:cNvPr>
-          <p:cNvPicPr>
-            <a:picLocks noChangeAspect="1"/>
-          </p:cNvPicPr>
-          <p:nvPr/>
-        </p:nvPicPr>
-        <p:blipFill>
-          <a:blip>
-            <a:extLst>
-              <a:ext uri="{96DAC541-7B7A-43D3-8B79-37D633B846F1}">
-                <asvg:svgBlip xmlns:asvg="http://schemas.microsoft.com/office/drawing/2016/SVG/main" r:embed="rId2"/>
-              </a:ext>
-            </a:extLst>
-          </a:blip>
-          <a:srcRect/>
-          <a:stretch/>
-        </p:blipFill>
-        <p:spPr>
-          <a:xfrm>
-            <a:off x="9781876" y="2444684"/>
-            <a:ext cx="634696" cy="634696"/>
-          </a:xfrm>
-          <a:prstGeom prst="rect">
-            <a:avLst/>
-          </a:prstGeom>
-        </p:spPr>
-      </p:pic>
-      <p:pic>
-        <p:nvPicPr>
-          <p:cNvPr id="104" name="Graphic 103" descr="Sleep with solid fill">
-            <a:extLst>
-              <a:ext uri="{FF2B5EF4-FFF2-40B4-BE49-F238E27FC236}">
-                <a16:creationId xmlns:a16="http://schemas.microsoft.com/office/drawing/2014/main" id="{C744BE2E-4598-7EBC-A822-CBC8A91BC378}"/>
-              </a:ext>
-            </a:extLst>
-          </p:cNvPr>
-          <p:cNvPicPr>
-            <a:picLocks noChangeAspect="1"/>
-          </p:cNvPicPr>
-          <p:nvPr/>
-        </p:nvPicPr>
-        <p:blipFill>
-          <a:blip>
-            <a:extLst>
-              <a:ext uri="{96DAC541-7B7A-43D3-8B79-37D633B846F1}">
-                <asvg:svgBlip xmlns:asvg="http://schemas.microsoft.com/office/drawing/2016/SVG/main" r:embed="rId2"/>
-              </a:ext>
-            </a:extLst>
-          </a:blip>
-          <a:srcRect/>
-          <a:stretch/>
-        </p:blipFill>
-        <p:spPr>
-          <a:xfrm>
-            <a:off x="10847708" y="2444684"/>
-            <a:ext cx="634696" cy="634696"/>
-          </a:xfrm>
-          <a:prstGeom prst="rect">
-            <a:avLst/>
-          </a:prstGeom>
-        </p:spPr>
-      </p:pic>
-      <p:pic>
-        <p:nvPicPr>
-          <p:cNvPr id="105" name="Graphic 104" descr="Sleep with solid fill">
-            <a:extLst>
-              <a:ext uri="{FF2B5EF4-FFF2-40B4-BE49-F238E27FC236}">
-                <a16:creationId xmlns:a16="http://schemas.microsoft.com/office/drawing/2014/main" id="{9D572FB8-31AE-B9A7-B19F-5C5A0368717A}"/>
-              </a:ext>
-            </a:extLst>
-          </p:cNvPr>
-          <p:cNvPicPr>
-            <a:picLocks noChangeAspect="1"/>
-          </p:cNvPicPr>
-          <p:nvPr/>
-        </p:nvPicPr>
-        <p:blipFill>
-          <a:blip>
-            <a:extLst>
-              <a:ext uri="{96DAC541-7B7A-43D3-8B79-37D633B846F1}">
-                <asvg:svgBlip xmlns:asvg="http://schemas.microsoft.com/office/drawing/2016/SVG/main" r:embed="rId2"/>
-              </a:ext>
-            </a:extLst>
-          </a:blip>
-          <a:srcRect/>
-          <a:stretch/>
-        </p:blipFill>
-        <p:spPr>
-          <a:xfrm>
-            <a:off x="9781876" y="3283773"/>
-            <a:ext cx="634696" cy="634696"/>
-          </a:xfrm>
-          <a:prstGeom prst="rect">
-            <a:avLst/>
-          </a:prstGeom>
-        </p:spPr>
-      </p:pic>
-      <p:pic>
-        <p:nvPicPr>
-          <p:cNvPr id="106" name="Graphic 105" descr="Sleep with solid fill">
-            <a:extLst>
-              <a:ext uri="{FF2B5EF4-FFF2-40B4-BE49-F238E27FC236}">
-                <a16:creationId xmlns:a16="http://schemas.microsoft.com/office/drawing/2014/main" id="{4ACAD09A-895A-6293-F6E5-B647D16857FF}"/>
-              </a:ext>
-            </a:extLst>
-          </p:cNvPr>
-          <p:cNvPicPr>
-            <a:picLocks noChangeAspect="1"/>
-          </p:cNvPicPr>
-          <p:nvPr/>
-        </p:nvPicPr>
-        <p:blipFill>
-          <a:blip>
-            <a:extLst>
-              <a:ext uri="{96DAC541-7B7A-43D3-8B79-37D633B846F1}">
-                <asvg:svgBlip xmlns:asvg="http://schemas.microsoft.com/office/drawing/2016/SVG/main" r:embed="rId2"/>
-              </a:ext>
-            </a:extLst>
-          </a:blip>
-          <a:srcRect/>
-          <a:stretch/>
-        </p:blipFill>
-        <p:spPr>
-          <a:xfrm>
-            <a:off x="10847708" y="3283773"/>
-            <a:ext cx="634696" cy="634696"/>
-          </a:xfrm>
-          <a:prstGeom prst="rect">
-            <a:avLst/>
-          </a:prstGeom>
-        </p:spPr>
-      </p:pic>
-      <p:pic>
-        <p:nvPicPr>
-          <p:cNvPr id="107" name="Graphic 106" descr="Sleep with solid fill">
-            <a:extLst>
-              <a:ext uri="{FF2B5EF4-FFF2-40B4-BE49-F238E27FC236}">
-                <a16:creationId xmlns:a16="http://schemas.microsoft.com/office/drawing/2014/main" id="{03C4CFED-82F3-5A4E-9331-B982B1D146E5}"/>
-              </a:ext>
-            </a:extLst>
-          </p:cNvPr>
-          <p:cNvPicPr>
-            <a:picLocks noChangeAspect="1"/>
-          </p:cNvPicPr>
-          <p:nvPr/>
-        </p:nvPicPr>
-        <p:blipFill>
-          <a:blip>
-            <a:extLst>
-              <a:ext uri="{96DAC541-7B7A-43D3-8B79-37D633B846F1}">
-                <asvg:svgBlip xmlns:asvg="http://schemas.microsoft.com/office/drawing/2016/SVG/main" r:embed="rId2"/>
-              </a:ext>
-            </a:extLst>
-          </a:blip>
-          <a:srcRect/>
-          <a:stretch/>
-        </p:blipFill>
-        <p:spPr>
-          <a:xfrm>
-            <a:off x="9781876" y="4122861"/>
-            <a:ext cx="634696" cy="634696"/>
-          </a:xfrm>
-          <a:prstGeom prst="rect">
-            <a:avLst/>
-          </a:prstGeom>
-        </p:spPr>
-      </p:pic>
-      <p:pic>
-        <p:nvPicPr>
-          <p:cNvPr id="108" name="Graphic 107" descr="Sleep with solid fill">
-            <a:extLst>
-              <a:ext uri="{FF2B5EF4-FFF2-40B4-BE49-F238E27FC236}">
-                <a16:creationId xmlns:a16="http://schemas.microsoft.com/office/drawing/2014/main" id="{C617B602-9E9F-6CE4-A7CB-DBBC60A0D87F}"/>
-              </a:ext>
-            </a:extLst>
-          </p:cNvPr>
-          <p:cNvPicPr>
-            <a:picLocks noChangeAspect="1"/>
-          </p:cNvPicPr>
-          <p:nvPr/>
-        </p:nvPicPr>
-        <p:blipFill>
-          <a:blip>
-            <a:extLst>
-              <a:ext uri="{96DAC541-7B7A-43D3-8B79-37D633B846F1}">
-                <asvg:svgBlip xmlns:asvg="http://schemas.microsoft.com/office/drawing/2016/SVG/main" r:embed="rId2"/>
-              </a:ext>
-            </a:extLst>
-          </a:blip>
-          <a:srcRect/>
-          <a:stretch/>
-        </p:blipFill>
-        <p:spPr>
-          <a:xfrm>
-            <a:off x="10847708" y="4122861"/>
-            <a:ext cx="634696" cy="634696"/>
-          </a:xfrm>
-          <a:prstGeom prst="rect">
-            <a:avLst/>
-          </a:prstGeom>
-        </p:spPr>
-      </p:pic>
-      <p:pic>
-        <p:nvPicPr>
-          <p:cNvPr id="109" name="Graphic 108" descr="Sleep with solid fill">
-            <a:extLst>
-              <a:ext uri="{FF2B5EF4-FFF2-40B4-BE49-F238E27FC236}">
-                <a16:creationId xmlns:a16="http://schemas.microsoft.com/office/drawing/2014/main" id="{78BE82EC-111C-A974-F5A2-3976C9CEB1A2}"/>
-              </a:ext>
-            </a:extLst>
-          </p:cNvPr>
-          <p:cNvPicPr>
-            <a:picLocks noChangeAspect="1"/>
-          </p:cNvPicPr>
-          <p:nvPr/>
-        </p:nvPicPr>
-        <p:blipFill>
-          <a:blip>
-            <a:extLst>
-              <a:ext uri="{96DAC541-7B7A-43D3-8B79-37D633B846F1}">
-                <asvg:svgBlip xmlns:asvg="http://schemas.microsoft.com/office/drawing/2016/SVG/main" r:embed="rId2"/>
-              </a:ext>
-            </a:extLst>
-          </a:blip>
-          <a:srcRect/>
-          <a:stretch/>
-        </p:blipFill>
-        <p:spPr>
-          <a:xfrm>
-            <a:off x="9781876" y="4961950"/>
-            <a:ext cx="634696" cy="634696"/>
-          </a:xfrm>
-          <a:prstGeom prst="rect">
-            <a:avLst/>
-          </a:prstGeom>
-        </p:spPr>
-      </p:pic>
-      <p:pic>
-        <p:nvPicPr>
-          <p:cNvPr id="110" name="Graphic 109" descr="Sleep with solid fill">
-            <a:extLst>
-              <a:ext uri="{FF2B5EF4-FFF2-40B4-BE49-F238E27FC236}">
-                <a16:creationId xmlns:a16="http://schemas.microsoft.com/office/drawing/2014/main" id="{214902D7-E366-BF7C-9866-BFB16C5D854B}"/>
-              </a:ext>
-            </a:extLst>
-          </p:cNvPr>
-          <p:cNvPicPr>
-            <a:picLocks noChangeAspect="1"/>
-          </p:cNvPicPr>
-          <p:nvPr/>
-        </p:nvPicPr>
-        <p:blipFill>
-          <a:blip>
-            <a:extLst>
-              <a:ext uri="{96DAC541-7B7A-43D3-8B79-37D633B846F1}">
-                <asvg:svgBlip xmlns:asvg="http://schemas.microsoft.com/office/drawing/2016/SVG/main" r:embed="rId2"/>
-              </a:ext>
-            </a:extLst>
-          </a:blip>
-          <a:srcRect/>
-          <a:stretch/>
-        </p:blipFill>
-        <p:spPr>
-          <a:xfrm>
-            <a:off x="10847708" y="4961950"/>
-            <a:ext cx="634696" cy="634696"/>
-          </a:xfrm>
-          <a:prstGeom prst="rect">
-            <a:avLst/>
-          </a:prstGeom>
-        </p:spPr>
-      </p:pic>
-      <p:pic>
-        <p:nvPicPr>
-          <p:cNvPr id="111" name="Graphic 110" descr="Sleep with solid fill">
-            <a:extLst>
-              <a:ext uri="{FF2B5EF4-FFF2-40B4-BE49-F238E27FC236}">
-                <a16:creationId xmlns:a16="http://schemas.microsoft.com/office/drawing/2014/main" id="{9C91A0BD-49B0-5FBB-C169-F67AC835BDAE}"/>
-              </a:ext>
-            </a:extLst>
-          </p:cNvPr>
-          <p:cNvPicPr>
-            <a:picLocks noChangeAspect="1"/>
-          </p:cNvPicPr>
-          <p:nvPr/>
-        </p:nvPicPr>
-        <p:blipFill>
-          <a:blip>
-            <a:extLst>
-              <a:ext uri="{96DAC541-7B7A-43D3-8B79-37D633B846F1}">
-                <asvg:svgBlip xmlns:asvg="http://schemas.microsoft.com/office/drawing/2016/SVG/main" r:embed="rId2"/>
-              </a:ext>
-            </a:extLst>
-          </a:blip>
-          <a:srcRect/>
-          <a:stretch/>
-        </p:blipFill>
-        <p:spPr>
-          <a:xfrm>
-            <a:off x="6737464" y="2395383"/>
-            <a:ext cx="634696" cy="634696"/>
-          </a:xfrm>
-          <a:prstGeom prst="rect">
-            <a:avLst/>
-          </a:prstGeom>
-        </p:spPr>
-      </p:pic>
-      <p:pic>
-        <p:nvPicPr>
-          <p:cNvPr id="112" name="Graphic 111" descr="Sleep with solid fill">
-            <a:extLst>
-              <a:ext uri="{FF2B5EF4-FFF2-40B4-BE49-F238E27FC236}">
-                <a16:creationId xmlns:a16="http://schemas.microsoft.com/office/drawing/2014/main" id="{37523937-B4F4-ABE8-9034-FDA24654743B}"/>
-              </a:ext>
-            </a:extLst>
-          </p:cNvPr>
-          <p:cNvPicPr>
-            <a:picLocks noChangeAspect="1"/>
-          </p:cNvPicPr>
-          <p:nvPr/>
-        </p:nvPicPr>
-        <p:blipFill>
-          <a:blip>
-            <a:extLst>
-              <a:ext uri="{96DAC541-7B7A-43D3-8B79-37D633B846F1}">
-                <asvg:svgBlip xmlns:asvg="http://schemas.microsoft.com/office/drawing/2016/SVG/main" r:embed="rId2"/>
-              </a:ext>
-            </a:extLst>
-          </a:blip>
-          <a:srcRect/>
-          <a:stretch/>
-        </p:blipFill>
-        <p:spPr>
-          <a:xfrm>
-            <a:off x="7803296" y="2395383"/>
-            <a:ext cx="634696" cy="634696"/>
-          </a:xfrm>
-          <a:prstGeom prst="rect">
-            <a:avLst/>
-          </a:prstGeom>
-        </p:spPr>
-      </p:pic>
-      <p:pic>
-        <p:nvPicPr>
-          <p:cNvPr id="113" name="Graphic 112" descr="Sleep with solid fill">
-            <a:extLst>
-              <a:ext uri="{FF2B5EF4-FFF2-40B4-BE49-F238E27FC236}">
-                <a16:creationId xmlns:a16="http://schemas.microsoft.com/office/drawing/2014/main" id="{D68E1448-7789-7B20-612A-9F4DB3BD8F5D}"/>
-              </a:ext>
-            </a:extLst>
-          </p:cNvPr>
-          <p:cNvPicPr>
-            <a:picLocks noChangeAspect="1"/>
-          </p:cNvPicPr>
-          <p:nvPr/>
-        </p:nvPicPr>
-        <p:blipFill>
-          <a:blip>
-            <a:extLst>
-              <a:ext uri="{96DAC541-7B7A-43D3-8B79-37D633B846F1}">
-                <asvg:svgBlip xmlns:asvg="http://schemas.microsoft.com/office/drawing/2016/SVG/main" r:embed="rId2"/>
-              </a:ext>
-            </a:extLst>
-          </a:blip>
-          <a:srcRect/>
-          <a:stretch/>
-        </p:blipFill>
-        <p:spPr>
-          <a:xfrm>
-            <a:off x="6737464" y="3234472"/>
-            <a:ext cx="634696" cy="634696"/>
-          </a:xfrm>
-          <a:prstGeom prst="rect">
-            <a:avLst/>
-          </a:prstGeom>
-        </p:spPr>
-      </p:pic>
-      <p:pic>
-        <p:nvPicPr>
-          <p:cNvPr id="114" name="Graphic 113" descr="Sleep with solid fill">
-            <a:extLst>
-              <a:ext uri="{FF2B5EF4-FFF2-40B4-BE49-F238E27FC236}">
-                <a16:creationId xmlns:a16="http://schemas.microsoft.com/office/drawing/2014/main" id="{4141B252-B1AE-1D46-F74E-9913BF262908}"/>
-              </a:ext>
-            </a:extLst>
-          </p:cNvPr>
-          <p:cNvPicPr>
-            <a:picLocks noChangeAspect="1"/>
-          </p:cNvPicPr>
-          <p:nvPr/>
-        </p:nvPicPr>
-        <p:blipFill>
-          <a:blip>
-            <a:extLst>
-              <a:ext uri="{96DAC541-7B7A-43D3-8B79-37D633B846F1}">
-                <asvg:svgBlip xmlns:asvg="http://schemas.microsoft.com/office/drawing/2016/SVG/main" r:embed="rId2"/>
-              </a:ext>
-            </a:extLst>
-          </a:blip>
-          <a:srcRect/>
-          <a:stretch/>
-        </p:blipFill>
-        <p:spPr>
-          <a:xfrm>
-            <a:off x="7803296" y="3234472"/>
-            <a:ext cx="634696" cy="634696"/>
-          </a:xfrm>
-          <a:prstGeom prst="rect">
-            <a:avLst/>
-          </a:prstGeom>
-        </p:spPr>
-      </p:pic>
-      <p:pic>
-        <p:nvPicPr>
-          <p:cNvPr id="115" name="Graphic 114" descr="Sleep with solid fill">
-            <a:extLst>
-              <a:ext uri="{FF2B5EF4-FFF2-40B4-BE49-F238E27FC236}">
-                <a16:creationId xmlns:a16="http://schemas.microsoft.com/office/drawing/2014/main" id="{3144BFB6-1B0E-D445-BB23-C9FF85111C29}"/>
-              </a:ext>
-            </a:extLst>
-          </p:cNvPr>
-          <p:cNvPicPr>
-            <a:picLocks noChangeAspect="1"/>
-          </p:cNvPicPr>
-          <p:nvPr/>
-        </p:nvPicPr>
-        <p:blipFill>
-          <a:blip>
-            <a:extLst>
-              <a:ext uri="{96DAC541-7B7A-43D3-8B79-37D633B846F1}">
-                <asvg:svgBlip xmlns:asvg="http://schemas.microsoft.com/office/drawing/2016/SVG/main" r:embed="rId2"/>
-              </a:ext>
-            </a:extLst>
-          </a:blip>
-          <a:srcRect/>
-          <a:stretch/>
-        </p:blipFill>
-        <p:spPr>
-          <a:xfrm>
-            <a:off x="6737464" y="4073560"/>
-            <a:ext cx="634696" cy="634696"/>
-          </a:xfrm>
-          <a:prstGeom prst="rect">
-            <a:avLst/>
-          </a:prstGeom>
-        </p:spPr>
-      </p:pic>
-      <p:pic>
-        <p:nvPicPr>
-          <p:cNvPr id="116" name="Graphic 115" descr="Sleep with solid fill">
-            <a:extLst>
-              <a:ext uri="{FF2B5EF4-FFF2-40B4-BE49-F238E27FC236}">
-                <a16:creationId xmlns:a16="http://schemas.microsoft.com/office/drawing/2014/main" id="{75324D9F-76A6-A02C-F6B6-E6CDF3AB9185}"/>
-              </a:ext>
-            </a:extLst>
-          </p:cNvPr>
-          <p:cNvPicPr>
-            <a:picLocks noChangeAspect="1"/>
-          </p:cNvPicPr>
-          <p:nvPr/>
-        </p:nvPicPr>
-        <p:blipFill>
-          <a:blip>
-            <a:extLst>
-              <a:ext uri="{96DAC541-7B7A-43D3-8B79-37D633B846F1}">
-                <asvg:svgBlip xmlns:asvg="http://schemas.microsoft.com/office/drawing/2016/SVG/main" r:embed="rId2"/>
-              </a:ext>
-            </a:extLst>
-          </a:blip>
-          <a:srcRect/>
-          <a:stretch/>
-        </p:blipFill>
-        <p:spPr>
-          <a:xfrm>
-            <a:off x="7803296" y="4073560"/>
-            <a:ext cx="634696" cy="634696"/>
-          </a:xfrm>
-          <a:prstGeom prst="rect">
-            <a:avLst/>
-          </a:prstGeom>
-        </p:spPr>
-      </p:pic>
-      <p:pic>
-        <p:nvPicPr>
-          <p:cNvPr id="117" name="Graphic 116" descr="Sleep with solid fill">
-            <a:extLst>
-              <a:ext uri="{FF2B5EF4-FFF2-40B4-BE49-F238E27FC236}">
-                <a16:creationId xmlns:a16="http://schemas.microsoft.com/office/drawing/2014/main" id="{55C6267F-A4C7-4B47-6E5E-425C50DC5CF6}"/>
-              </a:ext>
-            </a:extLst>
-          </p:cNvPr>
-          <p:cNvPicPr>
-            <a:picLocks noChangeAspect="1"/>
-          </p:cNvPicPr>
-          <p:nvPr/>
-        </p:nvPicPr>
-        <p:blipFill>
-          <a:blip>
-            <a:extLst>
-              <a:ext uri="{96DAC541-7B7A-43D3-8B79-37D633B846F1}">
-                <asvg:svgBlip xmlns:asvg="http://schemas.microsoft.com/office/drawing/2016/SVG/main" r:embed="rId2"/>
-              </a:ext>
-            </a:extLst>
-          </a:blip>
-          <a:srcRect/>
-          <a:stretch/>
-        </p:blipFill>
-        <p:spPr>
-          <a:xfrm>
-            <a:off x="7232534" y="4912649"/>
-            <a:ext cx="634696" cy="634696"/>
-          </a:xfrm>
-          <a:prstGeom prst="rect">
-            <a:avLst/>
-          </a:prstGeom>
-        </p:spPr>
-      </p:pic>
-      <p:cxnSp>
-        <p:nvCxnSpPr>
-          <p:cNvPr id="141" name="Straight Connector 140">
-            <a:extLst>
-              <a:ext uri="{FF2B5EF4-FFF2-40B4-BE49-F238E27FC236}">
-                <a16:creationId xmlns:a16="http://schemas.microsoft.com/office/drawing/2014/main" id="{F85ED1AE-129F-F15E-72DA-824C1F89B163}"/>
-              </a:ext>
-            </a:extLst>
-          </p:cNvPr>
-          <p:cNvCxnSpPr/>
-          <p:nvPr/>
-        </p:nvCxnSpPr>
-        <p:spPr>
-          <a:xfrm>
-            <a:off x="3239846" y="2754416"/>
-            <a:ext cx="2667896" cy="0"/>
-          </a:xfrm>
-          <a:prstGeom prst="line">
-            <a:avLst/>
-          </a:prstGeom>
-          <a:ln w="34925">
-            <a:solidFill>
-              <a:schemeClr val="tx1"/>
-            </a:solidFill>
-            <a:prstDash val="dash"/>
-          </a:ln>
-        </p:spPr>
-        <p:style>
-          <a:lnRef idx="2">
-            <a:schemeClr val="accent1"/>
-          </a:lnRef>
-          <a:fillRef idx="0">
-            <a:schemeClr val="accent1"/>
-          </a:fillRef>
-          <a:effectRef idx="1">
-            <a:schemeClr val="accent1"/>
-          </a:effectRef>
-          <a:fontRef idx="minor">
-            <a:schemeClr val="tx1"/>
-          </a:fontRef>
-        </p:style>
-      </p:cxnSp>
-      <p:pic>
-        <p:nvPicPr>
-          <p:cNvPr id="142" name="Graphic 141" descr="Sleep with solid fill">
-            <a:extLst>
-              <a:ext uri="{FF2B5EF4-FFF2-40B4-BE49-F238E27FC236}">
-                <a16:creationId xmlns:a16="http://schemas.microsoft.com/office/drawing/2014/main" id="{5EE19132-F4E8-A5E2-7569-6E627930A5F7}"/>
-              </a:ext>
-            </a:extLst>
-          </p:cNvPr>
-          <p:cNvPicPr>
-            <a:picLocks noChangeAspect="1"/>
-          </p:cNvPicPr>
-          <p:nvPr/>
-        </p:nvPicPr>
-        <p:blipFill>
-          <a:blip>
-            <a:extLst>
-              <a:ext uri="{96DAC541-7B7A-43D3-8B79-37D633B846F1}">
-                <asvg:svgBlip xmlns:asvg="http://schemas.microsoft.com/office/drawing/2016/SVG/main" r:embed="rId2"/>
-              </a:ext>
-            </a:extLst>
-          </a:blip>
-          <a:srcRect/>
-          <a:stretch/>
-        </p:blipFill>
-        <p:spPr>
-          <a:xfrm>
-            <a:off x="4256446" y="2056368"/>
-            <a:ext cx="634696" cy="634696"/>
-          </a:xfrm>
-          <a:prstGeom prst="rect">
-            <a:avLst/>
-          </a:prstGeom>
-        </p:spPr>
-      </p:pic>
-      <p:sp>
-        <p:nvSpPr>
-          <p:cNvPr id="207" name="Freeform 206">
-            <a:extLst>
-              <a:ext uri="{FF2B5EF4-FFF2-40B4-BE49-F238E27FC236}">
-                <a16:creationId xmlns:a16="http://schemas.microsoft.com/office/drawing/2014/main" id="{9F2104EA-5DE6-F0C6-740F-EE8520EFB8BF}"/>
-              </a:ext>
-            </a:extLst>
-          </p:cNvPr>
-          <p:cNvSpPr/>
-          <p:nvPr/>
-        </p:nvSpPr>
-        <p:spPr>
-          <a:xfrm>
-            <a:off x="4573794" y="5547344"/>
-            <a:ext cx="1117001" cy="634696"/>
-          </a:xfrm>
-          <a:custGeom>
-            <a:avLst/>
-            <a:gdLst>
-              <a:gd name="csX0" fmla="*/ 563405 w 1117001"/>
-              <a:gd name="csY0" fmla="*/ 334849 h 634696"/>
-              <a:gd name="csX1" fmla="*/ 384722 w 1117001"/>
-              <a:gd name="csY1" fmla="*/ 429950 h 634696"/>
-              <a:gd name="csX2" fmla="*/ 576560 w 1117001"/>
-              <a:gd name="csY2" fmla="*/ 530838 h 634696"/>
-              <a:gd name="csX3" fmla="*/ 755242 w 1117001"/>
-              <a:gd name="csY3" fmla="*/ 435737 h 634696"/>
-              <a:gd name="csX4" fmla="*/ 786557 w 1117001"/>
-              <a:gd name="csY4" fmla="*/ 216082 h 634696"/>
-              <a:gd name="csX5" fmla="*/ 612223 w 1117001"/>
-              <a:gd name="csY5" fmla="*/ 308867 h 634696"/>
-              <a:gd name="csX6" fmla="*/ 804060 w 1117001"/>
-              <a:gd name="csY6" fmla="*/ 409755 h 634696"/>
-              <a:gd name="csX7" fmla="*/ 978394 w 1117001"/>
-              <a:gd name="csY7" fmla="*/ 316969 h 634696"/>
-              <a:gd name="csX8" fmla="*/ 308326 w 1117001"/>
-              <a:gd name="csY8" fmla="*/ 200703 h 634696"/>
-              <a:gd name="csX9" fmla="*/ 129644 w 1117001"/>
-              <a:gd name="csY9" fmla="*/ 295803 h 634696"/>
-              <a:gd name="csX10" fmla="*/ 335776 w 1117001"/>
-              <a:gd name="csY10" fmla="*/ 404209 h 634696"/>
-              <a:gd name="csX11" fmla="*/ 514459 w 1117001"/>
-              <a:gd name="csY11" fmla="*/ 309108 h 634696"/>
-              <a:gd name="csX12" fmla="*/ 531478 w 1117001"/>
-              <a:gd name="csY12" fmla="*/ 81935 h 634696"/>
-              <a:gd name="csX13" fmla="*/ 357145 w 1117001"/>
-              <a:gd name="csY13" fmla="*/ 174721 h 634696"/>
-              <a:gd name="csX14" fmla="*/ 563277 w 1117001"/>
-              <a:gd name="csY14" fmla="*/ 283126 h 634696"/>
-              <a:gd name="csX15" fmla="*/ 737611 w 1117001"/>
-              <a:gd name="csY15" fmla="*/ 190341 h 634696"/>
-              <a:gd name="csX16" fmla="*/ 0 w 1117001"/>
-              <a:gd name="csY16" fmla="*/ 0 h 634696"/>
-              <a:gd name="csX17" fmla="*/ 24916 w 1117001"/>
-              <a:gd name="csY17" fmla="*/ 0 h 634696"/>
-              <a:gd name="csX18" fmla="*/ 69966 w 1117001"/>
-              <a:gd name="csY18" fmla="*/ 23692 h 634696"/>
-              <a:gd name="csX19" fmla="*/ 114480 w 1117001"/>
-              <a:gd name="csY19" fmla="*/ 0 h 634696"/>
-              <a:gd name="csX20" fmla="*/ 211790 w 1117001"/>
-              <a:gd name="csY20" fmla="*/ 0 h 634696"/>
-              <a:gd name="csX21" fmla="*/ 118911 w 1117001"/>
-              <a:gd name="csY21" fmla="*/ 49432 h 634696"/>
-              <a:gd name="csX22" fmla="*/ 308199 w 1117001"/>
-              <a:gd name="csY22" fmla="*/ 148980 h 634696"/>
-              <a:gd name="csX23" fmla="*/ 482532 w 1117001"/>
-              <a:gd name="csY23" fmla="*/ 56194 h 634696"/>
-              <a:gd name="csX24" fmla="*/ 375680 w 1117001"/>
-              <a:gd name="csY24" fmla="*/ 0 h 634696"/>
-              <a:gd name="csX25" fmla="*/ 473903 w 1117001"/>
-              <a:gd name="csY25" fmla="*/ 0 h 634696"/>
-              <a:gd name="csX26" fmla="*/ 531351 w 1117001"/>
-              <a:gd name="csY26" fmla="*/ 30212 h 634696"/>
-              <a:gd name="csX27" fmla="*/ 588116 w 1117001"/>
-              <a:gd name="csY27" fmla="*/ 0 h 634696"/>
-              <a:gd name="csX28" fmla="*/ 685424 w 1117001"/>
-              <a:gd name="csY28" fmla="*/ 0 h 634696"/>
-              <a:gd name="csX29" fmla="*/ 580296 w 1117001"/>
-              <a:gd name="csY29" fmla="*/ 55952 h 634696"/>
-              <a:gd name="csX30" fmla="*/ 786428 w 1117001"/>
-              <a:gd name="csY30" fmla="*/ 164358 h 634696"/>
-              <a:gd name="csX31" fmla="*/ 948253 w 1117001"/>
-              <a:gd name="csY31" fmla="*/ 78231 h 634696"/>
-              <a:gd name="csX32" fmla="*/ 799496 w 1117001"/>
-              <a:gd name="csY32" fmla="*/ 0 h 634696"/>
-              <a:gd name="csX33" fmla="*/ 897720 w 1117001"/>
-              <a:gd name="csY33" fmla="*/ 0 h 634696"/>
-              <a:gd name="csX34" fmla="*/ 997070 w 1117001"/>
-              <a:gd name="csY34" fmla="*/ 52249 h 634696"/>
-              <a:gd name="csX35" fmla="*/ 1095240 w 1117001"/>
-              <a:gd name="csY35" fmla="*/ 0 h 634696"/>
-              <a:gd name="csX36" fmla="*/ 1117001 w 1117001"/>
-              <a:gd name="csY36" fmla="*/ 0 h 634696"/>
-              <a:gd name="csX37" fmla="*/ 1117001 w 1117001"/>
-              <a:gd name="csY37" fmla="*/ 40209 h 634696"/>
-              <a:gd name="csX38" fmla="*/ 1046016 w 1117001"/>
-              <a:gd name="csY38" fmla="*/ 77990 h 634696"/>
-              <a:gd name="csX39" fmla="*/ 1117001 w 1117001"/>
-              <a:gd name="csY39" fmla="*/ 115321 h 634696"/>
-              <a:gd name="csX40" fmla="*/ 1117001 w 1117001"/>
-              <a:gd name="csY40" fmla="*/ 166977 h 634696"/>
-              <a:gd name="csX41" fmla="*/ 997198 w 1117001"/>
-              <a:gd name="csY41" fmla="*/ 103972 h 634696"/>
-              <a:gd name="csX42" fmla="*/ 835374 w 1117001"/>
-              <a:gd name="csY42" fmla="*/ 190099 h 634696"/>
-              <a:gd name="csX43" fmla="*/ 1027212 w 1117001"/>
-              <a:gd name="csY43" fmla="*/ 290987 h 634696"/>
-              <a:gd name="csX44" fmla="*/ 1117001 w 1117001"/>
-              <a:gd name="csY44" fmla="*/ 243199 h 634696"/>
-              <a:gd name="csX45" fmla="*/ 1117001 w 1117001"/>
-              <a:gd name="csY45" fmla="*/ 294989 h 634696"/>
-              <a:gd name="csX46" fmla="*/ 1076157 w 1117001"/>
-              <a:gd name="csY46" fmla="*/ 316728 h 634696"/>
-              <a:gd name="csX47" fmla="*/ 1117001 w 1117001"/>
-              <a:gd name="csY47" fmla="*/ 338208 h 634696"/>
-              <a:gd name="csX48" fmla="*/ 1117001 w 1117001"/>
-              <a:gd name="csY48" fmla="*/ 389864 h 634696"/>
-              <a:gd name="csX49" fmla="*/ 1027340 w 1117001"/>
-              <a:gd name="csY49" fmla="*/ 342710 h 634696"/>
-              <a:gd name="csX50" fmla="*/ 853006 w 1117001"/>
-              <a:gd name="csY50" fmla="*/ 435496 h 634696"/>
-              <a:gd name="csX51" fmla="*/ 1046510 w 1117001"/>
-              <a:gd name="csY51" fmla="*/ 537261 h 634696"/>
-              <a:gd name="csX52" fmla="*/ 1117001 w 1117001"/>
-              <a:gd name="csY52" fmla="*/ 499743 h 634696"/>
-              <a:gd name="csX53" fmla="*/ 1117001 w 1117001"/>
-              <a:gd name="csY53" fmla="*/ 551534 h 634696"/>
-              <a:gd name="csX54" fmla="*/ 1095456 w 1117001"/>
-              <a:gd name="csY54" fmla="*/ 563001 h 634696"/>
-              <a:gd name="csX55" fmla="*/ 1117001 w 1117001"/>
-              <a:gd name="csY55" fmla="*/ 574332 h 634696"/>
-              <a:gd name="csX56" fmla="*/ 1117001 w 1117001"/>
-              <a:gd name="csY56" fmla="*/ 625988 h 634696"/>
-              <a:gd name="csX57" fmla="*/ 1046638 w 1117001"/>
-              <a:gd name="csY57" fmla="*/ 588984 h 634696"/>
-              <a:gd name="csX58" fmla="*/ 960749 w 1117001"/>
-              <a:gd name="csY58" fmla="*/ 634696 h 634696"/>
-              <a:gd name="csX59" fmla="*/ 863439 w 1117001"/>
-              <a:gd name="csY59" fmla="*/ 634696 h 634696"/>
-              <a:gd name="csX60" fmla="*/ 997693 w 1117001"/>
-              <a:gd name="csY60" fmla="*/ 563243 h 634696"/>
-              <a:gd name="csX61" fmla="*/ 804188 w 1117001"/>
-              <a:gd name="csY61" fmla="*/ 461478 h 634696"/>
-              <a:gd name="csX62" fmla="*/ 625505 w 1117001"/>
-              <a:gd name="csY62" fmla="*/ 556578 h 634696"/>
-              <a:gd name="csX63" fmla="*/ 774045 w 1117001"/>
-              <a:gd name="csY63" fmla="*/ 634696 h 634696"/>
-              <a:gd name="csX64" fmla="*/ 675822 w 1117001"/>
-              <a:gd name="csY64" fmla="*/ 634696 h 634696"/>
-              <a:gd name="csX65" fmla="*/ 576687 w 1117001"/>
-              <a:gd name="csY65" fmla="*/ 582560 h 634696"/>
-              <a:gd name="csX66" fmla="*/ 478730 w 1117001"/>
-              <a:gd name="csY66" fmla="*/ 634696 h 634696"/>
-              <a:gd name="csX67" fmla="*/ 381420 w 1117001"/>
-              <a:gd name="csY67" fmla="*/ 634696 h 634696"/>
-              <a:gd name="csX68" fmla="*/ 527741 w 1117001"/>
-              <a:gd name="csY68" fmla="*/ 556820 h 634696"/>
-              <a:gd name="csX69" fmla="*/ 335904 w 1117001"/>
-              <a:gd name="csY69" fmla="*/ 455932 h 634696"/>
-              <a:gd name="csX70" fmla="*/ 166829 w 1117001"/>
-              <a:gd name="csY70" fmla="*/ 545919 h 634696"/>
-              <a:gd name="csX71" fmla="*/ 335639 w 1117001"/>
-              <a:gd name="csY71" fmla="*/ 634696 h 634696"/>
-              <a:gd name="csX72" fmla="*/ 237416 w 1117001"/>
-              <a:gd name="csY72" fmla="*/ 634696 h 634696"/>
-              <a:gd name="csX73" fmla="*/ 118011 w 1117001"/>
-              <a:gd name="csY73" fmla="*/ 571901 h 634696"/>
-              <a:gd name="csX74" fmla="*/ 26 w 1117001"/>
-              <a:gd name="csY74" fmla="*/ 634696 h 634696"/>
-              <a:gd name="csX75" fmla="*/ 0 w 1117001"/>
-              <a:gd name="csY75" fmla="*/ 634696 h 634696"/>
-              <a:gd name="csX76" fmla="*/ 0 w 1117001"/>
-              <a:gd name="csY76" fmla="*/ 582919 h 634696"/>
-              <a:gd name="csX77" fmla="*/ 69066 w 1117001"/>
-              <a:gd name="csY77" fmla="*/ 546160 h 634696"/>
-              <a:gd name="csX78" fmla="*/ 0 w 1117001"/>
-              <a:gd name="csY78" fmla="*/ 509838 h 634696"/>
-              <a:gd name="csX79" fmla="*/ 0 w 1117001"/>
-              <a:gd name="csY79" fmla="*/ 458183 h 634696"/>
-              <a:gd name="csX80" fmla="*/ 117883 w 1117001"/>
-              <a:gd name="csY80" fmla="*/ 520178 h 634696"/>
-              <a:gd name="csX81" fmla="*/ 286959 w 1117001"/>
-              <a:gd name="csY81" fmla="*/ 430191 h 634696"/>
-              <a:gd name="csX82" fmla="*/ 80825 w 1117001"/>
-              <a:gd name="csY82" fmla="*/ 321785 h 634696"/>
-              <a:gd name="csX83" fmla="*/ 0 w 1117001"/>
-              <a:gd name="csY83" fmla="*/ 364803 h 634696"/>
-              <a:gd name="csX84" fmla="*/ 0 w 1117001"/>
-              <a:gd name="csY84" fmla="*/ 313012 h 634696"/>
-              <a:gd name="csX85" fmla="*/ 31880 w 1117001"/>
-              <a:gd name="csY85" fmla="*/ 296045 h 634696"/>
-              <a:gd name="csX86" fmla="*/ 0 w 1117001"/>
-              <a:gd name="csY86" fmla="*/ 279279 h 634696"/>
-              <a:gd name="csX87" fmla="*/ 0 w 1117001"/>
-              <a:gd name="csY87" fmla="*/ 227623 h 634696"/>
-              <a:gd name="csX88" fmla="*/ 80698 w 1117001"/>
-              <a:gd name="csY88" fmla="*/ 270062 h 634696"/>
-              <a:gd name="csX89" fmla="*/ 259380 w 1117001"/>
-              <a:gd name="csY89" fmla="*/ 174962 h 634696"/>
-              <a:gd name="csX90" fmla="*/ 70093 w 1117001"/>
-              <a:gd name="csY90" fmla="*/ 75415 h 634696"/>
-              <a:gd name="csX91" fmla="*/ 0 w 1117001"/>
-              <a:gd name="csY91" fmla="*/ 112721 h 634696"/>
-              <a:gd name="csX92" fmla="*/ 0 w 1117001"/>
-              <a:gd name="csY92" fmla="*/ 60929 h 634696"/>
-              <a:gd name="csX93" fmla="*/ 21147 w 1117001"/>
-              <a:gd name="csY93" fmla="*/ 49674 h 634696"/>
-              <a:gd name="csX94" fmla="*/ 0 w 1117001"/>
-              <a:gd name="csY94" fmla="*/ 38553 h 634696"/>
-            </a:gdLst>
-            <a:ahLst/>
-            <a:cxnLst>
-              <a:cxn ang="0">
-                <a:pos x="csX0" y="csY0"/>
-              </a:cxn>
-              <a:cxn ang="0">
-                <a:pos x="csX1" y="csY1"/>
-              </a:cxn>
-              <a:cxn ang="0">
-                <a:pos x="csX2" y="csY2"/>
-              </a:cxn>
-              <a:cxn ang="0">
-                <a:pos x="csX3" y="csY3"/>
-              </a:cxn>
-              <a:cxn ang="0">
-                <a:pos x="csX4" y="csY4"/>
-              </a:cxn>
-              <a:cxn ang="0">
-                <a:pos x="csX5" y="csY5"/>
-              </a:cxn>
-              <a:cxn ang="0">
-                <a:pos x="csX6" y="csY6"/>
-              </a:cxn>
-              <a:cxn ang="0">
-                <a:pos x="csX7" y="csY7"/>
-              </a:cxn>
-              <a:cxn ang="0">
-                <a:pos x="csX8" y="csY8"/>
-              </a:cxn>
-              <a:cxn ang="0">
-                <a:pos x="csX9" y="csY9"/>
-              </a:cxn>
-              <a:cxn ang="0">
-                <a:pos x="csX10" y="csY10"/>
-              </a:cxn>
-              <a:cxn ang="0">
-                <a:pos x="csX11" y="csY11"/>
-              </a:cxn>
-              <a:cxn ang="0">
-                <a:pos x="csX12" y="csY12"/>
-              </a:cxn>
-              <a:cxn ang="0">
-                <a:pos x="csX13" y="csY13"/>
-              </a:cxn>
-              <a:cxn ang="0">
-                <a:pos x="csX14" y="csY14"/>
-              </a:cxn>
-              <a:cxn ang="0">
-                <a:pos x="csX15" y="csY15"/>
-              </a:cxn>
-              <a:cxn ang="0">
-                <a:pos x="csX16" y="csY16"/>
-              </a:cxn>
-              <a:cxn ang="0">
-                <a:pos x="csX17" y="csY17"/>
-              </a:cxn>
-              <a:cxn ang="0">
-                <a:pos x="csX18" y="csY18"/>
-              </a:cxn>
-              <a:cxn ang="0">
-                <a:pos x="csX19" y="csY19"/>
-              </a:cxn>
-              <a:cxn ang="0">
-                <a:pos x="csX20" y="csY20"/>
-              </a:cxn>
-              <a:cxn ang="0">
-                <a:pos x="csX21" y="csY21"/>
-              </a:cxn>
-              <a:cxn ang="0">
-                <a:pos x="csX22" y="csY22"/>
-              </a:cxn>
-              <a:cxn ang="0">
-                <a:pos x="csX23" y="csY23"/>
-              </a:cxn>
-              <a:cxn ang="0">
-                <a:pos x="csX24" y="csY24"/>
-              </a:cxn>
-              <a:cxn ang="0">
-                <a:pos x="csX25" y="csY25"/>
-              </a:cxn>
-              <a:cxn ang="0">
-                <a:pos x="csX26" y="csY26"/>
-              </a:cxn>
-              <a:cxn ang="0">
-                <a:pos x="csX27" y="csY27"/>
-              </a:cxn>
-              <a:cxn ang="0">
-                <a:pos x="csX28" y="csY28"/>
-              </a:cxn>
-              <a:cxn ang="0">
-                <a:pos x="csX29" y="csY29"/>
-              </a:cxn>
-              <a:cxn ang="0">
-                <a:pos x="csX30" y="csY30"/>
-              </a:cxn>
-              <a:cxn ang="0">
-                <a:pos x="csX31" y="csY31"/>
-              </a:cxn>
-              <a:cxn ang="0">
-                <a:pos x="csX32" y="csY32"/>
-              </a:cxn>
-              <a:cxn ang="0">
-                <a:pos x="csX33" y="csY33"/>
-              </a:cxn>
-              <a:cxn ang="0">
-                <a:pos x="csX34" y="csY34"/>
-              </a:cxn>
-              <a:cxn ang="0">
-                <a:pos x="csX35" y="csY35"/>
-              </a:cxn>
-              <a:cxn ang="0">
-                <a:pos x="csX36" y="csY36"/>
-              </a:cxn>
-              <a:cxn ang="0">
-                <a:pos x="csX37" y="csY37"/>
-              </a:cxn>
-              <a:cxn ang="0">
-                <a:pos x="csX38" y="csY38"/>
-              </a:cxn>
-              <a:cxn ang="0">
-                <a:pos x="csX39" y="csY39"/>
-              </a:cxn>
-              <a:cxn ang="0">
-                <a:pos x="csX40" y="csY40"/>
-              </a:cxn>
-              <a:cxn ang="0">
-                <a:pos x="csX41" y="csY41"/>
-              </a:cxn>
-              <a:cxn ang="0">
-                <a:pos x="csX42" y="csY42"/>
-              </a:cxn>
-              <a:cxn ang="0">
-                <a:pos x="csX43" y="csY43"/>
-              </a:cxn>
-              <a:cxn ang="0">
-                <a:pos x="csX44" y="csY44"/>
-              </a:cxn>
-              <a:cxn ang="0">
-                <a:pos x="csX45" y="csY45"/>
-              </a:cxn>
-              <a:cxn ang="0">
-                <a:pos x="csX46" y="csY46"/>
-              </a:cxn>
-              <a:cxn ang="0">
-                <a:pos x="csX47" y="csY47"/>
-              </a:cxn>
-              <a:cxn ang="0">
-                <a:pos x="csX48" y="csY48"/>
-              </a:cxn>
-              <a:cxn ang="0">
-                <a:pos x="csX49" y="csY49"/>
-              </a:cxn>
-              <a:cxn ang="0">
-                <a:pos x="csX50" y="csY50"/>
-              </a:cxn>
-              <a:cxn ang="0">
-                <a:pos x="csX51" y="csY51"/>
-              </a:cxn>
-              <a:cxn ang="0">
-                <a:pos x="csX52" y="csY52"/>
-              </a:cxn>
-              <a:cxn ang="0">
-                <a:pos x="csX53" y="csY53"/>
-              </a:cxn>
-              <a:cxn ang="0">
-                <a:pos x="csX54" y="csY54"/>
-              </a:cxn>
-              <a:cxn ang="0">
-                <a:pos x="csX55" y="csY55"/>
-              </a:cxn>
-              <a:cxn ang="0">
-                <a:pos x="csX56" y="csY56"/>
-              </a:cxn>
-              <a:cxn ang="0">
-                <a:pos x="csX57" y="csY57"/>
-              </a:cxn>
-              <a:cxn ang="0">
-                <a:pos x="csX58" y="csY58"/>
-              </a:cxn>
-              <a:cxn ang="0">
-                <a:pos x="csX59" y="csY59"/>
-              </a:cxn>
-              <a:cxn ang="0">
-                <a:pos x="csX60" y="csY60"/>
-              </a:cxn>
-              <a:cxn ang="0">
-                <a:pos x="csX61" y="csY61"/>
-              </a:cxn>
-              <a:cxn ang="0">
-                <a:pos x="csX62" y="csY62"/>
-              </a:cxn>
-              <a:cxn ang="0">
-                <a:pos x="csX63" y="csY63"/>
-              </a:cxn>
-              <a:cxn ang="0">
-                <a:pos x="csX64" y="csY64"/>
-              </a:cxn>
-              <a:cxn ang="0">
-                <a:pos x="csX65" y="csY65"/>
-              </a:cxn>
-              <a:cxn ang="0">
-                <a:pos x="csX66" y="csY66"/>
-              </a:cxn>
-              <a:cxn ang="0">
-                <a:pos x="csX67" y="csY67"/>
-              </a:cxn>
-              <a:cxn ang="0">
-                <a:pos x="csX68" y="csY68"/>
-              </a:cxn>
-              <a:cxn ang="0">
-                <a:pos x="csX69" y="csY69"/>
-              </a:cxn>
-              <a:cxn ang="0">
-                <a:pos x="csX70" y="csY70"/>
-              </a:cxn>
-              <a:cxn ang="0">
-                <a:pos x="csX71" y="csY71"/>
-              </a:cxn>
-              <a:cxn ang="0">
-                <a:pos x="csX72" y="csY72"/>
-              </a:cxn>
-              <a:cxn ang="0">
-                <a:pos x="csX73" y="csY73"/>
-              </a:cxn>
-              <a:cxn ang="0">
-                <a:pos x="csX74" y="csY74"/>
-              </a:cxn>
-              <a:cxn ang="0">
-                <a:pos x="csX75" y="csY75"/>
-              </a:cxn>
-              <a:cxn ang="0">
-                <a:pos x="csX76" y="csY76"/>
-              </a:cxn>
-              <a:cxn ang="0">
-                <a:pos x="csX77" y="csY77"/>
-              </a:cxn>
-              <a:cxn ang="0">
-                <a:pos x="csX78" y="csY78"/>
-              </a:cxn>
-              <a:cxn ang="0">
-                <a:pos x="csX79" y="csY79"/>
-              </a:cxn>
-              <a:cxn ang="0">
-                <a:pos x="csX80" y="csY80"/>
-              </a:cxn>
-              <a:cxn ang="0">
-                <a:pos x="csX81" y="csY81"/>
-              </a:cxn>
-              <a:cxn ang="0">
-                <a:pos x="csX82" y="csY82"/>
-              </a:cxn>
-              <a:cxn ang="0">
-                <a:pos x="csX83" y="csY83"/>
-              </a:cxn>
-              <a:cxn ang="0">
-                <a:pos x="csX84" y="csY84"/>
-              </a:cxn>
-              <a:cxn ang="0">
-                <a:pos x="csX85" y="csY85"/>
-              </a:cxn>
-              <a:cxn ang="0">
-                <a:pos x="csX86" y="csY86"/>
-              </a:cxn>
-              <a:cxn ang="0">
-                <a:pos x="csX87" y="csY87"/>
-              </a:cxn>
-              <a:cxn ang="0">
-                <a:pos x="csX88" y="csY88"/>
-              </a:cxn>
-              <a:cxn ang="0">
-                <a:pos x="csX89" y="csY89"/>
-              </a:cxn>
-              <a:cxn ang="0">
-                <a:pos x="csX90" y="csY90"/>
-              </a:cxn>
-              <a:cxn ang="0">
-                <a:pos x="csX91" y="csY91"/>
-              </a:cxn>
-              <a:cxn ang="0">
-                <a:pos x="csX92" y="csY92"/>
-              </a:cxn>
-              <a:cxn ang="0">
-                <a:pos x="csX93" y="csY93"/>
-              </a:cxn>
-              <a:cxn ang="0">
-                <a:pos x="csX94" y="csY94"/>
-              </a:cxn>
-            </a:cxnLst>
-            <a:rect l="l" t="t" r="r" b="b"/>
-            <a:pathLst>
-              <a:path w="1117001" h="634696">
-                <a:moveTo>
-                  <a:pt x="563405" y="334849"/>
-                </a:moveTo>
-                <a:lnTo>
-                  <a:pt x="384722" y="429950"/>
-                </a:lnTo>
-                <a:lnTo>
-                  <a:pt x="576560" y="530838"/>
-                </a:lnTo>
-                <a:lnTo>
-                  <a:pt x="755242" y="435737"/>
-                </a:lnTo>
-                <a:close/>
-                <a:moveTo>
-                  <a:pt x="786557" y="216082"/>
-                </a:moveTo>
-                <a:lnTo>
-                  <a:pt x="612223" y="308867"/>
-                </a:lnTo>
-                <a:lnTo>
-                  <a:pt x="804060" y="409755"/>
-                </a:lnTo>
-                <a:lnTo>
-                  <a:pt x="978394" y="316969"/>
-                </a:lnTo>
-                <a:close/>
-                <a:moveTo>
-                  <a:pt x="308326" y="200703"/>
-                </a:moveTo>
-                <a:lnTo>
-                  <a:pt x="129644" y="295803"/>
-                </a:lnTo>
-                <a:lnTo>
-                  <a:pt x="335776" y="404209"/>
-                </a:lnTo>
-                <a:lnTo>
-                  <a:pt x="514459" y="309108"/>
-                </a:lnTo>
-                <a:close/>
-                <a:moveTo>
-                  <a:pt x="531478" y="81935"/>
-                </a:moveTo>
-                <a:lnTo>
-                  <a:pt x="357145" y="174721"/>
-                </a:lnTo>
-                <a:lnTo>
-                  <a:pt x="563277" y="283126"/>
-                </a:lnTo>
-                <a:lnTo>
-                  <a:pt x="737611" y="190341"/>
-                </a:lnTo>
-                <a:close/>
-                <a:moveTo>
-                  <a:pt x="0" y="0"/>
-                </a:moveTo>
-                <a:lnTo>
-                  <a:pt x="24916" y="0"/>
-                </a:lnTo>
-                <a:lnTo>
-                  <a:pt x="69966" y="23692"/>
-                </a:lnTo>
-                <a:lnTo>
-                  <a:pt x="114480" y="0"/>
-                </a:lnTo>
-                <a:lnTo>
-                  <a:pt x="211790" y="0"/>
-                </a:lnTo>
-                <a:lnTo>
-                  <a:pt x="118911" y="49432"/>
-                </a:lnTo>
-                <a:lnTo>
-                  <a:pt x="308199" y="148980"/>
-                </a:lnTo>
-                <a:lnTo>
-                  <a:pt x="482532" y="56194"/>
-                </a:lnTo>
-                <a:lnTo>
-                  <a:pt x="375680" y="0"/>
-                </a:lnTo>
-                <a:lnTo>
-                  <a:pt x="473903" y="0"/>
-                </a:lnTo>
-                <a:lnTo>
-                  <a:pt x="531351" y="30212"/>
-                </a:lnTo>
-                <a:lnTo>
-                  <a:pt x="588116" y="0"/>
-                </a:lnTo>
-                <a:lnTo>
-                  <a:pt x="685424" y="0"/>
-                </a:lnTo>
-                <a:lnTo>
-                  <a:pt x="580296" y="55952"/>
-                </a:lnTo>
-                <a:lnTo>
-                  <a:pt x="786428" y="164358"/>
-                </a:lnTo>
-                <a:lnTo>
-                  <a:pt x="948253" y="78231"/>
-                </a:lnTo>
-                <a:lnTo>
-                  <a:pt x="799496" y="0"/>
-                </a:lnTo>
-                <a:lnTo>
-                  <a:pt x="897720" y="0"/>
-                </a:lnTo>
-                <a:lnTo>
-                  <a:pt x="997070" y="52249"/>
-                </a:lnTo>
-                <a:lnTo>
-                  <a:pt x="1095240" y="0"/>
-                </a:lnTo>
-                <a:lnTo>
-                  <a:pt x="1117001" y="0"/>
-                </a:lnTo>
-                <a:lnTo>
-                  <a:pt x="1117001" y="40209"/>
-                </a:lnTo>
-                <a:lnTo>
-                  <a:pt x="1046016" y="77990"/>
-                </a:lnTo>
-                <a:lnTo>
-                  <a:pt x="1117001" y="115321"/>
-                </a:lnTo>
-                <a:lnTo>
-                  <a:pt x="1117001" y="166977"/>
-                </a:lnTo>
-                <a:lnTo>
-                  <a:pt x="997198" y="103972"/>
-                </a:lnTo>
-                <a:lnTo>
-                  <a:pt x="835374" y="190099"/>
-                </a:lnTo>
-                <a:lnTo>
-                  <a:pt x="1027212" y="290987"/>
-                </a:lnTo>
-                <a:lnTo>
-                  <a:pt x="1117001" y="243199"/>
-                </a:lnTo>
-                <a:lnTo>
-                  <a:pt x="1117001" y="294989"/>
-                </a:lnTo>
-                <a:lnTo>
-                  <a:pt x="1076157" y="316728"/>
-                </a:lnTo>
-                <a:lnTo>
-                  <a:pt x="1117001" y="338208"/>
-                </a:lnTo>
-                <a:lnTo>
-                  <a:pt x="1117001" y="389864"/>
-                </a:lnTo>
-                <a:lnTo>
-                  <a:pt x="1027340" y="342710"/>
-                </a:lnTo>
-                <a:lnTo>
-                  <a:pt x="853006" y="435496"/>
-                </a:lnTo>
-                <a:lnTo>
-                  <a:pt x="1046510" y="537261"/>
-                </a:lnTo>
-                <a:lnTo>
-                  <a:pt x="1117001" y="499743"/>
-                </a:lnTo>
-                <a:lnTo>
-                  <a:pt x="1117001" y="551534"/>
-                </a:lnTo>
-                <a:lnTo>
-                  <a:pt x="1095456" y="563001"/>
-                </a:lnTo>
-                <a:lnTo>
-                  <a:pt x="1117001" y="574332"/>
-                </a:lnTo>
-                <a:lnTo>
-                  <a:pt x="1117001" y="625988"/>
-                </a:lnTo>
-                <a:lnTo>
-                  <a:pt x="1046638" y="588984"/>
-                </a:lnTo>
-                <a:lnTo>
-                  <a:pt x="960749" y="634696"/>
-                </a:lnTo>
-                <a:lnTo>
-                  <a:pt x="863439" y="634696"/>
-                </a:lnTo>
-                <a:lnTo>
-                  <a:pt x="997693" y="563243"/>
-                </a:lnTo>
-                <a:lnTo>
-                  <a:pt x="804188" y="461478"/>
-                </a:lnTo>
-                <a:lnTo>
-                  <a:pt x="625505" y="556578"/>
-                </a:lnTo>
-                <a:lnTo>
-                  <a:pt x="774045" y="634696"/>
-                </a:lnTo>
-                <a:lnTo>
-                  <a:pt x="675822" y="634696"/>
-                </a:lnTo>
-                <a:lnTo>
-                  <a:pt x="576687" y="582560"/>
-                </a:lnTo>
-                <a:lnTo>
-                  <a:pt x="478730" y="634696"/>
-                </a:lnTo>
-                <a:lnTo>
-                  <a:pt x="381420" y="634696"/>
-                </a:lnTo>
-                <a:lnTo>
-                  <a:pt x="527741" y="556820"/>
-                </a:lnTo>
-                <a:lnTo>
-                  <a:pt x="335904" y="455932"/>
-                </a:lnTo>
-                <a:lnTo>
-                  <a:pt x="166829" y="545919"/>
-                </a:lnTo>
-                <a:lnTo>
-                  <a:pt x="335639" y="634696"/>
-                </a:lnTo>
-                <a:lnTo>
-                  <a:pt x="237416" y="634696"/>
-                </a:lnTo>
-                <a:lnTo>
-                  <a:pt x="118011" y="571901"/>
-                </a:lnTo>
-                <a:lnTo>
-                  <a:pt x="26" y="634696"/>
-                </a:lnTo>
-                <a:lnTo>
-                  <a:pt x="0" y="634696"/>
-                </a:lnTo>
-                <a:lnTo>
-                  <a:pt x="0" y="582919"/>
-                </a:lnTo>
-                <a:lnTo>
-                  <a:pt x="69066" y="546160"/>
-                </a:lnTo>
-                <a:lnTo>
-                  <a:pt x="0" y="509838"/>
-                </a:lnTo>
-                <a:lnTo>
-                  <a:pt x="0" y="458183"/>
-                </a:lnTo>
-                <a:lnTo>
-                  <a:pt x="117883" y="520178"/>
-                </a:lnTo>
-                <a:lnTo>
-                  <a:pt x="286959" y="430191"/>
-                </a:lnTo>
-                <a:lnTo>
-                  <a:pt x="80825" y="321785"/>
-                </a:lnTo>
-                <a:lnTo>
-                  <a:pt x="0" y="364803"/>
-                </a:lnTo>
-                <a:lnTo>
-                  <a:pt x="0" y="313012"/>
-                </a:lnTo>
-                <a:lnTo>
-                  <a:pt x="31880" y="296045"/>
-                </a:lnTo>
-                <a:lnTo>
-                  <a:pt x="0" y="279279"/>
-                </a:lnTo>
-                <a:lnTo>
-                  <a:pt x="0" y="227623"/>
-                </a:lnTo>
-                <a:lnTo>
-                  <a:pt x="80698" y="270062"/>
-                </a:lnTo>
-                <a:lnTo>
-                  <a:pt x="259380" y="174962"/>
-                </a:lnTo>
-                <a:lnTo>
-                  <a:pt x="70093" y="75415"/>
-                </a:lnTo>
-                <a:lnTo>
-                  <a:pt x="0" y="112721"/>
-                </a:lnTo>
-                <a:lnTo>
-                  <a:pt x="0" y="60929"/>
-                </a:lnTo>
-                <a:lnTo>
-                  <a:pt x="21147" y="49674"/>
-                </a:lnTo>
-                <a:lnTo>
-                  <a:pt x="0" y="38553"/>
-                </a:lnTo>
-                <a:close/>
-              </a:path>
-            </a:pathLst>
-          </a:custGeom>
-          <a:solidFill>
-            <a:srgbClr val="FF0000"/>
-          </a:solidFill>
-          <a:ln>
-            <a:noFill/>
-          </a:ln>
-        </p:spPr>
-        <p:style>
-          <a:lnRef idx="2">
-            <a:schemeClr val="accent1">
-              <a:shade val="15000"/>
-            </a:schemeClr>
-          </a:lnRef>
-          <a:fillRef idx="1">
-            <a:schemeClr val="accent1"/>
-          </a:fillRef>
-          <a:effectRef idx="0">
-            <a:schemeClr val="accent1"/>
-          </a:effectRef>
-          <a:fontRef idx="minor">
-            <a:schemeClr val="lt1"/>
-          </a:fontRef>
-        </p:style>
-        <p:txBody>
-          <a:bodyPr wrap="square" rtlCol="0" anchor="ctr">
-            <a:noAutofit/>
-          </a:bodyPr>
-          <a:lstStyle/>
-          <a:p>
-            <a:pPr algn="ctr"/>
-            <a:endParaRPr lang="en-US"/>
-          </a:p>
-        </p:txBody>
-      </p:sp>
+            <a:ln w="38100"/>
+          </p:spPr>
+          <p:style>
+            <a:lnRef idx="2">
+              <a:schemeClr val="accent1">
+                <a:shade val="15000"/>
+              </a:schemeClr>
+            </a:lnRef>
+            <a:fillRef idx="1">
+              <a:schemeClr val="accent1"/>
+            </a:fillRef>
+            <a:effectRef idx="0">
+              <a:schemeClr val="accent1"/>
+            </a:effectRef>
+            <a:fontRef idx="minor">
+              <a:schemeClr val="lt1"/>
+            </a:fontRef>
+          </p:style>
+          <p:txBody>
+            <a:bodyPr rtlCol="0" anchor="ctr"/>
+            <a:lstStyle/>
+            <a:p>
+              <a:pPr algn="ctr"/>
+              <a:endParaRPr lang="en-US"/>
+            </a:p>
+          </p:txBody>
+        </p:sp>
+      </p:grpSp>
     </p:spTree>
     <p:extLst>
       <p:ext uri="{BB962C8B-B14F-4D97-AF65-F5344CB8AC3E}">
@@ -10980,6 +10402,467 @@
     <p:extLst>
       <p:ext uri="{BB962C8B-B14F-4D97-AF65-F5344CB8AC3E}">
         <p14:creationId xmlns:p14="http://schemas.microsoft.com/office/powerpoint/2010/main" val="1228970998"/>
+      </p:ext>
+    </p:extLst>
+  </p:cSld>
+  <p:clrMapOvr>
+    <a:masterClrMapping/>
+  </p:clrMapOvr>
+</p:sld>
+</file>
+
+<file path=ppt/slides/slide4.xml><?xml version="1.0" encoding="utf-8"?>
+<p:sld xmlns:a="http://schemas.openxmlformats.org/drawingml/2006/main" xmlns:r="http://schemas.openxmlformats.org/officeDocument/2006/relationships" xmlns:p="http://schemas.openxmlformats.org/presentationml/2006/main">
+  <p:cSld>
+    <p:spTree>
+      <p:nvGrpSpPr>
+        <p:cNvPr id="1" name="">
+          <a:extLst>
+            <a:ext uri="{FF2B5EF4-FFF2-40B4-BE49-F238E27FC236}">
+              <a16:creationId xmlns:a16="http://schemas.microsoft.com/office/drawing/2014/main" id="{68EDE20F-ACC4-BE09-F2D2-84E3DC61BCB6}"/>
+            </a:ext>
+          </a:extLst>
+        </p:cNvPr>
+        <p:cNvGrpSpPr/>
+        <p:nvPr/>
+      </p:nvGrpSpPr>
+      <p:grpSpPr>
+        <a:xfrm>
+          <a:off x="0" y="0"/>
+          <a:ext cx="0" cy="0"/>
+          <a:chOff x="0" y="0"/>
+          <a:chExt cx="0" cy="0"/>
+        </a:xfrm>
+      </p:grpSpPr>
+      <p:grpSp>
+        <p:nvGrpSpPr>
+          <p:cNvPr id="72" name="Group 71">
+            <a:extLst>
+              <a:ext uri="{FF2B5EF4-FFF2-40B4-BE49-F238E27FC236}">
+                <a16:creationId xmlns:a16="http://schemas.microsoft.com/office/drawing/2014/main" id="{E0D02801-9104-1ECE-2DD0-9099A06F8BEF}"/>
+              </a:ext>
+            </a:extLst>
+          </p:cNvPr>
+          <p:cNvGrpSpPr/>
+          <p:nvPr/>
+        </p:nvGrpSpPr>
+        <p:grpSpPr>
+          <a:xfrm>
+            <a:off x="1012376" y="881742"/>
+            <a:ext cx="9895111" cy="4898572"/>
+            <a:chOff x="1012376" y="881742"/>
+            <a:chExt cx="9895111" cy="4898572"/>
+          </a:xfrm>
+        </p:grpSpPr>
+        <p:sp>
+          <p:nvSpPr>
+            <p:cNvPr id="3" name="Diamond 2">
+              <a:extLst>
+                <a:ext uri="{FF2B5EF4-FFF2-40B4-BE49-F238E27FC236}">
+                  <a16:creationId xmlns:a16="http://schemas.microsoft.com/office/drawing/2014/main" id="{093D3EDD-8B4F-D498-5F9A-7A4126E14823}"/>
+                </a:ext>
+              </a:extLst>
+            </p:cNvPr>
+            <p:cNvSpPr/>
+            <p:nvPr/>
+          </p:nvSpPr>
+          <p:spPr>
+            <a:xfrm>
+              <a:off x="2694218" y="2571749"/>
+              <a:ext cx="2481944" cy="1518557"/>
+            </a:xfrm>
+            <a:prstGeom prst="diamond">
+              <a:avLst/>
+            </a:prstGeom>
+            <a:noFill/>
+            <a:ln w="31750">
+              <a:solidFill>
+                <a:schemeClr val="tx1"/>
+              </a:solidFill>
+            </a:ln>
+          </p:spPr>
+          <p:style>
+            <a:lnRef idx="2">
+              <a:schemeClr val="accent1">
+                <a:shade val="15000"/>
+              </a:schemeClr>
+            </a:lnRef>
+            <a:fillRef idx="1">
+              <a:schemeClr val="accent1"/>
+            </a:fillRef>
+            <a:effectRef idx="0">
+              <a:schemeClr val="accent1"/>
+            </a:effectRef>
+            <a:fontRef idx="minor">
+              <a:schemeClr val="lt1"/>
+            </a:fontRef>
+          </p:style>
+          <p:txBody>
+            <a:bodyPr rtlCol="0" anchor="ctr"/>
+            <a:lstStyle/>
+            <a:p>
+              <a:pPr algn="ctr"/>
+              <a:r>
+                <a:rPr lang="en-US" dirty="0">
+                  <a:solidFill>
+                    <a:schemeClr val="tx1"/>
+                  </a:solidFill>
+                </a:rPr>
+                <a:t>Least occupied?</a:t>
+              </a:r>
+            </a:p>
+          </p:txBody>
+        </p:sp>
+        <p:sp>
+          <p:nvSpPr>
+            <p:cNvPr id="6" name="Rounded Rectangle 5">
+              <a:extLst>
+                <a:ext uri="{FF2B5EF4-FFF2-40B4-BE49-F238E27FC236}">
+                  <a16:creationId xmlns:a16="http://schemas.microsoft.com/office/drawing/2014/main" id="{2B2CE12B-7E57-4D72-2565-E376C37E5505}"/>
+                </a:ext>
+              </a:extLst>
+            </p:cNvPr>
+            <p:cNvSpPr/>
+            <p:nvPr/>
+          </p:nvSpPr>
+          <p:spPr>
+            <a:xfrm>
+              <a:off x="6096000" y="881742"/>
+              <a:ext cx="3194959" cy="1690007"/>
+            </a:xfrm>
+            <a:prstGeom prst="roundRect">
+              <a:avLst/>
+            </a:prstGeom>
+            <a:noFill/>
+            <a:ln w="31750">
+              <a:solidFill>
+                <a:schemeClr val="tx1"/>
+              </a:solidFill>
+            </a:ln>
+          </p:spPr>
+          <p:style>
+            <a:lnRef idx="2">
+              <a:schemeClr val="accent1">
+                <a:shade val="15000"/>
+              </a:schemeClr>
+            </a:lnRef>
+            <a:fillRef idx="1">
+              <a:schemeClr val="accent1"/>
+            </a:fillRef>
+            <a:effectRef idx="0">
+              <a:schemeClr val="accent1"/>
+            </a:effectRef>
+            <a:fontRef idx="minor">
+              <a:schemeClr val="lt1"/>
+            </a:fontRef>
+          </p:style>
+          <p:txBody>
+            <a:bodyPr rtlCol="0" anchor="ctr"/>
+            <a:lstStyle/>
+            <a:p>
+              <a:pPr algn="ctr"/>
+              <a:r>
+                <a:rPr lang="en-US" sz="2400" dirty="0">
+                  <a:solidFill>
+                    <a:schemeClr val="tx1"/>
+                  </a:solidFill>
+                </a:rPr>
+                <a:t>A3 North &amp; B3 South</a:t>
+              </a:r>
+            </a:p>
+          </p:txBody>
+        </p:sp>
+        <p:sp>
+          <p:nvSpPr>
+            <p:cNvPr id="7" name="Rounded Rectangle 6">
+              <a:extLst>
+                <a:ext uri="{FF2B5EF4-FFF2-40B4-BE49-F238E27FC236}">
+                  <a16:creationId xmlns:a16="http://schemas.microsoft.com/office/drawing/2014/main" id="{99FD676D-35F8-DDA4-7053-C3BF9ECAA479}"/>
+                </a:ext>
+              </a:extLst>
+            </p:cNvPr>
+            <p:cNvSpPr/>
+            <p:nvPr/>
+          </p:nvSpPr>
+          <p:spPr>
+            <a:xfrm>
+              <a:off x="6096000" y="4090307"/>
+              <a:ext cx="3194959" cy="1690007"/>
+            </a:xfrm>
+            <a:prstGeom prst="roundRect">
+              <a:avLst/>
+            </a:prstGeom>
+            <a:noFill/>
+            <a:ln w="31750">
+              <a:solidFill>
+                <a:schemeClr val="tx1"/>
+              </a:solidFill>
+            </a:ln>
+          </p:spPr>
+          <p:style>
+            <a:lnRef idx="2">
+              <a:schemeClr val="accent1">
+                <a:shade val="15000"/>
+              </a:schemeClr>
+            </a:lnRef>
+            <a:fillRef idx="1">
+              <a:schemeClr val="accent1"/>
+            </a:fillRef>
+            <a:effectRef idx="0">
+              <a:schemeClr val="accent1"/>
+            </a:effectRef>
+            <a:fontRef idx="minor">
+              <a:schemeClr val="lt1"/>
+            </a:fontRef>
+          </p:style>
+          <p:txBody>
+            <a:bodyPr rtlCol="0" anchor="ctr"/>
+            <a:lstStyle/>
+            <a:p>
+              <a:pPr algn="ctr"/>
+              <a:r>
+                <a:rPr lang="en-US" sz="2400" dirty="0">
+                  <a:solidFill>
+                    <a:schemeClr val="tx1"/>
+                  </a:solidFill>
+                </a:rPr>
+                <a:t>B3 North &amp; A3 South</a:t>
+              </a:r>
+            </a:p>
+          </p:txBody>
+        </p:sp>
+        <p:cxnSp>
+          <p:nvCxnSpPr>
+            <p:cNvPr id="19" name="Elbow Connector 18">
+              <a:extLst>
+                <a:ext uri="{FF2B5EF4-FFF2-40B4-BE49-F238E27FC236}">
+                  <a16:creationId xmlns:a16="http://schemas.microsoft.com/office/drawing/2014/main" id="{9CA12B1B-AF01-2842-2282-EB2BD9FE3259}"/>
+                </a:ext>
+              </a:extLst>
+            </p:cNvPr>
+            <p:cNvCxnSpPr>
+              <a:cxnSpLocks/>
+              <a:stCxn id="3" idx="0"/>
+              <a:endCxn id="6" idx="1"/>
+            </p:cNvCxnSpPr>
+            <p:nvPr/>
+          </p:nvCxnSpPr>
+          <p:spPr>
+            <a:xfrm rot="5400000" flipH="1" flipV="1">
+              <a:off x="4593094" y="1068843"/>
+              <a:ext cx="845003" cy="2160810"/>
+            </a:xfrm>
+            <a:prstGeom prst="bentConnector2">
+              <a:avLst/>
+            </a:prstGeom>
+            <a:ln w="31750">
+              <a:solidFill>
+                <a:schemeClr val="tx1"/>
+              </a:solidFill>
+              <a:tailEnd type="triangle" w="lg" len="lg"/>
+            </a:ln>
+          </p:spPr>
+          <p:style>
+            <a:lnRef idx="2">
+              <a:schemeClr val="accent1"/>
+            </a:lnRef>
+            <a:fillRef idx="0">
+              <a:schemeClr val="accent1"/>
+            </a:fillRef>
+            <a:effectRef idx="1">
+              <a:schemeClr val="accent1"/>
+            </a:effectRef>
+            <a:fontRef idx="minor">
+              <a:schemeClr val="tx1"/>
+            </a:fontRef>
+          </p:style>
+        </p:cxnSp>
+        <p:cxnSp>
+          <p:nvCxnSpPr>
+            <p:cNvPr id="20" name="Elbow Connector 19">
+              <a:extLst>
+                <a:ext uri="{FF2B5EF4-FFF2-40B4-BE49-F238E27FC236}">
+                  <a16:creationId xmlns:a16="http://schemas.microsoft.com/office/drawing/2014/main" id="{401BC4E0-5F46-A0E1-D60B-7A3E675F32FE}"/>
+                </a:ext>
+              </a:extLst>
+            </p:cNvPr>
+            <p:cNvCxnSpPr>
+              <a:cxnSpLocks/>
+              <a:stCxn id="3" idx="2"/>
+              <a:endCxn id="7" idx="1"/>
+            </p:cNvCxnSpPr>
+            <p:nvPr/>
+          </p:nvCxnSpPr>
+          <p:spPr>
+            <a:xfrm rot="16200000" flipH="1">
+              <a:off x="4593093" y="3432403"/>
+              <a:ext cx="845005" cy="2160810"/>
+            </a:xfrm>
+            <a:prstGeom prst="bentConnector2">
+              <a:avLst/>
+            </a:prstGeom>
+            <a:ln w="31750">
+              <a:solidFill>
+                <a:schemeClr val="tx1"/>
+              </a:solidFill>
+              <a:tailEnd type="triangle" w="lg" len="lg"/>
+            </a:ln>
+          </p:spPr>
+          <p:style>
+            <a:lnRef idx="2">
+              <a:schemeClr val="accent1"/>
+            </a:lnRef>
+            <a:fillRef idx="0">
+              <a:schemeClr val="accent1"/>
+            </a:fillRef>
+            <a:effectRef idx="1">
+              <a:schemeClr val="accent1"/>
+            </a:effectRef>
+            <a:fontRef idx="minor">
+              <a:schemeClr val="tx1"/>
+            </a:fontRef>
+          </p:style>
+        </p:cxnSp>
+        <p:cxnSp>
+          <p:nvCxnSpPr>
+            <p:cNvPr id="25" name="Straight Arrow Connector 24">
+              <a:extLst>
+                <a:ext uri="{FF2B5EF4-FFF2-40B4-BE49-F238E27FC236}">
+                  <a16:creationId xmlns:a16="http://schemas.microsoft.com/office/drawing/2014/main" id="{DC4BC20C-C9C2-6446-890D-C68112B1A7F8}"/>
+                </a:ext>
+              </a:extLst>
+            </p:cNvPr>
+            <p:cNvCxnSpPr>
+              <a:cxnSpLocks/>
+              <a:endCxn id="3" idx="1"/>
+            </p:cNvCxnSpPr>
+            <p:nvPr/>
+          </p:nvCxnSpPr>
+          <p:spPr>
+            <a:xfrm>
+              <a:off x="1012376" y="3331028"/>
+              <a:ext cx="1681842" cy="0"/>
+            </a:xfrm>
+            <a:prstGeom prst="straightConnector1">
+              <a:avLst/>
+            </a:prstGeom>
+            <a:ln w="31750">
+              <a:solidFill>
+                <a:schemeClr val="tx1"/>
+              </a:solidFill>
+              <a:tailEnd type="triangle" w="lg" len="lg"/>
+            </a:ln>
+          </p:spPr>
+          <p:style>
+            <a:lnRef idx="2">
+              <a:schemeClr val="accent1"/>
+            </a:lnRef>
+            <a:fillRef idx="0">
+              <a:schemeClr val="accent1"/>
+            </a:fillRef>
+            <a:effectRef idx="1">
+              <a:schemeClr val="accent1"/>
+            </a:effectRef>
+            <a:fontRef idx="minor">
+              <a:schemeClr val="tx1"/>
+            </a:fontRef>
+          </p:style>
+        </p:cxnSp>
+        <p:cxnSp>
+          <p:nvCxnSpPr>
+            <p:cNvPr id="35" name="Straight Arrow Connector 34">
+              <a:extLst>
+                <a:ext uri="{FF2B5EF4-FFF2-40B4-BE49-F238E27FC236}">
+                  <a16:creationId xmlns:a16="http://schemas.microsoft.com/office/drawing/2014/main" id="{E68CCFC6-FBC6-C30C-433B-07969DA8F5CA}"/>
+                </a:ext>
+              </a:extLst>
+            </p:cNvPr>
+            <p:cNvCxnSpPr>
+              <a:cxnSpLocks/>
+              <a:stCxn id="6" idx="3"/>
+            </p:cNvCxnSpPr>
+            <p:nvPr/>
+          </p:nvCxnSpPr>
+          <p:spPr>
+            <a:xfrm>
+              <a:off x="9290959" y="1726746"/>
+              <a:ext cx="1616528" cy="0"/>
+            </a:xfrm>
+            <a:prstGeom prst="straightConnector1">
+              <a:avLst/>
+            </a:prstGeom>
+            <a:ln w="31750">
+              <a:solidFill>
+                <a:schemeClr val="tx1"/>
+              </a:solidFill>
+              <a:tailEnd type="triangle" w="lg" len="lg"/>
+            </a:ln>
+          </p:spPr>
+          <p:style>
+            <a:lnRef idx="2">
+              <a:schemeClr val="accent1"/>
+            </a:lnRef>
+            <a:fillRef idx="0">
+              <a:schemeClr val="accent1"/>
+            </a:fillRef>
+            <a:effectRef idx="1">
+              <a:schemeClr val="accent1"/>
+            </a:effectRef>
+            <a:fontRef idx="minor">
+              <a:schemeClr val="tx1"/>
+            </a:fontRef>
+          </p:style>
+        </p:cxnSp>
+        <p:cxnSp>
+          <p:nvCxnSpPr>
+            <p:cNvPr id="45" name="Straight Arrow Connector 44">
+              <a:extLst>
+                <a:ext uri="{FF2B5EF4-FFF2-40B4-BE49-F238E27FC236}">
+                  <a16:creationId xmlns:a16="http://schemas.microsoft.com/office/drawing/2014/main" id="{DFF2310E-975F-D64F-1399-DF18414E670A}"/>
+                </a:ext>
+              </a:extLst>
+            </p:cNvPr>
+            <p:cNvCxnSpPr>
+              <a:cxnSpLocks/>
+              <a:stCxn id="7" idx="3"/>
+            </p:cNvCxnSpPr>
+            <p:nvPr/>
+          </p:nvCxnSpPr>
+          <p:spPr>
+            <a:xfrm>
+              <a:off x="9290959" y="4935311"/>
+              <a:ext cx="1616528" cy="0"/>
+            </a:xfrm>
+            <a:prstGeom prst="straightConnector1">
+              <a:avLst/>
+            </a:prstGeom>
+            <a:ln w="31750">
+              <a:solidFill>
+                <a:schemeClr val="tx1"/>
+              </a:solidFill>
+              <a:tailEnd type="triangle" w="lg" len="lg"/>
+            </a:ln>
+          </p:spPr>
+          <p:style>
+            <a:lnRef idx="2">
+              <a:schemeClr val="accent1"/>
+            </a:lnRef>
+            <a:fillRef idx="0">
+              <a:schemeClr val="accent1"/>
+            </a:fillRef>
+            <a:effectRef idx="1">
+              <a:schemeClr val="accent1"/>
+            </a:effectRef>
+            <a:fontRef idx="minor">
+              <a:schemeClr val="tx1"/>
+            </a:fontRef>
+          </p:style>
+        </p:cxnSp>
+      </p:grpSp>
+    </p:spTree>
+    <p:extLst>
+      <p:ext uri="{BB962C8B-B14F-4D97-AF65-F5344CB8AC3E}">
+        <p14:creationId xmlns:p14="http://schemas.microsoft.com/office/powerpoint/2010/main" val="1631264750"/>
       </p:ext>
     </p:extLst>
   </p:cSld>

--- a/images/icu.pptx
+++ b/images/icu.pptx
@@ -4,11 +4,16 @@
   <p:sldMasterIdLst>
     <p:sldMasterId id="2147483648" r:id="rId1"/>
   </p:sldMasterIdLst>
+  <p:notesMasterIdLst>
+    <p:notesMasterId r:id="rId8"/>
+  </p:notesMasterIdLst>
   <p:sldIdLst>
     <p:sldId id="256" r:id="rId2"/>
     <p:sldId id="257" r:id="rId3"/>
     <p:sldId id="258" r:id="rId4"/>
     <p:sldId id="259" r:id="rId5"/>
+    <p:sldId id="260" r:id="rId6"/>
+    <p:sldId id="262" r:id="rId7"/>
   </p:sldIdLst>
   <p:sldSz cx="12192000" cy="6858000"/>
   <p:notesSz cx="6858000" cy="9144000"/>
@@ -113,6 +118,440 @@
     </p:ext>
   </p:extLst>
 </p:presentation>
+</file>
+
+<file path=ppt/notesMasters/notesMaster1.xml><?xml version="1.0" encoding="utf-8"?>
+<p:notesMaster xmlns:a="http://schemas.openxmlformats.org/drawingml/2006/main" xmlns:r="http://schemas.openxmlformats.org/officeDocument/2006/relationships" xmlns:p="http://schemas.openxmlformats.org/presentationml/2006/main">
+  <p:cSld>
+    <p:bg>
+      <p:bgRef idx="1001">
+        <a:schemeClr val="bg1"/>
+      </p:bgRef>
+    </p:bg>
+    <p:spTree>
+      <p:nvGrpSpPr>
+        <p:cNvPr id="1" name=""/>
+        <p:cNvGrpSpPr/>
+        <p:nvPr/>
+      </p:nvGrpSpPr>
+      <p:grpSpPr>
+        <a:xfrm>
+          <a:off x="0" y="0"/>
+          <a:ext cx="0" cy="0"/>
+          <a:chOff x="0" y="0"/>
+          <a:chExt cx="0" cy="0"/>
+        </a:xfrm>
+      </p:grpSpPr>
+      <p:sp>
+        <p:nvSpPr>
+          <p:cNvPr id="2" name="Header Placeholder 1"/>
+          <p:cNvSpPr>
+            <a:spLocks noGrp="1"/>
+          </p:cNvSpPr>
+          <p:nvPr>
+            <p:ph type="hdr" sz="quarter"/>
+          </p:nvPr>
+        </p:nvSpPr>
+        <p:spPr>
+          <a:xfrm>
+            <a:off x="0" y="0"/>
+            <a:ext cx="2971800" cy="458788"/>
+          </a:xfrm>
+          <a:prstGeom prst="rect">
+            <a:avLst/>
+          </a:prstGeom>
+        </p:spPr>
+        <p:txBody>
+          <a:bodyPr vert="horz" lIns="91440" tIns="45720" rIns="91440" bIns="45720" rtlCol="0"/>
+          <a:lstStyle>
+            <a:lvl1pPr algn="l">
+              <a:defRPr sz="1200"/>
+            </a:lvl1pPr>
+          </a:lstStyle>
+          <a:p>
+            <a:endParaRPr lang="en-US"/>
+          </a:p>
+        </p:txBody>
+      </p:sp>
+      <p:sp>
+        <p:nvSpPr>
+          <p:cNvPr id="3" name="Date Placeholder 2"/>
+          <p:cNvSpPr>
+            <a:spLocks noGrp="1"/>
+          </p:cNvSpPr>
+          <p:nvPr>
+            <p:ph type="dt" idx="1"/>
+          </p:nvPr>
+        </p:nvSpPr>
+        <p:spPr>
+          <a:xfrm>
+            <a:off x="3884613" y="0"/>
+            <a:ext cx="2971800" cy="458788"/>
+          </a:xfrm>
+          <a:prstGeom prst="rect">
+            <a:avLst/>
+          </a:prstGeom>
+        </p:spPr>
+        <p:txBody>
+          <a:bodyPr vert="horz" lIns="91440" tIns="45720" rIns="91440" bIns="45720" rtlCol="0"/>
+          <a:lstStyle>
+            <a:lvl1pPr algn="r">
+              <a:defRPr sz="1200"/>
+            </a:lvl1pPr>
+          </a:lstStyle>
+          <a:p>
+            <a:fld id="{AD42B31F-4ABA-274F-9BB4-DA3A6583FDB8}" type="datetimeFigureOut">
+              <a:rPr lang="en-US" smtClean="0"/>
+              <a:t>5/11/26</a:t>
+            </a:fld>
+            <a:endParaRPr lang="en-US"/>
+          </a:p>
+        </p:txBody>
+      </p:sp>
+      <p:sp>
+        <p:nvSpPr>
+          <p:cNvPr id="4" name="Slide Image Placeholder 3"/>
+          <p:cNvSpPr>
+            <a:spLocks noGrp="1" noRot="1" noChangeAspect="1"/>
+          </p:cNvSpPr>
+          <p:nvPr>
+            <p:ph type="sldImg" idx="2"/>
+          </p:nvPr>
+        </p:nvSpPr>
+        <p:spPr>
+          <a:xfrm>
+            <a:off x="685800" y="1143000"/>
+            <a:ext cx="5486400" cy="3086100"/>
+          </a:xfrm>
+          <a:prstGeom prst="rect">
+            <a:avLst/>
+          </a:prstGeom>
+          <a:noFill/>
+          <a:ln w="12700">
+            <a:solidFill>
+              <a:prstClr val="black"/>
+            </a:solidFill>
+          </a:ln>
+        </p:spPr>
+        <p:txBody>
+          <a:bodyPr vert="horz" lIns="91440" tIns="45720" rIns="91440" bIns="45720" rtlCol="0" anchor="ctr"/>
+          <a:lstStyle/>
+          <a:p>
+            <a:endParaRPr lang="en-US"/>
+          </a:p>
+        </p:txBody>
+      </p:sp>
+      <p:sp>
+        <p:nvSpPr>
+          <p:cNvPr id="5" name="Notes Placeholder 4"/>
+          <p:cNvSpPr>
+            <a:spLocks noGrp="1"/>
+          </p:cNvSpPr>
+          <p:nvPr>
+            <p:ph type="body" sz="quarter" idx="3"/>
+          </p:nvPr>
+        </p:nvSpPr>
+        <p:spPr>
+          <a:xfrm>
+            <a:off x="685800" y="4400550"/>
+            <a:ext cx="5486400" cy="3600450"/>
+          </a:xfrm>
+          <a:prstGeom prst="rect">
+            <a:avLst/>
+          </a:prstGeom>
+        </p:spPr>
+        <p:txBody>
+          <a:bodyPr vert="horz" lIns="91440" tIns="45720" rIns="91440" bIns="45720" rtlCol="0"/>
+          <a:lstStyle/>
+          <a:p>
+            <a:pPr lvl="0"/>
+            <a:r>
+              <a:rPr lang="en-GB"/>
+              <a:t>Click to edit Master text styles</a:t>
+            </a:r>
+          </a:p>
+          <a:p>
+            <a:pPr lvl="1"/>
+            <a:r>
+              <a:rPr lang="en-GB"/>
+              <a:t>Second level</a:t>
+            </a:r>
+          </a:p>
+          <a:p>
+            <a:pPr lvl="2"/>
+            <a:r>
+              <a:rPr lang="en-GB"/>
+              <a:t>Third level</a:t>
+            </a:r>
+          </a:p>
+          <a:p>
+            <a:pPr lvl="3"/>
+            <a:r>
+              <a:rPr lang="en-GB"/>
+              <a:t>Fourth level</a:t>
+            </a:r>
+          </a:p>
+          <a:p>
+            <a:pPr lvl="4"/>
+            <a:r>
+              <a:rPr lang="en-GB"/>
+              <a:t>Fifth level</a:t>
+            </a:r>
+            <a:endParaRPr lang="en-US"/>
+          </a:p>
+        </p:txBody>
+      </p:sp>
+      <p:sp>
+        <p:nvSpPr>
+          <p:cNvPr id="6" name="Footer Placeholder 5"/>
+          <p:cNvSpPr>
+            <a:spLocks noGrp="1"/>
+          </p:cNvSpPr>
+          <p:nvPr>
+            <p:ph type="ftr" sz="quarter" idx="4"/>
+          </p:nvPr>
+        </p:nvSpPr>
+        <p:spPr>
+          <a:xfrm>
+            <a:off x="0" y="8685213"/>
+            <a:ext cx="2971800" cy="458787"/>
+          </a:xfrm>
+          <a:prstGeom prst="rect">
+            <a:avLst/>
+          </a:prstGeom>
+        </p:spPr>
+        <p:txBody>
+          <a:bodyPr vert="horz" lIns="91440" tIns="45720" rIns="91440" bIns="45720" rtlCol="0" anchor="b"/>
+          <a:lstStyle>
+            <a:lvl1pPr algn="l">
+              <a:defRPr sz="1200"/>
+            </a:lvl1pPr>
+          </a:lstStyle>
+          <a:p>
+            <a:endParaRPr lang="en-US"/>
+          </a:p>
+        </p:txBody>
+      </p:sp>
+      <p:sp>
+        <p:nvSpPr>
+          <p:cNvPr id="7" name="Slide Number Placeholder 6"/>
+          <p:cNvSpPr>
+            <a:spLocks noGrp="1"/>
+          </p:cNvSpPr>
+          <p:nvPr>
+            <p:ph type="sldNum" sz="quarter" idx="5"/>
+          </p:nvPr>
+        </p:nvSpPr>
+        <p:spPr>
+          <a:xfrm>
+            <a:off x="3884613" y="8685213"/>
+            <a:ext cx="2971800" cy="458787"/>
+          </a:xfrm>
+          <a:prstGeom prst="rect">
+            <a:avLst/>
+          </a:prstGeom>
+        </p:spPr>
+        <p:txBody>
+          <a:bodyPr vert="horz" lIns="91440" tIns="45720" rIns="91440" bIns="45720" rtlCol="0" anchor="b"/>
+          <a:lstStyle>
+            <a:lvl1pPr algn="r">
+              <a:defRPr sz="1200"/>
+            </a:lvl1pPr>
+          </a:lstStyle>
+          <a:p>
+            <a:fld id="{C0ECF21E-4684-E148-81FF-D3B1FD823314}" type="slidenum">
+              <a:rPr lang="en-US" smtClean="0"/>
+              <a:t>‹#›</a:t>
+            </a:fld>
+            <a:endParaRPr lang="en-US"/>
+          </a:p>
+        </p:txBody>
+      </p:sp>
+    </p:spTree>
+    <p:extLst>
+      <p:ext uri="{BB962C8B-B14F-4D97-AF65-F5344CB8AC3E}">
+        <p14:creationId xmlns:p14="http://schemas.microsoft.com/office/powerpoint/2010/main" val="1438598071"/>
+      </p:ext>
+    </p:extLst>
+  </p:cSld>
+  <p:clrMap bg1="lt1" tx1="dk1" bg2="lt2" tx2="dk2" accent1="accent1" accent2="accent2" accent3="accent3" accent4="accent4" accent5="accent5" accent6="accent6" hlink="hlink" folHlink="folHlink"/>
+  <p:notesStyle>
+    <a:lvl1pPr marL="0" algn="l" defTabSz="914400" rtl="0" eaLnBrk="1" latinLnBrk="0" hangingPunct="1">
+      <a:defRPr sz="1200" kern="1200">
+        <a:solidFill>
+          <a:schemeClr val="tx1"/>
+        </a:solidFill>
+        <a:latin typeface="+mn-lt"/>
+        <a:ea typeface="+mn-ea"/>
+        <a:cs typeface="+mn-cs"/>
+      </a:defRPr>
+    </a:lvl1pPr>
+    <a:lvl2pPr marL="457200" algn="l" defTabSz="914400" rtl="0" eaLnBrk="1" latinLnBrk="0" hangingPunct="1">
+      <a:defRPr sz="1200" kern="1200">
+        <a:solidFill>
+          <a:schemeClr val="tx1"/>
+        </a:solidFill>
+        <a:latin typeface="+mn-lt"/>
+        <a:ea typeface="+mn-ea"/>
+        <a:cs typeface="+mn-cs"/>
+      </a:defRPr>
+    </a:lvl2pPr>
+    <a:lvl3pPr marL="914400" algn="l" defTabSz="914400" rtl="0" eaLnBrk="1" latinLnBrk="0" hangingPunct="1">
+      <a:defRPr sz="1200" kern="1200">
+        <a:solidFill>
+          <a:schemeClr val="tx1"/>
+        </a:solidFill>
+        <a:latin typeface="+mn-lt"/>
+        <a:ea typeface="+mn-ea"/>
+        <a:cs typeface="+mn-cs"/>
+      </a:defRPr>
+    </a:lvl3pPr>
+    <a:lvl4pPr marL="1371600" algn="l" defTabSz="914400" rtl="0" eaLnBrk="1" latinLnBrk="0" hangingPunct="1">
+      <a:defRPr sz="1200" kern="1200">
+        <a:solidFill>
+          <a:schemeClr val="tx1"/>
+        </a:solidFill>
+        <a:latin typeface="+mn-lt"/>
+        <a:ea typeface="+mn-ea"/>
+        <a:cs typeface="+mn-cs"/>
+      </a:defRPr>
+    </a:lvl4pPr>
+    <a:lvl5pPr marL="1828800" algn="l" defTabSz="914400" rtl="0" eaLnBrk="1" latinLnBrk="0" hangingPunct="1">
+      <a:defRPr sz="1200" kern="1200">
+        <a:solidFill>
+          <a:schemeClr val="tx1"/>
+        </a:solidFill>
+        <a:latin typeface="+mn-lt"/>
+        <a:ea typeface="+mn-ea"/>
+        <a:cs typeface="+mn-cs"/>
+      </a:defRPr>
+    </a:lvl5pPr>
+    <a:lvl6pPr marL="2286000" algn="l" defTabSz="914400" rtl="0" eaLnBrk="1" latinLnBrk="0" hangingPunct="1">
+      <a:defRPr sz="1200" kern="1200">
+        <a:solidFill>
+          <a:schemeClr val="tx1"/>
+        </a:solidFill>
+        <a:latin typeface="+mn-lt"/>
+        <a:ea typeface="+mn-ea"/>
+        <a:cs typeface="+mn-cs"/>
+      </a:defRPr>
+    </a:lvl6pPr>
+    <a:lvl7pPr marL="2743200" algn="l" defTabSz="914400" rtl="0" eaLnBrk="1" latinLnBrk="0" hangingPunct="1">
+      <a:defRPr sz="1200" kern="1200">
+        <a:solidFill>
+          <a:schemeClr val="tx1"/>
+        </a:solidFill>
+        <a:latin typeface="+mn-lt"/>
+        <a:ea typeface="+mn-ea"/>
+        <a:cs typeface="+mn-cs"/>
+      </a:defRPr>
+    </a:lvl7pPr>
+    <a:lvl8pPr marL="3200400" algn="l" defTabSz="914400" rtl="0" eaLnBrk="1" latinLnBrk="0" hangingPunct="1">
+      <a:defRPr sz="1200" kern="1200">
+        <a:solidFill>
+          <a:schemeClr val="tx1"/>
+        </a:solidFill>
+        <a:latin typeface="+mn-lt"/>
+        <a:ea typeface="+mn-ea"/>
+        <a:cs typeface="+mn-cs"/>
+      </a:defRPr>
+    </a:lvl8pPr>
+    <a:lvl9pPr marL="3657600" algn="l" defTabSz="914400" rtl="0" eaLnBrk="1" latinLnBrk="0" hangingPunct="1">
+      <a:defRPr sz="1200" kern="1200">
+        <a:solidFill>
+          <a:schemeClr val="tx1"/>
+        </a:solidFill>
+        <a:latin typeface="+mn-lt"/>
+        <a:ea typeface="+mn-ea"/>
+        <a:cs typeface="+mn-cs"/>
+      </a:defRPr>
+    </a:lvl9pPr>
+  </p:notesStyle>
+</p:notesMaster>
+</file>
+
+<file path=ppt/notesSlides/notesSlide1.xml><?xml version="1.0" encoding="utf-8"?>
+<p:notes xmlns:a="http://schemas.openxmlformats.org/drawingml/2006/main" xmlns:r="http://schemas.openxmlformats.org/officeDocument/2006/relationships" xmlns:p="http://schemas.openxmlformats.org/presentationml/2006/main">
+  <p:cSld>
+    <p:spTree>
+      <p:nvGrpSpPr>
+        <p:cNvPr id="1" name=""/>
+        <p:cNvGrpSpPr/>
+        <p:nvPr/>
+      </p:nvGrpSpPr>
+      <p:grpSpPr>
+        <a:xfrm>
+          <a:off x="0" y="0"/>
+          <a:ext cx="0" cy="0"/>
+          <a:chOff x="0" y="0"/>
+          <a:chExt cx="0" cy="0"/>
+        </a:xfrm>
+      </p:grpSpPr>
+      <p:sp>
+        <p:nvSpPr>
+          <p:cNvPr id="2" name="Slide Image Placeholder 1"/>
+          <p:cNvSpPr>
+            <a:spLocks noGrp="1" noRot="1" noChangeAspect="1"/>
+          </p:cNvSpPr>
+          <p:nvPr>
+            <p:ph type="sldImg"/>
+          </p:nvPr>
+        </p:nvSpPr>
+        <p:spPr/>
+      </p:sp>
+      <p:sp>
+        <p:nvSpPr>
+          <p:cNvPr id="3" name="Notes Placeholder 2"/>
+          <p:cNvSpPr>
+            <a:spLocks noGrp="1"/>
+          </p:cNvSpPr>
+          <p:nvPr>
+            <p:ph type="body" idx="1"/>
+          </p:nvPr>
+        </p:nvSpPr>
+        <p:spPr/>
+        <p:txBody>
+          <a:bodyPr/>
+          <a:lstStyle/>
+          <a:p>
+            <a:endParaRPr lang="en-US" dirty="0"/>
+          </a:p>
+        </p:txBody>
+      </p:sp>
+      <p:sp>
+        <p:nvSpPr>
+          <p:cNvPr id="4" name="Slide Number Placeholder 3"/>
+          <p:cNvSpPr>
+            <a:spLocks noGrp="1"/>
+          </p:cNvSpPr>
+          <p:nvPr>
+            <p:ph type="sldNum" sz="quarter" idx="5"/>
+          </p:nvPr>
+        </p:nvSpPr>
+        <p:spPr/>
+        <p:txBody>
+          <a:bodyPr/>
+          <a:lstStyle/>
+          <a:p>
+            <a:fld id="{C0ECF21E-4684-E148-81FF-D3B1FD823314}" type="slidenum">
+              <a:rPr lang="en-US" smtClean="0"/>
+              <a:t>6</a:t>
+            </a:fld>
+            <a:endParaRPr lang="en-US"/>
+          </a:p>
+        </p:txBody>
+      </p:sp>
+    </p:spTree>
+    <p:extLst>
+      <p:ext uri="{BB962C8B-B14F-4D97-AF65-F5344CB8AC3E}">
+        <p14:creationId xmlns:p14="http://schemas.microsoft.com/office/powerpoint/2010/main" val="2964045316"/>
+      </p:ext>
+    </p:extLst>
+  </p:cSld>
+  <p:clrMapOvr>
+    <a:masterClrMapping/>
+  </p:clrMapOvr>
+</p:notes>
 </file>
 
 <file path=ppt/slideLayouts/slideLayout1.xml><?xml version="1.0" encoding="utf-8"?>
@@ -10872,6 +11311,3921 @@
 </p:sld>
 </file>
 
+<file path=ppt/slides/slide5.xml><?xml version="1.0" encoding="utf-8"?>
+<p:sld xmlns:a="http://schemas.openxmlformats.org/drawingml/2006/main" xmlns:r="http://schemas.openxmlformats.org/officeDocument/2006/relationships" xmlns:p="http://schemas.openxmlformats.org/presentationml/2006/main">
+  <p:cSld>
+    <p:spTree>
+      <p:nvGrpSpPr>
+        <p:cNvPr id="1" name="">
+          <a:extLst>
+            <a:ext uri="{FF2B5EF4-FFF2-40B4-BE49-F238E27FC236}">
+              <a16:creationId xmlns:a16="http://schemas.microsoft.com/office/drawing/2014/main" id="{3A69792F-6C8B-6301-19A3-4E8CCF9B7300}"/>
+            </a:ext>
+          </a:extLst>
+        </p:cNvPr>
+        <p:cNvGrpSpPr/>
+        <p:nvPr/>
+      </p:nvGrpSpPr>
+      <p:grpSpPr>
+        <a:xfrm>
+          <a:off x="0" y="0"/>
+          <a:ext cx="0" cy="0"/>
+          <a:chOff x="0" y="0"/>
+          <a:chExt cx="0" cy="0"/>
+        </a:xfrm>
+      </p:grpSpPr>
+      <p:grpSp>
+        <p:nvGrpSpPr>
+          <p:cNvPr id="79" name="Group 78">
+            <a:extLst>
+              <a:ext uri="{FF2B5EF4-FFF2-40B4-BE49-F238E27FC236}">
+                <a16:creationId xmlns:a16="http://schemas.microsoft.com/office/drawing/2014/main" id="{79285C56-49F7-4A42-B644-B32941F2B6CC}"/>
+              </a:ext>
+            </a:extLst>
+          </p:cNvPr>
+          <p:cNvGrpSpPr/>
+          <p:nvPr/>
+        </p:nvGrpSpPr>
+        <p:grpSpPr>
+          <a:xfrm>
+            <a:off x="338600" y="2325510"/>
+            <a:ext cx="11288930" cy="3575753"/>
+            <a:chOff x="338600" y="2325510"/>
+            <a:chExt cx="11288930" cy="3575753"/>
+          </a:xfrm>
+        </p:grpSpPr>
+        <p:sp>
+          <p:nvSpPr>
+            <p:cNvPr id="144" name="Rounded Rectangle 143">
+              <a:extLst>
+                <a:ext uri="{FF2B5EF4-FFF2-40B4-BE49-F238E27FC236}">
+                  <a16:creationId xmlns:a16="http://schemas.microsoft.com/office/drawing/2014/main" id="{0ED0F67D-7C8B-DBE3-1EE6-69A4186DCBAB}"/>
+                </a:ext>
+              </a:extLst>
+            </p:cNvPr>
+            <p:cNvSpPr/>
+            <p:nvPr/>
+          </p:nvSpPr>
+          <p:spPr>
+            <a:xfrm>
+              <a:off x="338600" y="2325510"/>
+              <a:ext cx="11288930" cy="3575753"/>
+            </a:xfrm>
+            <a:prstGeom prst="roundRect">
+              <a:avLst>
+                <a:gd name="adj" fmla="val 2957"/>
+              </a:avLst>
+            </a:prstGeom>
+            <a:solidFill>
+              <a:schemeClr val="bg2"/>
+            </a:solidFill>
+            <a:ln w="38100"/>
+          </p:spPr>
+          <p:style>
+            <a:lnRef idx="2">
+              <a:schemeClr val="accent1">
+                <a:shade val="15000"/>
+              </a:schemeClr>
+            </a:lnRef>
+            <a:fillRef idx="1">
+              <a:schemeClr val="accent1"/>
+            </a:fillRef>
+            <a:effectRef idx="0">
+              <a:schemeClr val="accent1"/>
+            </a:effectRef>
+            <a:fontRef idx="minor">
+              <a:schemeClr val="lt1"/>
+            </a:fontRef>
+          </p:style>
+          <p:txBody>
+            <a:bodyPr rtlCol="0" anchor="ctr"/>
+            <a:lstStyle/>
+            <a:p>
+              <a:pPr algn="ctr"/>
+              <a:endParaRPr lang="en-US"/>
+            </a:p>
+          </p:txBody>
+        </p:sp>
+        <p:pic>
+          <p:nvPicPr>
+            <p:cNvPr id="59" name="Graphic 58" descr="Sleep with solid fill">
+              <a:extLst>
+                <a:ext uri="{FF2B5EF4-FFF2-40B4-BE49-F238E27FC236}">
+                  <a16:creationId xmlns:a16="http://schemas.microsoft.com/office/drawing/2014/main" id="{9C049E6D-99AB-59D4-66A5-5CD8E50DCFEC}"/>
+                </a:ext>
+              </a:extLst>
+            </p:cNvPr>
+            <p:cNvPicPr>
+              <a:picLocks noChangeAspect="1"/>
+            </p:cNvPicPr>
+            <p:nvPr/>
+          </p:nvPicPr>
+          <p:blipFill>
+            <a:blip>
+              <a:extLst>
+                <a:ext uri="{96DAC541-7B7A-43D3-8B79-37D633B846F1}">
+                  <asvg:svgBlip xmlns:asvg="http://schemas.microsoft.com/office/drawing/2016/SVG/main" r:embed="rId2"/>
+                </a:ext>
+              </a:extLst>
+            </a:blip>
+            <a:srcRect/>
+            <a:stretch/>
+          </p:blipFill>
+          <p:spPr>
+            <a:xfrm>
+              <a:off x="10274737" y="3105221"/>
+              <a:ext cx="634696" cy="634696"/>
+            </a:xfrm>
+            <a:prstGeom prst="rect">
+              <a:avLst/>
+            </a:prstGeom>
+          </p:spPr>
+        </p:pic>
+        <p:pic>
+          <p:nvPicPr>
+            <p:cNvPr id="77" name="Graphic 76" descr="Sleep with solid fill">
+              <a:extLst>
+                <a:ext uri="{FF2B5EF4-FFF2-40B4-BE49-F238E27FC236}">
+                  <a16:creationId xmlns:a16="http://schemas.microsoft.com/office/drawing/2014/main" id="{75D17B8B-E66B-4A69-7C97-2E8D5B049DE9}"/>
+                </a:ext>
+              </a:extLst>
+            </p:cNvPr>
+            <p:cNvPicPr>
+              <a:picLocks noChangeAspect="1"/>
+            </p:cNvPicPr>
+            <p:nvPr/>
+          </p:nvPicPr>
+          <p:blipFill>
+            <a:blip>
+              <a:extLst>
+                <a:ext uri="{96DAC541-7B7A-43D3-8B79-37D633B846F1}">
+                  <asvg:svgBlip xmlns:asvg="http://schemas.microsoft.com/office/drawing/2016/SVG/main" r:embed="rId2"/>
+                </a:ext>
+              </a:extLst>
+            </a:blip>
+            <a:srcRect/>
+            <a:stretch/>
+          </p:blipFill>
+          <p:spPr>
+            <a:xfrm>
+              <a:off x="844863" y="4754391"/>
+              <a:ext cx="634696" cy="634696"/>
+            </a:xfrm>
+            <a:prstGeom prst="rect">
+              <a:avLst/>
+            </a:prstGeom>
+          </p:spPr>
+        </p:pic>
+        <p:pic>
+          <p:nvPicPr>
+            <p:cNvPr id="78" name="Graphic 77" descr="Sleep with solid fill">
+              <a:extLst>
+                <a:ext uri="{FF2B5EF4-FFF2-40B4-BE49-F238E27FC236}">
+                  <a16:creationId xmlns:a16="http://schemas.microsoft.com/office/drawing/2014/main" id="{2C8F686B-00AE-DB9E-A2B2-64A49AAEC4D1}"/>
+                </a:ext>
+              </a:extLst>
+            </p:cNvPr>
+            <p:cNvPicPr>
+              <a:picLocks noChangeAspect="1"/>
+            </p:cNvPicPr>
+            <p:nvPr/>
+          </p:nvPicPr>
+          <p:blipFill>
+            <a:blip>
+              <a:extLst>
+                <a:ext uri="{96DAC541-7B7A-43D3-8B79-37D633B846F1}">
+                  <asvg:svgBlip xmlns:asvg="http://schemas.microsoft.com/office/drawing/2016/SVG/main" r:embed="rId2"/>
+                </a:ext>
+              </a:extLst>
+            </a:blip>
+            <a:srcRect/>
+            <a:stretch/>
+          </p:blipFill>
+          <p:spPr>
+            <a:xfrm>
+              <a:off x="1910695" y="4754391"/>
+              <a:ext cx="634696" cy="634696"/>
+            </a:xfrm>
+            <a:prstGeom prst="rect">
+              <a:avLst/>
+            </a:prstGeom>
+          </p:spPr>
+        </p:pic>
+        <p:pic>
+          <p:nvPicPr>
+            <p:cNvPr id="142" name="Graphic 141" descr="Sleep with solid fill">
+              <a:extLst>
+                <a:ext uri="{FF2B5EF4-FFF2-40B4-BE49-F238E27FC236}">
+                  <a16:creationId xmlns:a16="http://schemas.microsoft.com/office/drawing/2014/main" id="{4B2FE66F-7AC1-F8C2-5925-623C20BC8BC5}"/>
+                </a:ext>
+              </a:extLst>
+            </p:cNvPr>
+            <p:cNvPicPr>
+              <a:picLocks noChangeAspect="1"/>
+            </p:cNvPicPr>
+            <p:nvPr/>
+          </p:nvPicPr>
+          <p:blipFill>
+            <a:blip>
+              <a:extLst>
+                <a:ext uri="{96DAC541-7B7A-43D3-8B79-37D633B846F1}">
+                  <asvg:svgBlip xmlns:asvg="http://schemas.microsoft.com/office/drawing/2016/SVG/main" r:embed="rId2"/>
+                </a:ext>
+              </a:extLst>
+            </a:blip>
+            <a:srcRect/>
+            <a:stretch/>
+          </p:blipFill>
+          <p:spPr>
+            <a:xfrm>
+              <a:off x="10240048" y="4754849"/>
+              <a:ext cx="634696" cy="634696"/>
+            </a:xfrm>
+            <a:prstGeom prst="rect">
+              <a:avLst/>
+            </a:prstGeom>
+          </p:spPr>
+        </p:pic>
+        <p:pic>
+          <p:nvPicPr>
+            <p:cNvPr id="3" name="Graphic 2" descr="Sleep with solid fill">
+              <a:extLst>
+                <a:ext uri="{FF2B5EF4-FFF2-40B4-BE49-F238E27FC236}">
+                  <a16:creationId xmlns:a16="http://schemas.microsoft.com/office/drawing/2014/main" id="{DB290862-70D5-DE6C-B879-8CA67BC59534}"/>
+                </a:ext>
+              </a:extLst>
+            </p:cNvPr>
+            <p:cNvPicPr>
+              <a:picLocks noChangeAspect="1"/>
+            </p:cNvPicPr>
+            <p:nvPr/>
+          </p:nvPicPr>
+          <p:blipFill>
+            <a:blip>
+              <a:extLst>
+                <a:ext uri="{96DAC541-7B7A-43D3-8B79-37D633B846F1}">
+                  <asvg:svgBlip xmlns:asvg="http://schemas.microsoft.com/office/drawing/2016/SVG/main" r:embed="rId2"/>
+                </a:ext>
+              </a:extLst>
+            </a:blip>
+            <a:srcRect/>
+            <a:stretch/>
+          </p:blipFill>
+          <p:spPr>
+            <a:xfrm>
+              <a:off x="3020028" y="4754391"/>
+              <a:ext cx="634696" cy="634696"/>
+            </a:xfrm>
+            <a:prstGeom prst="rect">
+              <a:avLst/>
+            </a:prstGeom>
+          </p:spPr>
+        </p:pic>
+        <p:pic>
+          <p:nvPicPr>
+            <p:cNvPr id="6" name="Graphic 5" descr="Sleep with solid fill">
+              <a:extLst>
+                <a:ext uri="{FF2B5EF4-FFF2-40B4-BE49-F238E27FC236}">
+                  <a16:creationId xmlns:a16="http://schemas.microsoft.com/office/drawing/2014/main" id="{E11ED65A-77A0-9A29-B9C4-575FD2099CF9}"/>
+                </a:ext>
+              </a:extLst>
+            </p:cNvPr>
+            <p:cNvPicPr>
+              <a:picLocks noChangeAspect="1"/>
+            </p:cNvPicPr>
+            <p:nvPr/>
+          </p:nvPicPr>
+          <p:blipFill>
+            <a:blip>
+              <a:extLst>
+                <a:ext uri="{96DAC541-7B7A-43D3-8B79-37D633B846F1}">
+                  <asvg:svgBlip xmlns:asvg="http://schemas.microsoft.com/office/drawing/2016/SVG/main" r:embed="rId2"/>
+                </a:ext>
+              </a:extLst>
+            </a:blip>
+            <a:srcRect/>
+            <a:stretch/>
+          </p:blipFill>
+          <p:spPr>
+            <a:xfrm>
+              <a:off x="4085860" y="4754391"/>
+              <a:ext cx="634696" cy="634696"/>
+            </a:xfrm>
+            <a:prstGeom prst="rect">
+              <a:avLst/>
+            </a:prstGeom>
+          </p:spPr>
+        </p:pic>
+        <p:pic>
+          <p:nvPicPr>
+            <p:cNvPr id="7" name="Graphic 6" descr="Sleep with solid fill">
+              <a:extLst>
+                <a:ext uri="{FF2B5EF4-FFF2-40B4-BE49-F238E27FC236}">
+                  <a16:creationId xmlns:a16="http://schemas.microsoft.com/office/drawing/2014/main" id="{4C92CCC8-7B44-EBD0-596E-E0E8002B2A9F}"/>
+                </a:ext>
+              </a:extLst>
+            </p:cNvPr>
+            <p:cNvPicPr>
+              <a:picLocks noChangeAspect="1"/>
+            </p:cNvPicPr>
+            <p:nvPr/>
+          </p:nvPicPr>
+          <p:blipFill>
+            <a:blip>
+              <a:extLst>
+                <a:ext uri="{96DAC541-7B7A-43D3-8B79-37D633B846F1}">
+                  <asvg:svgBlip xmlns:asvg="http://schemas.microsoft.com/office/drawing/2016/SVG/main" r:embed="rId2"/>
+                </a:ext>
+              </a:extLst>
+            </a:blip>
+            <a:srcRect/>
+            <a:stretch/>
+          </p:blipFill>
+          <p:spPr>
+            <a:xfrm>
+              <a:off x="5205261" y="4754391"/>
+              <a:ext cx="634696" cy="634696"/>
+            </a:xfrm>
+            <a:prstGeom prst="rect">
+              <a:avLst/>
+            </a:prstGeom>
+          </p:spPr>
+        </p:pic>
+        <p:pic>
+          <p:nvPicPr>
+            <p:cNvPr id="8" name="Graphic 7" descr="Sleep with solid fill">
+              <a:extLst>
+                <a:ext uri="{FF2B5EF4-FFF2-40B4-BE49-F238E27FC236}">
+                  <a16:creationId xmlns:a16="http://schemas.microsoft.com/office/drawing/2014/main" id="{2C7533AE-EAC4-E3FF-E896-256B130860FD}"/>
+                </a:ext>
+              </a:extLst>
+            </p:cNvPr>
+            <p:cNvPicPr>
+              <a:picLocks noChangeAspect="1"/>
+            </p:cNvPicPr>
+            <p:nvPr/>
+          </p:nvPicPr>
+          <p:blipFill>
+            <a:blip>
+              <a:extLst>
+                <a:ext uri="{96DAC541-7B7A-43D3-8B79-37D633B846F1}">
+                  <asvg:svgBlip xmlns:asvg="http://schemas.microsoft.com/office/drawing/2016/SVG/main" r:embed="rId2"/>
+                </a:ext>
+              </a:extLst>
+            </a:blip>
+            <a:srcRect/>
+            <a:stretch/>
+          </p:blipFill>
+          <p:spPr>
+            <a:xfrm>
+              <a:off x="6271093" y="4754391"/>
+              <a:ext cx="634696" cy="634696"/>
+            </a:xfrm>
+            <a:prstGeom prst="rect">
+              <a:avLst/>
+            </a:prstGeom>
+          </p:spPr>
+        </p:pic>
+        <p:pic>
+          <p:nvPicPr>
+            <p:cNvPr id="17" name="Graphic 16" descr="Sleep with solid fill">
+              <a:extLst>
+                <a:ext uri="{FF2B5EF4-FFF2-40B4-BE49-F238E27FC236}">
+                  <a16:creationId xmlns:a16="http://schemas.microsoft.com/office/drawing/2014/main" id="{52A425B4-624D-B38A-872C-AD315B2FA3FA}"/>
+                </a:ext>
+              </a:extLst>
+            </p:cNvPr>
+            <p:cNvPicPr>
+              <a:picLocks noChangeAspect="1"/>
+            </p:cNvPicPr>
+            <p:nvPr/>
+          </p:nvPicPr>
+          <p:blipFill>
+            <a:blip>
+              <a:extLst>
+                <a:ext uri="{96DAC541-7B7A-43D3-8B79-37D633B846F1}">
+                  <asvg:svgBlip xmlns:asvg="http://schemas.microsoft.com/office/drawing/2016/SVG/main" r:embed="rId2"/>
+                </a:ext>
+              </a:extLst>
+            </a:blip>
+            <a:srcRect/>
+            <a:stretch/>
+          </p:blipFill>
+          <p:spPr>
+            <a:xfrm>
+              <a:off x="7380426" y="4754391"/>
+              <a:ext cx="634696" cy="634696"/>
+            </a:xfrm>
+            <a:prstGeom prst="rect">
+              <a:avLst/>
+            </a:prstGeom>
+          </p:spPr>
+        </p:pic>
+        <p:pic>
+          <p:nvPicPr>
+            <p:cNvPr id="18" name="Graphic 17" descr="Sleep with solid fill">
+              <a:extLst>
+                <a:ext uri="{FF2B5EF4-FFF2-40B4-BE49-F238E27FC236}">
+                  <a16:creationId xmlns:a16="http://schemas.microsoft.com/office/drawing/2014/main" id="{0C816457-5989-DE15-CA8E-C3D23EB3219F}"/>
+                </a:ext>
+              </a:extLst>
+            </p:cNvPr>
+            <p:cNvPicPr>
+              <a:picLocks noChangeAspect="1"/>
+            </p:cNvPicPr>
+            <p:nvPr/>
+          </p:nvPicPr>
+          <p:blipFill>
+            <a:blip>
+              <a:extLst>
+                <a:ext uri="{96DAC541-7B7A-43D3-8B79-37D633B846F1}">
+                  <asvg:svgBlip xmlns:asvg="http://schemas.microsoft.com/office/drawing/2016/SVG/main" r:embed="rId2"/>
+                </a:ext>
+              </a:extLst>
+            </a:blip>
+            <a:srcRect/>
+            <a:stretch/>
+          </p:blipFill>
+          <p:spPr>
+            <a:xfrm>
+              <a:off x="8446258" y="4754391"/>
+              <a:ext cx="634696" cy="634696"/>
+            </a:xfrm>
+            <a:prstGeom prst="rect">
+              <a:avLst/>
+            </a:prstGeom>
+          </p:spPr>
+        </p:pic>
+        <p:pic>
+          <p:nvPicPr>
+            <p:cNvPr id="19" name="Graphic 18" descr="Sleep with solid fill">
+              <a:extLst>
+                <a:ext uri="{FF2B5EF4-FFF2-40B4-BE49-F238E27FC236}">
+                  <a16:creationId xmlns:a16="http://schemas.microsoft.com/office/drawing/2014/main" id="{99C1B9C7-6AFF-F128-F28C-ABB34C9CDFD2}"/>
+                </a:ext>
+              </a:extLst>
+            </p:cNvPr>
+            <p:cNvPicPr>
+              <a:picLocks noChangeAspect="1"/>
+            </p:cNvPicPr>
+            <p:nvPr/>
+          </p:nvPicPr>
+          <p:blipFill>
+            <a:blip>
+              <a:extLst>
+                <a:ext uri="{96DAC541-7B7A-43D3-8B79-37D633B846F1}">
+                  <asvg:svgBlip xmlns:asvg="http://schemas.microsoft.com/office/drawing/2016/SVG/main" r:embed="rId2"/>
+                </a:ext>
+              </a:extLst>
+            </a:blip>
+            <a:srcRect/>
+            <a:stretch/>
+          </p:blipFill>
+          <p:spPr>
+            <a:xfrm>
+              <a:off x="844863" y="3110637"/>
+              <a:ext cx="634696" cy="634696"/>
+            </a:xfrm>
+            <a:prstGeom prst="rect">
+              <a:avLst/>
+            </a:prstGeom>
+          </p:spPr>
+        </p:pic>
+        <p:pic>
+          <p:nvPicPr>
+            <p:cNvPr id="20" name="Graphic 19" descr="Sleep with solid fill">
+              <a:extLst>
+                <a:ext uri="{FF2B5EF4-FFF2-40B4-BE49-F238E27FC236}">
+                  <a16:creationId xmlns:a16="http://schemas.microsoft.com/office/drawing/2014/main" id="{16D7BA68-13D8-1BE3-97B4-E1CB8ACFD818}"/>
+                </a:ext>
+              </a:extLst>
+            </p:cNvPr>
+            <p:cNvPicPr>
+              <a:picLocks noChangeAspect="1"/>
+            </p:cNvPicPr>
+            <p:nvPr/>
+          </p:nvPicPr>
+          <p:blipFill>
+            <a:blip>
+              <a:extLst>
+                <a:ext uri="{96DAC541-7B7A-43D3-8B79-37D633B846F1}">
+                  <asvg:svgBlip xmlns:asvg="http://schemas.microsoft.com/office/drawing/2016/SVG/main" r:embed="rId2"/>
+                </a:ext>
+              </a:extLst>
+            </a:blip>
+            <a:srcRect/>
+            <a:stretch/>
+          </p:blipFill>
+          <p:spPr>
+            <a:xfrm>
+              <a:off x="1910695" y="3110637"/>
+              <a:ext cx="634696" cy="634696"/>
+            </a:xfrm>
+            <a:prstGeom prst="rect">
+              <a:avLst/>
+            </a:prstGeom>
+          </p:spPr>
+        </p:pic>
+        <p:pic>
+          <p:nvPicPr>
+            <p:cNvPr id="21" name="Graphic 20" descr="Sleep with solid fill">
+              <a:extLst>
+                <a:ext uri="{FF2B5EF4-FFF2-40B4-BE49-F238E27FC236}">
+                  <a16:creationId xmlns:a16="http://schemas.microsoft.com/office/drawing/2014/main" id="{3638C363-A2E4-C899-4A7C-271211D9558A}"/>
+                </a:ext>
+              </a:extLst>
+            </p:cNvPr>
+            <p:cNvPicPr>
+              <a:picLocks noChangeAspect="1"/>
+            </p:cNvPicPr>
+            <p:nvPr/>
+          </p:nvPicPr>
+          <p:blipFill>
+            <a:blip>
+              <a:extLst>
+                <a:ext uri="{96DAC541-7B7A-43D3-8B79-37D633B846F1}">
+                  <asvg:svgBlip xmlns:asvg="http://schemas.microsoft.com/office/drawing/2016/SVG/main" r:embed="rId2"/>
+                </a:ext>
+              </a:extLst>
+            </a:blip>
+            <a:srcRect/>
+            <a:stretch/>
+          </p:blipFill>
+          <p:spPr>
+            <a:xfrm>
+              <a:off x="3020028" y="3110637"/>
+              <a:ext cx="634696" cy="634696"/>
+            </a:xfrm>
+            <a:prstGeom prst="rect">
+              <a:avLst/>
+            </a:prstGeom>
+          </p:spPr>
+        </p:pic>
+        <p:pic>
+          <p:nvPicPr>
+            <p:cNvPr id="22" name="Graphic 21" descr="Sleep with solid fill">
+              <a:extLst>
+                <a:ext uri="{FF2B5EF4-FFF2-40B4-BE49-F238E27FC236}">
+                  <a16:creationId xmlns:a16="http://schemas.microsoft.com/office/drawing/2014/main" id="{9ECB9E2D-72D4-55AE-5F4F-7E45B3801413}"/>
+                </a:ext>
+              </a:extLst>
+            </p:cNvPr>
+            <p:cNvPicPr>
+              <a:picLocks noChangeAspect="1"/>
+            </p:cNvPicPr>
+            <p:nvPr/>
+          </p:nvPicPr>
+          <p:blipFill>
+            <a:blip>
+              <a:extLst>
+                <a:ext uri="{96DAC541-7B7A-43D3-8B79-37D633B846F1}">
+                  <asvg:svgBlip xmlns:asvg="http://schemas.microsoft.com/office/drawing/2016/SVG/main" r:embed="rId2"/>
+                </a:ext>
+              </a:extLst>
+            </a:blip>
+            <a:srcRect/>
+            <a:stretch/>
+          </p:blipFill>
+          <p:spPr>
+            <a:xfrm>
+              <a:off x="4085860" y="3110637"/>
+              <a:ext cx="634696" cy="634696"/>
+            </a:xfrm>
+            <a:prstGeom prst="rect">
+              <a:avLst/>
+            </a:prstGeom>
+          </p:spPr>
+        </p:pic>
+        <p:pic>
+          <p:nvPicPr>
+            <p:cNvPr id="24" name="Graphic 23" descr="Sleep with solid fill">
+              <a:extLst>
+                <a:ext uri="{FF2B5EF4-FFF2-40B4-BE49-F238E27FC236}">
+                  <a16:creationId xmlns:a16="http://schemas.microsoft.com/office/drawing/2014/main" id="{48FD80EB-C0C5-DB2C-F87A-9D6E4DB3B26E}"/>
+                </a:ext>
+              </a:extLst>
+            </p:cNvPr>
+            <p:cNvPicPr>
+              <a:picLocks noChangeAspect="1"/>
+            </p:cNvPicPr>
+            <p:nvPr/>
+          </p:nvPicPr>
+          <p:blipFill>
+            <a:blip>
+              <a:extLst>
+                <a:ext uri="{96DAC541-7B7A-43D3-8B79-37D633B846F1}">
+                  <asvg:svgBlip xmlns:asvg="http://schemas.microsoft.com/office/drawing/2016/SVG/main" r:embed="rId2"/>
+                </a:ext>
+              </a:extLst>
+            </a:blip>
+            <a:srcRect/>
+            <a:stretch/>
+          </p:blipFill>
+          <p:spPr>
+            <a:xfrm>
+              <a:off x="5205261" y="3110637"/>
+              <a:ext cx="634696" cy="634696"/>
+            </a:xfrm>
+            <a:prstGeom prst="rect">
+              <a:avLst/>
+            </a:prstGeom>
+          </p:spPr>
+        </p:pic>
+        <p:pic>
+          <p:nvPicPr>
+            <p:cNvPr id="25" name="Graphic 24" descr="Sleep with solid fill">
+              <a:extLst>
+                <a:ext uri="{FF2B5EF4-FFF2-40B4-BE49-F238E27FC236}">
+                  <a16:creationId xmlns:a16="http://schemas.microsoft.com/office/drawing/2014/main" id="{97BB6E79-BD4A-7730-BC95-A4BB6DFFB731}"/>
+                </a:ext>
+              </a:extLst>
+            </p:cNvPr>
+            <p:cNvPicPr>
+              <a:picLocks noChangeAspect="1"/>
+            </p:cNvPicPr>
+            <p:nvPr/>
+          </p:nvPicPr>
+          <p:blipFill>
+            <a:blip>
+              <a:extLst>
+                <a:ext uri="{96DAC541-7B7A-43D3-8B79-37D633B846F1}">
+                  <asvg:svgBlip xmlns:asvg="http://schemas.microsoft.com/office/drawing/2016/SVG/main" r:embed="rId2"/>
+                </a:ext>
+              </a:extLst>
+            </a:blip>
+            <a:srcRect/>
+            <a:stretch/>
+          </p:blipFill>
+          <p:spPr>
+            <a:xfrm>
+              <a:off x="6271093" y="3110637"/>
+              <a:ext cx="634696" cy="634696"/>
+            </a:xfrm>
+            <a:prstGeom prst="rect">
+              <a:avLst/>
+            </a:prstGeom>
+          </p:spPr>
+        </p:pic>
+        <p:pic>
+          <p:nvPicPr>
+            <p:cNvPr id="26" name="Graphic 25" descr="Sleep with solid fill">
+              <a:extLst>
+                <a:ext uri="{FF2B5EF4-FFF2-40B4-BE49-F238E27FC236}">
+                  <a16:creationId xmlns:a16="http://schemas.microsoft.com/office/drawing/2014/main" id="{FD25F568-1735-3EF6-4430-48123C1A4A9B}"/>
+                </a:ext>
+              </a:extLst>
+            </p:cNvPr>
+            <p:cNvPicPr>
+              <a:picLocks noChangeAspect="1"/>
+            </p:cNvPicPr>
+            <p:nvPr/>
+          </p:nvPicPr>
+          <p:blipFill>
+            <a:blip>
+              <a:extLst>
+                <a:ext uri="{96DAC541-7B7A-43D3-8B79-37D633B846F1}">
+                  <asvg:svgBlip xmlns:asvg="http://schemas.microsoft.com/office/drawing/2016/SVG/main" r:embed="rId2"/>
+                </a:ext>
+              </a:extLst>
+            </a:blip>
+            <a:srcRect/>
+            <a:stretch/>
+          </p:blipFill>
+          <p:spPr>
+            <a:xfrm>
+              <a:off x="7380426" y="3110637"/>
+              <a:ext cx="634696" cy="634696"/>
+            </a:xfrm>
+            <a:prstGeom prst="rect">
+              <a:avLst/>
+            </a:prstGeom>
+          </p:spPr>
+        </p:pic>
+        <p:sp>
+          <p:nvSpPr>
+            <p:cNvPr id="28" name="Rounded Rectangle 27">
+              <a:extLst>
+                <a:ext uri="{FF2B5EF4-FFF2-40B4-BE49-F238E27FC236}">
+                  <a16:creationId xmlns:a16="http://schemas.microsoft.com/office/drawing/2014/main" id="{D97E9FD0-A211-BFD7-2314-1669318E0D8F}"/>
+                </a:ext>
+              </a:extLst>
+            </p:cNvPr>
+            <p:cNvSpPr/>
+            <p:nvPr/>
+          </p:nvSpPr>
+          <p:spPr>
+            <a:xfrm>
+              <a:off x="564471" y="4402744"/>
+              <a:ext cx="8726283" cy="1216301"/>
+            </a:xfrm>
+            <a:prstGeom prst="roundRect">
+              <a:avLst>
+                <a:gd name="adj" fmla="val 36591"/>
+              </a:avLst>
+            </a:prstGeom>
+            <a:solidFill>
+              <a:srgbClr val="00B0F0">
+                <a:alpha val="25714"/>
+              </a:srgbClr>
+            </a:solidFill>
+            <a:ln w="34925">
+              <a:solidFill>
+                <a:srgbClr val="0070C0"/>
+              </a:solidFill>
+            </a:ln>
+          </p:spPr>
+          <p:style>
+            <a:lnRef idx="2">
+              <a:schemeClr val="accent1">
+                <a:shade val="15000"/>
+              </a:schemeClr>
+            </a:lnRef>
+            <a:fillRef idx="1">
+              <a:schemeClr val="accent1"/>
+            </a:fillRef>
+            <a:effectRef idx="0">
+              <a:schemeClr val="accent1"/>
+            </a:effectRef>
+            <a:fontRef idx="minor">
+              <a:schemeClr val="lt1"/>
+            </a:fontRef>
+          </p:style>
+          <p:txBody>
+            <a:bodyPr rtlCol="0" anchor="ctr"/>
+            <a:lstStyle/>
+            <a:p>
+              <a:pPr algn="ctr"/>
+              <a:endParaRPr lang="en-US"/>
+            </a:p>
+          </p:txBody>
+        </p:sp>
+        <p:sp>
+          <p:nvSpPr>
+            <p:cNvPr id="30" name="Rounded Rectangle 29">
+              <a:extLst>
+                <a:ext uri="{FF2B5EF4-FFF2-40B4-BE49-F238E27FC236}">
+                  <a16:creationId xmlns:a16="http://schemas.microsoft.com/office/drawing/2014/main" id="{DDBF5498-7622-0B52-C09B-A7B18F0B0E97}"/>
+                </a:ext>
+              </a:extLst>
+            </p:cNvPr>
+            <p:cNvSpPr/>
+            <p:nvPr/>
+          </p:nvSpPr>
+          <p:spPr>
+            <a:xfrm>
+              <a:off x="558779" y="2753115"/>
+              <a:ext cx="8726283" cy="1216301"/>
+            </a:xfrm>
+            <a:prstGeom prst="roundRect">
+              <a:avLst>
+                <a:gd name="adj" fmla="val 36591"/>
+              </a:avLst>
+            </a:prstGeom>
+            <a:solidFill>
+              <a:srgbClr val="00B0F0">
+                <a:alpha val="25714"/>
+              </a:srgbClr>
+            </a:solidFill>
+            <a:ln w="34925">
+              <a:solidFill>
+                <a:srgbClr val="0070C0"/>
+              </a:solidFill>
+            </a:ln>
+          </p:spPr>
+          <p:style>
+            <a:lnRef idx="2">
+              <a:schemeClr val="accent1">
+                <a:shade val="15000"/>
+              </a:schemeClr>
+            </a:lnRef>
+            <a:fillRef idx="1">
+              <a:schemeClr val="accent1"/>
+            </a:fillRef>
+            <a:effectRef idx="0">
+              <a:schemeClr val="accent1"/>
+            </a:effectRef>
+            <a:fontRef idx="minor">
+              <a:schemeClr val="lt1"/>
+            </a:fontRef>
+          </p:style>
+          <p:txBody>
+            <a:bodyPr rtlCol="0" anchor="ctr"/>
+            <a:lstStyle/>
+            <a:p>
+              <a:pPr algn="ctr"/>
+              <a:endParaRPr lang="en-US"/>
+            </a:p>
+          </p:txBody>
+        </p:sp>
+        <p:sp>
+          <p:nvSpPr>
+            <p:cNvPr id="31" name="Rounded Rectangle 30">
+              <a:extLst>
+                <a:ext uri="{FF2B5EF4-FFF2-40B4-BE49-F238E27FC236}">
+                  <a16:creationId xmlns:a16="http://schemas.microsoft.com/office/drawing/2014/main" id="{4B9CA358-814F-58D1-7E42-AD798600EE94}"/>
+                </a:ext>
+              </a:extLst>
+            </p:cNvPr>
+            <p:cNvSpPr/>
+            <p:nvPr/>
+          </p:nvSpPr>
+          <p:spPr>
+            <a:xfrm>
+              <a:off x="9938704" y="4402744"/>
+              <a:ext cx="1306761" cy="1216301"/>
+            </a:xfrm>
+            <a:prstGeom prst="roundRect">
+              <a:avLst>
+                <a:gd name="adj" fmla="val 36591"/>
+              </a:avLst>
+            </a:prstGeom>
+            <a:solidFill>
+              <a:srgbClr val="00B0F0">
+                <a:alpha val="25714"/>
+              </a:srgbClr>
+            </a:solidFill>
+            <a:ln w="34925">
+              <a:solidFill>
+                <a:srgbClr val="0070C0"/>
+              </a:solidFill>
+            </a:ln>
+          </p:spPr>
+          <p:style>
+            <a:lnRef idx="2">
+              <a:schemeClr val="accent1">
+                <a:shade val="15000"/>
+              </a:schemeClr>
+            </a:lnRef>
+            <a:fillRef idx="1">
+              <a:schemeClr val="accent1"/>
+            </a:fillRef>
+            <a:effectRef idx="0">
+              <a:schemeClr val="accent1"/>
+            </a:effectRef>
+            <a:fontRef idx="minor">
+              <a:schemeClr val="lt1"/>
+            </a:fontRef>
+          </p:style>
+          <p:txBody>
+            <a:bodyPr rtlCol="0" anchor="ctr"/>
+            <a:lstStyle/>
+            <a:p>
+              <a:pPr algn="ctr"/>
+              <a:endParaRPr lang="en-US"/>
+            </a:p>
+          </p:txBody>
+        </p:sp>
+        <p:sp>
+          <p:nvSpPr>
+            <p:cNvPr id="34" name="Rounded Rectangle 33">
+              <a:extLst>
+                <a:ext uri="{FF2B5EF4-FFF2-40B4-BE49-F238E27FC236}">
+                  <a16:creationId xmlns:a16="http://schemas.microsoft.com/office/drawing/2014/main" id="{93E3561D-16D4-564F-18D0-D5EDB4746635}"/>
+                </a:ext>
+              </a:extLst>
+            </p:cNvPr>
+            <p:cNvSpPr/>
+            <p:nvPr/>
+          </p:nvSpPr>
+          <p:spPr>
+            <a:xfrm>
+              <a:off x="9938704" y="2753115"/>
+              <a:ext cx="1306761" cy="1216301"/>
+            </a:xfrm>
+            <a:prstGeom prst="roundRect">
+              <a:avLst>
+                <a:gd name="adj" fmla="val 36591"/>
+              </a:avLst>
+            </a:prstGeom>
+            <a:solidFill>
+              <a:srgbClr val="00B0F0">
+                <a:alpha val="25714"/>
+              </a:srgbClr>
+            </a:solidFill>
+            <a:ln w="34925">
+              <a:solidFill>
+                <a:srgbClr val="0070C0"/>
+              </a:solidFill>
+            </a:ln>
+          </p:spPr>
+          <p:style>
+            <a:lnRef idx="2">
+              <a:schemeClr val="accent1">
+                <a:shade val="15000"/>
+              </a:schemeClr>
+            </a:lnRef>
+            <a:fillRef idx="1">
+              <a:schemeClr val="accent1"/>
+            </a:fillRef>
+            <a:effectRef idx="0">
+              <a:schemeClr val="accent1"/>
+            </a:effectRef>
+            <a:fontRef idx="minor">
+              <a:schemeClr val="lt1"/>
+            </a:fontRef>
+          </p:style>
+          <p:txBody>
+            <a:bodyPr rtlCol="0" anchor="ctr"/>
+            <a:lstStyle/>
+            <a:p>
+              <a:pPr algn="ctr"/>
+              <a:endParaRPr lang="en-US"/>
+            </a:p>
+          </p:txBody>
+        </p:sp>
+        <p:sp>
+          <p:nvSpPr>
+            <p:cNvPr id="35" name="TextBox 34">
+              <a:extLst>
+                <a:ext uri="{FF2B5EF4-FFF2-40B4-BE49-F238E27FC236}">
+                  <a16:creationId xmlns:a16="http://schemas.microsoft.com/office/drawing/2014/main" id="{1CB97A56-83A2-EC11-D639-26D4B9DFDE65}"/>
+                </a:ext>
+              </a:extLst>
+            </p:cNvPr>
+            <p:cNvSpPr txBox="1"/>
+            <p:nvPr/>
+          </p:nvSpPr>
+          <p:spPr>
+            <a:xfrm>
+              <a:off x="913311" y="4599875"/>
+              <a:ext cx="570990" cy="369332"/>
+            </a:xfrm>
+            <a:prstGeom prst="rect">
+              <a:avLst/>
+            </a:prstGeom>
+            <a:noFill/>
+          </p:spPr>
+          <p:txBody>
+            <a:bodyPr wrap="none" rtlCol="0">
+              <a:spAutoFit/>
+            </a:bodyPr>
+            <a:lstStyle/>
+            <a:p>
+              <a:r>
+                <a:rPr lang="en-US" dirty="0"/>
+                <a:t>B00</a:t>
+              </a:r>
+            </a:p>
+          </p:txBody>
+        </p:sp>
+        <p:sp>
+          <p:nvSpPr>
+            <p:cNvPr id="37" name="TextBox 36">
+              <a:extLst>
+                <a:ext uri="{FF2B5EF4-FFF2-40B4-BE49-F238E27FC236}">
+                  <a16:creationId xmlns:a16="http://schemas.microsoft.com/office/drawing/2014/main" id="{7A38CE45-993F-0666-9B30-EC59E058C509}"/>
+                </a:ext>
+              </a:extLst>
+            </p:cNvPr>
+            <p:cNvSpPr txBox="1"/>
+            <p:nvPr/>
+          </p:nvSpPr>
+          <p:spPr>
+            <a:xfrm>
+              <a:off x="1975116" y="4599875"/>
+              <a:ext cx="570990" cy="369332"/>
+            </a:xfrm>
+            <a:prstGeom prst="rect">
+              <a:avLst/>
+            </a:prstGeom>
+            <a:noFill/>
+          </p:spPr>
+          <p:txBody>
+            <a:bodyPr wrap="none" rtlCol="0">
+              <a:spAutoFit/>
+            </a:bodyPr>
+            <a:lstStyle/>
+            <a:p>
+              <a:r>
+                <a:rPr lang="en-US" dirty="0"/>
+                <a:t>B01</a:t>
+              </a:r>
+            </a:p>
+          </p:txBody>
+        </p:sp>
+        <p:sp>
+          <p:nvSpPr>
+            <p:cNvPr id="40" name="TextBox 39">
+              <a:extLst>
+                <a:ext uri="{FF2B5EF4-FFF2-40B4-BE49-F238E27FC236}">
+                  <a16:creationId xmlns:a16="http://schemas.microsoft.com/office/drawing/2014/main" id="{1F583F94-1F16-417E-AD50-BF1B30BA543C}"/>
+                </a:ext>
+              </a:extLst>
+            </p:cNvPr>
+            <p:cNvSpPr txBox="1"/>
+            <p:nvPr/>
+          </p:nvSpPr>
+          <p:spPr>
+            <a:xfrm>
+              <a:off x="3041776" y="4599875"/>
+              <a:ext cx="570990" cy="369332"/>
+            </a:xfrm>
+            <a:prstGeom prst="rect">
+              <a:avLst/>
+            </a:prstGeom>
+            <a:noFill/>
+          </p:spPr>
+          <p:txBody>
+            <a:bodyPr wrap="none" rtlCol="0">
+              <a:spAutoFit/>
+            </a:bodyPr>
+            <a:lstStyle/>
+            <a:p>
+              <a:r>
+                <a:rPr lang="en-US" dirty="0"/>
+                <a:t>B02</a:t>
+              </a:r>
+            </a:p>
+          </p:txBody>
+        </p:sp>
+        <p:sp>
+          <p:nvSpPr>
+            <p:cNvPr id="41" name="TextBox 40">
+              <a:extLst>
+                <a:ext uri="{FF2B5EF4-FFF2-40B4-BE49-F238E27FC236}">
+                  <a16:creationId xmlns:a16="http://schemas.microsoft.com/office/drawing/2014/main" id="{BA97E823-BBCA-C846-9680-90A48977477F}"/>
+                </a:ext>
+              </a:extLst>
+            </p:cNvPr>
+            <p:cNvSpPr txBox="1"/>
+            <p:nvPr/>
+          </p:nvSpPr>
+          <p:spPr>
+            <a:xfrm>
+              <a:off x="4131336" y="4599875"/>
+              <a:ext cx="570990" cy="369332"/>
+            </a:xfrm>
+            <a:prstGeom prst="rect">
+              <a:avLst/>
+            </a:prstGeom>
+            <a:noFill/>
+          </p:spPr>
+          <p:txBody>
+            <a:bodyPr wrap="none" rtlCol="0">
+              <a:spAutoFit/>
+            </a:bodyPr>
+            <a:lstStyle/>
+            <a:p>
+              <a:r>
+                <a:rPr lang="en-US" dirty="0"/>
+                <a:t>B03</a:t>
+              </a:r>
+            </a:p>
+          </p:txBody>
+        </p:sp>
+        <p:sp>
+          <p:nvSpPr>
+            <p:cNvPr id="44" name="TextBox 43">
+              <a:extLst>
+                <a:ext uri="{FF2B5EF4-FFF2-40B4-BE49-F238E27FC236}">
+                  <a16:creationId xmlns:a16="http://schemas.microsoft.com/office/drawing/2014/main" id="{B02E8BB2-3E27-F757-590E-26CE56635707}"/>
+                </a:ext>
+              </a:extLst>
+            </p:cNvPr>
+            <p:cNvSpPr txBox="1"/>
+            <p:nvPr/>
+          </p:nvSpPr>
+          <p:spPr>
+            <a:xfrm>
+              <a:off x="5251130" y="4604464"/>
+              <a:ext cx="570990" cy="369332"/>
+            </a:xfrm>
+            <a:prstGeom prst="rect">
+              <a:avLst/>
+            </a:prstGeom>
+            <a:noFill/>
+          </p:spPr>
+          <p:txBody>
+            <a:bodyPr wrap="none" rtlCol="0">
+              <a:spAutoFit/>
+            </a:bodyPr>
+            <a:lstStyle/>
+            <a:p>
+              <a:r>
+                <a:rPr lang="en-US" dirty="0"/>
+                <a:t>B04</a:t>
+              </a:r>
+            </a:p>
+          </p:txBody>
+        </p:sp>
+        <p:sp>
+          <p:nvSpPr>
+            <p:cNvPr id="45" name="TextBox 44">
+              <a:extLst>
+                <a:ext uri="{FF2B5EF4-FFF2-40B4-BE49-F238E27FC236}">
+                  <a16:creationId xmlns:a16="http://schemas.microsoft.com/office/drawing/2014/main" id="{988C4A92-F68C-FA0E-8857-787E0963BEF3}"/>
+                </a:ext>
+              </a:extLst>
+            </p:cNvPr>
+            <p:cNvSpPr txBox="1"/>
+            <p:nvPr/>
+          </p:nvSpPr>
+          <p:spPr>
+            <a:xfrm>
+              <a:off x="6312935" y="4604464"/>
+              <a:ext cx="570990" cy="369332"/>
+            </a:xfrm>
+            <a:prstGeom prst="rect">
+              <a:avLst/>
+            </a:prstGeom>
+            <a:noFill/>
+          </p:spPr>
+          <p:txBody>
+            <a:bodyPr wrap="none" rtlCol="0">
+              <a:spAutoFit/>
+            </a:bodyPr>
+            <a:lstStyle/>
+            <a:p>
+              <a:r>
+                <a:rPr lang="en-US" dirty="0"/>
+                <a:t>B05</a:t>
+              </a:r>
+            </a:p>
+          </p:txBody>
+        </p:sp>
+        <p:sp>
+          <p:nvSpPr>
+            <p:cNvPr id="46" name="TextBox 45">
+              <a:extLst>
+                <a:ext uri="{FF2B5EF4-FFF2-40B4-BE49-F238E27FC236}">
+                  <a16:creationId xmlns:a16="http://schemas.microsoft.com/office/drawing/2014/main" id="{E05B3A3E-C637-D234-D40F-4B72E39EDD00}"/>
+                </a:ext>
+              </a:extLst>
+            </p:cNvPr>
+            <p:cNvSpPr txBox="1"/>
+            <p:nvPr/>
+          </p:nvSpPr>
+          <p:spPr>
+            <a:xfrm>
+              <a:off x="7379595" y="4604464"/>
+              <a:ext cx="570990" cy="369332"/>
+            </a:xfrm>
+            <a:prstGeom prst="rect">
+              <a:avLst/>
+            </a:prstGeom>
+            <a:noFill/>
+          </p:spPr>
+          <p:txBody>
+            <a:bodyPr wrap="none" rtlCol="0">
+              <a:spAutoFit/>
+            </a:bodyPr>
+            <a:lstStyle/>
+            <a:p>
+              <a:r>
+                <a:rPr lang="en-US" dirty="0"/>
+                <a:t>B06</a:t>
+              </a:r>
+            </a:p>
+          </p:txBody>
+        </p:sp>
+        <p:sp>
+          <p:nvSpPr>
+            <p:cNvPr id="47" name="TextBox 46">
+              <a:extLst>
+                <a:ext uri="{FF2B5EF4-FFF2-40B4-BE49-F238E27FC236}">
+                  <a16:creationId xmlns:a16="http://schemas.microsoft.com/office/drawing/2014/main" id="{57667056-453B-726E-C18F-B6650F8FA7B1}"/>
+                </a:ext>
+              </a:extLst>
+            </p:cNvPr>
+            <p:cNvSpPr txBox="1"/>
+            <p:nvPr/>
+          </p:nvSpPr>
+          <p:spPr>
+            <a:xfrm>
+              <a:off x="8469155" y="4604464"/>
+              <a:ext cx="570990" cy="369332"/>
+            </a:xfrm>
+            <a:prstGeom prst="rect">
+              <a:avLst/>
+            </a:prstGeom>
+            <a:noFill/>
+          </p:spPr>
+          <p:txBody>
+            <a:bodyPr wrap="none" rtlCol="0">
+              <a:spAutoFit/>
+            </a:bodyPr>
+            <a:lstStyle/>
+            <a:p>
+              <a:r>
+                <a:rPr lang="en-US" dirty="0"/>
+                <a:t>B07</a:t>
+              </a:r>
+            </a:p>
+          </p:txBody>
+        </p:sp>
+        <p:sp>
+          <p:nvSpPr>
+            <p:cNvPr id="53" name="TextBox 52">
+              <a:extLst>
+                <a:ext uri="{FF2B5EF4-FFF2-40B4-BE49-F238E27FC236}">
+                  <a16:creationId xmlns:a16="http://schemas.microsoft.com/office/drawing/2014/main" id="{8DCF07EC-A300-537A-4271-462B672878C2}"/>
+                </a:ext>
+              </a:extLst>
+            </p:cNvPr>
+            <p:cNvSpPr txBox="1"/>
+            <p:nvPr/>
+          </p:nvSpPr>
+          <p:spPr>
+            <a:xfrm>
+              <a:off x="913311" y="2946912"/>
+              <a:ext cx="570990" cy="369332"/>
+            </a:xfrm>
+            <a:prstGeom prst="rect">
+              <a:avLst/>
+            </a:prstGeom>
+            <a:noFill/>
+          </p:spPr>
+          <p:txBody>
+            <a:bodyPr wrap="none" rtlCol="0">
+              <a:spAutoFit/>
+            </a:bodyPr>
+            <a:lstStyle/>
+            <a:p>
+              <a:r>
+                <a:rPr lang="en-US" dirty="0"/>
+                <a:t>B08</a:t>
+              </a:r>
+            </a:p>
+          </p:txBody>
+        </p:sp>
+        <p:sp>
+          <p:nvSpPr>
+            <p:cNvPr id="54" name="TextBox 53">
+              <a:extLst>
+                <a:ext uri="{FF2B5EF4-FFF2-40B4-BE49-F238E27FC236}">
+                  <a16:creationId xmlns:a16="http://schemas.microsoft.com/office/drawing/2014/main" id="{170626CF-5153-9EC5-34AD-FCFECA9FBB9F}"/>
+                </a:ext>
+              </a:extLst>
+            </p:cNvPr>
+            <p:cNvSpPr txBox="1"/>
+            <p:nvPr/>
+          </p:nvSpPr>
+          <p:spPr>
+            <a:xfrm>
+              <a:off x="1975116" y="2946912"/>
+              <a:ext cx="570990" cy="369332"/>
+            </a:xfrm>
+            <a:prstGeom prst="rect">
+              <a:avLst/>
+            </a:prstGeom>
+            <a:noFill/>
+          </p:spPr>
+          <p:txBody>
+            <a:bodyPr wrap="none" rtlCol="0">
+              <a:spAutoFit/>
+            </a:bodyPr>
+            <a:lstStyle/>
+            <a:p>
+              <a:r>
+                <a:rPr lang="en-US" dirty="0"/>
+                <a:t>B09</a:t>
+              </a:r>
+            </a:p>
+          </p:txBody>
+        </p:sp>
+        <p:sp>
+          <p:nvSpPr>
+            <p:cNvPr id="62" name="TextBox 61">
+              <a:extLst>
+                <a:ext uri="{FF2B5EF4-FFF2-40B4-BE49-F238E27FC236}">
+                  <a16:creationId xmlns:a16="http://schemas.microsoft.com/office/drawing/2014/main" id="{FE31A0F2-9A31-8A9E-AA41-173C1FAF97B9}"/>
+                </a:ext>
+              </a:extLst>
+            </p:cNvPr>
+            <p:cNvSpPr txBox="1"/>
+            <p:nvPr/>
+          </p:nvSpPr>
+          <p:spPr>
+            <a:xfrm>
+              <a:off x="3041776" y="2946912"/>
+              <a:ext cx="570990" cy="369332"/>
+            </a:xfrm>
+            <a:prstGeom prst="rect">
+              <a:avLst/>
+            </a:prstGeom>
+            <a:noFill/>
+          </p:spPr>
+          <p:txBody>
+            <a:bodyPr wrap="none" rtlCol="0">
+              <a:spAutoFit/>
+            </a:bodyPr>
+            <a:lstStyle/>
+            <a:p>
+              <a:r>
+                <a:rPr lang="en-US" dirty="0"/>
+                <a:t>B10</a:t>
+              </a:r>
+            </a:p>
+          </p:txBody>
+        </p:sp>
+        <p:sp>
+          <p:nvSpPr>
+            <p:cNvPr id="67" name="TextBox 66">
+              <a:extLst>
+                <a:ext uri="{FF2B5EF4-FFF2-40B4-BE49-F238E27FC236}">
+                  <a16:creationId xmlns:a16="http://schemas.microsoft.com/office/drawing/2014/main" id="{9810DC67-E17D-6AFB-D8EA-DC350E2938DB}"/>
+                </a:ext>
+              </a:extLst>
+            </p:cNvPr>
+            <p:cNvSpPr txBox="1"/>
+            <p:nvPr/>
+          </p:nvSpPr>
+          <p:spPr>
+            <a:xfrm>
+              <a:off x="4131336" y="2946912"/>
+              <a:ext cx="570990" cy="369332"/>
+            </a:xfrm>
+            <a:prstGeom prst="rect">
+              <a:avLst/>
+            </a:prstGeom>
+            <a:noFill/>
+          </p:spPr>
+          <p:txBody>
+            <a:bodyPr wrap="none" rtlCol="0">
+              <a:spAutoFit/>
+            </a:bodyPr>
+            <a:lstStyle/>
+            <a:p>
+              <a:r>
+                <a:rPr lang="en-US" dirty="0"/>
+                <a:t>B11</a:t>
+              </a:r>
+            </a:p>
+          </p:txBody>
+        </p:sp>
+        <p:sp>
+          <p:nvSpPr>
+            <p:cNvPr id="68" name="TextBox 67">
+              <a:extLst>
+                <a:ext uri="{FF2B5EF4-FFF2-40B4-BE49-F238E27FC236}">
+                  <a16:creationId xmlns:a16="http://schemas.microsoft.com/office/drawing/2014/main" id="{EA89A18C-65FA-B3F6-13BE-322B2E620900}"/>
+                </a:ext>
+              </a:extLst>
+            </p:cNvPr>
+            <p:cNvSpPr txBox="1"/>
+            <p:nvPr/>
+          </p:nvSpPr>
+          <p:spPr>
+            <a:xfrm>
+              <a:off x="5251130" y="2951501"/>
+              <a:ext cx="570990" cy="369332"/>
+            </a:xfrm>
+            <a:prstGeom prst="rect">
+              <a:avLst/>
+            </a:prstGeom>
+            <a:noFill/>
+          </p:spPr>
+          <p:txBody>
+            <a:bodyPr wrap="none" rtlCol="0">
+              <a:spAutoFit/>
+            </a:bodyPr>
+            <a:lstStyle/>
+            <a:p>
+              <a:r>
+                <a:rPr lang="en-US" dirty="0"/>
+                <a:t>B12</a:t>
+              </a:r>
+            </a:p>
+          </p:txBody>
+        </p:sp>
+        <p:sp>
+          <p:nvSpPr>
+            <p:cNvPr id="69" name="TextBox 68">
+              <a:extLst>
+                <a:ext uri="{FF2B5EF4-FFF2-40B4-BE49-F238E27FC236}">
+                  <a16:creationId xmlns:a16="http://schemas.microsoft.com/office/drawing/2014/main" id="{095B0CEB-2F22-17C6-A3FD-75D754A3844D}"/>
+                </a:ext>
+              </a:extLst>
+            </p:cNvPr>
+            <p:cNvSpPr txBox="1"/>
+            <p:nvPr/>
+          </p:nvSpPr>
+          <p:spPr>
+            <a:xfrm>
+              <a:off x="6312935" y="2951501"/>
+              <a:ext cx="570990" cy="369332"/>
+            </a:xfrm>
+            <a:prstGeom prst="rect">
+              <a:avLst/>
+            </a:prstGeom>
+            <a:noFill/>
+          </p:spPr>
+          <p:txBody>
+            <a:bodyPr wrap="none" rtlCol="0">
+              <a:spAutoFit/>
+            </a:bodyPr>
+            <a:lstStyle/>
+            <a:p>
+              <a:r>
+                <a:rPr lang="en-US" dirty="0"/>
+                <a:t>B13</a:t>
+              </a:r>
+            </a:p>
+          </p:txBody>
+        </p:sp>
+        <p:sp>
+          <p:nvSpPr>
+            <p:cNvPr id="70" name="TextBox 69">
+              <a:extLst>
+                <a:ext uri="{FF2B5EF4-FFF2-40B4-BE49-F238E27FC236}">
+                  <a16:creationId xmlns:a16="http://schemas.microsoft.com/office/drawing/2014/main" id="{458E2391-5C0C-0A27-8C52-19672F743DA3}"/>
+                </a:ext>
+              </a:extLst>
+            </p:cNvPr>
+            <p:cNvSpPr txBox="1"/>
+            <p:nvPr/>
+          </p:nvSpPr>
+          <p:spPr>
+            <a:xfrm>
+              <a:off x="7379595" y="2951501"/>
+              <a:ext cx="570990" cy="369332"/>
+            </a:xfrm>
+            <a:prstGeom prst="rect">
+              <a:avLst/>
+            </a:prstGeom>
+            <a:noFill/>
+          </p:spPr>
+          <p:txBody>
+            <a:bodyPr wrap="none" rtlCol="0">
+              <a:spAutoFit/>
+            </a:bodyPr>
+            <a:lstStyle/>
+            <a:p>
+              <a:r>
+                <a:rPr lang="en-US" dirty="0"/>
+                <a:t>B14</a:t>
+              </a:r>
+            </a:p>
+          </p:txBody>
+        </p:sp>
+        <p:sp>
+          <p:nvSpPr>
+            <p:cNvPr id="72" name="TextBox 71">
+              <a:extLst>
+                <a:ext uri="{FF2B5EF4-FFF2-40B4-BE49-F238E27FC236}">
+                  <a16:creationId xmlns:a16="http://schemas.microsoft.com/office/drawing/2014/main" id="{190543A8-D584-166D-F840-A462C296FDDE}"/>
+                </a:ext>
+              </a:extLst>
+            </p:cNvPr>
+            <p:cNvSpPr txBox="1"/>
+            <p:nvPr/>
+          </p:nvSpPr>
+          <p:spPr>
+            <a:xfrm>
+              <a:off x="10313631" y="4638739"/>
+              <a:ext cx="570990" cy="369332"/>
+            </a:xfrm>
+            <a:prstGeom prst="rect">
+              <a:avLst/>
+            </a:prstGeom>
+            <a:noFill/>
+          </p:spPr>
+          <p:txBody>
+            <a:bodyPr wrap="none" rtlCol="0">
+              <a:spAutoFit/>
+            </a:bodyPr>
+            <a:lstStyle/>
+            <a:p>
+              <a:r>
+                <a:rPr lang="en-US" dirty="0"/>
+                <a:t>B15</a:t>
+              </a:r>
+            </a:p>
+          </p:txBody>
+        </p:sp>
+        <p:sp>
+          <p:nvSpPr>
+            <p:cNvPr id="73" name="TextBox 72">
+              <a:extLst>
+                <a:ext uri="{FF2B5EF4-FFF2-40B4-BE49-F238E27FC236}">
+                  <a16:creationId xmlns:a16="http://schemas.microsoft.com/office/drawing/2014/main" id="{4117B066-4B53-3043-4545-BE07FC9BAA81}"/>
+                </a:ext>
+              </a:extLst>
+            </p:cNvPr>
+            <p:cNvSpPr txBox="1"/>
+            <p:nvPr/>
+          </p:nvSpPr>
+          <p:spPr>
+            <a:xfrm>
+              <a:off x="10338443" y="2989111"/>
+              <a:ext cx="570990" cy="369332"/>
+            </a:xfrm>
+            <a:prstGeom prst="rect">
+              <a:avLst/>
+            </a:prstGeom>
+            <a:noFill/>
+          </p:spPr>
+          <p:txBody>
+            <a:bodyPr wrap="none" rtlCol="0">
+              <a:spAutoFit/>
+            </a:bodyPr>
+            <a:lstStyle/>
+            <a:p>
+              <a:r>
+                <a:rPr lang="en-US" dirty="0"/>
+                <a:t>B16</a:t>
+              </a:r>
+            </a:p>
+          </p:txBody>
+        </p:sp>
+      </p:grpSp>
+    </p:spTree>
+    <p:extLst>
+      <p:ext uri="{BB962C8B-B14F-4D97-AF65-F5344CB8AC3E}">
+        <p14:creationId xmlns:p14="http://schemas.microsoft.com/office/powerpoint/2010/main" val="2838932176"/>
+      </p:ext>
+    </p:extLst>
+  </p:cSld>
+  <p:clrMapOvr>
+    <a:masterClrMapping/>
+  </p:clrMapOvr>
+</p:sld>
+</file>
+
+<file path=ppt/slides/slide6.xml><?xml version="1.0" encoding="utf-8"?>
+<p:sld xmlns:a="http://schemas.openxmlformats.org/drawingml/2006/main" xmlns:r="http://schemas.openxmlformats.org/officeDocument/2006/relationships" xmlns:p="http://schemas.openxmlformats.org/presentationml/2006/main">
+  <p:cSld>
+    <p:spTree>
+      <p:nvGrpSpPr>
+        <p:cNvPr id="1" name="">
+          <a:extLst>
+            <a:ext uri="{FF2B5EF4-FFF2-40B4-BE49-F238E27FC236}">
+              <a16:creationId xmlns:a16="http://schemas.microsoft.com/office/drawing/2014/main" id="{AC84A1C7-4F7C-2C5D-8DC4-B7A4B38602C1}"/>
+            </a:ext>
+          </a:extLst>
+        </p:cNvPr>
+        <p:cNvGrpSpPr/>
+        <p:nvPr/>
+      </p:nvGrpSpPr>
+      <p:grpSpPr>
+        <a:xfrm>
+          <a:off x="0" y="0"/>
+          <a:ext cx="0" cy="0"/>
+          <a:chOff x="0" y="0"/>
+          <a:chExt cx="0" cy="0"/>
+        </a:xfrm>
+      </p:grpSpPr>
+      <p:grpSp>
+        <p:nvGrpSpPr>
+          <p:cNvPr id="238" name="Group 237">
+            <a:extLst>
+              <a:ext uri="{FF2B5EF4-FFF2-40B4-BE49-F238E27FC236}">
+                <a16:creationId xmlns:a16="http://schemas.microsoft.com/office/drawing/2014/main" id="{B52557F3-EB90-2A9C-43C7-ABD8A4B9D17D}"/>
+              </a:ext>
+            </a:extLst>
+          </p:cNvPr>
+          <p:cNvGrpSpPr/>
+          <p:nvPr/>
+        </p:nvGrpSpPr>
+        <p:grpSpPr>
+          <a:xfrm>
+            <a:off x="410218" y="1098449"/>
+            <a:ext cx="11371564" cy="4907241"/>
+            <a:chOff x="410218" y="1098449"/>
+            <a:chExt cx="11371564" cy="4907241"/>
+          </a:xfrm>
+        </p:grpSpPr>
+        <p:sp>
+          <p:nvSpPr>
+            <p:cNvPr id="192" name="Rounded Rectangle 191">
+              <a:extLst>
+                <a:ext uri="{FF2B5EF4-FFF2-40B4-BE49-F238E27FC236}">
+                  <a16:creationId xmlns:a16="http://schemas.microsoft.com/office/drawing/2014/main" id="{D69704E3-7382-A18A-A58C-1AA2FB801E7F}"/>
+                </a:ext>
+              </a:extLst>
+            </p:cNvPr>
+            <p:cNvSpPr/>
+            <p:nvPr/>
+          </p:nvSpPr>
+          <p:spPr>
+            <a:xfrm>
+              <a:off x="410218" y="1098449"/>
+              <a:ext cx="11371564" cy="4907241"/>
+            </a:xfrm>
+            <a:prstGeom prst="roundRect">
+              <a:avLst>
+                <a:gd name="adj" fmla="val 2957"/>
+              </a:avLst>
+            </a:prstGeom>
+            <a:solidFill>
+              <a:schemeClr val="bg2"/>
+            </a:solidFill>
+            <a:ln w="38100"/>
+          </p:spPr>
+          <p:style>
+            <a:lnRef idx="2">
+              <a:schemeClr val="accent1">
+                <a:shade val="15000"/>
+              </a:schemeClr>
+            </a:lnRef>
+            <a:fillRef idx="1">
+              <a:schemeClr val="accent1"/>
+            </a:fillRef>
+            <a:effectRef idx="0">
+              <a:schemeClr val="accent1"/>
+            </a:effectRef>
+            <a:fontRef idx="minor">
+              <a:schemeClr val="lt1"/>
+            </a:fontRef>
+          </p:style>
+          <p:txBody>
+            <a:bodyPr rtlCol="0" anchor="ctr"/>
+            <a:lstStyle/>
+            <a:p>
+              <a:pPr algn="ctr"/>
+              <a:r>
+                <a:rPr lang="en-US" dirty="0"/>
+                <a:t>`</a:t>
+              </a:r>
+            </a:p>
+          </p:txBody>
+        </p:sp>
+        <p:sp>
+          <p:nvSpPr>
+            <p:cNvPr id="113" name="Rounded Rectangle 112">
+              <a:extLst>
+                <a:ext uri="{FF2B5EF4-FFF2-40B4-BE49-F238E27FC236}">
+                  <a16:creationId xmlns:a16="http://schemas.microsoft.com/office/drawing/2014/main" id="{7B5B6397-8708-0559-006E-3DC3A6524370}"/>
+                </a:ext>
+              </a:extLst>
+            </p:cNvPr>
+            <p:cNvSpPr/>
+            <p:nvPr/>
+          </p:nvSpPr>
+          <p:spPr>
+            <a:xfrm>
+              <a:off x="634029" y="1367293"/>
+              <a:ext cx="8964403" cy="2097152"/>
+            </a:xfrm>
+            <a:prstGeom prst="roundRect">
+              <a:avLst>
+                <a:gd name="adj" fmla="val 21519"/>
+              </a:avLst>
+            </a:prstGeom>
+            <a:solidFill>
+              <a:srgbClr val="00B0F0">
+                <a:alpha val="25714"/>
+              </a:srgbClr>
+            </a:solidFill>
+            <a:ln w="34925">
+              <a:solidFill>
+                <a:srgbClr val="0070C0"/>
+              </a:solidFill>
+            </a:ln>
+          </p:spPr>
+          <p:style>
+            <a:lnRef idx="2">
+              <a:schemeClr val="accent1">
+                <a:shade val="15000"/>
+              </a:schemeClr>
+            </a:lnRef>
+            <a:fillRef idx="1">
+              <a:schemeClr val="accent1"/>
+            </a:fillRef>
+            <a:effectRef idx="0">
+              <a:schemeClr val="accent1"/>
+            </a:effectRef>
+            <a:fontRef idx="minor">
+              <a:schemeClr val="lt1"/>
+            </a:fontRef>
+          </p:style>
+          <p:txBody>
+            <a:bodyPr rtlCol="0" anchor="ctr"/>
+            <a:lstStyle/>
+            <a:p>
+              <a:pPr algn="ctr"/>
+              <a:endParaRPr lang="en-US"/>
+            </a:p>
+          </p:txBody>
+        </p:sp>
+        <p:sp>
+          <p:nvSpPr>
+            <p:cNvPr id="42" name="Rounded Rectangle 41">
+              <a:extLst>
+                <a:ext uri="{FF2B5EF4-FFF2-40B4-BE49-F238E27FC236}">
+                  <a16:creationId xmlns:a16="http://schemas.microsoft.com/office/drawing/2014/main" id="{5C48F21C-2256-17A9-7C1D-9BBE6BE686C2}"/>
+                </a:ext>
+              </a:extLst>
+            </p:cNvPr>
+            <p:cNvSpPr/>
+            <p:nvPr/>
+          </p:nvSpPr>
+          <p:spPr>
+            <a:xfrm>
+              <a:off x="634029" y="3635462"/>
+              <a:ext cx="8964403" cy="2097152"/>
+            </a:xfrm>
+            <a:prstGeom prst="roundRect">
+              <a:avLst>
+                <a:gd name="adj" fmla="val 21519"/>
+              </a:avLst>
+            </a:prstGeom>
+            <a:solidFill>
+              <a:srgbClr val="00B0F0">
+                <a:alpha val="25714"/>
+              </a:srgbClr>
+            </a:solidFill>
+            <a:ln w="34925">
+              <a:solidFill>
+                <a:srgbClr val="0070C0"/>
+              </a:solidFill>
+            </a:ln>
+          </p:spPr>
+          <p:style>
+            <a:lnRef idx="2">
+              <a:schemeClr val="accent1">
+                <a:shade val="15000"/>
+              </a:schemeClr>
+            </a:lnRef>
+            <a:fillRef idx="1">
+              <a:schemeClr val="accent1"/>
+            </a:fillRef>
+            <a:effectRef idx="0">
+              <a:schemeClr val="accent1"/>
+            </a:effectRef>
+            <a:fontRef idx="minor">
+              <a:schemeClr val="lt1"/>
+            </a:fontRef>
+          </p:style>
+          <p:txBody>
+            <a:bodyPr rtlCol="0" anchor="ctr"/>
+            <a:lstStyle/>
+            <a:p>
+              <a:pPr algn="ctr"/>
+              <a:endParaRPr lang="en-US"/>
+            </a:p>
+          </p:txBody>
+        </p:sp>
+        <p:pic>
+          <p:nvPicPr>
+            <p:cNvPr id="77" name="Graphic 76" descr="Sleep with solid fill">
+              <a:extLst>
+                <a:ext uri="{FF2B5EF4-FFF2-40B4-BE49-F238E27FC236}">
+                  <a16:creationId xmlns:a16="http://schemas.microsoft.com/office/drawing/2014/main" id="{5AD7DE78-8F48-CD9F-28DC-B821F0A02DCA}"/>
+                </a:ext>
+              </a:extLst>
+            </p:cNvPr>
+            <p:cNvPicPr>
+              <a:picLocks noChangeAspect="1"/>
+            </p:cNvPicPr>
+            <p:nvPr/>
+          </p:nvPicPr>
+          <p:blipFill>
+            <a:blip>
+              <a:extLst>
+                <a:ext uri="{96DAC541-7B7A-43D3-8B79-37D633B846F1}">
+                  <asvg:svgBlip xmlns:asvg="http://schemas.microsoft.com/office/drawing/2016/SVG/main" r:embed="rId3"/>
+                </a:ext>
+              </a:extLst>
+            </a:blip>
+            <a:srcRect/>
+            <a:stretch/>
+          </p:blipFill>
+          <p:spPr>
+            <a:xfrm>
+              <a:off x="947536" y="3977496"/>
+              <a:ext cx="634696" cy="634696"/>
+            </a:xfrm>
+            <a:prstGeom prst="rect">
+              <a:avLst/>
+            </a:prstGeom>
+          </p:spPr>
+        </p:pic>
+        <p:pic>
+          <p:nvPicPr>
+            <p:cNvPr id="78" name="Graphic 77" descr="Sleep with solid fill">
+              <a:extLst>
+                <a:ext uri="{FF2B5EF4-FFF2-40B4-BE49-F238E27FC236}">
+                  <a16:creationId xmlns:a16="http://schemas.microsoft.com/office/drawing/2014/main" id="{FB1B1101-1294-FA95-A1D5-B957D298BFA1}"/>
+                </a:ext>
+              </a:extLst>
+            </p:cNvPr>
+            <p:cNvPicPr>
+              <a:picLocks noChangeAspect="1"/>
+            </p:cNvPicPr>
+            <p:nvPr/>
+          </p:nvPicPr>
+          <p:blipFill>
+            <a:blip>
+              <a:extLst>
+                <a:ext uri="{96DAC541-7B7A-43D3-8B79-37D633B846F1}">
+                  <asvg:svgBlip xmlns:asvg="http://schemas.microsoft.com/office/drawing/2016/SVG/main" r:embed="rId3"/>
+                </a:ext>
+              </a:extLst>
+            </a:blip>
+            <a:srcRect/>
+            <a:stretch/>
+          </p:blipFill>
+          <p:spPr>
+            <a:xfrm>
+              <a:off x="2013368" y="3977496"/>
+              <a:ext cx="634696" cy="634696"/>
+            </a:xfrm>
+            <a:prstGeom prst="rect">
+              <a:avLst/>
+            </a:prstGeom>
+          </p:spPr>
+        </p:pic>
+        <p:pic>
+          <p:nvPicPr>
+            <p:cNvPr id="3" name="Graphic 2" descr="Sleep with solid fill">
+              <a:extLst>
+                <a:ext uri="{FF2B5EF4-FFF2-40B4-BE49-F238E27FC236}">
+                  <a16:creationId xmlns:a16="http://schemas.microsoft.com/office/drawing/2014/main" id="{97E4B0CA-F8DC-B0E4-527E-5F87FFB109F7}"/>
+                </a:ext>
+              </a:extLst>
+            </p:cNvPr>
+            <p:cNvPicPr>
+              <a:picLocks noChangeAspect="1"/>
+            </p:cNvPicPr>
+            <p:nvPr/>
+          </p:nvPicPr>
+          <p:blipFill>
+            <a:blip>
+              <a:extLst>
+                <a:ext uri="{96DAC541-7B7A-43D3-8B79-37D633B846F1}">
+                  <asvg:svgBlip xmlns:asvg="http://schemas.microsoft.com/office/drawing/2016/SVG/main" r:embed="rId3"/>
+                </a:ext>
+              </a:extLst>
+            </a:blip>
+            <a:srcRect/>
+            <a:stretch/>
+          </p:blipFill>
+          <p:spPr>
+            <a:xfrm>
+              <a:off x="3122701" y="3977496"/>
+              <a:ext cx="634696" cy="634696"/>
+            </a:xfrm>
+            <a:prstGeom prst="rect">
+              <a:avLst/>
+            </a:prstGeom>
+          </p:spPr>
+        </p:pic>
+        <p:pic>
+          <p:nvPicPr>
+            <p:cNvPr id="6" name="Graphic 5" descr="Sleep with solid fill">
+              <a:extLst>
+                <a:ext uri="{FF2B5EF4-FFF2-40B4-BE49-F238E27FC236}">
+                  <a16:creationId xmlns:a16="http://schemas.microsoft.com/office/drawing/2014/main" id="{4ABFF014-5E4C-94EA-A0DD-6475DB9AE0AD}"/>
+                </a:ext>
+              </a:extLst>
+            </p:cNvPr>
+            <p:cNvPicPr>
+              <a:picLocks noChangeAspect="1"/>
+            </p:cNvPicPr>
+            <p:nvPr/>
+          </p:nvPicPr>
+          <p:blipFill>
+            <a:blip>
+              <a:extLst>
+                <a:ext uri="{96DAC541-7B7A-43D3-8B79-37D633B846F1}">
+                  <asvg:svgBlip xmlns:asvg="http://schemas.microsoft.com/office/drawing/2016/SVG/main" r:embed="rId4"/>
+                </a:ext>
+              </a:extLst>
+            </a:blip>
+            <a:srcRect/>
+            <a:stretch/>
+          </p:blipFill>
+          <p:spPr>
+            <a:xfrm>
+              <a:off x="4188533" y="3977496"/>
+              <a:ext cx="634696" cy="634696"/>
+            </a:xfrm>
+            <a:prstGeom prst="rect">
+              <a:avLst/>
+            </a:prstGeom>
+          </p:spPr>
+        </p:pic>
+        <p:pic>
+          <p:nvPicPr>
+            <p:cNvPr id="7" name="Graphic 6" descr="Bed with solid fill">
+              <a:extLst>
+                <a:ext uri="{FF2B5EF4-FFF2-40B4-BE49-F238E27FC236}">
+                  <a16:creationId xmlns:a16="http://schemas.microsoft.com/office/drawing/2014/main" id="{1888C180-1E8E-7FD9-47D1-16C7818F5D86}"/>
+                </a:ext>
+              </a:extLst>
+            </p:cNvPr>
+            <p:cNvPicPr>
+              <a:picLocks noChangeAspect="1"/>
+            </p:cNvPicPr>
+            <p:nvPr/>
+          </p:nvPicPr>
+          <p:blipFill>
+            <a:blip>
+              <a:extLst>
+                <a:ext uri="{96DAC541-7B7A-43D3-8B79-37D633B846F1}">
+                  <asvg:svgBlip xmlns:asvg="http://schemas.microsoft.com/office/drawing/2016/SVG/main" r:embed="rId5"/>
+                </a:ext>
+              </a:extLst>
+            </a:blip>
+            <a:srcRect/>
+            <a:stretch/>
+          </p:blipFill>
+          <p:spPr>
+            <a:xfrm>
+              <a:off x="5307934" y="3977496"/>
+              <a:ext cx="634696" cy="634696"/>
+            </a:xfrm>
+            <a:prstGeom prst="rect">
+              <a:avLst/>
+            </a:prstGeom>
+          </p:spPr>
+        </p:pic>
+        <p:pic>
+          <p:nvPicPr>
+            <p:cNvPr id="8" name="Graphic 7" descr="Sleep with solid fill">
+              <a:extLst>
+                <a:ext uri="{FF2B5EF4-FFF2-40B4-BE49-F238E27FC236}">
+                  <a16:creationId xmlns:a16="http://schemas.microsoft.com/office/drawing/2014/main" id="{6FFE254E-6F38-520A-20C9-5317C918A1C2}"/>
+                </a:ext>
+              </a:extLst>
+            </p:cNvPr>
+            <p:cNvPicPr>
+              <a:picLocks noChangeAspect="1"/>
+            </p:cNvPicPr>
+            <p:nvPr/>
+          </p:nvPicPr>
+          <p:blipFill>
+            <a:blip>
+              <a:extLst>
+                <a:ext uri="{96DAC541-7B7A-43D3-8B79-37D633B846F1}">
+                  <asvg:svgBlip xmlns:asvg="http://schemas.microsoft.com/office/drawing/2016/SVG/main" r:embed="rId3"/>
+                </a:ext>
+              </a:extLst>
+            </a:blip>
+            <a:srcRect/>
+            <a:stretch/>
+          </p:blipFill>
+          <p:spPr>
+            <a:xfrm>
+              <a:off x="6373766" y="3977496"/>
+              <a:ext cx="634696" cy="634696"/>
+            </a:xfrm>
+            <a:prstGeom prst="rect">
+              <a:avLst/>
+            </a:prstGeom>
+          </p:spPr>
+        </p:pic>
+        <p:pic>
+          <p:nvPicPr>
+            <p:cNvPr id="17" name="Graphic 16" descr="Bed with solid fill">
+              <a:extLst>
+                <a:ext uri="{FF2B5EF4-FFF2-40B4-BE49-F238E27FC236}">
+                  <a16:creationId xmlns:a16="http://schemas.microsoft.com/office/drawing/2014/main" id="{FC1E1375-B860-2435-0EAA-B4EC04B41EED}"/>
+                </a:ext>
+              </a:extLst>
+            </p:cNvPr>
+            <p:cNvPicPr>
+              <a:picLocks noChangeAspect="1"/>
+            </p:cNvPicPr>
+            <p:nvPr/>
+          </p:nvPicPr>
+          <p:blipFill>
+            <a:blip>
+              <a:extLst>
+                <a:ext uri="{96DAC541-7B7A-43D3-8B79-37D633B846F1}">
+                  <asvg:svgBlip xmlns:asvg="http://schemas.microsoft.com/office/drawing/2016/SVG/main" r:embed="rId5"/>
+                </a:ext>
+              </a:extLst>
+            </a:blip>
+            <a:srcRect/>
+            <a:stretch/>
+          </p:blipFill>
+          <p:spPr>
+            <a:xfrm>
+              <a:off x="7483099" y="3977496"/>
+              <a:ext cx="634696" cy="634696"/>
+            </a:xfrm>
+            <a:prstGeom prst="rect">
+              <a:avLst/>
+            </a:prstGeom>
+          </p:spPr>
+        </p:pic>
+        <p:pic>
+          <p:nvPicPr>
+            <p:cNvPr id="18" name="Graphic 17" descr="Sleep with solid fill">
+              <a:extLst>
+                <a:ext uri="{FF2B5EF4-FFF2-40B4-BE49-F238E27FC236}">
+                  <a16:creationId xmlns:a16="http://schemas.microsoft.com/office/drawing/2014/main" id="{CA3A8C5C-9D13-5714-5C80-81D46B26B82D}"/>
+                </a:ext>
+              </a:extLst>
+            </p:cNvPr>
+            <p:cNvPicPr>
+              <a:picLocks noChangeAspect="1"/>
+            </p:cNvPicPr>
+            <p:nvPr/>
+          </p:nvPicPr>
+          <p:blipFill>
+            <a:blip>
+              <a:extLst>
+                <a:ext uri="{96DAC541-7B7A-43D3-8B79-37D633B846F1}">
+                  <asvg:svgBlip xmlns:asvg="http://schemas.microsoft.com/office/drawing/2016/SVG/main" r:embed="rId3"/>
+                </a:ext>
+              </a:extLst>
+            </a:blip>
+            <a:srcRect/>
+            <a:stretch/>
+          </p:blipFill>
+          <p:spPr>
+            <a:xfrm>
+              <a:off x="8548931" y="3977496"/>
+              <a:ext cx="634696" cy="634696"/>
+            </a:xfrm>
+            <a:prstGeom prst="rect">
+              <a:avLst/>
+            </a:prstGeom>
+          </p:spPr>
+        </p:pic>
+        <p:sp>
+          <p:nvSpPr>
+            <p:cNvPr id="35" name="TextBox 34">
+              <a:extLst>
+                <a:ext uri="{FF2B5EF4-FFF2-40B4-BE49-F238E27FC236}">
+                  <a16:creationId xmlns:a16="http://schemas.microsoft.com/office/drawing/2014/main" id="{E508D8D7-8B1B-64E8-065F-4590D9A047E5}"/>
+                </a:ext>
+              </a:extLst>
+            </p:cNvPr>
+            <p:cNvSpPr txBox="1"/>
+            <p:nvPr/>
+          </p:nvSpPr>
+          <p:spPr>
+            <a:xfrm>
+              <a:off x="1015984" y="3822980"/>
+              <a:ext cx="570990" cy="369332"/>
+            </a:xfrm>
+            <a:prstGeom prst="rect">
+              <a:avLst/>
+            </a:prstGeom>
+            <a:noFill/>
+          </p:spPr>
+          <p:txBody>
+            <a:bodyPr wrap="none" rtlCol="0">
+              <a:spAutoFit/>
+            </a:bodyPr>
+            <a:lstStyle/>
+            <a:p>
+              <a:r>
+                <a:rPr lang="en-US" dirty="0"/>
+                <a:t>B00</a:t>
+              </a:r>
+            </a:p>
+          </p:txBody>
+        </p:sp>
+        <p:sp>
+          <p:nvSpPr>
+            <p:cNvPr id="37" name="TextBox 36">
+              <a:extLst>
+                <a:ext uri="{FF2B5EF4-FFF2-40B4-BE49-F238E27FC236}">
+                  <a16:creationId xmlns:a16="http://schemas.microsoft.com/office/drawing/2014/main" id="{38B4E869-9B02-7062-CA61-B8AB593ACE5D}"/>
+                </a:ext>
+              </a:extLst>
+            </p:cNvPr>
+            <p:cNvSpPr txBox="1"/>
+            <p:nvPr/>
+          </p:nvSpPr>
+          <p:spPr>
+            <a:xfrm>
+              <a:off x="2077789" y="3822980"/>
+              <a:ext cx="570990" cy="369332"/>
+            </a:xfrm>
+            <a:prstGeom prst="rect">
+              <a:avLst/>
+            </a:prstGeom>
+            <a:noFill/>
+          </p:spPr>
+          <p:txBody>
+            <a:bodyPr wrap="none" rtlCol="0">
+              <a:spAutoFit/>
+            </a:bodyPr>
+            <a:lstStyle/>
+            <a:p>
+              <a:r>
+                <a:rPr lang="en-US" dirty="0"/>
+                <a:t>B01</a:t>
+              </a:r>
+            </a:p>
+          </p:txBody>
+        </p:sp>
+        <p:sp>
+          <p:nvSpPr>
+            <p:cNvPr id="40" name="TextBox 39">
+              <a:extLst>
+                <a:ext uri="{FF2B5EF4-FFF2-40B4-BE49-F238E27FC236}">
+                  <a16:creationId xmlns:a16="http://schemas.microsoft.com/office/drawing/2014/main" id="{E53A15C3-961C-681E-CC00-8990721959C4}"/>
+                </a:ext>
+              </a:extLst>
+            </p:cNvPr>
+            <p:cNvSpPr txBox="1"/>
+            <p:nvPr/>
+          </p:nvSpPr>
+          <p:spPr>
+            <a:xfrm>
+              <a:off x="3144449" y="3822980"/>
+              <a:ext cx="570990" cy="369332"/>
+            </a:xfrm>
+            <a:prstGeom prst="rect">
+              <a:avLst/>
+            </a:prstGeom>
+            <a:noFill/>
+          </p:spPr>
+          <p:txBody>
+            <a:bodyPr wrap="none" rtlCol="0">
+              <a:spAutoFit/>
+            </a:bodyPr>
+            <a:lstStyle/>
+            <a:p>
+              <a:r>
+                <a:rPr lang="en-US" dirty="0"/>
+                <a:t>B02</a:t>
+              </a:r>
+            </a:p>
+          </p:txBody>
+        </p:sp>
+        <p:sp>
+          <p:nvSpPr>
+            <p:cNvPr id="41" name="TextBox 40">
+              <a:extLst>
+                <a:ext uri="{FF2B5EF4-FFF2-40B4-BE49-F238E27FC236}">
+                  <a16:creationId xmlns:a16="http://schemas.microsoft.com/office/drawing/2014/main" id="{D7BC06F7-A260-64D8-AF60-6ABA64F91BCE}"/>
+                </a:ext>
+              </a:extLst>
+            </p:cNvPr>
+            <p:cNvSpPr txBox="1"/>
+            <p:nvPr/>
+          </p:nvSpPr>
+          <p:spPr>
+            <a:xfrm>
+              <a:off x="4234009" y="3822980"/>
+              <a:ext cx="570990" cy="369332"/>
+            </a:xfrm>
+            <a:prstGeom prst="rect">
+              <a:avLst/>
+            </a:prstGeom>
+            <a:noFill/>
+          </p:spPr>
+          <p:txBody>
+            <a:bodyPr wrap="none" rtlCol="0">
+              <a:spAutoFit/>
+            </a:bodyPr>
+            <a:lstStyle/>
+            <a:p>
+              <a:r>
+                <a:rPr lang="en-US" dirty="0"/>
+                <a:t>B03</a:t>
+              </a:r>
+            </a:p>
+          </p:txBody>
+        </p:sp>
+        <p:sp>
+          <p:nvSpPr>
+            <p:cNvPr id="44" name="TextBox 43">
+              <a:extLst>
+                <a:ext uri="{FF2B5EF4-FFF2-40B4-BE49-F238E27FC236}">
+                  <a16:creationId xmlns:a16="http://schemas.microsoft.com/office/drawing/2014/main" id="{F0ED7DA9-1B7C-CB72-4D58-08F749EBFEA8}"/>
+                </a:ext>
+              </a:extLst>
+            </p:cNvPr>
+            <p:cNvSpPr txBox="1"/>
+            <p:nvPr/>
+          </p:nvSpPr>
+          <p:spPr>
+            <a:xfrm>
+              <a:off x="5353803" y="3827569"/>
+              <a:ext cx="570990" cy="369332"/>
+            </a:xfrm>
+            <a:prstGeom prst="rect">
+              <a:avLst/>
+            </a:prstGeom>
+            <a:noFill/>
+          </p:spPr>
+          <p:txBody>
+            <a:bodyPr wrap="none" rtlCol="0">
+              <a:spAutoFit/>
+            </a:bodyPr>
+            <a:lstStyle/>
+            <a:p>
+              <a:r>
+                <a:rPr lang="en-US" dirty="0"/>
+                <a:t>B04</a:t>
+              </a:r>
+            </a:p>
+          </p:txBody>
+        </p:sp>
+        <p:sp>
+          <p:nvSpPr>
+            <p:cNvPr id="45" name="TextBox 44">
+              <a:extLst>
+                <a:ext uri="{FF2B5EF4-FFF2-40B4-BE49-F238E27FC236}">
+                  <a16:creationId xmlns:a16="http://schemas.microsoft.com/office/drawing/2014/main" id="{E4E5FCB3-2A81-515B-A179-A03B4056F66B}"/>
+                </a:ext>
+              </a:extLst>
+            </p:cNvPr>
+            <p:cNvSpPr txBox="1"/>
+            <p:nvPr/>
+          </p:nvSpPr>
+          <p:spPr>
+            <a:xfrm>
+              <a:off x="6415608" y="3827569"/>
+              <a:ext cx="570990" cy="369332"/>
+            </a:xfrm>
+            <a:prstGeom prst="rect">
+              <a:avLst/>
+            </a:prstGeom>
+            <a:noFill/>
+          </p:spPr>
+          <p:txBody>
+            <a:bodyPr wrap="none" rtlCol="0">
+              <a:spAutoFit/>
+            </a:bodyPr>
+            <a:lstStyle/>
+            <a:p>
+              <a:r>
+                <a:rPr lang="en-US" dirty="0"/>
+                <a:t>B05</a:t>
+              </a:r>
+            </a:p>
+          </p:txBody>
+        </p:sp>
+        <p:sp>
+          <p:nvSpPr>
+            <p:cNvPr id="46" name="TextBox 45">
+              <a:extLst>
+                <a:ext uri="{FF2B5EF4-FFF2-40B4-BE49-F238E27FC236}">
+                  <a16:creationId xmlns:a16="http://schemas.microsoft.com/office/drawing/2014/main" id="{99D23694-C520-65B9-9702-AC646CFD7C7C}"/>
+                </a:ext>
+              </a:extLst>
+            </p:cNvPr>
+            <p:cNvSpPr txBox="1"/>
+            <p:nvPr/>
+          </p:nvSpPr>
+          <p:spPr>
+            <a:xfrm>
+              <a:off x="7482268" y="3827569"/>
+              <a:ext cx="570990" cy="369332"/>
+            </a:xfrm>
+            <a:prstGeom prst="rect">
+              <a:avLst/>
+            </a:prstGeom>
+            <a:noFill/>
+          </p:spPr>
+          <p:txBody>
+            <a:bodyPr wrap="none" rtlCol="0">
+              <a:spAutoFit/>
+            </a:bodyPr>
+            <a:lstStyle/>
+            <a:p>
+              <a:r>
+                <a:rPr lang="en-US" dirty="0"/>
+                <a:t>B06</a:t>
+              </a:r>
+            </a:p>
+          </p:txBody>
+        </p:sp>
+        <p:sp>
+          <p:nvSpPr>
+            <p:cNvPr id="47" name="TextBox 46">
+              <a:extLst>
+                <a:ext uri="{FF2B5EF4-FFF2-40B4-BE49-F238E27FC236}">
+                  <a16:creationId xmlns:a16="http://schemas.microsoft.com/office/drawing/2014/main" id="{20A4C03B-740B-24A2-162D-65C1111DDDBA}"/>
+                </a:ext>
+              </a:extLst>
+            </p:cNvPr>
+            <p:cNvSpPr txBox="1"/>
+            <p:nvPr/>
+          </p:nvSpPr>
+          <p:spPr>
+            <a:xfrm>
+              <a:off x="8571828" y="3827569"/>
+              <a:ext cx="570990" cy="369332"/>
+            </a:xfrm>
+            <a:prstGeom prst="rect">
+              <a:avLst/>
+            </a:prstGeom>
+            <a:noFill/>
+          </p:spPr>
+          <p:txBody>
+            <a:bodyPr wrap="none" rtlCol="0">
+              <a:spAutoFit/>
+            </a:bodyPr>
+            <a:lstStyle/>
+            <a:p>
+              <a:r>
+                <a:rPr lang="en-US" dirty="0"/>
+                <a:t>B07</a:t>
+              </a:r>
+            </a:p>
+          </p:txBody>
+        </p:sp>
+        <p:sp>
+          <p:nvSpPr>
+            <p:cNvPr id="12" name="Left Bracket 11">
+              <a:extLst>
+                <a:ext uri="{FF2B5EF4-FFF2-40B4-BE49-F238E27FC236}">
+                  <a16:creationId xmlns:a16="http://schemas.microsoft.com/office/drawing/2014/main" id="{75DDD1F5-1DB8-5D8C-C3C5-87FFD9310033}"/>
+                </a:ext>
+              </a:extLst>
+            </p:cNvPr>
+            <p:cNvSpPr/>
+            <p:nvPr/>
+          </p:nvSpPr>
+          <p:spPr>
+            <a:xfrm rot="16200000">
+              <a:off x="1631992" y="3594265"/>
+              <a:ext cx="369333" cy="2035851"/>
+            </a:xfrm>
+            <a:prstGeom prst="leftBracket">
+              <a:avLst/>
+            </a:prstGeom>
+            <a:ln w="25400">
+              <a:solidFill>
+                <a:schemeClr val="tx1"/>
+              </a:solidFill>
+            </a:ln>
+          </p:spPr>
+          <p:style>
+            <a:lnRef idx="2">
+              <a:schemeClr val="accent1"/>
+            </a:lnRef>
+            <a:fillRef idx="0">
+              <a:schemeClr val="accent1"/>
+            </a:fillRef>
+            <a:effectRef idx="1">
+              <a:schemeClr val="accent1"/>
+            </a:effectRef>
+            <a:fontRef idx="minor">
+              <a:schemeClr val="tx1"/>
+            </a:fontRef>
+          </p:style>
+          <p:txBody>
+            <a:bodyPr rtlCol="0" anchor="ctr"/>
+            <a:lstStyle/>
+            <a:p>
+              <a:pPr algn="ctr"/>
+              <a:endParaRPr lang="en-US"/>
+            </a:p>
+          </p:txBody>
+        </p:sp>
+        <p:sp>
+          <p:nvSpPr>
+            <p:cNvPr id="13" name="Left Bracket 12">
+              <a:extLst>
+                <a:ext uri="{FF2B5EF4-FFF2-40B4-BE49-F238E27FC236}">
+                  <a16:creationId xmlns:a16="http://schemas.microsoft.com/office/drawing/2014/main" id="{6C3D6143-E711-9467-9DC3-D9FACCD0A72E}"/>
+                </a:ext>
+              </a:extLst>
+            </p:cNvPr>
+            <p:cNvSpPr/>
+            <p:nvPr/>
+          </p:nvSpPr>
+          <p:spPr>
+            <a:xfrm rot="16200000">
+              <a:off x="3249253" y="4161658"/>
+              <a:ext cx="369333" cy="901063"/>
+            </a:xfrm>
+            <a:prstGeom prst="leftBracket">
+              <a:avLst/>
+            </a:prstGeom>
+            <a:ln w="25400">
+              <a:solidFill>
+                <a:schemeClr val="tx1"/>
+              </a:solidFill>
+            </a:ln>
+          </p:spPr>
+          <p:style>
+            <a:lnRef idx="2">
+              <a:schemeClr val="accent1"/>
+            </a:lnRef>
+            <a:fillRef idx="0">
+              <a:schemeClr val="accent1"/>
+            </a:fillRef>
+            <a:effectRef idx="1">
+              <a:schemeClr val="accent1"/>
+            </a:effectRef>
+            <a:fontRef idx="minor">
+              <a:schemeClr val="tx1"/>
+            </a:fontRef>
+          </p:style>
+          <p:txBody>
+            <a:bodyPr rtlCol="0" anchor="ctr"/>
+            <a:lstStyle/>
+            <a:p>
+              <a:pPr algn="ctr"/>
+              <a:endParaRPr lang="en-US"/>
+            </a:p>
+          </p:txBody>
+        </p:sp>
+        <p:sp>
+          <p:nvSpPr>
+            <p:cNvPr id="14" name="Left Bracket 13">
+              <a:extLst>
+                <a:ext uri="{FF2B5EF4-FFF2-40B4-BE49-F238E27FC236}">
+                  <a16:creationId xmlns:a16="http://schemas.microsoft.com/office/drawing/2014/main" id="{67938F3F-8879-7F69-BB5C-C71A6AEFBC4F}"/>
+                </a:ext>
+              </a:extLst>
+            </p:cNvPr>
+            <p:cNvSpPr/>
+            <p:nvPr/>
+          </p:nvSpPr>
+          <p:spPr>
+            <a:xfrm rot="16200000">
+              <a:off x="4334837" y="4161658"/>
+              <a:ext cx="369333" cy="901063"/>
+            </a:xfrm>
+            <a:prstGeom prst="leftBracket">
+              <a:avLst/>
+            </a:prstGeom>
+            <a:ln w="25400">
+              <a:solidFill>
+                <a:schemeClr val="tx1"/>
+              </a:solidFill>
+            </a:ln>
+          </p:spPr>
+          <p:style>
+            <a:lnRef idx="2">
+              <a:schemeClr val="accent1"/>
+            </a:lnRef>
+            <a:fillRef idx="0">
+              <a:schemeClr val="accent1"/>
+            </a:fillRef>
+            <a:effectRef idx="1">
+              <a:schemeClr val="accent1"/>
+            </a:effectRef>
+            <a:fontRef idx="minor">
+              <a:schemeClr val="tx1"/>
+            </a:fontRef>
+          </p:style>
+          <p:txBody>
+            <a:bodyPr rtlCol="0" anchor="ctr"/>
+            <a:lstStyle/>
+            <a:p>
+              <a:pPr algn="ctr"/>
+              <a:endParaRPr lang="en-US"/>
+            </a:p>
+          </p:txBody>
+        </p:sp>
+        <p:sp>
+          <p:nvSpPr>
+            <p:cNvPr id="15" name="Left Bracket 14">
+              <a:extLst>
+                <a:ext uri="{FF2B5EF4-FFF2-40B4-BE49-F238E27FC236}">
+                  <a16:creationId xmlns:a16="http://schemas.microsoft.com/office/drawing/2014/main" id="{D087831F-2908-69FD-686E-8600924C8AC6}"/>
+                </a:ext>
+              </a:extLst>
+            </p:cNvPr>
+            <p:cNvSpPr/>
+            <p:nvPr/>
+          </p:nvSpPr>
+          <p:spPr>
+            <a:xfrm rot="16200000">
+              <a:off x="6506447" y="4161658"/>
+              <a:ext cx="369333" cy="901063"/>
+            </a:xfrm>
+            <a:prstGeom prst="leftBracket">
+              <a:avLst/>
+            </a:prstGeom>
+            <a:ln w="25400">
+              <a:solidFill>
+                <a:schemeClr val="tx1"/>
+              </a:solidFill>
+            </a:ln>
+          </p:spPr>
+          <p:style>
+            <a:lnRef idx="2">
+              <a:schemeClr val="accent1"/>
+            </a:lnRef>
+            <a:fillRef idx="0">
+              <a:schemeClr val="accent1"/>
+            </a:fillRef>
+            <a:effectRef idx="1">
+              <a:schemeClr val="accent1"/>
+            </a:effectRef>
+            <a:fontRef idx="minor">
+              <a:schemeClr val="tx1"/>
+            </a:fontRef>
+          </p:style>
+          <p:txBody>
+            <a:bodyPr rtlCol="0" anchor="ctr"/>
+            <a:lstStyle/>
+            <a:p>
+              <a:pPr algn="ctr"/>
+              <a:endParaRPr lang="en-US"/>
+            </a:p>
+          </p:txBody>
+        </p:sp>
+        <p:sp>
+          <p:nvSpPr>
+            <p:cNvPr id="16" name="Left Bracket 15">
+              <a:extLst>
+                <a:ext uri="{FF2B5EF4-FFF2-40B4-BE49-F238E27FC236}">
+                  <a16:creationId xmlns:a16="http://schemas.microsoft.com/office/drawing/2014/main" id="{6CEF50D1-C14D-0CDA-DC70-C4F92311D11D}"/>
+                </a:ext>
+              </a:extLst>
+            </p:cNvPr>
+            <p:cNvSpPr/>
+            <p:nvPr/>
+          </p:nvSpPr>
+          <p:spPr>
+            <a:xfrm rot="16200000">
+              <a:off x="8725114" y="4161658"/>
+              <a:ext cx="369333" cy="901063"/>
+            </a:xfrm>
+            <a:prstGeom prst="leftBracket">
+              <a:avLst/>
+            </a:prstGeom>
+            <a:ln w="25400">
+              <a:solidFill>
+                <a:schemeClr val="tx1"/>
+              </a:solidFill>
+            </a:ln>
+          </p:spPr>
+          <p:style>
+            <a:lnRef idx="2">
+              <a:schemeClr val="accent1"/>
+            </a:lnRef>
+            <a:fillRef idx="0">
+              <a:schemeClr val="accent1"/>
+            </a:fillRef>
+            <a:effectRef idx="1">
+              <a:schemeClr val="accent1"/>
+            </a:effectRef>
+            <a:fontRef idx="minor">
+              <a:schemeClr val="tx1"/>
+            </a:fontRef>
+          </p:style>
+          <p:txBody>
+            <a:bodyPr rtlCol="0" anchor="ctr"/>
+            <a:lstStyle/>
+            <a:p>
+              <a:pPr algn="ctr"/>
+              <a:endParaRPr lang="en-US"/>
+            </a:p>
+          </p:txBody>
+        </p:sp>
+        <p:pic>
+          <p:nvPicPr>
+            <p:cNvPr id="27" name="Graphic 26" descr="Doctor male with solid fill">
+              <a:extLst>
+                <a:ext uri="{FF2B5EF4-FFF2-40B4-BE49-F238E27FC236}">
+                  <a16:creationId xmlns:a16="http://schemas.microsoft.com/office/drawing/2014/main" id="{F05C5AF1-BD44-0F6A-9204-C203798B37F2}"/>
+                </a:ext>
+              </a:extLst>
+            </p:cNvPr>
+            <p:cNvPicPr>
+              <a:picLocks noChangeAspect="1"/>
+            </p:cNvPicPr>
+            <p:nvPr/>
+          </p:nvPicPr>
+          <p:blipFill>
+            <a:blip>
+              <a:extLst>
+                <a:ext uri="{96DAC541-7B7A-43D3-8B79-37D633B846F1}">
+                  <asvg:svgBlip xmlns:asvg="http://schemas.microsoft.com/office/drawing/2016/SVG/main" r:embed="rId6"/>
+                </a:ext>
+              </a:extLst>
+            </a:blip>
+            <a:stretch>
+              <a:fillRect/>
+            </a:stretch>
+          </p:blipFill>
+          <p:spPr>
+            <a:xfrm>
+              <a:off x="3111516" y="4847403"/>
+              <a:ext cx="636856" cy="636856"/>
+            </a:xfrm>
+            <a:prstGeom prst="rect">
+              <a:avLst/>
+            </a:prstGeom>
+          </p:spPr>
+        </p:pic>
+        <p:pic>
+          <p:nvPicPr>
+            <p:cNvPr id="32" name="Graphic 31" descr="Doctor female with solid fill">
+              <a:extLst>
+                <a:ext uri="{FF2B5EF4-FFF2-40B4-BE49-F238E27FC236}">
+                  <a16:creationId xmlns:a16="http://schemas.microsoft.com/office/drawing/2014/main" id="{6317EF42-1324-642A-F267-2757A01E5637}"/>
+                </a:ext>
+              </a:extLst>
+            </p:cNvPr>
+            <p:cNvPicPr>
+              <a:picLocks noChangeAspect="1"/>
+            </p:cNvPicPr>
+            <p:nvPr/>
+          </p:nvPicPr>
+          <p:blipFill>
+            <a:blip>
+              <a:extLst>
+                <a:ext uri="{96DAC541-7B7A-43D3-8B79-37D633B846F1}">
+                  <asvg:svgBlip xmlns:asvg="http://schemas.microsoft.com/office/drawing/2016/SVG/main" r:embed="rId7"/>
+                </a:ext>
+              </a:extLst>
+            </a:blip>
+            <a:stretch>
+              <a:fillRect/>
+            </a:stretch>
+          </p:blipFill>
+          <p:spPr>
+            <a:xfrm>
+              <a:off x="1498231" y="4847403"/>
+              <a:ext cx="636856" cy="636856"/>
+            </a:xfrm>
+            <a:prstGeom prst="rect">
+              <a:avLst/>
+            </a:prstGeom>
+          </p:spPr>
+        </p:pic>
+        <p:pic>
+          <p:nvPicPr>
+            <p:cNvPr id="36" name="Graphic 35" descr="Doctor male with solid fill">
+              <a:extLst>
+                <a:ext uri="{FF2B5EF4-FFF2-40B4-BE49-F238E27FC236}">
+                  <a16:creationId xmlns:a16="http://schemas.microsoft.com/office/drawing/2014/main" id="{BF3ADE1D-F896-7786-CF1C-EFEBE1112ED9}"/>
+                </a:ext>
+              </a:extLst>
+            </p:cNvPr>
+            <p:cNvPicPr>
+              <a:picLocks noChangeAspect="1"/>
+            </p:cNvPicPr>
+            <p:nvPr/>
+          </p:nvPicPr>
+          <p:blipFill>
+            <a:blip>
+              <a:extLst>
+                <a:ext uri="{96DAC541-7B7A-43D3-8B79-37D633B846F1}">
+                  <asvg:svgBlip xmlns:asvg="http://schemas.microsoft.com/office/drawing/2016/SVG/main" r:embed="rId6"/>
+                </a:ext>
+              </a:extLst>
+            </a:blip>
+            <a:stretch>
+              <a:fillRect/>
+            </a:stretch>
+          </p:blipFill>
+          <p:spPr>
+            <a:xfrm>
+              <a:off x="6382675" y="4851763"/>
+              <a:ext cx="636856" cy="636856"/>
+            </a:xfrm>
+            <a:prstGeom prst="rect">
+              <a:avLst/>
+            </a:prstGeom>
+          </p:spPr>
+        </p:pic>
+        <p:pic>
+          <p:nvPicPr>
+            <p:cNvPr id="38" name="Graphic 37" descr="Doctor female with solid fill">
+              <a:extLst>
+                <a:ext uri="{FF2B5EF4-FFF2-40B4-BE49-F238E27FC236}">
+                  <a16:creationId xmlns:a16="http://schemas.microsoft.com/office/drawing/2014/main" id="{8CDD2A66-54C1-F985-F485-EDFC69341C5F}"/>
+                </a:ext>
+              </a:extLst>
+            </p:cNvPr>
+            <p:cNvPicPr>
+              <a:picLocks noChangeAspect="1"/>
+            </p:cNvPicPr>
+            <p:nvPr/>
+          </p:nvPicPr>
+          <p:blipFill>
+            <a:blip>
+              <a:extLst>
+                <a:ext uri="{96DAC541-7B7A-43D3-8B79-37D633B846F1}">
+                  <asvg:svgBlip xmlns:asvg="http://schemas.microsoft.com/office/drawing/2016/SVG/main" r:embed="rId7"/>
+                </a:ext>
+              </a:extLst>
+            </a:blip>
+            <a:stretch>
+              <a:fillRect/>
+            </a:stretch>
+          </p:blipFill>
+          <p:spPr>
+            <a:xfrm>
+              <a:off x="4188533" y="4847403"/>
+              <a:ext cx="636856" cy="636856"/>
+            </a:xfrm>
+            <a:prstGeom prst="rect">
+              <a:avLst/>
+            </a:prstGeom>
+          </p:spPr>
+        </p:pic>
+        <p:pic>
+          <p:nvPicPr>
+            <p:cNvPr id="39" name="Graphic 38" descr="Doctor female with solid fill">
+              <a:extLst>
+                <a:ext uri="{FF2B5EF4-FFF2-40B4-BE49-F238E27FC236}">
+                  <a16:creationId xmlns:a16="http://schemas.microsoft.com/office/drawing/2014/main" id="{6FB4093C-4F71-83CE-7102-FB4C84A1F2D9}"/>
+                </a:ext>
+              </a:extLst>
+            </p:cNvPr>
+            <p:cNvPicPr>
+              <a:picLocks noChangeAspect="1"/>
+            </p:cNvPicPr>
+            <p:nvPr/>
+          </p:nvPicPr>
+          <p:blipFill>
+            <a:blip>
+              <a:extLst>
+                <a:ext uri="{96DAC541-7B7A-43D3-8B79-37D633B846F1}">
+                  <asvg:svgBlip xmlns:asvg="http://schemas.microsoft.com/office/drawing/2016/SVG/main" r:embed="rId7"/>
+                </a:ext>
+              </a:extLst>
+            </a:blip>
+            <a:stretch>
+              <a:fillRect/>
+            </a:stretch>
+          </p:blipFill>
+          <p:spPr>
+            <a:xfrm>
+              <a:off x="8591352" y="4842814"/>
+              <a:ext cx="636856" cy="636856"/>
+            </a:xfrm>
+            <a:prstGeom prst="rect">
+              <a:avLst/>
+            </a:prstGeom>
+          </p:spPr>
+        </p:pic>
+        <p:pic>
+          <p:nvPicPr>
+            <p:cNvPr id="87" name="Graphic 86" descr="Bed with solid fill">
+              <a:extLst>
+                <a:ext uri="{FF2B5EF4-FFF2-40B4-BE49-F238E27FC236}">
+                  <a16:creationId xmlns:a16="http://schemas.microsoft.com/office/drawing/2014/main" id="{3863AC67-48E3-F3A2-1514-9B07ECE6C478}"/>
+                </a:ext>
+              </a:extLst>
+            </p:cNvPr>
+            <p:cNvPicPr>
+              <a:picLocks noChangeAspect="1"/>
+            </p:cNvPicPr>
+            <p:nvPr/>
+          </p:nvPicPr>
+          <p:blipFill>
+            <a:blip>
+              <a:extLst>
+                <a:ext uri="{96DAC541-7B7A-43D3-8B79-37D633B846F1}">
+                  <asvg:svgBlip xmlns:asvg="http://schemas.microsoft.com/office/drawing/2016/SVG/main" r:embed="rId8"/>
+                </a:ext>
+              </a:extLst>
+            </a:blip>
+            <a:srcRect/>
+            <a:stretch/>
+          </p:blipFill>
+          <p:spPr>
+            <a:xfrm>
+              <a:off x="947536" y="1709327"/>
+              <a:ext cx="634696" cy="634696"/>
+            </a:xfrm>
+            <a:prstGeom prst="rect">
+              <a:avLst/>
+            </a:prstGeom>
+          </p:spPr>
+        </p:pic>
+        <p:pic>
+          <p:nvPicPr>
+            <p:cNvPr id="88" name="Graphic 87" descr="Sleep with solid fill">
+              <a:extLst>
+                <a:ext uri="{FF2B5EF4-FFF2-40B4-BE49-F238E27FC236}">
+                  <a16:creationId xmlns:a16="http://schemas.microsoft.com/office/drawing/2014/main" id="{B935A129-061A-021C-CA64-1CEF87C52FEA}"/>
+                </a:ext>
+              </a:extLst>
+            </p:cNvPr>
+            <p:cNvPicPr>
+              <a:picLocks noChangeAspect="1"/>
+            </p:cNvPicPr>
+            <p:nvPr/>
+          </p:nvPicPr>
+          <p:blipFill>
+            <a:blip>
+              <a:extLst>
+                <a:ext uri="{96DAC541-7B7A-43D3-8B79-37D633B846F1}">
+                  <asvg:svgBlip xmlns:asvg="http://schemas.microsoft.com/office/drawing/2016/SVG/main" r:embed="rId9"/>
+                </a:ext>
+              </a:extLst>
+            </a:blip>
+            <a:srcRect/>
+            <a:stretch/>
+          </p:blipFill>
+          <p:spPr>
+            <a:xfrm>
+              <a:off x="2013368" y="1709327"/>
+              <a:ext cx="634696" cy="634696"/>
+            </a:xfrm>
+            <a:prstGeom prst="rect">
+              <a:avLst/>
+            </a:prstGeom>
+          </p:spPr>
+        </p:pic>
+        <p:pic>
+          <p:nvPicPr>
+            <p:cNvPr id="89" name="Graphic 88" descr="Sleep with solid fill">
+              <a:extLst>
+                <a:ext uri="{FF2B5EF4-FFF2-40B4-BE49-F238E27FC236}">
+                  <a16:creationId xmlns:a16="http://schemas.microsoft.com/office/drawing/2014/main" id="{85333D08-E2AB-9018-A9EC-7EA29667D015}"/>
+                </a:ext>
+              </a:extLst>
+            </p:cNvPr>
+            <p:cNvPicPr>
+              <a:picLocks noChangeAspect="1"/>
+            </p:cNvPicPr>
+            <p:nvPr/>
+          </p:nvPicPr>
+          <p:blipFill>
+            <a:blip>
+              <a:extLst>
+                <a:ext uri="{96DAC541-7B7A-43D3-8B79-37D633B846F1}">
+                  <asvg:svgBlip xmlns:asvg="http://schemas.microsoft.com/office/drawing/2016/SVG/main" r:embed="rId3"/>
+                </a:ext>
+              </a:extLst>
+            </a:blip>
+            <a:srcRect/>
+            <a:stretch/>
+          </p:blipFill>
+          <p:spPr>
+            <a:xfrm>
+              <a:off x="3122701" y="1709327"/>
+              <a:ext cx="634696" cy="634696"/>
+            </a:xfrm>
+            <a:prstGeom prst="rect">
+              <a:avLst/>
+            </a:prstGeom>
+          </p:spPr>
+        </p:pic>
+        <p:pic>
+          <p:nvPicPr>
+            <p:cNvPr id="90" name="Graphic 89" descr="Sleep with solid fill">
+              <a:extLst>
+                <a:ext uri="{FF2B5EF4-FFF2-40B4-BE49-F238E27FC236}">
+                  <a16:creationId xmlns:a16="http://schemas.microsoft.com/office/drawing/2014/main" id="{9FDF6BD1-3E60-F5EA-89EA-6490EC239A8F}"/>
+                </a:ext>
+              </a:extLst>
+            </p:cNvPr>
+            <p:cNvPicPr>
+              <a:picLocks noChangeAspect="1"/>
+            </p:cNvPicPr>
+            <p:nvPr/>
+          </p:nvPicPr>
+          <p:blipFill>
+            <a:blip>
+              <a:extLst>
+                <a:ext uri="{96DAC541-7B7A-43D3-8B79-37D633B846F1}">
+                  <asvg:svgBlip xmlns:asvg="http://schemas.microsoft.com/office/drawing/2016/SVG/main" r:embed="rId3"/>
+                </a:ext>
+              </a:extLst>
+            </a:blip>
+            <a:srcRect/>
+            <a:stretch/>
+          </p:blipFill>
+          <p:spPr>
+            <a:xfrm>
+              <a:off x="4188533" y="1709327"/>
+              <a:ext cx="634696" cy="634696"/>
+            </a:xfrm>
+            <a:prstGeom prst="rect">
+              <a:avLst/>
+            </a:prstGeom>
+          </p:spPr>
+        </p:pic>
+        <p:pic>
+          <p:nvPicPr>
+            <p:cNvPr id="91" name="Graphic 90" descr="Sleep with solid fill">
+              <a:extLst>
+                <a:ext uri="{FF2B5EF4-FFF2-40B4-BE49-F238E27FC236}">
+                  <a16:creationId xmlns:a16="http://schemas.microsoft.com/office/drawing/2014/main" id="{66D1D48C-65C4-6752-6BDA-C38FCBEBB310}"/>
+                </a:ext>
+              </a:extLst>
+            </p:cNvPr>
+            <p:cNvPicPr>
+              <a:picLocks noChangeAspect="1"/>
+            </p:cNvPicPr>
+            <p:nvPr/>
+          </p:nvPicPr>
+          <p:blipFill>
+            <a:blip>
+              <a:extLst>
+                <a:ext uri="{96DAC541-7B7A-43D3-8B79-37D633B846F1}">
+                  <asvg:svgBlip xmlns:asvg="http://schemas.microsoft.com/office/drawing/2016/SVG/main" r:embed="rId3"/>
+                </a:ext>
+              </a:extLst>
+            </a:blip>
+            <a:srcRect/>
+            <a:stretch/>
+          </p:blipFill>
+          <p:spPr>
+            <a:xfrm>
+              <a:off x="5307934" y="1709327"/>
+              <a:ext cx="634696" cy="634696"/>
+            </a:xfrm>
+            <a:prstGeom prst="rect">
+              <a:avLst/>
+            </a:prstGeom>
+          </p:spPr>
+        </p:pic>
+        <p:pic>
+          <p:nvPicPr>
+            <p:cNvPr id="92" name="Graphic 91" descr="Sleep with solid fill">
+              <a:extLst>
+                <a:ext uri="{FF2B5EF4-FFF2-40B4-BE49-F238E27FC236}">
+                  <a16:creationId xmlns:a16="http://schemas.microsoft.com/office/drawing/2014/main" id="{8B83903B-55BA-6E19-44B8-E6BF96F5769D}"/>
+                </a:ext>
+              </a:extLst>
+            </p:cNvPr>
+            <p:cNvPicPr>
+              <a:picLocks noChangeAspect="1"/>
+            </p:cNvPicPr>
+            <p:nvPr/>
+          </p:nvPicPr>
+          <p:blipFill>
+            <a:blip>
+              <a:extLst>
+                <a:ext uri="{96DAC541-7B7A-43D3-8B79-37D633B846F1}">
+                  <asvg:svgBlip xmlns:asvg="http://schemas.microsoft.com/office/drawing/2016/SVG/main" r:embed="rId3"/>
+                </a:ext>
+              </a:extLst>
+            </a:blip>
+            <a:srcRect/>
+            <a:stretch/>
+          </p:blipFill>
+          <p:spPr>
+            <a:xfrm>
+              <a:off x="6373766" y="1709327"/>
+              <a:ext cx="634696" cy="634696"/>
+            </a:xfrm>
+            <a:prstGeom prst="rect">
+              <a:avLst/>
+            </a:prstGeom>
+          </p:spPr>
+        </p:pic>
+        <p:pic>
+          <p:nvPicPr>
+            <p:cNvPr id="93" name="Graphic 92" descr="Bed with solid fill">
+              <a:extLst>
+                <a:ext uri="{FF2B5EF4-FFF2-40B4-BE49-F238E27FC236}">
+                  <a16:creationId xmlns:a16="http://schemas.microsoft.com/office/drawing/2014/main" id="{89A75918-F2F0-5796-B0B8-523FDA69DDE0}"/>
+                </a:ext>
+              </a:extLst>
+            </p:cNvPr>
+            <p:cNvPicPr>
+              <a:picLocks noChangeAspect="1"/>
+            </p:cNvPicPr>
+            <p:nvPr/>
+          </p:nvPicPr>
+          <p:blipFill>
+            <a:blip>
+              <a:extLst>
+                <a:ext uri="{96DAC541-7B7A-43D3-8B79-37D633B846F1}">
+                  <asvg:svgBlip xmlns:asvg="http://schemas.microsoft.com/office/drawing/2016/SVG/main" r:embed="rId8"/>
+                </a:ext>
+              </a:extLst>
+            </a:blip>
+            <a:srcRect/>
+            <a:stretch/>
+          </p:blipFill>
+          <p:spPr>
+            <a:xfrm>
+              <a:off x="7483099" y="1709327"/>
+              <a:ext cx="634696" cy="634696"/>
+            </a:xfrm>
+            <a:prstGeom prst="rect">
+              <a:avLst/>
+            </a:prstGeom>
+          </p:spPr>
+        </p:pic>
+        <p:sp>
+          <p:nvSpPr>
+            <p:cNvPr id="95" name="TextBox 94">
+              <a:extLst>
+                <a:ext uri="{FF2B5EF4-FFF2-40B4-BE49-F238E27FC236}">
+                  <a16:creationId xmlns:a16="http://schemas.microsoft.com/office/drawing/2014/main" id="{750FA7AC-4F26-9AB6-479C-1E7726A22ED9}"/>
+                </a:ext>
+              </a:extLst>
+            </p:cNvPr>
+            <p:cNvSpPr txBox="1"/>
+            <p:nvPr/>
+          </p:nvSpPr>
+          <p:spPr>
+            <a:xfrm>
+              <a:off x="1015984" y="1554811"/>
+              <a:ext cx="570990" cy="369332"/>
+            </a:xfrm>
+            <a:prstGeom prst="rect">
+              <a:avLst/>
+            </a:prstGeom>
+            <a:noFill/>
+          </p:spPr>
+          <p:txBody>
+            <a:bodyPr wrap="none" rtlCol="0">
+              <a:spAutoFit/>
+            </a:bodyPr>
+            <a:lstStyle/>
+            <a:p>
+              <a:r>
+                <a:rPr lang="en-US" dirty="0"/>
+                <a:t>B08</a:t>
+              </a:r>
+            </a:p>
+          </p:txBody>
+        </p:sp>
+        <p:sp>
+          <p:nvSpPr>
+            <p:cNvPr id="96" name="TextBox 95">
+              <a:extLst>
+                <a:ext uri="{FF2B5EF4-FFF2-40B4-BE49-F238E27FC236}">
+                  <a16:creationId xmlns:a16="http://schemas.microsoft.com/office/drawing/2014/main" id="{DDA9FDC7-8DD0-58AC-DF5E-98F07BC84988}"/>
+                </a:ext>
+              </a:extLst>
+            </p:cNvPr>
+            <p:cNvSpPr txBox="1"/>
+            <p:nvPr/>
+          </p:nvSpPr>
+          <p:spPr>
+            <a:xfrm>
+              <a:off x="2077789" y="1554811"/>
+              <a:ext cx="570990" cy="369332"/>
+            </a:xfrm>
+            <a:prstGeom prst="rect">
+              <a:avLst/>
+            </a:prstGeom>
+            <a:noFill/>
+          </p:spPr>
+          <p:txBody>
+            <a:bodyPr wrap="none" rtlCol="0">
+              <a:spAutoFit/>
+            </a:bodyPr>
+            <a:lstStyle/>
+            <a:p>
+              <a:r>
+                <a:rPr lang="en-US" dirty="0"/>
+                <a:t>B09</a:t>
+              </a:r>
+            </a:p>
+          </p:txBody>
+        </p:sp>
+        <p:sp>
+          <p:nvSpPr>
+            <p:cNvPr id="97" name="TextBox 96">
+              <a:extLst>
+                <a:ext uri="{FF2B5EF4-FFF2-40B4-BE49-F238E27FC236}">
+                  <a16:creationId xmlns:a16="http://schemas.microsoft.com/office/drawing/2014/main" id="{D9B14E02-E267-CD13-69D9-1534E87EEA27}"/>
+                </a:ext>
+              </a:extLst>
+            </p:cNvPr>
+            <p:cNvSpPr txBox="1"/>
+            <p:nvPr/>
+          </p:nvSpPr>
+          <p:spPr>
+            <a:xfrm>
+              <a:off x="3144449" y="1554811"/>
+              <a:ext cx="570990" cy="369332"/>
+            </a:xfrm>
+            <a:prstGeom prst="rect">
+              <a:avLst/>
+            </a:prstGeom>
+            <a:noFill/>
+          </p:spPr>
+          <p:txBody>
+            <a:bodyPr wrap="none" rtlCol="0">
+              <a:spAutoFit/>
+            </a:bodyPr>
+            <a:lstStyle/>
+            <a:p>
+              <a:r>
+                <a:rPr lang="en-US" dirty="0"/>
+                <a:t>B10</a:t>
+              </a:r>
+            </a:p>
+          </p:txBody>
+        </p:sp>
+        <p:sp>
+          <p:nvSpPr>
+            <p:cNvPr id="98" name="TextBox 97">
+              <a:extLst>
+                <a:ext uri="{FF2B5EF4-FFF2-40B4-BE49-F238E27FC236}">
+                  <a16:creationId xmlns:a16="http://schemas.microsoft.com/office/drawing/2014/main" id="{C7D38A0B-3C10-F470-8AA1-2EAD854BB0BA}"/>
+                </a:ext>
+              </a:extLst>
+            </p:cNvPr>
+            <p:cNvSpPr txBox="1"/>
+            <p:nvPr/>
+          </p:nvSpPr>
+          <p:spPr>
+            <a:xfrm>
+              <a:off x="4234009" y="1554811"/>
+              <a:ext cx="570990" cy="369332"/>
+            </a:xfrm>
+            <a:prstGeom prst="rect">
+              <a:avLst/>
+            </a:prstGeom>
+            <a:noFill/>
+          </p:spPr>
+          <p:txBody>
+            <a:bodyPr wrap="none" rtlCol="0">
+              <a:spAutoFit/>
+            </a:bodyPr>
+            <a:lstStyle/>
+            <a:p>
+              <a:r>
+                <a:rPr lang="en-US" dirty="0"/>
+                <a:t>B11</a:t>
+              </a:r>
+            </a:p>
+          </p:txBody>
+        </p:sp>
+        <p:sp>
+          <p:nvSpPr>
+            <p:cNvPr id="99" name="TextBox 98">
+              <a:extLst>
+                <a:ext uri="{FF2B5EF4-FFF2-40B4-BE49-F238E27FC236}">
+                  <a16:creationId xmlns:a16="http://schemas.microsoft.com/office/drawing/2014/main" id="{DBD57EBF-ABA6-477F-4ED7-DED50B20BE8A}"/>
+                </a:ext>
+              </a:extLst>
+            </p:cNvPr>
+            <p:cNvSpPr txBox="1"/>
+            <p:nvPr/>
+          </p:nvSpPr>
+          <p:spPr>
+            <a:xfrm>
+              <a:off x="5353803" y="1559400"/>
+              <a:ext cx="570990" cy="369332"/>
+            </a:xfrm>
+            <a:prstGeom prst="rect">
+              <a:avLst/>
+            </a:prstGeom>
+            <a:noFill/>
+          </p:spPr>
+          <p:txBody>
+            <a:bodyPr wrap="none" rtlCol="0">
+              <a:spAutoFit/>
+            </a:bodyPr>
+            <a:lstStyle/>
+            <a:p>
+              <a:r>
+                <a:rPr lang="en-US" dirty="0"/>
+                <a:t>B12</a:t>
+              </a:r>
+            </a:p>
+          </p:txBody>
+        </p:sp>
+        <p:sp>
+          <p:nvSpPr>
+            <p:cNvPr id="100" name="TextBox 99">
+              <a:extLst>
+                <a:ext uri="{FF2B5EF4-FFF2-40B4-BE49-F238E27FC236}">
+                  <a16:creationId xmlns:a16="http://schemas.microsoft.com/office/drawing/2014/main" id="{9141DA76-5645-7435-7FB4-D32FAF2C4097}"/>
+                </a:ext>
+              </a:extLst>
+            </p:cNvPr>
+            <p:cNvSpPr txBox="1"/>
+            <p:nvPr/>
+          </p:nvSpPr>
+          <p:spPr>
+            <a:xfrm>
+              <a:off x="6415608" y="1559400"/>
+              <a:ext cx="570990" cy="369332"/>
+            </a:xfrm>
+            <a:prstGeom prst="rect">
+              <a:avLst/>
+            </a:prstGeom>
+            <a:noFill/>
+          </p:spPr>
+          <p:txBody>
+            <a:bodyPr wrap="none" rtlCol="0">
+              <a:spAutoFit/>
+            </a:bodyPr>
+            <a:lstStyle/>
+            <a:p>
+              <a:r>
+                <a:rPr lang="en-US" dirty="0"/>
+                <a:t>B13</a:t>
+              </a:r>
+            </a:p>
+          </p:txBody>
+        </p:sp>
+        <p:sp>
+          <p:nvSpPr>
+            <p:cNvPr id="101" name="TextBox 100">
+              <a:extLst>
+                <a:ext uri="{FF2B5EF4-FFF2-40B4-BE49-F238E27FC236}">
+                  <a16:creationId xmlns:a16="http://schemas.microsoft.com/office/drawing/2014/main" id="{1FC1EEC6-863E-48BC-85D8-D8E010A07473}"/>
+                </a:ext>
+              </a:extLst>
+            </p:cNvPr>
+            <p:cNvSpPr txBox="1"/>
+            <p:nvPr/>
+          </p:nvSpPr>
+          <p:spPr>
+            <a:xfrm>
+              <a:off x="7482268" y="1559400"/>
+              <a:ext cx="570990" cy="369332"/>
+            </a:xfrm>
+            <a:prstGeom prst="rect">
+              <a:avLst/>
+            </a:prstGeom>
+            <a:noFill/>
+          </p:spPr>
+          <p:txBody>
+            <a:bodyPr wrap="none" rtlCol="0">
+              <a:spAutoFit/>
+            </a:bodyPr>
+            <a:lstStyle/>
+            <a:p>
+              <a:r>
+                <a:rPr lang="en-US" dirty="0"/>
+                <a:t>B14</a:t>
+              </a:r>
+            </a:p>
+          </p:txBody>
+        </p:sp>
+        <p:sp>
+          <p:nvSpPr>
+            <p:cNvPr id="103" name="Left Bracket 102">
+              <a:extLst>
+                <a:ext uri="{FF2B5EF4-FFF2-40B4-BE49-F238E27FC236}">
+                  <a16:creationId xmlns:a16="http://schemas.microsoft.com/office/drawing/2014/main" id="{01DBF4C6-31C8-E960-2DBE-EB7A84D2D1E7}"/>
+                </a:ext>
+              </a:extLst>
+            </p:cNvPr>
+            <p:cNvSpPr/>
+            <p:nvPr/>
+          </p:nvSpPr>
+          <p:spPr>
+            <a:xfrm rot="16200000">
+              <a:off x="3782830" y="1326095"/>
+              <a:ext cx="369333" cy="2035851"/>
+            </a:xfrm>
+            <a:prstGeom prst="leftBracket">
+              <a:avLst/>
+            </a:prstGeom>
+            <a:ln w="25400">
+              <a:solidFill>
+                <a:schemeClr val="tx1"/>
+              </a:solidFill>
+            </a:ln>
+          </p:spPr>
+          <p:style>
+            <a:lnRef idx="2">
+              <a:schemeClr val="accent1"/>
+            </a:lnRef>
+            <a:fillRef idx="0">
+              <a:schemeClr val="accent1"/>
+            </a:fillRef>
+            <a:effectRef idx="1">
+              <a:schemeClr val="accent1"/>
+            </a:effectRef>
+            <a:fontRef idx="minor">
+              <a:schemeClr val="tx1"/>
+            </a:fontRef>
+          </p:style>
+          <p:txBody>
+            <a:bodyPr rtlCol="0" anchor="ctr"/>
+            <a:lstStyle/>
+            <a:p>
+              <a:pPr algn="ctr"/>
+              <a:endParaRPr lang="en-US"/>
+            </a:p>
+          </p:txBody>
+        </p:sp>
+        <p:sp>
+          <p:nvSpPr>
+            <p:cNvPr id="104" name="Left Bracket 103">
+              <a:extLst>
+                <a:ext uri="{FF2B5EF4-FFF2-40B4-BE49-F238E27FC236}">
+                  <a16:creationId xmlns:a16="http://schemas.microsoft.com/office/drawing/2014/main" id="{29F2AB79-BD79-6260-AFDC-0E8BE7D9DB67}"/>
+                </a:ext>
+              </a:extLst>
+            </p:cNvPr>
+            <p:cNvSpPr/>
+            <p:nvPr/>
+          </p:nvSpPr>
+          <p:spPr>
+            <a:xfrm rot="16200000">
+              <a:off x="2149604" y="1893489"/>
+              <a:ext cx="369333" cy="901063"/>
+            </a:xfrm>
+            <a:prstGeom prst="leftBracket">
+              <a:avLst/>
+            </a:prstGeom>
+            <a:ln w="25400">
+              <a:solidFill>
+                <a:schemeClr val="tx1"/>
+              </a:solidFill>
+            </a:ln>
+          </p:spPr>
+          <p:style>
+            <a:lnRef idx="2">
+              <a:schemeClr val="accent1"/>
+            </a:lnRef>
+            <a:fillRef idx="0">
+              <a:schemeClr val="accent1"/>
+            </a:fillRef>
+            <a:effectRef idx="1">
+              <a:schemeClr val="accent1"/>
+            </a:effectRef>
+            <a:fontRef idx="minor">
+              <a:schemeClr val="tx1"/>
+            </a:fontRef>
+          </p:style>
+          <p:txBody>
+            <a:bodyPr rtlCol="0" anchor="ctr"/>
+            <a:lstStyle/>
+            <a:p>
+              <a:pPr algn="ctr"/>
+              <a:endParaRPr lang="en-US"/>
+            </a:p>
+          </p:txBody>
+        </p:sp>
+        <p:pic>
+          <p:nvPicPr>
+            <p:cNvPr id="108" name="Graphic 107" descr="Doctor male with solid fill">
+              <a:extLst>
+                <a:ext uri="{FF2B5EF4-FFF2-40B4-BE49-F238E27FC236}">
+                  <a16:creationId xmlns:a16="http://schemas.microsoft.com/office/drawing/2014/main" id="{3A7FADCE-9A38-3629-E1E4-D027936D6A79}"/>
+                </a:ext>
+              </a:extLst>
+            </p:cNvPr>
+            <p:cNvPicPr>
+              <a:picLocks noChangeAspect="1"/>
+            </p:cNvPicPr>
+            <p:nvPr/>
+          </p:nvPicPr>
+          <p:blipFill>
+            <a:blip>
+              <a:extLst>
+                <a:ext uri="{96DAC541-7B7A-43D3-8B79-37D633B846F1}">
+                  <asvg:svgBlip xmlns:asvg="http://schemas.microsoft.com/office/drawing/2016/SVG/main" r:embed="rId6"/>
+                </a:ext>
+              </a:extLst>
+            </a:blip>
+            <a:stretch>
+              <a:fillRect/>
+            </a:stretch>
+          </p:blipFill>
+          <p:spPr>
+            <a:xfrm>
+              <a:off x="3649068" y="2579234"/>
+              <a:ext cx="636856" cy="636856"/>
+            </a:xfrm>
+            <a:prstGeom prst="rect">
+              <a:avLst/>
+            </a:prstGeom>
+          </p:spPr>
+        </p:pic>
+        <p:pic>
+          <p:nvPicPr>
+            <p:cNvPr id="109" name="Graphic 108" descr="Doctor female with solid fill">
+              <a:extLst>
+                <a:ext uri="{FF2B5EF4-FFF2-40B4-BE49-F238E27FC236}">
+                  <a16:creationId xmlns:a16="http://schemas.microsoft.com/office/drawing/2014/main" id="{0D517900-75E5-DE50-D8BF-71012DB3A403}"/>
+                </a:ext>
+              </a:extLst>
+            </p:cNvPr>
+            <p:cNvPicPr>
+              <a:picLocks noChangeAspect="1"/>
+            </p:cNvPicPr>
+            <p:nvPr/>
+          </p:nvPicPr>
+          <p:blipFill>
+            <a:blip>
+              <a:extLst>
+                <a:ext uri="{96DAC541-7B7A-43D3-8B79-37D633B846F1}">
+                  <asvg:svgBlip xmlns:asvg="http://schemas.microsoft.com/office/drawing/2016/SVG/main" r:embed="rId7"/>
+                </a:ext>
+              </a:extLst>
+            </a:blip>
+            <a:stretch>
+              <a:fillRect/>
+            </a:stretch>
+          </p:blipFill>
+          <p:spPr>
+            <a:xfrm>
+              <a:off x="2013368" y="2579234"/>
+              <a:ext cx="636856" cy="636856"/>
+            </a:xfrm>
+            <a:prstGeom prst="rect">
+              <a:avLst/>
+            </a:prstGeom>
+          </p:spPr>
+        </p:pic>
+        <p:pic>
+          <p:nvPicPr>
+            <p:cNvPr id="110" name="Graphic 109" descr="Doctor male with solid fill">
+              <a:extLst>
+                <a:ext uri="{FF2B5EF4-FFF2-40B4-BE49-F238E27FC236}">
+                  <a16:creationId xmlns:a16="http://schemas.microsoft.com/office/drawing/2014/main" id="{48967831-D080-4478-220D-D6FCA440919A}"/>
+                </a:ext>
+              </a:extLst>
+            </p:cNvPr>
+            <p:cNvPicPr>
+              <a:picLocks noChangeAspect="1"/>
+            </p:cNvPicPr>
+            <p:nvPr/>
+          </p:nvPicPr>
+          <p:blipFill>
+            <a:blip>
+              <a:extLst>
+                <a:ext uri="{96DAC541-7B7A-43D3-8B79-37D633B846F1}">
+                  <asvg:svgBlip xmlns:asvg="http://schemas.microsoft.com/office/drawing/2016/SVG/main" r:embed="rId6"/>
+                </a:ext>
+              </a:extLst>
+            </a:blip>
+            <a:stretch>
+              <a:fillRect/>
+            </a:stretch>
+          </p:blipFill>
+          <p:spPr>
+            <a:xfrm>
+              <a:off x="10304123" y="2524265"/>
+              <a:ext cx="636856" cy="636856"/>
+            </a:xfrm>
+            <a:prstGeom prst="rect">
+              <a:avLst/>
+            </a:prstGeom>
+          </p:spPr>
+        </p:pic>
+        <p:pic>
+          <p:nvPicPr>
+            <p:cNvPr id="111" name="Graphic 110" descr="Doctor female with solid fill">
+              <a:extLst>
+                <a:ext uri="{FF2B5EF4-FFF2-40B4-BE49-F238E27FC236}">
+                  <a16:creationId xmlns:a16="http://schemas.microsoft.com/office/drawing/2014/main" id="{C4950B2C-3A2A-14AA-5CE0-BB542D3CBB3B}"/>
+                </a:ext>
+              </a:extLst>
+            </p:cNvPr>
+            <p:cNvPicPr>
+              <a:picLocks noChangeAspect="1"/>
+            </p:cNvPicPr>
+            <p:nvPr/>
+          </p:nvPicPr>
+          <p:blipFill>
+            <a:blip>
+              <a:extLst>
+                <a:ext uri="{96DAC541-7B7A-43D3-8B79-37D633B846F1}">
+                  <asvg:svgBlip xmlns:asvg="http://schemas.microsoft.com/office/drawing/2016/SVG/main" r:embed="rId7"/>
+                </a:ext>
+              </a:extLst>
+            </a:blip>
+            <a:stretch>
+              <a:fillRect/>
+            </a:stretch>
+          </p:blipFill>
+          <p:spPr>
+            <a:xfrm>
+              <a:off x="5858049" y="2570222"/>
+              <a:ext cx="636856" cy="636856"/>
+            </a:xfrm>
+            <a:prstGeom prst="rect">
+              <a:avLst/>
+            </a:prstGeom>
+          </p:spPr>
+        </p:pic>
+        <p:sp>
+          <p:nvSpPr>
+            <p:cNvPr id="145" name="Rounded Rectangle 144">
+              <a:extLst>
+                <a:ext uri="{FF2B5EF4-FFF2-40B4-BE49-F238E27FC236}">
+                  <a16:creationId xmlns:a16="http://schemas.microsoft.com/office/drawing/2014/main" id="{FC79B5A3-2BB4-7B48-C72E-8D25FD8CC6B9}"/>
+                </a:ext>
+              </a:extLst>
+            </p:cNvPr>
+            <p:cNvSpPr/>
+            <p:nvPr/>
+          </p:nvSpPr>
+          <p:spPr>
+            <a:xfrm>
+              <a:off x="9791448" y="1367293"/>
+              <a:ext cx="1662206" cy="2097152"/>
+            </a:xfrm>
+            <a:prstGeom prst="roundRect">
+              <a:avLst>
+                <a:gd name="adj" fmla="val 21519"/>
+              </a:avLst>
+            </a:prstGeom>
+            <a:solidFill>
+              <a:srgbClr val="00B0F0">
+                <a:alpha val="25714"/>
+              </a:srgbClr>
+            </a:solidFill>
+            <a:ln w="34925">
+              <a:solidFill>
+                <a:srgbClr val="0070C0"/>
+              </a:solidFill>
+            </a:ln>
+          </p:spPr>
+          <p:style>
+            <a:lnRef idx="2">
+              <a:schemeClr val="accent1">
+                <a:shade val="15000"/>
+              </a:schemeClr>
+            </a:lnRef>
+            <a:fillRef idx="1">
+              <a:schemeClr val="accent1"/>
+            </a:fillRef>
+            <a:effectRef idx="0">
+              <a:schemeClr val="accent1"/>
+            </a:effectRef>
+            <a:fontRef idx="minor">
+              <a:schemeClr val="lt1"/>
+            </a:fontRef>
+          </p:style>
+          <p:txBody>
+            <a:bodyPr rtlCol="0" anchor="ctr"/>
+            <a:lstStyle/>
+            <a:p>
+              <a:pPr algn="ctr"/>
+              <a:endParaRPr lang="en-US"/>
+            </a:p>
+          </p:txBody>
+        </p:sp>
+        <p:pic>
+          <p:nvPicPr>
+            <p:cNvPr id="146" name="Graphic 145" descr="Sleep with solid fill">
+              <a:extLst>
+                <a:ext uri="{FF2B5EF4-FFF2-40B4-BE49-F238E27FC236}">
+                  <a16:creationId xmlns:a16="http://schemas.microsoft.com/office/drawing/2014/main" id="{91B67877-094C-5F87-1376-CB26AD402FBE}"/>
+                </a:ext>
+              </a:extLst>
+            </p:cNvPr>
+            <p:cNvPicPr>
+              <a:picLocks noChangeAspect="1"/>
+            </p:cNvPicPr>
+            <p:nvPr/>
+          </p:nvPicPr>
+          <p:blipFill>
+            <a:blip>
+              <a:extLst>
+                <a:ext uri="{96DAC541-7B7A-43D3-8B79-37D633B846F1}">
+                  <asvg:svgBlip xmlns:asvg="http://schemas.microsoft.com/office/drawing/2016/SVG/main" r:embed="rId9"/>
+                </a:ext>
+              </a:extLst>
+            </a:blip>
+            <a:srcRect/>
+            <a:stretch/>
+          </p:blipFill>
+          <p:spPr>
+            <a:xfrm>
+              <a:off x="10261702" y="1636349"/>
+              <a:ext cx="634696" cy="634696"/>
+            </a:xfrm>
+            <a:prstGeom prst="rect">
+              <a:avLst/>
+            </a:prstGeom>
+          </p:spPr>
+        </p:pic>
+        <p:sp>
+          <p:nvSpPr>
+            <p:cNvPr id="147" name="TextBox 146">
+              <a:extLst>
+                <a:ext uri="{FF2B5EF4-FFF2-40B4-BE49-F238E27FC236}">
+                  <a16:creationId xmlns:a16="http://schemas.microsoft.com/office/drawing/2014/main" id="{251F4585-4635-F03E-B272-03A1D51B6E9D}"/>
+                </a:ext>
+              </a:extLst>
+            </p:cNvPr>
+            <p:cNvSpPr txBox="1"/>
+            <p:nvPr/>
+          </p:nvSpPr>
+          <p:spPr>
+            <a:xfrm>
+              <a:off x="10284599" y="1486422"/>
+              <a:ext cx="570990" cy="369332"/>
+            </a:xfrm>
+            <a:prstGeom prst="rect">
+              <a:avLst/>
+            </a:prstGeom>
+            <a:noFill/>
+          </p:spPr>
+          <p:txBody>
+            <a:bodyPr wrap="none" rtlCol="0">
+              <a:spAutoFit/>
+            </a:bodyPr>
+            <a:lstStyle/>
+            <a:p>
+              <a:r>
+                <a:rPr lang="en-US" dirty="0"/>
+                <a:t>B16</a:t>
+              </a:r>
+            </a:p>
+          </p:txBody>
+        </p:sp>
+        <p:sp>
+          <p:nvSpPr>
+            <p:cNvPr id="148" name="Left Bracket 147">
+              <a:extLst>
+                <a:ext uri="{FF2B5EF4-FFF2-40B4-BE49-F238E27FC236}">
+                  <a16:creationId xmlns:a16="http://schemas.microsoft.com/office/drawing/2014/main" id="{1DB19B96-4564-FCD5-3291-8A7147D98DB5}"/>
+                </a:ext>
+              </a:extLst>
+            </p:cNvPr>
+            <p:cNvSpPr/>
+            <p:nvPr/>
+          </p:nvSpPr>
+          <p:spPr>
+            <a:xfrm rot="16200000">
+              <a:off x="10394383" y="1829502"/>
+              <a:ext cx="369333" cy="901063"/>
+            </a:xfrm>
+            <a:prstGeom prst="leftBracket">
+              <a:avLst/>
+            </a:prstGeom>
+            <a:ln w="25400">
+              <a:solidFill>
+                <a:schemeClr val="tx1"/>
+              </a:solidFill>
+            </a:ln>
+          </p:spPr>
+          <p:style>
+            <a:lnRef idx="2">
+              <a:schemeClr val="accent1"/>
+            </a:lnRef>
+            <a:fillRef idx="0">
+              <a:schemeClr val="accent1"/>
+            </a:fillRef>
+            <a:effectRef idx="1">
+              <a:schemeClr val="accent1"/>
+            </a:effectRef>
+            <a:fontRef idx="minor">
+              <a:schemeClr val="tx1"/>
+            </a:fontRef>
+          </p:style>
+          <p:txBody>
+            <a:bodyPr rtlCol="0" anchor="ctr"/>
+            <a:lstStyle/>
+            <a:p>
+              <a:pPr algn="ctr"/>
+              <a:endParaRPr lang="en-US"/>
+            </a:p>
+          </p:txBody>
+        </p:sp>
+        <p:sp>
+          <p:nvSpPr>
+            <p:cNvPr id="150" name="Left Bracket 149">
+              <a:extLst>
+                <a:ext uri="{FF2B5EF4-FFF2-40B4-BE49-F238E27FC236}">
+                  <a16:creationId xmlns:a16="http://schemas.microsoft.com/office/drawing/2014/main" id="{A1267B4B-D30D-A737-8FE8-277F33BA290C}"/>
+                </a:ext>
+              </a:extLst>
+            </p:cNvPr>
+            <p:cNvSpPr/>
+            <p:nvPr/>
+          </p:nvSpPr>
+          <p:spPr>
+            <a:xfrm rot="16200000">
+              <a:off x="5991811" y="1321673"/>
+              <a:ext cx="369333" cy="2035851"/>
+            </a:xfrm>
+            <a:prstGeom prst="leftBracket">
+              <a:avLst/>
+            </a:prstGeom>
+            <a:ln w="25400">
+              <a:solidFill>
+                <a:schemeClr val="tx1"/>
+              </a:solidFill>
+            </a:ln>
+          </p:spPr>
+          <p:style>
+            <a:lnRef idx="2">
+              <a:schemeClr val="accent1"/>
+            </a:lnRef>
+            <a:fillRef idx="0">
+              <a:schemeClr val="accent1"/>
+            </a:fillRef>
+            <a:effectRef idx="1">
+              <a:schemeClr val="accent1"/>
+            </a:effectRef>
+            <a:fontRef idx="minor">
+              <a:schemeClr val="tx1"/>
+            </a:fontRef>
+          </p:style>
+          <p:txBody>
+            <a:bodyPr rtlCol="0" anchor="ctr"/>
+            <a:lstStyle/>
+            <a:p>
+              <a:pPr algn="ctr"/>
+              <a:endParaRPr lang="en-US"/>
+            </a:p>
+          </p:txBody>
+        </p:sp>
+        <p:sp>
+          <p:nvSpPr>
+            <p:cNvPr id="233" name="Rounded Rectangle 232">
+              <a:extLst>
+                <a:ext uri="{FF2B5EF4-FFF2-40B4-BE49-F238E27FC236}">
+                  <a16:creationId xmlns:a16="http://schemas.microsoft.com/office/drawing/2014/main" id="{09686284-EE10-8ACD-B1A0-67EA65C71F02}"/>
+                </a:ext>
+              </a:extLst>
+            </p:cNvPr>
+            <p:cNvSpPr/>
+            <p:nvPr/>
+          </p:nvSpPr>
+          <p:spPr>
+            <a:xfrm>
+              <a:off x="9791448" y="3637753"/>
+              <a:ext cx="1662206" cy="2097152"/>
+            </a:xfrm>
+            <a:prstGeom prst="roundRect">
+              <a:avLst>
+                <a:gd name="adj" fmla="val 21519"/>
+              </a:avLst>
+            </a:prstGeom>
+            <a:solidFill>
+              <a:srgbClr val="00B0F0">
+                <a:alpha val="25714"/>
+              </a:srgbClr>
+            </a:solidFill>
+            <a:ln w="34925">
+              <a:solidFill>
+                <a:srgbClr val="0070C0"/>
+              </a:solidFill>
+            </a:ln>
+          </p:spPr>
+          <p:style>
+            <a:lnRef idx="2">
+              <a:schemeClr val="accent1">
+                <a:shade val="15000"/>
+              </a:schemeClr>
+            </a:lnRef>
+            <a:fillRef idx="1">
+              <a:schemeClr val="accent1"/>
+            </a:fillRef>
+            <a:effectRef idx="0">
+              <a:schemeClr val="accent1"/>
+            </a:effectRef>
+            <a:fontRef idx="minor">
+              <a:schemeClr val="lt1"/>
+            </a:fontRef>
+          </p:style>
+          <p:txBody>
+            <a:bodyPr rtlCol="0" anchor="ctr"/>
+            <a:lstStyle/>
+            <a:p>
+              <a:pPr algn="ctr"/>
+              <a:endParaRPr lang="en-US" dirty="0"/>
+            </a:p>
+          </p:txBody>
+        </p:sp>
+        <p:pic>
+          <p:nvPicPr>
+            <p:cNvPr id="234" name="Graphic 233" descr="Sleep with solid fill">
+              <a:extLst>
+                <a:ext uri="{FF2B5EF4-FFF2-40B4-BE49-F238E27FC236}">
+                  <a16:creationId xmlns:a16="http://schemas.microsoft.com/office/drawing/2014/main" id="{459C560A-39EA-5187-4676-9660B684B6E5}"/>
+                </a:ext>
+              </a:extLst>
+            </p:cNvPr>
+            <p:cNvPicPr>
+              <a:picLocks noChangeAspect="1"/>
+            </p:cNvPicPr>
+            <p:nvPr/>
+          </p:nvPicPr>
+          <p:blipFill>
+            <a:blip>
+              <a:extLst>
+                <a:ext uri="{96DAC541-7B7A-43D3-8B79-37D633B846F1}">
+                  <asvg:svgBlip xmlns:asvg="http://schemas.microsoft.com/office/drawing/2016/SVG/main" r:embed="rId9"/>
+                </a:ext>
+              </a:extLst>
+            </a:blip>
+            <a:srcRect/>
+            <a:stretch/>
+          </p:blipFill>
+          <p:spPr>
+            <a:xfrm>
+              <a:off x="10261702" y="3906809"/>
+              <a:ext cx="634696" cy="634696"/>
+            </a:xfrm>
+            <a:prstGeom prst="rect">
+              <a:avLst/>
+            </a:prstGeom>
+          </p:spPr>
+        </p:pic>
+        <p:sp>
+          <p:nvSpPr>
+            <p:cNvPr id="235" name="TextBox 234">
+              <a:extLst>
+                <a:ext uri="{FF2B5EF4-FFF2-40B4-BE49-F238E27FC236}">
+                  <a16:creationId xmlns:a16="http://schemas.microsoft.com/office/drawing/2014/main" id="{BD598074-88E5-99C4-2135-90DF9FAC96FC}"/>
+                </a:ext>
+              </a:extLst>
+            </p:cNvPr>
+            <p:cNvSpPr txBox="1"/>
+            <p:nvPr/>
+          </p:nvSpPr>
+          <p:spPr>
+            <a:xfrm>
+              <a:off x="10284599" y="3756882"/>
+              <a:ext cx="570990" cy="369332"/>
+            </a:xfrm>
+            <a:prstGeom prst="rect">
+              <a:avLst/>
+            </a:prstGeom>
+            <a:noFill/>
+          </p:spPr>
+          <p:txBody>
+            <a:bodyPr wrap="none" rtlCol="0">
+              <a:spAutoFit/>
+            </a:bodyPr>
+            <a:lstStyle/>
+            <a:p>
+              <a:r>
+                <a:rPr lang="en-US" dirty="0"/>
+                <a:t>B15</a:t>
+              </a:r>
+            </a:p>
+          </p:txBody>
+        </p:sp>
+        <p:sp>
+          <p:nvSpPr>
+            <p:cNvPr id="236" name="Left Bracket 235">
+              <a:extLst>
+                <a:ext uri="{FF2B5EF4-FFF2-40B4-BE49-F238E27FC236}">
+                  <a16:creationId xmlns:a16="http://schemas.microsoft.com/office/drawing/2014/main" id="{68D62CA4-F8B4-DDED-BBA0-A46F3C359524}"/>
+                </a:ext>
+              </a:extLst>
+            </p:cNvPr>
+            <p:cNvSpPr/>
+            <p:nvPr/>
+          </p:nvSpPr>
+          <p:spPr>
+            <a:xfrm rot="16200000">
+              <a:off x="10384787" y="4100317"/>
+              <a:ext cx="369333" cy="901063"/>
+            </a:xfrm>
+            <a:prstGeom prst="leftBracket">
+              <a:avLst/>
+            </a:prstGeom>
+            <a:ln w="25400">
+              <a:solidFill>
+                <a:schemeClr val="tx1"/>
+              </a:solidFill>
+            </a:ln>
+          </p:spPr>
+          <p:style>
+            <a:lnRef idx="2">
+              <a:schemeClr val="accent1"/>
+            </a:lnRef>
+            <a:fillRef idx="0">
+              <a:schemeClr val="accent1"/>
+            </a:fillRef>
+            <a:effectRef idx="1">
+              <a:schemeClr val="accent1"/>
+            </a:effectRef>
+            <a:fontRef idx="minor">
+              <a:schemeClr val="tx1"/>
+            </a:fontRef>
+          </p:style>
+          <p:txBody>
+            <a:bodyPr rtlCol="0" anchor="ctr"/>
+            <a:lstStyle/>
+            <a:p>
+              <a:pPr algn="ctr"/>
+              <a:endParaRPr lang="en-US"/>
+            </a:p>
+          </p:txBody>
+        </p:sp>
+        <p:pic>
+          <p:nvPicPr>
+            <p:cNvPr id="237" name="Graphic 236" descr="Doctor female with solid fill">
+              <a:extLst>
+                <a:ext uri="{FF2B5EF4-FFF2-40B4-BE49-F238E27FC236}">
+                  <a16:creationId xmlns:a16="http://schemas.microsoft.com/office/drawing/2014/main" id="{A5A5735A-3CD9-0027-1D93-D4F53A380BD1}"/>
+                </a:ext>
+              </a:extLst>
+            </p:cNvPr>
+            <p:cNvPicPr>
+              <a:picLocks noChangeAspect="1"/>
+            </p:cNvPicPr>
+            <p:nvPr/>
+          </p:nvPicPr>
+          <p:blipFill>
+            <a:blip>
+              <a:extLst>
+                <a:ext uri="{96DAC541-7B7A-43D3-8B79-37D633B846F1}">
+                  <asvg:svgBlip xmlns:asvg="http://schemas.microsoft.com/office/drawing/2016/SVG/main" r:embed="rId7"/>
+                </a:ext>
+              </a:extLst>
+            </a:blip>
+            <a:stretch>
+              <a:fillRect/>
+            </a:stretch>
+          </p:blipFill>
+          <p:spPr>
+            <a:xfrm>
+              <a:off x="10251026" y="4842814"/>
+              <a:ext cx="636856" cy="636856"/>
+            </a:xfrm>
+            <a:prstGeom prst="rect">
+              <a:avLst/>
+            </a:prstGeom>
+          </p:spPr>
+        </p:pic>
+      </p:grpSp>
+    </p:spTree>
+    <p:extLst>
+      <p:ext uri="{BB962C8B-B14F-4D97-AF65-F5344CB8AC3E}">
+        <p14:creationId xmlns:p14="http://schemas.microsoft.com/office/powerpoint/2010/main" val="1764696701"/>
+      </p:ext>
+    </p:extLst>
+  </p:cSld>
+  <p:clrMapOvr>
+    <a:masterClrMapping/>
+  </p:clrMapOvr>
+</p:sld>
+</file>
+
 <file path=ppt/theme/theme1.xml><?xml version="1.0" encoding="utf-8"?>
 <a:theme xmlns:a="http://schemas.openxmlformats.org/drawingml/2006/main" name="Office Theme">
   <a:themeElements>
@@ -11185,4 +15539,319 @@
     </a:ext>
   </a:extLst>
 </a:theme>
+</file>
+
+<file path=ppt/theme/theme2.xml><?xml version="1.0" encoding="utf-8"?>
+<a:theme xmlns:a="http://schemas.openxmlformats.org/drawingml/2006/main" name="Office Theme">
+  <a:themeElements>
+    <a:clrScheme name="Office">
+      <a:dk1>
+        <a:sysClr val="windowText" lastClr="000000"/>
+      </a:dk1>
+      <a:lt1>
+        <a:sysClr val="window" lastClr="FFFFFF"/>
+      </a:lt1>
+      <a:dk2>
+        <a:srgbClr val="0E2841"/>
+      </a:dk2>
+      <a:lt2>
+        <a:srgbClr val="E8E8E8"/>
+      </a:lt2>
+      <a:accent1>
+        <a:srgbClr val="156082"/>
+      </a:accent1>
+      <a:accent2>
+        <a:srgbClr val="E97132"/>
+      </a:accent2>
+      <a:accent3>
+        <a:srgbClr val="196B24"/>
+      </a:accent3>
+      <a:accent4>
+        <a:srgbClr val="0F9ED5"/>
+      </a:accent4>
+      <a:accent5>
+        <a:srgbClr val="A02B93"/>
+      </a:accent5>
+      <a:accent6>
+        <a:srgbClr val="4EA72E"/>
+      </a:accent6>
+      <a:hlink>
+        <a:srgbClr val="467886"/>
+      </a:hlink>
+      <a:folHlink>
+        <a:srgbClr val="96607D"/>
+      </a:folHlink>
+    </a:clrScheme>
+    <a:fontScheme name="Office">
+      <a:majorFont>
+        <a:latin typeface="Aptos Display" panose="02110004020202020204"/>
+        <a:ea typeface=""/>
+        <a:cs typeface=""/>
+        <a:font script="Jpan" typeface="游ゴシック Light"/>
+        <a:font script="Hang" typeface="맑은 고딕"/>
+        <a:font script="Hans" typeface="等线 Light"/>
+        <a:font script="Hant" typeface="新細明體"/>
+        <a:font script="Arab" typeface="Times New Roman"/>
+        <a:font script="Hebr" typeface="Times New Roman"/>
+        <a:font script="Thai" typeface="Angsana New"/>
+        <a:font script="Ethi" typeface="Nyala"/>
+        <a:font script="Beng" typeface="Vrinda"/>
+        <a:font script="Gujr" typeface="Shruti"/>
+        <a:font script="Khmr" typeface="MoolBoran"/>
+        <a:font script="Knda" typeface="Tunga"/>
+        <a:font script="Guru" typeface="Raavi"/>
+        <a:font script="Cans" typeface="Euphemia"/>
+        <a:font script="Cher" typeface="Plantagenet Cherokee"/>
+        <a:font script="Yiii" typeface="Microsoft Yi Baiti"/>
+        <a:font script="Tibt" typeface="Microsoft Himalaya"/>
+        <a:font script="Thaa" typeface="MV Boli"/>
+        <a:font script="Deva" typeface="Mangal"/>
+        <a:font script="Telu" typeface="Gautami"/>
+        <a:font script="Taml" typeface="Latha"/>
+        <a:font script="Syrc" typeface="Estrangelo Edessa"/>
+        <a:font script="Orya" typeface="Kalinga"/>
+        <a:font script="Mlym" typeface="Kartika"/>
+        <a:font script="Laoo" typeface="DokChampa"/>
+        <a:font script="Sinh" typeface="Iskoola Pota"/>
+        <a:font script="Mong" typeface="Mongolian Baiti"/>
+        <a:font script="Viet" typeface="Times New Roman"/>
+        <a:font script="Uigh" typeface="Microsoft Uighur"/>
+        <a:font script="Geor" typeface="Sylfaen"/>
+        <a:font script="Armn" typeface="Arial"/>
+        <a:font script="Bugi" typeface="Leelawadee UI"/>
+        <a:font script="Bopo" typeface="Microsoft JhengHei"/>
+        <a:font script="Java" typeface="Javanese Text"/>
+        <a:font script="Lisu" typeface="Segoe UI"/>
+        <a:font script="Mymr" typeface="Myanmar Text"/>
+        <a:font script="Nkoo" typeface="Ebrima"/>
+        <a:font script="Olck" typeface="Nirmala UI"/>
+        <a:font script="Osma" typeface="Ebrima"/>
+        <a:font script="Phag" typeface="Phagspa"/>
+        <a:font script="Syrn" typeface="Estrangelo Edessa"/>
+        <a:font script="Syrj" typeface="Estrangelo Edessa"/>
+        <a:font script="Syre" typeface="Estrangelo Edessa"/>
+        <a:font script="Sora" typeface="Nirmala UI"/>
+        <a:font script="Tale" typeface="Microsoft Tai Le"/>
+        <a:font script="Talu" typeface="Microsoft New Tai Lue"/>
+        <a:font script="Tfng" typeface="Ebrima"/>
+      </a:majorFont>
+      <a:minorFont>
+        <a:latin typeface="Aptos" panose="02110004020202020204"/>
+        <a:ea typeface=""/>
+        <a:cs typeface=""/>
+        <a:font script="Jpan" typeface="游ゴシック"/>
+        <a:font script="Hang" typeface="맑은 고딕"/>
+        <a:font script="Hans" typeface="等线"/>
+        <a:font script="Hant" typeface="新細明體"/>
+        <a:font script="Arab" typeface="Arial"/>
+        <a:font script="Hebr" typeface="Arial"/>
+        <a:font script="Thai" typeface="Cordia New"/>
+        <a:font script="Ethi" typeface="Nyala"/>
+        <a:font script="Beng" typeface="Vrinda"/>
+        <a:font script="Gujr" typeface="Shruti"/>
+        <a:font script="Khmr" typeface="DaunPenh"/>
+        <a:font script="Knda" typeface="Tunga"/>
+        <a:font script="Guru" typeface="Raavi"/>
+        <a:font script="Cans" typeface="Euphemia"/>
+        <a:font script="Cher" typeface="Plantagenet Cherokee"/>
+        <a:font script="Yiii" typeface="Microsoft Yi Baiti"/>
+        <a:font script="Tibt" typeface="Microsoft Himalaya"/>
+        <a:font script="Thaa" typeface="MV Boli"/>
+        <a:font script="Deva" typeface="Mangal"/>
+        <a:font script="Telu" typeface="Gautami"/>
+        <a:font script="Taml" typeface="Latha"/>
+        <a:font script="Syrc" typeface="Estrangelo Edessa"/>
+        <a:font script="Orya" typeface="Kalinga"/>
+        <a:font script="Mlym" typeface="Kartika"/>
+        <a:font script="Laoo" typeface="DokChampa"/>
+        <a:font script="Sinh" typeface="Iskoola Pota"/>
+        <a:font script="Mong" typeface="Mongolian Baiti"/>
+        <a:font script="Viet" typeface="Arial"/>
+        <a:font script="Uigh" typeface="Microsoft Uighur"/>
+        <a:font script="Geor" typeface="Sylfaen"/>
+        <a:font script="Armn" typeface="Arial"/>
+        <a:font script="Bugi" typeface="Leelawadee UI"/>
+        <a:font script="Bopo" typeface="Microsoft JhengHei"/>
+        <a:font script="Java" typeface="Javanese Text"/>
+        <a:font script="Lisu" typeface="Segoe UI"/>
+        <a:font script="Mymr" typeface="Myanmar Text"/>
+        <a:font script="Nkoo" typeface="Ebrima"/>
+        <a:font script="Olck" typeface="Nirmala UI"/>
+        <a:font script="Osma" typeface="Ebrima"/>
+        <a:font script="Phag" typeface="Phagspa"/>
+        <a:font script="Syrn" typeface="Estrangelo Edessa"/>
+        <a:font script="Syrj" typeface="Estrangelo Edessa"/>
+        <a:font script="Syre" typeface="Estrangelo Edessa"/>
+        <a:font script="Sora" typeface="Nirmala UI"/>
+        <a:font script="Tale" typeface="Microsoft Tai Le"/>
+        <a:font script="Talu" typeface="Microsoft New Tai Lue"/>
+        <a:font script="Tfng" typeface="Ebrima"/>
+      </a:minorFont>
+    </a:fontScheme>
+    <a:fmtScheme name="Office">
+      <a:fillStyleLst>
+        <a:solidFill>
+          <a:schemeClr val="phClr"/>
+        </a:solidFill>
+        <a:gradFill rotWithShape="1">
+          <a:gsLst>
+            <a:gs pos="0">
+              <a:schemeClr val="phClr">
+                <a:lumMod val="110000"/>
+                <a:satMod val="105000"/>
+                <a:tint val="67000"/>
+              </a:schemeClr>
+            </a:gs>
+            <a:gs pos="50000">
+              <a:schemeClr val="phClr">
+                <a:lumMod val="105000"/>
+                <a:satMod val="103000"/>
+                <a:tint val="73000"/>
+              </a:schemeClr>
+            </a:gs>
+            <a:gs pos="100000">
+              <a:schemeClr val="phClr">
+                <a:lumMod val="105000"/>
+                <a:satMod val="109000"/>
+                <a:tint val="81000"/>
+              </a:schemeClr>
+            </a:gs>
+          </a:gsLst>
+          <a:lin ang="5400000" scaled="0"/>
+        </a:gradFill>
+        <a:gradFill rotWithShape="1">
+          <a:gsLst>
+            <a:gs pos="0">
+              <a:schemeClr val="phClr">
+                <a:satMod val="103000"/>
+                <a:lumMod val="102000"/>
+                <a:tint val="94000"/>
+              </a:schemeClr>
+            </a:gs>
+            <a:gs pos="50000">
+              <a:schemeClr val="phClr">
+                <a:satMod val="110000"/>
+                <a:lumMod val="100000"/>
+                <a:shade val="100000"/>
+              </a:schemeClr>
+            </a:gs>
+            <a:gs pos="100000">
+              <a:schemeClr val="phClr">
+                <a:lumMod val="99000"/>
+                <a:satMod val="120000"/>
+                <a:shade val="78000"/>
+              </a:schemeClr>
+            </a:gs>
+          </a:gsLst>
+          <a:lin ang="5400000" scaled="0"/>
+        </a:gradFill>
+      </a:fillStyleLst>
+      <a:lnStyleLst>
+        <a:ln w="12700" cap="flat" cmpd="sng" algn="ctr">
+          <a:solidFill>
+            <a:schemeClr val="phClr"/>
+          </a:solidFill>
+          <a:prstDash val="solid"/>
+          <a:miter lim="800000"/>
+        </a:ln>
+        <a:ln w="19050" cap="flat" cmpd="sng" algn="ctr">
+          <a:solidFill>
+            <a:schemeClr val="phClr"/>
+          </a:solidFill>
+          <a:prstDash val="solid"/>
+          <a:miter lim="800000"/>
+        </a:ln>
+        <a:ln w="25400" cap="flat" cmpd="sng" algn="ctr">
+          <a:solidFill>
+            <a:schemeClr val="phClr"/>
+          </a:solidFill>
+          <a:prstDash val="solid"/>
+          <a:miter lim="800000"/>
+        </a:ln>
+      </a:lnStyleLst>
+      <a:effectStyleLst>
+        <a:effectStyle>
+          <a:effectLst/>
+        </a:effectStyle>
+        <a:effectStyle>
+          <a:effectLst/>
+        </a:effectStyle>
+        <a:effectStyle>
+          <a:effectLst>
+            <a:outerShdw blurRad="57150" dist="19050" dir="5400000" algn="ctr" rotWithShape="0">
+              <a:srgbClr val="000000">
+                <a:alpha val="63000"/>
+              </a:srgbClr>
+            </a:outerShdw>
+          </a:effectLst>
+        </a:effectStyle>
+      </a:effectStyleLst>
+      <a:bgFillStyleLst>
+        <a:solidFill>
+          <a:schemeClr val="phClr"/>
+        </a:solidFill>
+        <a:solidFill>
+          <a:schemeClr val="phClr">
+            <a:tint val="95000"/>
+            <a:satMod val="170000"/>
+          </a:schemeClr>
+        </a:solidFill>
+        <a:gradFill rotWithShape="1">
+          <a:gsLst>
+            <a:gs pos="0">
+              <a:schemeClr val="phClr">
+                <a:tint val="93000"/>
+                <a:satMod val="150000"/>
+                <a:shade val="98000"/>
+                <a:lumMod val="102000"/>
+              </a:schemeClr>
+            </a:gs>
+            <a:gs pos="50000">
+              <a:schemeClr val="phClr">
+                <a:tint val="98000"/>
+                <a:satMod val="130000"/>
+                <a:shade val="90000"/>
+                <a:lumMod val="103000"/>
+              </a:schemeClr>
+            </a:gs>
+            <a:gs pos="100000">
+              <a:schemeClr val="phClr">
+                <a:shade val="63000"/>
+                <a:satMod val="120000"/>
+              </a:schemeClr>
+            </a:gs>
+          </a:gsLst>
+          <a:lin ang="5400000" scaled="0"/>
+        </a:gradFill>
+      </a:bgFillStyleLst>
+    </a:fmtScheme>
+  </a:themeElements>
+  <a:objectDefaults>
+    <a:lnDef>
+      <a:spPr/>
+      <a:bodyPr/>
+      <a:lstStyle/>
+      <a:style>
+        <a:lnRef idx="2">
+          <a:schemeClr val="accent1"/>
+        </a:lnRef>
+        <a:fillRef idx="0">
+          <a:schemeClr val="accent1"/>
+        </a:fillRef>
+        <a:effectRef idx="1">
+          <a:schemeClr val="accent1"/>
+        </a:effectRef>
+        <a:fontRef idx="minor">
+          <a:schemeClr val="tx1"/>
+        </a:fontRef>
+      </a:style>
+    </a:lnDef>
+  </a:objectDefaults>
+  <a:extraClrSchemeLst/>
+  <a:extLst>
+    <a:ext uri="{05A4C25C-085E-4340-85A3-A5531E510DB2}">
+      <thm15:themeFamily xmlns:thm15="http://schemas.microsoft.com/office/thememl/2012/main" name="Office Theme" id="{2E142A2C-CD16-42D6-873A-C26D2A0506FA}" vid="{1BDDFF52-6CD6-40A5-AB3C-68EB2F1E4D0A}"/>
+    </a:ext>
+  </a:extLst>
+</a:theme>
 </file>
--- a/images/icu.pptx
+++ b/images/icu.pptx
@@ -5,7 +5,7 @@
     <p:sldMasterId id="2147483648" r:id="rId1"/>
   </p:sldMasterIdLst>
   <p:notesMasterIdLst>
-    <p:notesMasterId r:id="rId8"/>
+    <p:notesMasterId r:id="rId9"/>
   </p:notesMasterIdLst>
   <p:sldIdLst>
     <p:sldId id="256" r:id="rId2"/>
@@ -14,6 +14,7 @@
     <p:sldId id="259" r:id="rId5"/>
     <p:sldId id="260" r:id="rId6"/>
     <p:sldId id="262" r:id="rId7"/>
+    <p:sldId id="263" r:id="rId8"/>
   </p:sldIdLst>
   <p:sldSz cx="12192000" cy="6858000"/>
   <p:notesSz cx="6858000" cy="9144000"/>
@@ -202,7 +203,7 @@
           <a:p>
             <a:fld id="{AD42B31F-4ABA-274F-9BB4-DA3A6583FDB8}" type="datetimeFigureOut">
               <a:rPr lang="en-US" smtClean="0"/>
-              <a:t>5/11/26</a:t>
+              <a:t>5/18/26</a:t>
             </a:fld>
             <a:endParaRPr lang="en-US"/>
           </a:p>
@@ -554,6 +555,114 @@
 </p:notes>
 </file>
 
+<file path=ppt/notesSlides/notesSlide2.xml><?xml version="1.0" encoding="utf-8"?>
+<p:notes xmlns:a="http://schemas.openxmlformats.org/drawingml/2006/main" xmlns:r="http://schemas.openxmlformats.org/officeDocument/2006/relationships" xmlns:p="http://schemas.openxmlformats.org/presentationml/2006/main">
+  <p:cSld>
+    <p:spTree>
+      <p:nvGrpSpPr>
+        <p:cNvPr id="1" name="">
+          <a:extLst>
+            <a:ext uri="{FF2B5EF4-FFF2-40B4-BE49-F238E27FC236}">
+              <a16:creationId xmlns:a16="http://schemas.microsoft.com/office/drawing/2014/main" id="{638BBEB6-1903-B4BF-7D57-D57AD1BE7E04}"/>
+            </a:ext>
+          </a:extLst>
+        </p:cNvPr>
+        <p:cNvGrpSpPr/>
+        <p:nvPr/>
+      </p:nvGrpSpPr>
+      <p:grpSpPr>
+        <a:xfrm>
+          <a:off x="0" y="0"/>
+          <a:ext cx="0" cy="0"/>
+          <a:chOff x="0" y="0"/>
+          <a:chExt cx="0" cy="0"/>
+        </a:xfrm>
+      </p:grpSpPr>
+      <p:sp>
+        <p:nvSpPr>
+          <p:cNvPr id="2" name="Slide Image Placeholder 1">
+            <a:extLst>
+              <a:ext uri="{FF2B5EF4-FFF2-40B4-BE49-F238E27FC236}">
+                <a16:creationId xmlns:a16="http://schemas.microsoft.com/office/drawing/2014/main" id="{B0FF4B89-E594-C0FC-FCED-F7DEFB01083A}"/>
+              </a:ext>
+            </a:extLst>
+          </p:cNvPr>
+          <p:cNvSpPr>
+            <a:spLocks noGrp="1" noRot="1" noChangeAspect="1"/>
+          </p:cNvSpPr>
+          <p:nvPr>
+            <p:ph type="sldImg"/>
+          </p:nvPr>
+        </p:nvSpPr>
+        <p:spPr/>
+      </p:sp>
+      <p:sp>
+        <p:nvSpPr>
+          <p:cNvPr id="3" name="Notes Placeholder 2">
+            <a:extLst>
+              <a:ext uri="{FF2B5EF4-FFF2-40B4-BE49-F238E27FC236}">
+                <a16:creationId xmlns:a16="http://schemas.microsoft.com/office/drawing/2014/main" id="{834BA25C-9143-3D7E-9E54-E5C421F145FC}"/>
+              </a:ext>
+            </a:extLst>
+          </p:cNvPr>
+          <p:cNvSpPr>
+            <a:spLocks noGrp="1"/>
+          </p:cNvSpPr>
+          <p:nvPr>
+            <p:ph type="body" idx="1"/>
+          </p:nvPr>
+        </p:nvSpPr>
+        <p:spPr/>
+        <p:txBody>
+          <a:bodyPr/>
+          <a:lstStyle/>
+          <a:p>
+            <a:endParaRPr lang="en-US" dirty="0"/>
+          </a:p>
+        </p:txBody>
+      </p:sp>
+      <p:sp>
+        <p:nvSpPr>
+          <p:cNvPr id="4" name="Slide Number Placeholder 3">
+            <a:extLst>
+              <a:ext uri="{FF2B5EF4-FFF2-40B4-BE49-F238E27FC236}">
+                <a16:creationId xmlns:a16="http://schemas.microsoft.com/office/drawing/2014/main" id="{DBF7D8E3-4891-3E7D-DA0C-F42A0ADBE160}"/>
+              </a:ext>
+            </a:extLst>
+          </p:cNvPr>
+          <p:cNvSpPr>
+            <a:spLocks noGrp="1"/>
+          </p:cNvSpPr>
+          <p:nvPr>
+            <p:ph type="sldNum" sz="quarter" idx="5"/>
+          </p:nvPr>
+        </p:nvSpPr>
+        <p:spPr/>
+        <p:txBody>
+          <a:bodyPr/>
+          <a:lstStyle/>
+          <a:p>
+            <a:fld id="{C0ECF21E-4684-E148-81FF-D3B1FD823314}" type="slidenum">
+              <a:rPr lang="en-US" smtClean="0"/>
+              <a:t>7</a:t>
+            </a:fld>
+            <a:endParaRPr lang="en-US"/>
+          </a:p>
+        </p:txBody>
+      </p:sp>
+    </p:spTree>
+    <p:extLst>
+      <p:ext uri="{BB962C8B-B14F-4D97-AF65-F5344CB8AC3E}">
+        <p14:creationId xmlns:p14="http://schemas.microsoft.com/office/powerpoint/2010/main" val="3659913339"/>
+      </p:ext>
+    </p:extLst>
+  </p:cSld>
+  <p:clrMapOvr>
+    <a:masterClrMapping/>
+  </p:clrMapOvr>
+</p:notes>
+</file>
+
 <file path=ppt/slideLayouts/slideLayout1.xml><?xml version="1.0" encoding="utf-8"?>
 <p:sldLayout xmlns:a="http://schemas.openxmlformats.org/drawingml/2006/main" xmlns:r="http://schemas.openxmlformats.org/officeDocument/2006/relationships" xmlns:p="http://schemas.openxmlformats.org/presentationml/2006/main" type="title" preserve="1">
   <p:cSld name="Title Slide">
@@ -703,7 +812,7 @@
           <a:p>
             <a:fld id="{0D21F05F-ACFB-0C4D-9827-53BE568178E4}" type="datetimeFigureOut">
               <a:rPr lang="en-US" smtClean="0"/>
-              <a:t>5/11/26</a:t>
+              <a:t>5/18/26</a:t>
             </a:fld>
             <a:endParaRPr lang="en-US"/>
           </a:p>
@@ -903,7 +1012,7 @@
           <a:p>
             <a:fld id="{0D21F05F-ACFB-0C4D-9827-53BE568178E4}" type="datetimeFigureOut">
               <a:rPr lang="en-US" smtClean="0"/>
-              <a:t>5/11/26</a:t>
+              <a:t>5/18/26</a:t>
             </a:fld>
             <a:endParaRPr lang="en-US"/>
           </a:p>
@@ -1113,7 +1222,7 @@
           <a:p>
             <a:fld id="{0D21F05F-ACFB-0C4D-9827-53BE568178E4}" type="datetimeFigureOut">
               <a:rPr lang="en-US" smtClean="0"/>
-              <a:t>5/11/26</a:t>
+              <a:t>5/18/26</a:t>
             </a:fld>
             <a:endParaRPr lang="en-US"/>
           </a:p>
@@ -1313,7 +1422,7 @@
           <a:p>
             <a:fld id="{0D21F05F-ACFB-0C4D-9827-53BE568178E4}" type="datetimeFigureOut">
               <a:rPr lang="en-US" smtClean="0"/>
-              <a:t>5/11/26</a:t>
+              <a:t>5/18/26</a:t>
             </a:fld>
             <a:endParaRPr lang="en-US"/>
           </a:p>
@@ -1589,7 +1698,7 @@
           <a:p>
             <a:fld id="{0D21F05F-ACFB-0C4D-9827-53BE568178E4}" type="datetimeFigureOut">
               <a:rPr lang="en-US" smtClean="0"/>
-              <a:t>5/11/26</a:t>
+              <a:t>5/18/26</a:t>
             </a:fld>
             <a:endParaRPr lang="en-US"/>
           </a:p>
@@ -1857,7 +1966,7 @@
           <a:p>
             <a:fld id="{0D21F05F-ACFB-0C4D-9827-53BE568178E4}" type="datetimeFigureOut">
               <a:rPr lang="en-US" smtClean="0"/>
-              <a:t>5/11/26</a:t>
+              <a:t>5/18/26</a:t>
             </a:fld>
             <a:endParaRPr lang="en-US"/>
           </a:p>
@@ -2272,7 +2381,7 @@
           <a:p>
             <a:fld id="{0D21F05F-ACFB-0C4D-9827-53BE568178E4}" type="datetimeFigureOut">
               <a:rPr lang="en-US" smtClean="0"/>
-              <a:t>5/11/26</a:t>
+              <a:t>5/18/26</a:t>
             </a:fld>
             <a:endParaRPr lang="en-US"/>
           </a:p>
@@ -2414,7 +2523,7 @@
           <a:p>
             <a:fld id="{0D21F05F-ACFB-0C4D-9827-53BE568178E4}" type="datetimeFigureOut">
               <a:rPr lang="en-US" smtClean="0"/>
-              <a:t>5/11/26</a:t>
+              <a:t>5/18/26</a:t>
             </a:fld>
             <a:endParaRPr lang="en-US"/>
           </a:p>
@@ -2527,7 +2636,7 @@
           <a:p>
             <a:fld id="{0D21F05F-ACFB-0C4D-9827-53BE568178E4}" type="datetimeFigureOut">
               <a:rPr lang="en-US" smtClean="0"/>
-              <a:t>5/11/26</a:t>
+              <a:t>5/18/26</a:t>
             </a:fld>
             <a:endParaRPr lang="en-US"/>
           </a:p>
@@ -2840,7 +2949,7 @@
           <a:p>
             <a:fld id="{0D21F05F-ACFB-0C4D-9827-53BE568178E4}" type="datetimeFigureOut">
               <a:rPr lang="en-US" smtClean="0"/>
-              <a:t>5/11/26</a:t>
+              <a:t>5/18/26</a:t>
             </a:fld>
             <a:endParaRPr lang="en-US"/>
           </a:p>
@@ -3129,7 +3238,7 @@
           <a:p>
             <a:fld id="{0D21F05F-ACFB-0C4D-9827-53BE568178E4}" type="datetimeFigureOut">
               <a:rPr lang="en-US" smtClean="0"/>
-              <a:t>5/11/26</a:t>
+              <a:t>5/18/26</a:t>
             </a:fld>
             <a:endParaRPr lang="en-US"/>
           </a:p>
@@ -3372,7 +3481,7 @@
           <a:p>
             <a:fld id="{0D21F05F-ACFB-0C4D-9827-53BE568178E4}" type="datetimeFigureOut">
               <a:rPr lang="en-US" smtClean="0"/>
-              <a:t>5/11/26</a:t>
+              <a:t>5/18/26</a:t>
             </a:fld>
             <a:endParaRPr lang="en-US"/>
           </a:p>
@@ -3791,10 +3900,10 @@
       </p:grpSpPr>
       <p:grpSp>
         <p:nvGrpSpPr>
-          <p:cNvPr id="16" name="Group 15">
-            <a:extLst>
-              <a:ext uri="{FF2B5EF4-FFF2-40B4-BE49-F238E27FC236}">
-                <a16:creationId xmlns:a16="http://schemas.microsoft.com/office/drawing/2014/main" id="{7FDD478E-B191-BEBF-B7F5-500E150B8800}"/>
+          <p:cNvPr id="8" name="Group 7">
+            <a:extLst>
+              <a:ext uri="{FF2B5EF4-FFF2-40B4-BE49-F238E27FC236}">
+                <a16:creationId xmlns:a16="http://schemas.microsoft.com/office/drawing/2014/main" id="{7819292F-E7D8-28A1-7327-66AE9B1ADB47}"/>
               </a:ext>
             </a:extLst>
           </p:cNvPr>
@@ -4310,7 +4419,7 @@
           </p:blipFill>
           <p:spPr>
             <a:xfrm>
-              <a:off x="709596" y="3929217"/>
+              <a:off x="709596" y="3974373"/>
               <a:ext cx="634696" cy="634696"/>
             </a:xfrm>
             <a:prstGeom prst="rect">
@@ -4345,7 +4454,7 @@
           </p:blipFill>
           <p:spPr>
             <a:xfrm>
-              <a:off x="1775428" y="3929217"/>
+              <a:off x="1775428" y="3974373"/>
               <a:ext cx="634696" cy="634696"/>
             </a:xfrm>
             <a:prstGeom prst="rect">
@@ -4380,7 +4489,7 @@
           </p:blipFill>
           <p:spPr>
             <a:xfrm>
-              <a:off x="709596" y="4768306"/>
+              <a:off x="709596" y="4813462"/>
               <a:ext cx="634696" cy="634696"/>
             </a:xfrm>
             <a:prstGeom prst="rect">
@@ -4415,7 +4524,7 @@
           </p:blipFill>
           <p:spPr>
             <a:xfrm>
-              <a:off x="1775428" y="4768306"/>
+              <a:off x="1775428" y="4813462"/>
               <a:ext cx="634696" cy="634696"/>
             </a:xfrm>
             <a:prstGeom prst="rect">
@@ -5115,7 +5224,7 @@
           </p:blipFill>
           <p:spPr>
             <a:xfrm>
-              <a:off x="9781876" y="4122861"/>
+              <a:off x="9781876" y="4190595"/>
               <a:ext cx="634696" cy="634696"/>
             </a:xfrm>
             <a:prstGeom prst="rect">
@@ -5150,7 +5259,7 @@
           </p:blipFill>
           <p:spPr>
             <a:xfrm>
-              <a:off x="10847708" y="4122861"/>
+              <a:off x="10847708" y="4190595"/>
               <a:ext cx="634696" cy="634696"/>
             </a:xfrm>
             <a:prstGeom prst="rect">
@@ -5185,7 +5294,7 @@
           </p:blipFill>
           <p:spPr>
             <a:xfrm>
-              <a:off x="9781876" y="4961950"/>
+              <a:off x="9781876" y="5029684"/>
               <a:ext cx="634696" cy="634696"/>
             </a:xfrm>
             <a:prstGeom prst="rect">
@@ -5220,7 +5329,7 @@
           </p:blipFill>
           <p:spPr>
             <a:xfrm>
-              <a:off x="10847708" y="4961950"/>
+              <a:off x="10847708" y="5029684"/>
               <a:ext cx="634696" cy="634696"/>
             </a:xfrm>
             <a:prstGeom prst="rect">
@@ -5774,6 +5883,94 @@
             </a:p>
           </p:txBody>
         </p:sp>
+        <p:cxnSp>
+          <p:nvCxnSpPr>
+            <p:cNvPr id="3" name="Straight Connector 2">
+              <a:extLst>
+                <a:ext uri="{FF2B5EF4-FFF2-40B4-BE49-F238E27FC236}">
+                  <a16:creationId xmlns:a16="http://schemas.microsoft.com/office/drawing/2014/main" id="{C62E2935-6100-EB7C-8087-4EE2E2063A44}"/>
+                </a:ext>
+              </a:extLst>
+            </p:cNvPr>
+            <p:cNvCxnSpPr>
+              <a:cxnSpLocks/>
+            </p:cNvCxnSpPr>
+            <p:nvPr/>
+          </p:nvCxnSpPr>
+          <p:spPr>
+            <a:xfrm>
+              <a:off x="225912" y="3803847"/>
+              <a:ext cx="1456132" cy="0"/>
+            </a:xfrm>
+            <a:prstGeom prst="line">
+              <a:avLst/>
+            </a:prstGeom>
+            <a:ln w="47625">
+              <a:solidFill>
+                <a:schemeClr val="tx1"/>
+              </a:solidFill>
+              <a:prstDash val="sysDot"/>
+            </a:ln>
+          </p:spPr>
+          <p:style>
+            <a:lnRef idx="2">
+              <a:schemeClr val="accent1"/>
+            </a:lnRef>
+            <a:fillRef idx="0">
+              <a:schemeClr val="accent1"/>
+            </a:fillRef>
+            <a:effectRef idx="1">
+              <a:schemeClr val="accent1"/>
+            </a:effectRef>
+            <a:fontRef idx="minor">
+              <a:schemeClr val="tx1"/>
+            </a:fontRef>
+          </p:style>
+        </p:cxnSp>
+        <p:cxnSp>
+          <p:nvCxnSpPr>
+            <p:cNvPr id="7" name="Straight Connector 6">
+              <a:extLst>
+                <a:ext uri="{FF2B5EF4-FFF2-40B4-BE49-F238E27FC236}">
+                  <a16:creationId xmlns:a16="http://schemas.microsoft.com/office/drawing/2014/main" id="{95577FF9-BB3E-68FD-ED66-EF09EB425FAB}"/>
+                </a:ext>
+              </a:extLst>
+            </p:cNvPr>
+            <p:cNvCxnSpPr>
+              <a:cxnSpLocks/>
+            </p:cNvCxnSpPr>
+            <p:nvPr/>
+          </p:nvCxnSpPr>
+          <p:spPr>
+            <a:xfrm>
+              <a:off x="9267714" y="4122861"/>
+              <a:ext cx="1456132" cy="0"/>
+            </a:xfrm>
+            <a:prstGeom prst="line">
+              <a:avLst/>
+            </a:prstGeom>
+            <a:ln w="47625">
+              <a:solidFill>
+                <a:schemeClr val="tx1"/>
+              </a:solidFill>
+              <a:prstDash val="sysDot"/>
+            </a:ln>
+          </p:spPr>
+          <p:style>
+            <a:lnRef idx="2">
+              <a:schemeClr val="accent1"/>
+            </a:lnRef>
+            <a:fillRef idx="0">
+              <a:schemeClr val="accent1"/>
+            </a:fillRef>
+            <a:effectRef idx="1">
+              <a:schemeClr val="accent1"/>
+            </a:effectRef>
+            <a:fontRef idx="minor">
+              <a:schemeClr val="tx1"/>
+            </a:fontRef>
+          </p:style>
+        </p:cxnSp>
       </p:grpSp>
     </p:spTree>
     <p:extLst>
@@ -11336,10 +11533,10 @@
       </p:grpSpPr>
       <p:grpSp>
         <p:nvGrpSpPr>
-          <p:cNvPr id="79" name="Group 78">
-            <a:extLst>
-              <a:ext uri="{FF2B5EF4-FFF2-40B4-BE49-F238E27FC236}">
-                <a16:creationId xmlns:a16="http://schemas.microsoft.com/office/drawing/2014/main" id="{79285C56-49F7-4A42-B644-B32941F2B6CC}"/>
+          <p:cNvPr id="5" name="Group 4">
+            <a:extLst>
+              <a:ext uri="{FF2B5EF4-FFF2-40B4-BE49-F238E27FC236}">
+                <a16:creationId xmlns:a16="http://schemas.microsoft.com/office/drawing/2014/main" id="{F6595D03-EB6E-3E3E-BD60-5E2D5286FCE4}"/>
               </a:ext>
             </a:extLst>
           </p:cNvPr>
@@ -12015,8 +12212,8 @@
           </p:nvSpPr>
           <p:spPr>
             <a:xfrm>
-              <a:off x="564471" y="4402744"/>
-              <a:ext cx="8726283" cy="1216301"/>
+              <a:off x="519315" y="4402744"/>
+              <a:ext cx="4413929" cy="1216301"/>
             </a:xfrm>
             <a:prstGeom prst="roundRect">
               <a:avLst>
@@ -12074,7 +12271,7 @@
           <p:spPr>
             <a:xfrm>
               <a:off x="558779" y="2753115"/>
-              <a:ext cx="8726283" cy="1216301"/>
+              <a:ext cx="7772421" cy="1216301"/>
             </a:xfrm>
             <a:prstGeom prst="roundRect">
               <a:avLst>
@@ -12825,6 +13022,64 @@
                 <a:rPr lang="en-US" dirty="0"/>
                 <a:t>B16</a:t>
               </a:r>
+            </a:p>
+          </p:txBody>
+        </p:sp>
+        <p:sp>
+          <p:nvSpPr>
+            <p:cNvPr id="4" name="Rounded Rectangle 3">
+              <a:extLst>
+                <a:ext uri="{FF2B5EF4-FFF2-40B4-BE49-F238E27FC236}">
+                  <a16:creationId xmlns:a16="http://schemas.microsoft.com/office/drawing/2014/main" id="{3761E35C-EBFD-3737-12A0-192593EF7A58}"/>
+                </a:ext>
+              </a:extLst>
+            </p:cNvPr>
+            <p:cNvSpPr/>
+            <p:nvPr/>
+          </p:nvSpPr>
+          <p:spPr>
+            <a:xfrm>
+              <a:off x="5015752" y="4361056"/>
+              <a:ext cx="4413929" cy="1216301"/>
+            </a:xfrm>
+            <a:prstGeom prst="roundRect">
+              <a:avLst>
+                <a:gd name="adj" fmla="val 36591"/>
+              </a:avLst>
+            </a:prstGeom>
+            <a:solidFill>
+              <a:srgbClr val="00B0F0">
+                <a:alpha val="25714"/>
+              </a:srgbClr>
+            </a:solidFill>
+            <a:ln w="34925">
+              <a:solidFill>
+                <a:srgbClr val="0070C0"/>
+              </a:solidFill>
+            </a:ln>
+          </p:spPr>
+          <p:style>
+            <a:lnRef idx="2">
+              <a:schemeClr val="accent1">
+                <a:shade val="15000"/>
+              </a:schemeClr>
+            </a:lnRef>
+            <a:fillRef idx="1">
+              <a:schemeClr val="accent1"/>
+            </a:fillRef>
+            <a:effectRef idx="0">
+              <a:schemeClr val="accent1"/>
+            </a:effectRef>
+            <a:fontRef idx="minor">
+              <a:schemeClr val="lt1"/>
+            </a:fontRef>
+          </p:style>
+          <p:txBody>
+            <a:bodyPr rtlCol="0" anchor="ctr"/>
+            <a:lstStyle/>
+            <a:p>
+              <a:pPr algn="ctr"/>
+              <a:endParaRPr lang="en-US"/>
             </a:p>
           </p:txBody>
         </p:sp>
@@ -12867,10 +13122,10 @@
       </p:grpSpPr>
       <p:grpSp>
         <p:nvGrpSpPr>
-          <p:cNvPr id="238" name="Group 237">
-            <a:extLst>
-              <a:ext uri="{FF2B5EF4-FFF2-40B4-BE49-F238E27FC236}">
-                <a16:creationId xmlns:a16="http://schemas.microsoft.com/office/drawing/2014/main" id="{B52557F3-EB90-2A9C-43C7-ABD8A4B9D17D}"/>
+          <p:cNvPr id="4" name="Group 3">
+            <a:extLst>
+              <a:ext uri="{FF2B5EF4-FFF2-40B4-BE49-F238E27FC236}">
+                <a16:creationId xmlns:a16="http://schemas.microsoft.com/office/drawing/2014/main" id="{1A4A71B0-9642-F627-57C5-ED44E2AD9A09}"/>
               </a:ext>
             </a:extLst>
           </p:cNvPr>
@@ -12954,8 +13209,8 @@
           </p:nvSpPr>
           <p:spPr>
             <a:xfrm>
-              <a:off x="634029" y="1367293"/>
-              <a:ext cx="8964403" cy="2097152"/>
+              <a:off x="667897" y="1373741"/>
+              <a:ext cx="7791352" cy="2097152"/>
             </a:xfrm>
             <a:prstGeom prst="roundRect">
               <a:avLst>
@@ -13012,8 +13267,8 @@
           </p:nvSpPr>
           <p:spPr>
             <a:xfrm>
-              <a:off x="634029" y="3635462"/>
-              <a:ext cx="8964403" cy="2097152"/>
+              <a:off x="667897" y="3635462"/>
+              <a:ext cx="4420820" cy="2097152"/>
             </a:xfrm>
             <a:prstGeom prst="roundRect">
               <a:avLst>
@@ -13223,7 +13478,7 @@
           </p:blipFill>
           <p:spPr>
             <a:xfrm>
-              <a:off x="5307934" y="3977496"/>
+              <a:off x="5375668" y="3977496"/>
               <a:ext cx="634696" cy="634696"/>
             </a:xfrm>
             <a:prstGeom prst="rect">
@@ -13258,7 +13513,7 @@
           </p:blipFill>
           <p:spPr>
             <a:xfrm>
-              <a:off x="6373766" y="3977496"/>
+              <a:off x="6441500" y="3977496"/>
               <a:ext cx="634696" cy="634696"/>
             </a:xfrm>
             <a:prstGeom prst="rect">
@@ -13293,7 +13548,7 @@
           </p:blipFill>
           <p:spPr>
             <a:xfrm>
-              <a:off x="7483099" y="3977496"/>
+              <a:off x="7550833" y="3977496"/>
               <a:ext cx="634696" cy="634696"/>
             </a:xfrm>
             <a:prstGeom prst="rect">
@@ -13328,7 +13583,7 @@
           </p:blipFill>
           <p:spPr>
             <a:xfrm>
-              <a:off x="8548931" y="3977496"/>
+              <a:off x="8616665" y="3977496"/>
               <a:ext cx="634696" cy="634696"/>
             </a:xfrm>
             <a:prstGeom prst="rect">
@@ -13490,7 +13745,7 @@
           </p:nvSpPr>
           <p:spPr>
             <a:xfrm>
-              <a:off x="5353803" y="3827569"/>
+              <a:off x="5421537" y="3827569"/>
               <a:ext cx="570990" cy="369332"/>
             </a:xfrm>
             <a:prstGeom prst="rect">
@@ -13525,7 +13780,7 @@
           </p:nvSpPr>
           <p:spPr>
             <a:xfrm>
-              <a:off x="6415608" y="3827569"/>
+              <a:off x="6483342" y="3827569"/>
               <a:ext cx="570990" cy="369332"/>
             </a:xfrm>
             <a:prstGeom prst="rect">
@@ -13560,7 +13815,7 @@
           </p:nvSpPr>
           <p:spPr>
             <a:xfrm>
-              <a:off x="7482268" y="3827569"/>
+              <a:off x="7550002" y="3827569"/>
               <a:ext cx="570990" cy="369332"/>
             </a:xfrm>
             <a:prstGeom prst="rect">
@@ -13595,7 +13850,7 @@
           </p:nvSpPr>
           <p:spPr>
             <a:xfrm>
-              <a:off x="8571828" y="3827569"/>
+              <a:off x="8639562" y="3827569"/>
               <a:ext cx="570990" cy="369332"/>
             </a:xfrm>
             <a:prstGeom prst="rect">
@@ -13777,7 +14032,7 @@
           </p:nvSpPr>
           <p:spPr>
             <a:xfrm rot="16200000">
-              <a:off x="6506447" y="4161658"/>
+              <a:off x="6574181" y="4161658"/>
               <a:ext cx="369333" cy="901063"/>
             </a:xfrm>
             <a:prstGeom prst="leftBracket">
@@ -13826,7 +14081,7 @@
           </p:nvSpPr>
           <p:spPr>
             <a:xfrm rot="16200000">
-              <a:off x="8725114" y="4161658"/>
+              <a:off x="8792848" y="4161658"/>
               <a:ext cx="369333" cy="901063"/>
             </a:xfrm>
             <a:prstGeom prst="leftBracket">
@@ -13961,7 +14216,7 @@
           </p:blipFill>
           <p:spPr>
             <a:xfrm>
-              <a:off x="6382675" y="4851763"/>
+              <a:off x="6450409" y="4851763"/>
               <a:ext cx="636856" cy="636856"/>
             </a:xfrm>
             <a:prstGeom prst="rect">
@@ -14033,7 +14288,7 @@
           </p:blipFill>
           <p:spPr>
             <a:xfrm>
-              <a:off x="8591352" y="4842814"/>
+              <a:off x="8659086" y="4842814"/>
               <a:ext cx="636856" cy="636856"/>
             </a:xfrm>
             <a:prstGeom prst="rect">
@@ -15212,11 +15467,1997 @@
             </a:prstGeom>
           </p:spPr>
         </p:pic>
+        <p:sp>
+          <p:nvSpPr>
+            <p:cNvPr id="2" name="Rounded Rectangle 1">
+              <a:extLst>
+                <a:ext uri="{FF2B5EF4-FFF2-40B4-BE49-F238E27FC236}">
+                  <a16:creationId xmlns:a16="http://schemas.microsoft.com/office/drawing/2014/main" id="{9F7A5CA0-D1B4-5B79-524D-9ED242F9E643}"/>
+                </a:ext>
+              </a:extLst>
+            </p:cNvPr>
+            <p:cNvSpPr/>
+            <p:nvPr/>
+          </p:nvSpPr>
+          <p:spPr>
+            <a:xfrm>
+              <a:off x="5255767" y="3614372"/>
+              <a:ext cx="4305899" cy="2097152"/>
+            </a:xfrm>
+            <a:prstGeom prst="roundRect">
+              <a:avLst>
+                <a:gd name="adj" fmla="val 21519"/>
+              </a:avLst>
+            </a:prstGeom>
+            <a:solidFill>
+              <a:srgbClr val="00B0F0">
+                <a:alpha val="25714"/>
+              </a:srgbClr>
+            </a:solidFill>
+            <a:ln w="34925">
+              <a:solidFill>
+                <a:srgbClr val="0070C0"/>
+              </a:solidFill>
+            </a:ln>
+          </p:spPr>
+          <p:style>
+            <a:lnRef idx="2">
+              <a:schemeClr val="accent1">
+                <a:shade val="15000"/>
+              </a:schemeClr>
+            </a:lnRef>
+            <a:fillRef idx="1">
+              <a:schemeClr val="accent1"/>
+            </a:fillRef>
+            <a:effectRef idx="0">
+              <a:schemeClr val="accent1"/>
+            </a:effectRef>
+            <a:fontRef idx="minor">
+              <a:schemeClr val="lt1"/>
+            </a:fontRef>
+          </p:style>
+          <p:txBody>
+            <a:bodyPr rtlCol="0" anchor="ctr"/>
+            <a:lstStyle/>
+            <a:p>
+              <a:pPr algn="ctr"/>
+              <a:endParaRPr lang="en-US"/>
+            </a:p>
+          </p:txBody>
+        </p:sp>
       </p:grpSp>
     </p:spTree>
     <p:extLst>
       <p:ext uri="{BB962C8B-B14F-4D97-AF65-F5344CB8AC3E}">
         <p14:creationId xmlns:p14="http://schemas.microsoft.com/office/powerpoint/2010/main" val="1764696701"/>
+      </p:ext>
+    </p:extLst>
+  </p:cSld>
+  <p:clrMapOvr>
+    <a:masterClrMapping/>
+  </p:clrMapOvr>
+</p:sld>
+</file>
+
+<file path=ppt/slides/slide7.xml><?xml version="1.0" encoding="utf-8"?>
+<p:sld xmlns:a="http://schemas.openxmlformats.org/drawingml/2006/main" xmlns:r="http://schemas.openxmlformats.org/officeDocument/2006/relationships" xmlns:p="http://schemas.openxmlformats.org/presentationml/2006/main">
+  <p:cSld>
+    <p:spTree>
+      <p:nvGrpSpPr>
+        <p:cNvPr id="1" name="">
+          <a:extLst>
+            <a:ext uri="{FF2B5EF4-FFF2-40B4-BE49-F238E27FC236}">
+              <a16:creationId xmlns:a16="http://schemas.microsoft.com/office/drawing/2014/main" id="{7C29DA9A-4AEF-F740-D1B1-0661DC705954}"/>
+            </a:ext>
+          </a:extLst>
+        </p:cNvPr>
+        <p:cNvGrpSpPr/>
+        <p:nvPr/>
+      </p:nvGrpSpPr>
+      <p:grpSpPr>
+        <a:xfrm>
+          <a:off x="0" y="0"/>
+          <a:ext cx="0" cy="0"/>
+          <a:chOff x="0" y="0"/>
+          <a:chExt cx="0" cy="0"/>
+        </a:xfrm>
+      </p:grpSpPr>
+      <p:grpSp>
+        <p:nvGrpSpPr>
+          <p:cNvPr id="151" name="Group 150">
+            <a:extLst>
+              <a:ext uri="{FF2B5EF4-FFF2-40B4-BE49-F238E27FC236}">
+                <a16:creationId xmlns:a16="http://schemas.microsoft.com/office/drawing/2014/main" id="{FEFE4444-288E-9F92-35A8-814AA1E39F34}"/>
+              </a:ext>
+            </a:extLst>
+          </p:cNvPr>
+          <p:cNvGrpSpPr/>
+          <p:nvPr/>
+        </p:nvGrpSpPr>
+        <p:grpSpPr>
+          <a:xfrm>
+            <a:off x="84476" y="371799"/>
+            <a:ext cx="16750422" cy="2107707"/>
+            <a:chOff x="84476" y="371799"/>
+            <a:chExt cx="16750422" cy="2107707"/>
+          </a:xfrm>
+        </p:grpSpPr>
+        <p:sp>
+          <p:nvSpPr>
+            <p:cNvPr id="113" name="Rounded Rectangle 112">
+              <a:extLst>
+                <a:ext uri="{FF2B5EF4-FFF2-40B4-BE49-F238E27FC236}">
+                  <a16:creationId xmlns:a16="http://schemas.microsoft.com/office/drawing/2014/main" id="{A1540FC9-4ADD-FA5C-B4EC-26C61119D191}"/>
+                </a:ext>
+              </a:extLst>
+            </p:cNvPr>
+            <p:cNvSpPr/>
+            <p:nvPr/>
+          </p:nvSpPr>
+          <p:spPr>
+            <a:xfrm>
+              <a:off x="84476" y="371799"/>
+              <a:ext cx="7791352" cy="2097152"/>
+            </a:xfrm>
+            <a:prstGeom prst="roundRect">
+              <a:avLst>
+                <a:gd name="adj" fmla="val 21519"/>
+              </a:avLst>
+            </a:prstGeom>
+            <a:solidFill>
+              <a:srgbClr val="00B0F0">
+                <a:alpha val="25714"/>
+              </a:srgbClr>
+            </a:solidFill>
+            <a:ln w="34925">
+              <a:solidFill>
+                <a:srgbClr val="0070C0"/>
+              </a:solidFill>
+            </a:ln>
+          </p:spPr>
+          <p:style>
+            <a:lnRef idx="2">
+              <a:schemeClr val="accent1">
+                <a:shade val="15000"/>
+              </a:schemeClr>
+            </a:lnRef>
+            <a:fillRef idx="1">
+              <a:schemeClr val="accent1"/>
+            </a:fillRef>
+            <a:effectRef idx="0">
+              <a:schemeClr val="accent1"/>
+            </a:effectRef>
+            <a:fontRef idx="minor">
+              <a:schemeClr val="lt1"/>
+            </a:fontRef>
+          </p:style>
+          <p:txBody>
+            <a:bodyPr rtlCol="0" anchor="ctr"/>
+            <a:lstStyle/>
+            <a:p>
+              <a:pPr algn="ctr"/>
+              <a:endParaRPr lang="en-US"/>
+            </a:p>
+          </p:txBody>
+        </p:sp>
+        <p:pic>
+          <p:nvPicPr>
+            <p:cNvPr id="87" name="Graphic 86" descr="Bed with solid fill">
+              <a:extLst>
+                <a:ext uri="{FF2B5EF4-FFF2-40B4-BE49-F238E27FC236}">
+                  <a16:creationId xmlns:a16="http://schemas.microsoft.com/office/drawing/2014/main" id="{9386ABEC-692D-DC16-8CE3-86DB51B9C38A}"/>
+                </a:ext>
+              </a:extLst>
+            </p:cNvPr>
+            <p:cNvPicPr>
+              <a:picLocks noChangeAspect="1"/>
+            </p:cNvPicPr>
+            <p:nvPr/>
+          </p:nvPicPr>
+          <p:blipFill>
+            <a:blip>
+              <a:extLst>
+                <a:ext uri="{96DAC541-7B7A-43D3-8B79-37D633B846F1}">
+                  <asvg:svgBlip xmlns:asvg="http://schemas.microsoft.com/office/drawing/2016/SVG/main" r:embed="rId3"/>
+                </a:ext>
+              </a:extLst>
+            </a:blip>
+            <a:srcRect/>
+            <a:stretch/>
+          </p:blipFill>
+          <p:spPr>
+            <a:xfrm>
+              <a:off x="364115" y="707385"/>
+              <a:ext cx="634696" cy="634696"/>
+            </a:xfrm>
+            <a:prstGeom prst="rect">
+              <a:avLst/>
+            </a:prstGeom>
+          </p:spPr>
+        </p:pic>
+        <p:pic>
+          <p:nvPicPr>
+            <p:cNvPr id="88" name="Graphic 87" descr="Sleep with solid fill">
+              <a:extLst>
+                <a:ext uri="{FF2B5EF4-FFF2-40B4-BE49-F238E27FC236}">
+                  <a16:creationId xmlns:a16="http://schemas.microsoft.com/office/drawing/2014/main" id="{ACA9114A-50E6-3F9C-30AA-3DBF656020E9}"/>
+                </a:ext>
+              </a:extLst>
+            </p:cNvPr>
+            <p:cNvPicPr>
+              <a:picLocks noChangeAspect="1"/>
+            </p:cNvPicPr>
+            <p:nvPr/>
+          </p:nvPicPr>
+          <p:blipFill>
+            <a:blip>
+              <a:extLst>
+                <a:ext uri="{96DAC541-7B7A-43D3-8B79-37D633B846F1}">
+                  <asvg:svgBlip xmlns:asvg="http://schemas.microsoft.com/office/drawing/2016/SVG/main" r:embed="rId4"/>
+                </a:ext>
+              </a:extLst>
+            </a:blip>
+            <a:srcRect/>
+            <a:stretch/>
+          </p:blipFill>
+          <p:spPr>
+            <a:xfrm>
+              <a:off x="1429947" y="707385"/>
+              <a:ext cx="634696" cy="634696"/>
+            </a:xfrm>
+            <a:prstGeom prst="rect">
+              <a:avLst/>
+            </a:prstGeom>
+          </p:spPr>
+        </p:pic>
+        <p:pic>
+          <p:nvPicPr>
+            <p:cNvPr id="89" name="Graphic 88" descr="Sleep with solid fill">
+              <a:extLst>
+                <a:ext uri="{FF2B5EF4-FFF2-40B4-BE49-F238E27FC236}">
+                  <a16:creationId xmlns:a16="http://schemas.microsoft.com/office/drawing/2014/main" id="{7DE5CD83-1C46-15D6-E3D4-8B78B0E9C2D4}"/>
+                </a:ext>
+              </a:extLst>
+            </p:cNvPr>
+            <p:cNvPicPr>
+              <a:picLocks noChangeAspect="1"/>
+            </p:cNvPicPr>
+            <p:nvPr/>
+          </p:nvPicPr>
+          <p:blipFill>
+            <a:blip>
+              <a:extLst>
+                <a:ext uri="{96DAC541-7B7A-43D3-8B79-37D633B846F1}">
+                  <asvg:svgBlip xmlns:asvg="http://schemas.microsoft.com/office/drawing/2016/SVG/main" r:embed="rId5"/>
+                </a:ext>
+              </a:extLst>
+            </a:blip>
+            <a:srcRect/>
+            <a:stretch/>
+          </p:blipFill>
+          <p:spPr>
+            <a:xfrm>
+              <a:off x="2539280" y="707385"/>
+              <a:ext cx="634696" cy="634696"/>
+            </a:xfrm>
+            <a:prstGeom prst="rect">
+              <a:avLst/>
+            </a:prstGeom>
+          </p:spPr>
+        </p:pic>
+        <p:pic>
+          <p:nvPicPr>
+            <p:cNvPr id="90" name="Graphic 89" descr="Sleep with solid fill">
+              <a:extLst>
+                <a:ext uri="{FF2B5EF4-FFF2-40B4-BE49-F238E27FC236}">
+                  <a16:creationId xmlns:a16="http://schemas.microsoft.com/office/drawing/2014/main" id="{3DBDBF98-3A79-BE94-10D9-3224403209C6}"/>
+                </a:ext>
+              </a:extLst>
+            </p:cNvPr>
+            <p:cNvPicPr>
+              <a:picLocks noChangeAspect="1"/>
+            </p:cNvPicPr>
+            <p:nvPr/>
+          </p:nvPicPr>
+          <p:blipFill>
+            <a:blip>
+              <a:extLst>
+                <a:ext uri="{96DAC541-7B7A-43D3-8B79-37D633B846F1}">
+                  <asvg:svgBlip xmlns:asvg="http://schemas.microsoft.com/office/drawing/2016/SVG/main" r:embed="rId5"/>
+                </a:ext>
+              </a:extLst>
+            </a:blip>
+            <a:srcRect/>
+            <a:stretch/>
+          </p:blipFill>
+          <p:spPr>
+            <a:xfrm>
+              <a:off x="3605112" y="707385"/>
+              <a:ext cx="634696" cy="634696"/>
+            </a:xfrm>
+            <a:prstGeom prst="rect">
+              <a:avLst/>
+            </a:prstGeom>
+          </p:spPr>
+        </p:pic>
+        <p:pic>
+          <p:nvPicPr>
+            <p:cNvPr id="91" name="Graphic 90" descr="Bed with solid fill">
+              <a:extLst>
+                <a:ext uri="{FF2B5EF4-FFF2-40B4-BE49-F238E27FC236}">
+                  <a16:creationId xmlns:a16="http://schemas.microsoft.com/office/drawing/2014/main" id="{6A3E6F40-46C5-104D-FC8F-7013A1D557AE}"/>
+                </a:ext>
+              </a:extLst>
+            </p:cNvPr>
+            <p:cNvPicPr>
+              <a:picLocks noChangeAspect="1"/>
+            </p:cNvPicPr>
+            <p:nvPr/>
+          </p:nvPicPr>
+          <p:blipFill>
+            <a:blip>
+              <a:extLst>
+                <a:ext uri="{96DAC541-7B7A-43D3-8B79-37D633B846F1}">
+                  <asvg:svgBlip xmlns:asvg="http://schemas.microsoft.com/office/drawing/2016/SVG/main" r:embed="rId3"/>
+                </a:ext>
+              </a:extLst>
+            </a:blip>
+            <a:srcRect/>
+            <a:stretch/>
+          </p:blipFill>
+          <p:spPr>
+            <a:xfrm>
+              <a:off x="4724513" y="707385"/>
+              <a:ext cx="634696" cy="634696"/>
+            </a:xfrm>
+            <a:prstGeom prst="rect">
+              <a:avLst/>
+            </a:prstGeom>
+          </p:spPr>
+        </p:pic>
+        <p:pic>
+          <p:nvPicPr>
+            <p:cNvPr id="92" name="Graphic 91" descr="Sleep with solid fill">
+              <a:extLst>
+                <a:ext uri="{FF2B5EF4-FFF2-40B4-BE49-F238E27FC236}">
+                  <a16:creationId xmlns:a16="http://schemas.microsoft.com/office/drawing/2014/main" id="{A2CBB878-C5EA-7016-C24D-469F11982FF3}"/>
+                </a:ext>
+              </a:extLst>
+            </p:cNvPr>
+            <p:cNvPicPr>
+              <a:picLocks noChangeAspect="1"/>
+            </p:cNvPicPr>
+            <p:nvPr/>
+          </p:nvPicPr>
+          <p:blipFill>
+            <a:blip>
+              <a:extLst>
+                <a:ext uri="{96DAC541-7B7A-43D3-8B79-37D633B846F1}">
+                  <asvg:svgBlip xmlns:asvg="http://schemas.microsoft.com/office/drawing/2016/SVG/main" r:embed="rId6"/>
+                </a:ext>
+              </a:extLst>
+            </a:blip>
+            <a:srcRect/>
+            <a:stretch/>
+          </p:blipFill>
+          <p:spPr>
+            <a:xfrm>
+              <a:off x="5790345" y="707385"/>
+              <a:ext cx="634696" cy="634696"/>
+            </a:xfrm>
+            <a:prstGeom prst="rect">
+              <a:avLst/>
+            </a:prstGeom>
+          </p:spPr>
+        </p:pic>
+        <p:pic>
+          <p:nvPicPr>
+            <p:cNvPr id="93" name="Graphic 92" descr="Sleep with solid fill">
+              <a:extLst>
+                <a:ext uri="{FF2B5EF4-FFF2-40B4-BE49-F238E27FC236}">
+                  <a16:creationId xmlns:a16="http://schemas.microsoft.com/office/drawing/2014/main" id="{64EEB7D8-0889-631D-27B0-BC3E38B61367}"/>
+                </a:ext>
+              </a:extLst>
+            </p:cNvPr>
+            <p:cNvPicPr>
+              <a:picLocks noChangeAspect="1"/>
+            </p:cNvPicPr>
+            <p:nvPr/>
+          </p:nvPicPr>
+          <p:blipFill>
+            <a:blip>
+              <a:extLst>
+                <a:ext uri="{96DAC541-7B7A-43D3-8B79-37D633B846F1}">
+                  <asvg:svgBlip xmlns:asvg="http://schemas.microsoft.com/office/drawing/2016/SVG/main" r:embed="rId7"/>
+                </a:ext>
+              </a:extLst>
+            </a:blip>
+            <a:srcRect/>
+            <a:stretch/>
+          </p:blipFill>
+          <p:spPr>
+            <a:xfrm>
+              <a:off x="6899678" y="707385"/>
+              <a:ext cx="634696" cy="634696"/>
+            </a:xfrm>
+            <a:prstGeom prst="rect">
+              <a:avLst/>
+            </a:prstGeom>
+          </p:spPr>
+        </p:pic>
+        <p:sp>
+          <p:nvSpPr>
+            <p:cNvPr id="95" name="TextBox 94">
+              <a:extLst>
+                <a:ext uri="{FF2B5EF4-FFF2-40B4-BE49-F238E27FC236}">
+                  <a16:creationId xmlns:a16="http://schemas.microsoft.com/office/drawing/2014/main" id="{C824215A-B707-C9E4-B869-D290CF992198}"/>
+                </a:ext>
+              </a:extLst>
+            </p:cNvPr>
+            <p:cNvSpPr txBox="1"/>
+            <p:nvPr/>
+          </p:nvSpPr>
+          <p:spPr>
+            <a:xfrm>
+              <a:off x="432563" y="552869"/>
+              <a:ext cx="570990" cy="369332"/>
+            </a:xfrm>
+            <a:prstGeom prst="rect">
+              <a:avLst/>
+            </a:prstGeom>
+            <a:noFill/>
+          </p:spPr>
+          <p:txBody>
+            <a:bodyPr wrap="none" rtlCol="0">
+              <a:spAutoFit/>
+            </a:bodyPr>
+            <a:lstStyle/>
+            <a:p>
+              <a:r>
+                <a:rPr lang="en-US" dirty="0"/>
+                <a:t>B08</a:t>
+              </a:r>
+            </a:p>
+          </p:txBody>
+        </p:sp>
+        <p:sp>
+          <p:nvSpPr>
+            <p:cNvPr id="96" name="TextBox 95">
+              <a:extLst>
+                <a:ext uri="{FF2B5EF4-FFF2-40B4-BE49-F238E27FC236}">
+                  <a16:creationId xmlns:a16="http://schemas.microsoft.com/office/drawing/2014/main" id="{BFC54B12-C692-C3CD-B236-6FC8526CD127}"/>
+                </a:ext>
+              </a:extLst>
+            </p:cNvPr>
+            <p:cNvSpPr txBox="1"/>
+            <p:nvPr/>
+          </p:nvSpPr>
+          <p:spPr>
+            <a:xfrm>
+              <a:off x="1494368" y="552869"/>
+              <a:ext cx="570990" cy="369332"/>
+            </a:xfrm>
+            <a:prstGeom prst="rect">
+              <a:avLst/>
+            </a:prstGeom>
+            <a:noFill/>
+          </p:spPr>
+          <p:txBody>
+            <a:bodyPr wrap="none" rtlCol="0">
+              <a:spAutoFit/>
+            </a:bodyPr>
+            <a:lstStyle/>
+            <a:p>
+              <a:r>
+                <a:rPr lang="en-US" dirty="0"/>
+                <a:t>B09</a:t>
+              </a:r>
+            </a:p>
+          </p:txBody>
+        </p:sp>
+        <p:sp>
+          <p:nvSpPr>
+            <p:cNvPr id="97" name="TextBox 96">
+              <a:extLst>
+                <a:ext uri="{FF2B5EF4-FFF2-40B4-BE49-F238E27FC236}">
+                  <a16:creationId xmlns:a16="http://schemas.microsoft.com/office/drawing/2014/main" id="{C210A5F0-2679-8FA5-1250-14A64408EBFF}"/>
+                </a:ext>
+              </a:extLst>
+            </p:cNvPr>
+            <p:cNvSpPr txBox="1"/>
+            <p:nvPr/>
+          </p:nvSpPr>
+          <p:spPr>
+            <a:xfrm>
+              <a:off x="2561028" y="552869"/>
+              <a:ext cx="570990" cy="369332"/>
+            </a:xfrm>
+            <a:prstGeom prst="rect">
+              <a:avLst/>
+            </a:prstGeom>
+            <a:noFill/>
+          </p:spPr>
+          <p:txBody>
+            <a:bodyPr wrap="none" rtlCol="0">
+              <a:spAutoFit/>
+            </a:bodyPr>
+            <a:lstStyle/>
+            <a:p>
+              <a:r>
+                <a:rPr lang="en-US" dirty="0"/>
+                <a:t>B10</a:t>
+              </a:r>
+            </a:p>
+          </p:txBody>
+        </p:sp>
+        <p:sp>
+          <p:nvSpPr>
+            <p:cNvPr id="98" name="TextBox 97">
+              <a:extLst>
+                <a:ext uri="{FF2B5EF4-FFF2-40B4-BE49-F238E27FC236}">
+                  <a16:creationId xmlns:a16="http://schemas.microsoft.com/office/drawing/2014/main" id="{6A98972F-F41D-8BD9-BBC9-C1C4A8A2A62E}"/>
+                </a:ext>
+              </a:extLst>
+            </p:cNvPr>
+            <p:cNvSpPr txBox="1"/>
+            <p:nvPr/>
+          </p:nvSpPr>
+          <p:spPr>
+            <a:xfrm>
+              <a:off x="3650588" y="552869"/>
+              <a:ext cx="570990" cy="369332"/>
+            </a:xfrm>
+            <a:prstGeom prst="rect">
+              <a:avLst/>
+            </a:prstGeom>
+            <a:noFill/>
+          </p:spPr>
+          <p:txBody>
+            <a:bodyPr wrap="none" rtlCol="0">
+              <a:spAutoFit/>
+            </a:bodyPr>
+            <a:lstStyle/>
+            <a:p>
+              <a:r>
+                <a:rPr lang="en-US" dirty="0"/>
+                <a:t>B11</a:t>
+              </a:r>
+            </a:p>
+          </p:txBody>
+        </p:sp>
+        <p:sp>
+          <p:nvSpPr>
+            <p:cNvPr id="99" name="TextBox 98">
+              <a:extLst>
+                <a:ext uri="{FF2B5EF4-FFF2-40B4-BE49-F238E27FC236}">
+                  <a16:creationId xmlns:a16="http://schemas.microsoft.com/office/drawing/2014/main" id="{F1E2729E-D7BA-7607-952E-0FF750B6D6AC}"/>
+                </a:ext>
+              </a:extLst>
+            </p:cNvPr>
+            <p:cNvSpPr txBox="1"/>
+            <p:nvPr/>
+          </p:nvSpPr>
+          <p:spPr>
+            <a:xfrm>
+              <a:off x="4770382" y="557458"/>
+              <a:ext cx="570990" cy="369332"/>
+            </a:xfrm>
+            <a:prstGeom prst="rect">
+              <a:avLst/>
+            </a:prstGeom>
+            <a:noFill/>
+          </p:spPr>
+          <p:txBody>
+            <a:bodyPr wrap="none" rtlCol="0">
+              <a:spAutoFit/>
+            </a:bodyPr>
+            <a:lstStyle/>
+            <a:p>
+              <a:r>
+                <a:rPr lang="en-US" dirty="0"/>
+                <a:t>B12</a:t>
+              </a:r>
+            </a:p>
+          </p:txBody>
+        </p:sp>
+        <p:sp>
+          <p:nvSpPr>
+            <p:cNvPr id="100" name="TextBox 99">
+              <a:extLst>
+                <a:ext uri="{FF2B5EF4-FFF2-40B4-BE49-F238E27FC236}">
+                  <a16:creationId xmlns:a16="http://schemas.microsoft.com/office/drawing/2014/main" id="{8A72836C-15DC-874D-45B2-5AAFC07F9060}"/>
+                </a:ext>
+              </a:extLst>
+            </p:cNvPr>
+            <p:cNvSpPr txBox="1"/>
+            <p:nvPr/>
+          </p:nvSpPr>
+          <p:spPr>
+            <a:xfrm>
+              <a:off x="5832187" y="557458"/>
+              <a:ext cx="570990" cy="369332"/>
+            </a:xfrm>
+            <a:prstGeom prst="rect">
+              <a:avLst/>
+            </a:prstGeom>
+            <a:noFill/>
+          </p:spPr>
+          <p:txBody>
+            <a:bodyPr wrap="none" rtlCol="0">
+              <a:spAutoFit/>
+            </a:bodyPr>
+            <a:lstStyle/>
+            <a:p>
+              <a:r>
+                <a:rPr lang="en-US" dirty="0"/>
+                <a:t>B13</a:t>
+              </a:r>
+            </a:p>
+          </p:txBody>
+        </p:sp>
+        <p:sp>
+          <p:nvSpPr>
+            <p:cNvPr id="101" name="TextBox 100">
+              <a:extLst>
+                <a:ext uri="{FF2B5EF4-FFF2-40B4-BE49-F238E27FC236}">
+                  <a16:creationId xmlns:a16="http://schemas.microsoft.com/office/drawing/2014/main" id="{0DB17C08-71EF-190D-507B-A75ACA877BB6}"/>
+                </a:ext>
+              </a:extLst>
+            </p:cNvPr>
+            <p:cNvSpPr txBox="1"/>
+            <p:nvPr/>
+          </p:nvSpPr>
+          <p:spPr>
+            <a:xfrm>
+              <a:off x="6898847" y="557458"/>
+              <a:ext cx="570990" cy="369332"/>
+            </a:xfrm>
+            <a:prstGeom prst="rect">
+              <a:avLst/>
+            </a:prstGeom>
+            <a:noFill/>
+          </p:spPr>
+          <p:txBody>
+            <a:bodyPr wrap="none" rtlCol="0">
+              <a:spAutoFit/>
+            </a:bodyPr>
+            <a:lstStyle/>
+            <a:p>
+              <a:r>
+                <a:rPr lang="en-US" dirty="0"/>
+                <a:t>B14</a:t>
+              </a:r>
+            </a:p>
+          </p:txBody>
+        </p:sp>
+        <p:sp>
+          <p:nvSpPr>
+            <p:cNvPr id="103" name="Left Bracket 102">
+              <a:extLst>
+                <a:ext uri="{FF2B5EF4-FFF2-40B4-BE49-F238E27FC236}">
+                  <a16:creationId xmlns:a16="http://schemas.microsoft.com/office/drawing/2014/main" id="{A170DE1D-421D-2C53-6861-877010554EFC}"/>
+                </a:ext>
+              </a:extLst>
+            </p:cNvPr>
+            <p:cNvSpPr/>
+            <p:nvPr/>
+          </p:nvSpPr>
+          <p:spPr>
+            <a:xfrm rot="16200000">
+              <a:off x="3199409" y="324153"/>
+              <a:ext cx="369333" cy="2035851"/>
+            </a:xfrm>
+            <a:prstGeom prst="leftBracket">
+              <a:avLst/>
+            </a:prstGeom>
+            <a:ln w="25400">
+              <a:solidFill>
+                <a:schemeClr val="tx1"/>
+              </a:solidFill>
+            </a:ln>
+          </p:spPr>
+          <p:style>
+            <a:lnRef idx="2">
+              <a:schemeClr val="accent1"/>
+            </a:lnRef>
+            <a:fillRef idx="0">
+              <a:schemeClr val="accent1"/>
+            </a:fillRef>
+            <a:effectRef idx="1">
+              <a:schemeClr val="accent1"/>
+            </a:effectRef>
+            <a:fontRef idx="minor">
+              <a:schemeClr val="tx1"/>
+            </a:fontRef>
+          </p:style>
+          <p:txBody>
+            <a:bodyPr rtlCol="0" anchor="ctr"/>
+            <a:lstStyle/>
+            <a:p>
+              <a:pPr algn="ctr"/>
+              <a:endParaRPr lang="en-US"/>
+            </a:p>
+          </p:txBody>
+        </p:sp>
+        <p:sp>
+          <p:nvSpPr>
+            <p:cNvPr id="104" name="Left Bracket 103">
+              <a:extLst>
+                <a:ext uri="{FF2B5EF4-FFF2-40B4-BE49-F238E27FC236}">
+                  <a16:creationId xmlns:a16="http://schemas.microsoft.com/office/drawing/2014/main" id="{05921564-1889-9429-8749-01ADFF536291}"/>
+                </a:ext>
+              </a:extLst>
+            </p:cNvPr>
+            <p:cNvSpPr/>
+            <p:nvPr/>
+          </p:nvSpPr>
+          <p:spPr>
+            <a:xfrm rot="16200000">
+              <a:off x="1566183" y="891547"/>
+              <a:ext cx="369333" cy="901063"/>
+            </a:xfrm>
+            <a:prstGeom prst="leftBracket">
+              <a:avLst/>
+            </a:prstGeom>
+            <a:ln w="25400">
+              <a:solidFill>
+                <a:schemeClr val="tx1"/>
+              </a:solidFill>
+            </a:ln>
+          </p:spPr>
+          <p:style>
+            <a:lnRef idx="2">
+              <a:schemeClr val="accent1"/>
+            </a:lnRef>
+            <a:fillRef idx="0">
+              <a:schemeClr val="accent1"/>
+            </a:fillRef>
+            <a:effectRef idx="1">
+              <a:schemeClr val="accent1"/>
+            </a:effectRef>
+            <a:fontRef idx="minor">
+              <a:schemeClr val="tx1"/>
+            </a:fontRef>
+          </p:style>
+          <p:txBody>
+            <a:bodyPr rtlCol="0" anchor="ctr"/>
+            <a:lstStyle/>
+            <a:p>
+              <a:pPr algn="ctr"/>
+              <a:endParaRPr lang="en-US"/>
+            </a:p>
+          </p:txBody>
+        </p:sp>
+        <p:pic>
+          <p:nvPicPr>
+            <p:cNvPr id="108" name="Graphic 107" descr="Doctor male with solid fill">
+              <a:extLst>
+                <a:ext uri="{FF2B5EF4-FFF2-40B4-BE49-F238E27FC236}">
+                  <a16:creationId xmlns:a16="http://schemas.microsoft.com/office/drawing/2014/main" id="{CB2C7BDE-2E65-7ED0-1ABF-8AC256E520FC}"/>
+                </a:ext>
+              </a:extLst>
+            </p:cNvPr>
+            <p:cNvPicPr>
+              <a:picLocks noChangeAspect="1"/>
+            </p:cNvPicPr>
+            <p:nvPr/>
+          </p:nvPicPr>
+          <p:blipFill>
+            <a:blip>
+              <a:extLst>
+                <a:ext uri="{96DAC541-7B7A-43D3-8B79-37D633B846F1}">
+                  <asvg:svgBlip xmlns:asvg="http://schemas.microsoft.com/office/drawing/2016/SVG/main" r:embed="rId8"/>
+                </a:ext>
+              </a:extLst>
+            </a:blip>
+            <a:stretch>
+              <a:fillRect/>
+            </a:stretch>
+          </p:blipFill>
+          <p:spPr>
+            <a:xfrm>
+              <a:off x="3065647" y="1577292"/>
+              <a:ext cx="636856" cy="636856"/>
+            </a:xfrm>
+            <a:prstGeom prst="rect">
+              <a:avLst/>
+            </a:prstGeom>
+          </p:spPr>
+        </p:pic>
+        <p:pic>
+          <p:nvPicPr>
+            <p:cNvPr id="109" name="Graphic 108" descr="Doctor female with solid fill">
+              <a:extLst>
+                <a:ext uri="{FF2B5EF4-FFF2-40B4-BE49-F238E27FC236}">
+                  <a16:creationId xmlns:a16="http://schemas.microsoft.com/office/drawing/2014/main" id="{DA556557-4A21-B133-BC24-B60D9DAA6B42}"/>
+                </a:ext>
+              </a:extLst>
+            </p:cNvPr>
+            <p:cNvPicPr>
+              <a:picLocks noChangeAspect="1"/>
+            </p:cNvPicPr>
+            <p:nvPr/>
+          </p:nvPicPr>
+          <p:blipFill>
+            <a:blip>
+              <a:extLst>
+                <a:ext uri="{96DAC541-7B7A-43D3-8B79-37D633B846F1}">
+                  <asvg:svgBlip xmlns:asvg="http://schemas.microsoft.com/office/drawing/2016/SVG/main" r:embed="rId9"/>
+                </a:ext>
+              </a:extLst>
+            </a:blip>
+            <a:stretch>
+              <a:fillRect/>
+            </a:stretch>
+          </p:blipFill>
+          <p:spPr>
+            <a:xfrm>
+              <a:off x="1429947" y="1577292"/>
+              <a:ext cx="636856" cy="636856"/>
+            </a:xfrm>
+            <a:prstGeom prst="rect">
+              <a:avLst/>
+            </a:prstGeom>
+          </p:spPr>
+        </p:pic>
+        <p:pic>
+          <p:nvPicPr>
+            <p:cNvPr id="111" name="Graphic 110" descr="Doctor female with solid fill">
+              <a:extLst>
+                <a:ext uri="{FF2B5EF4-FFF2-40B4-BE49-F238E27FC236}">
+                  <a16:creationId xmlns:a16="http://schemas.microsoft.com/office/drawing/2014/main" id="{6477F368-C4F4-683A-BC4C-444F35517229}"/>
+                </a:ext>
+              </a:extLst>
+            </p:cNvPr>
+            <p:cNvPicPr>
+              <a:picLocks noChangeAspect="1"/>
+            </p:cNvPicPr>
+            <p:nvPr/>
+          </p:nvPicPr>
+          <p:blipFill>
+            <a:blip>
+              <a:extLst>
+                <a:ext uri="{96DAC541-7B7A-43D3-8B79-37D633B846F1}">
+                  <asvg:svgBlip xmlns:asvg="http://schemas.microsoft.com/office/drawing/2016/SVG/main" r:embed="rId9"/>
+                </a:ext>
+              </a:extLst>
+            </a:blip>
+            <a:stretch>
+              <a:fillRect/>
+            </a:stretch>
+          </p:blipFill>
+          <p:spPr>
+            <a:xfrm>
+              <a:off x="5766321" y="1577292"/>
+              <a:ext cx="636856" cy="636856"/>
+            </a:xfrm>
+            <a:prstGeom prst="rect">
+              <a:avLst/>
+            </a:prstGeom>
+          </p:spPr>
+        </p:pic>
+        <p:sp>
+          <p:nvSpPr>
+            <p:cNvPr id="50" name="Left Bracket 49">
+              <a:extLst>
+                <a:ext uri="{FF2B5EF4-FFF2-40B4-BE49-F238E27FC236}">
+                  <a16:creationId xmlns:a16="http://schemas.microsoft.com/office/drawing/2014/main" id="{1C651EA5-DDEA-6F80-A382-B3F7904FEE48}"/>
+                </a:ext>
+              </a:extLst>
+            </p:cNvPr>
+            <p:cNvSpPr/>
+            <p:nvPr/>
+          </p:nvSpPr>
+          <p:spPr>
+            <a:xfrm rot="16200000">
+              <a:off x="5923026" y="887124"/>
+              <a:ext cx="369333" cy="901063"/>
+            </a:xfrm>
+            <a:prstGeom prst="leftBracket">
+              <a:avLst/>
+            </a:prstGeom>
+            <a:ln w="25400">
+              <a:solidFill>
+                <a:schemeClr val="tx1"/>
+              </a:solidFill>
+            </a:ln>
+          </p:spPr>
+          <p:style>
+            <a:lnRef idx="2">
+              <a:schemeClr val="accent1"/>
+            </a:lnRef>
+            <a:fillRef idx="0">
+              <a:schemeClr val="accent1"/>
+            </a:fillRef>
+            <a:effectRef idx="1">
+              <a:schemeClr val="accent1"/>
+            </a:effectRef>
+            <a:fontRef idx="minor">
+              <a:schemeClr val="tx1"/>
+            </a:fontRef>
+          </p:style>
+          <p:txBody>
+            <a:bodyPr rtlCol="0" anchor="ctr"/>
+            <a:lstStyle/>
+            <a:p>
+              <a:pPr algn="ctr"/>
+              <a:endParaRPr lang="en-US"/>
+            </a:p>
+          </p:txBody>
+        </p:sp>
+        <p:sp>
+          <p:nvSpPr>
+            <p:cNvPr id="51" name="Left Bracket 50">
+              <a:extLst>
+                <a:ext uri="{FF2B5EF4-FFF2-40B4-BE49-F238E27FC236}">
+                  <a16:creationId xmlns:a16="http://schemas.microsoft.com/office/drawing/2014/main" id="{3F391361-F5A2-AD35-2AE1-7E4A3C51D4BE}"/>
+                </a:ext>
+              </a:extLst>
+            </p:cNvPr>
+            <p:cNvSpPr/>
+            <p:nvPr/>
+          </p:nvSpPr>
+          <p:spPr>
+            <a:xfrm rot="16200000">
+              <a:off x="6999675" y="887124"/>
+              <a:ext cx="369333" cy="901063"/>
+            </a:xfrm>
+            <a:prstGeom prst="leftBracket">
+              <a:avLst/>
+            </a:prstGeom>
+            <a:ln w="25400">
+              <a:solidFill>
+                <a:schemeClr val="tx1"/>
+              </a:solidFill>
+            </a:ln>
+          </p:spPr>
+          <p:style>
+            <a:lnRef idx="2">
+              <a:schemeClr val="accent1"/>
+            </a:lnRef>
+            <a:fillRef idx="0">
+              <a:schemeClr val="accent1"/>
+            </a:fillRef>
+            <a:effectRef idx="1">
+              <a:schemeClr val="accent1"/>
+            </a:effectRef>
+            <a:fontRef idx="minor">
+              <a:schemeClr val="tx1"/>
+            </a:fontRef>
+          </p:style>
+          <p:txBody>
+            <a:bodyPr rtlCol="0" anchor="ctr"/>
+            <a:lstStyle/>
+            <a:p>
+              <a:pPr algn="ctr"/>
+              <a:endParaRPr lang="en-US"/>
+            </a:p>
+          </p:txBody>
+        </p:sp>
+        <p:pic>
+          <p:nvPicPr>
+            <p:cNvPr id="52" name="Graphic 51" descr="Doctor male with solid fill">
+              <a:extLst>
+                <a:ext uri="{FF2B5EF4-FFF2-40B4-BE49-F238E27FC236}">
+                  <a16:creationId xmlns:a16="http://schemas.microsoft.com/office/drawing/2014/main" id="{1B08D3DB-F643-53FF-40D1-29AD16AA17A3}"/>
+                </a:ext>
+              </a:extLst>
+            </p:cNvPr>
+            <p:cNvPicPr>
+              <a:picLocks noChangeAspect="1"/>
+            </p:cNvPicPr>
+            <p:nvPr/>
+          </p:nvPicPr>
+          <p:blipFill>
+            <a:blip>
+              <a:extLst>
+                <a:ext uri="{96DAC541-7B7A-43D3-8B79-37D633B846F1}">
+                  <asvg:svgBlip xmlns:asvg="http://schemas.microsoft.com/office/drawing/2016/SVG/main" r:embed="rId8"/>
+                </a:ext>
+              </a:extLst>
+            </a:blip>
+            <a:stretch>
+              <a:fillRect/>
+            </a:stretch>
+          </p:blipFill>
+          <p:spPr>
+            <a:xfrm>
+              <a:off x="6872004" y="1588917"/>
+              <a:ext cx="636856" cy="636856"/>
+            </a:xfrm>
+            <a:prstGeom prst="rect">
+              <a:avLst/>
+            </a:prstGeom>
+          </p:spPr>
+        </p:pic>
+        <p:sp>
+          <p:nvSpPr>
+            <p:cNvPr id="122" name="Rounded Rectangle 121">
+              <a:extLst>
+                <a:ext uri="{FF2B5EF4-FFF2-40B4-BE49-F238E27FC236}">
+                  <a16:creationId xmlns:a16="http://schemas.microsoft.com/office/drawing/2014/main" id="{2AD281CF-5C4E-BD61-EF88-5F6EE52F32D1}"/>
+                </a:ext>
+              </a:extLst>
+            </p:cNvPr>
+            <p:cNvSpPr/>
+            <p:nvPr/>
+          </p:nvSpPr>
+          <p:spPr>
+            <a:xfrm>
+              <a:off x="9043546" y="382354"/>
+              <a:ext cx="7791352" cy="2097152"/>
+            </a:xfrm>
+            <a:prstGeom prst="roundRect">
+              <a:avLst>
+                <a:gd name="adj" fmla="val 21519"/>
+              </a:avLst>
+            </a:prstGeom>
+            <a:solidFill>
+              <a:srgbClr val="00B0F0">
+                <a:alpha val="25714"/>
+              </a:srgbClr>
+            </a:solidFill>
+            <a:ln w="34925">
+              <a:solidFill>
+                <a:srgbClr val="0070C0"/>
+              </a:solidFill>
+            </a:ln>
+          </p:spPr>
+          <p:style>
+            <a:lnRef idx="2">
+              <a:schemeClr val="accent1">
+                <a:shade val="15000"/>
+              </a:schemeClr>
+            </a:lnRef>
+            <a:fillRef idx="1">
+              <a:schemeClr val="accent1"/>
+            </a:fillRef>
+            <a:effectRef idx="0">
+              <a:schemeClr val="accent1"/>
+            </a:effectRef>
+            <a:fontRef idx="minor">
+              <a:schemeClr val="lt1"/>
+            </a:fontRef>
+          </p:style>
+          <p:txBody>
+            <a:bodyPr rtlCol="0" anchor="ctr"/>
+            <a:lstStyle/>
+            <a:p>
+              <a:pPr algn="ctr"/>
+              <a:endParaRPr lang="en-US"/>
+            </a:p>
+          </p:txBody>
+        </p:sp>
+        <p:pic>
+          <p:nvPicPr>
+            <p:cNvPr id="123" name="Graphic 122" descr="Sleep with solid fill">
+              <a:extLst>
+                <a:ext uri="{FF2B5EF4-FFF2-40B4-BE49-F238E27FC236}">
+                  <a16:creationId xmlns:a16="http://schemas.microsoft.com/office/drawing/2014/main" id="{A04AD26A-82E5-E2AB-2942-A5BC344E20E3}"/>
+                </a:ext>
+              </a:extLst>
+            </p:cNvPr>
+            <p:cNvPicPr>
+              <a:picLocks noChangeAspect="1"/>
+            </p:cNvPicPr>
+            <p:nvPr/>
+          </p:nvPicPr>
+          <p:blipFill>
+            <a:blip>
+              <a:extLst>
+                <a:ext uri="{96DAC541-7B7A-43D3-8B79-37D633B846F1}">
+                  <asvg:svgBlip xmlns:asvg="http://schemas.microsoft.com/office/drawing/2016/SVG/main" r:embed="rId7"/>
+                </a:ext>
+              </a:extLst>
+            </a:blip>
+            <a:srcRect/>
+            <a:stretch/>
+          </p:blipFill>
+          <p:spPr>
+            <a:xfrm>
+              <a:off x="9323185" y="717940"/>
+              <a:ext cx="634696" cy="634696"/>
+            </a:xfrm>
+            <a:prstGeom prst="rect">
+              <a:avLst/>
+            </a:prstGeom>
+          </p:spPr>
+        </p:pic>
+        <p:pic>
+          <p:nvPicPr>
+            <p:cNvPr id="124" name="Graphic 123" descr="Sleep with solid fill">
+              <a:extLst>
+                <a:ext uri="{FF2B5EF4-FFF2-40B4-BE49-F238E27FC236}">
+                  <a16:creationId xmlns:a16="http://schemas.microsoft.com/office/drawing/2014/main" id="{E5C33630-689E-FA0E-98B1-6B33DBB3C03D}"/>
+                </a:ext>
+              </a:extLst>
+            </p:cNvPr>
+            <p:cNvPicPr>
+              <a:picLocks noChangeAspect="1"/>
+            </p:cNvPicPr>
+            <p:nvPr/>
+          </p:nvPicPr>
+          <p:blipFill>
+            <a:blip>
+              <a:extLst>
+                <a:ext uri="{96DAC541-7B7A-43D3-8B79-37D633B846F1}">
+                  <asvg:svgBlip xmlns:asvg="http://schemas.microsoft.com/office/drawing/2016/SVG/main" r:embed="rId5"/>
+                </a:ext>
+              </a:extLst>
+            </a:blip>
+            <a:srcRect/>
+            <a:stretch/>
+          </p:blipFill>
+          <p:spPr>
+            <a:xfrm>
+              <a:off x="10389017" y="717940"/>
+              <a:ext cx="634696" cy="634696"/>
+            </a:xfrm>
+            <a:prstGeom prst="rect">
+              <a:avLst/>
+            </a:prstGeom>
+          </p:spPr>
+        </p:pic>
+        <p:pic>
+          <p:nvPicPr>
+            <p:cNvPr id="125" name="Graphic 124" descr="Bed with solid fill">
+              <a:extLst>
+                <a:ext uri="{FF2B5EF4-FFF2-40B4-BE49-F238E27FC236}">
+                  <a16:creationId xmlns:a16="http://schemas.microsoft.com/office/drawing/2014/main" id="{9D5800A1-C62C-FF09-BD70-4648019B4319}"/>
+                </a:ext>
+              </a:extLst>
+            </p:cNvPr>
+            <p:cNvPicPr>
+              <a:picLocks noChangeAspect="1"/>
+            </p:cNvPicPr>
+            <p:nvPr/>
+          </p:nvPicPr>
+          <p:blipFill>
+            <a:blip>
+              <a:extLst>
+                <a:ext uri="{96DAC541-7B7A-43D3-8B79-37D633B846F1}">
+                  <asvg:svgBlip xmlns:asvg="http://schemas.microsoft.com/office/drawing/2016/SVG/main" r:embed="rId3"/>
+                </a:ext>
+              </a:extLst>
+            </a:blip>
+            <a:srcRect/>
+            <a:stretch/>
+          </p:blipFill>
+          <p:spPr>
+            <a:xfrm>
+              <a:off x="11498350" y="717940"/>
+              <a:ext cx="634696" cy="634696"/>
+            </a:xfrm>
+            <a:prstGeom prst="rect">
+              <a:avLst/>
+            </a:prstGeom>
+          </p:spPr>
+        </p:pic>
+        <p:pic>
+          <p:nvPicPr>
+            <p:cNvPr id="126" name="Graphic 125" descr="Sleep with solid fill">
+              <a:extLst>
+                <a:ext uri="{FF2B5EF4-FFF2-40B4-BE49-F238E27FC236}">
+                  <a16:creationId xmlns:a16="http://schemas.microsoft.com/office/drawing/2014/main" id="{204D9E95-8CF9-E29A-3131-97DD0A74A626}"/>
+                </a:ext>
+              </a:extLst>
+            </p:cNvPr>
+            <p:cNvPicPr>
+              <a:picLocks noChangeAspect="1"/>
+            </p:cNvPicPr>
+            <p:nvPr/>
+          </p:nvPicPr>
+          <p:blipFill>
+            <a:blip>
+              <a:extLst>
+                <a:ext uri="{96DAC541-7B7A-43D3-8B79-37D633B846F1}">
+                  <asvg:svgBlip xmlns:asvg="http://schemas.microsoft.com/office/drawing/2016/SVG/main" r:embed="rId5"/>
+                </a:ext>
+              </a:extLst>
+            </a:blip>
+            <a:srcRect/>
+            <a:stretch/>
+          </p:blipFill>
+          <p:spPr>
+            <a:xfrm>
+              <a:off x="12564182" y="717940"/>
+              <a:ext cx="634696" cy="634696"/>
+            </a:xfrm>
+            <a:prstGeom prst="rect">
+              <a:avLst/>
+            </a:prstGeom>
+          </p:spPr>
+        </p:pic>
+        <p:pic>
+          <p:nvPicPr>
+            <p:cNvPr id="127" name="Graphic 126" descr="Sleep with solid fill">
+              <a:extLst>
+                <a:ext uri="{FF2B5EF4-FFF2-40B4-BE49-F238E27FC236}">
+                  <a16:creationId xmlns:a16="http://schemas.microsoft.com/office/drawing/2014/main" id="{3ADD6AC0-AC70-8A86-F894-EF802C6F02C6}"/>
+                </a:ext>
+              </a:extLst>
+            </p:cNvPr>
+            <p:cNvPicPr>
+              <a:picLocks noChangeAspect="1"/>
+            </p:cNvPicPr>
+            <p:nvPr/>
+          </p:nvPicPr>
+          <p:blipFill>
+            <a:blip>
+              <a:extLst>
+                <a:ext uri="{96DAC541-7B7A-43D3-8B79-37D633B846F1}">
+                  <asvg:svgBlip xmlns:asvg="http://schemas.microsoft.com/office/drawing/2016/SVG/main" r:embed="rId6"/>
+                </a:ext>
+              </a:extLst>
+            </a:blip>
+            <a:srcRect/>
+            <a:stretch/>
+          </p:blipFill>
+          <p:spPr>
+            <a:xfrm>
+              <a:off x="13683583" y="717940"/>
+              <a:ext cx="634696" cy="634696"/>
+            </a:xfrm>
+            <a:prstGeom prst="rect">
+              <a:avLst/>
+            </a:prstGeom>
+          </p:spPr>
+        </p:pic>
+        <p:pic>
+          <p:nvPicPr>
+            <p:cNvPr id="128" name="Graphic 127" descr="Sleep with solid fill">
+              <a:extLst>
+                <a:ext uri="{FF2B5EF4-FFF2-40B4-BE49-F238E27FC236}">
+                  <a16:creationId xmlns:a16="http://schemas.microsoft.com/office/drawing/2014/main" id="{E56DBECC-1042-1B20-57D3-E112E86D2D64}"/>
+                </a:ext>
+              </a:extLst>
+            </p:cNvPr>
+            <p:cNvPicPr>
+              <a:picLocks noChangeAspect="1"/>
+            </p:cNvPicPr>
+            <p:nvPr/>
+          </p:nvPicPr>
+          <p:blipFill>
+            <a:blip>
+              <a:extLst>
+                <a:ext uri="{96DAC541-7B7A-43D3-8B79-37D633B846F1}">
+                  <asvg:svgBlip xmlns:asvg="http://schemas.microsoft.com/office/drawing/2016/SVG/main" r:embed="rId10"/>
+                </a:ext>
+              </a:extLst>
+            </a:blip>
+            <a:srcRect/>
+            <a:stretch/>
+          </p:blipFill>
+          <p:spPr>
+            <a:xfrm>
+              <a:off x="14749415" y="717940"/>
+              <a:ext cx="634696" cy="634696"/>
+            </a:xfrm>
+            <a:prstGeom prst="rect">
+              <a:avLst/>
+            </a:prstGeom>
+          </p:spPr>
+        </p:pic>
+        <p:pic>
+          <p:nvPicPr>
+            <p:cNvPr id="129" name="Graphic 128" descr="Bed with solid fill">
+              <a:extLst>
+                <a:ext uri="{FF2B5EF4-FFF2-40B4-BE49-F238E27FC236}">
+                  <a16:creationId xmlns:a16="http://schemas.microsoft.com/office/drawing/2014/main" id="{72E44A4C-2670-CBCE-C1D5-84D98A8CA9A0}"/>
+                </a:ext>
+              </a:extLst>
+            </p:cNvPr>
+            <p:cNvPicPr>
+              <a:picLocks noChangeAspect="1"/>
+            </p:cNvPicPr>
+            <p:nvPr/>
+          </p:nvPicPr>
+          <p:blipFill>
+            <a:blip>
+              <a:extLst>
+                <a:ext uri="{96DAC541-7B7A-43D3-8B79-37D633B846F1}">
+                  <asvg:svgBlip xmlns:asvg="http://schemas.microsoft.com/office/drawing/2016/SVG/main" r:embed="rId3"/>
+                </a:ext>
+              </a:extLst>
+            </a:blip>
+            <a:srcRect/>
+            <a:stretch/>
+          </p:blipFill>
+          <p:spPr>
+            <a:xfrm>
+              <a:off x="15858748" y="717940"/>
+              <a:ext cx="634696" cy="634696"/>
+            </a:xfrm>
+            <a:prstGeom prst="rect">
+              <a:avLst/>
+            </a:prstGeom>
+          </p:spPr>
+        </p:pic>
+        <p:sp>
+          <p:nvSpPr>
+            <p:cNvPr id="130" name="TextBox 129">
+              <a:extLst>
+                <a:ext uri="{FF2B5EF4-FFF2-40B4-BE49-F238E27FC236}">
+                  <a16:creationId xmlns:a16="http://schemas.microsoft.com/office/drawing/2014/main" id="{CD4384E5-8837-BEA9-9895-600762788AA3}"/>
+                </a:ext>
+              </a:extLst>
+            </p:cNvPr>
+            <p:cNvSpPr txBox="1"/>
+            <p:nvPr/>
+          </p:nvSpPr>
+          <p:spPr>
+            <a:xfrm>
+              <a:off x="9391633" y="563424"/>
+              <a:ext cx="570990" cy="369332"/>
+            </a:xfrm>
+            <a:prstGeom prst="rect">
+              <a:avLst/>
+            </a:prstGeom>
+            <a:noFill/>
+          </p:spPr>
+          <p:txBody>
+            <a:bodyPr wrap="none" rtlCol="0">
+              <a:spAutoFit/>
+            </a:bodyPr>
+            <a:lstStyle/>
+            <a:p>
+              <a:r>
+                <a:rPr lang="en-US" dirty="0"/>
+                <a:t>B08</a:t>
+              </a:r>
+            </a:p>
+          </p:txBody>
+        </p:sp>
+        <p:sp>
+          <p:nvSpPr>
+            <p:cNvPr id="131" name="TextBox 130">
+              <a:extLst>
+                <a:ext uri="{FF2B5EF4-FFF2-40B4-BE49-F238E27FC236}">
+                  <a16:creationId xmlns:a16="http://schemas.microsoft.com/office/drawing/2014/main" id="{720B53ED-B65C-00C1-3819-0D779E72A287}"/>
+                </a:ext>
+              </a:extLst>
+            </p:cNvPr>
+            <p:cNvSpPr txBox="1"/>
+            <p:nvPr/>
+          </p:nvSpPr>
+          <p:spPr>
+            <a:xfrm>
+              <a:off x="10453438" y="563424"/>
+              <a:ext cx="570990" cy="369332"/>
+            </a:xfrm>
+            <a:prstGeom prst="rect">
+              <a:avLst/>
+            </a:prstGeom>
+            <a:noFill/>
+          </p:spPr>
+          <p:txBody>
+            <a:bodyPr wrap="none" rtlCol="0">
+              <a:spAutoFit/>
+            </a:bodyPr>
+            <a:lstStyle/>
+            <a:p>
+              <a:r>
+                <a:rPr lang="en-US" dirty="0"/>
+                <a:t>B09</a:t>
+              </a:r>
+            </a:p>
+          </p:txBody>
+        </p:sp>
+        <p:sp>
+          <p:nvSpPr>
+            <p:cNvPr id="132" name="TextBox 131">
+              <a:extLst>
+                <a:ext uri="{FF2B5EF4-FFF2-40B4-BE49-F238E27FC236}">
+                  <a16:creationId xmlns:a16="http://schemas.microsoft.com/office/drawing/2014/main" id="{40D76A9A-0B46-7AC9-1EF3-ADDB3B6D34F9}"/>
+                </a:ext>
+              </a:extLst>
+            </p:cNvPr>
+            <p:cNvSpPr txBox="1"/>
+            <p:nvPr/>
+          </p:nvSpPr>
+          <p:spPr>
+            <a:xfrm>
+              <a:off x="11520098" y="563424"/>
+              <a:ext cx="570990" cy="369332"/>
+            </a:xfrm>
+            <a:prstGeom prst="rect">
+              <a:avLst/>
+            </a:prstGeom>
+            <a:noFill/>
+          </p:spPr>
+          <p:txBody>
+            <a:bodyPr wrap="none" rtlCol="0">
+              <a:spAutoFit/>
+            </a:bodyPr>
+            <a:lstStyle/>
+            <a:p>
+              <a:r>
+                <a:rPr lang="en-US" dirty="0"/>
+                <a:t>B10</a:t>
+              </a:r>
+            </a:p>
+          </p:txBody>
+        </p:sp>
+        <p:sp>
+          <p:nvSpPr>
+            <p:cNvPr id="133" name="TextBox 132">
+              <a:extLst>
+                <a:ext uri="{FF2B5EF4-FFF2-40B4-BE49-F238E27FC236}">
+                  <a16:creationId xmlns:a16="http://schemas.microsoft.com/office/drawing/2014/main" id="{C9A6E232-7D86-0921-3055-1AB5C464A4C5}"/>
+                </a:ext>
+              </a:extLst>
+            </p:cNvPr>
+            <p:cNvSpPr txBox="1"/>
+            <p:nvPr/>
+          </p:nvSpPr>
+          <p:spPr>
+            <a:xfrm>
+              <a:off x="12609658" y="563424"/>
+              <a:ext cx="570990" cy="369332"/>
+            </a:xfrm>
+            <a:prstGeom prst="rect">
+              <a:avLst/>
+            </a:prstGeom>
+            <a:noFill/>
+          </p:spPr>
+          <p:txBody>
+            <a:bodyPr wrap="none" rtlCol="0">
+              <a:spAutoFit/>
+            </a:bodyPr>
+            <a:lstStyle/>
+            <a:p>
+              <a:r>
+                <a:rPr lang="en-US" dirty="0"/>
+                <a:t>B11</a:t>
+              </a:r>
+            </a:p>
+          </p:txBody>
+        </p:sp>
+        <p:sp>
+          <p:nvSpPr>
+            <p:cNvPr id="134" name="TextBox 133">
+              <a:extLst>
+                <a:ext uri="{FF2B5EF4-FFF2-40B4-BE49-F238E27FC236}">
+                  <a16:creationId xmlns:a16="http://schemas.microsoft.com/office/drawing/2014/main" id="{48EF9BE3-C761-E7EB-0D98-2BCFCAEB9A0B}"/>
+                </a:ext>
+              </a:extLst>
+            </p:cNvPr>
+            <p:cNvSpPr txBox="1"/>
+            <p:nvPr/>
+          </p:nvSpPr>
+          <p:spPr>
+            <a:xfrm>
+              <a:off x="13729452" y="568013"/>
+              <a:ext cx="570990" cy="369332"/>
+            </a:xfrm>
+            <a:prstGeom prst="rect">
+              <a:avLst/>
+            </a:prstGeom>
+            <a:noFill/>
+          </p:spPr>
+          <p:txBody>
+            <a:bodyPr wrap="none" rtlCol="0">
+              <a:spAutoFit/>
+            </a:bodyPr>
+            <a:lstStyle/>
+            <a:p>
+              <a:r>
+                <a:rPr lang="en-US" dirty="0"/>
+                <a:t>B12</a:t>
+              </a:r>
+            </a:p>
+          </p:txBody>
+        </p:sp>
+        <p:sp>
+          <p:nvSpPr>
+            <p:cNvPr id="135" name="TextBox 134">
+              <a:extLst>
+                <a:ext uri="{FF2B5EF4-FFF2-40B4-BE49-F238E27FC236}">
+                  <a16:creationId xmlns:a16="http://schemas.microsoft.com/office/drawing/2014/main" id="{7F9B0C0E-EC46-745B-415D-C289DF5F77E6}"/>
+                </a:ext>
+              </a:extLst>
+            </p:cNvPr>
+            <p:cNvSpPr txBox="1"/>
+            <p:nvPr/>
+          </p:nvSpPr>
+          <p:spPr>
+            <a:xfrm>
+              <a:off x="14791257" y="568013"/>
+              <a:ext cx="570990" cy="369332"/>
+            </a:xfrm>
+            <a:prstGeom prst="rect">
+              <a:avLst/>
+            </a:prstGeom>
+            <a:noFill/>
+          </p:spPr>
+          <p:txBody>
+            <a:bodyPr wrap="none" rtlCol="0">
+              <a:spAutoFit/>
+            </a:bodyPr>
+            <a:lstStyle/>
+            <a:p>
+              <a:r>
+                <a:rPr lang="en-US" dirty="0"/>
+                <a:t>B13</a:t>
+              </a:r>
+            </a:p>
+          </p:txBody>
+        </p:sp>
+        <p:sp>
+          <p:nvSpPr>
+            <p:cNvPr id="136" name="TextBox 135">
+              <a:extLst>
+                <a:ext uri="{FF2B5EF4-FFF2-40B4-BE49-F238E27FC236}">
+                  <a16:creationId xmlns:a16="http://schemas.microsoft.com/office/drawing/2014/main" id="{288F23AE-403F-FA68-AFFA-04EDD53B0DCC}"/>
+                </a:ext>
+              </a:extLst>
+            </p:cNvPr>
+            <p:cNvSpPr txBox="1"/>
+            <p:nvPr/>
+          </p:nvSpPr>
+          <p:spPr>
+            <a:xfrm>
+              <a:off x="15857917" y="568013"/>
+              <a:ext cx="570990" cy="369332"/>
+            </a:xfrm>
+            <a:prstGeom prst="rect">
+              <a:avLst/>
+            </a:prstGeom>
+            <a:noFill/>
+          </p:spPr>
+          <p:txBody>
+            <a:bodyPr wrap="none" rtlCol="0">
+              <a:spAutoFit/>
+            </a:bodyPr>
+            <a:lstStyle/>
+            <a:p>
+              <a:r>
+                <a:rPr lang="en-US" dirty="0"/>
+                <a:t>B14</a:t>
+              </a:r>
+            </a:p>
+          </p:txBody>
+        </p:sp>
+        <p:sp>
+          <p:nvSpPr>
+            <p:cNvPr id="137" name="Left Bracket 136">
+              <a:extLst>
+                <a:ext uri="{FF2B5EF4-FFF2-40B4-BE49-F238E27FC236}">
+                  <a16:creationId xmlns:a16="http://schemas.microsoft.com/office/drawing/2014/main" id="{F4D21987-36AC-84E9-EEC6-FF13513A5E0F}"/>
+                </a:ext>
+              </a:extLst>
+            </p:cNvPr>
+            <p:cNvSpPr/>
+            <p:nvPr/>
+          </p:nvSpPr>
+          <p:spPr>
+            <a:xfrm rot="16200000">
+              <a:off x="13276901" y="346332"/>
+              <a:ext cx="369333" cy="2035851"/>
+            </a:xfrm>
+            <a:prstGeom prst="leftBracket">
+              <a:avLst/>
+            </a:prstGeom>
+            <a:ln w="25400">
+              <a:solidFill>
+                <a:schemeClr val="tx1"/>
+              </a:solidFill>
+            </a:ln>
+          </p:spPr>
+          <p:style>
+            <a:lnRef idx="2">
+              <a:schemeClr val="accent1"/>
+            </a:lnRef>
+            <a:fillRef idx="0">
+              <a:schemeClr val="accent1"/>
+            </a:fillRef>
+            <a:effectRef idx="1">
+              <a:schemeClr val="accent1"/>
+            </a:effectRef>
+            <a:fontRef idx="minor">
+              <a:schemeClr val="tx1"/>
+            </a:fontRef>
+          </p:style>
+          <p:txBody>
+            <a:bodyPr rtlCol="0" anchor="ctr"/>
+            <a:lstStyle/>
+            <a:p>
+              <a:pPr algn="ctr"/>
+              <a:endParaRPr lang="en-US"/>
+            </a:p>
+          </p:txBody>
+        </p:sp>
+        <p:sp>
+          <p:nvSpPr>
+            <p:cNvPr id="138" name="Left Bracket 137">
+              <a:extLst>
+                <a:ext uri="{FF2B5EF4-FFF2-40B4-BE49-F238E27FC236}">
+                  <a16:creationId xmlns:a16="http://schemas.microsoft.com/office/drawing/2014/main" id="{54A99B00-6DDC-81D6-A6FC-0F3EBC30FE47}"/>
+                </a:ext>
+              </a:extLst>
+            </p:cNvPr>
+            <p:cNvSpPr/>
+            <p:nvPr/>
+          </p:nvSpPr>
+          <p:spPr>
+            <a:xfrm rot="16200000">
+              <a:off x="10525253" y="902102"/>
+              <a:ext cx="369333" cy="901063"/>
+            </a:xfrm>
+            <a:prstGeom prst="leftBracket">
+              <a:avLst/>
+            </a:prstGeom>
+            <a:ln w="25400">
+              <a:solidFill>
+                <a:schemeClr val="tx1"/>
+              </a:solidFill>
+            </a:ln>
+          </p:spPr>
+          <p:style>
+            <a:lnRef idx="2">
+              <a:schemeClr val="accent1"/>
+            </a:lnRef>
+            <a:fillRef idx="0">
+              <a:schemeClr val="accent1"/>
+            </a:fillRef>
+            <a:effectRef idx="1">
+              <a:schemeClr val="accent1"/>
+            </a:effectRef>
+            <a:fontRef idx="minor">
+              <a:schemeClr val="tx1"/>
+            </a:fontRef>
+          </p:style>
+          <p:txBody>
+            <a:bodyPr rtlCol="0" anchor="ctr"/>
+            <a:lstStyle/>
+            <a:p>
+              <a:pPr algn="ctr"/>
+              <a:endParaRPr lang="en-US"/>
+            </a:p>
+          </p:txBody>
+        </p:sp>
+        <p:pic>
+          <p:nvPicPr>
+            <p:cNvPr id="139" name="Graphic 138" descr="Doctor male with solid fill">
+              <a:extLst>
+                <a:ext uri="{FF2B5EF4-FFF2-40B4-BE49-F238E27FC236}">
+                  <a16:creationId xmlns:a16="http://schemas.microsoft.com/office/drawing/2014/main" id="{039E4A87-493F-3C25-B1BD-AC0C02FEC46E}"/>
+                </a:ext>
+              </a:extLst>
+            </p:cNvPr>
+            <p:cNvPicPr>
+              <a:picLocks noChangeAspect="1"/>
+            </p:cNvPicPr>
+            <p:nvPr/>
+          </p:nvPicPr>
+          <p:blipFill>
+            <a:blip>
+              <a:extLst>
+                <a:ext uri="{96DAC541-7B7A-43D3-8B79-37D633B846F1}">
+                  <asvg:svgBlip xmlns:asvg="http://schemas.microsoft.com/office/drawing/2016/SVG/main" r:embed="rId8"/>
+                </a:ext>
+              </a:extLst>
+            </a:blip>
+            <a:stretch>
+              <a:fillRect/>
+            </a:stretch>
+          </p:blipFill>
+          <p:spPr>
+            <a:xfrm>
+              <a:off x="13143139" y="1599471"/>
+              <a:ext cx="636856" cy="636856"/>
+            </a:xfrm>
+            <a:prstGeom prst="rect">
+              <a:avLst/>
+            </a:prstGeom>
+          </p:spPr>
+        </p:pic>
+        <p:pic>
+          <p:nvPicPr>
+            <p:cNvPr id="140" name="Graphic 139" descr="Doctor female with solid fill">
+              <a:extLst>
+                <a:ext uri="{FF2B5EF4-FFF2-40B4-BE49-F238E27FC236}">
+                  <a16:creationId xmlns:a16="http://schemas.microsoft.com/office/drawing/2014/main" id="{7AFFC943-A35F-DB5A-0782-3F8228616BAC}"/>
+                </a:ext>
+              </a:extLst>
+            </p:cNvPr>
+            <p:cNvPicPr>
+              <a:picLocks noChangeAspect="1"/>
+            </p:cNvPicPr>
+            <p:nvPr/>
+          </p:nvPicPr>
+          <p:blipFill>
+            <a:blip>
+              <a:extLst>
+                <a:ext uri="{96DAC541-7B7A-43D3-8B79-37D633B846F1}">
+                  <asvg:svgBlip xmlns:asvg="http://schemas.microsoft.com/office/drawing/2016/SVG/main" r:embed="rId9"/>
+                </a:ext>
+              </a:extLst>
+            </a:blip>
+            <a:stretch>
+              <a:fillRect/>
+            </a:stretch>
+          </p:blipFill>
+          <p:spPr>
+            <a:xfrm>
+              <a:off x="10389017" y="1587847"/>
+              <a:ext cx="636856" cy="636856"/>
+            </a:xfrm>
+            <a:prstGeom prst="rect">
+              <a:avLst/>
+            </a:prstGeom>
+          </p:spPr>
+        </p:pic>
+        <p:pic>
+          <p:nvPicPr>
+            <p:cNvPr id="141" name="Graphic 140" descr="Doctor female with solid fill">
+              <a:extLst>
+                <a:ext uri="{FF2B5EF4-FFF2-40B4-BE49-F238E27FC236}">
+                  <a16:creationId xmlns:a16="http://schemas.microsoft.com/office/drawing/2014/main" id="{F89F9C15-6FCE-2348-F955-9C2213C094BF}"/>
+                </a:ext>
+              </a:extLst>
+            </p:cNvPr>
+            <p:cNvPicPr>
+              <a:picLocks noChangeAspect="1"/>
+            </p:cNvPicPr>
+            <p:nvPr/>
+          </p:nvPicPr>
+          <p:blipFill>
+            <a:blip>
+              <a:extLst>
+                <a:ext uri="{96DAC541-7B7A-43D3-8B79-37D633B846F1}">
+                  <asvg:svgBlip xmlns:asvg="http://schemas.microsoft.com/office/drawing/2016/SVG/main" r:embed="rId9"/>
+                </a:ext>
+              </a:extLst>
+            </a:blip>
+            <a:stretch>
+              <a:fillRect/>
+            </a:stretch>
+          </p:blipFill>
+          <p:spPr>
+            <a:xfrm>
+              <a:off x="14725391" y="1587847"/>
+              <a:ext cx="636856" cy="636856"/>
+            </a:xfrm>
+            <a:prstGeom prst="rect">
+              <a:avLst/>
+            </a:prstGeom>
+          </p:spPr>
+        </p:pic>
+        <p:sp>
+          <p:nvSpPr>
+            <p:cNvPr id="142" name="Left Bracket 141">
+              <a:extLst>
+                <a:ext uri="{FF2B5EF4-FFF2-40B4-BE49-F238E27FC236}">
+                  <a16:creationId xmlns:a16="http://schemas.microsoft.com/office/drawing/2014/main" id="{6190EF7B-D9B9-3B7E-4206-1AE47AFA0CBA}"/>
+                </a:ext>
+              </a:extLst>
+            </p:cNvPr>
+            <p:cNvSpPr/>
+            <p:nvPr/>
+          </p:nvSpPr>
+          <p:spPr>
+            <a:xfrm rot="16200000">
+              <a:off x="14882096" y="897679"/>
+              <a:ext cx="369333" cy="901063"/>
+            </a:xfrm>
+            <a:prstGeom prst="leftBracket">
+              <a:avLst/>
+            </a:prstGeom>
+            <a:ln w="25400">
+              <a:solidFill>
+                <a:schemeClr val="tx1"/>
+              </a:solidFill>
+            </a:ln>
+          </p:spPr>
+          <p:style>
+            <a:lnRef idx="2">
+              <a:schemeClr val="accent1"/>
+            </a:lnRef>
+            <a:fillRef idx="0">
+              <a:schemeClr val="accent1"/>
+            </a:fillRef>
+            <a:effectRef idx="1">
+              <a:schemeClr val="accent1"/>
+            </a:effectRef>
+            <a:fontRef idx="minor">
+              <a:schemeClr val="tx1"/>
+            </a:fontRef>
+          </p:style>
+          <p:txBody>
+            <a:bodyPr rtlCol="0" anchor="ctr"/>
+            <a:lstStyle/>
+            <a:p>
+              <a:pPr algn="ctr"/>
+              <a:endParaRPr lang="en-US"/>
+            </a:p>
+          </p:txBody>
+        </p:sp>
+        <p:sp>
+          <p:nvSpPr>
+            <p:cNvPr id="143" name="Left Bracket 142">
+              <a:extLst>
+                <a:ext uri="{FF2B5EF4-FFF2-40B4-BE49-F238E27FC236}">
+                  <a16:creationId xmlns:a16="http://schemas.microsoft.com/office/drawing/2014/main" id="{3A2E2A98-A02D-9E38-6F03-743B5043FE1A}"/>
+                </a:ext>
+              </a:extLst>
+            </p:cNvPr>
+            <p:cNvSpPr/>
+            <p:nvPr/>
+          </p:nvSpPr>
+          <p:spPr>
+            <a:xfrm rot="16200000">
+              <a:off x="9467346" y="897678"/>
+              <a:ext cx="369333" cy="901063"/>
+            </a:xfrm>
+            <a:prstGeom prst="leftBracket">
+              <a:avLst/>
+            </a:prstGeom>
+            <a:ln w="25400">
+              <a:solidFill>
+                <a:schemeClr val="tx1"/>
+              </a:solidFill>
+            </a:ln>
+          </p:spPr>
+          <p:style>
+            <a:lnRef idx="2">
+              <a:schemeClr val="accent1"/>
+            </a:lnRef>
+            <a:fillRef idx="0">
+              <a:schemeClr val="accent1"/>
+            </a:fillRef>
+            <a:effectRef idx="1">
+              <a:schemeClr val="accent1"/>
+            </a:effectRef>
+            <a:fontRef idx="minor">
+              <a:schemeClr val="tx1"/>
+            </a:fontRef>
+          </p:style>
+          <p:txBody>
+            <a:bodyPr rtlCol="0" anchor="ctr"/>
+            <a:lstStyle/>
+            <a:p>
+              <a:pPr algn="ctr"/>
+              <a:endParaRPr lang="en-US"/>
+            </a:p>
+          </p:txBody>
+        </p:sp>
+        <p:pic>
+          <p:nvPicPr>
+            <p:cNvPr id="144" name="Graphic 143" descr="Doctor male with solid fill">
+              <a:extLst>
+                <a:ext uri="{FF2B5EF4-FFF2-40B4-BE49-F238E27FC236}">
+                  <a16:creationId xmlns:a16="http://schemas.microsoft.com/office/drawing/2014/main" id="{21832ED5-DFE3-3B09-5031-0D5EF240EC4F}"/>
+                </a:ext>
+              </a:extLst>
+            </p:cNvPr>
+            <p:cNvPicPr>
+              <a:picLocks noChangeAspect="1"/>
+            </p:cNvPicPr>
+            <p:nvPr/>
+          </p:nvPicPr>
+          <p:blipFill>
+            <a:blip>
+              <a:extLst>
+                <a:ext uri="{96DAC541-7B7A-43D3-8B79-37D633B846F1}">
+                  <asvg:svgBlip xmlns:asvg="http://schemas.microsoft.com/office/drawing/2016/SVG/main" r:embed="rId8"/>
+                </a:ext>
+              </a:extLst>
+            </a:blip>
+            <a:stretch>
+              <a:fillRect/>
+            </a:stretch>
+          </p:blipFill>
+          <p:spPr>
+            <a:xfrm>
+              <a:off x="9339675" y="1599471"/>
+              <a:ext cx="636856" cy="636856"/>
+            </a:xfrm>
+            <a:prstGeom prst="rect">
+              <a:avLst/>
+            </a:prstGeom>
+          </p:spPr>
+        </p:pic>
+        <mc:AlternateContent xmlns:mc="http://schemas.openxmlformats.org/markup-compatibility/2006">
+          <mc:Choice xmlns:a14="http://schemas.microsoft.com/office/drawing/2010/main" Requires="a14">
+            <p:sp>
+              <p:nvSpPr>
+                <p:cNvPr id="149" name="TextBox 148">
+                  <a:extLst>
+                    <a:ext uri="{FF2B5EF4-FFF2-40B4-BE49-F238E27FC236}">
+                      <a16:creationId xmlns:a16="http://schemas.microsoft.com/office/drawing/2014/main" id="{84CAEA05-165D-1B21-E127-F9C4C0683491}"/>
+                    </a:ext>
+                  </a:extLst>
+                </p:cNvPr>
+                <p:cNvSpPr txBox="1"/>
+                <p:nvPr/>
+              </p:nvSpPr>
+              <p:spPr>
+                <a:xfrm>
+                  <a:off x="7896231" y="707385"/>
+                  <a:ext cx="1126912" cy="1477328"/>
+                </a:xfrm>
+                <a:prstGeom prst="rect">
+                  <a:avLst/>
+                </a:prstGeom>
+                <a:noFill/>
+              </p:spPr>
+              <p:txBody>
+                <a:bodyPr wrap="none" lIns="0" tIns="0" rIns="0" bIns="0" rtlCol="0">
+                  <a:spAutoFit/>
+                </a:bodyPr>
+                <a:lstStyle/>
+                <a:p>
+                  <a14:m>
+                    <m:oMathPara xmlns:m="http://schemas.openxmlformats.org/officeDocument/2006/math">
+                      <m:oMathParaPr>
+                        <m:jc m:val="centerGroup"/>
+                      </m:oMathParaPr>
+                      <m:oMath xmlns:m="http://schemas.openxmlformats.org/officeDocument/2006/math">
+                        <m:r>
+                          <a:rPr lang="en-GB" sz="9600" b="0" i="1" smtClean="0">
+                            <a:latin typeface="Cambria Math" panose="02040503050406030204" pitchFamily="18" charset="0"/>
+                          </a:rPr>
+                          <m:t>~</m:t>
+                        </m:r>
+                      </m:oMath>
+                    </m:oMathPara>
+                  </a14:m>
+                  <a:endParaRPr lang="en-US" sz="9600" dirty="0"/>
+                </a:p>
+              </p:txBody>
+            </p:sp>
+          </mc:Choice>
+          <mc:Fallback>
+            <p:sp>
+              <p:nvSpPr>
+                <p:cNvPr id="149" name="TextBox 148">
+                  <a:extLst>
+                    <a:ext uri="{FF2B5EF4-FFF2-40B4-BE49-F238E27FC236}">
+                      <a16:creationId xmlns:a16="http://schemas.microsoft.com/office/drawing/2014/main" id="{84CAEA05-165D-1B21-E127-F9C4C0683491}"/>
+                    </a:ext>
+                  </a:extLst>
+                </p:cNvPr>
+                <p:cNvSpPr txBox="1">
+                  <a:spLocks noRot="1" noChangeAspect="1" noMove="1" noResize="1" noEditPoints="1" noAdjustHandles="1" noChangeArrowheads="1" noChangeShapeType="1" noTextEdit="1"/>
+                </p:cNvSpPr>
+                <p:nvPr/>
+              </p:nvSpPr>
+              <p:spPr>
+                <a:xfrm>
+                  <a:off x="7896231" y="707385"/>
+                  <a:ext cx="1126912" cy="1477328"/>
+                </a:xfrm>
+                <a:prstGeom prst="rect">
+                  <a:avLst/>
+                </a:prstGeom>
+                <a:blipFill>
+                  <a:blip r:embed="rId11"/>
+                  <a:stretch>
+                    <a:fillRect l="-8889" r="-8889"/>
+                  </a:stretch>
+                </a:blipFill>
+              </p:spPr>
+              <p:txBody>
+                <a:bodyPr/>
+                <a:lstStyle/>
+                <a:p>
+                  <a:r>
+                    <a:rPr lang="en-US">
+                      <a:noFill/>
+                    </a:rPr>
+                    <a:t> </a:t>
+                  </a:r>
+                </a:p>
+              </p:txBody>
+            </p:sp>
+          </mc:Fallback>
+        </mc:AlternateContent>
+      </p:grpSp>
+    </p:spTree>
+    <p:extLst>
+      <p:ext uri="{BB962C8B-B14F-4D97-AF65-F5344CB8AC3E}">
+        <p14:creationId xmlns:p14="http://schemas.microsoft.com/office/powerpoint/2010/main" val="1953519320"/>
       </p:ext>
     </p:extLst>
   </p:cSld>

--- a/images/icu.pptx
+++ b/images/icu.pptx
@@ -3900,10 +3900,10 @@
       </p:grpSpPr>
       <p:grpSp>
         <p:nvGrpSpPr>
-          <p:cNvPr id="8" name="Group 7">
+          <p:cNvPr id="28" name="Group 27">
             <a:extLst>
               <a:ext uri="{FF2B5EF4-FFF2-40B4-BE49-F238E27FC236}">
-                <a16:creationId xmlns:a16="http://schemas.microsoft.com/office/drawing/2014/main" id="{7819292F-E7D8-28A1-7327-66AE9B1ADB47}"/>
+                <a16:creationId xmlns:a16="http://schemas.microsoft.com/office/drawing/2014/main" id="{67B37151-7E1B-ABAC-85B2-A8D6273AA92E}"/>
               </a:ext>
             </a:extLst>
           </p:cNvPr>
@@ -3918,6 +3918,214 @@
             <a:chExt cx="14891756" cy="5751433"/>
           </a:xfrm>
         </p:grpSpPr>
+        <p:sp>
+          <p:nvSpPr>
+            <p:cNvPr id="21" name="Rounded Rectangle 20">
+              <a:extLst>
+                <a:ext uri="{FF2B5EF4-FFF2-40B4-BE49-F238E27FC236}">
+                  <a16:creationId xmlns:a16="http://schemas.microsoft.com/office/drawing/2014/main" id="{21C98AAB-6CA6-20DB-A41F-3B1994D7723E}"/>
+                </a:ext>
+              </a:extLst>
+            </p:cNvPr>
+            <p:cNvSpPr/>
+            <p:nvPr/>
+          </p:nvSpPr>
+          <p:spPr>
+            <a:xfrm>
+              <a:off x="6241624" y="1172581"/>
+              <a:ext cx="2667896" cy="740158"/>
+            </a:xfrm>
+            <a:prstGeom prst="roundRect">
+              <a:avLst>
+                <a:gd name="adj" fmla="val 12460"/>
+              </a:avLst>
+            </a:prstGeom>
+            <a:solidFill>
+              <a:schemeClr val="bg2"/>
+            </a:solidFill>
+            <a:ln w="38100"/>
+          </p:spPr>
+          <p:style>
+            <a:lnRef idx="2">
+              <a:schemeClr val="accent1">
+                <a:shade val="15000"/>
+              </a:schemeClr>
+            </a:lnRef>
+            <a:fillRef idx="1">
+              <a:schemeClr val="accent1"/>
+            </a:fillRef>
+            <a:effectRef idx="0">
+              <a:schemeClr val="accent1"/>
+            </a:effectRef>
+            <a:fontRef idx="minor">
+              <a:schemeClr val="lt1"/>
+            </a:fontRef>
+          </p:style>
+          <p:txBody>
+            <a:bodyPr rtlCol="0" anchor="ctr"/>
+            <a:lstStyle/>
+            <a:p>
+              <a:pPr algn="ctr"/>
+              <a:endParaRPr lang="en-US"/>
+            </a:p>
+          </p:txBody>
+        </p:sp>
+        <p:sp>
+          <p:nvSpPr>
+            <p:cNvPr id="22" name="Rounded Rectangle 21">
+              <a:extLst>
+                <a:ext uri="{FF2B5EF4-FFF2-40B4-BE49-F238E27FC236}">
+                  <a16:creationId xmlns:a16="http://schemas.microsoft.com/office/drawing/2014/main" id="{BC95A054-F441-EF31-B0FE-A824E31CF48E}"/>
+                </a:ext>
+              </a:extLst>
+            </p:cNvPr>
+            <p:cNvSpPr/>
+            <p:nvPr/>
+          </p:nvSpPr>
+          <p:spPr>
+            <a:xfrm>
+              <a:off x="9249480" y="1158429"/>
+              <a:ext cx="2667896" cy="740158"/>
+            </a:xfrm>
+            <a:prstGeom prst="roundRect">
+              <a:avLst>
+                <a:gd name="adj" fmla="val 12460"/>
+              </a:avLst>
+            </a:prstGeom>
+            <a:solidFill>
+              <a:schemeClr val="bg2"/>
+            </a:solidFill>
+            <a:ln w="38100"/>
+          </p:spPr>
+          <p:style>
+            <a:lnRef idx="2">
+              <a:schemeClr val="accent1">
+                <a:shade val="15000"/>
+              </a:schemeClr>
+            </a:lnRef>
+            <a:fillRef idx="1">
+              <a:schemeClr val="accent1"/>
+            </a:fillRef>
+            <a:effectRef idx="0">
+              <a:schemeClr val="accent1"/>
+            </a:effectRef>
+            <a:fontRef idx="minor">
+              <a:schemeClr val="lt1"/>
+            </a:fontRef>
+          </p:style>
+          <p:txBody>
+            <a:bodyPr rtlCol="0" anchor="ctr"/>
+            <a:lstStyle/>
+            <a:p>
+              <a:pPr algn="ctr"/>
+              <a:endParaRPr lang="en-US"/>
+            </a:p>
+          </p:txBody>
+        </p:sp>
+        <p:sp>
+          <p:nvSpPr>
+            <p:cNvPr id="19" name="Rounded Rectangle 18">
+              <a:extLst>
+                <a:ext uri="{FF2B5EF4-FFF2-40B4-BE49-F238E27FC236}">
+                  <a16:creationId xmlns:a16="http://schemas.microsoft.com/office/drawing/2014/main" id="{C0A9E794-92D6-58C9-F037-AC37A9A59019}"/>
+                </a:ext>
+              </a:extLst>
+            </p:cNvPr>
+            <p:cNvSpPr/>
+            <p:nvPr/>
+          </p:nvSpPr>
+          <p:spPr>
+            <a:xfrm>
+              <a:off x="3239846" y="2073805"/>
+              <a:ext cx="2667896" cy="740158"/>
+            </a:xfrm>
+            <a:prstGeom prst="roundRect">
+              <a:avLst>
+                <a:gd name="adj" fmla="val 10876"/>
+              </a:avLst>
+            </a:prstGeom>
+            <a:solidFill>
+              <a:schemeClr val="bg2"/>
+            </a:solidFill>
+            <a:ln w="38100"/>
+          </p:spPr>
+          <p:style>
+            <a:lnRef idx="2">
+              <a:schemeClr val="accent1">
+                <a:shade val="15000"/>
+              </a:schemeClr>
+            </a:lnRef>
+            <a:fillRef idx="1">
+              <a:schemeClr val="accent1"/>
+            </a:fillRef>
+            <a:effectRef idx="0">
+              <a:schemeClr val="accent1"/>
+            </a:effectRef>
+            <a:fontRef idx="minor">
+              <a:schemeClr val="lt1"/>
+            </a:fontRef>
+          </p:style>
+          <p:txBody>
+            <a:bodyPr rtlCol="0" anchor="ctr"/>
+            <a:lstStyle/>
+            <a:p>
+              <a:pPr algn="ctr"/>
+              <a:endParaRPr lang="en-US"/>
+            </a:p>
+          </p:txBody>
+        </p:sp>
+        <p:sp>
+          <p:nvSpPr>
+            <p:cNvPr id="20" name="Rounded Rectangle 19">
+              <a:extLst>
+                <a:ext uri="{FF2B5EF4-FFF2-40B4-BE49-F238E27FC236}">
+                  <a16:creationId xmlns:a16="http://schemas.microsoft.com/office/drawing/2014/main" id="{0B45577F-E9D8-9955-87C6-8CDD356067F0}"/>
+                </a:ext>
+              </a:extLst>
+            </p:cNvPr>
+            <p:cNvSpPr/>
+            <p:nvPr/>
+          </p:nvSpPr>
+          <p:spPr>
+            <a:xfrm>
+              <a:off x="3233768" y="1172581"/>
+              <a:ext cx="2667896" cy="740158"/>
+            </a:xfrm>
+            <a:prstGeom prst="roundRect">
+              <a:avLst>
+                <a:gd name="adj" fmla="val 12460"/>
+              </a:avLst>
+            </a:prstGeom>
+            <a:solidFill>
+              <a:schemeClr val="bg2"/>
+            </a:solidFill>
+            <a:ln w="38100"/>
+          </p:spPr>
+          <p:style>
+            <a:lnRef idx="2">
+              <a:schemeClr val="accent1">
+                <a:shade val="15000"/>
+              </a:schemeClr>
+            </a:lnRef>
+            <a:fillRef idx="1">
+              <a:schemeClr val="accent1"/>
+            </a:fillRef>
+            <a:effectRef idx="0">
+              <a:schemeClr val="accent1"/>
+            </a:effectRef>
+            <a:fontRef idx="minor">
+              <a:schemeClr val="lt1"/>
+            </a:fontRef>
+          </p:style>
+          <p:txBody>
+            <a:bodyPr rtlCol="0" anchor="ctr"/>
+            <a:lstStyle/>
+            <a:p>
+              <a:pPr algn="ctr"/>
+              <a:endParaRPr lang="en-US"/>
+            </a:p>
+          </p:txBody>
+        </p:sp>
         <p:sp>
           <p:nvSpPr>
             <p:cNvPr id="4" name="Rounded Rectangle 3">
@@ -3984,8 +4192,8 @@
           </p:nvSpPr>
           <p:spPr>
             <a:xfrm>
-              <a:off x="3239846" y="1172582"/>
-              <a:ext cx="2667896" cy="5228213"/>
+              <a:off x="3239846" y="2942492"/>
+              <a:ext cx="2667896" cy="3458303"/>
             </a:xfrm>
             <a:prstGeom prst="roundRect">
               <a:avLst>
@@ -4036,8 +4244,8 @@
           </p:nvSpPr>
           <p:spPr>
             <a:xfrm>
-              <a:off x="6253780" y="1172581"/>
-              <a:ext cx="2667896" cy="5228213"/>
+              <a:off x="6253780" y="2091537"/>
+              <a:ext cx="2667896" cy="4309257"/>
             </a:xfrm>
             <a:prstGeom prst="roundRect">
               <a:avLst>
@@ -4088,8 +4296,8 @@
           </p:nvSpPr>
           <p:spPr>
             <a:xfrm>
-              <a:off x="9267714" y="1172581"/>
-              <a:ext cx="2667896" cy="5228213"/>
+              <a:off x="9267714" y="2073805"/>
+              <a:ext cx="2667896" cy="4326989"/>
             </a:xfrm>
             <a:prstGeom prst="roundRect">
               <a:avLst>
@@ -4266,132 +4474,6 @@
             </a:p>
           </p:txBody>
         </p:sp>
-        <p:cxnSp>
-          <p:nvCxnSpPr>
-            <p:cNvPr id="23" name="Straight Connector 22">
-              <a:extLst>
-                <a:ext uri="{FF2B5EF4-FFF2-40B4-BE49-F238E27FC236}">
-                  <a16:creationId xmlns:a16="http://schemas.microsoft.com/office/drawing/2014/main" id="{1BEF9433-03AC-D6B3-A3B6-38D7FD92F7F8}"/>
-                </a:ext>
-              </a:extLst>
-            </p:cNvPr>
-            <p:cNvCxnSpPr/>
-            <p:nvPr/>
-          </p:nvCxnSpPr>
-          <p:spPr>
-            <a:xfrm>
-              <a:off x="3239846" y="1916653"/>
-              <a:ext cx="2667896" cy="0"/>
-            </a:xfrm>
-            <a:prstGeom prst="line">
-              <a:avLst/>
-            </a:prstGeom>
-            <a:ln w="34925">
-              <a:solidFill>
-                <a:schemeClr val="tx1"/>
-              </a:solidFill>
-              <a:prstDash val="dash"/>
-            </a:ln>
-          </p:spPr>
-          <p:style>
-            <a:lnRef idx="2">
-              <a:schemeClr val="accent1"/>
-            </a:lnRef>
-            <a:fillRef idx="0">
-              <a:schemeClr val="accent1"/>
-            </a:fillRef>
-            <a:effectRef idx="1">
-              <a:schemeClr val="accent1"/>
-            </a:effectRef>
-            <a:fontRef idx="minor">
-              <a:schemeClr val="tx1"/>
-            </a:fontRef>
-          </p:style>
-        </p:cxnSp>
-        <p:cxnSp>
-          <p:nvCxnSpPr>
-            <p:cNvPr id="32" name="Straight Connector 31">
-              <a:extLst>
-                <a:ext uri="{FF2B5EF4-FFF2-40B4-BE49-F238E27FC236}">
-                  <a16:creationId xmlns:a16="http://schemas.microsoft.com/office/drawing/2014/main" id="{7E0D07E9-5C9D-B412-BCED-1F0849BA94C1}"/>
-                </a:ext>
-              </a:extLst>
-            </p:cNvPr>
-            <p:cNvCxnSpPr/>
-            <p:nvPr/>
-          </p:nvCxnSpPr>
-          <p:spPr>
-            <a:xfrm>
-              <a:off x="6253780" y="1909480"/>
-              <a:ext cx="2667896" cy="0"/>
-            </a:xfrm>
-            <a:prstGeom prst="line">
-              <a:avLst/>
-            </a:prstGeom>
-            <a:ln w="34925">
-              <a:solidFill>
-                <a:schemeClr val="tx1"/>
-              </a:solidFill>
-              <a:prstDash val="dash"/>
-            </a:ln>
-          </p:spPr>
-          <p:style>
-            <a:lnRef idx="2">
-              <a:schemeClr val="accent1"/>
-            </a:lnRef>
-            <a:fillRef idx="0">
-              <a:schemeClr val="accent1"/>
-            </a:fillRef>
-            <a:effectRef idx="1">
-              <a:schemeClr val="accent1"/>
-            </a:effectRef>
-            <a:fontRef idx="minor">
-              <a:schemeClr val="tx1"/>
-            </a:fontRef>
-          </p:style>
-        </p:cxnSp>
-        <p:cxnSp>
-          <p:nvCxnSpPr>
-            <p:cNvPr id="33" name="Straight Connector 32">
-              <a:extLst>
-                <a:ext uri="{FF2B5EF4-FFF2-40B4-BE49-F238E27FC236}">
-                  <a16:creationId xmlns:a16="http://schemas.microsoft.com/office/drawing/2014/main" id="{0A6B6FB1-6B06-D93C-DA48-2B45E93F2615}"/>
-                </a:ext>
-              </a:extLst>
-            </p:cNvPr>
-            <p:cNvCxnSpPr/>
-            <p:nvPr/>
-          </p:nvCxnSpPr>
-          <p:spPr>
-            <a:xfrm>
-              <a:off x="9267714" y="1895134"/>
-              <a:ext cx="2667896" cy="0"/>
-            </a:xfrm>
-            <a:prstGeom prst="line">
-              <a:avLst/>
-            </a:prstGeom>
-            <a:ln w="34925">
-              <a:solidFill>
-                <a:schemeClr val="tx1"/>
-              </a:solidFill>
-              <a:prstDash val="dash"/>
-            </a:ln>
-          </p:spPr>
-          <p:style>
-            <a:lnRef idx="2">
-              <a:schemeClr val="accent1"/>
-            </a:lnRef>
-            <a:fillRef idx="0">
-              <a:schemeClr val="accent1"/>
-            </a:fillRef>
-            <a:effectRef idx="1">
-              <a:schemeClr val="accent1"/>
-            </a:effectRef>
-            <a:fontRef idx="minor">
-              <a:schemeClr val="tx1"/>
-            </a:fontRef>
-          </p:style>
-        </p:cxnSp>
         <p:pic>
           <p:nvPicPr>
             <p:cNvPr id="38" name="Graphic 37" descr="Sleep with solid fill">
@@ -4699,7 +4781,7 @@
           </p:blipFill>
           <p:spPr>
             <a:xfrm>
-              <a:off x="4256446" y="1265370"/>
+              <a:off x="4256446" y="1218478"/>
               <a:ext cx="634696" cy="634696"/>
             </a:xfrm>
             <a:prstGeom prst="rect">
@@ -4734,7 +4816,7 @@
           </p:blipFill>
           <p:spPr>
             <a:xfrm>
-              <a:off x="7270380" y="1261784"/>
+              <a:off x="7270380" y="1226615"/>
               <a:ext cx="634696" cy="634696"/>
             </a:xfrm>
             <a:prstGeom prst="rect">
@@ -4769,7 +4851,7 @@
           </p:blipFill>
           <p:spPr>
             <a:xfrm>
-              <a:off x="10284314" y="1261784"/>
+              <a:off x="10284314" y="1214892"/>
               <a:ext cx="634696" cy="634696"/>
             </a:xfrm>
             <a:prstGeom prst="rect">
@@ -5504,7 +5586,7 @@
           </p:blipFill>
           <p:spPr>
             <a:xfrm>
-              <a:off x="6737464" y="4073560"/>
+              <a:off x="6737464" y="4321078"/>
               <a:ext cx="634696" cy="634696"/>
             </a:xfrm>
             <a:prstGeom prst="rect">
@@ -5539,7 +5621,7 @@
           </p:blipFill>
           <p:spPr>
             <a:xfrm>
-              <a:off x="7803296" y="4073560"/>
+              <a:off x="7803296" y="4321078"/>
               <a:ext cx="634696" cy="634696"/>
             </a:xfrm>
             <a:prstGeom prst="rect">
@@ -5574,7 +5656,7 @@
           </p:blipFill>
           <p:spPr>
             <a:xfrm>
-              <a:off x="7232534" y="4912649"/>
+              <a:off x="7232534" y="5160167"/>
               <a:ext cx="634696" cy="634696"/>
             </a:xfrm>
             <a:prstGeom prst="rect">
@@ -5582,48 +5664,6 @@
             </a:prstGeom>
           </p:spPr>
         </p:pic>
-        <p:cxnSp>
-          <p:nvCxnSpPr>
-            <p:cNvPr id="141" name="Straight Connector 140">
-              <a:extLst>
-                <a:ext uri="{FF2B5EF4-FFF2-40B4-BE49-F238E27FC236}">
-                  <a16:creationId xmlns:a16="http://schemas.microsoft.com/office/drawing/2014/main" id="{F85ED1AE-129F-F15E-72DA-824C1F89B163}"/>
-                </a:ext>
-              </a:extLst>
-            </p:cNvPr>
-            <p:cNvCxnSpPr/>
-            <p:nvPr/>
-          </p:nvCxnSpPr>
-          <p:spPr>
-            <a:xfrm>
-              <a:off x="3239846" y="2754416"/>
-              <a:ext cx="2667896" cy="0"/>
-            </a:xfrm>
-            <a:prstGeom prst="line">
-              <a:avLst/>
-            </a:prstGeom>
-            <a:ln w="34925">
-              <a:solidFill>
-                <a:schemeClr val="tx1"/>
-              </a:solidFill>
-              <a:prstDash val="dash"/>
-            </a:ln>
-          </p:spPr>
-          <p:style>
-            <a:lnRef idx="2">
-              <a:schemeClr val="accent1"/>
-            </a:lnRef>
-            <a:fillRef idx="0">
-              <a:schemeClr val="accent1"/>
-            </a:fillRef>
-            <a:effectRef idx="1">
-              <a:schemeClr val="accent1"/>
-            </a:effectRef>
-            <a:fontRef idx="minor">
-              <a:schemeClr val="tx1"/>
-            </a:fontRef>
-          </p:style>
-        </p:cxnSp>
         <p:pic>
           <p:nvPicPr>
             <p:cNvPr id="142" name="Graphic 141" descr="Sleep with solid fill">
@@ -5651,7 +5691,7 @@
           </p:blipFill>
           <p:spPr>
             <a:xfrm>
-              <a:off x="4256446" y="2056368"/>
+              <a:off x="4256446" y="2103260"/>
               <a:ext cx="634696" cy="634696"/>
             </a:xfrm>
             <a:prstGeom prst="rect">
@@ -5900,7 +5940,7 @@
           <p:spPr>
             <a:xfrm>
               <a:off x="225912" y="3803847"/>
-              <a:ext cx="1456132" cy="0"/>
+              <a:ext cx="1866864" cy="8103"/>
             </a:xfrm>
             <a:prstGeom prst="line">
               <a:avLst/>
@@ -5944,7 +5984,95 @@
           <p:spPr>
             <a:xfrm>
               <a:off x="9267714" y="4122861"/>
-              <a:ext cx="1456132" cy="0"/>
+              <a:ext cx="1897342" cy="0"/>
+            </a:xfrm>
+            <a:prstGeom prst="line">
+              <a:avLst/>
+            </a:prstGeom>
+            <a:ln w="47625">
+              <a:solidFill>
+                <a:schemeClr val="tx1"/>
+              </a:solidFill>
+              <a:prstDash val="sysDot"/>
+            </a:ln>
+          </p:spPr>
+          <p:style>
+            <a:lnRef idx="2">
+              <a:schemeClr val="accent1"/>
+            </a:lnRef>
+            <a:fillRef idx="0">
+              <a:schemeClr val="accent1"/>
+            </a:fillRef>
+            <a:effectRef idx="1">
+              <a:schemeClr val="accent1"/>
+            </a:effectRef>
+            <a:fontRef idx="minor">
+              <a:schemeClr val="tx1"/>
+            </a:fontRef>
+          </p:style>
+        </p:cxnSp>
+        <p:cxnSp>
+          <p:nvCxnSpPr>
+            <p:cNvPr id="6" name="Straight Connector 5">
+              <a:extLst>
+                <a:ext uri="{FF2B5EF4-FFF2-40B4-BE49-F238E27FC236}">
+                  <a16:creationId xmlns:a16="http://schemas.microsoft.com/office/drawing/2014/main" id="{21B22427-5507-8097-FC57-9EDC00D8BF7F}"/>
+                </a:ext>
+              </a:extLst>
+            </p:cNvPr>
+            <p:cNvCxnSpPr>
+              <a:cxnSpLocks/>
+            </p:cNvCxnSpPr>
+            <p:nvPr/>
+          </p:nvCxnSpPr>
+          <p:spPr>
+            <a:xfrm>
+              <a:off x="3239846" y="4690380"/>
+              <a:ext cx="1866470" cy="17876"/>
+            </a:xfrm>
+            <a:prstGeom prst="line">
+              <a:avLst/>
+            </a:prstGeom>
+            <a:ln w="47625">
+              <a:solidFill>
+                <a:schemeClr val="tx1"/>
+              </a:solidFill>
+              <a:prstDash val="sysDot"/>
+            </a:ln>
+          </p:spPr>
+          <p:style>
+            <a:lnRef idx="2">
+              <a:schemeClr val="accent1"/>
+            </a:lnRef>
+            <a:fillRef idx="0">
+              <a:schemeClr val="accent1"/>
+            </a:fillRef>
+            <a:effectRef idx="1">
+              <a:schemeClr val="accent1"/>
+            </a:effectRef>
+            <a:fontRef idx="minor">
+              <a:schemeClr val="tx1"/>
+            </a:fontRef>
+          </p:style>
+        </p:cxnSp>
+        <p:cxnSp>
+          <p:nvCxnSpPr>
+            <p:cNvPr id="16" name="Straight Connector 15">
+              <a:extLst>
+                <a:ext uri="{FF2B5EF4-FFF2-40B4-BE49-F238E27FC236}">
+                  <a16:creationId xmlns:a16="http://schemas.microsoft.com/office/drawing/2014/main" id="{BE2184ED-F722-140A-3DE8-7AA5D8CD27E3}"/>
+                </a:ext>
+              </a:extLst>
+            </p:cNvPr>
+            <p:cNvCxnSpPr>
+              <a:cxnSpLocks/>
+            </p:cNvCxnSpPr>
+            <p:nvPr/>
+          </p:nvCxnSpPr>
+          <p:spPr>
+            <a:xfrm>
+              <a:off x="6253780" y="4184442"/>
+              <a:ext cx="1866864" cy="2074"/>
             </a:xfrm>
             <a:prstGeom prst="line">
               <a:avLst/>
@@ -11533,10 +11661,10 @@
       </p:grpSpPr>
       <p:grpSp>
         <p:nvGrpSpPr>
-          <p:cNvPr id="5" name="Group 4">
+          <p:cNvPr id="9" name="Group 8">
             <a:extLst>
               <a:ext uri="{FF2B5EF4-FFF2-40B4-BE49-F238E27FC236}">
-                <a16:creationId xmlns:a16="http://schemas.microsoft.com/office/drawing/2014/main" id="{F6595D03-EB6E-3E3E-BD60-5E2D5286FCE4}"/>
+                <a16:creationId xmlns:a16="http://schemas.microsoft.com/office/drawing/2014/main" id="{6135155F-FDB0-DFEE-0F54-FF0D62DFCAF6}"/>
               </a:ext>
             </a:extLst>
           </p:cNvPr>
@@ -12271,7 +12399,7 @@
           <p:spPr>
             <a:xfrm>
               <a:off x="558779" y="2753115"/>
-              <a:ext cx="7772421" cy="1216301"/>
+              <a:ext cx="4413929" cy="1216301"/>
             </a:xfrm>
             <a:prstGeom prst="roundRect">
               <a:avLst>
@@ -13041,6 +13169,64 @@
             <a:xfrm>
               <a:off x="5015752" y="4361056"/>
               <a:ext cx="4413929" cy="1216301"/>
+            </a:xfrm>
+            <a:prstGeom prst="roundRect">
+              <a:avLst>
+                <a:gd name="adj" fmla="val 36591"/>
+              </a:avLst>
+            </a:prstGeom>
+            <a:solidFill>
+              <a:srgbClr val="00B0F0">
+                <a:alpha val="25714"/>
+              </a:srgbClr>
+            </a:solidFill>
+            <a:ln w="34925">
+              <a:solidFill>
+                <a:srgbClr val="0070C0"/>
+              </a:solidFill>
+            </a:ln>
+          </p:spPr>
+          <p:style>
+            <a:lnRef idx="2">
+              <a:schemeClr val="accent1">
+                <a:shade val="15000"/>
+              </a:schemeClr>
+            </a:lnRef>
+            <a:fillRef idx="1">
+              <a:schemeClr val="accent1"/>
+            </a:fillRef>
+            <a:effectRef idx="0">
+              <a:schemeClr val="accent1"/>
+            </a:effectRef>
+            <a:fontRef idx="minor">
+              <a:schemeClr val="lt1"/>
+            </a:fontRef>
+          </p:style>
+          <p:txBody>
+            <a:bodyPr rtlCol="0" anchor="ctr"/>
+            <a:lstStyle/>
+            <a:p>
+              <a:pPr algn="ctr"/>
+              <a:endParaRPr lang="en-US"/>
+            </a:p>
+          </p:txBody>
+        </p:sp>
+        <p:sp>
+          <p:nvSpPr>
+            <p:cNvPr id="2" name="Rounded Rectangle 1">
+              <a:extLst>
+                <a:ext uri="{FF2B5EF4-FFF2-40B4-BE49-F238E27FC236}">
+                  <a16:creationId xmlns:a16="http://schemas.microsoft.com/office/drawing/2014/main" id="{4EAD0853-0B61-56E8-F5DF-732583AFBAA1}"/>
+                </a:ext>
+              </a:extLst>
+            </p:cNvPr>
+            <p:cNvSpPr/>
+            <p:nvPr/>
+          </p:nvSpPr>
+          <p:spPr>
+            <a:xfrm>
+              <a:off x="5044867" y="2769053"/>
+              <a:ext cx="3208180" cy="1216301"/>
             </a:xfrm>
             <a:prstGeom prst="roundRect">
               <a:avLst>
@@ -13122,10 +13308,10 @@
       </p:grpSpPr>
       <p:grpSp>
         <p:nvGrpSpPr>
-          <p:cNvPr id="4" name="Group 3">
+          <p:cNvPr id="11" name="Group 10">
             <a:extLst>
               <a:ext uri="{FF2B5EF4-FFF2-40B4-BE49-F238E27FC236}">
-                <a16:creationId xmlns:a16="http://schemas.microsoft.com/office/drawing/2014/main" id="{1A4A71B0-9642-F627-57C5-ED44E2AD9A09}"/>
+                <a16:creationId xmlns:a16="http://schemas.microsoft.com/office/drawing/2014/main" id="{FBD1AB9F-99B8-489C-7E92-38C8B550159A}"/>
               </a:ext>
             </a:extLst>
           </p:cNvPr>
@@ -13197,6 +13383,122 @@
         </p:sp>
         <p:sp>
           <p:nvSpPr>
+            <p:cNvPr id="2" name="Rounded Rectangle 1">
+              <a:extLst>
+                <a:ext uri="{FF2B5EF4-FFF2-40B4-BE49-F238E27FC236}">
+                  <a16:creationId xmlns:a16="http://schemas.microsoft.com/office/drawing/2014/main" id="{9F7A5CA0-D1B4-5B79-524D-9ED242F9E643}"/>
+                </a:ext>
+              </a:extLst>
+            </p:cNvPr>
+            <p:cNvSpPr/>
+            <p:nvPr/>
+          </p:nvSpPr>
+          <p:spPr>
+            <a:xfrm>
+              <a:off x="5255767" y="3614372"/>
+              <a:ext cx="4305899" cy="2097152"/>
+            </a:xfrm>
+            <a:prstGeom prst="roundRect">
+              <a:avLst>
+                <a:gd name="adj" fmla="val 21519"/>
+              </a:avLst>
+            </a:prstGeom>
+            <a:solidFill>
+              <a:srgbClr val="00B0F0">
+                <a:alpha val="25714"/>
+              </a:srgbClr>
+            </a:solidFill>
+            <a:ln w="34925">
+              <a:solidFill>
+                <a:srgbClr val="0070C0"/>
+              </a:solidFill>
+            </a:ln>
+          </p:spPr>
+          <p:style>
+            <a:lnRef idx="2">
+              <a:schemeClr val="accent1">
+                <a:shade val="15000"/>
+              </a:schemeClr>
+            </a:lnRef>
+            <a:fillRef idx="1">
+              <a:schemeClr val="accent1"/>
+            </a:fillRef>
+            <a:effectRef idx="0">
+              <a:schemeClr val="accent1"/>
+            </a:effectRef>
+            <a:fontRef idx="minor">
+              <a:schemeClr val="lt1"/>
+            </a:fontRef>
+          </p:style>
+          <p:txBody>
+            <a:bodyPr rtlCol="0" anchor="ctr"/>
+            <a:lstStyle/>
+            <a:p>
+              <a:pPr algn="ctr"/>
+              <a:endParaRPr lang="en-US"/>
+            </a:p>
+          </p:txBody>
+        </p:sp>
+        <p:sp>
+          <p:nvSpPr>
+            <p:cNvPr id="9" name="Rounded Rectangle 8">
+              <a:extLst>
+                <a:ext uri="{FF2B5EF4-FFF2-40B4-BE49-F238E27FC236}">
+                  <a16:creationId xmlns:a16="http://schemas.microsoft.com/office/drawing/2014/main" id="{76BC5ABA-6562-07B4-6926-71C292AA4F8B}"/>
+                </a:ext>
+              </a:extLst>
+            </p:cNvPr>
+            <p:cNvSpPr/>
+            <p:nvPr/>
+          </p:nvSpPr>
+          <p:spPr>
+            <a:xfrm>
+              <a:off x="5255766" y="1367293"/>
+              <a:ext cx="3360899" cy="2097152"/>
+            </a:xfrm>
+            <a:prstGeom prst="roundRect">
+              <a:avLst>
+                <a:gd name="adj" fmla="val 21519"/>
+              </a:avLst>
+            </a:prstGeom>
+            <a:solidFill>
+              <a:srgbClr val="00B0F0">
+                <a:alpha val="25714"/>
+              </a:srgbClr>
+            </a:solidFill>
+            <a:ln w="34925">
+              <a:solidFill>
+                <a:srgbClr val="0070C0"/>
+              </a:solidFill>
+            </a:ln>
+          </p:spPr>
+          <p:style>
+            <a:lnRef idx="2">
+              <a:schemeClr val="accent1">
+                <a:shade val="15000"/>
+              </a:schemeClr>
+            </a:lnRef>
+            <a:fillRef idx="1">
+              <a:schemeClr val="accent1"/>
+            </a:fillRef>
+            <a:effectRef idx="0">
+              <a:schemeClr val="accent1"/>
+            </a:effectRef>
+            <a:fontRef idx="minor">
+              <a:schemeClr val="lt1"/>
+            </a:fontRef>
+          </p:style>
+          <p:txBody>
+            <a:bodyPr rtlCol="0" anchor="ctr"/>
+            <a:lstStyle/>
+            <a:p>
+              <a:pPr algn="ctr"/>
+              <a:endParaRPr lang="en-US"/>
+            </a:p>
+          </p:txBody>
+        </p:sp>
+        <p:sp>
+          <p:nvSpPr>
             <p:cNvPr id="113" name="Rounded Rectangle 112">
               <a:extLst>
                 <a:ext uri="{FF2B5EF4-FFF2-40B4-BE49-F238E27FC236}">
@@ -13210,7 +13512,7 @@
           <p:spPr>
             <a:xfrm>
               <a:off x="667897" y="1373741"/>
-              <a:ext cx="7791352" cy="2097152"/>
+              <a:ext cx="4420820" cy="2097152"/>
             </a:xfrm>
             <a:prstGeom prst="roundRect">
               <a:avLst>
@@ -14463,7 +14765,7 @@
           </p:blipFill>
           <p:spPr>
             <a:xfrm>
-              <a:off x="5307934" y="1709327"/>
+              <a:off x="5507225" y="1709327"/>
               <a:ext cx="634696" cy="634696"/>
             </a:xfrm>
             <a:prstGeom prst="rect">
@@ -14498,7 +14800,7 @@
           </p:blipFill>
           <p:spPr>
             <a:xfrm>
-              <a:off x="6373766" y="1709327"/>
+              <a:off x="6573057" y="1709327"/>
               <a:ext cx="634696" cy="634696"/>
             </a:xfrm>
             <a:prstGeom prst="rect">
@@ -14533,7 +14835,7 @@
           </p:blipFill>
           <p:spPr>
             <a:xfrm>
-              <a:off x="7483099" y="1709327"/>
+              <a:off x="7682390" y="1709327"/>
               <a:ext cx="634696" cy="634696"/>
             </a:xfrm>
             <a:prstGeom prst="rect">
@@ -14695,7 +14997,7 @@
           </p:nvSpPr>
           <p:spPr>
             <a:xfrm>
-              <a:off x="5353803" y="1559400"/>
+              <a:off x="5553094" y="1559400"/>
               <a:ext cx="570990" cy="369332"/>
             </a:xfrm>
             <a:prstGeom prst="rect">
@@ -14730,7 +15032,7 @@
           </p:nvSpPr>
           <p:spPr>
             <a:xfrm>
-              <a:off x="6415608" y="1559400"/>
+              <a:off x="6614899" y="1559400"/>
               <a:ext cx="570990" cy="369332"/>
             </a:xfrm>
             <a:prstGeom prst="rect">
@@ -14765,7 +15067,7 @@
           </p:nvSpPr>
           <p:spPr>
             <a:xfrm>
-              <a:off x="7482268" y="1559400"/>
+              <a:off x="7681559" y="1559400"/>
               <a:ext cx="570990" cy="369332"/>
             </a:xfrm>
             <a:prstGeom prst="rect">
@@ -15020,7 +15322,7 @@
           </p:blipFill>
           <p:spPr>
             <a:xfrm>
-              <a:off x="5858049" y="2570222"/>
+              <a:off x="6057340" y="2570222"/>
               <a:ext cx="636856" cy="636856"/>
             </a:xfrm>
             <a:prstGeom prst="rect">
@@ -15219,7 +15521,7 @@
           </p:nvSpPr>
           <p:spPr>
             <a:xfrm rot="16200000">
-              <a:off x="5991811" y="1321673"/>
+              <a:off x="6191102" y="1321673"/>
               <a:ext cx="369333" cy="2035851"/>
             </a:xfrm>
             <a:prstGeom prst="leftBracket">
@@ -15467,64 +15769,6 @@
             </a:prstGeom>
           </p:spPr>
         </p:pic>
-        <p:sp>
-          <p:nvSpPr>
-            <p:cNvPr id="2" name="Rounded Rectangle 1">
-              <a:extLst>
-                <a:ext uri="{FF2B5EF4-FFF2-40B4-BE49-F238E27FC236}">
-                  <a16:creationId xmlns:a16="http://schemas.microsoft.com/office/drawing/2014/main" id="{9F7A5CA0-D1B4-5B79-524D-9ED242F9E643}"/>
-                </a:ext>
-              </a:extLst>
-            </p:cNvPr>
-            <p:cNvSpPr/>
-            <p:nvPr/>
-          </p:nvSpPr>
-          <p:spPr>
-            <a:xfrm>
-              <a:off x="5255767" y="3614372"/>
-              <a:ext cx="4305899" cy="2097152"/>
-            </a:xfrm>
-            <a:prstGeom prst="roundRect">
-              <a:avLst>
-                <a:gd name="adj" fmla="val 21519"/>
-              </a:avLst>
-            </a:prstGeom>
-            <a:solidFill>
-              <a:srgbClr val="00B0F0">
-                <a:alpha val="25714"/>
-              </a:srgbClr>
-            </a:solidFill>
-            <a:ln w="34925">
-              <a:solidFill>
-                <a:srgbClr val="0070C0"/>
-              </a:solidFill>
-            </a:ln>
-          </p:spPr>
-          <p:style>
-            <a:lnRef idx="2">
-              <a:schemeClr val="accent1">
-                <a:shade val="15000"/>
-              </a:schemeClr>
-            </a:lnRef>
-            <a:fillRef idx="1">
-              <a:schemeClr val="accent1"/>
-            </a:fillRef>
-            <a:effectRef idx="0">
-              <a:schemeClr val="accent1"/>
-            </a:effectRef>
-            <a:fontRef idx="minor">
-              <a:schemeClr val="lt1"/>
-            </a:fontRef>
-          </p:style>
-          <p:txBody>
-            <a:bodyPr rtlCol="0" anchor="ctr"/>
-            <a:lstStyle/>
-            <a:p>
-              <a:pPr algn="ctr"/>
-              <a:endParaRPr lang="en-US"/>
-            </a:p>
-          </p:txBody>
-        </p:sp>
       </p:grpSp>
     </p:spTree>
     <p:extLst>
@@ -17358,8 +17602,8 @@
             </a:prstGeom>
           </p:spPr>
         </p:pic>
-        <mc:AlternateContent xmlns:mc="http://schemas.openxmlformats.org/markup-compatibility/2006">
-          <mc:Choice xmlns:a14="http://schemas.microsoft.com/office/drawing/2010/main" Requires="a14">
+        <mc:AlternateContent xmlns:mc="http://schemas.openxmlformats.org/markup-compatibility/2006" xmlns:a14="http://schemas.microsoft.com/office/drawing/2010/main">
+          <mc:Choice Requires="a14">
             <p:sp>
               <p:nvSpPr>
                 <p:cNvPr id="149" name="TextBox 148">
@@ -17388,6 +17632,7 @@
                 </a:bodyPr>
                 <a:lstStyle/>
                 <a:p>
+                  <a:pPr/>
                   <a14:m>
                     <m:oMathPara xmlns:m="http://schemas.openxmlformats.org/officeDocument/2006/math">
                       <m:oMathParaPr>
@@ -17408,7 +17653,7 @@
               </p:txBody>
             </p:sp>
           </mc:Choice>
-          <mc:Fallback>
+          <mc:Fallback xmlns="">
             <p:sp>
               <p:nvSpPr>
                 <p:cNvPr id="149" name="TextBox 148">
@@ -17435,6 +17680,1139 @@
                   <a:blip r:embed="rId11"/>
                   <a:stretch>
                     <a:fillRect l="-8889" r="-8889"/>
+                  </a:stretch>
+                </a:blipFill>
+              </p:spPr>
+              <p:txBody>
+                <a:bodyPr/>
+                <a:lstStyle/>
+                <a:p>
+                  <a:r>
+                    <a:rPr lang="en-US">
+                      <a:noFill/>
+                    </a:rPr>
+                    <a:t> </a:t>
+                  </a:r>
+                </a:p>
+              </p:txBody>
+            </p:sp>
+          </mc:Fallback>
+        </mc:AlternateContent>
+      </p:grpSp>
+      <p:grpSp>
+        <p:nvGrpSpPr>
+          <p:cNvPr id="29" name="Group 28">
+            <a:extLst>
+              <a:ext uri="{FF2B5EF4-FFF2-40B4-BE49-F238E27FC236}">
+                <a16:creationId xmlns:a16="http://schemas.microsoft.com/office/drawing/2014/main" id="{177F633E-11C8-3738-4634-063B4163767D}"/>
+              </a:ext>
+            </a:extLst>
+          </p:cNvPr>
+          <p:cNvGrpSpPr/>
+          <p:nvPr/>
+        </p:nvGrpSpPr>
+        <p:grpSpPr>
+          <a:xfrm>
+            <a:off x="855237" y="3675232"/>
+            <a:ext cx="10006814" cy="2175446"/>
+            <a:chOff x="855237" y="3675232"/>
+            <a:chExt cx="10006814" cy="2175446"/>
+          </a:xfrm>
+        </p:grpSpPr>
+        <p:sp>
+          <p:nvSpPr>
+            <p:cNvPr id="2" name="Rounded Rectangle 1">
+              <a:extLst>
+                <a:ext uri="{FF2B5EF4-FFF2-40B4-BE49-F238E27FC236}">
+                  <a16:creationId xmlns:a16="http://schemas.microsoft.com/office/drawing/2014/main" id="{CA14CC8A-CB15-2D4D-8B37-87C9F7116876}"/>
+                </a:ext>
+              </a:extLst>
+            </p:cNvPr>
+            <p:cNvSpPr/>
+            <p:nvPr/>
+          </p:nvSpPr>
+          <p:spPr>
+            <a:xfrm>
+              <a:off x="855237" y="3753526"/>
+              <a:ext cx="4420820" cy="2097152"/>
+            </a:xfrm>
+            <a:prstGeom prst="roundRect">
+              <a:avLst>
+                <a:gd name="adj" fmla="val 21519"/>
+              </a:avLst>
+            </a:prstGeom>
+            <a:solidFill>
+              <a:srgbClr val="00B0F0">
+                <a:alpha val="25714"/>
+              </a:srgbClr>
+            </a:solidFill>
+            <a:ln w="34925">
+              <a:solidFill>
+                <a:srgbClr val="0070C0"/>
+              </a:solidFill>
+            </a:ln>
+          </p:spPr>
+          <p:style>
+            <a:lnRef idx="2">
+              <a:schemeClr val="accent1">
+                <a:shade val="15000"/>
+              </a:schemeClr>
+            </a:lnRef>
+            <a:fillRef idx="1">
+              <a:schemeClr val="accent1"/>
+            </a:fillRef>
+            <a:effectRef idx="0">
+              <a:schemeClr val="accent1"/>
+            </a:effectRef>
+            <a:fontRef idx="minor">
+              <a:schemeClr val="lt1"/>
+            </a:fontRef>
+          </p:style>
+          <p:txBody>
+            <a:bodyPr rtlCol="0" anchor="ctr"/>
+            <a:lstStyle/>
+            <a:p>
+              <a:pPr algn="ctr"/>
+              <a:endParaRPr lang="en-US"/>
+            </a:p>
+          </p:txBody>
+        </p:sp>
+        <p:pic>
+          <p:nvPicPr>
+            <p:cNvPr id="3" name="Graphic 2" descr="Bed with solid fill">
+              <a:extLst>
+                <a:ext uri="{FF2B5EF4-FFF2-40B4-BE49-F238E27FC236}">
+                  <a16:creationId xmlns:a16="http://schemas.microsoft.com/office/drawing/2014/main" id="{89198DAA-3B7D-5778-B142-450548E8B6B9}"/>
+                </a:ext>
+              </a:extLst>
+            </p:cNvPr>
+            <p:cNvPicPr>
+              <a:picLocks noChangeAspect="1"/>
+            </p:cNvPicPr>
+            <p:nvPr/>
+          </p:nvPicPr>
+          <p:blipFill>
+            <a:blip>
+              <a:extLst>
+                <a:ext uri="{96DAC541-7B7A-43D3-8B79-37D633B846F1}">
+                  <asvg:svgBlip xmlns:asvg="http://schemas.microsoft.com/office/drawing/2016/SVG/main" r:embed="rId3"/>
+                </a:ext>
+              </a:extLst>
+            </a:blip>
+            <a:srcRect/>
+            <a:stretch/>
+          </p:blipFill>
+          <p:spPr>
+            <a:xfrm>
+              <a:off x="1134876" y="4089112"/>
+              <a:ext cx="634696" cy="634696"/>
+            </a:xfrm>
+            <a:prstGeom prst="rect">
+              <a:avLst/>
+            </a:prstGeom>
+          </p:spPr>
+        </p:pic>
+        <p:pic>
+          <p:nvPicPr>
+            <p:cNvPr id="4" name="Graphic 3" descr="Sleep with solid fill">
+              <a:extLst>
+                <a:ext uri="{FF2B5EF4-FFF2-40B4-BE49-F238E27FC236}">
+                  <a16:creationId xmlns:a16="http://schemas.microsoft.com/office/drawing/2014/main" id="{7A5F4C1E-BB6A-E4EB-CEBC-513922071DA9}"/>
+                </a:ext>
+              </a:extLst>
+            </p:cNvPr>
+            <p:cNvPicPr>
+              <a:picLocks noChangeAspect="1"/>
+            </p:cNvPicPr>
+            <p:nvPr/>
+          </p:nvPicPr>
+          <p:blipFill>
+            <a:blip>
+              <a:extLst>
+                <a:ext uri="{96DAC541-7B7A-43D3-8B79-37D633B846F1}">
+                  <asvg:svgBlip xmlns:asvg="http://schemas.microsoft.com/office/drawing/2016/SVG/main" r:embed="rId4"/>
+                </a:ext>
+              </a:extLst>
+            </a:blip>
+            <a:srcRect/>
+            <a:stretch/>
+          </p:blipFill>
+          <p:spPr>
+            <a:xfrm>
+              <a:off x="2200708" y="4089112"/>
+              <a:ext cx="634696" cy="634696"/>
+            </a:xfrm>
+            <a:prstGeom prst="rect">
+              <a:avLst/>
+            </a:prstGeom>
+          </p:spPr>
+        </p:pic>
+        <p:pic>
+          <p:nvPicPr>
+            <p:cNvPr id="5" name="Graphic 4" descr="Sleep with solid fill">
+              <a:extLst>
+                <a:ext uri="{FF2B5EF4-FFF2-40B4-BE49-F238E27FC236}">
+                  <a16:creationId xmlns:a16="http://schemas.microsoft.com/office/drawing/2014/main" id="{FDE97C45-A821-4DA5-D46C-F6DE626D8217}"/>
+                </a:ext>
+              </a:extLst>
+            </p:cNvPr>
+            <p:cNvPicPr>
+              <a:picLocks noChangeAspect="1"/>
+            </p:cNvPicPr>
+            <p:nvPr/>
+          </p:nvPicPr>
+          <p:blipFill>
+            <a:blip>
+              <a:extLst>
+                <a:ext uri="{96DAC541-7B7A-43D3-8B79-37D633B846F1}">
+                  <asvg:svgBlip xmlns:asvg="http://schemas.microsoft.com/office/drawing/2016/SVG/main" r:embed="rId5"/>
+                </a:ext>
+              </a:extLst>
+            </a:blip>
+            <a:srcRect/>
+            <a:stretch/>
+          </p:blipFill>
+          <p:spPr>
+            <a:xfrm>
+              <a:off x="3310041" y="4089112"/>
+              <a:ext cx="634696" cy="634696"/>
+            </a:xfrm>
+            <a:prstGeom prst="rect">
+              <a:avLst/>
+            </a:prstGeom>
+          </p:spPr>
+        </p:pic>
+        <p:pic>
+          <p:nvPicPr>
+            <p:cNvPr id="6" name="Graphic 5" descr="Sleep with solid fill">
+              <a:extLst>
+                <a:ext uri="{FF2B5EF4-FFF2-40B4-BE49-F238E27FC236}">
+                  <a16:creationId xmlns:a16="http://schemas.microsoft.com/office/drawing/2014/main" id="{6436BDD8-8A02-9AD0-37E2-59F6A5F48533}"/>
+                </a:ext>
+              </a:extLst>
+            </p:cNvPr>
+            <p:cNvPicPr>
+              <a:picLocks noChangeAspect="1"/>
+            </p:cNvPicPr>
+            <p:nvPr/>
+          </p:nvPicPr>
+          <p:blipFill>
+            <a:blip>
+              <a:extLst>
+                <a:ext uri="{96DAC541-7B7A-43D3-8B79-37D633B846F1}">
+                  <asvg:svgBlip xmlns:asvg="http://schemas.microsoft.com/office/drawing/2016/SVG/main" r:embed="rId5"/>
+                </a:ext>
+              </a:extLst>
+            </a:blip>
+            <a:srcRect/>
+            <a:stretch/>
+          </p:blipFill>
+          <p:spPr>
+            <a:xfrm>
+              <a:off x="4375873" y="4089112"/>
+              <a:ext cx="634696" cy="634696"/>
+            </a:xfrm>
+            <a:prstGeom prst="rect">
+              <a:avLst/>
+            </a:prstGeom>
+          </p:spPr>
+        </p:pic>
+        <p:sp>
+          <p:nvSpPr>
+            <p:cNvPr id="7" name="TextBox 6">
+              <a:extLst>
+                <a:ext uri="{FF2B5EF4-FFF2-40B4-BE49-F238E27FC236}">
+                  <a16:creationId xmlns:a16="http://schemas.microsoft.com/office/drawing/2014/main" id="{BBA1CAFA-3829-27BF-EC04-1AC2C9820DE5}"/>
+                </a:ext>
+              </a:extLst>
+            </p:cNvPr>
+            <p:cNvSpPr txBox="1"/>
+            <p:nvPr/>
+          </p:nvSpPr>
+          <p:spPr>
+            <a:xfrm>
+              <a:off x="1203324" y="3934596"/>
+              <a:ext cx="570990" cy="369332"/>
+            </a:xfrm>
+            <a:prstGeom prst="rect">
+              <a:avLst/>
+            </a:prstGeom>
+            <a:noFill/>
+          </p:spPr>
+          <p:txBody>
+            <a:bodyPr wrap="none" rtlCol="0">
+              <a:spAutoFit/>
+            </a:bodyPr>
+            <a:lstStyle/>
+            <a:p>
+              <a:r>
+                <a:rPr lang="en-US" dirty="0"/>
+                <a:t>B08</a:t>
+              </a:r>
+            </a:p>
+          </p:txBody>
+        </p:sp>
+        <p:sp>
+          <p:nvSpPr>
+            <p:cNvPr id="8" name="TextBox 7">
+              <a:extLst>
+                <a:ext uri="{FF2B5EF4-FFF2-40B4-BE49-F238E27FC236}">
+                  <a16:creationId xmlns:a16="http://schemas.microsoft.com/office/drawing/2014/main" id="{6D339A65-703C-0012-3519-72D879974D34}"/>
+                </a:ext>
+              </a:extLst>
+            </p:cNvPr>
+            <p:cNvSpPr txBox="1"/>
+            <p:nvPr/>
+          </p:nvSpPr>
+          <p:spPr>
+            <a:xfrm>
+              <a:off x="2265129" y="3934596"/>
+              <a:ext cx="570990" cy="369332"/>
+            </a:xfrm>
+            <a:prstGeom prst="rect">
+              <a:avLst/>
+            </a:prstGeom>
+            <a:noFill/>
+          </p:spPr>
+          <p:txBody>
+            <a:bodyPr wrap="none" rtlCol="0">
+              <a:spAutoFit/>
+            </a:bodyPr>
+            <a:lstStyle/>
+            <a:p>
+              <a:r>
+                <a:rPr lang="en-US" dirty="0"/>
+                <a:t>B09</a:t>
+              </a:r>
+            </a:p>
+          </p:txBody>
+        </p:sp>
+        <p:sp>
+          <p:nvSpPr>
+            <p:cNvPr id="9" name="TextBox 8">
+              <a:extLst>
+                <a:ext uri="{FF2B5EF4-FFF2-40B4-BE49-F238E27FC236}">
+                  <a16:creationId xmlns:a16="http://schemas.microsoft.com/office/drawing/2014/main" id="{44CF676A-908A-F2D8-3E9B-7CBE0FF46FF7}"/>
+                </a:ext>
+              </a:extLst>
+            </p:cNvPr>
+            <p:cNvSpPr txBox="1"/>
+            <p:nvPr/>
+          </p:nvSpPr>
+          <p:spPr>
+            <a:xfrm>
+              <a:off x="3331789" y="3934596"/>
+              <a:ext cx="570990" cy="369332"/>
+            </a:xfrm>
+            <a:prstGeom prst="rect">
+              <a:avLst/>
+            </a:prstGeom>
+            <a:noFill/>
+          </p:spPr>
+          <p:txBody>
+            <a:bodyPr wrap="none" rtlCol="0">
+              <a:spAutoFit/>
+            </a:bodyPr>
+            <a:lstStyle/>
+            <a:p>
+              <a:r>
+                <a:rPr lang="en-US" dirty="0"/>
+                <a:t>B10</a:t>
+              </a:r>
+            </a:p>
+          </p:txBody>
+        </p:sp>
+        <p:sp>
+          <p:nvSpPr>
+            <p:cNvPr id="10" name="TextBox 9">
+              <a:extLst>
+                <a:ext uri="{FF2B5EF4-FFF2-40B4-BE49-F238E27FC236}">
+                  <a16:creationId xmlns:a16="http://schemas.microsoft.com/office/drawing/2014/main" id="{2D7E2F9C-CE41-FBA4-A08A-F985BBE3BBDD}"/>
+                </a:ext>
+              </a:extLst>
+            </p:cNvPr>
+            <p:cNvSpPr txBox="1"/>
+            <p:nvPr/>
+          </p:nvSpPr>
+          <p:spPr>
+            <a:xfrm>
+              <a:off x="4421349" y="3934596"/>
+              <a:ext cx="570990" cy="369332"/>
+            </a:xfrm>
+            <a:prstGeom prst="rect">
+              <a:avLst/>
+            </a:prstGeom>
+            <a:noFill/>
+          </p:spPr>
+          <p:txBody>
+            <a:bodyPr wrap="none" rtlCol="0">
+              <a:spAutoFit/>
+            </a:bodyPr>
+            <a:lstStyle/>
+            <a:p>
+              <a:r>
+                <a:rPr lang="en-US" dirty="0"/>
+                <a:t>B11</a:t>
+              </a:r>
+            </a:p>
+          </p:txBody>
+        </p:sp>
+        <p:sp>
+          <p:nvSpPr>
+            <p:cNvPr id="11" name="Left Bracket 10">
+              <a:extLst>
+                <a:ext uri="{FF2B5EF4-FFF2-40B4-BE49-F238E27FC236}">
+                  <a16:creationId xmlns:a16="http://schemas.microsoft.com/office/drawing/2014/main" id="{03C9E5CB-71A8-F93B-FC8D-3E86BFC6636E}"/>
+                </a:ext>
+              </a:extLst>
+            </p:cNvPr>
+            <p:cNvSpPr/>
+            <p:nvPr/>
+          </p:nvSpPr>
+          <p:spPr>
+            <a:xfrm rot="16200000">
+              <a:off x="3970170" y="3705880"/>
+              <a:ext cx="369333" cy="2035851"/>
+            </a:xfrm>
+            <a:prstGeom prst="leftBracket">
+              <a:avLst/>
+            </a:prstGeom>
+            <a:ln w="25400">
+              <a:solidFill>
+                <a:schemeClr val="tx1"/>
+              </a:solidFill>
+            </a:ln>
+          </p:spPr>
+          <p:style>
+            <a:lnRef idx="2">
+              <a:schemeClr val="accent1"/>
+            </a:lnRef>
+            <a:fillRef idx="0">
+              <a:schemeClr val="accent1"/>
+            </a:fillRef>
+            <a:effectRef idx="1">
+              <a:schemeClr val="accent1"/>
+            </a:effectRef>
+            <a:fontRef idx="minor">
+              <a:schemeClr val="tx1"/>
+            </a:fontRef>
+          </p:style>
+          <p:txBody>
+            <a:bodyPr rtlCol="0" anchor="ctr"/>
+            <a:lstStyle/>
+            <a:p>
+              <a:pPr algn="ctr"/>
+              <a:endParaRPr lang="en-US"/>
+            </a:p>
+          </p:txBody>
+        </p:sp>
+        <p:sp>
+          <p:nvSpPr>
+            <p:cNvPr id="12" name="Left Bracket 11">
+              <a:extLst>
+                <a:ext uri="{FF2B5EF4-FFF2-40B4-BE49-F238E27FC236}">
+                  <a16:creationId xmlns:a16="http://schemas.microsoft.com/office/drawing/2014/main" id="{49CDABFC-309B-BD04-A056-C66A4804FE2F}"/>
+                </a:ext>
+              </a:extLst>
+            </p:cNvPr>
+            <p:cNvSpPr/>
+            <p:nvPr/>
+          </p:nvSpPr>
+          <p:spPr>
+            <a:xfrm rot="16200000">
+              <a:off x="2336944" y="4273274"/>
+              <a:ext cx="369333" cy="901063"/>
+            </a:xfrm>
+            <a:prstGeom prst="leftBracket">
+              <a:avLst/>
+            </a:prstGeom>
+            <a:ln w="25400">
+              <a:solidFill>
+                <a:schemeClr val="tx1"/>
+              </a:solidFill>
+            </a:ln>
+          </p:spPr>
+          <p:style>
+            <a:lnRef idx="2">
+              <a:schemeClr val="accent1"/>
+            </a:lnRef>
+            <a:fillRef idx="0">
+              <a:schemeClr val="accent1"/>
+            </a:fillRef>
+            <a:effectRef idx="1">
+              <a:schemeClr val="accent1"/>
+            </a:effectRef>
+            <a:fontRef idx="minor">
+              <a:schemeClr val="tx1"/>
+            </a:fontRef>
+          </p:style>
+          <p:txBody>
+            <a:bodyPr rtlCol="0" anchor="ctr"/>
+            <a:lstStyle/>
+            <a:p>
+              <a:pPr algn="ctr"/>
+              <a:endParaRPr lang="en-US"/>
+            </a:p>
+          </p:txBody>
+        </p:sp>
+        <p:pic>
+          <p:nvPicPr>
+            <p:cNvPr id="13" name="Graphic 12" descr="Doctor male with solid fill">
+              <a:extLst>
+                <a:ext uri="{FF2B5EF4-FFF2-40B4-BE49-F238E27FC236}">
+                  <a16:creationId xmlns:a16="http://schemas.microsoft.com/office/drawing/2014/main" id="{D7F7D628-A794-DDD3-1EC2-F6D5F9C4D514}"/>
+                </a:ext>
+              </a:extLst>
+            </p:cNvPr>
+            <p:cNvPicPr>
+              <a:picLocks noChangeAspect="1"/>
+            </p:cNvPicPr>
+            <p:nvPr/>
+          </p:nvPicPr>
+          <p:blipFill>
+            <a:blip>
+              <a:extLst>
+                <a:ext uri="{96DAC541-7B7A-43D3-8B79-37D633B846F1}">
+                  <asvg:svgBlip xmlns:asvg="http://schemas.microsoft.com/office/drawing/2016/SVG/main" r:embed="rId8"/>
+                </a:ext>
+              </a:extLst>
+            </a:blip>
+            <a:stretch>
+              <a:fillRect/>
+            </a:stretch>
+          </p:blipFill>
+          <p:spPr>
+            <a:xfrm>
+              <a:off x="3836408" y="4959019"/>
+              <a:ext cx="636856" cy="636856"/>
+            </a:xfrm>
+            <a:prstGeom prst="rect">
+              <a:avLst/>
+            </a:prstGeom>
+          </p:spPr>
+        </p:pic>
+        <p:pic>
+          <p:nvPicPr>
+            <p:cNvPr id="14" name="Graphic 13" descr="Doctor female with solid fill">
+              <a:extLst>
+                <a:ext uri="{FF2B5EF4-FFF2-40B4-BE49-F238E27FC236}">
+                  <a16:creationId xmlns:a16="http://schemas.microsoft.com/office/drawing/2014/main" id="{A426156A-4081-20CD-CCC2-46A51FA648B9}"/>
+                </a:ext>
+              </a:extLst>
+            </p:cNvPr>
+            <p:cNvPicPr>
+              <a:picLocks noChangeAspect="1"/>
+            </p:cNvPicPr>
+            <p:nvPr/>
+          </p:nvPicPr>
+          <p:blipFill>
+            <a:blip>
+              <a:extLst>
+                <a:ext uri="{96DAC541-7B7A-43D3-8B79-37D633B846F1}">
+                  <asvg:svgBlip xmlns:asvg="http://schemas.microsoft.com/office/drawing/2016/SVG/main" r:embed="rId9"/>
+                </a:ext>
+              </a:extLst>
+            </a:blip>
+            <a:stretch>
+              <a:fillRect/>
+            </a:stretch>
+          </p:blipFill>
+          <p:spPr>
+            <a:xfrm>
+              <a:off x="2200708" y="4959019"/>
+              <a:ext cx="636856" cy="636856"/>
+            </a:xfrm>
+            <a:prstGeom prst="rect">
+              <a:avLst/>
+            </a:prstGeom>
+          </p:spPr>
+        </p:pic>
+        <p:sp>
+          <p:nvSpPr>
+            <p:cNvPr id="15" name="Rounded Rectangle 14">
+              <a:extLst>
+                <a:ext uri="{FF2B5EF4-FFF2-40B4-BE49-F238E27FC236}">
+                  <a16:creationId xmlns:a16="http://schemas.microsoft.com/office/drawing/2014/main" id="{46F3DA0C-BBE8-0BC7-2C26-398576EE798D}"/>
+                </a:ext>
+              </a:extLst>
+            </p:cNvPr>
+            <p:cNvSpPr/>
+            <p:nvPr/>
+          </p:nvSpPr>
+          <p:spPr>
+            <a:xfrm>
+              <a:off x="6441231" y="3675232"/>
+              <a:ext cx="4420820" cy="2097152"/>
+            </a:xfrm>
+            <a:prstGeom prst="roundRect">
+              <a:avLst>
+                <a:gd name="adj" fmla="val 21519"/>
+              </a:avLst>
+            </a:prstGeom>
+            <a:solidFill>
+              <a:srgbClr val="00B0F0">
+                <a:alpha val="25714"/>
+              </a:srgbClr>
+            </a:solidFill>
+            <a:ln w="34925">
+              <a:solidFill>
+                <a:srgbClr val="0070C0"/>
+              </a:solidFill>
+            </a:ln>
+          </p:spPr>
+          <p:style>
+            <a:lnRef idx="2">
+              <a:schemeClr val="accent1">
+                <a:shade val="15000"/>
+              </a:schemeClr>
+            </a:lnRef>
+            <a:fillRef idx="1">
+              <a:schemeClr val="accent1"/>
+            </a:fillRef>
+            <a:effectRef idx="0">
+              <a:schemeClr val="accent1"/>
+            </a:effectRef>
+            <a:fontRef idx="minor">
+              <a:schemeClr val="lt1"/>
+            </a:fontRef>
+          </p:style>
+          <p:txBody>
+            <a:bodyPr rtlCol="0" anchor="ctr"/>
+            <a:lstStyle/>
+            <a:p>
+              <a:pPr algn="ctr"/>
+              <a:endParaRPr lang="en-US"/>
+            </a:p>
+          </p:txBody>
+        </p:sp>
+        <p:pic>
+          <p:nvPicPr>
+            <p:cNvPr id="16" name="Graphic 15" descr="Sleep with solid fill">
+              <a:extLst>
+                <a:ext uri="{FF2B5EF4-FFF2-40B4-BE49-F238E27FC236}">
+                  <a16:creationId xmlns:a16="http://schemas.microsoft.com/office/drawing/2014/main" id="{F335BE43-8851-5AD4-6571-91107293C3A5}"/>
+                </a:ext>
+              </a:extLst>
+            </p:cNvPr>
+            <p:cNvPicPr>
+              <a:picLocks noChangeAspect="1"/>
+            </p:cNvPicPr>
+            <p:nvPr/>
+          </p:nvPicPr>
+          <p:blipFill>
+            <a:blip>
+              <a:extLst>
+                <a:ext uri="{96DAC541-7B7A-43D3-8B79-37D633B846F1}">
+                  <asvg:svgBlip xmlns:asvg="http://schemas.microsoft.com/office/drawing/2016/SVG/main" r:embed="rId6"/>
+                </a:ext>
+              </a:extLst>
+            </a:blip>
+            <a:srcRect/>
+            <a:stretch/>
+          </p:blipFill>
+          <p:spPr>
+            <a:xfrm>
+              <a:off x="6720870" y="4010818"/>
+              <a:ext cx="634696" cy="634696"/>
+            </a:xfrm>
+            <a:prstGeom prst="rect">
+              <a:avLst/>
+            </a:prstGeom>
+          </p:spPr>
+        </p:pic>
+        <p:pic>
+          <p:nvPicPr>
+            <p:cNvPr id="17" name="Graphic 16" descr="Sleep with solid fill">
+              <a:extLst>
+                <a:ext uri="{FF2B5EF4-FFF2-40B4-BE49-F238E27FC236}">
+                  <a16:creationId xmlns:a16="http://schemas.microsoft.com/office/drawing/2014/main" id="{E3439103-DBC8-E893-AFF9-81F586587F74}"/>
+                </a:ext>
+              </a:extLst>
+            </p:cNvPr>
+            <p:cNvPicPr>
+              <a:picLocks noChangeAspect="1"/>
+            </p:cNvPicPr>
+            <p:nvPr/>
+          </p:nvPicPr>
+          <p:blipFill>
+            <a:blip>
+              <a:extLst>
+                <a:ext uri="{96DAC541-7B7A-43D3-8B79-37D633B846F1}">
+                  <asvg:svgBlip xmlns:asvg="http://schemas.microsoft.com/office/drawing/2016/SVG/main" r:embed="rId5"/>
+                </a:ext>
+              </a:extLst>
+            </a:blip>
+            <a:srcRect/>
+            <a:stretch/>
+          </p:blipFill>
+          <p:spPr>
+            <a:xfrm>
+              <a:off x="7786702" y="4010818"/>
+              <a:ext cx="634696" cy="634696"/>
+            </a:xfrm>
+            <a:prstGeom prst="rect">
+              <a:avLst/>
+            </a:prstGeom>
+          </p:spPr>
+        </p:pic>
+        <p:pic>
+          <p:nvPicPr>
+            <p:cNvPr id="18" name="Graphic 17" descr="Sleep with solid fill">
+              <a:extLst>
+                <a:ext uri="{FF2B5EF4-FFF2-40B4-BE49-F238E27FC236}">
+                  <a16:creationId xmlns:a16="http://schemas.microsoft.com/office/drawing/2014/main" id="{099C2FEA-458B-E744-FE45-91818E01D296}"/>
+                </a:ext>
+              </a:extLst>
+            </p:cNvPr>
+            <p:cNvPicPr>
+              <a:picLocks noChangeAspect="1"/>
+            </p:cNvPicPr>
+            <p:nvPr/>
+          </p:nvPicPr>
+          <p:blipFill>
+            <a:blip>
+              <a:extLst>
+                <a:ext uri="{96DAC541-7B7A-43D3-8B79-37D633B846F1}">
+                  <asvg:svgBlip xmlns:asvg="http://schemas.microsoft.com/office/drawing/2016/SVG/main" r:embed="rId4"/>
+                </a:ext>
+              </a:extLst>
+            </a:blip>
+            <a:srcRect/>
+            <a:stretch/>
+          </p:blipFill>
+          <p:spPr>
+            <a:xfrm>
+              <a:off x="8896035" y="4010818"/>
+              <a:ext cx="634696" cy="634696"/>
+            </a:xfrm>
+            <a:prstGeom prst="rect">
+              <a:avLst/>
+            </a:prstGeom>
+          </p:spPr>
+        </p:pic>
+        <p:pic>
+          <p:nvPicPr>
+            <p:cNvPr id="19" name="Graphic 18" descr="Bed with solid fill">
+              <a:extLst>
+                <a:ext uri="{FF2B5EF4-FFF2-40B4-BE49-F238E27FC236}">
+                  <a16:creationId xmlns:a16="http://schemas.microsoft.com/office/drawing/2014/main" id="{8C4E4EB5-F427-5331-BEDB-E73245F476FE}"/>
+                </a:ext>
+              </a:extLst>
+            </p:cNvPr>
+            <p:cNvPicPr>
+              <a:picLocks noChangeAspect="1"/>
+            </p:cNvPicPr>
+            <p:nvPr/>
+          </p:nvPicPr>
+          <p:blipFill>
+            <a:blip>
+              <a:extLst>
+                <a:ext uri="{96DAC541-7B7A-43D3-8B79-37D633B846F1}">
+                  <asvg:svgBlip xmlns:asvg="http://schemas.microsoft.com/office/drawing/2016/SVG/main" r:embed="rId3"/>
+                </a:ext>
+              </a:extLst>
+            </a:blip>
+            <a:srcRect/>
+            <a:stretch/>
+          </p:blipFill>
+          <p:spPr>
+            <a:xfrm>
+              <a:off x="9961867" y="4010818"/>
+              <a:ext cx="634696" cy="634696"/>
+            </a:xfrm>
+            <a:prstGeom prst="rect">
+              <a:avLst/>
+            </a:prstGeom>
+          </p:spPr>
+        </p:pic>
+        <p:sp>
+          <p:nvSpPr>
+            <p:cNvPr id="20" name="TextBox 19">
+              <a:extLst>
+                <a:ext uri="{FF2B5EF4-FFF2-40B4-BE49-F238E27FC236}">
+                  <a16:creationId xmlns:a16="http://schemas.microsoft.com/office/drawing/2014/main" id="{666D3A7E-C03A-6501-BB4F-3BA1025BA944}"/>
+                </a:ext>
+              </a:extLst>
+            </p:cNvPr>
+            <p:cNvSpPr txBox="1"/>
+            <p:nvPr/>
+          </p:nvSpPr>
+          <p:spPr>
+            <a:xfrm>
+              <a:off x="6789318" y="3856302"/>
+              <a:ext cx="570990" cy="369332"/>
+            </a:xfrm>
+            <a:prstGeom prst="rect">
+              <a:avLst/>
+            </a:prstGeom>
+            <a:noFill/>
+          </p:spPr>
+          <p:txBody>
+            <a:bodyPr wrap="none" rtlCol="0">
+              <a:spAutoFit/>
+            </a:bodyPr>
+            <a:lstStyle/>
+            <a:p>
+              <a:r>
+                <a:rPr lang="en-US" dirty="0"/>
+                <a:t>B08</a:t>
+              </a:r>
+            </a:p>
+          </p:txBody>
+        </p:sp>
+        <p:sp>
+          <p:nvSpPr>
+            <p:cNvPr id="21" name="TextBox 20">
+              <a:extLst>
+                <a:ext uri="{FF2B5EF4-FFF2-40B4-BE49-F238E27FC236}">
+                  <a16:creationId xmlns:a16="http://schemas.microsoft.com/office/drawing/2014/main" id="{EB9040FB-C23E-E211-5224-07EC2B3AFC44}"/>
+                </a:ext>
+              </a:extLst>
+            </p:cNvPr>
+            <p:cNvSpPr txBox="1"/>
+            <p:nvPr/>
+          </p:nvSpPr>
+          <p:spPr>
+            <a:xfrm>
+              <a:off x="7851123" y="3856302"/>
+              <a:ext cx="570990" cy="369332"/>
+            </a:xfrm>
+            <a:prstGeom prst="rect">
+              <a:avLst/>
+            </a:prstGeom>
+            <a:noFill/>
+          </p:spPr>
+          <p:txBody>
+            <a:bodyPr wrap="none" rtlCol="0">
+              <a:spAutoFit/>
+            </a:bodyPr>
+            <a:lstStyle/>
+            <a:p>
+              <a:r>
+                <a:rPr lang="en-US" dirty="0"/>
+                <a:t>B09</a:t>
+              </a:r>
+            </a:p>
+          </p:txBody>
+        </p:sp>
+        <p:sp>
+          <p:nvSpPr>
+            <p:cNvPr id="22" name="TextBox 21">
+              <a:extLst>
+                <a:ext uri="{FF2B5EF4-FFF2-40B4-BE49-F238E27FC236}">
+                  <a16:creationId xmlns:a16="http://schemas.microsoft.com/office/drawing/2014/main" id="{D5E2F948-003F-A991-F97D-D7EC95DEBC8B}"/>
+                </a:ext>
+              </a:extLst>
+            </p:cNvPr>
+            <p:cNvSpPr txBox="1"/>
+            <p:nvPr/>
+          </p:nvSpPr>
+          <p:spPr>
+            <a:xfrm>
+              <a:off x="8917783" y="3856302"/>
+              <a:ext cx="570990" cy="369332"/>
+            </a:xfrm>
+            <a:prstGeom prst="rect">
+              <a:avLst/>
+            </a:prstGeom>
+            <a:noFill/>
+          </p:spPr>
+          <p:txBody>
+            <a:bodyPr wrap="none" rtlCol="0">
+              <a:spAutoFit/>
+            </a:bodyPr>
+            <a:lstStyle/>
+            <a:p>
+              <a:r>
+                <a:rPr lang="en-US" dirty="0"/>
+                <a:t>B10</a:t>
+              </a:r>
+            </a:p>
+          </p:txBody>
+        </p:sp>
+        <p:sp>
+          <p:nvSpPr>
+            <p:cNvPr id="23" name="TextBox 22">
+              <a:extLst>
+                <a:ext uri="{FF2B5EF4-FFF2-40B4-BE49-F238E27FC236}">
+                  <a16:creationId xmlns:a16="http://schemas.microsoft.com/office/drawing/2014/main" id="{E0AF3491-AF1F-3134-8947-9DE22B2707F3}"/>
+                </a:ext>
+              </a:extLst>
+            </p:cNvPr>
+            <p:cNvSpPr txBox="1"/>
+            <p:nvPr/>
+          </p:nvSpPr>
+          <p:spPr>
+            <a:xfrm>
+              <a:off x="10007343" y="3856302"/>
+              <a:ext cx="570990" cy="369332"/>
+            </a:xfrm>
+            <a:prstGeom prst="rect">
+              <a:avLst/>
+            </a:prstGeom>
+            <a:noFill/>
+          </p:spPr>
+          <p:txBody>
+            <a:bodyPr wrap="none" rtlCol="0">
+              <a:spAutoFit/>
+            </a:bodyPr>
+            <a:lstStyle/>
+            <a:p>
+              <a:r>
+                <a:rPr lang="en-US" dirty="0"/>
+                <a:t>B11</a:t>
+              </a:r>
+            </a:p>
+          </p:txBody>
+        </p:sp>
+        <p:sp>
+          <p:nvSpPr>
+            <p:cNvPr id="24" name="Left Bracket 23">
+              <a:extLst>
+                <a:ext uri="{FF2B5EF4-FFF2-40B4-BE49-F238E27FC236}">
+                  <a16:creationId xmlns:a16="http://schemas.microsoft.com/office/drawing/2014/main" id="{3A51DC4E-52DB-1E18-C464-A6B642BA704F}"/>
+                </a:ext>
+              </a:extLst>
+            </p:cNvPr>
+            <p:cNvSpPr/>
+            <p:nvPr/>
+          </p:nvSpPr>
+          <p:spPr>
+            <a:xfrm rot="16200000">
+              <a:off x="7404037" y="3627586"/>
+              <a:ext cx="369333" cy="2035851"/>
+            </a:xfrm>
+            <a:prstGeom prst="leftBracket">
+              <a:avLst/>
+            </a:prstGeom>
+            <a:ln w="25400">
+              <a:solidFill>
+                <a:schemeClr val="tx1"/>
+              </a:solidFill>
+            </a:ln>
+          </p:spPr>
+          <p:style>
+            <a:lnRef idx="2">
+              <a:schemeClr val="accent1"/>
+            </a:lnRef>
+            <a:fillRef idx="0">
+              <a:schemeClr val="accent1"/>
+            </a:fillRef>
+            <a:effectRef idx="1">
+              <a:schemeClr val="accent1"/>
+            </a:effectRef>
+            <a:fontRef idx="minor">
+              <a:schemeClr val="tx1"/>
+            </a:fontRef>
+          </p:style>
+          <p:txBody>
+            <a:bodyPr rtlCol="0" anchor="ctr"/>
+            <a:lstStyle/>
+            <a:p>
+              <a:pPr algn="ctr"/>
+              <a:endParaRPr lang="en-US"/>
+            </a:p>
+          </p:txBody>
+        </p:sp>
+        <p:sp>
+          <p:nvSpPr>
+            <p:cNvPr id="25" name="Left Bracket 24">
+              <a:extLst>
+                <a:ext uri="{FF2B5EF4-FFF2-40B4-BE49-F238E27FC236}">
+                  <a16:creationId xmlns:a16="http://schemas.microsoft.com/office/drawing/2014/main" id="{2DEF8DA3-CAC7-EBF9-EA14-44CFE67142DD}"/>
+                </a:ext>
+              </a:extLst>
+            </p:cNvPr>
+            <p:cNvSpPr/>
+            <p:nvPr/>
+          </p:nvSpPr>
+          <p:spPr>
+            <a:xfrm rot="16200000">
+              <a:off x="9048730" y="4194979"/>
+              <a:ext cx="369333" cy="901063"/>
+            </a:xfrm>
+            <a:prstGeom prst="leftBracket">
+              <a:avLst/>
+            </a:prstGeom>
+            <a:ln w="25400">
+              <a:solidFill>
+                <a:schemeClr val="tx1"/>
+              </a:solidFill>
+            </a:ln>
+          </p:spPr>
+          <p:style>
+            <a:lnRef idx="2">
+              <a:schemeClr val="accent1"/>
+            </a:lnRef>
+            <a:fillRef idx="0">
+              <a:schemeClr val="accent1"/>
+            </a:fillRef>
+            <a:effectRef idx="1">
+              <a:schemeClr val="accent1"/>
+            </a:effectRef>
+            <a:fontRef idx="minor">
+              <a:schemeClr val="tx1"/>
+            </a:fontRef>
+          </p:style>
+          <p:txBody>
+            <a:bodyPr rtlCol="0" anchor="ctr"/>
+            <a:lstStyle/>
+            <a:p>
+              <a:pPr algn="ctr"/>
+              <a:endParaRPr lang="en-US"/>
+            </a:p>
+          </p:txBody>
+        </p:sp>
+        <p:pic>
+          <p:nvPicPr>
+            <p:cNvPr id="26" name="Graphic 25" descr="Doctor male with solid fill">
+              <a:extLst>
+                <a:ext uri="{FF2B5EF4-FFF2-40B4-BE49-F238E27FC236}">
+                  <a16:creationId xmlns:a16="http://schemas.microsoft.com/office/drawing/2014/main" id="{C0EA918C-6248-8022-85FE-4252B5CC9FA1}"/>
+                </a:ext>
+              </a:extLst>
+            </p:cNvPr>
+            <p:cNvPicPr>
+              <a:picLocks noChangeAspect="1"/>
+            </p:cNvPicPr>
+            <p:nvPr/>
+          </p:nvPicPr>
+          <p:blipFill>
+            <a:blip>
+              <a:extLst>
+                <a:ext uri="{96DAC541-7B7A-43D3-8B79-37D633B846F1}">
+                  <asvg:svgBlip xmlns:asvg="http://schemas.microsoft.com/office/drawing/2016/SVG/main" r:embed="rId8"/>
+                </a:ext>
+              </a:extLst>
+            </a:blip>
+            <a:stretch>
+              <a:fillRect/>
+            </a:stretch>
+          </p:blipFill>
+          <p:spPr>
+            <a:xfrm>
+              <a:off x="7316445" y="4880725"/>
+              <a:ext cx="636856" cy="636856"/>
+            </a:xfrm>
+            <a:prstGeom prst="rect">
+              <a:avLst/>
+            </a:prstGeom>
+          </p:spPr>
+        </p:pic>
+        <p:pic>
+          <p:nvPicPr>
+            <p:cNvPr id="27" name="Graphic 26" descr="Doctor female with solid fill">
+              <a:extLst>
+                <a:ext uri="{FF2B5EF4-FFF2-40B4-BE49-F238E27FC236}">
+                  <a16:creationId xmlns:a16="http://schemas.microsoft.com/office/drawing/2014/main" id="{1EF3B3A6-8F8C-617D-C464-E6D8CBB3E0EC}"/>
+                </a:ext>
+              </a:extLst>
+            </p:cNvPr>
+            <p:cNvPicPr>
+              <a:picLocks noChangeAspect="1"/>
+            </p:cNvPicPr>
+            <p:nvPr/>
+          </p:nvPicPr>
+          <p:blipFill>
+            <a:blip>
+              <a:extLst>
+                <a:ext uri="{96DAC541-7B7A-43D3-8B79-37D633B846F1}">
+                  <asvg:svgBlip xmlns:asvg="http://schemas.microsoft.com/office/drawing/2016/SVG/main" r:embed="rId9"/>
+                </a:ext>
+              </a:extLst>
+            </a:blip>
+            <a:stretch>
+              <a:fillRect/>
+            </a:stretch>
+          </p:blipFill>
+          <p:spPr>
+            <a:xfrm>
+              <a:off x="8883053" y="4880454"/>
+              <a:ext cx="636856" cy="636856"/>
+            </a:xfrm>
+            <a:prstGeom prst="rect">
+              <a:avLst/>
+            </a:prstGeom>
+          </p:spPr>
+        </p:pic>
+        <mc:AlternateContent xmlns:mc="http://schemas.openxmlformats.org/markup-compatibility/2006">
+          <mc:Choice xmlns:a14="http://schemas.microsoft.com/office/drawing/2010/main" Requires="a14">
+            <p:sp>
+              <p:nvSpPr>
+                <p:cNvPr id="28" name="TextBox 27">
+                  <a:extLst>
+                    <a:ext uri="{FF2B5EF4-FFF2-40B4-BE49-F238E27FC236}">
+                      <a16:creationId xmlns:a16="http://schemas.microsoft.com/office/drawing/2014/main" id="{E689DF48-81DE-4FA9-BB31-E8187753F097}"/>
+                    </a:ext>
+                  </a:extLst>
+                </p:cNvPr>
+                <p:cNvSpPr txBox="1"/>
+                <p:nvPr/>
+              </p:nvSpPr>
+              <p:spPr>
+                <a:xfrm>
+                  <a:off x="5434255" y="4149177"/>
+                  <a:ext cx="844783" cy="1107996"/>
+                </a:xfrm>
+                <a:prstGeom prst="rect">
+                  <a:avLst/>
+                </a:prstGeom>
+                <a:noFill/>
+              </p:spPr>
+              <p:txBody>
+                <a:bodyPr wrap="none" lIns="0" tIns="0" rIns="0" bIns="0" rtlCol="0">
+                  <a:spAutoFit/>
+                </a:bodyPr>
+                <a:lstStyle/>
+                <a:p>
+                  <a:pPr/>
+                  <a14:m>
+                    <m:oMathPara xmlns:m="http://schemas.openxmlformats.org/officeDocument/2006/math">
+                      <m:oMathParaPr>
+                        <m:jc m:val="centerGroup"/>
+                      </m:oMathParaPr>
+                      <m:oMath xmlns:m="http://schemas.openxmlformats.org/officeDocument/2006/math">
+                        <m:r>
+                          <a:rPr lang="en-GB" sz="7200" b="0" i="1" smtClean="0">
+                            <a:latin typeface="Cambria Math" panose="02040503050406030204" pitchFamily="18" charset="0"/>
+                          </a:rPr>
+                          <m:t>~</m:t>
+                        </m:r>
+                      </m:oMath>
+                    </m:oMathPara>
+                  </a14:m>
+                  <a:endParaRPr lang="en-US" sz="7200" dirty="0"/>
+                </a:p>
+              </p:txBody>
+            </p:sp>
+          </mc:Choice>
+          <mc:Fallback>
+            <p:sp>
+              <p:nvSpPr>
+                <p:cNvPr id="28" name="TextBox 27">
+                  <a:extLst>
+                    <a:ext uri="{FF2B5EF4-FFF2-40B4-BE49-F238E27FC236}">
+                      <a16:creationId xmlns:a16="http://schemas.microsoft.com/office/drawing/2014/main" id="{E689DF48-81DE-4FA9-BB31-E8187753F097}"/>
+                    </a:ext>
+                  </a:extLst>
+                </p:cNvPr>
+                <p:cNvSpPr txBox="1">
+                  <a:spLocks noRot="1" noChangeAspect="1" noMove="1" noResize="1" noEditPoints="1" noAdjustHandles="1" noChangeArrowheads="1" noChangeShapeType="1" noTextEdit="1"/>
+                </p:cNvSpPr>
+                <p:nvPr/>
+              </p:nvSpPr>
+              <p:spPr>
+                <a:xfrm>
+                  <a:off x="5434255" y="4149177"/>
+                  <a:ext cx="844783" cy="1107996"/>
+                </a:xfrm>
+                <a:prstGeom prst="rect">
+                  <a:avLst/>
+                </a:prstGeom>
+                <a:blipFill>
+                  <a:blip r:embed="rId12"/>
+                  <a:stretch>
+                    <a:fillRect l="-8824" r="-8824"/>
                   </a:stretch>
                 </a:blipFill>
               </p:spPr>

--- a/images/icu.pptx
+++ b/images/icu.pptx
@@ -5,7 +5,7 @@
     <p:sldMasterId id="2147483648" r:id="rId1"/>
   </p:sldMasterIdLst>
   <p:notesMasterIdLst>
-    <p:notesMasterId r:id="rId9"/>
+    <p:notesMasterId r:id="rId10"/>
   </p:notesMasterIdLst>
   <p:sldIdLst>
     <p:sldId id="256" r:id="rId2"/>
@@ -15,6 +15,7 @@
     <p:sldId id="260" r:id="rId6"/>
     <p:sldId id="262" r:id="rId7"/>
     <p:sldId id="263" r:id="rId8"/>
+    <p:sldId id="264" r:id="rId9"/>
   </p:sldIdLst>
   <p:sldSz cx="12192000" cy="6858000"/>
   <p:notesSz cx="6858000" cy="9144000"/>
@@ -203,7 +204,7 @@
           <a:p>
             <a:fld id="{AD42B31F-4ABA-274F-9BB4-DA3A6583FDB8}" type="datetimeFigureOut">
               <a:rPr lang="en-US" smtClean="0"/>
-              <a:t>5/18/26</a:t>
+              <a:t>5/22/26</a:t>
             </a:fld>
             <a:endParaRPr lang="en-US"/>
           </a:p>
@@ -663,6 +664,114 @@
 </p:notes>
 </file>
 
+<file path=ppt/notesSlides/notesSlide3.xml><?xml version="1.0" encoding="utf-8"?>
+<p:notes xmlns:a="http://schemas.openxmlformats.org/drawingml/2006/main" xmlns:r="http://schemas.openxmlformats.org/officeDocument/2006/relationships" xmlns:p="http://schemas.openxmlformats.org/presentationml/2006/main">
+  <p:cSld>
+    <p:spTree>
+      <p:nvGrpSpPr>
+        <p:cNvPr id="1" name="">
+          <a:extLst>
+            <a:ext uri="{FF2B5EF4-FFF2-40B4-BE49-F238E27FC236}">
+              <a16:creationId xmlns:a16="http://schemas.microsoft.com/office/drawing/2014/main" id="{D6FF0938-ECDA-DF2D-2F76-A82DEB325CB2}"/>
+            </a:ext>
+          </a:extLst>
+        </p:cNvPr>
+        <p:cNvGrpSpPr/>
+        <p:nvPr/>
+      </p:nvGrpSpPr>
+      <p:grpSpPr>
+        <a:xfrm>
+          <a:off x="0" y="0"/>
+          <a:ext cx="0" cy="0"/>
+          <a:chOff x="0" y="0"/>
+          <a:chExt cx="0" cy="0"/>
+        </a:xfrm>
+      </p:grpSpPr>
+      <p:sp>
+        <p:nvSpPr>
+          <p:cNvPr id="2" name="Slide Image Placeholder 1">
+            <a:extLst>
+              <a:ext uri="{FF2B5EF4-FFF2-40B4-BE49-F238E27FC236}">
+                <a16:creationId xmlns:a16="http://schemas.microsoft.com/office/drawing/2014/main" id="{BE66E0C7-AE41-3D7A-01BA-1B0CC9DF475A}"/>
+              </a:ext>
+            </a:extLst>
+          </p:cNvPr>
+          <p:cNvSpPr>
+            <a:spLocks noGrp="1" noRot="1" noChangeAspect="1"/>
+          </p:cNvSpPr>
+          <p:nvPr>
+            <p:ph type="sldImg"/>
+          </p:nvPr>
+        </p:nvSpPr>
+        <p:spPr/>
+      </p:sp>
+      <p:sp>
+        <p:nvSpPr>
+          <p:cNvPr id="3" name="Notes Placeholder 2">
+            <a:extLst>
+              <a:ext uri="{FF2B5EF4-FFF2-40B4-BE49-F238E27FC236}">
+                <a16:creationId xmlns:a16="http://schemas.microsoft.com/office/drawing/2014/main" id="{C17AD15E-E199-93B6-8FF2-8D4384C4511E}"/>
+              </a:ext>
+            </a:extLst>
+          </p:cNvPr>
+          <p:cNvSpPr>
+            <a:spLocks noGrp="1"/>
+          </p:cNvSpPr>
+          <p:nvPr>
+            <p:ph type="body" idx="1"/>
+          </p:nvPr>
+        </p:nvSpPr>
+        <p:spPr/>
+        <p:txBody>
+          <a:bodyPr/>
+          <a:lstStyle/>
+          <a:p>
+            <a:endParaRPr lang="en-US" dirty="0"/>
+          </a:p>
+        </p:txBody>
+      </p:sp>
+      <p:sp>
+        <p:nvSpPr>
+          <p:cNvPr id="4" name="Slide Number Placeholder 3">
+            <a:extLst>
+              <a:ext uri="{FF2B5EF4-FFF2-40B4-BE49-F238E27FC236}">
+                <a16:creationId xmlns:a16="http://schemas.microsoft.com/office/drawing/2014/main" id="{C80D4DFC-A1A4-5BE0-B3F5-1EE70B715470}"/>
+              </a:ext>
+            </a:extLst>
+          </p:cNvPr>
+          <p:cNvSpPr>
+            <a:spLocks noGrp="1"/>
+          </p:cNvSpPr>
+          <p:nvPr>
+            <p:ph type="sldNum" sz="quarter" idx="5"/>
+          </p:nvPr>
+        </p:nvSpPr>
+        <p:spPr/>
+        <p:txBody>
+          <a:bodyPr/>
+          <a:lstStyle/>
+          <a:p>
+            <a:fld id="{C0ECF21E-4684-E148-81FF-D3B1FD823314}" type="slidenum">
+              <a:rPr lang="en-US" smtClean="0"/>
+              <a:t>8</a:t>
+            </a:fld>
+            <a:endParaRPr lang="en-US"/>
+          </a:p>
+        </p:txBody>
+      </p:sp>
+    </p:spTree>
+    <p:extLst>
+      <p:ext uri="{BB962C8B-B14F-4D97-AF65-F5344CB8AC3E}">
+        <p14:creationId xmlns:p14="http://schemas.microsoft.com/office/powerpoint/2010/main" val="2707128037"/>
+      </p:ext>
+    </p:extLst>
+  </p:cSld>
+  <p:clrMapOvr>
+    <a:masterClrMapping/>
+  </p:clrMapOvr>
+</p:notes>
+</file>
+
 <file path=ppt/slideLayouts/slideLayout1.xml><?xml version="1.0" encoding="utf-8"?>
 <p:sldLayout xmlns:a="http://schemas.openxmlformats.org/drawingml/2006/main" xmlns:r="http://schemas.openxmlformats.org/officeDocument/2006/relationships" xmlns:p="http://schemas.openxmlformats.org/presentationml/2006/main" type="title" preserve="1">
   <p:cSld name="Title Slide">
@@ -812,7 +921,7 @@
           <a:p>
             <a:fld id="{0D21F05F-ACFB-0C4D-9827-53BE568178E4}" type="datetimeFigureOut">
               <a:rPr lang="en-US" smtClean="0"/>
-              <a:t>5/18/26</a:t>
+              <a:t>5/22/26</a:t>
             </a:fld>
             <a:endParaRPr lang="en-US"/>
           </a:p>
@@ -1012,7 +1121,7 @@
           <a:p>
             <a:fld id="{0D21F05F-ACFB-0C4D-9827-53BE568178E4}" type="datetimeFigureOut">
               <a:rPr lang="en-US" smtClean="0"/>
-              <a:t>5/18/26</a:t>
+              <a:t>5/22/26</a:t>
             </a:fld>
             <a:endParaRPr lang="en-US"/>
           </a:p>
@@ -1222,7 +1331,7 @@
           <a:p>
             <a:fld id="{0D21F05F-ACFB-0C4D-9827-53BE568178E4}" type="datetimeFigureOut">
               <a:rPr lang="en-US" smtClean="0"/>
-              <a:t>5/18/26</a:t>
+              <a:t>5/22/26</a:t>
             </a:fld>
             <a:endParaRPr lang="en-US"/>
           </a:p>
@@ -1422,7 +1531,7 @@
           <a:p>
             <a:fld id="{0D21F05F-ACFB-0C4D-9827-53BE568178E4}" type="datetimeFigureOut">
               <a:rPr lang="en-US" smtClean="0"/>
-              <a:t>5/18/26</a:t>
+              <a:t>5/22/26</a:t>
             </a:fld>
             <a:endParaRPr lang="en-US"/>
           </a:p>
@@ -1698,7 +1807,7 @@
           <a:p>
             <a:fld id="{0D21F05F-ACFB-0C4D-9827-53BE568178E4}" type="datetimeFigureOut">
               <a:rPr lang="en-US" smtClean="0"/>
-              <a:t>5/18/26</a:t>
+              <a:t>5/22/26</a:t>
             </a:fld>
             <a:endParaRPr lang="en-US"/>
           </a:p>
@@ -1966,7 +2075,7 @@
           <a:p>
             <a:fld id="{0D21F05F-ACFB-0C4D-9827-53BE568178E4}" type="datetimeFigureOut">
               <a:rPr lang="en-US" smtClean="0"/>
-              <a:t>5/18/26</a:t>
+              <a:t>5/22/26</a:t>
             </a:fld>
             <a:endParaRPr lang="en-US"/>
           </a:p>
@@ -2381,7 +2490,7 @@
           <a:p>
             <a:fld id="{0D21F05F-ACFB-0C4D-9827-53BE568178E4}" type="datetimeFigureOut">
               <a:rPr lang="en-US" smtClean="0"/>
-              <a:t>5/18/26</a:t>
+              <a:t>5/22/26</a:t>
             </a:fld>
             <a:endParaRPr lang="en-US"/>
           </a:p>
@@ -2523,7 +2632,7 @@
           <a:p>
             <a:fld id="{0D21F05F-ACFB-0C4D-9827-53BE568178E4}" type="datetimeFigureOut">
               <a:rPr lang="en-US" smtClean="0"/>
-              <a:t>5/18/26</a:t>
+              <a:t>5/22/26</a:t>
             </a:fld>
             <a:endParaRPr lang="en-US"/>
           </a:p>
@@ -2636,7 +2745,7 @@
           <a:p>
             <a:fld id="{0D21F05F-ACFB-0C4D-9827-53BE568178E4}" type="datetimeFigureOut">
               <a:rPr lang="en-US" smtClean="0"/>
-              <a:t>5/18/26</a:t>
+              <a:t>5/22/26</a:t>
             </a:fld>
             <a:endParaRPr lang="en-US"/>
           </a:p>
@@ -2949,7 +3058,7 @@
           <a:p>
             <a:fld id="{0D21F05F-ACFB-0C4D-9827-53BE568178E4}" type="datetimeFigureOut">
               <a:rPr lang="en-US" smtClean="0"/>
-              <a:t>5/18/26</a:t>
+              <a:t>5/22/26</a:t>
             </a:fld>
             <a:endParaRPr lang="en-US"/>
           </a:p>
@@ -3238,7 +3347,7 @@
           <a:p>
             <a:fld id="{0D21F05F-ACFB-0C4D-9827-53BE568178E4}" type="datetimeFigureOut">
               <a:rPr lang="en-US" smtClean="0"/>
-              <a:t>5/18/26</a:t>
+              <a:t>5/22/26</a:t>
             </a:fld>
             <a:endParaRPr lang="en-US"/>
           </a:p>
@@ -3481,7 +3590,7 @@
           <a:p>
             <a:fld id="{0D21F05F-ACFB-0C4D-9827-53BE568178E4}" type="datetimeFigureOut">
               <a:rPr lang="en-US" smtClean="0"/>
-              <a:t>5/18/26</a:t>
+              <a:t>5/22/26</a:t>
             </a:fld>
             <a:endParaRPr lang="en-US"/>
           </a:p>
@@ -18735,8 +18844,8 @@
             </a:prstGeom>
           </p:spPr>
         </p:pic>
-        <mc:AlternateContent xmlns:mc="http://schemas.openxmlformats.org/markup-compatibility/2006">
-          <mc:Choice xmlns:a14="http://schemas.microsoft.com/office/drawing/2010/main" Requires="a14">
+        <mc:AlternateContent xmlns:mc="http://schemas.openxmlformats.org/markup-compatibility/2006" xmlns:a14="http://schemas.microsoft.com/office/drawing/2010/main">
+          <mc:Choice Requires="a14">
             <p:sp>
               <p:nvSpPr>
                 <p:cNvPr id="28" name="TextBox 27">
@@ -18786,7 +18895,7 @@
               </p:txBody>
             </p:sp>
           </mc:Choice>
-          <mc:Fallback>
+          <mc:Fallback xmlns="">
             <p:sp>
               <p:nvSpPr>
                 <p:cNvPr id="28" name="TextBox 27">
@@ -18836,6 +18945,2343 @@
     <p:extLst>
       <p:ext uri="{BB962C8B-B14F-4D97-AF65-F5344CB8AC3E}">
         <p14:creationId xmlns:p14="http://schemas.microsoft.com/office/powerpoint/2010/main" val="1953519320"/>
+      </p:ext>
+    </p:extLst>
+  </p:cSld>
+  <p:clrMapOvr>
+    <a:masterClrMapping/>
+  </p:clrMapOvr>
+</p:sld>
+</file>
+
+<file path=ppt/slides/slide8.xml><?xml version="1.0" encoding="utf-8"?>
+<p:sld xmlns:a="http://schemas.openxmlformats.org/drawingml/2006/main" xmlns:r="http://schemas.openxmlformats.org/officeDocument/2006/relationships" xmlns:p="http://schemas.openxmlformats.org/presentationml/2006/main">
+  <p:cSld>
+    <p:spTree>
+      <p:nvGrpSpPr>
+        <p:cNvPr id="1" name="">
+          <a:extLst>
+            <a:ext uri="{FF2B5EF4-FFF2-40B4-BE49-F238E27FC236}">
+              <a16:creationId xmlns:a16="http://schemas.microsoft.com/office/drawing/2014/main" id="{2967923A-A64A-7447-5203-0016D3EF0F6F}"/>
+            </a:ext>
+          </a:extLst>
+        </p:cNvPr>
+        <p:cNvGrpSpPr/>
+        <p:nvPr/>
+      </p:nvGrpSpPr>
+      <p:grpSpPr>
+        <a:xfrm>
+          <a:off x="0" y="0"/>
+          <a:ext cx="0" cy="0"/>
+          <a:chOff x="0" y="0"/>
+          <a:chExt cx="0" cy="0"/>
+        </a:xfrm>
+      </p:grpSpPr>
+      <p:grpSp>
+        <p:nvGrpSpPr>
+          <p:cNvPr id="405" name="Group 404">
+            <a:extLst>
+              <a:ext uri="{FF2B5EF4-FFF2-40B4-BE49-F238E27FC236}">
+                <a16:creationId xmlns:a16="http://schemas.microsoft.com/office/drawing/2014/main" id="{86971060-49B2-7A99-5E28-88B7219789F2}"/>
+              </a:ext>
+            </a:extLst>
+          </p:cNvPr>
+          <p:cNvGrpSpPr/>
+          <p:nvPr/>
+        </p:nvGrpSpPr>
+        <p:grpSpPr>
+          <a:xfrm>
+            <a:off x="-3445945" y="-10479"/>
+            <a:ext cx="18999225" cy="5658105"/>
+            <a:chOff x="-3445945" y="-10479"/>
+            <a:chExt cx="18999225" cy="5658105"/>
+          </a:xfrm>
+        </p:grpSpPr>
+        <p:sp>
+          <p:nvSpPr>
+            <p:cNvPr id="337" name="Rectangle 336">
+              <a:extLst>
+                <a:ext uri="{FF2B5EF4-FFF2-40B4-BE49-F238E27FC236}">
+                  <a16:creationId xmlns:a16="http://schemas.microsoft.com/office/drawing/2014/main" id="{61F89ED9-9119-E662-712B-B7A671A387F0}"/>
+                </a:ext>
+              </a:extLst>
+            </p:cNvPr>
+            <p:cNvSpPr/>
+            <p:nvPr/>
+          </p:nvSpPr>
+          <p:spPr>
+            <a:xfrm>
+              <a:off x="7476080" y="3768026"/>
+              <a:ext cx="8077200" cy="1879600"/>
+            </a:xfrm>
+            <a:prstGeom prst="rect">
+              <a:avLst/>
+            </a:prstGeom>
+            <a:noFill/>
+            <a:ln>
+              <a:noFill/>
+            </a:ln>
+          </p:spPr>
+          <p:style>
+            <a:lnRef idx="2">
+              <a:schemeClr val="accent1">
+                <a:shade val="15000"/>
+              </a:schemeClr>
+            </a:lnRef>
+            <a:fillRef idx="1">
+              <a:schemeClr val="accent1"/>
+            </a:fillRef>
+            <a:effectRef idx="0">
+              <a:schemeClr val="accent1"/>
+            </a:effectRef>
+            <a:fontRef idx="minor">
+              <a:schemeClr val="lt1"/>
+            </a:fontRef>
+          </p:style>
+          <p:txBody>
+            <a:bodyPr rtlCol="0" anchor="ctr"/>
+            <a:lstStyle/>
+            <a:p>
+              <a:pPr algn="ctr"/>
+              <a:endParaRPr lang="en-US"/>
+            </a:p>
+          </p:txBody>
+        </p:sp>
+        <p:sp>
+          <p:nvSpPr>
+            <p:cNvPr id="338" name="Rectangle 337">
+              <a:extLst>
+                <a:ext uri="{FF2B5EF4-FFF2-40B4-BE49-F238E27FC236}">
+                  <a16:creationId xmlns:a16="http://schemas.microsoft.com/office/drawing/2014/main" id="{0EAA1071-5625-5587-6A42-56E972270A35}"/>
+                </a:ext>
+              </a:extLst>
+            </p:cNvPr>
+            <p:cNvSpPr/>
+            <p:nvPr/>
+          </p:nvSpPr>
+          <p:spPr>
+            <a:xfrm>
+              <a:off x="-3445945" y="3717244"/>
+              <a:ext cx="8077200" cy="1879600"/>
+            </a:xfrm>
+            <a:prstGeom prst="rect">
+              <a:avLst/>
+            </a:prstGeom>
+            <a:noFill/>
+            <a:ln>
+              <a:noFill/>
+            </a:ln>
+          </p:spPr>
+          <p:style>
+            <a:lnRef idx="2">
+              <a:schemeClr val="accent1">
+                <a:shade val="15000"/>
+              </a:schemeClr>
+            </a:lnRef>
+            <a:fillRef idx="1">
+              <a:schemeClr val="accent1"/>
+            </a:fillRef>
+            <a:effectRef idx="0">
+              <a:schemeClr val="accent1"/>
+            </a:effectRef>
+            <a:fontRef idx="minor">
+              <a:schemeClr val="lt1"/>
+            </a:fontRef>
+          </p:style>
+          <p:txBody>
+            <a:bodyPr rtlCol="0" anchor="ctr"/>
+            <a:lstStyle/>
+            <a:p>
+              <a:pPr algn="ctr"/>
+              <a:endParaRPr lang="en-US"/>
+            </a:p>
+          </p:txBody>
+        </p:sp>
+        <p:sp>
+          <p:nvSpPr>
+            <p:cNvPr id="367" name="Rectangle 366">
+              <a:extLst>
+                <a:ext uri="{FF2B5EF4-FFF2-40B4-BE49-F238E27FC236}">
+                  <a16:creationId xmlns:a16="http://schemas.microsoft.com/office/drawing/2014/main" id="{7175FE95-7A57-E4F8-E77E-DF2602A0BA2B}"/>
+                </a:ext>
+              </a:extLst>
+            </p:cNvPr>
+            <p:cNvSpPr/>
+            <p:nvPr/>
+          </p:nvSpPr>
+          <p:spPr>
+            <a:xfrm>
+              <a:off x="5556309" y="-10479"/>
+              <a:ext cx="959007" cy="1879600"/>
+            </a:xfrm>
+            <a:prstGeom prst="rect">
+              <a:avLst/>
+            </a:prstGeom>
+            <a:noFill/>
+            <a:ln>
+              <a:noFill/>
+            </a:ln>
+          </p:spPr>
+          <p:style>
+            <a:lnRef idx="2">
+              <a:schemeClr val="accent1">
+                <a:shade val="15000"/>
+              </a:schemeClr>
+            </a:lnRef>
+            <a:fillRef idx="1">
+              <a:schemeClr val="accent1"/>
+            </a:fillRef>
+            <a:effectRef idx="0">
+              <a:schemeClr val="accent1"/>
+            </a:effectRef>
+            <a:fontRef idx="minor">
+              <a:schemeClr val="lt1"/>
+            </a:fontRef>
+          </p:style>
+          <p:txBody>
+            <a:bodyPr rtlCol="0" anchor="ctr"/>
+            <a:lstStyle/>
+            <a:p>
+              <a:pPr algn="ctr"/>
+              <a:endParaRPr lang="en-US"/>
+            </a:p>
+          </p:txBody>
+        </p:sp>
+        <p:sp>
+          <p:nvSpPr>
+            <p:cNvPr id="368" name="Rectangle 367">
+              <a:extLst>
+                <a:ext uri="{FF2B5EF4-FFF2-40B4-BE49-F238E27FC236}">
+                  <a16:creationId xmlns:a16="http://schemas.microsoft.com/office/drawing/2014/main" id="{54E8CE25-7E6E-F727-0B17-7BCB16682BAA}"/>
+                </a:ext>
+              </a:extLst>
+            </p:cNvPr>
+            <p:cNvSpPr/>
+            <p:nvPr/>
+          </p:nvSpPr>
+          <p:spPr>
+            <a:xfrm>
+              <a:off x="6515317" y="0"/>
+              <a:ext cx="1027604" cy="1879600"/>
+            </a:xfrm>
+            <a:prstGeom prst="rect">
+              <a:avLst/>
+            </a:prstGeom>
+            <a:noFill/>
+            <a:ln>
+              <a:noFill/>
+            </a:ln>
+          </p:spPr>
+          <p:style>
+            <a:lnRef idx="2">
+              <a:schemeClr val="accent1">
+                <a:shade val="15000"/>
+              </a:schemeClr>
+            </a:lnRef>
+            <a:fillRef idx="1">
+              <a:schemeClr val="accent1"/>
+            </a:fillRef>
+            <a:effectRef idx="0">
+              <a:schemeClr val="accent1"/>
+            </a:effectRef>
+            <a:fontRef idx="minor">
+              <a:schemeClr val="lt1"/>
+            </a:fontRef>
+          </p:style>
+          <p:txBody>
+            <a:bodyPr rtlCol="0" anchor="ctr"/>
+            <a:lstStyle/>
+            <a:p>
+              <a:pPr algn="ctr"/>
+              <a:endParaRPr lang="en-US"/>
+            </a:p>
+          </p:txBody>
+        </p:sp>
+        <p:sp>
+          <p:nvSpPr>
+            <p:cNvPr id="248" name="Rounded Rectangle 247">
+              <a:extLst>
+                <a:ext uri="{FF2B5EF4-FFF2-40B4-BE49-F238E27FC236}">
+                  <a16:creationId xmlns:a16="http://schemas.microsoft.com/office/drawing/2014/main" id="{BAAB3F55-0282-BDD5-F488-5EA42E12816F}"/>
+                </a:ext>
+              </a:extLst>
+            </p:cNvPr>
+            <p:cNvSpPr/>
+            <p:nvPr/>
+          </p:nvSpPr>
+          <p:spPr>
+            <a:xfrm>
+              <a:off x="2524898" y="339099"/>
+              <a:ext cx="4413929" cy="1216301"/>
+            </a:xfrm>
+            <a:prstGeom prst="roundRect">
+              <a:avLst>
+                <a:gd name="adj" fmla="val 36591"/>
+              </a:avLst>
+            </a:prstGeom>
+            <a:solidFill>
+              <a:srgbClr val="00B0F0">
+                <a:alpha val="25714"/>
+              </a:srgbClr>
+            </a:solidFill>
+            <a:ln w="34925">
+              <a:solidFill>
+                <a:srgbClr val="0070C0"/>
+              </a:solidFill>
+            </a:ln>
+          </p:spPr>
+          <p:style>
+            <a:lnRef idx="2">
+              <a:schemeClr val="accent1">
+                <a:shade val="15000"/>
+              </a:schemeClr>
+            </a:lnRef>
+            <a:fillRef idx="1">
+              <a:schemeClr val="accent1"/>
+            </a:fillRef>
+            <a:effectRef idx="0">
+              <a:schemeClr val="accent1"/>
+            </a:effectRef>
+            <a:fontRef idx="minor">
+              <a:schemeClr val="lt1"/>
+            </a:fontRef>
+          </p:style>
+          <p:txBody>
+            <a:bodyPr rtlCol="0" anchor="ctr"/>
+            <a:lstStyle/>
+            <a:p>
+              <a:pPr algn="ctr"/>
+              <a:endParaRPr lang="en-US"/>
+            </a:p>
+          </p:txBody>
+        </p:sp>
+        <p:sp>
+          <p:nvSpPr>
+            <p:cNvPr id="269" name="Rounded Rectangle 268">
+              <a:extLst>
+                <a:ext uri="{FF2B5EF4-FFF2-40B4-BE49-F238E27FC236}">
+                  <a16:creationId xmlns:a16="http://schemas.microsoft.com/office/drawing/2014/main" id="{7A02F870-0B88-DB00-ADBB-6C43903FE80A}"/>
+                </a:ext>
+              </a:extLst>
+            </p:cNvPr>
+            <p:cNvSpPr/>
+            <p:nvPr/>
+          </p:nvSpPr>
+          <p:spPr>
+            <a:xfrm>
+              <a:off x="7010986" y="355037"/>
+              <a:ext cx="3208180" cy="1216301"/>
+            </a:xfrm>
+            <a:prstGeom prst="roundRect">
+              <a:avLst>
+                <a:gd name="adj" fmla="val 36591"/>
+              </a:avLst>
+            </a:prstGeom>
+            <a:solidFill>
+              <a:srgbClr val="00B0F0">
+                <a:alpha val="25714"/>
+              </a:srgbClr>
+            </a:solidFill>
+            <a:ln w="34925">
+              <a:solidFill>
+                <a:srgbClr val="0070C0"/>
+              </a:solidFill>
+            </a:ln>
+          </p:spPr>
+          <p:style>
+            <a:lnRef idx="2">
+              <a:schemeClr val="accent1">
+                <a:shade val="15000"/>
+              </a:schemeClr>
+            </a:lnRef>
+            <a:fillRef idx="1">
+              <a:schemeClr val="accent1"/>
+            </a:fillRef>
+            <a:effectRef idx="0">
+              <a:schemeClr val="accent1"/>
+            </a:effectRef>
+            <a:fontRef idx="minor">
+              <a:schemeClr val="lt1"/>
+            </a:fontRef>
+          </p:style>
+          <p:txBody>
+            <a:bodyPr rtlCol="0" anchor="ctr"/>
+            <a:lstStyle/>
+            <a:p>
+              <a:pPr algn="ctr"/>
+              <a:endParaRPr lang="en-US"/>
+            </a:p>
+          </p:txBody>
+        </p:sp>
+        <p:sp>
+          <p:nvSpPr>
+            <p:cNvPr id="277" name="Rounded Rectangle 276">
+              <a:extLst>
+                <a:ext uri="{FF2B5EF4-FFF2-40B4-BE49-F238E27FC236}">
+                  <a16:creationId xmlns:a16="http://schemas.microsoft.com/office/drawing/2014/main" id="{971150EC-FFA1-541A-EBA3-11E7F725F6CE}"/>
+                </a:ext>
+              </a:extLst>
+            </p:cNvPr>
+            <p:cNvSpPr/>
+            <p:nvPr/>
+          </p:nvSpPr>
+          <p:spPr>
+            <a:xfrm>
+              <a:off x="-3233232" y="3966219"/>
+              <a:ext cx="4413929" cy="1216301"/>
+            </a:xfrm>
+            <a:prstGeom prst="roundRect">
+              <a:avLst>
+                <a:gd name="adj" fmla="val 36591"/>
+              </a:avLst>
+            </a:prstGeom>
+            <a:solidFill>
+              <a:srgbClr val="00B0F0">
+                <a:alpha val="25714"/>
+              </a:srgbClr>
+            </a:solidFill>
+            <a:ln w="34925">
+              <a:solidFill>
+                <a:srgbClr val="0070C0"/>
+              </a:solidFill>
+            </a:ln>
+          </p:spPr>
+          <p:style>
+            <a:lnRef idx="2">
+              <a:schemeClr val="accent1">
+                <a:shade val="15000"/>
+              </a:schemeClr>
+            </a:lnRef>
+            <a:fillRef idx="1">
+              <a:schemeClr val="accent1"/>
+            </a:fillRef>
+            <a:effectRef idx="0">
+              <a:schemeClr val="accent1"/>
+            </a:effectRef>
+            <a:fontRef idx="minor">
+              <a:schemeClr val="lt1"/>
+            </a:fontRef>
+          </p:style>
+          <p:txBody>
+            <a:bodyPr rtlCol="0" anchor="ctr"/>
+            <a:lstStyle/>
+            <a:p>
+              <a:pPr algn="ctr"/>
+              <a:endParaRPr lang="en-US"/>
+            </a:p>
+          </p:txBody>
+        </p:sp>
+        <p:sp>
+          <p:nvSpPr>
+            <p:cNvPr id="285" name="Rounded Rectangle 284">
+              <a:extLst>
+                <a:ext uri="{FF2B5EF4-FFF2-40B4-BE49-F238E27FC236}">
+                  <a16:creationId xmlns:a16="http://schemas.microsoft.com/office/drawing/2014/main" id="{5E95108E-FF31-B567-B4D2-6C30A149F62F}"/>
+                </a:ext>
+              </a:extLst>
+            </p:cNvPr>
+            <p:cNvSpPr/>
+            <p:nvPr/>
+          </p:nvSpPr>
+          <p:spPr>
+            <a:xfrm>
+              <a:off x="1252856" y="3982157"/>
+              <a:ext cx="3208180" cy="1216301"/>
+            </a:xfrm>
+            <a:prstGeom prst="roundRect">
+              <a:avLst>
+                <a:gd name="adj" fmla="val 36591"/>
+              </a:avLst>
+            </a:prstGeom>
+            <a:solidFill>
+              <a:srgbClr val="00B0F0">
+                <a:alpha val="25714"/>
+              </a:srgbClr>
+            </a:solidFill>
+            <a:ln w="34925">
+              <a:solidFill>
+                <a:srgbClr val="0070C0"/>
+              </a:solidFill>
+            </a:ln>
+          </p:spPr>
+          <p:style>
+            <a:lnRef idx="2">
+              <a:schemeClr val="accent1">
+                <a:shade val="15000"/>
+              </a:schemeClr>
+            </a:lnRef>
+            <a:fillRef idx="1">
+              <a:schemeClr val="accent1"/>
+            </a:fillRef>
+            <a:effectRef idx="0">
+              <a:schemeClr val="accent1"/>
+            </a:effectRef>
+            <a:fontRef idx="minor">
+              <a:schemeClr val="lt1"/>
+            </a:fontRef>
+          </p:style>
+          <p:txBody>
+            <a:bodyPr rtlCol="0" anchor="ctr"/>
+            <a:lstStyle/>
+            <a:p>
+              <a:pPr algn="ctr"/>
+              <a:endParaRPr lang="en-US"/>
+            </a:p>
+          </p:txBody>
+        </p:sp>
+        <p:sp>
+          <p:nvSpPr>
+            <p:cNvPr id="293" name="Rounded Rectangle 292">
+              <a:extLst>
+                <a:ext uri="{FF2B5EF4-FFF2-40B4-BE49-F238E27FC236}">
+                  <a16:creationId xmlns:a16="http://schemas.microsoft.com/office/drawing/2014/main" id="{A784976C-518F-FCC3-2A5C-EC819D5E2FE9}"/>
+                </a:ext>
+              </a:extLst>
+            </p:cNvPr>
+            <p:cNvSpPr/>
+            <p:nvPr/>
+          </p:nvSpPr>
+          <p:spPr>
+            <a:xfrm>
+              <a:off x="7678423" y="3982157"/>
+              <a:ext cx="4413929" cy="1216301"/>
+            </a:xfrm>
+            <a:prstGeom prst="roundRect">
+              <a:avLst>
+                <a:gd name="adj" fmla="val 36591"/>
+              </a:avLst>
+            </a:prstGeom>
+            <a:solidFill>
+              <a:srgbClr val="00B0F0">
+                <a:alpha val="25714"/>
+              </a:srgbClr>
+            </a:solidFill>
+            <a:ln w="34925">
+              <a:solidFill>
+                <a:srgbClr val="0070C0"/>
+              </a:solidFill>
+            </a:ln>
+          </p:spPr>
+          <p:style>
+            <a:lnRef idx="2">
+              <a:schemeClr val="accent1">
+                <a:shade val="15000"/>
+              </a:schemeClr>
+            </a:lnRef>
+            <a:fillRef idx="1">
+              <a:schemeClr val="accent1"/>
+            </a:fillRef>
+            <a:effectRef idx="0">
+              <a:schemeClr val="accent1"/>
+            </a:effectRef>
+            <a:fontRef idx="minor">
+              <a:schemeClr val="lt1"/>
+            </a:fontRef>
+          </p:style>
+          <p:txBody>
+            <a:bodyPr rtlCol="0" anchor="ctr"/>
+            <a:lstStyle/>
+            <a:p>
+              <a:pPr algn="ctr"/>
+              <a:endParaRPr lang="en-US"/>
+            </a:p>
+          </p:txBody>
+        </p:sp>
+        <p:sp>
+          <p:nvSpPr>
+            <p:cNvPr id="301" name="Rounded Rectangle 300">
+              <a:extLst>
+                <a:ext uri="{FF2B5EF4-FFF2-40B4-BE49-F238E27FC236}">
+                  <a16:creationId xmlns:a16="http://schemas.microsoft.com/office/drawing/2014/main" id="{A623A268-B9AB-9E8E-BDB7-D1DB93E73FB8}"/>
+                </a:ext>
+              </a:extLst>
+            </p:cNvPr>
+            <p:cNvSpPr/>
+            <p:nvPr/>
+          </p:nvSpPr>
+          <p:spPr>
+            <a:xfrm>
+              <a:off x="12164511" y="3998095"/>
+              <a:ext cx="3208180" cy="1216301"/>
+            </a:xfrm>
+            <a:prstGeom prst="roundRect">
+              <a:avLst>
+                <a:gd name="adj" fmla="val 36591"/>
+              </a:avLst>
+            </a:prstGeom>
+            <a:solidFill>
+              <a:srgbClr val="00B0F0">
+                <a:alpha val="25714"/>
+              </a:srgbClr>
+            </a:solidFill>
+            <a:ln w="34925">
+              <a:solidFill>
+                <a:srgbClr val="0070C0"/>
+              </a:solidFill>
+            </a:ln>
+          </p:spPr>
+          <p:style>
+            <a:lnRef idx="2">
+              <a:schemeClr val="accent1">
+                <a:shade val="15000"/>
+              </a:schemeClr>
+            </a:lnRef>
+            <a:fillRef idx="1">
+              <a:schemeClr val="accent1"/>
+            </a:fillRef>
+            <a:effectRef idx="0">
+              <a:schemeClr val="accent1"/>
+            </a:effectRef>
+            <a:fontRef idx="minor">
+              <a:schemeClr val="lt1"/>
+            </a:fontRef>
+          </p:style>
+          <p:txBody>
+            <a:bodyPr rtlCol="0" anchor="ctr"/>
+            <a:lstStyle/>
+            <a:p>
+              <a:pPr algn="ctr"/>
+              <a:endParaRPr lang="en-US"/>
+            </a:p>
+          </p:txBody>
+        </p:sp>
+        <p:pic>
+          <p:nvPicPr>
+            <p:cNvPr id="240" name="Graphic 239" descr="Sleep with solid fill">
+              <a:extLst>
+                <a:ext uri="{FF2B5EF4-FFF2-40B4-BE49-F238E27FC236}">
+                  <a16:creationId xmlns:a16="http://schemas.microsoft.com/office/drawing/2014/main" id="{3CD1EC67-F57D-92F8-5DE2-7ABA01A32432}"/>
+                </a:ext>
+              </a:extLst>
+            </p:cNvPr>
+            <p:cNvPicPr>
+              <a:picLocks noChangeAspect="1"/>
+            </p:cNvPicPr>
+            <p:nvPr/>
+          </p:nvPicPr>
+          <p:blipFill>
+            <a:blip>
+              <a:extLst>
+                <a:ext uri="{96DAC541-7B7A-43D3-8B79-37D633B846F1}">
+                  <asvg:svgBlip xmlns:asvg="http://schemas.microsoft.com/office/drawing/2016/SVG/main" r:embed="rId3"/>
+                </a:ext>
+              </a:extLst>
+            </a:blip>
+            <a:srcRect/>
+            <a:stretch/>
+          </p:blipFill>
+          <p:spPr>
+            <a:xfrm>
+              <a:off x="2810982" y="696621"/>
+              <a:ext cx="634696" cy="634696"/>
+            </a:xfrm>
+            <a:prstGeom prst="rect">
+              <a:avLst/>
+            </a:prstGeom>
+          </p:spPr>
+        </p:pic>
+        <p:pic>
+          <p:nvPicPr>
+            <p:cNvPr id="241" name="Graphic 240" descr="Sleep with solid fill">
+              <a:extLst>
+                <a:ext uri="{FF2B5EF4-FFF2-40B4-BE49-F238E27FC236}">
+                  <a16:creationId xmlns:a16="http://schemas.microsoft.com/office/drawing/2014/main" id="{6695471A-D6A9-D1D1-0115-D8B3C2ADFD7A}"/>
+                </a:ext>
+              </a:extLst>
+            </p:cNvPr>
+            <p:cNvPicPr>
+              <a:picLocks noChangeAspect="1"/>
+            </p:cNvPicPr>
+            <p:nvPr/>
+          </p:nvPicPr>
+          <p:blipFill>
+            <a:blip>
+              <a:extLst>
+                <a:ext uri="{96DAC541-7B7A-43D3-8B79-37D633B846F1}">
+                  <asvg:svgBlip xmlns:asvg="http://schemas.microsoft.com/office/drawing/2016/SVG/main" r:embed="rId4"/>
+                </a:ext>
+              </a:extLst>
+            </a:blip>
+            <a:srcRect/>
+            <a:stretch/>
+          </p:blipFill>
+          <p:spPr>
+            <a:xfrm>
+              <a:off x="3876814" y="696621"/>
+              <a:ext cx="634696" cy="634696"/>
+            </a:xfrm>
+            <a:prstGeom prst="rect">
+              <a:avLst/>
+            </a:prstGeom>
+          </p:spPr>
+        </p:pic>
+        <p:pic>
+          <p:nvPicPr>
+            <p:cNvPr id="242" name="Graphic 241" descr="Sleep with solid fill">
+              <a:extLst>
+                <a:ext uri="{FF2B5EF4-FFF2-40B4-BE49-F238E27FC236}">
+                  <a16:creationId xmlns:a16="http://schemas.microsoft.com/office/drawing/2014/main" id="{0264FEF3-D28E-0981-9CCE-2AA9F871C976}"/>
+                </a:ext>
+              </a:extLst>
+            </p:cNvPr>
+            <p:cNvPicPr>
+              <a:picLocks noChangeAspect="1"/>
+            </p:cNvPicPr>
+            <p:nvPr/>
+          </p:nvPicPr>
+          <p:blipFill>
+            <a:blip>
+              <a:extLst>
+                <a:ext uri="{96DAC541-7B7A-43D3-8B79-37D633B846F1}">
+                  <asvg:svgBlip xmlns:asvg="http://schemas.microsoft.com/office/drawing/2016/SVG/main" r:embed="rId3"/>
+                </a:ext>
+              </a:extLst>
+            </a:blip>
+            <a:srcRect/>
+            <a:stretch/>
+          </p:blipFill>
+          <p:spPr>
+            <a:xfrm>
+              <a:off x="4986147" y="696621"/>
+              <a:ext cx="634696" cy="634696"/>
+            </a:xfrm>
+            <a:prstGeom prst="rect">
+              <a:avLst/>
+            </a:prstGeom>
+          </p:spPr>
+        </p:pic>
+        <p:pic>
+          <p:nvPicPr>
+            <p:cNvPr id="243" name="Graphic 242" descr="Sleep with solid fill">
+              <a:extLst>
+                <a:ext uri="{FF2B5EF4-FFF2-40B4-BE49-F238E27FC236}">
+                  <a16:creationId xmlns:a16="http://schemas.microsoft.com/office/drawing/2014/main" id="{852EF58C-A25F-A08D-7FC1-4CFE7D8566DF}"/>
+                </a:ext>
+              </a:extLst>
+            </p:cNvPr>
+            <p:cNvPicPr>
+              <a:picLocks noChangeAspect="1"/>
+            </p:cNvPicPr>
+            <p:nvPr/>
+          </p:nvPicPr>
+          <p:blipFill>
+            <a:blip>
+              <a:extLst>
+                <a:ext uri="{96DAC541-7B7A-43D3-8B79-37D633B846F1}">
+                  <asvg:svgBlip xmlns:asvg="http://schemas.microsoft.com/office/drawing/2016/SVG/main" r:embed="rId3"/>
+                </a:ext>
+              </a:extLst>
+            </a:blip>
+            <a:srcRect/>
+            <a:stretch/>
+          </p:blipFill>
+          <p:spPr>
+            <a:xfrm>
+              <a:off x="6051979" y="696621"/>
+              <a:ext cx="634696" cy="634696"/>
+            </a:xfrm>
+            <a:prstGeom prst="rect">
+              <a:avLst/>
+            </a:prstGeom>
+          </p:spPr>
+        </p:pic>
+        <p:pic>
+          <p:nvPicPr>
+            <p:cNvPr id="244" name="Graphic 243" descr="Sleep with solid fill">
+              <a:extLst>
+                <a:ext uri="{FF2B5EF4-FFF2-40B4-BE49-F238E27FC236}">
+                  <a16:creationId xmlns:a16="http://schemas.microsoft.com/office/drawing/2014/main" id="{4B20BE29-DA3F-0E0C-6A1C-67527BD12A8E}"/>
+                </a:ext>
+              </a:extLst>
+            </p:cNvPr>
+            <p:cNvPicPr>
+              <a:picLocks noChangeAspect="1"/>
+            </p:cNvPicPr>
+            <p:nvPr/>
+          </p:nvPicPr>
+          <p:blipFill>
+            <a:blip>
+              <a:extLst>
+                <a:ext uri="{96DAC541-7B7A-43D3-8B79-37D633B846F1}">
+                  <asvg:svgBlip xmlns:asvg="http://schemas.microsoft.com/office/drawing/2016/SVG/main" r:embed="rId4"/>
+                </a:ext>
+              </a:extLst>
+            </a:blip>
+            <a:srcRect/>
+            <a:stretch/>
+          </p:blipFill>
+          <p:spPr>
+            <a:xfrm>
+              <a:off x="7171380" y="696621"/>
+              <a:ext cx="634696" cy="634696"/>
+            </a:xfrm>
+            <a:prstGeom prst="rect">
+              <a:avLst/>
+            </a:prstGeom>
+          </p:spPr>
+        </p:pic>
+        <p:pic>
+          <p:nvPicPr>
+            <p:cNvPr id="245" name="Graphic 244" descr="Sleep with solid fill">
+              <a:extLst>
+                <a:ext uri="{FF2B5EF4-FFF2-40B4-BE49-F238E27FC236}">
+                  <a16:creationId xmlns:a16="http://schemas.microsoft.com/office/drawing/2014/main" id="{A52BDAD3-361C-1463-7E67-57050A94F947}"/>
+                </a:ext>
+              </a:extLst>
+            </p:cNvPr>
+            <p:cNvPicPr>
+              <a:picLocks noChangeAspect="1"/>
+            </p:cNvPicPr>
+            <p:nvPr/>
+          </p:nvPicPr>
+          <p:blipFill>
+            <a:blip>
+              <a:extLst>
+                <a:ext uri="{96DAC541-7B7A-43D3-8B79-37D633B846F1}">
+                  <asvg:svgBlip xmlns:asvg="http://schemas.microsoft.com/office/drawing/2016/SVG/main" r:embed="rId5"/>
+                </a:ext>
+              </a:extLst>
+            </a:blip>
+            <a:srcRect/>
+            <a:stretch/>
+          </p:blipFill>
+          <p:spPr>
+            <a:xfrm>
+              <a:off x="8237212" y="696621"/>
+              <a:ext cx="634696" cy="634696"/>
+            </a:xfrm>
+            <a:prstGeom prst="rect">
+              <a:avLst/>
+            </a:prstGeom>
+          </p:spPr>
+        </p:pic>
+        <p:pic>
+          <p:nvPicPr>
+            <p:cNvPr id="246" name="Graphic 245" descr="Sleep with solid fill">
+              <a:extLst>
+                <a:ext uri="{FF2B5EF4-FFF2-40B4-BE49-F238E27FC236}">
+                  <a16:creationId xmlns:a16="http://schemas.microsoft.com/office/drawing/2014/main" id="{974DDC70-6CF2-410F-B25B-2AFD0038F8AA}"/>
+                </a:ext>
+              </a:extLst>
+            </p:cNvPr>
+            <p:cNvPicPr>
+              <a:picLocks noChangeAspect="1"/>
+            </p:cNvPicPr>
+            <p:nvPr/>
+          </p:nvPicPr>
+          <p:blipFill>
+            <a:blip>
+              <a:extLst>
+                <a:ext uri="{96DAC541-7B7A-43D3-8B79-37D633B846F1}">
+                  <asvg:svgBlip xmlns:asvg="http://schemas.microsoft.com/office/drawing/2016/SVG/main" r:embed="rId4"/>
+                </a:ext>
+              </a:extLst>
+            </a:blip>
+            <a:srcRect/>
+            <a:stretch/>
+          </p:blipFill>
+          <p:spPr>
+            <a:xfrm>
+              <a:off x="9346545" y="696621"/>
+              <a:ext cx="634696" cy="634696"/>
+            </a:xfrm>
+            <a:prstGeom prst="rect">
+              <a:avLst/>
+            </a:prstGeom>
+          </p:spPr>
+        </p:pic>
+        <p:sp>
+          <p:nvSpPr>
+            <p:cNvPr id="259" name="TextBox 258">
+              <a:extLst>
+                <a:ext uri="{FF2B5EF4-FFF2-40B4-BE49-F238E27FC236}">
+                  <a16:creationId xmlns:a16="http://schemas.microsoft.com/office/drawing/2014/main" id="{B3FD82C9-05B8-E3C9-B9B4-B0259BB9BEEE}"/>
+                </a:ext>
+              </a:extLst>
+            </p:cNvPr>
+            <p:cNvSpPr txBox="1"/>
+            <p:nvPr/>
+          </p:nvSpPr>
+          <p:spPr>
+            <a:xfrm>
+              <a:off x="2879430" y="532896"/>
+              <a:ext cx="570990" cy="369332"/>
+            </a:xfrm>
+            <a:prstGeom prst="rect">
+              <a:avLst/>
+            </a:prstGeom>
+            <a:noFill/>
+          </p:spPr>
+          <p:txBody>
+            <a:bodyPr wrap="none" rtlCol="0">
+              <a:spAutoFit/>
+            </a:bodyPr>
+            <a:lstStyle/>
+            <a:p>
+              <a:r>
+                <a:rPr lang="en-US" dirty="0"/>
+                <a:t>B08</a:t>
+              </a:r>
+            </a:p>
+          </p:txBody>
+        </p:sp>
+        <p:sp>
+          <p:nvSpPr>
+            <p:cNvPr id="260" name="TextBox 259">
+              <a:extLst>
+                <a:ext uri="{FF2B5EF4-FFF2-40B4-BE49-F238E27FC236}">
+                  <a16:creationId xmlns:a16="http://schemas.microsoft.com/office/drawing/2014/main" id="{D393BF82-C0FA-9BC9-12B9-5A4E06DF7C10}"/>
+                </a:ext>
+              </a:extLst>
+            </p:cNvPr>
+            <p:cNvSpPr txBox="1"/>
+            <p:nvPr/>
+          </p:nvSpPr>
+          <p:spPr>
+            <a:xfrm>
+              <a:off x="3941235" y="532896"/>
+              <a:ext cx="570990" cy="369332"/>
+            </a:xfrm>
+            <a:prstGeom prst="rect">
+              <a:avLst/>
+            </a:prstGeom>
+            <a:noFill/>
+          </p:spPr>
+          <p:txBody>
+            <a:bodyPr wrap="none" rtlCol="0">
+              <a:spAutoFit/>
+            </a:bodyPr>
+            <a:lstStyle/>
+            <a:p>
+              <a:r>
+                <a:rPr lang="en-US" dirty="0"/>
+                <a:t>B09</a:t>
+              </a:r>
+            </a:p>
+          </p:txBody>
+        </p:sp>
+        <p:sp>
+          <p:nvSpPr>
+            <p:cNvPr id="261" name="TextBox 260">
+              <a:extLst>
+                <a:ext uri="{FF2B5EF4-FFF2-40B4-BE49-F238E27FC236}">
+                  <a16:creationId xmlns:a16="http://schemas.microsoft.com/office/drawing/2014/main" id="{1201AF27-DA83-14E9-C51A-E05979D3C19D}"/>
+                </a:ext>
+              </a:extLst>
+            </p:cNvPr>
+            <p:cNvSpPr txBox="1"/>
+            <p:nvPr/>
+          </p:nvSpPr>
+          <p:spPr>
+            <a:xfrm>
+              <a:off x="5007895" y="532896"/>
+              <a:ext cx="570990" cy="369332"/>
+            </a:xfrm>
+            <a:prstGeom prst="rect">
+              <a:avLst/>
+            </a:prstGeom>
+            <a:noFill/>
+          </p:spPr>
+          <p:txBody>
+            <a:bodyPr wrap="none" rtlCol="0">
+              <a:spAutoFit/>
+            </a:bodyPr>
+            <a:lstStyle/>
+            <a:p>
+              <a:r>
+                <a:rPr lang="en-US" dirty="0"/>
+                <a:t>B10</a:t>
+              </a:r>
+            </a:p>
+          </p:txBody>
+        </p:sp>
+        <p:sp>
+          <p:nvSpPr>
+            <p:cNvPr id="262" name="TextBox 261">
+              <a:extLst>
+                <a:ext uri="{FF2B5EF4-FFF2-40B4-BE49-F238E27FC236}">
+                  <a16:creationId xmlns:a16="http://schemas.microsoft.com/office/drawing/2014/main" id="{A90B992C-EF65-76BF-1DCD-EF0CC49AD157}"/>
+                </a:ext>
+              </a:extLst>
+            </p:cNvPr>
+            <p:cNvSpPr txBox="1"/>
+            <p:nvPr/>
+          </p:nvSpPr>
+          <p:spPr>
+            <a:xfrm>
+              <a:off x="6097455" y="532896"/>
+              <a:ext cx="570990" cy="369332"/>
+            </a:xfrm>
+            <a:prstGeom prst="rect">
+              <a:avLst/>
+            </a:prstGeom>
+            <a:noFill/>
+          </p:spPr>
+          <p:txBody>
+            <a:bodyPr wrap="none" rtlCol="0">
+              <a:spAutoFit/>
+            </a:bodyPr>
+            <a:lstStyle/>
+            <a:p>
+              <a:r>
+                <a:rPr lang="en-US" dirty="0"/>
+                <a:t>B11</a:t>
+              </a:r>
+            </a:p>
+          </p:txBody>
+        </p:sp>
+        <p:sp>
+          <p:nvSpPr>
+            <p:cNvPr id="263" name="TextBox 262">
+              <a:extLst>
+                <a:ext uri="{FF2B5EF4-FFF2-40B4-BE49-F238E27FC236}">
+                  <a16:creationId xmlns:a16="http://schemas.microsoft.com/office/drawing/2014/main" id="{0D523EF9-91C4-036C-795C-1B026539243D}"/>
+                </a:ext>
+              </a:extLst>
+            </p:cNvPr>
+            <p:cNvSpPr txBox="1"/>
+            <p:nvPr/>
+          </p:nvSpPr>
+          <p:spPr>
+            <a:xfrm>
+              <a:off x="7217249" y="537485"/>
+              <a:ext cx="570990" cy="369332"/>
+            </a:xfrm>
+            <a:prstGeom prst="rect">
+              <a:avLst/>
+            </a:prstGeom>
+            <a:noFill/>
+          </p:spPr>
+          <p:txBody>
+            <a:bodyPr wrap="none" rtlCol="0">
+              <a:spAutoFit/>
+            </a:bodyPr>
+            <a:lstStyle/>
+            <a:p>
+              <a:r>
+                <a:rPr lang="en-US" dirty="0"/>
+                <a:t>B12</a:t>
+              </a:r>
+            </a:p>
+          </p:txBody>
+        </p:sp>
+        <p:sp>
+          <p:nvSpPr>
+            <p:cNvPr id="264" name="TextBox 263">
+              <a:extLst>
+                <a:ext uri="{FF2B5EF4-FFF2-40B4-BE49-F238E27FC236}">
+                  <a16:creationId xmlns:a16="http://schemas.microsoft.com/office/drawing/2014/main" id="{B986ABA0-3C51-185E-C11A-8592C652D434}"/>
+                </a:ext>
+              </a:extLst>
+            </p:cNvPr>
+            <p:cNvSpPr txBox="1"/>
+            <p:nvPr/>
+          </p:nvSpPr>
+          <p:spPr>
+            <a:xfrm>
+              <a:off x="8279054" y="537485"/>
+              <a:ext cx="570990" cy="369332"/>
+            </a:xfrm>
+            <a:prstGeom prst="rect">
+              <a:avLst/>
+            </a:prstGeom>
+            <a:noFill/>
+          </p:spPr>
+          <p:txBody>
+            <a:bodyPr wrap="none" rtlCol="0">
+              <a:spAutoFit/>
+            </a:bodyPr>
+            <a:lstStyle/>
+            <a:p>
+              <a:r>
+                <a:rPr lang="en-US" dirty="0"/>
+                <a:t>B13</a:t>
+              </a:r>
+            </a:p>
+          </p:txBody>
+        </p:sp>
+        <p:sp>
+          <p:nvSpPr>
+            <p:cNvPr id="265" name="TextBox 264">
+              <a:extLst>
+                <a:ext uri="{FF2B5EF4-FFF2-40B4-BE49-F238E27FC236}">
+                  <a16:creationId xmlns:a16="http://schemas.microsoft.com/office/drawing/2014/main" id="{3F96256B-50FF-AD69-8DD0-E0CBBFDA869A}"/>
+                </a:ext>
+              </a:extLst>
+            </p:cNvPr>
+            <p:cNvSpPr txBox="1"/>
+            <p:nvPr/>
+          </p:nvSpPr>
+          <p:spPr>
+            <a:xfrm>
+              <a:off x="9345714" y="537485"/>
+              <a:ext cx="570990" cy="369332"/>
+            </a:xfrm>
+            <a:prstGeom prst="rect">
+              <a:avLst/>
+            </a:prstGeom>
+            <a:noFill/>
+          </p:spPr>
+          <p:txBody>
+            <a:bodyPr wrap="none" rtlCol="0">
+              <a:spAutoFit/>
+            </a:bodyPr>
+            <a:lstStyle/>
+            <a:p>
+              <a:r>
+                <a:rPr lang="en-US" dirty="0"/>
+                <a:t>B14</a:t>
+              </a:r>
+            </a:p>
+          </p:txBody>
+        </p:sp>
+        <p:pic>
+          <p:nvPicPr>
+            <p:cNvPr id="270" name="Graphic 269" descr="Sleep with solid fill">
+              <a:extLst>
+                <a:ext uri="{FF2B5EF4-FFF2-40B4-BE49-F238E27FC236}">
+                  <a16:creationId xmlns:a16="http://schemas.microsoft.com/office/drawing/2014/main" id="{28E915A9-6EF2-9344-3A9E-E49066F3D26B}"/>
+                </a:ext>
+              </a:extLst>
+            </p:cNvPr>
+            <p:cNvPicPr>
+              <a:picLocks noChangeAspect="1"/>
+            </p:cNvPicPr>
+            <p:nvPr/>
+          </p:nvPicPr>
+          <p:blipFill>
+            <a:blip>
+              <a:extLst>
+                <a:ext uri="{96DAC541-7B7A-43D3-8B79-37D633B846F1}">
+                  <asvg:svgBlip xmlns:asvg="http://schemas.microsoft.com/office/drawing/2016/SVG/main" r:embed="rId6"/>
+                </a:ext>
+              </a:extLst>
+            </a:blip>
+            <a:srcRect/>
+            <a:stretch/>
+          </p:blipFill>
+          <p:spPr>
+            <a:xfrm>
+              <a:off x="-2947148" y="4323741"/>
+              <a:ext cx="634696" cy="634696"/>
+            </a:xfrm>
+            <a:prstGeom prst="rect">
+              <a:avLst/>
+            </a:prstGeom>
+          </p:spPr>
+        </p:pic>
+        <p:pic>
+          <p:nvPicPr>
+            <p:cNvPr id="271" name="Graphic 270" descr="Sleep with solid fill">
+              <a:extLst>
+                <a:ext uri="{FF2B5EF4-FFF2-40B4-BE49-F238E27FC236}">
+                  <a16:creationId xmlns:a16="http://schemas.microsoft.com/office/drawing/2014/main" id="{3AD02126-D26D-185E-5798-D738A30FA30A}"/>
+                </a:ext>
+              </a:extLst>
+            </p:cNvPr>
+            <p:cNvPicPr>
+              <a:picLocks noChangeAspect="1"/>
+            </p:cNvPicPr>
+            <p:nvPr/>
+          </p:nvPicPr>
+          <p:blipFill>
+            <a:blip>
+              <a:extLst>
+                <a:ext uri="{96DAC541-7B7A-43D3-8B79-37D633B846F1}">
+                  <asvg:svgBlip xmlns:asvg="http://schemas.microsoft.com/office/drawing/2016/SVG/main" r:embed="rId4"/>
+                </a:ext>
+              </a:extLst>
+            </a:blip>
+            <a:srcRect/>
+            <a:stretch/>
+          </p:blipFill>
+          <p:spPr>
+            <a:xfrm>
+              <a:off x="-1881316" y="4323741"/>
+              <a:ext cx="634696" cy="634696"/>
+            </a:xfrm>
+            <a:prstGeom prst="rect">
+              <a:avLst/>
+            </a:prstGeom>
+          </p:spPr>
+        </p:pic>
+        <p:pic>
+          <p:nvPicPr>
+            <p:cNvPr id="272" name="Graphic 271" descr="Sleep with solid fill">
+              <a:extLst>
+                <a:ext uri="{FF2B5EF4-FFF2-40B4-BE49-F238E27FC236}">
+                  <a16:creationId xmlns:a16="http://schemas.microsoft.com/office/drawing/2014/main" id="{008EDC99-941D-828B-8EC7-38AD475AAC6A}"/>
+                </a:ext>
+              </a:extLst>
+            </p:cNvPr>
+            <p:cNvPicPr>
+              <a:picLocks noChangeAspect="1"/>
+            </p:cNvPicPr>
+            <p:nvPr/>
+          </p:nvPicPr>
+          <p:blipFill>
+            <a:blip>
+              <a:extLst>
+                <a:ext uri="{96DAC541-7B7A-43D3-8B79-37D633B846F1}">
+                  <asvg:svgBlip xmlns:asvg="http://schemas.microsoft.com/office/drawing/2016/SVG/main" r:embed="rId3"/>
+                </a:ext>
+              </a:extLst>
+            </a:blip>
+            <a:srcRect/>
+            <a:stretch/>
+          </p:blipFill>
+          <p:spPr>
+            <a:xfrm>
+              <a:off x="-771983" y="4323741"/>
+              <a:ext cx="634696" cy="634696"/>
+            </a:xfrm>
+            <a:prstGeom prst="rect">
+              <a:avLst/>
+            </a:prstGeom>
+          </p:spPr>
+        </p:pic>
+        <p:pic>
+          <p:nvPicPr>
+            <p:cNvPr id="273" name="Graphic 272" descr="Sleep with solid fill">
+              <a:extLst>
+                <a:ext uri="{FF2B5EF4-FFF2-40B4-BE49-F238E27FC236}">
+                  <a16:creationId xmlns:a16="http://schemas.microsoft.com/office/drawing/2014/main" id="{618EE3C0-CE81-31EA-64F9-B925DF4F6F9A}"/>
+                </a:ext>
+              </a:extLst>
+            </p:cNvPr>
+            <p:cNvPicPr>
+              <a:picLocks noChangeAspect="1"/>
+            </p:cNvPicPr>
+            <p:nvPr/>
+          </p:nvPicPr>
+          <p:blipFill>
+            <a:blip>
+              <a:extLst>
+                <a:ext uri="{96DAC541-7B7A-43D3-8B79-37D633B846F1}">
+                  <asvg:svgBlip xmlns:asvg="http://schemas.microsoft.com/office/drawing/2016/SVG/main" r:embed="rId3"/>
+                </a:ext>
+              </a:extLst>
+            </a:blip>
+            <a:srcRect/>
+            <a:stretch/>
+          </p:blipFill>
+          <p:spPr>
+            <a:xfrm>
+              <a:off x="293849" y="4323741"/>
+              <a:ext cx="634696" cy="634696"/>
+            </a:xfrm>
+            <a:prstGeom prst="rect">
+              <a:avLst/>
+            </a:prstGeom>
+          </p:spPr>
+        </p:pic>
+        <p:pic>
+          <p:nvPicPr>
+            <p:cNvPr id="274" name="Graphic 273" descr="Sleep with solid fill">
+              <a:extLst>
+                <a:ext uri="{FF2B5EF4-FFF2-40B4-BE49-F238E27FC236}">
+                  <a16:creationId xmlns:a16="http://schemas.microsoft.com/office/drawing/2014/main" id="{E2319643-9C7D-41EB-D781-DC621622927C}"/>
+                </a:ext>
+              </a:extLst>
+            </p:cNvPr>
+            <p:cNvPicPr>
+              <a:picLocks noChangeAspect="1"/>
+            </p:cNvPicPr>
+            <p:nvPr/>
+          </p:nvPicPr>
+          <p:blipFill>
+            <a:blip>
+              <a:extLst>
+                <a:ext uri="{96DAC541-7B7A-43D3-8B79-37D633B846F1}">
+                  <asvg:svgBlip xmlns:asvg="http://schemas.microsoft.com/office/drawing/2016/SVG/main" r:embed="rId3"/>
+                </a:ext>
+              </a:extLst>
+            </a:blip>
+            <a:srcRect/>
+            <a:stretch/>
+          </p:blipFill>
+          <p:spPr>
+            <a:xfrm>
+              <a:off x="1413250" y="4323741"/>
+              <a:ext cx="634696" cy="634696"/>
+            </a:xfrm>
+            <a:prstGeom prst="rect">
+              <a:avLst/>
+            </a:prstGeom>
+          </p:spPr>
+        </p:pic>
+        <p:pic>
+          <p:nvPicPr>
+            <p:cNvPr id="275" name="Graphic 274" descr="Sleep with solid fill">
+              <a:extLst>
+                <a:ext uri="{FF2B5EF4-FFF2-40B4-BE49-F238E27FC236}">
+                  <a16:creationId xmlns:a16="http://schemas.microsoft.com/office/drawing/2014/main" id="{26D8135D-81D4-0CCD-8ADB-A31CD6CDD895}"/>
+                </a:ext>
+              </a:extLst>
+            </p:cNvPr>
+            <p:cNvPicPr>
+              <a:picLocks noChangeAspect="1"/>
+            </p:cNvPicPr>
+            <p:nvPr/>
+          </p:nvPicPr>
+          <p:blipFill>
+            <a:blip>
+              <a:extLst>
+                <a:ext uri="{96DAC541-7B7A-43D3-8B79-37D633B846F1}">
+                  <asvg:svgBlip xmlns:asvg="http://schemas.microsoft.com/office/drawing/2016/SVG/main" r:embed="rId5"/>
+                </a:ext>
+              </a:extLst>
+            </a:blip>
+            <a:srcRect/>
+            <a:stretch/>
+          </p:blipFill>
+          <p:spPr>
+            <a:xfrm>
+              <a:off x="2479082" y="4323741"/>
+              <a:ext cx="634696" cy="634696"/>
+            </a:xfrm>
+            <a:prstGeom prst="rect">
+              <a:avLst/>
+            </a:prstGeom>
+          </p:spPr>
+        </p:pic>
+        <p:pic>
+          <p:nvPicPr>
+            <p:cNvPr id="276" name="Graphic 275" descr="Sleep with solid fill">
+              <a:extLst>
+                <a:ext uri="{FF2B5EF4-FFF2-40B4-BE49-F238E27FC236}">
+                  <a16:creationId xmlns:a16="http://schemas.microsoft.com/office/drawing/2014/main" id="{A6838EC2-96B2-7C1D-D399-403B6DDFB88C}"/>
+                </a:ext>
+              </a:extLst>
+            </p:cNvPr>
+            <p:cNvPicPr>
+              <a:picLocks noChangeAspect="1"/>
+            </p:cNvPicPr>
+            <p:nvPr/>
+          </p:nvPicPr>
+          <p:blipFill>
+            <a:blip>
+              <a:extLst>
+                <a:ext uri="{96DAC541-7B7A-43D3-8B79-37D633B846F1}">
+                  <asvg:svgBlip xmlns:asvg="http://schemas.microsoft.com/office/drawing/2016/SVG/main" r:embed="rId4"/>
+                </a:ext>
+              </a:extLst>
+            </a:blip>
+            <a:srcRect/>
+            <a:stretch/>
+          </p:blipFill>
+          <p:spPr>
+            <a:xfrm>
+              <a:off x="3588415" y="4323741"/>
+              <a:ext cx="634696" cy="634696"/>
+            </a:xfrm>
+            <a:prstGeom prst="rect">
+              <a:avLst/>
+            </a:prstGeom>
+          </p:spPr>
+        </p:pic>
+        <p:sp>
+          <p:nvSpPr>
+            <p:cNvPr id="278" name="TextBox 277">
+              <a:extLst>
+                <a:ext uri="{FF2B5EF4-FFF2-40B4-BE49-F238E27FC236}">
+                  <a16:creationId xmlns:a16="http://schemas.microsoft.com/office/drawing/2014/main" id="{B0EF4F86-F836-2A56-EE07-F00D75EA979A}"/>
+                </a:ext>
+              </a:extLst>
+            </p:cNvPr>
+            <p:cNvSpPr txBox="1"/>
+            <p:nvPr/>
+          </p:nvSpPr>
+          <p:spPr>
+            <a:xfrm>
+              <a:off x="-2878700" y="4160016"/>
+              <a:ext cx="570990" cy="369332"/>
+            </a:xfrm>
+            <a:prstGeom prst="rect">
+              <a:avLst/>
+            </a:prstGeom>
+            <a:noFill/>
+          </p:spPr>
+          <p:txBody>
+            <a:bodyPr wrap="none" rtlCol="0">
+              <a:spAutoFit/>
+            </a:bodyPr>
+            <a:lstStyle/>
+            <a:p>
+              <a:r>
+                <a:rPr lang="en-US" dirty="0"/>
+                <a:t>B08</a:t>
+              </a:r>
+            </a:p>
+          </p:txBody>
+        </p:sp>
+        <p:sp>
+          <p:nvSpPr>
+            <p:cNvPr id="279" name="TextBox 278">
+              <a:extLst>
+                <a:ext uri="{FF2B5EF4-FFF2-40B4-BE49-F238E27FC236}">
+                  <a16:creationId xmlns:a16="http://schemas.microsoft.com/office/drawing/2014/main" id="{18365E4F-02F6-B925-29B8-A37830051D8E}"/>
+                </a:ext>
+              </a:extLst>
+            </p:cNvPr>
+            <p:cNvSpPr txBox="1"/>
+            <p:nvPr/>
+          </p:nvSpPr>
+          <p:spPr>
+            <a:xfrm>
+              <a:off x="-1816895" y="4160016"/>
+              <a:ext cx="570990" cy="369332"/>
+            </a:xfrm>
+            <a:prstGeom prst="rect">
+              <a:avLst/>
+            </a:prstGeom>
+            <a:noFill/>
+          </p:spPr>
+          <p:txBody>
+            <a:bodyPr wrap="none" rtlCol="0">
+              <a:spAutoFit/>
+            </a:bodyPr>
+            <a:lstStyle/>
+            <a:p>
+              <a:r>
+                <a:rPr lang="en-US" dirty="0"/>
+                <a:t>B09</a:t>
+              </a:r>
+            </a:p>
+          </p:txBody>
+        </p:sp>
+        <p:sp>
+          <p:nvSpPr>
+            <p:cNvPr id="280" name="TextBox 279">
+              <a:extLst>
+                <a:ext uri="{FF2B5EF4-FFF2-40B4-BE49-F238E27FC236}">
+                  <a16:creationId xmlns:a16="http://schemas.microsoft.com/office/drawing/2014/main" id="{5DA25A8D-CFB6-115E-A353-50E967445F82}"/>
+                </a:ext>
+              </a:extLst>
+            </p:cNvPr>
+            <p:cNvSpPr txBox="1"/>
+            <p:nvPr/>
+          </p:nvSpPr>
+          <p:spPr>
+            <a:xfrm>
+              <a:off x="-750235" y="4160016"/>
+              <a:ext cx="570990" cy="369332"/>
+            </a:xfrm>
+            <a:prstGeom prst="rect">
+              <a:avLst/>
+            </a:prstGeom>
+            <a:noFill/>
+          </p:spPr>
+          <p:txBody>
+            <a:bodyPr wrap="none" rtlCol="0">
+              <a:spAutoFit/>
+            </a:bodyPr>
+            <a:lstStyle/>
+            <a:p>
+              <a:r>
+                <a:rPr lang="en-US" dirty="0"/>
+                <a:t>B10</a:t>
+              </a:r>
+            </a:p>
+          </p:txBody>
+        </p:sp>
+        <p:sp>
+          <p:nvSpPr>
+            <p:cNvPr id="281" name="TextBox 280">
+              <a:extLst>
+                <a:ext uri="{FF2B5EF4-FFF2-40B4-BE49-F238E27FC236}">
+                  <a16:creationId xmlns:a16="http://schemas.microsoft.com/office/drawing/2014/main" id="{AA4EF2EC-0A95-302A-BBB9-A51FAD9CF522}"/>
+                </a:ext>
+              </a:extLst>
+            </p:cNvPr>
+            <p:cNvSpPr txBox="1"/>
+            <p:nvPr/>
+          </p:nvSpPr>
+          <p:spPr>
+            <a:xfrm>
+              <a:off x="339325" y="4160016"/>
+              <a:ext cx="570990" cy="369332"/>
+            </a:xfrm>
+            <a:prstGeom prst="rect">
+              <a:avLst/>
+            </a:prstGeom>
+            <a:noFill/>
+          </p:spPr>
+          <p:txBody>
+            <a:bodyPr wrap="none" rtlCol="0">
+              <a:spAutoFit/>
+            </a:bodyPr>
+            <a:lstStyle/>
+            <a:p>
+              <a:r>
+                <a:rPr lang="en-US" dirty="0"/>
+                <a:t>B11</a:t>
+              </a:r>
+            </a:p>
+          </p:txBody>
+        </p:sp>
+        <p:sp>
+          <p:nvSpPr>
+            <p:cNvPr id="282" name="TextBox 281">
+              <a:extLst>
+                <a:ext uri="{FF2B5EF4-FFF2-40B4-BE49-F238E27FC236}">
+                  <a16:creationId xmlns:a16="http://schemas.microsoft.com/office/drawing/2014/main" id="{822F892A-50D6-795D-12D6-FC95AECF9B70}"/>
+                </a:ext>
+              </a:extLst>
+            </p:cNvPr>
+            <p:cNvSpPr txBox="1"/>
+            <p:nvPr/>
+          </p:nvSpPr>
+          <p:spPr>
+            <a:xfrm>
+              <a:off x="1459119" y="4164605"/>
+              <a:ext cx="570990" cy="369332"/>
+            </a:xfrm>
+            <a:prstGeom prst="rect">
+              <a:avLst/>
+            </a:prstGeom>
+            <a:noFill/>
+          </p:spPr>
+          <p:txBody>
+            <a:bodyPr wrap="none" rtlCol="0">
+              <a:spAutoFit/>
+            </a:bodyPr>
+            <a:lstStyle/>
+            <a:p>
+              <a:r>
+                <a:rPr lang="en-US" dirty="0"/>
+                <a:t>B12</a:t>
+              </a:r>
+            </a:p>
+          </p:txBody>
+        </p:sp>
+        <p:sp>
+          <p:nvSpPr>
+            <p:cNvPr id="283" name="TextBox 282">
+              <a:extLst>
+                <a:ext uri="{FF2B5EF4-FFF2-40B4-BE49-F238E27FC236}">
+                  <a16:creationId xmlns:a16="http://schemas.microsoft.com/office/drawing/2014/main" id="{4AFB4511-048E-A6B6-C284-7FBA3D93BE79}"/>
+                </a:ext>
+              </a:extLst>
+            </p:cNvPr>
+            <p:cNvSpPr txBox="1"/>
+            <p:nvPr/>
+          </p:nvSpPr>
+          <p:spPr>
+            <a:xfrm>
+              <a:off x="2520924" y="4164605"/>
+              <a:ext cx="570990" cy="369332"/>
+            </a:xfrm>
+            <a:prstGeom prst="rect">
+              <a:avLst/>
+            </a:prstGeom>
+            <a:noFill/>
+          </p:spPr>
+          <p:txBody>
+            <a:bodyPr wrap="none" rtlCol="0">
+              <a:spAutoFit/>
+            </a:bodyPr>
+            <a:lstStyle/>
+            <a:p>
+              <a:r>
+                <a:rPr lang="en-US" dirty="0"/>
+                <a:t>B13</a:t>
+              </a:r>
+            </a:p>
+          </p:txBody>
+        </p:sp>
+        <p:sp>
+          <p:nvSpPr>
+            <p:cNvPr id="284" name="TextBox 283">
+              <a:extLst>
+                <a:ext uri="{FF2B5EF4-FFF2-40B4-BE49-F238E27FC236}">
+                  <a16:creationId xmlns:a16="http://schemas.microsoft.com/office/drawing/2014/main" id="{88789750-A545-16E4-C7F6-B61CA1047C82}"/>
+                </a:ext>
+              </a:extLst>
+            </p:cNvPr>
+            <p:cNvSpPr txBox="1"/>
+            <p:nvPr/>
+          </p:nvSpPr>
+          <p:spPr>
+            <a:xfrm>
+              <a:off x="3587584" y="4164605"/>
+              <a:ext cx="570990" cy="369332"/>
+            </a:xfrm>
+            <a:prstGeom prst="rect">
+              <a:avLst/>
+            </a:prstGeom>
+            <a:noFill/>
+          </p:spPr>
+          <p:txBody>
+            <a:bodyPr wrap="none" rtlCol="0">
+              <a:spAutoFit/>
+            </a:bodyPr>
+            <a:lstStyle/>
+            <a:p>
+              <a:r>
+                <a:rPr lang="en-US" dirty="0"/>
+                <a:t>B14</a:t>
+              </a:r>
+            </a:p>
+          </p:txBody>
+        </p:sp>
+        <p:pic>
+          <p:nvPicPr>
+            <p:cNvPr id="286" name="Graphic 285" descr="Sleep with solid fill">
+              <a:extLst>
+                <a:ext uri="{FF2B5EF4-FFF2-40B4-BE49-F238E27FC236}">
+                  <a16:creationId xmlns:a16="http://schemas.microsoft.com/office/drawing/2014/main" id="{41DAC4C4-2D35-0E38-BB92-C52D09DDF2AF}"/>
+                </a:ext>
+              </a:extLst>
+            </p:cNvPr>
+            <p:cNvPicPr>
+              <a:picLocks noChangeAspect="1"/>
+            </p:cNvPicPr>
+            <p:nvPr/>
+          </p:nvPicPr>
+          <p:blipFill>
+            <a:blip>
+              <a:extLst>
+                <a:ext uri="{96DAC541-7B7A-43D3-8B79-37D633B846F1}">
+                  <asvg:svgBlip xmlns:asvg="http://schemas.microsoft.com/office/drawing/2016/SVG/main" r:embed="rId6"/>
+                </a:ext>
+              </a:extLst>
+            </a:blip>
+            <a:srcRect/>
+            <a:stretch/>
+          </p:blipFill>
+          <p:spPr>
+            <a:xfrm>
+              <a:off x="7964507" y="4339679"/>
+              <a:ext cx="634696" cy="634696"/>
+            </a:xfrm>
+            <a:prstGeom prst="rect">
+              <a:avLst/>
+            </a:prstGeom>
+          </p:spPr>
+        </p:pic>
+        <p:pic>
+          <p:nvPicPr>
+            <p:cNvPr id="287" name="Graphic 286" descr="Sleep with solid fill">
+              <a:extLst>
+                <a:ext uri="{FF2B5EF4-FFF2-40B4-BE49-F238E27FC236}">
+                  <a16:creationId xmlns:a16="http://schemas.microsoft.com/office/drawing/2014/main" id="{AB69509D-7147-3BF4-217F-AA9BD3D72CD2}"/>
+                </a:ext>
+              </a:extLst>
+            </p:cNvPr>
+            <p:cNvPicPr>
+              <a:picLocks noChangeAspect="1"/>
+            </p:cNvPicPr>
+            <p:nvPr/>
+          </p:nvPicPr>
+          <p:blipFill>
+            <a:blip>
+              <a:extLst>
+                <a:ext uri="{96DAC541-7B7A-43D3-8B79-37D633B846F1}">
+                  <asvg:svgBlip xmlns:asvg="http://schemas.microsoft.com/office/drawing/2016/SVG/main" r:embed="rId4"/>
+                </a:ext>
+              </a:extLst>
+            </a:blip>
+            <a:srcRect/>
+            <a:stretch/>
+          </p:blipFill>
+          <p:spPr>
+            <a:xfrm>
+              <a:off x="9030339" y="4339679"/>
+              <a:ext cx="634696" cy="634696"/>
+            </a:xfrm>
+            <a:prstGeom prst="rect">
+              <a:avLst/>
+            </a:prstGeom>
+          </p:spPr>
+        </p:pic>
+        <p:pic>
+          <p:nvPicPr>
+            <p:cNvPr id="288" name="Graphic 287" descr="Sleep with solid fill">
+              <a:extLst>
+                <a:ext uri="{FF2B5EF4-FFF2-40B4-BE49-F238E27FC236}">
+                  <a16:creationId xmlns:a16="http://schemas.microsoft.com/office/drawing/2014/main" id="{BFCAA446-8094-F6CF-3880-6B4AC9030990}"/>
+                </a:ext>
+              </a:extLst>
+            </p:cNvPr>
+            <p:cNvPicPr>
+              <a:picLocks noChangeAspect="1"/>
+            </p:cNvPicPr>
+            <p:nvPr/>
+          </p:nvPicPr>
+          <p:blipFill>
+            <a:blip>
+              <a:extLst>
+                <a:ext uri="{96DAC541-7B7A-43D3-8B79-37D633B846F1}">
+                  <asvg:svgBlip xmlns:asvg="http://schemas.microsoft.com/office/drawing/2016/SVG/main" r:embed="rId3"/>
+                </a:ext>
+              </a:extLst>
+            </a:blip>
+            <a:srcRect/>
+            <a:stretch/>
+          </p:blipFill>
+          <p:spPr>
+            <a:xfrm>
+              <a:off x="10139672" y="4339679"/>
+              <a:ext cx="634696" cy="634696"/>
+            </a:xfrm>
+            <a:prstGeom prst="rect">
+              <a:avLst/>
+            </a:prstGeom>
+          </p:spPr>
+        </p:pic>
+        <p:pic>
+          <p:nvPicPr>
+            <p:cNvPr id="289" name="Graphic 288" descr="Sleep with solid fill">
+              <a:extLst>
+                <a:ext uri="{FF2B5EF4-FFF2-40B4-BE49-F238E27FC236}">
+                  <a16:creationId xmlns:a16="http://schemas.microsoft.com/office/drawing/2014/main" id="{05862317-3920-C436-14DB-DF29141F48D8}"/>
+                </a:ext>
+              </a:extLst>
+            </p:cNvPr>
+            <p:cNvPicPr>
+              <a:picLocks noChangeAspect="1"/>
+            </p:cNvPicPr>
+            <p:nvPr/>
+          </p:nvPicPr>
+          <p:blipFill>
+            <a:blip>
+              <a:extLst>
+                <a:ext uri="{96DAC541-7B7A-43D3-8B79-37D633B846F1}">
+                  <asvg:svgBlip xmlns:asvg="http://schemas.microsoft.com/office/drawing/2016/SVG/main" r:embed="rId3"/>
+                </a:ext>
+              </a:extLst>
+            </a:blip>
+            <a:srcRect/>
+            <a:stretch/>
+          </p:blipFill>
+          <p:spPr>
+            <a:xfrm>
+              <a:off x="11205504" y="4339679"/>
+              <a:ext cx="634696" cy="634696"/>
+            </a:xfrm>
+            <a:prstGeom prst="rect">
+              <a:avLst/>
+            </a:prstGeom>
+          </p:spPr>
+        </p:pic>
+        <p:pic>
+          <p:nvPicPr>
+            <p:cNvPr id="290" name="Graphic 289" descr="Sleep with solid fill">
+              <a:extLst>
+                <a:ext uri="{FF2B5EF4-FFF2-40B4-BE49-F238E27FC236}">
+                  <a16:creationId xmlns:a16="http://schemas.microsoft.com/office/drawing/2014/main" id="{6F291145-7E91-9D86-6C7B-3E0B96671097}"/>
+                </a:ext>
+              </a:extLst>
+            </p:cNvPr>
+            <p:cNvPicPr>
+              <a:picLocks noChangeAspect="1"/>
+            </p:cNvPicPr>
+            <p:nvPr/>
+          </p:nvPicPr>
+          <p:blipFill>
+            <a:blip>
+              <a:extLst>
+                <a:ext uri="{96DAC541-7B7A-43D3-8B79-37D633B846F1}">
+                  <asvg:svgBlip xmlns:asvg="http://schemas.microsoft.com/office/drawing/2016/SVG/main" r:embed="rId4"/>
+                </a:ext>
+              </a:extLst>
+            </a:blip>
+            <a:srcRect/>
+            <a:stretch/>
+          </p:blipFill>
+          <p:spPr>
+            <a:xfrm>
+              <a:off x="12324905" y="4339679"/>
+              <a:ext cx="634696" cy="634696"/>
+            </a:xfrm>
+            <a:prstGeom prst="rect">
+              <a:avLst/>
+            </a:prstGeom>
+          </p:spPr>
+        </p:pic>
+        <p:pic>
+          <p:nvPicPr>
+            <p:cNvPr id="291" name="Graphic 290" descr="Sleep with solid fill">
+              <a:extLst>
+                <a:ext uri="{FF2B5EF4-FFF2-40B4-BE49-F238E27FC236}">
+                  <a16:creationId xmlns:a16="http://schemas.microsoft.com/office/drawing/2014/main" id="{29801570-734E-FFD7-ADFD-8ABC0B626F2E}"/>
+                </a:ext>
+              </a:extLst>
+            </p:cNvPr>
+            <p:cNvPicPr>
+              <a:picLocks noChangeAspect="1"/>
+            </p:cNvPicPr>
+            <p:nvPr/>
+          </p:nvPicPr>
+          <p:blipFill>
+            <a:blip>
+              <a:extLst>
+                <a:ext uri="{96DAC541-7B7A-43D3-8B79-37D633B846F1}">
+                  <asvg:svgBlip xmlns:asvg="http://schemas.microsoft.com/office/drawing/2016/SVG/main" r:embed="rId5"/>
+                </a:ext>
+              </a:extLst>
+            </a:blip>
+            <a:srcRect/>
+            <a:stretch/>
+          </p:blipFill>
+          <p:spPr>
+            <a:xfrm>
+              <a:off x="13390737" y="4339679"/>
+              <a:ext cx="634696" cy="634696"/>
+            </a:xfrm>
+            <a:prstGeom prst="rect">
+              <a:avLst/>
+            </a:prstGeom>
+          </p:spPr>
+        </p:pic>
+        <p:pic>
+          <p:nvPicPr>
+            <p:cNvPr id="292" name="Graphic 291" descr="Sleep with solid fill">
+              <a:extLst>
+                <a:ext uri="{FF2B5EF4-FFF2-40B4-BE49-F238E27FC236}">
+                  <a16:creationId xmlns:a16="http://schemas.microsoft.com/office/drawing/2014/main" id="{96CF86F5-C9AC-B702-B7EE-0B5A9C430BB5}"/>
+                </a:ext>
+              </a:extLst>
+            </p:cNvPr>
+            <p:cNvPicPr>
+              <a:picLocks noChangeAspect="1"/>
+            </p:cNvPicPr>
+            <p:nvPr/>
+          </p:nvPicPr>
+          <p:blipFill>
+            <a:blip>
+              <a:extLst>
+                <a:ext uri="{96DAC541-7B7A-43D3-8B79-37D633B846F1}">
+                  <asvg:svgBlip xmlns:asvg="http://schemas.microsoft.com/office/drawing/2016/SVG/main" r:embed="rId3"/>
+                </a:ext>
+              </a:extLst>
+            </a:blip>
+            <a:srcRect/>
+            <a:stretch/>
+          </p:blipFill>
+          <p:spPr>
+            <a:xfrm>
+              <a:off x="14500070" y="4339679"/>
+              <a:ext cx="634696" cy="634696"/>
+            </a:xfrm>
+            <a:prstGeom prst="rect">
+              <a:avLst/>
+            </a:prstGeom>
+          </p:spPr>
+        </p:pic>
+        <p:sp>
+          <p:nvSpPr>
+            <p:cNvPr id="294" name="TextBox 293">
+              <a:extLst>
+                <a:ext uri="{FF2B5EF4-FFF2-40B4-BE49-F238E27FC236}">
+                  <a16:creationId xmlns:a16="http://schemas.microsoft.com/office/drawing/2014/main" id="{E4F45338-0124-C328-F687-2EF60A1D6D5B}"/>
+                </a:ext>
+              </a:extLst>
+            </p:cNvPr>
+            <p:cNvSpPr txBox="1"/>
+            <p:nvPr/>
+          </p:nvSpPr>
+          <p:spPr>
+            <a:xfrm>
+              <a:off x="8032955" y="4175954"/>
+              <a:ext cx="570990" cy="369332"/>
+            </a:xfrm>
+            <a:prstGeom prst="rect">
+              <a:avLst/>
+            </a:prstGeom>
+            <a:noFill/>
+          </p:spPr>
+          <p:txBody>
+            <a:bodyPr wrap="none" rtlCol="0">
+              <a:spAutoFit/>
+            </a:bodyPr>
+            <a:lstStyle/>
+            <a:p>
+              <a:r>
+                <a:rPr lang="en-US" dirty="0"/>
+                <a:t>B08</a:t>
+              </a:r>
+            </a:p>
+          </p:txBody>
+        </p:sp>
+        <p:sp>
+          <p:nvSpPr>
+            <p:cNvPr id="295" name="TextBox 294">
+              <a:extLst>
+                <a:ext uri="{FF2B5EF4-FFF2-40B4-BE49-F238E27FC236}">
+                  <a16:creationId xmlns:a16="http://schemas.microsoft.com/office/drawing/2014/main" id="{47881DA7-4F8F-1A1C-11BB-959818467CCD}"/>
+                </a:ext>
+              </a:extLst>
+            </p:cNvPr>
+            <p:cNvSpPr txBox="1"/>
+            <p:nvPr/>
+          </p:nvSpPr>
+          <p:spPr>
+            <a:xfrm>
+              <a:off x="9094760" y="4175954"/>
+              <a:ext cx="570990" cy="369332"/>
+            </a:xfrm>
+            <a:prstGeom prst="rect">
+              <a:avLst/>
+            </a:prstGeom>
+            <a:noFill/>
+          </p:spPr>
+          <p:txBody>
+            <a:bodyPr wrap="none" rtlCol="0">
+              <a:spAutoFit/>
+            </a:bodyPr>
+            <a:lstStyle/>
+            <a:p>
+              <a:r>
+                <a:rPr lang="en-US" dirty="0"/>
+                <a:t>B09</a:t>
+              </a:r>
+            </a:p>
+          </p:txBody>
+        </p:sp>
+        <p:sp>
+          <p:nvSpPr>
+            <p:cNvPr id="296" name="TextBox 295">
+              <a:extLst>
+                <a:ext uri="{FF2B5EF4-FFF2-40B4-BE49-F238E27FC236}">
+                  <a16:creationId xmlns:a16="http://schemas.microsoft.com/office/drawing/2014/main" id="{82C8151D-9672-9457-E681-B8A5A402647F}"/>
+                </a:ext>
+              </a:extLst>
+            </p:cNvPr>
+            <p:cNvSpPr txBox="1"/>
+            <p:nvPr/>
+          </p:nvSpPr>
+          <p:spPr>
+            <a:xfrm>
+              <a:off x="10161420" y="4175954"/>
+              <a:ext cx="570990" cy="369332"/>
+            </a:xfrm>
+            <a:prstGeom prst="rect">
+              <a:avLst/>
+            </a:prstGeom>
+            <a:noFill/>
+          </p:spPr>
+          <p:txBody>
+            <a:bodyPr wrap="none" rtlCol="0">
+              <a:spAutoFit/>
+            </a:bodyPr>
+            <a:lstStyle/>
+            <a:p>
+              <a:r>
+                <a:rPr lang="en-US" dirty="0"/>
+                <a:t>B10</a:t>
+              </a:r>
+            </a:p>
+          </p:txBody>
+        </p:sp>
+        <p:sp>
+          <p:nvSpPr>
+            <p:cNvPr id="297" name="TextBox 296">
+              <a:extLst>
+                <a:ext uri="{FF2B5EF4-FFF2-40B4-BE49-F238E27FC236}">
+                  <a16:creationId xmlns:a16="http://schemas.microsoft.com/office/drawing/2014/main" id="{7A0222E8-9FB4-C559-C8E7-5052D81977D8}"/>
+                </a:ext>
+              </a:extLst>
+            </p:cNvPr>
+            <p:cNvSpPr txBox="1"/>
+            <p:nvPr/>
+          </p:nvSpPr>
+          <p:spPr>
+            <a:xfrm>
+              <a:off x="11250980" y="4175954"/>
+              <a:ext cx="570990" cy="369332"/>
+            </a:xfrm>
+            <a:prstGeom prst="rect">
+              <a:avLst/>
+            </a:prstGeom>
+            <a:noFill/>
+          </p:spPr>
+          <p:txBody>
+            <a:bodyPr wrap="none" rtlCol="0">
+              <a:spAutoFit/>
+            </a:bodyPr>
+            <a:lstStyle/>
+            <a:p>
+              <a:r>
+                <a:rPr lang="en-US" dirty="0"/>
+                <a:t>B11</a:t>
+              </a:r>
+            </a:p>
+          </p:txBody>
+        </p:sp>
+        <p:sp>
+          <p:nvSpPr>
+            <p:cNvPr id="298" name="TextBox 297">
+              <a:extLst>
+                <a:ext uri="{FF2B5EF4-FFF2-40B4-BE49-F238E27FC236}">
+                  <a16:creationId xmlns:a16="http://schemas.microsoft.com/office/drawing/2014/main" id="{DBC210EE-4FD5-6956-C91F-FCEE52A950FC}"/>
+                </a:ext>
+              </a:extLst>
+            </p:cNvPr>
+            <p:cNvSpPr txBox="1"/>
+            <p:nvPr/>
+          </p:nvSpPr>
+          <p:spPr>
+            <a:xfrm>
+              <a:off x="12370774" y="4180543"/>
+              <a:ext cx="570990" cy="369332"/>
+            </a:xfrm>
+            <a:prstGeom prst="rect">
+              <a:avLst/>
+            </a:prstGeom>
+            <a:noFill/>
+          </p:spPr>
+          <p:txBody>
+            <a:bodyPr wrap="none" rtlCol="0">
+              <a:spAutoFit/>
+            </a:bodyPr>
+            <a:lstStyle/>
+            <a:p>
+              <a:r>
+                <a:rPr lang="en-US" dirty="0"/>
+                <a:t>B12</a:t>
+              </a:r>
+            </a:p>
+          </p:txBody>
+        </p:sp>
+        <p:sp>
+          <p:nvSpPr>
+            <p:cNvPr id="299" name="TextBox 298">
+              <a:extLst>
+                <a:ext uri="{FF2B5EF4-FFF2-40B4-BE49-F238E27FC236}">
+                  <a16:creationId xmlns:a16="http://schemas.microsoft.com/office/drawing/2014/main" id="{FA4EB08A-BE4C-9DD9-5183-0CB1D923EC6C}"/>
+                </a:ext>
+              </a:extLst>
+            </p:cNvPr>
+            <p:cNvSpPr txBox="1"/>
+            <p:nvPr/>
+          </p:nvSpPr>
+          <p:spPr>
+            <a:xfrm>
+              <a:off x="13432579" y="4180543"/>
+              <a:ext cx="570990" cy="369332"/>
+            </a:xfrm>
+            <a:prstGeom prst="rect">
+              <a:avLst/>
+            </a:prstGeom>
+            <a:noFill/>
+          </p:spPr>
+          <p:txBody>
+            <a:bodyPr wrap="none" rtlCol="0">
+              <a:spAutoFit/>
+            </a:bodyPr>
+            <a:lstStyle/>
+            <a:p>
+              <a:r>
+                <a:rPr lang="en-US" dirty="0"/>
+                <a:t>B13</a:t>
+              </a:r>
+            </a:p>
+          </p:txBody>
+        </p:sp>
+        <p:sp>
+          <p:nvSpPr>
+            <p:cNvPr id="300" name="TextBox 299">
+              <a:extLst>
+                <a:ext uri="{FF2B5EF4-FFF2-40B4-BE49-F238E27FC236}">
+                  <a16:creationId xmlns:a16="http://schemas.microsoft.com/office/drawing/2014/main" id="{9FC043E2-D286-4FCD-FE0B-B9D4F043E80A}"/>
+                </a:ext>
+              </a:extLst>
+            </p:cNvPr>
+            <p:cNvSpPr txBox="1"/>
+            <p:nvPr/>
+          </p:nvSpPr>
+          <p:spPr>
+            <a:xfrm>
+              <a:off x="14499239" y="4180543"/>
+              <a:ext cx="570990" cy="369332"/>
+            </a:xfrm>
+            <a:prstGeom prst="rect">
+              <a:avLst/>
+            </a:prstGeom>
+            <a:noFill/>
+          </p:spPr>
+          <p:txBody>
+            <a:bodyPr wrap="none" rtlCol="0">
+              <a:spAutoFit/>
+            </a:bodyPr>
+            <a:lstStyle/>
+            <a:p>
+              <a:r>
+                <a:rPr lang="en-US" dirty="0"/>
+                <a:t>B14</a:t>
+              </a:r>
+            </a:p>
+          </p:txBody>
+        </p:sp>
+        <p:cxnSp>
+          <p:nvCxnSpPr>
+            <p:cNvPr id="370" name="Curved Connector 369">
+              <a:extLst>
+                <a:ext uri="{FF2B5EF4-FFF2-40B4-BE49-F238E27FC236}">
+                  <a16:creationId xmlns:a16="http://schemas.microsoft.com/office/drawing/2014/main" id="{F770DA12-8A00-8462-2276-77838D5C4159}"/>
+                </a:ext>
+              </a:extLst>
+            </p:cNvPr>
+            <p:cNvCxnSpPr>
+              <a:cxnSpLocks/>
+              <a:stCxn id="367" idx="2"/>
+              <a:endCxn id="338" idx="0"/>
+            </p:cNvCxnSpPr>
+            <p:nvPr/>
+          </p:nvCxnSpPr>
+          <p:spPr>
+            <a:xfrm rot="5400000">
+              <a:off x="2390173" y="71603"/>
+              <a:ext cx="1848123" cy="5443158"/>
+            </a:xfrm>
+            <a:prstGeom prst="curvedConnector3">
+              <a:avLst/>
+            </a:prstGeom>
+            <a:ln w="28575">
+              <a:solidFill>
+                <a:schemeClr val="tx1"/>
+              </a:solidFill>
+              <a:prstDash val="sysDash"/>
+              <a:tailEnd type="triangle" w="lg" len="lg"/>
+            </a:ln>
+          </p:spPr>
+          <p:style>
+            <a:lnRef idx="2">
+              <a:schemeClr val="accent1"/>
+            </a:lnRef>
+            <a:fillRef idx="0">
+              <a:schemeClr val="accent1"/>
+            </a:fillRef>
+            <a:effectRef idx="1">
+              <a:schemeClr val="accent1"/>
+            </a:effectRef>
+            <a:fontRef idx="minor">
+              <a:schemeClr val="tx1"/>
+            </a:fontRef>
+          </p:style>
+        </p:cxnSp>
+        <p:cxnSp>
+          <p:nvCxnSpPr>
+            <p:cNvPr id="371" name="Curved Connector 370">
+              <a:extLst>
+                <a:ext uri="{FF2B5EF4-FFF2-40B4-BE49-F238E27FC236}">
+                  <a16:creationId xmlns:a16="http://schemas.microsoft.com/office/drawing/2014/main" id="{CE1E082B-E486-D051-28C0-4A74130CC283}"/>
+                </a:ext>
+              </a:extLst>
+            </p:cNvPr>
+            <p:cNvCxnSpPr>
+              <a:cxnSpLocks/>
+              <a:stCxn id="368" idx="2"/>
+              <a:endCxn id="337" idx="0"/>
+            </p:cNvCxnSpPr>
+            <p:nvPr/>
+          </p:nvCxnSpPr>
+          <p:spPr>
+            <a:xfrm rot="16200000" flipH="1">
+              <a:off x="8327686" y="581032"/>
+              <a:ext cx="1888426" cy="4485561"/>
+            </a:xfrm>
+            <a:prstGeom prst="curvedConnector3">
+              <a:avLst>
+                <a:gd name="adj1" fmla="val 50000"/>
+              </a:avLst>
+            </a:prstGeom>
+            <a:ln w="28575">
+              <a:solidFill>
+                <a:schemeClr val="tx1"/>
+              </a:solidFill>
+              <a:prstDash val="sysDash"/>
+              <a:tailEnd type="triangle" w="lg" len="lg"/>
+            </a:ln>
+          </p:spPr>
+          <p:style>
+            <a:lnRef idx="2">
+              <a:schemeClr val="accent1"/>
+            </a:lnRef>
+            <a:fillRef idx="0">
+              <a:schemeClr val="accent1"/>
+            </a:fillRef>
+            <a:effectRef idx="1">
+              <a:schemeClr val="accent1"/>
+            </a:effectRef>
+            <a:fontRef idx="minor">
+              <a:schemeClr val="tx1"/>
+            </a:fontRef>
+          </p:style>
+        </p:cxnSp>
+        <p:sp>
+          <p:nvSpPr>
+            <p:cNvPr id="393" name="TextBox 392">
+              <a:extLst>
+                <a:ext uri="{FF2B5EF4-FFF2-40B4-BE49-F238E27FC236}">
+                  <a16:creationId xmlns:a16="http://schemas.microsoft.com/office/drawing/2014/main" id="{D42B1870-1611-E601-8405-D1736C1AEC3D}"/>
+                </a:ext>
+              </a:extLst>
+            </p:cNvPr>
+            <p:cNvSpPr txBox="1"/>
+            <p:nvPr/>
+          </p:nvSpPr>
+          <p:spPr>
+            <a:xfrm>
+              <a:off x="1391158" y="2967224"/>
+              <a:ext cx="2101857" cy="646331"/>
+            </a:xfrm>
+            <a:prstGeom prst="rect">
+              <a:avLst/>
+            </a:prstGeom>
+            <a:noFill/>
+          </p:spPr>
+          <p:txBody>
+            <a:bodyPr wrap="none" rtlCol="0">
+              <a:spAutoFit/>
+            </a:bodyPr>
+            <a:lstStyle/>
+            <a:p>
+              <a:r>
+                <a:rPr lang="en-US" sz="3600" dirty="0"/>
+                <a:t>a = (8, 12)</a:t>
+              </a:r>
+            </a:p>
+          </p:txBody>
+        </p:sp>
+        <p:sp>
+          <p:nvSpPr>
+            <p:cNvPr id="396" name="TextBox 395">
+              <a:extLst>
+                <a:ext uri="{FF2B5EF4-FFF2-40B4-BE49-F238E27FC236}">
+                  <a16:creationId xmlns:a16="http://schemas.microsoft.com/office/drawing/2014/main" id="{CD121AEC-29B3-4495-0A8D-29E77A1E758F}"/>
+                </a:ext>
+              </a:extLst>
+            </p:cNvPr>
+            <p:cNvSpPr txBox="1"/>
+            <p:nvPr/>
+          </p:nvSpPr>
+          <p:spPr>
+            <a:xfrm>
+              <a:off x="8371523" y="2998530"/>
+              <a:ext cx="2101857" cy="646331"/>
+            </a:xfrm>
+            <a:prstGeom prst="rect">
+              <a:avLst/>
+            </a:prstGeom>
+            <a:noFill/>
+          </p:spPr>
+          <p:txBody>
+            <a:bodyPr wrap="none" rtlCol="0">
+              <a:spAutoFit/>
+            </a:bodyPr>
+            <a:lstStyle/>
+            <a:p>
+              <a:r>
+                <a:rPr lang="en-US" sz="3600" dirty="0"/>
+                <a:t>a = (8, 14)</a:t>
+              </a:r>
+            </a:p>
+          </p:txBody>
+        </p:sp>
+        <mc:AlternateContent xmlns:mc="http://schemas.openxmlformats.org/markup-compatibility/2006">
+          <mc:Choice xmlns:a14="http://schemas.microsoft.com/office/drawing/2010/main" Requires="a14">
+            <p:sp>
+              <p:nvSpPr>
+                <p:cNvPr id="404" name="TextBox 403">
+                  <a:extLst>
+                    <a:ext uri="{FF2B5EF4-FFF2-40B4-BE49-F238E27FC236}">
+                      <a16:creationId xmlns:a16="http://schemas.microsoft.com/office/drawing/2014/main" id="{18E1D77A-D35E-53BD-B06F-9D4FD86ADB9D}"/>
+                    </a:ext>
+                  </a:extLst>
+                </p:cNvPr>
+                <p:cNvSpPr txBox="1"/>
+                <p:nvPr/>
+              </p:nvSpPr>
+              <p:spPr>
+                <a:xfrm>
+                  <a:off x="5765091" y="4103046"/>
+                  <a:ext cx="844783" cy="1107996"/>
+                </a:xfrm>
+                <a:prstGeom prst="rect">
+                  <a:avLst/>
+                </a:prstGeom>
+                <a:noFill/>
+              </p:spPr>
+              <p:txBody>
+                <a:bodyPr wrap="none" lIns="0" tIns="0" rIns="0" bIns="0" rtlCol="0">
+                  <a:spAutoFit/>
+                </a:bodyPr>
+                <a:lstStyle/>
+                <a:p>
+                  <a:pPr/>
+                  <a14:m>
+                    <m:oMathPara xmlns:m="http://schemas.openxmlformats.org/officeDocument/2006/math">
+                      <m:oMathParaPr>
+                        <m:jc m:val="centerGroup"/>
+                      </m:oMathParaPr>
+                      <m:oMath xmlns:m="http://schemas.openxmlformats.org/officeDocument/2006/math">
+                        <m:r>
+                          <a:rPr lang="en-GB" sz="7200" b="0" i="1" smtClean="0">
+                            <a:latin typeface="Cambria Math" panose="02040503050406030204" pitchFamily="18" charset="0"/>
+                          </a:rPr>
+                          <m:t>~</m:t>
+                        </m:r>
+                      </m:oMath>
+                    </m:oMathPara>
+                  </a14:m>
+                  <a:endParaRPr lang="en-US" sz="7200" dirty="0"/>
+                </a:p>
+              </p:txBody>
+            </p:sp>
+          </mc:Choice>
+          <mc:Fallback>
+            <p:sp>
+              <p:nvSpPr>
+                <p:cNvPr id="404" name="TextBox 403">
+                  <a:extLst>
+                    <a:ext uri="{FF2B5EF4-FFF2-40B4-BE49-F238E27FC236}">
+                      <a16:creationId xmlns:a16="http://schemas.microsoft.com/office/drawing/2014/main" id="{18E1D77A-D35E-53BD-B06F-9D4FD86ADB9D}"/>
+                    </a:ext>
+                  </a:extLst>
+                </p:cNvPr>
+                <p:cNvSpPr txBox="1">
+                  <a:spLocks noRot="1" noChangeAspect="1" noMove="1" noResize="1" noEditPoints="1" noAdjustHandles="1" noChangeArrowheads="1" noChangeShapeType="1" noTextEdit="1"/>
+                </p:cNvSpPr>
+                <p:nvPr/>
+              </p:nvSpPr>
+              <p:spPr>
+                <a:xfrm>
+                  <a:off x="5765091" y="4103046"/>
+                  <a:ext cx="844783" cy="1107996"/>
+                </a:xfrm>
+                <a:prstGeom prst="rect">
+                  <a:avLst/>
+                </a:prstGeom>
+                <a:blipFill>
+                  <a:blip r:embed="rId7"/>
+                  <a:stretch>
+                    <a:fillRect l="-10448" r="-8955"/>
+                  </a:stretch>
+                </a:blipFill>
+              </p:spPr>
+              <p:txBody>
+                <a:bodyPr/>
+                <a:lstStyle/>
+                <a:p>
+                  <a:r>
+                    <a:rPr lang="en-US">
+                      <a:noFill/>
+                    </a:rPr>
+                    <a:t> </a:t>
+                  </a:r>
+                </a:p>
+              </p:txBody>
+            </p:sp>
+          </mc:Fallback>
+        </mc:AlternateContent>
+      </p:grpSp>
+    </p:spTree>
+    <p:extLst>
+      <p:ext uri="{BB962C8B-B14F-4D97-AF65-F5344CB8AC3E}">
+        <p14:creationId xmlns:p14="http://schemas.microsoft.com/office/powerpoint/2010/main" val="2642535439"/>
       </p:ext>
     </p:extLst>
   </p:cSld>

--- a/images/icu.pptx
+++ b/images/icu.pptx
@@ -5,17 +5,15 @@
     <p:sldMasterId id="2147483648" r:id="rId1"/>
   </p:sldMasterIdLst>
   <p:notesMasterIdLst>
-    <p:notesMasterId r:id="rId10"/>
+    <p:notesMasterId r:id="rId8"/>
   </p:notesMasterIdLst>
   <p:sldIdLst>
     <p:sldId id="256" r:id="rId2"/>
-    <p:sldId id="257" r:id="rId3"/>
-    <p:sldId id="258" r:id="rId4"/>
-    <p:sldId id="259" r:id="rId5"/>
-    <p:sldId id="260" r:id="rId6"/>
-    <p:sldId id="262" r:id="rId7"/>
-    <p:sldId id="263" r:id="rId8"/>
-    <p:sldId id="264" r:id="rId9"/>
+    <p:sldId id="259" r:id="rId3"/>
+    <p:sldId id="260" r:id="rId4"/>
+    <p:sldId id="262" r:id="rId5"/>
+    <p:sldId id="263" r:id="rId6"/>
+    <p:sldId id="264" r:id="rId7"/>
   </p:sldIdLst>
   <p:sldSz cx="12192000" cy="6858000"/>
   <p:notesSz cx="6858000" cy="9144000"/>
@@ -537,7 +535,7 @@
           <a:p>
             <a:fld id="{C0ECF21E-4684-E148-81FF-D3B1FD823314}" type="slidenum">
               <a:rPr lang="en-US" smtClean="0"/>
-              <a:t>6</a:t>
+              <a:t>4</a:t>
             </a:fld>
             <a:endParaRPr lang="en-US"/>
           </a:p>
@@ -645,7 +643,7 @@
           <a:p>
             <a:fld id="{C0ECF21E-4684-E148-81FF-D3B1FD823314}" type="slidenum">
               <a:rPr lang="en-US" smtClean="0"/>
-              <a:t>7</a:t>
+              <a:t>5</a:t>
             </a:fld>
             <a:endParaRPr lang="en-US"/>
           </a:p>
@@ -753,7 +751,7 @@
           <a:p>
             <a:fld id="{C0ECF21E-4684-E148-81FF-D3B1FD823314}" type="slidenum">
               <a:rPr lang="en-US" smtClean="0"/>
-              <a:t>8</a:t>
+              <a:t>6</a:t>
             </a:fld>
             <a:endParaRPr lang="en-US"/>
           </a:p>
@@ -6230,5068 +6228,6 @@
         <p:cNvPr id="1" name="">
           <a:extLst>
             <a:ext uri="{FF2B5EF4-FFF2-40B4-BE49-F238E27FC236}">
-              <a16:creationId xmlns:a16="http://schemas.microsoft.com/office/drawing/2014/main" id="{D34597F7-F283-2F82-698C-E016618FC9F2}"/>
-            </a:ext>
-          </a:extLst>
-        </p:cNvPr>
-        <p:cNvGrpSpPr/>
-        <p:nvPr/>
-      </p:nvGrpSpPr>
-      <p:grpSpPr>
-        <a:xfrm>
-          <a:off x="0" y="0"/>
-          <a:ext cx="0" cy="0"/>
-          <a:chOff x="0" y="0"/>
-          <a:chExt cx="0" cy="0"/>
-        </a:xfrm>
-      </p:grpSpPr>
-      <p:sp>
-        <p:nvSpPr>
-          <p:cNvPr id="4" name="Rounded Rectangle 3">
-            <a:extLst>
-              <a:ext uri="{FF2B5EF4-FFF2-40B4-BE49-F238E27FC236}">
-                <a16:creationId xmlns:a16="http://schemas.microsoft.com/office/drawing/2014/main" id="{9A5B8C7F-F4ED-B7A9-AE45-94AD8FD312FE}"/>
-              </a:ext>
-            </a:extLst>
-          </p:cNvPr>
-          <p:cNvSpPr/>
-          <p:nvPr/>
-        </p:nvSpPr>
-        <p:spPr>
-          <a:xfrm>
-            <a:off x="225912" y="1172583"/>
-            <a:ext cx="2667896" cy="5228213"/>
-          </a:xfrm>
-          <a:prstGeom prst="roundRect">
-            <a:avLst>
-              <a:gd name="adj" fmla="val 2957"/>
-            </a:avLst>
-          </a:prstGeom>
-          <a:solidFill>
-            <a:schemeClr val="bg2"/>
-          </a:solidFill>
-          <a:ln w="38100"/>
-        </p:spPr>
-        <p:style>
-          <a:lnRef idx="2">
-            <a:schemeClr val="accent1">
-              <a:shade val="15000"/>
-            </a:schemeClr>
-          </a:lnRef>
-          <a:fillRef idx="1">
-            <a:schemeClr val="accent1"/>
-          </a:fillRef>
-          <a:effectRef idx="0">
-            <a:schemeClr val="accent1"/>
-          </a:effectRef>
-          <a:fontRef idx="minor">
-            <a:schemeClr val="lt1"/>
-          </a:fontRef>
-        </p:style>
-        <p:txBody>
-          <a:bodyPr rtlCol="0" anchor="ctr"/>
-          <a:lstStyle/>
-          <a:p>
-            <a:pPr algn="ctr"/>
-            <a:endParaRPr lang="en-US"/>
-          </a:p>
-        </p:txBody>
-      </p:sp>
-      <p:sp>
-        <p:nvSpPr>
-          <p:cNvPr id="144" name="Rounded Rectangle 143">
-            <a:extLst>
-              <a:ext uri="{FF2B5EF4-FFF2-40B4-BE49-F238E27FC236}">
-                <a16:creationId xmlns:a16="http://schemas.microsoft.com/office/drawing/2014/main" id="{8155D6A4-7622-70F2-E303-5A893C558605}"/>
-              </a:ext>
-            </a:extLst>
-          </p:cNvPr>
-          <p:cNvSpPr/>
-          <p:nvPr/>
-        </p:nvSpPr>
-        <p:spPr>
-          <a:xfrm>
-            <a:off x="3239846" y="1172582"/>
-            <a:ext cx="2667896" cy="5228213"/>
-          </a:xfrm>
-          <a:prstGeom prst="roundRect">
-            <a:avLst>
-              <a:gd name="adj" fmla="val 2957"/>
-            </a:avLst>
-          </a:prstGeom>
-          <a:solidFill>
-            <a:schemeClr val="bg2"/>
-          </a:solidFill>
-          <a:ln w="38100"/>
-        </p:spPr>
-        <p:style>
-          <a:lnRef idx="2">
-            <a:schemeClr val="accent1">
-              <a:shade val="15000"/>
-            </a:schemeClr>
-          </a:lnRef>
-          <a:fillRef idx="1">
-            <a:schemeClr val="accent1"/>
-          </a:fillRef>
-          <a:effectRef idx="0">
-            <a:schemeClr val="accent1"/>
-          </a:effectRef>
-          <a:fontRef idx="minor">
-            <a:schemeClr val="lt1"/>
-          </a:fontRef>
-        </p:style>
-        <p:txBody>
-          <a:bodyPr rtlCol="0" anchor="ctr"/>
-          <a:lstStyle/>
-          <a:p>
-            <a:pPr algn="ctr"/>
-            <a:endParaRPr lang="en-US"/>
-          </a:p>
-        </p:txBody>
-      </p:sp>
-      <p:sp>
-        <p:nvSpPr>
-          <p:cNvPr id="145" name="Rounded Rectangle 144">
-            <a:extLst>
-              <a:ext uri="{FF2B5EF4-FFF2-40B4-BE49-F238E27FC236}">
-                <a16:creationId xmlns:a16="http://schemas.microsoft.com/office/drawing/2014/main" id="{9DEA0841-80C0-68EE-C231-AA3B97015AC8}"/>
-              </a:ext>
-            </a:extLst>
-          </p:cNvPr>
-          <p:cNvSpPr/>
-          <p:nvPr/>
-        </p:nvSpPr>
-        <p:spPr>
-          <a:xfrm>
-            <a:off x="6253780" y="1172581"/>
-            <a:ext cx="2667896" cy="5228213"/>
-          </a:xfrm>
-          <a:prstGeom prst="roundRect">
-            <a:avLst>
-              <a:gd name="adj" fmla="val 2957"/>
-            </a:avLst>
-          </a:prstGeom>
-          <a:solidFill>
-            <a:schemeClr val="bg2"/>
-          </a:solidFill>
-          <a:ln w="38100"/>
-        </p:spPr>
-        <p:style>
-          <a:lnRef idx="2">
-            <a:schemeClr val="accent1">
-              <a:shade val="15000"/>
-            </a:schemeClr>
-          </a:lnRef>
-          <a:fillRef idx="1">
-            <a:schemeClr val="accent1"/>
-          </a:fillRef>
-          <a:effectRef idx="0">
-            <a:schemeClr val="accent1"/>
-          </a:effectRef>
-          <a:fontRef idx="minor">
-            <a:schemeClr val="lt1"/>
-          </a:fontRef>
-        </p:style>
-        <p:txBody>
-          <a:bodyPr rtlCol="0" anchor="ctr"/>
-          <a:lstStyle/>
-          <a:p>
-            <a:pPr algn="ctr"/>
-            <a:endParaRPr lang="en-US"/>
-          </a:p>
-        </p:txBody>
-      </p:sp>
-      <p:sp>
-        <p:nvSpPr>
-          <p:cNvPr id="146" name="Rounded Rectangle 145">
-            <a:extLst>
-              <a:ext uri="{FF2B5EF4-FFF2-40B4-BE49-F238E27FC236}">
-                <a16:creationId xmlns:a16="http://schemas.microsoft.com/office/drawing/2014/main" id="{EAF13D71-0B6A-4A83-7BCF-2FA8AD51915C}"/>
-              </a:ext>
-            </a:extLst>
-          </p:cNvPr>
-          <p:cNvSpPr/>
-          <p:nvPr/>
-        </p:nvSpPr>
-        <p:spPr>
-          <a:xfrm>
-            <a:off x="9267714" y="1172581"/>
-            <a:ext cx="2667896" cy="5228213"/>
-          </a:xfrm>
-          <a:prstGeom prst="roundRect">
-            <a:avLst>
-              <a:gd name="adj" fmla="val 2957"/>
-            </a:avLst>
-          </a:prstGeom>
-          <a:solidFill>
-            <a:schemeClr val="bg2"/>
-          </a:solidFill>
-          <a:ln w="38100"/>
-        </p:spPr>
-        <p:style>
-          <a:lnRef idx="2">
-            <a:schemeClr val="accent1">
-              <a:shade val="15000"/>
-            </a:schemeClr>
-          </a:lnRef>
-          <a:fillRef idx="1">
-            <a:schemeClr val="accent1"/>
-          </a:fillRef>
-          <a:effectRef idx="0">
-            <a:schemeClr val="accent1"/>
-          </a:effectRef>
-          <a:fontRef idx="minor">
-            <a:schemeClr val="lt1"/>
-          </a:fontRef>
-        </p:style>
-        <p:txBody>
-          <a:bodyPr rtlCol="0" anchor="ctr"/>
-          <a:lstStyle/>
-          <a:p>
-            <a:pPr algn="ctr"/>
-            <a:endParaRPr lang="en-US"/>
-          </a:p>
-        </p:txBody>
-      </p:sp>
-      <p:sp>
-        <p:nvSpPr>
-          <p:cNvPr id="2" name="Rounded Rectangle 1">
-            <a:extLst>
-              <a:ext uri="{FF2B5EF4-FFF2-40B4-BE49-F238E27FC236}">
-                <a16:creationId xmlns:a16="http://schemas.microsoft.com/office/drawing/2014/main" id="{EEBE9E6B-D3ED-66EF-9143-44003E57B85D}"/>
-              </a:ext>
-            </a:extLst>
-          </p:cNvPr>
-          <p:cNvSpPr/>
-          <p:nvPr/>
-        </p:nvSpPr>
-        <p:spPr>
-          <a:xfrm>
-            <a:off x="430306" y="1904125"/>
-            <a:ext cx="2248348" cy="701923"/>
-          </a:xfrm>
-          <a:prstGeom prst="roundRect">
-            <a:avLst>
-              <a:gd name="adj" fmla="val 36591"/>
-            </a:avLst>
-          </a:prstGeom>
-          <a:solidFill>
-            <a:srgbClr val="00B0F0">
-              <a:alpha val="25714"/>
-            </a:srgbClr>
-          </a:solidFill>
-          <a:ln w="34925">
-            <a:solidFill>
-              <a:srgbClr val="0070C0"/>
-            </a:solidFill>
-          </a:ln>
-        </p:spPr>
-        <p:style>
-          <a:lnRef idx="2">
-            <a:schemeClr val="accent1">
-              <a:shade val="15000"/>
-            </a:schemeClr>
-          </a:lnRef>
-          <a:fillRef idx="1">
-            <a:schemeClr val="accent1"/>
-          </a:fillRef>
-          <a:effectRef idx="0">
-            <a:schemeClr val="accent1"/>
-          </a:effectRef>
-          <a:fontRef idx="minor">
-            <a:schemeClr val="lt1"/>
-          </a:fontRef>
-        </p:style>
-        <p:txBody>
-          <a:bodyPr rtlCol="0" anchor="ctr"/>
-          <a:lstStyle/>
-          <a:p>
-            <a:pPr algn="ctr"/>
-            <a:endParaRPr lang="en-US"/>
-          </a:p>
-        </p:txBody>
-      </p:sp>
-      <p:sp>
-        <p:nvSpPr>
-          <p:cNvPr id="3" name="Rounded Rectangle 2">
-            <a:extLst>
-              <a:ext uri="{FF2B5EF4-FFF2-40B4-BE49-F238E27FC236}">
-                <a16:creationId xmlns:a16="http://schemas.microsoft.com/office/drawing/2014/main" id="{670159D7-C6C1-B857-F8E8-25704449DD31}"/>
-              </a:ext>
-            </a:extLst>
-          </p:cNvPr>
-          <p:cNvSpPr/>
-          <p:nvPr/>
-        </p:nvSpPr>
-        <p:spPr>
-          <a:xfrm>
-            <a:off x="430306" y="2751274"/>
-            <a:ext cx="2248348" cy="701923"/>
-          </a:xfrm>
-          <a:prstGeom prst="roundRect">
-            <a:avLst>
-              <a:gd name="adj" fmla="val 36591"/>
-            </a:avLst>
-          </a:prstGeom>
-          <a:solidFill>
-            <a:srgbClr val="00B0F0">
-              <a:alpha val="25714"/>
-            </a:srgbClr>
-          </a:solidFill>
-          <a:ln w="34925">
-            <a:solidFill>
-              <a:srgbClr val="0070C0"/>
-            </a:solidFill>
-          </a:ln>
-        </p:spPr>
-        <p:style>
-          <a:lnRef idx="2">
-            <a:schemeClr val="accent1">
-              <a:shade val="15000"/>
-            </a:schemeClr>
-          </a:lnRef>
-          <a:fillRef idx="1">
-            <a:schemeClr val="accent1"/>
-          </a:fillRef>
-          <a:effectRef idx="0">
-            <a:schemeClr val="accent1"/>
-          </a:effectRef>
-          <a:fontRef idx="minor">
-            <a:schemeClr val="lt1"/>
-          </a:fontRef>
-        </p:style>
-        <p:txBody>
-          <a:bodyPr rtlCol="0" anchor="ctr"/>
-          <a:lstStyle/>
-          <a:p>
-            <a:pPr algn="ctr"/>
-            <a:endParaRPr lang="en-US"/>
-          </a:p>
-        </p:txBody>
-      </p:sp>
-      <p:sp>
-        <p:nvSpPr>
-          <p:cNvPr id="5" name="Rounded Rectangle 4">
-            <a:extLst>
-              <a:ext uri="{FF2B5EF4-FFF2-40B4-BE49-F238E27FC236}">
-                <a16:creationId xmlns:a16="http://schemas.microsoft.com/office/drawing/2014/main" id="{1E880039-92CC-B423-69FB-B5A014F81974}"/>
-              </a:ext>
-            </a:extLst>
-          </p:cNvPr>
-          <p:cNvSpPr/>
-          <p:nvPr/>
-        </p:nvSpPr>
-        <p:spPr>
-          <a:xfrm>
-            <a:off x="430306" y="3878586"/>
-            <a:ext cx="2248348" cy="701923"/>
-          </a:xfrm>
-          <a:prstGeom prst="roundRect">
-            <a:avLst>
-              <a:gd name="adj" fmla="val 36591"/>
-            </a:avLst>
-          </a:prstGeom>
-          <a:solidFill>
-            <a:srgbClr val="00B0F0">
-              <a:alpha val="25714"/>
-            </a:srgbClr>
-          </a:solidFill>
-          <a:ln w="34925">
-            <a:solidFill>
-              <a:srgbClr val="0070C0"/>
-            </a:solidFill>
-          </a:ln>
-        </p:spPr>
-        <p:style>
-          <a:lnRef idx="2">
-            <a:schemeClr val="accent1">
-              <a:shade val="15000"/>
-            </a:schemeClr>
-          </a:lnRef>
-          <a:fillRef idx="1">
-            <a:schemeClr val="accent1"/>
-          </a:fillRef>
-          <a:effectRef idx="0">
-            <a:schemeClr val="accent1"/>
-          </a:effectRef>
-          <a:fontRef idx="minor">
-            <a:schemeClr val="lt1"/>
-          </a:fontRef>
-        </p:style>
-        <p:txBody>
-          <a:bodyPr rtlCol="0" anchor="ctr"/>
-          <a:lstStyle/>
-          <a:p>
-            <a:pPr algn="ctr"/>
-            <a:endParaRPr lang="en-US"/>
-          </a:p>
-        </p:txBody>
-      </p:sp>
-      <p:sp>
-        <p:nvSpPr>
-          <p:cNvPr id="6" name="Rounded Rectangle 5">
-            <a:extLst>
-              <a:ext uri="{FF2B5EF4-FFF2-40B4-BE49-F238E27FC236}">
-                <a16:creationId xmlns:a16="http://schemas.microsoft.com/office/drawing/2014/main" id="{8AD6773E-1A87-3B98-E282-31598971038B}"/>
-              </a:ext>
-            </a:extLst>
-          </p:cNvPr>
-          <p:cNvSpPr/>
-          <p:nvPr/>
-        </p:nvSpPr>
-        <p:spPr>
-          <a:xfrm>
-            <a:off x="430306" y="4745450"/>
-            <a:ext cx="2248348" cy="701923"/>
-          </a:xfrm>
-          <a:prstGeom prst="roundRect">
-            <a:avLst>
-              <a:gd name="adj" fmla="val 36591"/>
-            </a:avLst>
-          </a:prstGeom>
-          <a:solidFill>
-            <a:srgbClr val="00B0F0">
-              <a:alpha val="25714"/>
-            </a:srgbClr>
-          </a:solidFill>
-          <a:ln w="34925">
-            <a:solidFill>
-              <a:srgbClr val="0070C0"/>
-            </a:solidFill>
-          </a:ln>
-        </p:spPr>
-        <p:style>
-          <a:lnRef idx="2">
-            <a:schemeClr val="accent1">
-              <a:shade val="15000"/>
-            </a:schemeClr>
-          </a:lnRef>
-          <a:fillRef idx="1">
-            <a:schemeClr val="accent1"/>
-          </a:fillRef>
-          <a:effectRef idx="0">
-            <a:schemeClr val="accent1"/>
-          </a:effectRef>
-          <a:fontRef idx="minor">
-            <a:schemeClr val="lt1"/>
-          </a:fontRef>
-        </p:style>
-        <p:txBody>
-          <a:bodyPr rtlCol="0" anchor="ctr"/>
-          <a:lstStyle/>
-          <a:p>
-            <a:pPr algn="ctr"/>
-            <a:endParaRPr lang="en-US"/>
-          </a:p>
-        </p:txBody>
-      </p:sp>
-      <p:sp>
-        <p:nvSpPr>
-          <p:cNvPr id="7" name="Rounded Rectangle 6">
-            <a:extLst>
-              <a:ext uri="{FF2B5EF4-FFF2-40B4-BE49-F238E27FC236}">
-                <a16:creationId xmlns:a16="http://schemas.microsoft.com/office/drawing/2014/main" id="{1FF8DD8F-EB79-1AB2-1616-E561D76F06DF}"/>
-              </a:ext>
-            </a:extLst>
-          </p:cNvPr>
-          <p:cNvSpPr/>
-          <p:nvPr/>
-        </p:nvSpPr>
-        <p:spPr>
-          <a:xfrm>
-            <a:off x="3449620" y="2992004"/>
-            <a:ext cx="2248348" cy="701923"/>
-          </a:xfrm>
-          <a:prstGeom prst="roundRect">
-            <a:avLst>
-              <a:gd name="adj" fmla="val 36591"/>
-            </a:avLst>
-          </a:prstGeom>
-          <a:solidFill>
-            <a:srgbClr val="00B0F0">
-              <a:alpha val="25714"/>
-            </a:srgbClr>
-          </a:solidFill>
-          <a:ln w="34925">
-            <a:solidFill>
-              <a:srgbClr val="0070C0"/>
-            </a:solidFill>
-          </a:ln>
-        </p:spPr>
-        <p:style>
-          <a:lnRef idx="2">
-            <a:schemeClr val="accent1">
-              <a:shade val="15000"/>
-            </a:schemeClr>
-          </a:lnRef>
-          <a:fillRef idx="1">
-            <a:schemeClr val="accent1"/>
-          </a:fillRef>
-          <a:effectRef idx="0">
-            <a:schemeClr val="accent1"/>
-          </a:effectRef>
-          <a:fontRef idx="minor">
-            <a:schemeClr val="lt1"/>
-          </a:fontRef>
-        </p:style>
-        <p:txBody>
-          <a:bodyPr rtlCol="0" anchor="ctr"/>
-          <a:lstStyle/>
-          <a:p>
-            <a:pPr algn="ctr"/>
-            <a:endParaRPr lang="en-US"/>
-          </a:p>
-        </p:txBody>
-      </p:sp>
-      <p:sp>
-        <p:nvSpPr>
-          <p:cNvPr id="8" name="Rounded Rectangle 7">
-            <a:extLst>
-              <a:ext uri="{FF2B5EF4-FFF2-40B4-BE49-F238E27FC236}">
-                <a16:creationId xmlns:a16="http://schemas.microsoft.com/office/drawing/2014/main" id="{3D80EF1C-8A47-7A87-A86B-010F16D02470}"/>
-              </a:ext>
-            </a:extLst>
-          </p:cNvPr>
-          <p:cNvSpPr/>
-          <p:nvPr/>
-        </p:nvSpPr>
-        <p:spPr>
-          <a:xfrm>
-            <a:off x="3449620" y="3861990"/>
-            <a:ext cx="2248348" cy="701923"/>
-          </a:xfrm>
-          <a:prstGeom prst="roundRect">
-            <a:avLst>
-              <a:gd name="adj" fmla="val 36591"/>
-            </a:avLst>
-          </a:prstGeom>
-          <a:solidFill>
-            <a:srgbClr val="00B0F0">
-              <a:alpha val="25714"/>
-            </a:srgbClr>
-          </a:solidFill>
-          <a:ln w="34925">
-            <a:solidFill>
-              <a:srgbClr val="0070C0"/>
-            </a:solidFill>
-          </a:ln>
-        </p:spPr>
-        <p:style>
-          <a:lnRef idx="2">
-            <a:schemeClr val="accent1">
-              <a:shade val="15000"/>
-            </a:schemeClr>
-          </a:lnRef>
-          <a:fillRef idx="1">
-            <a:schemeClr val="accent1"/>
-          </a:fillRef>
-          <a:effectRef idx="0">
-            <a:schemeClr val="accent1"/>
-          </a:effectRef>
-          <a:fontRef idx="minor">
-            <a:schemeClr val="lt1"/>
-          </a:fontRef>
-        </p:style>
-        <p:txBody>
-          <a:bodyPr rtlCol="0" anchor="ctr"/>
-          <a:lstStyle/>
-          <a:p>
-            <a:pPr algn="ctr"/>
-            <a:endParaRPr lang="en-US"/>
-          </a:p>
-        </p:txBody>
-      </p:sp>
-      <p:sp>
-        <p:nvSpPr>
-          <p:cNvPr id="9" name="Rounded Rectangle 8">
-            <a:extLst>
-              <a:ext uri="{FF2B5EF4-FFF2-40B4-BE49-F238E27FC236}">
-                <a16:creationId xmlns:a16="http://schemas.microsoft.com/office/drawing/2014/main" id="{0F4D7CAE-50BD-0183-692F-86695273AA1B}"/>
-              </a:ext>
-            </a:extLst>
-          </p:cNvPr>
-          <p:cNvSpPr/>
-          <p:nvPr/>
-        </p:nvSpPr>
-        <p:spPr>
-          <a:xfrm>
-            <a:off x="3449620" y="4699712"/>
-            <a:ext cx="2248348" cy="1571996"/>
-          </a:xfrm>
-          <a:prstGeom prst="roundRect">
-            <a:avLst>
-              <a:gd name="adj" fmla="val 36591"/>
-            </a:avLst>
-          </a:prstGeom>
-          <a:solidFill>
-            <a:srgbClr val="00B0F0">
-              <a:alpha val="25714"/>
-            </a:srgbClr>
-          </a:solidFill>
-          <a:ln w="34925">
-            <a:solidFill>
-              <a:srgbClr val="0070C0"/>
-            </a:solidFill>
-          </a:ln>
-        </p:spPr>
-        <p:style>
-          <a:lnRef idx="2">
-            <a:schemeClr val="accent1">
-              <a:shade val="15000"/>
-            </a:schemeClr>
-          </a:lnRef>
-          <a:fillRef idx="1">
-            <a:schemeClr val="accent1"/>
-          </a:fillRef>
-          <a:effectRef idx="0">
-            <a:schemeClr val="accent1"/>
-          </a:effectRef>
-          <a:fontRef idx="minor">
-            <a:schemeClr val="lt1"/>
-          </a:fontRef>
-        </p:style>
-        <p:txBody>
-          <a:bodyPr rtlCol="0" anchor="ctr"/>
-          <a:lstStyle/>
-          <a:p>
-            <a:pPr algn="ctr"/>
-            <a:endParaRPr lang="en-US"/>
-          </a:p>
-        </p:txBody>
-      </p:sp>
-      <p:sp>
-        <p:nvSpPr>
-          <p:cNvPr id="10" name="Rounded Rectangle 9">
-            <a:extLst>
-              <a:ext uri="{FF2B5EF4-FFF2-40B4-BE49-F238E27FC236}">
-                <a16:creationId xmlns:a16="http://schemas.microsoft.com/office/drawing/2014/main" id="{78E48509-5618-3C6D-78EB-68D032F7BBC6}"/>
-              </a:ext>
-            </a:extLst>
-          </p:cNvPr>
-          <p:cNvSpPr/>
-          <p:nvPr/>
-        </p:nvSpPr>
-        <p:spPr>
-          <a:xfrm>
-            <a:off x="6463554" y="2403919"/>
-            <a:ext cx="2248348" cy="701923"/>
-          </a:xfrm>
-          <a:prstGeom prst="roundRect">
-            <a:avLst>
-              <a:gd name="adj" fmla="val 36591"/>
-            </a:avLst>
-          </a:prstGeom>
-          <a:solidFill>
-            <a:srgbClr val="00B0F0">
-              <a:alpha val="25714"/>
-            </a:srgbClr>
-          </a:solidFill>
-          <a:ln w="34925">
-            <a:solidFill>
-              <a:srgbClr val="0070C0"/>
-            </a:solidFill>
-          </a:ln>
-        </p:spPr>
-        <p:style>
-          <a:lnRef idx="2">
-            <a:schemeClr val="accent1">
-              <a:shade val="15000"/>
-            </a:schemeClr>
-          </a:lnRef>
-          <a:fillRef idx="1">
-            <a:schemeClr val="accent1"/>
-          </a:fillRef>
-          <a:effectRef idx="0">
-            <a:schemeClr val="accent1"/>
-          </a:effectRef>
-          <a:fontRef idx="minor">
-            <a:schemeClr val="lt1"/>
-          </a:fontRef>
-        </p:style>
-        <p:txBody>
-          <a:bodyPr rtlCol="0" anchor="ctr"/>
-          <a:lstStyle/>
-          <a:p>
-            <a:pPr algn="ctr"/>
-            <a:endParaRPr lang="en-US"/>
-          </a:p>
-        </p:txBody>
-      </p:sp>
-      <p:sp>
-        <p:nvSpPr>
-          <p:cNvPr id="15" name="Rounded Rectangle 14">
-            <a:extLst>
-              <a:ext uri="{FF2B5EF4-FFF2-40B4-BE49-F238E27FC236}">
-                <a16:creationId xmlns:a16="http://schemas.microsoft.com/office/drawing/2014/main" id="{18524937-6671-AD4B-E36C-DDE96F31D4A2}"/>
-              </a:ext>
-            </a:extLst>
-          </p:cNvPr>
-          <p:cNvSpPr/>
-          <p:nvPr/>
-        </p:nvSpPr>
-        <p:spPr>
-          <a:xfrm>
-            <a:off x="6463554" y="3234474"/>
-            <a:ext cx="2248348" cy="701923"/>
-          </a:xfrm>
-          <a:prstGeom prst="roundRect">
-            <a:avLst>
-              <a:gd name="adj" fmla="val 36591"/>
-            </a:avLst>
-          </a:prstGeom>
-          <a:solidFill>
-            <a:srgbClr val="00B0F0">
-              <a:alpha val="25714"/>
-            </a:srgbClr>
-          </a:solidFill>
-          <a:ln w="34925">
-            <a:solidFill>
-              <a:srgbClr val="0070C0"/>
-            </a:solidFill>
-          </a:ln>
-        </p:spPr>
-        <p:style>
-          <a:lnRef idx="2">
-            <a:schemeClr val="accent1">
-              <a:shade val="15000"/>
-            </a:schemeClr>
-          </a:lnRef>
-          <a:fillRef idx="1">
-            <a:schemeClr val="accent1"/>
-          </a:fillRef>
-          <a:effectRef idx="0">
-            <a:schemeClr val="accent1"/>
-          </a:effectRef>
-          <a:fontRef idx="minor">
-            <a:schemeClr val="lt1"/>
-          </a:fontRef>
-        </p:style>
-        <p:txBody>
-          <a:bodyPr rtlCol="0" anchor="ctr"/>
-          <a:lstStyle/>
-          <a:p>
-            <a:pPr algn="ctr"/>
-            <a:endParaRPr lang="en-US"/>
-          </a:p>
-        </p:txBody>
-      </p:sp>
-      <p:sp>
-        <p:nvSpPr>
-          <p:cNvPr id="16" name="Rounded Rectangle 15">
-            <a:extLst>
-              <a:ext uri="{FF2B5EF4-FFF2-40B4-BE49-F238E27FC236}">
-                <a16:creationId xmlns:a16="http://schemas.microsoft.com/office/drawing/2014/main" id="{FED4D59A-0E5E-FF66-5BEE-109B6A0AB747}"/>
-              </a:ext>
-            </a:extLst>
-          </p:cNvPr>
-          <p:cNvSpPr/>
-          <p:nvPr/>
-        </p:nvSpPr>
-        <p:spPr>
-          <a:xfrm>
-            <a:off x="6463554" y="4064613"/>
-            <a:ext cx="2248348" cy="1548187"/>
-          </a:xfrm>
-          <a:prstGeom prst="roundRect">
-            <a:avLst>
-              <a:gd name="adj" fmla="val 36591"/>
-            </a:avLst>
-          </a:prstGeom>
-          <a:solidFill>
-            <a:srgbClr val="00B0F0">
-              <a:alpha val="25714"/>
-            </a:srgbClr>
-          </a:solidFill>
-          <a:ln w="34925">
-            <a:solidFill>
-              <a:srgbClr val="0070C0"/>
-            </a:solidFill>
-          </a:ln>
-        </p:spPr>
-        <p:style>
-          <a:lnRef idx="2">
-            <a:schemeClr val="accent1">
-              <a:shade val="15000"/>
-            </a:schemeClr>
-          </a:lnRef>
-          <a:fillRef idx="1">
-            <a:schemeClr val="accent1"/>
-          </a:fillRef>
-          <a:effectRef idx="0">
-            <a:schemeClr val="accent1"/>
-          </a:effectRef>
-          <a:fontRef idx="minor">
-            <a:schemeClr val="lt1"/>
-          </a:fontRef>
-        </p:style>
-        <p:txBody>
-          <a:bodyPr rtlCol="0" anchor="ctr"/>
-          <a:lstStyle/>
-          <a:p>
-            <a:pPr algn="ctr"/>
-            <a:endParaRPr lang="en-US"/>
-          </a:p>
-        </p:txBody>
-      </p:sp>
-      <p:sp>
-        <p:nvSpPr>
-          <p:cNvPr id="17" name="Rounded Rectangle 16">
-            <a:extLst>
-              <a:ext uri="{FF2B5EF4-FFF2-40B4-BE49-F238E27FC236}">
-                <a16:creationId xmlns:a16="http://schemas.microsoft.com/office/drawing/2014/main" id="{3C5B55E4-66D0-E3A7-AF6E-5AD19169A1C5}"/>
-              </a:ext>
-            </a:extLst>
-          </p:cNvPr>
-          <p:cNvSpPr/>
-          <p:nvPr/>
-        </p:nvSpPr>
-        <p:spPr>
-          <a:xfrm>
-            <a:off x="9477488" y="2416899"/>
-            <a:ext cx="2248348" cy="701923"/>
-          </a:xfrm>
-          <a:prstGeom prst="roundRect">
-            <a:avLst>
-              <a:gd name="adj" fmla="val 36591"/>
-            </a:avLst>
-          </a:prstGeom>
-          <a:solidFill>
-            <a:srgbClr val="00B0F0">
-              <a:alpha val="25714"/>
-            </a:srgbClr>
-          </a:solidFill>
-          <a:ln w="34925">
-            <a:solidFill>
-              <a:srgbClr val="0070C0"/>
-            </a:solidFill>
-          </a:ln>
-        </p:spPr>
-        <p:style>
-          <a:lnRef idx="2">
-            <a:schemeClr val="accent1">
-              <a:shade val="15000"/>
-            </a:schemeClr>
-          </a:lnRef>
-          <a:fillRef idx="1">
-            <a:schemeClr val="accent1"/>
-          </a:fillRef>
-          <a:effectRef idx="0">
-            <a:schemeClr val="accent1"/>
-          </a:effectRef>
-          <a:fontRef idx="minor">
-            <a:schemeClr val="lt1"/>
-          </a:fontRef>
-        </p:style>
-        <p:txBody>
-          <a:bodyPr rtlCol="0" anchor="ctr"/>
-          <a:lstStyle/>
-          <a:p>
-            <a:pPr algn="ctr"/>
-            <a:endParaRPr lang="en-US"/>
-          </a:p>
-        </p:txBody>
-      </p:sp>
-      <p:sp>
-        <p:nvSpPr>
-          <p:cNvPr id="18" name="Rounded Rectangle 17">
-            <a:extLst>
-              <a:ext uri="{FF2B5EF4-FFF2-40B4-BE49-F238E27FC236}">
-                <a16:creationId xmlns:a16="http://schemas.microsoft.com/office/drawing/2014/main" id="{03099E6E-C439-5CE0-9BFC-2D587E1152F9}"/>
-              </a:ext>
-            </a:extLst>
-          </p:cNvPr>
-          <p:cNvSpPr/>
-          <p:nvPr/>
-        </p:nvSpPr>
-        <p:spPr>
-          <a:xfrm>
-            <a:off x="9502587" y="3255988"/>
-            <a:ext cx="2248348" cy="701923"/>
-          </a:xfrm>
-          <a:prstGeom prst="roundRect">
-            <a:avLst>
-              <a:gd name="adj" fmla="val 36591"/>
-            </a:avLst>
-          </a:prstGeom>
-          <a:solidFill>
-            <a:srgbClr val="00B0F0">
-              <a:alpha val="25714"/>
-            </a:srgbClr>
-          </a:solidFill>
-          <a:ln w="34925">
-            <a:solidFill>
-              <a:srgbClr val="0070C0"/>
-            </a:solidFill>
-          </a:ln>
-        </p:spPr>
-        <p:style>
-          <a:lnRef idx="2">
-            <a:schemeClr val="accent1">
-              <a:shade val="15000"/>
-            </a:schemeClr>
-          </a:lnRef>
-          <a:fillRef idx="1">
-            <a:schemeClr val="accent1"/>
-          </a:fillRef>
-          <a:effectRef idx="0">
-            <a:schemeClr val="accent1"/>
-          </a:effectRef>
-          <a:fontRef idx="minor">
-            <a:schemeClr val="lt1"/>
-          </a:fontRef>
-        </p:style>
-        <p:txBody>
-          <a:bodyPr rtlCol="0" anchor="ctr"/>
-          <a:lstStyle/>
-          <a:p>
-            <a:pPr algn="ctr"/>
-            <a:endParaRPr lang="en-US"/>
-          </a:p>
-        </p:txBody>
-      </p:sp>
-      <p:sp>
-        <p:nvSpPr>
-          <p:cNvPr id="19" name="Rounded Rectangle 18">
-            <a:extLst>
-              <a:ext uri="{FF2B5EF4-FFF2-40B4-BE49-F238E27FC236}">
-                <a16:creationId xmlns:a16="http://schemas.microsoft.com/office/drawing/2014/main" id="{215745D3-A775-24A7-3CFC-77B5C579846B}"/>
-              </a:ext>
-            </a:extLst>
-          </p:cNvPr>
-          <p:cNvSpPr/>
-          <p:nvPr/>
-        </p:nvSpPr>
-        <p:spPr>
-          <a:xfrm>
-            <a:off x="9513346" y="4098211"/>
-            <a:ext cx="2248348" cy="701923"/>
-          </a:xfrm>
-          <a:prstGeom prst="roundRect">
-            <a:avLst>
-              <a:gd name="adj" fmla="val 36591"/>
-            </a:avLst>
-          </a:prstGeom>
-          <a:solidFill>
-            <a:srgbClr val="00B0F0">
-              <a:alpha val="25714"/>
-            </a:srgbClr>
-          </a:solidFill>
-          <a:ln w="34925">
-            <a:solidFill>
-              <a:srgbClr val="0070C0"/>
-            </a:solidFill>
-          </a:ln>
-        </p:spPr>
-        <p:style>
-          <a:lnRef idx="2">
-            <a:schemeClr val="accent1">
-              <a:shade val="15000"/>
-            </a:schemeClr>
-          </a:lnRef>
-          <a:fillRef idx="1">
-            <a:schemeClr val="accent1"/>
-          </a:fillRef>
-          <a:effectRef idx="0">
-            <a:schemeClr val="accent1"/>
-          </a:effectRef>
-          <a:fontRef idx="minor">
-            <a:schemeClr val="lt1"/>
-          </a:fontRef>
-        </p:style>
-        <p:txBody>
-          <a:bodyPr rtlCol="0" anchor="ctr"/>
-          <a:lstStyle/>
-          <a:p>
-            <a:pPr algn="ctr"/>
-            <a:endParaRPr lang="en-US"/>
-          </a:p>
-        </p:txBody>
-      </p:sp>
-      <p:sp>
-        <p:nvSpPr>
-          <p:cNvPr id="20" name="Rounded Rectangle 19">
-            <a:extLst>
-              <a:ext uri="{FF2B5EF4-FFF2-40B4-BE49-F238E27FC236}">
-                <a16:creationId xmlns:a16="http://schemas.microsoft.com/office/drawing/2014/main" id="{1A1645BD-06A7-CFA7-4840-F573DD5D7205}"/>
-              </a:ext>
-            </a:extLst>
-          </p:cNvPr>
-          <p:cNvSpPr/>
-          <p:nvPr/>
-        </p:nvSpPr>
-        <p:spPr>
-          <a:xfrm>
-            <a:off x="9513346" y="4961950"/>
-            <a:ext cx="2248348" cy="701923"/>
-          </a:xfrm>
-          <a:prstGeom prst="roundRect">
-            <a:avLst>
-              <a:gd name="adj" fmla="val 36591"/>
-            </a:avLst>
-          </a:prstGeom>
-          <a:solidFill>
-            <a:srgbClr val="00B0F0">
-              <a:alpha val="25714"/>
-            </a:srgbClr>
-          </a:solidFill>
-          <a:ln w="34925">
-            <a:solidFill>
-              <a:srgbClr val="0070C0"/>
-            </a:solidFill>
-          </a:ln>
-        </p:spPr>
-        <p:style>
-          <a:lnRef idx="2">
-            <a:schemeClr val="accent1">
-              <a:shade val="15000"/>
-            </a:schemeClr>
-          </a:lnRef>
-          <a:fillRef idx="1">
-            <a:schemeClr val="accent1"/>
-          </a:fillRef>
-          <a:effectRef idx="0">
-            <a:schemeClr val="accent1"/>
-          </a:effectRef>
-          <a:fontRef idx="minor">
-            <a:schemeClr val="lt1"/>
-          </a:fontRef>
-        </p:style>
-        <p:txBody>
-          <a:bodyPr rtlCol="0" anchor="ctr"/>
-          <a:lstStyle/>
-          <a:p>
-            <a:pPr algn="ctr"/>
-            <a:endParaRPr lang="en-US"/>
-          </a:p>
-        </p:txBody>
-      </p:sp>
-      <p:sp>
-        <p:nvSpPr>
-          <p:cNvPr id="21" name="Rounded Rectangle 20">
-            <a:extLst>
-              <a:ext uri="{FF2B5EF4-FFF2-40B4-BE49-F238E27FC236}">
-                <a16:creationId xmlns:a16="http://schemas.microsoft.com/office/drawing/2014/main" id="{0B15A6B5-D051-4E2E-5CD2-D5DBCDABB5CA}"/>
-              </a:ext>
-            </a:extLst>
-          </p:cNvPr>
-          <p:cNvSpPr/>
-          <p:nvPr/>
-        </p:nvSpPr>
-        <p:spPr>
-          <a:xfrm>
-            <a:off x="3910408" y="1282666"/>
-            <a:ext cx="1326772" cy="701923"/>
-          </a:xfrm>
-          <a:prstGeom prst="roundRect">
-            <a:avLst>
-              <a:gd name="adj" fmla="val 36591"/>
-            </a:avLst>
-          </a:prstGeom>
-          <a:solidFill>
-            <a:srgbClr val="00B0F0">
-              <a:alpha val="25714"/>
-            </a:srgbClr>
-          </a:solidFill>
-          <a:ln w="34925">
-            <a:solidFill>
-              <a:srgbClr val="0070C0"/>
-            </a:solidFill>
-          </a:ln>
-        </p:spPr>
-        <p:style>
-          <a:lnRef idx="2">
-            <a:schemeClr val="accent1">
-              <a:shade val="15000"/>
-            </a:schemeClr>
-          </a:lnRef>
-          <a:fillRef idx="1">
-            <a:schemeClr val="accent1"/>
-          </a:fillRef>
-          <a:effectRef idx="0">
-            <a:schemeClr val="accent1"/>
-          </a:effectRef>
-          <a:fontRef idx="minor">
-            <a:schemeClr val="lt1"/>
-          </a:fontRef>
-        </p:style>
-        <p:txBody>
-          <a:bodyPr rtlCol="0" anchor="ctr"/>
-          <a:lstStyle/>
-          <a:p>
-            <a:pPr algn="ctr"/>
-            <a:endParaRPr lang="en-US"/>
-          </a:p>
-        </p:txBody>
-      </p:sp>
-      <p:sp>
-        <p:nvSpPr>
-          <p:cNvPr id="22" name="Rounded Rectangle 21">
-            <a:extLst>
-              <a:ext uri="{FF2B5EF4-FFF2-40B4-BE49-F238E27FC236}">
-                <a16:creationId xmlns:a16="http://schemas.microsoft.com/office/drawing/2014/main" id="{2AD1195F-4CAE-F7CF-10F1-D9829DB60DC8}"/>
-              </a:ext>
-            </a:extLst>
-          </p:cNvPr>
-          <p:cNvSpPr/>
-          <p:nvPr/>
-        </p:nvSpPr>
-        <p:spPr>
-          <a:xfrm>
-            <a:off x="3910408" y="2076254"/>
-            <a:ext cx="1326772" cy="701923"/>
-          </a:xfrm>
-          <a:prstGeom prst="roundRect">
-            <a:avLst>
-              <a:gd name="adj" fmla="val 36591"/>
-            </a:avLst>
-          </a:prstGeom>
-          <a:solidFill>
-            <a:srgbClr val="00B0F0">
-              <a:alpha val="25714"/>
-            </a:srgbClr>
-          </a:solidFill>
-          <a:ln w="34925">
-            <a:solidFill>
-              <a:srgbClr val="0070C0"/>
-            </a:solidFill>
-          </a:ln>
-        </p:spPr>
-        <p:style>
-          <a:lnRef idx="2">
-            <a:schemeClr val="accent1">
-              <a:shade val="15000"/>
-            </a:schemeClr>
-          </a:lnRef>
-          <a:fillRef idx="1">
-            <a:schemeClr val="accent1"/>
-          </a:fillRef>
-          <a:effectRef idx="0">
-            <a:schemeClr val="accent1"/>
-          </a:effectRef>
-          <a:fontRef idx="minor">
-            <a:schemeClr val="lt1"/>
-          </a:fontRef>
-        </p:style>
-        <p:txBody>
-          <a:bodyPr rtlCol="0" anchor="ctr"/>
-          <a:lstStyle/>
-          <a:p>
-            <a:pPr algn="ctr"/>
-            <a:endParaRPr lang="en-US"/>
-          </a:p>
-        </p:txBody>
-      </p:sp>
-      <p:sp>
-        <p:nvSpPr>
-          <p:cNvPr id="24" name="Rounded Rectangle 23">
-            <a:extLst>
-              <a:ext uri="{FF2B5EF4-FFF2-40B4-BE49-F238E27FC236}">
-                <a16:creationId xmlns:a16="http://schemas.microsoft.com/office/drawing/2014/main" id="{3DFBA7DB-7925-245C-9100-F576ED640631}"/>
-              </a:ext>
-            </a:extLst>
-          </p:cNvPr>
-          <p:cNvSpPr/>
-          <p:nvPr/>
-        </p:nvSpPr>
-        <p:spPr>
-          <a:xfrm>
-            <a:off x="6924342" y="1283366"/>
-            <a:ext cx="1326772" cy="701923"/>
-          </a:xfrm>
-          <a:prstGeom prst="roundRect">
-            <a:avLst>
-              <a:gd name="adj" fmla="val 36591"/>
-            </a:avLst>
-          </a:prstGeom>
-          <a:solidFill>
-            <a:srgbClr val="00B0F0">
-              <a:alpha val="25714"/>
-            </a:srgbClr>
-          </a:solidFill>
-          <a:ln w="34925">
-            <a:solidFill>
-              <a:srgbClr val="0070C0"/>
-            </a:solidFill>
-          </a:ln>
-        </p:spPr>
-        <p:style>
-          <a:lnRef idx="2">
-            <a:schemeClr val="accent1">
-              <a:shade val="15000"/>
-            </a:schemeClr>
-          </a:lnRef>
-          <a:fillRef idx="1">
-            <a:schemeClr val="accent1"/>
-          </a:fillRef>
-          <a:effectRef idx="0">
-            <a:schemeClr val="accent1"/>
-          </a:effectRef>
-          <a:fontRef idx="minor">
-            <a:schemeClr val="lt1"/>
-          </a:fontRef>
-        </p:style>
-        <p:txBody>
-          <a:bodyPr rtlCol="0" anchor="ctr"/>
-          <a:lstStyle/>
-          <a:p>
-            <a:pPr algn="ctr"/>
-            <a:endParaRPr lang="en-US"/>
-          </a:p>
-        </p:txBody>
-      </p:sp>
-      <p:sp>
-        <p:nvSpPr>
-          <p:cNvPr id="25" name="Rounded Rectangle 24">
-            <a:extLst>
-              <a:ext uri="{FF2B5EF4-FFF2-40B4-BE49-F238E27FC236}">
-                <a16:creationId xmlns:a16="http://schemas.microsoft.com/office/drawing/2014/main" id="{3599050A-0771-580B-3B97-9808FCCFBE7D}"/>
-              </a:ext>
-            </a:extLst>
-          </p:cNvPr>
-          <p:cNvSpPr/>
-          <p:nvPr/>
-        </p:nvSpPr>
-        <p:spPr>
-          <a:xfrm>
-            <a:off x="9938276" y="1283366"/>
-            <a:ext cx="1326772" cy="701923"/>
-          </a:xfrm>
-          <a:prstGeom prst="roundRect">
-            <a:avLst>
-              <a:gd name="adj" fmla="val 36591"/>
-            </a:avLst>
-          </a:prstGeom>
-          <a:solidFill>
-            <a:srgbClr val="00B0F0">
-              <a:alpha val="25714"/>
-            </a:srgbClr>
-          </a:solidFill>
-          <a:ln w="34925">
-            <a:solidFill>
-              <a:srgbClr val="0070C0"/>
-            </a:solidFill>
-          </a:ln>
-        </p:spPr>
-        <p:style>
-          <a:lnRef idx="2">
-            <a:schemeClr val="accent1">
-              <a:shade val="15000"/>
-            </a:schemeClr>
-          </a:lnRef>
-          <a:fillRef idx="1">
-            <a:schemeClr val="accent1"/>
-          </a:fillRef>
-          <a:effectRef idx="0">
-            <a:schemeClr val="accent1"/>
-          </a:effectRef>
-          <a:fontRef idx="minor">
-            <a:schemeClr val="lt1"/>
-          </a:fontRef>
-        </p:style>
-        <p:txBody>
-          <a:bodyPr rtlCol="0" anchor="ctr"/>
-          <a:lstStyle/>
-          <a:p>
-            <a:pPr algn="ctr"/>
-            <a:endParaRPr lang="en-US"/>
-          </a:p>
-        </p:txBody>
-      </p:sp>
-      <p:sp>
-        <p:nvSpPr>
-          <p:cNvPr id="11" name="TextBox 10">
-            <a:extLst>
-              <a:ext uri="{FF2B5EF4-FFF2-40B4-BE49-F238E27FC236}">
-                <a16:creationId xmlns:a16="http://schemas.microsoft.com/office/drawing/2014/main" id="{D1D5F0D2-6DFF-CE88-32FB-F968E6ED4734}"/>
-              </a:ext>
-            </a:extLst>
-          </p:cNvPr>
-          <p:cNvSpPr txBox="1"/>
-          <p:nvPr/>
-        </p:nvSpPr>
-        <p:spPr>
-          <a:xfrm>
-            <a:off x="786251" y="649363"/>
-            <a:ext cx="1547218" cy="523220"/>
-          </a:xfrm>
-          <a:prstGeom prst="rect">
-            <a:avLst/>
-          </a:prstGeom>
-          <a:noFill/>
-        </p:spPr>
-        <p:txBody>
-          <a:bodyPr wrap="none" rtlCol="0">
-            <a:spAutoFit/>
-          </a:bodyPr>
-          <a:lstStyle/>
-          <a:p>
-            <a:r>
-              <a:rPr lang="en-US" sz="2800" dirty="0"/>
-              <a:t>A3 North</a:t>
-            </a:r>
-          </a:p>
-        </p:txBody>
-      </p:sp>
-      <p:sp>
-        <p:nvSpPr>
-          <p:cNvPr id="12" name="TextBox 11">
-            <a:extLst>
-              <a:ext uri="{FF2B5EF4-FFF2-40B4-BE49-F238E27FC236}">
-                <a16:creationId xmlns:a16="http://schemas.microsoft.com/office/drawing/2014/main" id="{9E61816D-96FF-B5AD-0AB7-3371F071A274}"/>
-              </a:ext>
-            </a:extLst>
-          </p:cNvPr>
-          <p:cNvSpPr txBox="1"/>
-          <p:nvPr/>
-        </p:nvSpPr>
-        <p:spPr>
-          <a:xfrm>
-            <a:off x="6773868" y="649363"/>
-            <a:ext cx="1552028" cy="523220"/>
-          </a:xfrm>
-          <a:prstGeom prst="rect">
-            <a:avLst/>
-          </a:prstGeom>
-          <a:noFill/>
-        </p:spPr>
-        <p:txBody>
-          <a:bodyPr wrap="none" rtlCol="0">
-            <a:spAutoFit/>
-          </a:bodyPr>
-          <a:lstStyle/>
-          <a:p>
-            <a:r>
-              <a:rPr lang="en-US" sz="2800" dirty="0"/>
-              <a:t>B3 North</a:t>
-            </a:r>
-          </a:p>
-        </p:txBody>
-      </p:sp>
-      <p:sp>
-        <p:nvSpPr>
-          <p:cNvPr id="13" name="TextBox 12">
-            <a:extLst>
-              <a:ext uri="{FF2B5EF4-FFF2-40B4-BE49-F238E27FC236}">
-                <a16:creationId xmlns:a16="http://schemas.microsoft.com/office/drawing/2014/main" id="{70A577A3-6BCB-7CF9-667E-03CF4648E0A5}"/>
-              </a:ext>
-            </a:extLst>
-          </p:cNvPr>
-          <p:cNvSpPr txBox="1"/>
-          <p:nvPr/>
-        </p:nvSpPr>
-        <p:spPr>
-          <a:xfrm>
-            <a:off x="3714247" y="649363"/>
-            <a:ext cx="1582484" cy="523220"/>
-          </a:xfrm>
-          <a:prstGeom prst="rect">
-            <a:avLst/>
-          </a:prstGeom>
-          <a:noFill/>
-        </p:spPr>
-        <p:txBody>
-          <a:bodyPr wrap="none" rtlCol="0">
-            <a:spAutoFit/>
-          </a:bodyPr>
-          <a:lstStyle/>
-          <a:p>
-            <a:r>
-              <a:rPr lang="en-US" sz="2800" dirty="0"/>
-              <a:t>B3 South</a:t>
-            </a:r>
-          </a:p>
-        </p:txBody>
-      </p:sp>
-      <p:sp>
-        <p:nvSpPr>
-          <p:cNvPr id="14" name="TextBox 13">
-            <a:extLst>
-              <a:ext uri="{FF2B5EF4-FFF2-40B4-BE49-F238E27FC236}">
-                <a16:creationId xmlns:a16="http://schemas.microsoft.com/office/drawing/2014/main" id="{2A1706A2-0E10-2BB9-85BD-053AD5102D10}"/>
-              </a:ext>
-            </a:extLst>
-          </p:cNvPr>
-          <p:cNvSpPr txBox="1"/>
-          <p:nvPr/>
-        </p:nvSpPr>
-        <p:spPr>
-          <a:xfrm>
-            <a:off x="9742013" y="649363"/>
-            <a:ext cx="1577676" cy="523220"/>
-          </a:xfrm>
-          <a:prstGeom prst="rect">
-            <a:avLst/>
-          </a:prstGeom>
-          <a:noFill/>
-        </p:spPr>
-        <p:txBody>
-          <a:bodyPr wrap="none" rtlCol="0">
-            <a:spAutoFit/>
-          </a:bodyPr>
-          <a:lstStyle/>
-          <a:p>
-            <a:r>
-              <a:rPr lang="en-US" sz="2800" dirty="0"/>
-              <a:t>A3 South</a:t>
-            </a:r>
-          </a:p>
-        </p:txBody>
-      </p:sp>
-      <p:pic>
-        <p:nvPicPr>
-          <p:cNvPr id="38" name="Graphic 37" descr="Sleep with solid fill">
-            <a:extLst>
-              <a:ext uri="{FF2B5EF4-FFF2-40B4-BE49-F238E27FC236}">
-                <a16:creationId xmlns:a16="http://schemas.microsoft.com/office/drawing/2014/main" id="{4B6A6354-93FA-F3AE-5E61-28A1DCEB9C10}"/>
-              </a:ext>
-            </a:extLst>
-          </p:cNvPr>
-          <p:cNvPicPr>
-            <a:picLocks noChangeAspect="1"/>
-          </p:cNvPicPr>
-          <p:nvPr/>
-        </p:nvPicPr>
-        <p:blipFill>
-          <a:blip>
-            <a:extLst>
-              <a:ext uri="{96DAC541-7B7A-43D3-8B79-37D633B846F1}">
-                <asvg:svgBlip xmlns:asvg="http://schemas.microsoft.com/office/drawing/2016/SVG/main" r:embed="rId2"/>
-              </a:ext>
-            </a:extLst>
-          </a:blip>
-          <a:srcRect/>
-          <a:stretch/>
-        </p:blipFill>
-        <p:spPr>
-          <a:xfrm>
-            <a:off x="709596" y="3929217"/>
-            <a:ext cx="634696" cy="634696"/>
-          </a:xfrm>
-          <a:prstGeom prst="rect">
-            <a:avLst/>
-          </a:prstGeom>
-        </p:spPr>
-      </p:pic>
-      <p:pic>
-        <p:nvPicPr>
-          <p:cNvPr id="39" name="Graphic 38" descr="Sleep with solid fill">
-            <a:extLst>
-              <a:ext uri="{FF2B5EF4-FFF2-40B4-BE49-F238E27FC236}">
-                <a16:creationId xmlns:a16="http://schemas.microsoft.com/office/drawing/2014/main" id="{64F420BD-0E8B-C69B-A315-E4B7D6993BF5}"/>
-              </a:ext>
-            </a:extLst>
-          </p:cNvPr>
-          <p:cNvPicPr>
-            <a:picLocks noChangeAspect="1"/>
-          </p:cNvPicPr>
-          <p:nvPr/>
-        </p:nvPicPr>
-        <p:blipFill>
-          <a:blip>
-            <a:extLst>
-              <a:ext uri="{96DAC541-7B7A-43D3-8B79-37D633B846F1}">
-                <asvg:svgBlip xmlns:asvg="http://schemas.microsoft.com/office/drawing/2016/SVG/main" r:embed="rId2"/>
-              </a:ext>
-            </a:extLst>
-          </a:blip>
-          <a:srcRect/>
-          <a:stretch/>
-        </p:blipFill>
-        <p:spPr>
-          <a:xfrm>
-            <a:off x="1775428" y="3929217"/>
-            <a:ext cx="634696" cy="634696"/>
-          </a:xfrm>
-          <a:prstGeom prst="rect">
-            <a:avLst/>
-          </a:prstGeom>
-        </p:spPr>
-      </p:pic>
-      <p:pic>
-        <p:nvPicPr>
-          <p:cNvPr id="42" name="Graphic 41" descr="Sleep with solid fill">
-            <a:extLst>
-              <a:ext uri="{FF2B5EF4-FFF2-40B4-BE49-F238E27FC236}">
-                <a16:creationId xmlns:a16="http://schemas.microsoft.com/office/drawing/2014/main" id="{B69EE946-20FF-0735-F4A7-BD8E4D835E16}"/>
-              </a:ext>
-            </a:extLst>
-          </p:cNvPr>
-          <p:cNvPicPr>
-            <a:picLocks noChangeAspect="1"/>
-          </p:cNvPicPr>
-          <p:nvPr/>
-        </p:nvPicPr>
-        <p:blipFill>
-          <a:blip>
-            <a:extLst>
-              <a:ext uri="{96DAC541-7B7A-43D3-8B79-37D633B846F1}">
-                <asvg:svgBlip xmlns:asvg="http://schemas.microsoft.com/office/drawing/2016/SVG/main" r:embed="rId2"/>
-              </a:ext>
-            </a:extLst>
-          </a:blip>
-          <a:srcRect/>
-          <a:stretch/>
-        </p:blipFill>
-        <p:spPr>
-          <a:xfrm>
-            <a:off x="709596" y="4768306"/>
-            <a:ext cx="634696" cy="634696"/>
-          </a:xfrm>
-          <a:prstGeom prst="rect">
-            <a:avLst/>
-          </a:prstGeom>
-        </p:spPr>
-      </p:pic>
-      <p:pic>
-        <p:nvPicPr>
-          <p:cNvPr id="43" name="Graphic 42" descr="Sleep with solid fill">
-            <a:extLst>
-              <a:ext uri="{FF2B5EF4-FFF2-40B4-BE49-F238E27FC236}">
-                <a16:creationId xmlns:a16="http://schemas.microsoft.com/office/drawing/2014/main" id="{0B9DBEFB-E100-6330-9115-24D275F261F7}"/>
-              </a:ext>
-            </a:extLst>
-          </p:cNvPr>
-          <p:cNvPicPr>
-            <a:picLocks noChangeAspect="1"/>
-          </p:cNvPicPr>
-          <p:nvPr/>
-        </p:nvPicPr>
-        <p:blipFill>
-          <a:blip>
-            <a:extLst>
-              <a:ext uri="{96DAC541-7B7A-43D3-8B79-37D633B846F1}">
-                <asvg:svgBlip xmlns:asvg="http://schemas.microsoft.com/office/drawing/2016/SVG/main" r:embed="rId2"/>
-              </a:ext>
-            </a:extLst>
-          </a:blip>
-          <a:srcRect/>
-          <a:stretch/>
-        </p:blipFill>
-        <p:spPr>
-          <a:xfrm>
-            <a:off x="1775428" y="4768306"/>
-            <a:ext cx="634696" cy="634696"/>
-          </a:xfrm>
-          <a:prstGeom prst="rect">
-            <a:avLst/>
-          </a:prstGeom>
-        </p:spPr>
-      </p:pic>
-      <p:pic>
-        <p:nvPicPr>
-          <p:cNvPr id="55" name="Graphic 54" descr="Sleep with solid fill">
-            <a:extLst>
-              <a:ext uri="{FF2B5EF4-FFF2-40B4-BE49-F238E27FC236}">
-                <a16:creationId xmlns:a16="http://schemas.microsoft.com/office/drawing/2014/main" id="{7955ECE6-C843-A921-1E69-D8FF9D4C5CB2}"/>
-              </a:ext>
-            </a:extLst>
-          </p:cNvPr>
-          <p:cNvPicPr>
-            <a:picLocks noChangeAspect="1"/>
-          </p:cNvPicPr>
-          <p:nvPr/>
-        </p:nvPicPr>
-        <p:blipFill>
-          <a:blip>
-            <a:extLst>
-              <a:ext uri="{96DAC541-7B7A-43D3-8B79-37D633B846F1}">
-                <asvg:svgBlip xmlns:asvg="http://schemas.microsoft.com/office/drawing/2016/SVG/main" r:embed="rId2"/>
-              </a:ext>
-            </a:extLst>
-          </a:blip>
-          <a:srcRect/>
-          <a:stretch/>
-        </p:blipFill>
-        <p:spPr>
-          <a:xfrm>
-            <a:off x="709596" y="1925641"/>
-            <a:ext cx="634696" cy="634696"/>
-          </a:xfrm>
-          <a:prstGeom prst="rect">
-            <a:avLst/>
-          </a:prstGeom>
-        </p:spPr>
-      </p:pic>
-      <p:pic>
-        <p:nvPicPr>
-          <p:cNvPr id="56" name="Graphic 55" descr="Sleep with solid fill">
-            <a:extLst>
-              <a:ext uri="{FF2B5EF4-FFF2-40B4-BE49-F238E27FC236}">
-                <a16:creationId xmlns:a16="http://schemas.microsoft.com/office/drawing/2014/main" id="{DF005D58-04BC-2FD0-CC2F-23A059F92DBC}"/>
-              </a:ext>
-            </a:extLst>
-          </p:cNvPr>
-          <p:cNvPicPr>
-            <a:picLocks noChangeAspect="1"/>
-          </p:cNvPicPr>
-          <p:nvPr/>
-        </p:nvPicPr>
-        <p:blipFill>
-          <a:blip>
-            <a:extLst>
-              <a:ext uri="{96DAC541-7B7A-43D3-8B79-37D633B846F1}">
-                <asvg:svgBlip xmlns:asvg="http://schemas.microsoft.com/office/drawing/2016/SVG/main" r:embed="rId2"/>
-              </a:ext>
-            </a:extLst>
-          </a:blip>
-          <a:srcRect/>
-          <a:stretch/>
-        </p:blipFill>
-        <p:spPr>
-          <a:xfrm>
-            <a:off x="1775428" y="1925641"/>
-            <a:ext cx="634696" cy="634696"/>
-          </a:xfrm>
-          <a:prstGeom prst="rect">
-            <a:avLst/>
-          </a:prstGeom>
-        </p:spPr>
-      </p:pic>
-      <p:pic>
-        <p:nvPicPr>
-          <p:cNvPr id="57" name="Graphic 56" descr="Sleep with solid fill">
-            <a:extLst>
-              <a:ext uri="{FF2B5EF4-FFF2-40B4-BE49-F238E27FC236}">
-                <a16:creationId xmlns:a16="http://schemas.microsoft.com/office/drawing/2014/main" id="{4BCA5013-888B-06D4-AFCC-4CB927EF0F83}"/>
-              </a:ext>
-            </a:extLst>
-          </p:cNvPr>
-          <p:cNvPicPr>
-            <a:picLocks noChangeAspect="1"/>
-          </p:cNvPicPr>
-          <p:nvPr/>
-        </p:nvPicPr>
-        <p:blipFill>
-          <a:blip>
-            <a:extLst>
-              <a:ext uri="{96DAC541-7B7A-43D3-8B79-37D633B846F1}">
-                <asvg:svgBlip xmlns:asvg="http://schemas.microsoft.com/office/drawing/2016/SVG/main" r:embed="rId2"/>
-              </a:ext>
-            </a:extLst>
-          </a:blip>
-          <a:srcRect/>
-          <a:stretch/>
-        </p:blipFill>
-        <p:spPr>
-          <a:xfrm>
-            <a:off x="709596" y="2764730"/>
-            <a:ext cx="634696" cy="634696"/>
-          </a:xfrm>
-          <a:prstGeom prst="rect">
-            <a:avLst/>
-          </a:prstGeom>
-        </p:spPr>
-      </p:pic>
-      <p:pic>
-        <p:nvPicPr>
-          <p:cNvPr id="58" name="Graphic 57" descr="Sleep with solid fill">
-            <a:extLst>
-              <a:ext uri="{FF2B5EF4-FFF2-40B4-BE49-F238E27FC236}">
-                <a16:creationId xmlns:a16="http://schemas.microsoft.com/office/drawing/2014/main" id="{DFA7CBFE-7D37-E79C-507B-A60D3C48CEED}"/>
-              </a:ext>
-            </a:extLst>
-          </p:cNvPr>
-          <p:cNvPicPr>
-            <a:picLocks noChangeAspect="1"/>
-          </p:cNvPicPr>
-          <p:nvPr/>
-        </p:nvPicPr>
-        <p:blipFill>
-          <a:blip>
-            <a:extLst>
-              <a:ext uri="{96DAC541-7B7A-43D3-8B79-37D633B846F1}">
-                <asvg:svgBlip xmlns:asvg="http://schemas.microsoft.com/office/drawing/2016/SVG/main" r:embed="rId2"/>
-              </a:ext>
-            </a:extLst>
-          </a:blip>
-          <a:srcRect/>
-          <a:stretch/>
-        </p:blipFill>
-        <p:spPr>
-          <a:xfrm>
-            <a:off x="1775428" y="2764730"/>
-            <a:ext cx="634696" cy="634696"/>
-          </a:xfrm>
-          <a:prstGeom prst="rect">
-            <a:avLst/>
-          </a:prstGeom>
-        </p:spPr>
-      </p:pic>
-      <p:pic>
-        <p:nvPicPr>
-          <p:cNvPr id="59" name="Graphic 58" descr="Sleep with solid fill">
-            <a:extLst>
-              <a:ext uri="{FF2B5EF4-FFF2-40B4-BE49-F238E27FC236}">
-                <a16:creationId xmlns:a16="http://schemas.microsoft.com/office/drawing/2014/main" id="{350FBF7A-E70B-5944-3820-EBA4322763E3}"/>
-              </a:ext>
-            </a:extLst>
-          </p:cNvPr>
-          <p:cNvPicPr>
-            <a:picLocks noChangeAspect="1"/>
-          </p:cNvPicPr>
-          <p:nvPr/>
-        </p:nvPicPr>
-        <p:blipFill>
-          <a:blip>
-            <a:extLst>
-              <a:ext uri="{96DAC541-7B7A-43D3-8B79-37D633B846F1}">
-                <asvg:svgBlip xmlns:asvg="http://schemas.microsoft.com/office/drawing/2016/SVG/main" r:embed="rId2"/>
-              </a:ext>
-            </a:extLst>
-          </a:blip>
-          <a:srcRect/>
-          <a:stretch/>
-        </p:blipFill>
-        <p:spPr>
-          <a:xfrm>
-            <a:off x="4256446" y="1265370"/>
-            <a:ext cx="634696" cy="634696"/>
-          </a:xfrm>
-          <a:prstGeom prst="rect">
-            <a:avLst/>
-          </a:prstGeom>
-        </p:spPr>
-      </p:pic>
-      <p:pic>
-        <p:nvPicPr>
-          <p:cNvPr id="60" name="Graphic 59" descr="Sleep with solid fill">
-            <a:extLst>
-              <a:ext uri="{FF2B5EF4-FFF2-40B4-BE49-F238E27FC236}">
-                <a16:creationId xmlns:a16="http://schemas.microsoft.com/office/drawing/2014/main" id="{569F0A00-54A2-6704-786B-D5FA117DA3B2}"/>
-              </a:ext>
-            </a:extLst>
-          </p:cNvPr>
-          <p:cNvPicPr>
-            <a:picLocks noChangeAspect="1"/>
-          </p:cNvPicPr>
-          <p:nvPr/>
-        </p:nvPicPr>
-        <p:blipFill>
-          <a:blip>
-            <a:extLst>
-              <a:ext uri="{96DAC541-7B7A-43D3-8B79-37D633B846F1}">
-                <asvg:svgBlip xmlns:asvg="http://schemas.microsoft.com/office/drawing/2016/SVG/main" r:embed="rId2"/>
-              </a:ext>
-            </a:extLst>
-          </a:blip>
-          <a:srcRect/>
-          <a:stretch/>
-        </p:blipFill>
-        <p:spPr>
-          <a:xfrm>
-            <a:off x="7270380" y="1261784"/>
-            <a:ext cx="634696" cy="634696"/>
-          </a:xfrm>
-          <a:prstGeom prst="rect">
-            <a:avLst/>
-          </a:prstGeom>
-        </p:spPr>
-      </p:pic>
-      <p:pic>
-        <p:nvPicPr>
-          <p:cNvPr id="61" name="Graphic 60" descr="Sleep with solid fill">
-            <a:extLst>
-              <a:ext uri="{FF2B5EF4-FFF2-40B4-BE49-F238E27FC236}">
-                <a16:creationId xmlns:a16="http://schemas.microsoft.com/office/drawing/2014/main" id="{31FFB1AB-5059-F575-BF42-E00F7198E842}"/>
-              </a:ext>
-            </a:extLst>
-          </p:cNvPr>
-          <p:cNvPicPr>
-            <a:picLocks noChangeAspect="1"/>
-          </p:cNvPicPr>
-          <p:nvPr/>
-        </p:nvPicPr>
-        <p:blipFill>
-          <a:blip>
-            <a:extLst>
-              <a:ext uri="{96DAC541-7B7A-43D3-8B79-37D633B846F1}">
-                <asvg:svgBlip xmlns:asvg="http://schemas.microsoft.com/office/drawing/2016/SVG/main" r:embed="rId2"/>
-              </a:ext>
-            </a:extLst>
-          </a:blip>
-          <a:srcRect/>
-          <a:stretch/>
-        </p:blipFill>
-        <p:spPr>
-          <a:xfrm>
-            <a:off x="10284314" y="1261784"/>
-            <a:ext cx="634696" cy="634696"/>
-          </a:xfrm>
-          <a:prstGeom prst="rect">
-            <a:avLst/>
-          </a:prstGeom>
-        </p:spPr>
-      </p:pic>
-      <p:pic>
-        <p:nvPicPr>
-          <p:cNvPr id="63" name="Graphic 62" descr="Sleep with solid fill">
-            <a:extLst>
-              <a:ext uri="{FF2B5EF4-FFF2-40B4-BE49-F238E27FC236}">
-                <a16:creationId xmlns:a16="http://schemas.microsoft.com/office/drawing/2014/main" id="{3A61AAB5-5DA5-9B55-8A76-65E6A23A2F4A}"/>
-              </a:ext>
-            </a:extLst>
-          </p:cNvPr>
-          <p:cNvPicPr>
-            <a:picLocks noChangeAspect="1"/>
-          </p:cNvPicPr>
-          <p:nvPr/>
-        </p:nvPicPr>
-        <p:blipFill>
-          <a:blip>
-            <a:extLst>
-              <a:ext uri="{96DAC541-7B7A-43D3-8B79-37D633B846F1}">
-                <asvg:svgBlip xmlns:asvg="http://schemas.microsoft.com/office/drawing/2016/SVG/main" r:embed="rId2"/>
-              </a:ext>
-            </a:extLst>
-          </a:blip>
-          <a:srcRect/>
-          <a:stretch/>
-        </p:blipFill>
-        <p:spPr>
-          <a:xfrm>
-            <a:off x="3723530" y="3030079"/>
-            <a:ext cx="634696" cy="634696"/>
-          </a:xfrm>
-          <a:prstGeom prst="rect">
-            <a:avLst/>
-          </a:prstGeom>
-        </p:spPr>
-      </p:pic>
-      <p:pic>
-        <p:nvPicPr>
-          <p:cNvPr id="64" name="Graphic 63" descr="Sleep with solid fill">
-            <a:extLst>
-              <a:ext uri="{FF2B5EF4-FFF2-40B4-BE49-F238E27FC236}">
-                <a16:creationId xmlns:a16="http://schemas.microsoft.com/office/drawing/2014/main" id="{0E41E179-4523-74A3-4BCB-C884D2D1787B}"/>
-              </a:ext>
-            </a:extLst>
-          </p:cNvPr>
-          <p:cNvPicPr>
-            <a:picLocks noChangeAspect="1"/>
-          </p:cNvPicPr>
-          <p:nvPr/>
-        </p:nvPicPr>
-        <p:blipFill>
-          <a:blip>
-            <a:extLst>
-              <a:ext uri="{96DAC541-7B7A-43D3-8B79-37D633B846F1}">
-                <asvg:svgBlip xmlns:asvg="http://schemas.microsoft.com/office/drawing/2016/SVG/main" r:embed="rId2"/>
-              </a:ext>
-            </a:extLst>
-          </a:blip>
-          <a:srcRect/>
-          <a:stretch/>
-        </p:blipFill>
-        <p:spPr>
-          <a:xfrm>
-            <a:off x="4789362" y="3030079"/>
-            <a:ext cx="634696" cy="634696"/>
-          </a:xfrm>
-          <a:prstGeom prst="rect">
-            <a:avLst/>
-          </a:prstGeom>
-        </p:spPr>
-      </p:pic>
-      <p:pic>
-        <p:nvPicPr>
-          <p:cNvPr id="65" name="Graphic 64" descr="Sleep with solid fill">
-            <a:extLst>
-              <a:ext uri="{FF2B5EF4-FFF2-40B4-BE49-F238E27FC236}">
-                <a16:creationId xmlns:a16="http://schemas.microsoft.com/office/drawing/2014/main" id="{7500C91F-76A5-B8A5-362E-7DCA1E7B02A9}"/>
-              </a:ext>
-            </a:extLst>
-          </p:cNvPr>
-          <p:cNvPicPr>
-            <a:picLocks noChangeAspect="1"/>
-          </p:cNvPicPr>
-          <p:nvPr/>
-        </p:nvPicPr>
-        <p:blipFill>
-          <a:blip>
-            <a:extLst>
-              <a:ext uri="{96DAC541-7B7A-43D3-8B79-37D633B846F1}">
-                <asvg:svgBlip xmlns:asvg="http://schemas.microsoft.com/office/drawing/2016/SVG/main" r:embed="rId2"/>
-              </a:ext>
-            </a:extLst>
-          </a:blip>
-          <a:srcRect/>
-          <a:stretch/>
-        </p:blipFill>
-        <p:spPr>
-          <a:xfrm>
-            <a:off x="3723530" y="3869168"/>
-            <a:ext cx="634696" cy="634696"/>
-          </a:xfrm>
-          <a:prstGeom prst="rect">
-            <a:avLst/>
-          </a:prstGeom>
-        </p:spPr>
-      </p:pic>
-      <p:pic>
-        <p:nvPicPr>
-          <p:cNvPr id="66" name="Graphic 65" descr="Sleep with solid fill">
-            <a:extLst>
-              <a:ext uri="{FF2B5EF4-FFF2-40B4-BE49-F238E27FC236}">
-                <a16:creationId xmlns:a16="http://schemas.microsoft.com/office/drawing/2014/main" id="{0E1ABDB4-8E3A-A9B2-2B96-19D87F384BD7}"/>
-              </a:ext>
-            </a:extLst>
-          </p:cNvPr>
-          <p:cNvPicPr>
-            <a:picLocks noChangeAspect="1"/>
-          </p:cNvPicPr>
-          <p:nvPr/>
-        </p:nvPicPr>
-        <p:blipFill>
-          <a:blip>
-            <a:extLst>
-              <a:ext uri="{96DAC541-7B7A-43D3-8B79-37D633B846F1}">
-                <asvg:svgBlip xmlns:asvg="http://schemas.microsoft.com/office/drawing/2016/SVG/main" r:embed="rId2"/>
-              </a:ext>
-            </a:extLst>
-          </a:blip>
-          <a:srcRect/>
-          <a:stretch/>
-        </p:blipFill>
-        <p:spPr>
-          <a:xfrm>
-            <a:off x="4789362" y="3869168"/>
-            <a:ext cx="634696" cy="634696"/>
-          </a:xfrm>
-          <a:prstGeom prst="rect">
-            <a:avLst/>
-          </a:prstGeom>
-        </p:spPr>
-      </p:pic>
-      <p:pic>
-        <p:nvPicPr>
-          <p:cNvPr id="75" name="Graphic 74" descr="Sleep with solid fill">
-            <a:extLst>
-              <a:ext uri="{FF2B5EF4-FFF2-40B4-BE49-F238E27FC236}">
-                <a16:creationId xmlns:a16="http://schemas.microsoft.com/office/drawing/2014/main" id="{378C768C-6B77-D6D3-B37E-24A0AE76A06F}"/>
-              </a:ext>
-            </a:extLst>
-          </p:cNvPr>
-          <p:cNvPicPr>
-            <a:picLocks noChangeAspect="1"/>
-          </p:cNvPicPr>
-          <p:nvPr/>
-        </p:nvPicPr>
-        <p:blipFill>
-          <a:blip>
-            <a:extLst>
-              <a:ext uri="{96DAC541-7B7A-43D3-8B79-37D633B846F1}">
-                <asvg:svgBlip xmlns:asvg="http://schemas.microsoft.com/office/drawing/2016/SVG/main" r:embed="rId2"/>
-              </a:ext>
-            </a:extLst>
-          </a:blip>
-          <a:srcRect/>
-          <a:stretch/>
-        </p:blipFill>
-        <p:spPr>
-          <a:xfrm>
-            <a:off x="3723530" y="4708256"/>
-            <a:ext cx="634696" cy="634696"/>
-          </a:xfrm>
-          <a:prstGeom prst="rect">
-            <a:avLst/>
-          </a:prstGeom>
-        </p:spPr>
-      </p:pic>
-      <p:pic>
-        <p:nvPicPr>
-          <p:cNvPr id="76" name="Graphic 75" descr="Sleep with solid fill">
-            <a:extLst>
-              <a:ext uri="{FF2B5EF4-FFF2-40B4-BE49-F238E27FC236}">
-                <a16:creationId xmlns:a16="http://schemas.microsoft.com/office/drawing/2014/main" id="{3F236106-BC41-0BA6-C621-5FF42559D679}"/>
-              </a:ext>
-            </a:extLst>
-          </p:cNvPr>
-          <p:cNvPicPr>
-            <a:picLocks noChangeAspect="1"/>
-          </p:cNvPicPr>
-          <p:nvPr/>
-        </p:nvPicPr>
-        <p:blipFill>
-          <a:blip>
-            <a:extLst>
-              <a:ext uri="{96DAC541-7B7A-43D3-8B79-37D633B846F1}">
-                <asvg:svgBlip xmlns:asvg="http://schemas.microsoft.com/office/drawing/2016/SVG/main" r:embed="rId2"/>
-              </a:ext>
-            </a:extLst>
-          </a:blip>
-          <a:srcRect/>
-          <a:stretch/>
-        </p:blipFill>
-        <p:spPr>
-          <a:xfrm>
-            <a:off x="4789362" y="4708256"/>
-            <a:ext cx="634696" cy="634696"/>
-          </a:xfrm>
-          <a:prstGeom prst="rect">
-            <a:avLst/>
-          </a:prstGeom>
-        </p:spPr>
-      </p:pic>
-      <p:pic>
-        <p:nvPicPr>
-          <p:cNvPr id="77" name="Graphic 76" descr="Sleep with solid fill">
-            <a:extLst>
-              <a:ext uri="{FF2B5EF4-FFF2-40B4-BE49-F238E27FC236}">
-                <a16:creationId xmlns:a16="http://schemas.microsoft.com/office/drawing/2014/main" id="{FF82FCB3-6355-F44B-C34E-D97D76C533E3}"/>
-              </a:ext>
-            </a:extLst>
-          </p:cNvPr>
-          <p:cNvPicPr>
-            <a:picLocks noChangeAspect="1"/>
-          </p:cNvPicPr>
-          <p:nvPr/>
-        </p:nvPicPr>
-        <p:blipFill>
-          <a:blip>
-            <a:extLst>
-              <a:ext uri="{96DAC541-7B7A-43D3-8B79-37D633B846F1}">
-                <asvg:svgBlip xmlns:asvg="http://schemas.microsoft.com/office/drawing/2016/SVG/main" r:embed="rId2"/>
-              </a:ext>
-            </a:extLst>
-          </a:blip>
-          <a:srcRect/>
-          <a:stretch/>
-        </p:blipFill>
-        <p:spPr>
-          <a:xfrm>
-            <a:off x="3723530" y="5547345"/>
-            <a:ext cx="634696" cy="634696"/>
-          </a:xfrm>
-          <a:prstGeom prst="rect">
-            <a:avLst/>
-          </a:prstGeom>
-        </p:spPr>
-      </p:pic>
-      <p:pic>
-        <p:nvPicPr>
-          <p:cNvPr id="103" name="Graphic 102" descr="Sleep with solid fill">
-            <a:extLst>
-              <a:ext uri="{FF2B5EF4-FFF2-40B4-BE49-F238E27FC236}">
-                <a16:creationId xmlns:a16="http://schemas.microsoft.com/office/drawing/2014/main" id="{2C73AEFF-96A2-78D0-1F57-94EF2D478468}"/>
-              </a:ext>
-            </a:extLst>
-          </p:cNvPr>
-          <p:cNvPicPr>
-            <a:picLocks noChangeAspect="1"/>
-          </p:cNvPicPr>
-          <p:nvPr/>
-        </p:nvPicPr>
-        <p:blipFill>
-          <a:blip>
-            <a:extLst>
-              <a:ext uri="{96DAC541-7B7A-43D3-8B79-37D633B846F1}">
-                <asvg:svgBlip xmlns:asvg="http://schemas.microsoft.com/office/drawing/2016/SVG/main" r:embed="rId2"/>
-              </a:ext>
-            </a:extLst>
-          </a:blip>
-          <a:srcRect/>
-          <a:stretch/>
-        </p:blipFill>
-        <p:spPr>
-          <a:xfrm>
-            <a:off x="9781876" y="2444684"/>
-            <a:ext cx="634696" cy="634696"/>
-          </a:xfrm>
-          <a:prstGeom prst="rect">
-            <a:avLst/>
-          </a:prstGeom>
-        </p:spPr>
-      </p:pic>
-      <p:pic>
-        <p:nvPicPr>
-          <p:cNvPr id="104" name="Graphic 103" descr="Sleep with solid fill">
-            <a:extLst>
-              <a:ext uri="{FF2B5EF4-FFF2-40B4-BE49-F238E27FC236}">
-                <a16:creationId xmlns:a16="http://schemas.microsoft.com/office/drawing/2014/main" id="{4BEEC8CC-17CD-1DE9-B837-3EB4A266F41C}"/>
-              </a:ext>
-            </a:extLst>
-          </p:cNvPr>
-          <p:cNvPicPr>
-            <a:picLocks noChangeAspect="1"/>
-          </p:cNvPicPr>
-          <p:nvPr/>
-        </p:nvPicPr>
-        <p:blipFill>
-          <a:blip>
-            <a:extLst>
-              <a:ext uri="{96DAC541-7B7A-43D3-8B79-37D633B846F1}">
-                <asvg:svgBlip xmlns:asvg="http://schemas.microsoft.com/office/drawing/2016/SVG/main" r:embed="rId2"/>
-              </a:ext>
-            </a:extLst>
-          </a:blip>
-          <a:srcRect/>
-          <a:stretch/>
-        </p:blipFill>
-        <p:spPr>
-          <a:xfrm>
-            <a:off x="10847708" y="2444684"/>
-            <a:ext cx="634696" cy="634696"/>
-          </a:xfrm>
-          <a:prstGeom prst="rect">
-            <a:avLst/>
-          </a:prstGeom>
-        </p:spPr>
-      </p:pic>
-      <p:pic>
-        <p:nvPicPr>
-          <p:cNvPr id="105" name="Graphic 104" descr="Sleep with solid fill">
-            <a:extLst>
-              <a:ext uri="{FF2B5EF4-FFF2-40B4-BE49-F238E27FC236}">
-                <a16:creationId xmlns:a16="http://schemas.microsoft.com/office/drawing/2014/main" id="{948F4E72-B8EF-C157-F6E8-735CBEAEA4CA}"/>
-              </a:ext>
-            </a:extLst>
-          </p:cNvPr>
-          <p:cNvPicPr>
-            <a:picLocks noChangeAspect="1"/>
-          </p:cNvPicPr>
-          <p:nvPr/>
-        </p:nvPicPr>
-        <p:blipFill>
-          <a:blip>
-            <a:extLst>
-              <a:ext uri="{96DAC541-7B7A-43D3-8B79-37D633B846F1}">
-                <asvg:svgBlip xmlns:asvg="http://schemas.microsoft.com/office/drawing/2016/SVG/main" r:embed="rId2"/>
-              </a:ext>
-            </a:extLst>
-          </a:blip>
-          <a:srcRect/>
-          <a:stretch/>
-        </p:blipFill>
-        <p:spPr>
-          <a:xfrm>
-            <a:off x="9781876" y="3283773"/>
-            <a:ext cx="634696" cy="634696"/>
-          </a:xfrm>
-          <a:prstGeom prst="rect">
-            <a:avLst/>
-          </a:prstGeom>
-        </p:spPr>
-      </p:pic>
-      <p:pic>
-        <p:nvPicPr>
-          <p:cNvPr id="106" name="Graphic 105" descr="Sleep with solid fill">
-            <a:extLst>
-              <a:ext uri="{FF2B5EF4-FFF2-40B4-BE49-F238E27FC236}">
-                <a16:creationId xmlns:a16="http://schemas.microsoft.com/office/drawing/2014/main" id="{1F49D281-C05F-DB37-79C5-E032F1502DD6}"/>
-              </a:ext>
-            </a:extLst>
-          </p:cNvPr>
-          <p:cNvPicPr>
-            <a:picLocks noChangeAspect="1"/>
-          </p:cNvPicPr>
-          <p:nvPr/>
-        </p:nvPicPr>
-        <p:blipFill>
-          <a:blip>
-            <a:extLst>
-              <a:ext uri="{96DAC541-7B7A-43D3-8B79-37D633B846F1}">
-                <asvg:svgBlip xmlns:asvg="http://schemas.microsoft.com/office/drawing/2016/SVG/main" r:embed="rId2"/>
-              </a:ext>
-            </a:extLst>
-          </a:blip>
-          <a:srcRect/>
-          <a:stretch/>
-        </p:blipFill>
-        <p:spPr>
-          <a:xfrm>
-            <a:off x="10847708" y="3283773"/>
-            <a:ext cx="634696" cy="634696"/>
-          </a:xfrm>
-          <a:prstGeom prst="rect">
-            <a:avLst/>
-          </a:prstGeom>
-        </p:spPr>
-      </p:pic>
-      <p:pic>
-        <p:nvPicPr>
-          <p:cNvPr id="107" name="Graphic 106" descr="Sleep with solid fill">
-            <a:extLst>
-              <a:ext uri="{FF2B5EF4-FFF2-40B4-BE49-F238E27FC236}">
-                <a16:creationId xmlns:a16="http://schemas.microsoft.com/office/drawing/2014/main" id="{27218173-AA79-9F4E-1B8A-F75DFF288DD0}"/>
-              </a:ext>
-            </a:extLst>
-          </p:cNvPr>
-          <p:cNvPicPr>
-            <a:picLocks noChangeAspect="1"/>
-          </p:cNvPicPr>
-          <p:nvPr/>
-        </p:nvPicPr>
-        <p:blipFill>
-          <a:blip>
-            <a:extLst>
-              <a:ext uri="{96DAC541-7B7A-43D3-8B79-37D633B846F1}">
-                <asvg:svgBlip xmlns:asvg="http://schemas.microsoft.com/office/drawing/2016/SVG/main" r:embed="rId2"/>
-              </a:ext>
-            </a:extLst>
-          </a:blip>
-          <a:srcRect/>
-          <a:stretch/>
-        </p:blipFill>
-        <p:spPr>
-          <a:xfrm>
-            <a:off x="9781876" y="4122861"/>
-            <a:ext cx="634696" cy="634696"/>
-          </a:xfrm>
-          <a:prstGeom prst="rect">
-            <a:avLst/>
-          </a:prstGeom>
-        </p:spPr>
-      </p:pic>
-      <p:pic>
-        <p:nvPicPr>
-          <p:cNvPr id="108" name="Graphic 107" descr="Sleep with solid fill">
-            <a:extLst>
-              <a:ext uri="{FF2B5EF4-FFF2-40B4-BE49-F238E27FC236}">
-                <a16:creationId xmlns:a16="http://schemas.microsoft.com/office/drawing/2014/main" id="{21CB499C-6743-6AD9-1242-F14A64EE9E47}"/>
-              </a:ext>
-            </a:extLst>
-          </p:cNvPr>
-          <p:cNvPicPr>
-            <a:picLocks noChangeAspect="1"/>
-          </p:cNvPicPr>
-          <p:nvPr/>
-        </p:nvPicPr>
-        <p:blipFill>
-          <a:blip>
-            <a:extLst>
-              <a:ext uri="{96DAC541-7B7A-43D3-8B79-37D633B846F1}">
-                <asvg:svgBlip xmlns:asvg="http://schemas.microsoft.com/office/drawing/2016/SVG/main" r:embed="rId2"/>
-              </a:ext>
-            </a:extLst>
-          </a:blip>
-          <a:srcRect/>
-          <a:stretch/>
-        </p:blipFill>
-        <p:spPr>
-          <a:xfrm>
-            <a:off x="10847708" y="4122861"/>
-            <a:ext cx="634696" cy="634696"/>
-          </a:xfrm>
-          <a:prstGeom prst="rect">
-            <a:avLst/>
-          </a:prstGeom>
-        </p:spPr>
-      </p:pic>
-      <p:pic>
-        <p:nvPicPr>
-          <p:cNvPr id="109" name="Graphic 108" descr="Sleep with solid fill">
-            <a:extLst>
-              <a:ext uri="{FF2B5EF4-FFF2-40B4-BE49-F238E27FC236}">
-                <a16:creationId xmlns:a16="http://schemas.microsoft.com/office/drawing/2014/main" id="{50911D71-53A5-CA15-21A2-0A68B5B64EA0}"/>
-              </a:ext>
-            </a:extLst>
-          </p:cNvPr>
-          <p:cNvPicPr>
-            <a:picLocks noChangeAspect="1"/>
-          </p:cNvPicPr>
-          <p:nvPr/>
-        </p:nvPicPr>
-        <p:blipFill>
-          <a:blip>
-            <a:extLst>
-              <a:ext uri="{96DAC541-7B7A-43D3-8B79-37D633B846F1}">
-                <asvg:svgBlip xmlns:asvg="http://schemas.microsoft.com/office/drawing/2016/SVG/main" r:embed="rId2"/>
-              </a:ext>
-            </a:extLst>
-          </a:blip>
-          <a:srcRect/>
-          <a:stretch/>
-        </p:blipFill>
-        <p:spPr>
-          <a:xfrm>
-            <a:off x="9781876" y="4961950"/>
-            <a:ext cx="634696" cy="634696"/>
-          </a:xfrm>
-          <a:prstGeom prst="rect">
-            <a:avLst/>
-          </a:prstGeom>
-        </p:spPr>
-      </p:pic>
-      <p:pic>
-        <p:nvPicPr>
-          <p:cNvPr id="110" name="Graphic 109" descr="Sleep with solid fill">
-            <a:extLst>
-              <a:ext uri="{FF2B5EF4-FFF2-40B4-BE49-F238E27FC236}">
-                <a16:creationId xmlns:a16="http://schemas.microsoft.com/office/drawing/2014/main" id="{62B766FB-5971-265E-CB42-BF975EDE4F1B}"/>
-              </a:ext>
-            </a:extLst>
-          </p:cNvPr>
-          <p:cNvPicPr>
-            <a:picLocks noChangeAspect="1"/>
-          </p:cNvPicPr>
-          <p:nvPr/>
-        </p:nvPicPr>
-        <p:blipFill>
-          <a:blip>
-            <a:extLst>
-              <a:ext uri="{96DAC541-7B7A-43D3-8B79-37D633B846F1}">
-                <asvg:svgBlip xmlns:asvg="http://schemas.microsoft.com/office/drawing/2016/SVG/main" r:embed="rId2"/>
-              </a:ext>
-            </a:extLst>
-          </a:blip>
-          <a:srcRect/>
-          <a:stretch/>
-        </p:blipFill>
-        <p:spPr>
-          <a:xfrm>
-            <a:off x="10847708" y="4961950"/>
-            <a:ext cx="634696" cy="634696"/>
-          </a:xfrm>
-          <a:prstGeom prst="rect">
-            <a:avLst/>
-          </a:prstGeom>
-        </p:spPr>
-      </p:pic>
-      <p:pic>
-        <p:nvPicPr>
-          <p:cNvPr id="111" name="Graphic 110" descr="Sleep with solid fill">
-            <a:extLst>
-              <a:ext uri="{FF2B5EF4-FFF2-40B4-BE49-F238E27FC236}">
-                <a16:creationId xmlns:a16="http://schemas.microsoft.com/office/drawing/2014/main" id="{E8D03C45-9132-1072-3688-F5C4FB58A3C2}"/>
-              </a:ext>
-            </a:extLst>
-          </p:cNvPr>
-          <p:cNvPicPr>
-            <a:picLocks noChangeAspect="1"/>
-          </p:cNvPicPr>
-          <p:nvPr/>
-        </p:nvPicPr>
-        <p:blipFill>
-          <a:blip>
-            <a:extLst>
-              <a:ext uri="{96DAC541-7B7A-43D3-8B79-37D633B846F1}">
-                <asvg:svgBlip xmlns:asvg="http://schemas.microsoft.com/office/drawing/2016/SVG/main" r:embed="rId2"/>
-              </a:ext>
-            </a:extLst>
-          </a:blip>
-          <a:srcRect/>
-          <a:stretch/>
-        </p:blipFill>
-        <p:spPr>
-          <a:xfrm>
-            <a:off x="6737464" y="2395383"/>
-            <a:ext cx="634696" cy="634696"/>
-          </a:xfrm>
-          <a:prstGeom prst="rect">
-            <a:avLst/>
-          </a:prstGeom>
-        </p:spPr>
-      </p:pic>
-      <p:pic>
-        <p:nvPicPr>
-          <p:cNvPr id="112" name="Graphic 111" descr="Sleep with solid fill">
-            <a:extLst>
-              <a:ext uri="{FF2B5EF4-FFF2-40B4-BE49-F238E27FC236}">
-                <a16:creationId xmlns:a16="http://schemas.microsoft.com/office/drawing/2014/main" id="{E59FD0F6-04F1-E545-9212-75836CAE3E5A}"/>
-              </a:ext>
-            </a:extLst>
-          </p:cNvPr>
-          <p:cNvPicPr>
-            <a:picLocks noChangeAspect="1"/>
-          </p:cNvPicPr>
-          <p:nvPr/>
-        </p:nvPicPr>
-        <p:blipFill>
-          <a:blip>
-            <a:extLst>
-              <a:ext uri="{96DAC541-7B7A-43D3-8B79-37D633B846F1}">
-                <asvg:svgBlip xmlns:asvg="http://schemas.microsoft.com/office/drawing/2016/SVG/main" r:embed="rId2"/>
-              </a:ext>
-            </a:extLst>
-          </a:blip>
-          <a:srcRect/>
-          <a:stretch/>
-        </p:blipFill>
-        <p:spPr>
-          <a:xfrm>
-            <a:off x="7803296" y="2395383"/>
-            <a:ext cx="634696" cy="634696"/>
-          </a:xfrm>
-          <a:prstGeom prst="rect">
-            <a:avLst/>
-          </a:prstGeom>
-        </p:spPr>
-      </p:pic>
-      <p:pic>
-        <p:nvPicPr>
-          <p:cNvPr id="113" name="Graphic 112" descr="Sleep with solid fill">
-            <a:extLst>
-              <a:ext uri="{FF2B5EF4-FFF2-40B4-BE49-F238E27FC236}">
-                <a16:creationId xmlns:a16="http://schemas.microsoft.com/office/drawing/2014/main" id="{E9996DB9-CF99-F34F-D079-60127A813863}"/>
-              </a:ext>
-            </a:extLst>
-          </p:cNvPr>
-          <p:cNvPicPr>
-            <a:picLocks noChangeAspect="1"/>
-          </p:cNvPicPr>
-          <p:nvPr/>
-        </p:nvPicPr>
-        <p:blipFill>
-          <a:blip>
-            <a:extLst>
-              <a:ext uri="{96DAC541-7B7A-43D3-8B79-37D633B846F1}">
-                <asvg:svgBlip xmlns:asvg="http://schemas.microsoft.com/office/drawing/2016/SVG/main" r:embed="rId2"/>
-              </a:ext>
-            </a:extLst>
-          </a:blip>
-          <a:srcRect/>
-          <a:stretch/>
-        </p:blipFill>
-        <p:spPr>
-          <a:xfrm>
-            <a:off x="6737464" y="3234472"/>
-            <a:ext cx="634696" cy="634696"/>
-          </a:xfrm>
-          <a:prstGeom prst="rect">
-            <a:avLst/>
-          </a:prstGeom>
-        </p:spPr>
-      </p:pic>
-      <p:pic>
-        <p:nvPicPr>
-          <p:cNvPr id="114" name="Graphic 113" descr="Sleep with solid fill">
-            <a:extLst>
-              <a:ext uri="{FF2B5EF4-FFF2-40B4-BE49-F238E27FC236}">
-                <a16:creationId xmlns:a16="http://schemas.microsoft.com/office/drawing/2014/main" id="{EAE826CE-B35C-82C7-8058-26FE877BA355}"/>
-              </a:ext>
-            </a:extLst>
-          </p:cNvPr>
-          <p:cNvPicPr>
-            <a:picLocks noChangeAspect="1"/>
-          </p:cNvPicPr>
-          <p:nvPr/>
-        </p:nvPicPr>
-        <p:blipFill>
-          <a:blip>
-            <a:extLst>
-              <a:ext uri="{96DAC541-7B7A-43D3-8B79-37D633B846F1}">
-                <asvg:svgBlip xmlns:asvg="http://schemas.microsoft.com/office/drawing/2016/SVG/main" r:embed="rId2"/>
-              </a:ext>
-            </a:extLst>
-          </a:blip>
-          <a:srcRect/>
-          <a:stretch/>
-        </p:blipFill>
-        <p:spPr>
-          <a:xfrm>
-            <a:off x="7803296" y="3234472"/>
-            <a:ext cx="634696" cy="634696"/>
-          </a:xfrm>
-          <a:prstGeom prst="rect">
-            <a:avLst/>
-          </a:prstGeom>
-        </p:spPr>
-      </p:pic>
-      <p:pic>
-        <p:nvPicPr>
-          <p:cNvPr id="115" name="Graphic 114" descr="Sleep with solid fill">
-            <a:extLst>
-              <a:ext uri="{FF2B5EF4-FFF2-40B4-BE49-F238E27FC236}">
-                <a16:creationId xmlns:a16="http://schemas.microsoft.com/office/drawing/2014/main" id="{EE050118-D09E-D2B2-2211-E89BC705C0D0}"/>
-              </a:ext>
-            </a:extLst>
-          </p:cNvPr>
-          <p:cNvPicPr>
-            <a:picLocks noChangeAspect="1"/>
-          </p:cNvPicPr>
-          <p:nvPr/>
-        </p:nvPicPr>
-        <p:blipFill>
-          <a:blip>
-            <a:extLst>
-              <a:ext uri="{96DAC541-7B7A-43D3-8B79-37D633B846F1}">
-                <asvg:svgBlip xmlns:asvg="http://schemas.microsoft.com/office/drawing/2016/SVG/main" r:embed="rId2"/>
-              </a:ext>
-            </a:extLst>
-          </a:blip>
-          <a:srcRect/>
-          <a:stretch/>
-        </p:blipFill>
-        <p:spPr>
-          <a:xfrm>
-            <a:off x="6737464" y="4073560"/>
-            <a:ext cx="634696" cy="634696"/>
-          </a:xfrm>
-          <a:prstGeom prst="rect">
-            <a:avLst/>
-          </a:prstGeom>
-        </p:spPr>
-      </p:pic>
-      <p:pic>
-        <p:nvPicPr>
-          <p:cNvPr id="116" name="Graphic 115" descr="Sleep with solid fill">
-            <a:extLst>
-              <a:ext uri="{FF2B5EF4-FFF2-40B4-BE49-F238E27FC236}">
-                <a16:creationId xmlns:a16="http://schemas.microsoft.com/office/drawing/2014/main" id="{7E93134E-36F2-C3E3-093B-E9E02235D469}"/>
-              </a:ext>
-            </a:extLst>
-          </p:cNvPr>
-          <p:cNvPicPr>
-            <a:picLocks noChangeAspect="1"/>
-          </p:cNvPicPr>
-          <p:nvPr/>
-        </p:nvPicPr>
-        <p:blipFill>
-          <a:blip>
-            <a:extLst>
-              <a:ext uri="{96DAC541-7B7A-43D3-8B79-37D633B846F1}">
-                <asvg:svgBlip xmlns:asvg="http://schemas.microsoft.com/office/drawing/2016/SVG/main" r:embed="rId2"/>
-              </a:ext>
-            </a:extLst>
-          </a:blip>
-          <a:srcRect/>
-          <a:stretch/>
-        </p:blipFill>
-        <p:spPr>
-          <a:xfrm>
-            <a:off x="7803296" y="4073560"/>
-            <a:ext cx="634696" cy="634696"/>
-          </a:xfrm>
-          <a:prstGeom prst="rect">
-            <a:avLst/>
-          </a:prstGeom>
-        </p:spPr>
-      </p:pic>
-      <p:pic>
-        <p:nvPicPr>
-          <p:cNvPr id="117" name="Graphic 116" descr="Sleep with solid fill">
-            <a:extLst>
-              <a:ext uri="{FF2B5EF4-FFF2-40B4-BE49-F238E27FC236}">
-                <a16:creationId xmlns:a16="http://schemas.microsoft.com/office/drawing/2014/main" id="{E2D4395F-B040-069A-5F3D-8EB0B8CAD134}"/>
-              </a:ext>
-            </a:extLst>
-          </p:cNvPr>
-          <p:cNvPicPr>
-            <a:picLocks noChangeAspect="1"/>
-          </p:cNvPicPr>
-          <p:nvPr/>
-        </p:nvPicPr>
-        <p:blipFill>
-          <a:blip>
-            <a:extLst>
-              <a:ext uri="{96DAC541-7B7A-43D3-8B79-37D633B846F1}">
-                <asvg:svgBlip xmlns:asvg="http://schemas.microsoft.com/office/drawing/2016/SVG/main" r:embed="rId2"/>
-              </a:ext>
-            </a:extLst>
-          </a:blip>
-          <a:srcRect/>
-          <a:stretch/>
-        </p:blipFill>
-        <p:spPr>
-          <a:xfrm>
-            <a:off x="7232534" y="4912649"/>
-            <a:ext cx="634696" cy="634696"/>
-          </a:xfrm>
-          <a:prstGeom prst="rect">
-            <a:avLst/>
-          </a:prstGeom>
-        </p:spPr>
-      </p:pic>
-      <p:pic>
-        <p:nvPicPr>
-          <p:cNvPr id="142" name="Graphic 141" descr="Sleep with solid fill">
-            <a:extLst>
-              <a:ext uri="{FF2B5EF4-FFF2-40B4-BE49-F238E27FC236}">
-                <a16:creationId xmlns:a16="http://schemas.microsoft.com/office/drawing/2014/main" id="{12C859E8-CB0A-55FE-8B06-CED031746262}"/>
-              </a:ext>
-            </a:extLst>
-          </p:cNvPr>
-          <p:cNvPicPr>
-            <a:picLocks noChangeAspect="1"/>
-          </p:cNvPicPr>
-          <p:nvPr/>
-        </p:nvPicPr>
-        <p:blipFill>
-          <a:blip>
-            <a:extLst>
-              <a:ext uri="{96DAC541-7B7A-43D3-8B79-37D633B846F1}">
-                <asvg:svgBlip xmlns:asvg="http://schemas.microsoft.com/office/drawing/2016/SVG/main" r:embed="rId2"/>
-              </a:ext>
-            </a:extLst>
-          </a:blip>
-          <a:srcRect/>
-          <a:stretch/>
-        </p:blipFill>
-        <p:spPr>
-          <a:xfrm>
-            <a:off x="4256446" y="2056368"/>
-            <a:ext cx="634696" cy="634696"/>
-          </a:xfrm>
-          <a:prstGeom prst="rect">
-            <a:avLst/>
-          </a:prstGeom>
-        </p:spPr>
-      </p:pic>
-    </p:spTree>
-    <p:extLst>
-      <p:ext uri="{BB962C8B-B14F-4D97-AF65-F5344CB8AC3E}">
-        <p14:creationId xmlns:p14="http://schemas.microsoft.com/office/powerpoint/2010/main" val="297406800"/>
-      </p:ext>
-    </p:extLst>
-  </p:cSld>
-  <p:clrMapOvr>
-    <a:masterClrMapping/>
-  </p:clrMapOvr>
-</p:sld>
-</file>
-
-<file path=ppt/slides/slide3.xml><?xml version="1.0" encoding="utf-8"?>
-<p:sld xmlns:a="http://schemas.openxmlformats.org/drawingml/2006/main" xmlns:r="http://schemas.openxmlformats.org/officeDocument/2006/relationships" xmlns:p="http://schemas.openxmlformats.org/presentationml/2006/main">
-  <p:cSld>
-    <p:spTree>
-      <p:nvGrpSpPr>
-        <p:cNvPr id="1" name="">
-          <a:extLst>
-            <a:ext uri="{FF2B5EF4-FFF2-40B4-BE49-F238E27FC236}">
-              <a16:creationId xmlns:a16="http://schemas.microsoft.com/office/drawing/2014/main" id="{624B05B7-C9FA-3786-F656-B25DEBDDA91D}"/>
-            </a:ext>
-          </a:extLst>
-        </p:cNvPr>
-        <p:cNvGrpSpPr/>
-        <p:nvPr/>
-      </p:nvGrpSpPr>
-      <p:grpSpPr>
-        <a:xfrm>
-          <a:off x="0" y="0"/>
-          <a:ext cx="0" cy="0"/>
-          <a:chOff x="0" y="0"/>
-          <a:chExt cx="0" cy="0"/>
-        </a:xfrm>
-      </p:grpSpPr>
-      <p:sp>
-        <p:nvSpPr>
-          <p:cNvPr id="4" name="Rounded Rectangle 3">
-            <a:extLst>
-              <a:ext uri="{FF2B5EF4-FFF2-40B4-BE49-F238E27FC236}">
-                <a16:creationId xmlns:a16="http://schemas.microsoft.com/office/drawing/2014/main" id="{BC3963E3-576A-F7BE-5668-4A616BFC4E3B}"/>
-              </a:ext>
-            </a:extLst>
-          </p:cNvPr>
-          <p:cNvSpPr/>
-          <p:nvPr/>
-        </p:nvSpPr>
-        <p:spPr>
-          <a:xfrm>
-            <a:off x="225912" y="1172583"/>
-            <a:ext cx="5681830" cy="5228213"/>
-          </a:xfrm>
-          <a:prstGeom prst="roundRect">
-            <a:avLst>
-              <a:gd name="adj" fmla="val 2957"/>
-            </a:avLst>
-          </a:prstGeom>
-          <a:solidFill>
-            <a:schemeClr val="bg2"/>
-          </a:solidFill>
-          <a:ln w="38100"/>
-        </p:spPr>
-        <p:style>
-          <a:lnRef idx="2">
-            <a:schemeClr val="accent1">
-              <a:shade val="15000"/>
-            </a:schemeClr>
-          </a:lnRef>
-          <a:fillRef idx="1">
-            <a:schemeClr val="accent1"/>
-          </a:fillRef>
-          <a:effectRef idx="0">
-            <a:schemeClr val="accent1"/>
-          </a:effectRef>
-          <a:fontRef idx="minor">
-            <a:schemeClr val="lt1"/>
-          </a:fontRef>
-        </p:style>
-        <p:txBody>
-          <a:bodyPr rtlCol="0" anchor="ctr"/>
-          <a:lstStyle/>
-          <a:p>
-            <a:pPr algn="ctr"/>
-            <a:endParaRPr lang="en-US"/>
-          </a:p>
-        </p:txBody>
-      </p:sp>
-      <p:sp>
-        <p:nvSpPr>
-          <p:cNvPr id="145" name="Rounded Rectangle 144">
-            <a:extLst>
-              <a:ext uri="{FF2B5EF4-FFF2-40B4-BE49-F238E27FC236}">
-                <a16:creationId xmlns:a16="http://schemas.microsoft.com/office/drawing/2014/main" id="{A99D050C-B7CE-8CCE-783C-7C95B4F74CDA}"/>
-              </a:ext>
-            </a:extLst>
-          </p:cNvPr>
-          <p:cNvSpPr/>
-          <p:nvPr/>
-        </p:nvSpPr>
-        <p:spPr>
-          <a:xfrm>
-            <a:off x="6253780" y="1172581"/>
-            <a:ext cx="5681830" cy="5228213"/>
-          </a:xfrm>
-          <a:prstGeom prst="roundRect">
-            <a:avLst>
-              <a:gd name="adj" fmla="val 2957"/>
-            </a:avLst>
-          </a:prstGeom>
-          <a:solidFill>
-            <a:schemeClr val="bg2"/>
-          </a:solidFill>
-          <a:ln w="38100"/>
-        </p:spPr>
-        <p:style>
-          <a:lnRef idx="2">
-            <a:schemeClr val="accent1">
-              <a:shade val="15000"/>
-            </a:schemeClr>
-          </a:lnRef>
-          <a:fillRef idx="1">
-            <a:schemeClr val="accent1"/>
-          </a:fillRef>
-          <a:effectRef idx="0">
-            <a:schemeClr val="accent1"/>
-          </a:effectRef>
-          <a:fontRef idx="minor">
-            <a:schemeClr val="lt1"/>
-          </a:fontRef>
-        </p:style>
-        <p:txBody>
-          <a:bodyPr rtlCol="0" anchor="ctr"/>
-          <a:lstStyle/>
-          <a:p>
-            <a:pPr algn="ctr"/>
-            <a:endParaRPr lang="en-US"/>
-          </a:p>
-        </p:txBody>
-      </p:sp>
-      <p:sp>
-        <p:nvSpPr>
-          <p:cNvPr id="2" name="Rounded Rectangle 1">
-            <a:extLst>
-              <a:ext uri="{FF2B5EF4-FFF2-40B4-BE49-F238E27FC236}">
-                <a16:creationId xmlns:a16="http://schemas.microsoft.com/office/drawing/2014/main" id="{20D4D795-4C7A-A932-FA84-32A64BA52F12}"/>
-              </a:ext>
-            </a:extLst>
-          </p:cNvPr>
-          <p:cNvSpPr/>
-          <p:nvPr/>
-        </p:nvSpPr>
-        <p:spPr>
-          <a:xfrm>
-            <a:off x="430306" y="1904125"/>
-            <a:ext cx="2248348" cy="701923"/>
-          </a:xfrm>
-          <a:prstGeom prst="roundRect">
-            <a:avLst>
-              <a:gd name="adj" fmla="val 36591"/>
-            </a:avLst>
-          </a:prstGeom>
-          <a:solidFill>
-            <a:srgbClr val="00B0F0">
-              <a:alpha val="25714"/>
-            </a:srgbClr>
-          </a:solidFill>
-          <a:ln w="34925">
-            <a:solidFill>
-              <a:srgbClr val="0070C0"/>
-            </a:solidFill>
-          </a:ln>
-        </p:spPr>
-        <p:style>
-          <a:lnRef idx="2">
-            <a:schemeClr val="accent1">
-              <a:shade val="15000"/>
-            </a:schemeClr>
-          </a:lnRef>
-          <a:fillRef idx="1">
-            <a:schemeClr val="accent1"/>
-          </a:fillRef>
-          <a:effectRef idx="0">
-            <a:schemeClr val="accent1"/>
-          </a:effectRef>
-          <a:fontRef idx="minor">
-            <a:schemeClr val="lt1"/>
-          </a:fontRef>
-        </p:style>
-        <p:txBody>
-          <a:bodyPr rtlCol="0" anchor="ctr"/>
-          <a:lstStyle/>
-          <a:p>
-            <a:pPr algn="ctr"/>
-            <a:endParaRPr lang="en-US"/>
-          </a:p>
-        </p:txBody>
-      </p:sp>
-      <p:sp>
-        <p:nvSpPr>
-          <p:cNvPr id="3" name="Rounded Rectangle 2">
-            <a:extLst>
-              <a:ext uri="{FF2B5EF4-FFF2-40B4-BE49-F238E27FC236}">
-                <a16:creationId xmlns:a16="http://schemas.microsoft.com/office/drawing/2014/main" id="{1D786CA2-3F1A-82CF-A114-A269FCEC2DE6}"/>
-              </a:ext>
-            </a:extLst>
-          </p:cNvPr>
-          <p:cNvSpPr/>
-          <p:nvPr/>
-        </p:nvSpPr>
-        <p:spPr>
-          <a:xfrm>
-            <a:off x="430306" y="2751274"/>
-            <a:ext cx="2248348" cy="701923"/>
-          </a:xfrm>
-          <a:prstGeom prst="roundRect">
-            <a:avLst>
-              <a:gd name="adj" fmla="val 36591"/>
-            </a:avLst>
-          </a:prstGeom>
-          <a:solidFill>
-            <a:srgbClr val="00B0F0">
-              <a:alpha val="25714"/>
-            </a:srgbClr>
-          </a:solidFill>
-          <a:ln w="34925">
-            <a:solidFill>
-              <a:srgbClr val="0070C0"/>
-            </a:solidFill>
-          </a:ln>
-        </p:spPr>
-        <p:style>
-          <a:lnRef idx="2">
-            <a:schemeClr val="accent1">
-              <a:shade val="15000"/>
-            </a:schemeClr>
-          </a:lnRef>
-          <a:fillRef idx="1">
-            <a:schemeClr val="accent1"/>
-          </a:fillRef>
-          <a:effectRef idx="0">
-            <a:schemeClr val="accent1"/>
-          </a:effectRef>
-          <a:fontRef idx="minor">
-            <a:schemeClr val="lt1"/>
-          </a:fontRef>
-        </p:style>
-        <p:txBody>
-          <a:bodyPr rtlCol="0" anchor="ctr"/>
-          <a:lstStyle/>
-          <a:p>
-            <a:pPr algn="ctr"/>
-            <a:endParaRPr lang="en-US"/>
-          </a:p>
-        </p:txBody>
-      </p:sp>
-      <p:sp>
-        <p:nvSpPr>
-          <p:cNvPr id="5" name="Rounded Rectangle 4">
-            <a:extLst>
-              <a:ext uri="{FF2B5EF4-FFF2-40B4-BE49-F238E27FC236}">
-                <a16:creationId xmlns:a16="http://schemas.microsoft.com/office/drawing/2014/main" id="{9FF7AD4B-54AE-37D2-13A9-211F8581E5C5}"/>
-              </a:ext>
-            </a:extLst>
-          </p:cNvPr>
-          <p:cNvSpPr/>
-          <p:nvPr/>
-        </p:nvSpPr>
-        <p:spPr>
-          <a:xfrm>
-            <a:off x="430306" y="3878586"/>
-            <a:ext cx="2248348" cy="701923"/>
-          </a:xfrm>
-          <a:prstGeom prst="roundRect">
-            <a:avLst>
-              <a:gd name="adj" fmla="val 36591"/>
-            </a:avLst>
-          </a:prstGeom>
-          <a:solidFill>
-            <a:srgbClr val="00B0F0">
-              <a:alpha val="25714"/>
-            </a:srgbClr>
-          </a:solidFill>
-          <a:ln w="34925">
-            <a:solidFill>
-              <a:srgbClr val="0070C0"/>
-            </a:solidFill>
-          </a:ln>
-        </p:spPr>
-        <p:style>
-          <a:lnRef idx="2">
-            <a:schemeClr val="accent1">
-              <a:shade val="15000"/>
-            </a:schemeClr>
-          </a:lnRef>
-          <a:fillRef idx="1">
-            <a:schemeClr val="accent1"/>
-          </a:fillRef>
-          <a:effectRef idx="0">
-            <a:schemeClr val="accent1"/>
-          </a:effectRef>
-          <a:fontRef idx="minor">
-            <a:schemeClr val="lt1"/>
-          </a:fontRef>
-        </p:style>
-        <p:txBody>
-          <a:bodyPr rtlCol="0" anchor="ctr"/>
-          <a:lstStyle/>
-          <a:p>
-            <a:pPr algn="ctr"/>
-            <a:endParaRPr lang="en-US"/>
-          </a:p>
-        </p:txBody>
-      </p:sp>
-      <p:sp>
-        <p:nvSpPr>
-          <p:cNvPr id="6" name="Rounded Rectangle 5">
-            <a:extLst>
-              <a:ext uri="{FF2B5EF4-FFF2-40B4-BE49-F238E27FC236}">
-                <a16:creationId xmlns:a16="http://schemas.microsoft.com/office/drawing/2014/main" id="{9E20224F-D07B-8658-4226-015587740097}"/>
-              </a:ext>
-            </a:extLst>
-          </p:cNvPr>
-          <p:cNvSpPr/>
-          <p:nvPr/>
-        </p:nvSpPr>
-        <p:spPr>
-          <a:xfrm>
-            <a:off x="430306" y="4745450"/>
-            <a:ext cx="2248348" cy="701923"/>
-          </a:xfrm>
-          <a:prstGeom prst="roundRect">
-            <a:avLst>
-              <a:gd name="adj" fmla="val 36591"/>
-            </a:avLst>
-          </a:prstGeom>
-          <a:solidFill>
-            <a:srgbClr val="00B0F0">
-              <a:alpha val="25714"/>
-            </a:srgbClr>
-          </a:solidFill>
-          <a:ln w="34925">
-            <a:solidFill>
-              <a:srgbClr val="0070C0"/>
-            </a:solidFill>
-          </a:ln>
-        </p:spPr>
-        <p:style>
-          <a:lnRef idx="2">
-            <a:schemeClr val="accent1">
-              <a:shade val="15000"/>
-            </a:schemeClr>
-          </a:lnRef>
-          <a:fillRef idx="1">
-            <a:schemeClr val="accent1"/>
-          </a:fillRef>
-          <a:effectRef idx="0">
-            <a:schemeClr val="accent1"/>
-          </a:effectRef>
-          <a:fontRef idx="minor">
-            <a:schemeClr val="lt1"/>
-          </a:fontRef>
-        </p:style>
-        <p:txBody>
-          <a:bodyPr rtlCol="0" anchor="ctr"/>
-          <a:lstStyle/>
-          <a:p>
-            <a:pPr algn="ctr"/>
-            <a:endParaRPr lang="en-US"/>
-          </a:p>
-        </p:txBody>
-      </p:sp>
-      <p:sp>
-        <p:nvSpPr>
-          <p:cNvPr id="7" name="Rounded Rectangle 6">
-            <a:extLst>
-              <a:ext uri="{FF2B5EF4-FFF2-40B4-BE49-F238E27FC236}">
-                <a16:creationId xmlns:a16="http://schemas.microsoft.com/office/drawing/2014/main" id="{3435FA62-3CD9-7531-357C-33B3337ECDFA}"/>
-              </a:ext>
-            </a:extLst>
-          </p:cNvPr>
-          <p:cNvSpPr/>
-          <p:nvPr/>
-        </p:nvSpPr>
-        <p:spPr>
-          <a:xfrm>
-            <a:off x="3449620" y="2992004"/>
-            <a:ext cx="2248348" cy="701923"/>
-          </a:xfrm>
-          <a:prstGeom prst="roundRect">
-            <a:avLst>
-              <a:gd name="adj" fmla="val 36591"/>
-            </a:avLst>
-          </a:prstGeom>
-          <a:solidFill>
-            <a:srgbClr val="00B0F0">
-              <a:alpha val="25714"/>
-            </a:srgbClr>
-          </a:solidFill>
-          <a:ln w="34925">
-            <a:solidFill>
-              <a:srgbClr val="0070C0"/>
-            </a:solidFill>
-          </a:ln>
-        </p:spPr>
-        <p:style>
-          <a:lnRef idx="2">
-            <a:schemeClr val="accent1">
-              <a:shade val="15000"/>
-            </a:schemeClr>
-          </a:lnRef>
-          <a:fillRef idx="1">
-            <a:schemeClr val="accent1"/>
-          </a:fillRef>
-          <a:effectRef idx="0">
-            <a:schemeClr val="accent1"/>
-          </a:effectRef>
-          <a:fontRef idx="minor">
-            <a:schemeClr val="lt1"/>
-          </a:fontRef>
-        </p:style>
-        <p:txBody>
-          <a:bodyPr rtlCol="0" anchor="ctr"/>
-          <a:lstStyle/>
-          <a:p>
-            <a:pPr algn="ctr"/>
-            <a:endParaRPr lang="en-US"/>
-          </a:p>
-        </p:txBody>
-      </p:sp>
-      <p:sp>
-        <p:nvSpPr>
-          <p:cNvPr id="8" name="Rounded Rectangle 7">
-            <a:extLst>
-              <a:ext uri="{FF2B5EF4-FFF2-40B4-BE49-F238E27FC236}">
-                <a16:creationId xmlns:a16="http://schemas.microsoft.com/office/drawing/2014/main" id="{656F6CCC-F702-1DF2-F9CB-DAE49A9E0BCC}"/>
-              </a:ext>
-            </a:extLst>
-          </p:cNvPr>
-          <p:cNvSpPr/>
-          <p:nvPr/>
-        </p:nvSpPr>
-        <p:spPr>
-          <a:xfrm>
-            <a:off x="3449620" y="3861990"/>
-            <a:ext cx="2248348" cy="701923"/>
-          </a:xfrm>
-          <a:prstGeom prst="roundRect">
-            <a:avLst>
-              <a:gd name="adj" fmla="val 36591"/>
-            </a:avLst>
-          </a:prstGeom>
-          <a:solidFill>
-            <a:srgbClr val="00B0F0">
-              <a:alpha val="25714"/>
-            </a:srgbClr>
-          </a:solidFill>
-          <a:ln w="34925">
-            <a:solidFill>
-              <a:srgbClr val="0070C0"/>
-            </a:solidFill>
-          </a:ln>
-        </p:spPr>
-        <p:style>
-          <a:lnRef idx="2">
-            <a:schemeClr val="accent1">
-              <a:shade val="15000"/>
-            </a:schemeClr>
-          </a:lnRef>
-          <a:fillRef idx="1">
-            <a:schemeClr val="accent1"/>
-          </a:fillRef>
-          <a:effectRef idx="0">
-            <a:schemeClr val="accent1"/>
-          </a:effectRef>
-          <a:fontRef idx="minor">
-            <a:schemeClr val="lt1"/>
-          </a:fontRef>
-        </p:style>
-        <p:txBody>
-          <a:bodyPr rtlCol="0" anchor="ctr"/>
-          <a:lstStyle/>
-          <a:p>
-            <a:pPr algn="ctr"/>
-            <a:endParaRPr lang="en-US"/>
-          </a:p>
-        </p:txBody>
-      </p:sp>
-      <p:sp>
-        <p:nvSpPr>
-          <p:cNvPr id="9" name="Rounded Rectangle 8">
-            <a:extLst>
-              <a:ext uri="{FF2B5EF4-FFF2-40B4-BE49-F238E27FC236}">
-                <a16:creationId xmlns:a16="http://schemas.microsoft.com/office/drawing/2014/main" id="{3DE66560-3981-EE9E-9DDF-31CAC955EDBC}"/>
-              </a:ext>
-            </a:extLst>
-          </p:cNvPr>
-          <p:cNvSpPr/>
-          <p:nvPr/>
-        </p:nvSpPr>
-        <p:spPr>
-          <a:xfrm>
-            <a:off x="3449620" y="4699712"/>
-            <a:ext cx="2248348" cy="1571996"/>
-          </a:xfrm>
-          <a:prstGeom prst="roundRect">
-            <a:avLst>
-              <a:gd name="adj" fmla="val 36591"/>
-            </a:avLst>
-          </a:prstGeom>
-          <a:solidFill>
-            <a:srgbClr val="00B0F0">
-              <a:alpha val="25714"/>
-            </a:srgbClr>
-          </a:solidFill>
-          <a:ln w="34925">
-            <a:solidFill>
-              <a:srgbClr val="0070C0"/>
-            </a:solidFill>
-          </a:ln>
-        </p:spPr>
-        <p:style>
-          <a:lnRef idx="2">
-            <a:schemeClr val="accent1">
-              <a:shade val="15000"/>
-            </a:schemeClr>
-          </a:lnRef>
-          <a:fillRef idx="1">
-            <a:schemeClr val="accent1"/>
-          </a:fillRef>
-          <a:effectRef idx="0">
-            <a:schemeClr val="accent1"/>
-          </a:effectRef>
-          <a:fontRef idx="minor">
-            <a:schemeClr val="lt1"/>
-          </a:fontRef>
-        </p:style>
-        <p:txBody>
-          <a:bodyPr rtlCol="0" anchor="ctr"/>
-          <a:lstStyle/>
-          <a:p>
-            <a:pPr algn="ctr"/>
-            <a:endParaRPr lang="en-US"/>
-          </a:p>
-        </p:txBody>
-      </p:sp>
-      <p:sp>
-        <p:nvSpPr>
-          <p:cNvPr id="10" name="Rounded Rectangle 9">
-            <a:extLst>
-              <a:ext uri="{FF2B5EF4-FFF2-40B4-BE49-F238E27FC236}">
-                <a16:creationId xmlns:a16="http://schemas.microsoft.com/office/drawing/2014/main" id="{B0C1396F-195F-00E8-13A1-67331B2EC1D1}"/>
-              </a:ext>
-            </a:extLst>
-          </p:cNvPr>
-          <p:cNvSpPr/>
-          <p:nvPr/>
-        </p:nvSpPr>
-        <p:spPr>
-          <a:xfrm>
-            <a:off x="6463554" y="2403919"/>
-            <a:ext cx="2248348" cy="701923"/>
-          </a:xfrm>
-          <a:prstGeom prst="roundRect">
-            <a:avLst>
-              <a:gd name="adj" fmla="val 36591"/>
-            </a:avLst>
-          </a:prstGeom>
-          <a:solidFill>
-            <a:srgbClr val="00B0F0">
-              <a:alpha val="25714"/>
-            </a:srgbClr>
-          </a:solidFill>
-          <a:ln w="34925">
-            <a:solidFill>
-              <a:srgbClr val="0070C0"/>
-            </a:solidFill>
-          </a:ln>
-        </p:spPr>
-        <p:style>
-          <a:lnRef idx="2">
-            <a:schemeClr val="accent1">
-              <a:shade val="15000"/>
-            </a:schemeClr>
-          </a:lnRef>
-          <a:fillRef idx="1">
-            <a:schemeClr val="accent1"/>
-          </a:fillRef>
-          <a:effectRef idx="0">
-            <a:schemeClr val="accent1"/>
-          </a:effectRef>
-          <a:fontRef idx="minor">
-            <a:schemeClr val="lt1"/>
-          </a:fontRef>
-        </p:style>
-        <p:txBody>
-          <a:bodyPr rtlCol="0" anchor="ctr"/>
-          <a:lstStyle/>
-          <a:p>
-            <a:pPr algn="ctr"/>
-            <a:endParaRPr lang="en-US"/>
-          </a:p>
-        </p:txBody>
-      </p:sp>
-      <p:sp>
-        <p:nvSpPr>
-          <p:cNvPr id="15" name="Rounded Rectangle 14">
-            <a:extLst>
-              <a:ext uri="{FF2B5EF4-FFF2-40B4-BE49-F238E27FC236}">
-                <a16:creationId xmlns:a16="http://schemas.microsoft.com/office/drawing/2014/main" id="{075A9F23-B0D9-73D0-1A1E-6CA27D78B00B}"/>
-              </a:ext>
-            </a:extLst>
-          </p:cNvPr>
-          <p:cNvSpPr/>
-          <p:nvPr/>
-        </p:nvSpPr>
-        <p:spPr>
-          <a:xfrm>
-            <a:off x="6463554" y="3234474"/>
-            <a:ext cx="2248348" cy="701923"/>
-          </a:xfrm>
-          <a:prstGeom prst="roundRect">
-            <a:avLst>
-              <a:gd name="adj" fmla="val 36591"/>
-            </a:avLst>
-          </a:prstGeom>
-          <a:solidFill>
-            <a:srgbClr val="00B0F0">
-              <a:alpha val="25714"/>
-            </a:srgbClr>
-          </a:solidFill>
-          <a:ln w="34925">
-            <a:solidFill>
-              <a:srgbClr val="0070C0"/>
-            </a:solidFill>
-          </a:ln>
-        </p:spPr>
-        <p:style>
-          <a:lnRef idx="2">
-            <a:schemeClr val="accent1">
-              <a:shade val="15000"/>
-            </a:schemeClr>
-          </a:lnRef>
-          <a:fillRef idx="1">
-            <a:schemeClr val="accent1"/>
-          </a:fillRef>
-          <a:effectRef idx="0">
-            <a:schemeClr val="accent1"/>
-          </a:effectRef>
-          <a:fontRef idx="minor">
-            <a:schemeClr val="lt1"/>
-          </a:fontRef>
-        </p:style>
-        <p:txBody>
-          <a:bodyPr rtlCol="0" anchor="ctr"/>
-          <a:lstStyle/>
-          <a:p>
-            <a:pPr algn="ctr"/>
-            <a:endParaRPr lang="en-US"/>
-          </a:p>
-        </p:txBody>
-      </p:sp>
-      <p:sp>
-        <p:nvSpPr>
-          <p:cNvPr id="16" name="Rounded Rectangle 15">
-            <a:extLst>
-              <a:ext uri="{FF2B5EF4-FFF2-40B4-BE49-F238E27FC236}">
-                <a16:creationId xmlns:a16="http://schemas.microsoft.com/office/drawing/2014/main" id="{4237114A-8BED-2365-3BCE-EAA96205EAFE}"/>
-              </a:ext>
-            </a:extLst>
-          </p:cNvPr>
-          <p:cNvSpPr/>
-          <p:nvPr/>
-        </p:nvSpPr>
-        <p:spPr>
-          <a:xfrm>
-            <a:off x="6463554" y="4064613"/>
-            <a:ext cx="2248348" cy="1548187"/>
-          </a:xfrm>
-          <a:prstGeom prst="roundRect">
-            <a:avLst>
-              <a:gd name="adj" fmla="val 36591"/>
-            </a:avLst>
-          </a:prstGeom>
-          <a:solidFill>
-            <a:srgbClr val="00B0F0">
-              <a:alpha val="25714"/>
-            </a:srgbClr>
-          </a:solidFill>
-          <a:ln w="34925">
-            <a:solidFill>
-              <a:srgbClr val="0070C0"/>
-            </a:solidFill>
-          </a:ln>
-        </p:spPr>
-        <p:style>
-          <a:lnRef idx="2">
-            <a:schemeClr val="accent1">
-              <a:shade val="15000"/>
-            </a:schemeClr>
-          </a:lnRef>
-          <a:fillRef idx="1">
-            <a:schemeClr val="accent1"/>
-          </a:fillRef>
-          <a:effectRef idx="0">
-            <a:schemeClr val="accent1"/>
-          </a:effectRef>
-          <a:fontRef idx="minor">
-            <a:schemeClr val="lt1"/>
-          </a:fontRef>
-        </p:style>
-        <p:txBody>
-          <a:bodyPr rtlCol="0" anchor="ctr"/>
-          <a:lstStyle/>
-          <a:p>
-            <a:pPr algn="ctr"/>
-            <a:endParaRPr lang="en-US"/>
-          </a:p>
-        </p:txBody>
-      </p:sp>
-      <p:sp>
-        <p:nvSpPr>
-          <p:cNvPr id="17" name="Rounded Rectangle 16">
-            <a:extLst>
-              <a:ext uri="{FF2B5EF4-FFF2-40B4-BE49-F238E27FC236}">
-                <a16:creationId xmlns:a16="http://schemas.microsoft.com/office/drawing/2014/main" id="{504EE2D8-E1AD-C050-1524-E390F7C500FE}"/>
-              </a:ext>
-            </a:extLst>
-          </p:cNvPr>
-          <p:cNvSpPr/>
-          <p:nvPr/>
-        </p:nvSpPr>
-        <p:spPr>
-          <a:xfrm>
-            <a:off x="9477488" y="2416899"/>
-            <a:ext cx="2248348" cy="701923"/>
-          </a:xfrm>
-          <a:prstGeom prst="roundRect">
-            <a:avLst>
-              <a:gd name="adj" fmla="val 36591"/>
-            </a:avLst>
-          </a:prstGeom>
-          <a:solidFill>
-            <a:srgbClr val="00B0F0">
-              <a:alpha val="25714"/>
-            </a:srgbClr>
-          </a:solidFill>
-          <a:ln w="34925">
-            <a:solidFill>
-              <a:srgbClr val="0070C0"/>
-            </a:solidFill>
-          </a:ln>
-        </p:spPr>
-        <p:style>
-          <a:lnRef idx="2">
-            <a:schemeClr val="accent1">
-              <a:shade val="15000"/>
-            </a:schemeClr>
-          </a:lnRef>
-          <a:fillRef idx="1">
-            <a:schemeClr val="accent1"/>
-          </a:fillRef>
-          <a:effectRef idx="0">
-            <a:schemeClr val="accent1"/>
-          </a:effectRef>
-          <a:fontRef idx="minor">
-            <a:schemeClr val="lt1"/>
-          </a:fontRef>
-        </p:style>
-        <p:txBody>
-          <a:bodyPr rtlCol="0" anchor="ctr"/>
-          <a:lstStyle/>
-          <a:p>
-            <a:pPr algn="ctr"/>
-            <a:endParaRPr lang="en-US"/>
-          </a:p>
-        </p:txBody>
-      </p:sp>
-      <p:sp>
-        <p:nvSpPr>
-          <p:cNvPr id="18" name="Rounded Rectangle 17">
-            <a:extLst>
-              <a:ext uri="{FF2B5EF4-FFF2-40B4-BE49-F238E27FC236}">
-                <a16:creationId xmlns:a16="http://schemas.microsoft.com/office/drawing/2014/main" id="{9735198A-D419-8B02-0E29-799E7B1F3158}"/>
-              </a:ext>
-            </a:extLst>
-          </p:cNvPr>
-          <p:cNvSpPr/>
-          <p:nvPr/>
-        </p:nvSpPr>
-        <p:spPr>
-          <a:xfrm>
-            <a:off x="9502587" y="3255988"/>
-            <a:ext cx="2248348" cy="701923"/>
-          </a:xfrm>
-          <a:prstGeom prst="roundRect">
-            <a:avLst>
-              <a:gd name="adj" fmla="val 36591"/>
-            </a:avLst>
-          </a:prstGeom>
-          <a:solidFill>
-            <a:srgbClr val="00B0F0">
-              <a:alpha val="25714"/>
-            </a:srgbClr>
-          </a:solidFill>
-          <a:ln w="34925">
-            <a:solidFill>
-              <a:srgbClr val="0070C0"/>
-            </a:solidFill>
-          </a:ln>
-        </p:spPr>
-        <p:style>
-          <a:lnRef idx="2">
-            <a:schemeClr val="accent1">
-              <a:shade val="15000"/>
-            </a:schemeClr>
-          </a:lnRef>
-          <a:fillRef idx="1">
-            <a:schemeClr val="accent1"/>
-          </a:fillRef>
-          <a:effectRef idx="0">
-            <a:schemeClr val="accent1"/>
-          </a:effectRef>
-          <a:fontRef idx="minor">
-            <a:schemeClr val="lt1"/>
-          </a:fontRef>
-        </p:style>
-        <p:txBody>
-          <a:bodyPr rtlCol="0" anchor="ctr"/>
-          <a:lstStyle/>
-          <a:p>
-            <a:pPr algn="ctr"/>
-            <a:endParaRPr lang="en-US"/>
-          </a:p>
-        </p:txBody>
-      </p:sp>
-      <p:sp>
-        <p:nvSpPr>
-          <p:cNvPr id="19" name="Rounded Rectangle 18">
-            <a:extLst>
-              <a:ext uri="{FF2B5EF4-FFF2-40B4-BE49-F238E27FC236}">
-                <a16:creationId xmlns:a16="http://schemas.microsoft.com/office/drawing/2014/main" id="{7E54CF8E-5EA5-B4F0-1D6E-16FB9617A4BC}"/>
-              </a:ext>
-            </a:extLst>
-          </p:cNvPr>
-          <p:cNvSpPr/>
-          <p:nvPr/>
-        </p:nvSpPr>
-        <p:spPr>
-          <a:xfrm>
-            <a:off x="9513346" y="4098211"/>
-            <a:ext cx="2248348" cy="701923"/>
-          </a:xfrm>
-          <a:prstGeom prst="roundRect">
-            <a:avLst>
-              <a:gd name="adj" fmla="val 36591"/>
-            </a:avLst>
-          </a:prstGeom>
-          <a:solidFill>
-            <a:srgbClr val="00B0F0">
-              <a:alpha val="25714"/>
-            </a:srgbClr>
-          </a:solidFill>
-          <a:ln w="34925">
-            <a:solidFill>
-              <a:srgbClr val="0070C0"/>
-            </a:solidFill>
-          </a:ln>
-        </p:spPr>
-        <p:style>
-          <a:lnRef idx="2">
-            <a:schemeClr val="accent1">
-              <a:shade val="15000"/>
-            </a:schemeClr>
-          </a:lnRef>
-          <a:fillRef idx="1">
-            <a:schemeClr val="accent1"/>
-          </a:fillRef>
-          <a:effectRef idx="0">
-            <a:schemeClr val="accent1"/>
-          </a:effectRef>
-          <a:fontRef idx="minor">
-            <a:schemeClr val="lt1"/>
-          </a:fontRef>
-        </p:style>
-        <p:txBody>
-          <a:bodyPr rtlCol="0" anchor="ctr"/>
-          <a:lstStyle/>
-          <a:p>
-            <a:pPr algn="ctr"/>
-            <a:endParaRPr lang="en-US"/>
-          </a:p>
-        </p:txBody>
-      </p:sp>
-      <p:sp>
-        <p:nvSpPr>
-          <p:cNvPr id="20" name="Rounded Rectangle 19">
-            <a:extLst>
-              <a:ext uri="{FF2B5EF4-FFF2-40B4-BE49-F238E27FC236}">
-                <a16:creationId xmlns:a16="http://schemas.microsoft.com/office/drawing/2014/main" id="{EDAEFAE7-D2EF-C390-D908-C76BFA4DF845}"/>
-              </a:ext>
-            </a:extLst>
-          </p:cNvPr>
-          <p:cNvSpPr/>
-          <p:nvPr/>
-        </p:nvSpPr>
-        <p:spPr>
-          <a:xfrm>
-            <a:off x="9513346" y="4961950"/>
-            <a:ext cx="2248348" cy="701923"/>
-          </a:xfrm>
-          <a:prstGeom prst="roundRect">
-            <a:avLst>
-              <a:gd name="adj" fmla="val 36591"/>
-            </a:avLst>
-          </a:prstGeom>
-          <a:solidFill>
-            <a:srgbClr val="00B0F0">
-              <a:alpha val="25714"/>
-            </a:srgbClr>
-          </a:solidFill>
-          <a:ln w="34925">
-            <a:solidFill>
-              <a:srgbClr val="0070C0"/>
-            </a:solidFill>
-          </a:ln>
-        </p:spPr>
-        <p:style>
-          <a:lnRef idx="2">
-            <a:schemeClr val="accent1">
-              <a:shade val="15000"/>
-            </a:schemeClr>
-          </a:lnRef>
-          <a:fillRef idx="1">
-            <a:schemeClr val="accent1"/>
-          </a:fillRef>
-          <a:effectRef idx="0">
-            <a:schemeClr val="accent1"/>
-          </a:effectRef>
-          <a:fontRef idx="minor">
-            <a:schemeClr val="lt1"/>
-          </a:fontRef>
-        </p:style>
-        <p:txBody>
-          <a:bodyPr rtlCol="0" anchor="ctr"/>
-          <a:lstStyle/>
-          <a:p>
-            <a:pPr algn="ctr"/>
-            <a:endParaRPr lang="en-US"/>
-          </a:p>
-        </p:txBody>
-      </p:sp>
-      <p:sp>
-        <p:nvSpPr>
-          <p:cNvPr id="21" name="Rounded Rectangle 20">
-            <a:extLst>
-              <a:ext uri="{FF2B5EF4-FFF2-40B4-BE49-F238E27FC236}">
-                <a16:creationId xmlns:a16="http://schemas.microsoft.com/office/drawing/2014/main" id="{56AEF6CA-6D61-8433-C7DF-CCA4741A2830}"/>
-              </a:ext>
-            </a:extLst>
-          </p:cNvPr>
-          <p:cNvSpPr/>
-          <p:nvPr/>
-        </p:nvSpPr>
-        <p:spPr>
-          <a:xfrm>
-            <a:off x="3910408" y="1282666"/>
-            <a:ext cx="1326772" cy="701923"/>
-          </a:xfrm>
-          <a:prstGeom prst="roundRect">
-            <a:avLst>
-              <a:gd name="adj" fmla="val 36591"/>
-            </a:avLst>
-          </a:prstGeom>
-          <a:solidFill>
-            <a:srgbClr val="00B0F0">
-              <a:alpha val="25714"/>
-            </a:srgbClr>
-          </a:solidFill>
-          <a:ln w="34925">
-            <a:solidFill>
-              <a:srgbClr val="0070C0"/>
-            </a:solidFill>
-          </a:ln>
-        </p:spPr>
-        <p:style>
-          <a:lnRef idx="2">
-            <a:schemeClr val="accent1">
-              <a:shade val="15000"/>
-            </a:schemeClr>
-          </a:lnRef>
-          <a:fillRef idx="1">
-            <a:schemeClr val="accent1"/>
-          </a:fillRef>
-          <a:effectRef idx="0">
-            <a:schemeClr val="accent1"/>
-          </a:effectRef>
-          <a:fontRef idx="minor">
-            <a:schemeClr val="lt1"/>
-          </a:fontRef>
-        </p:style>
-        <p:txBody>
-          <a:bodyPr rtlCol="0" anchor="ctr"/>
-          <a:lstStyle/>
-          <a:p>
-            <a:pPr algn="ctr"/>
-            <a:endParaRPr lang="en-US"/>
-          </a:p>
-        </p:txBody>
-      </p:sp>
-      <p:sp>
-        <p:nvSpPr>
-          <p:cNvPr id="22" name="Rounded Rectangle 21">
-            <a:extLst>
-              <a:ext uri="{FF2B5EF4-FFF2-40B4-BE49-F238E27FC236}">
-                <a16:creationId xmlns:a16="http://schemas.microsoft.com/office/drawing/2014/main" id="{58345935-D648-AAB7-31AA-6A0099819869}"/>
-              </a:ext>
-            </a:extLst>
-          </p:cNvPr>
-          <p:cNvSpPr/>
-          <p:nvPr/>
-        </p:nvSpPr>
-        <p:spPr>
-          <a:xfrm>
-            <a:off x="3910408" y="2076254"/>
-            <a:ext cx="1326772" cy="701923"/>
-          </a:xfrm>
-          <a:prstGeom prst="roundRect">
-            <a:avLst>
-              <a:gd name="adj" fmla="val 36591"/>
-            </a:avLst>
-          </a:prstGeom>
-          <a:solidFill>
-            <a:srgbClr val="00B0F0">
-              <a:alpha val="25714"/>
-            </a:srgbClr>
-          </a:solidFill>
-          <a:ln w="34925">
-            <a:solidFill>
-              <a:srgbClr val="0070C0"/>
-            </a:solidFill>
-          </a:ln>
-        </p:spPr>
-        <p:style>
-          <a:lnRef idx="2">
-            <a:schemeClr val="accent1">
-              <a:shade val="15000"/>
-            </a:schemeClr>
-          </a:lnRef>
-          <a:fillRef idx="1">
-            <a:schemeClr val="accent1"/>
-          </a:fillRef>
-          <a:effectRef idx="0">
-            <a:schemeClr val="accent1"/>
-          </a:effectRef>
-          <a:fontRef idx="minor">
-            <a:schemeClr val="lt1"/>
-          </a:fontRef>
-        </p:style>
-        <p:txBody>
-          <a:bodyPr rtlCol="0" anchor="ctr"/>
-          <a:lstStyle/>
-          <a:p>
-            <a:pPr algn="ctr"/>
-            <a:endParaRPr lang="en-US"/>
-          </a:p>
-        </p:txBody>
-      </p:sp>
-      <p:sp>
-        <p:nvSpPr>
-          <p:cNvPr id="24" name="Rounded Rectangle 23">
-            <a:extLst>
-              <a:ext uri="{FF2B5EF4-FFF2-40B4-BE49-F238E27FC236}">
-                <a16:creationId xmlns:a16="http://schemas.microsoft.com/office/drawing/2014/main" id="{EAF1E337-906A-D9B2-7556-C5CD27403FE9}"/>
-              </a:ext>
-            </a:extLst>
-          </p:cNvPr>
-          <p:cNvSpPr/>
-          <p:nvPr/>
-        </p:nvSpPr>
-        <p:spPr>
-          <a:xfrm>
-            <a:off x="6924342" y="1283366"/>
-            <a:ext cx="1326772" cy="701923"/>
-          </a:xfrm>
-          <a:prstGeom prst="roundRect">
-            <a:avLst>
-              <a:gd name="adj" fmla="val 36591"/>
-            </a:avLst>
-          </a:prstGeom>
-          <a:solidFill>
-            <a:srgbClr val="00B0F0">
-              <a:alpha val="25714"/>
-            </a:srgbClr>
-          </a:solidFill>
-          <a:ln w="34925">
-            <a:solidFill>
-              <a:srgbClr val="0070C0"/>
-            </a:solidFill>
-          </a:ln>
-        </p:spPr>
-        <p:style>
-          <a:lnRef idx="2">
-            <a:schemeClr val="accent1">
-              <a:shade val="15000"/>
-            </a:schemeClr>
-          </a:lnRef>
-          <a:fillRef idx="1">
-            <a:schemeClr val="accent1"/>
-          </a:fillRef>
-          <a:effectRef idx="0">
-            <a:schemeClr val="accent1"/>
-          </a:effectRef>
-          <a:fontRef idx="minor">
-            <a:schemeClr val="lt1"/>
-          </a:fontRef>
-        </p:style>
-        <p:txBody>
-          <a:bodyPr rtlCol="0" anchor="ctr"/>
-          <a:lstStyle/>
-          <a:p>
-            <a:pPr algn="ctr"/>
-            <a:endParaRPr lang="en-US"/>
-          </a:p>
-        </p:txBody>
-      </p:sp>
-      <p:sp>
-        <p:nvSpPr>
-          <p:cNvPr id="25" name="Rounded Rectangle 24">
-            <a:extLst>
-              <a:ext uri="{FF2B5EF4-FFF2-40B4-BE49-F238E27FC236}">
-                <a16:creationId xmlns:a16="http://schemas.microsoft.com/office/drawing/2014/main" id="{CFFD0B42-1A9F-8700-95BD-050FBBD30029}"/>
-              </a:ext>
-            </a:extLst>
-          </p:cNvPr>
-          <p:cNvSpPr/>
-          <p:nvPr/>
-        </p:nvSpPr>
-        <p:spPr>
-          <a:xfrm>
-            <a:off x="9938276" y="1283366"/>
-            <a:ext cx="1326772" cy="701923"/>
-          </a:xfrm>
-          <a:prstGeom prst="roundRect">
-            <a:avLst>
-              <a:gd name="adj" fmla="val 36591"/>
-            </a:avLst>
-          </a:prstGeom>
-          <a:solidFill>
-            <a:srgbClr val="00B0F0">
-              <a:alpha val="25714"/>
-            </a:srgbClr>
-          </a:solidFill>
-          <a:ln w="34925">
-            <a:solidFill>
-              <a:srgbClr val="0070C0"/>
-            </a:solidFill>
-          </a:ln>
-        </p:spPr>
-        <p:style>
-          <a:lnRef idx="2">
-            <a:schemeClr val="accent1">
-              <a:shade val="15000"/>
-            </a:schemeClr>
-          </a:lnRef>
-          <a:fillRef idx="1">
-            <a:schemeClr val="accent1"/>
-          </a:fillRef>
-          <a:effectRef idx="0">
-            <a:schemeClr val="accent1"/>
-          </a:effectRef>
-          <a:fontRef idx="minor">
-            <a:schemeClr val="lt1"/>
-          </a:fontRef>
-        </p:style>
-        <p:txBody>
-          <a:bodyPr rtlCol="0" anchor="ctr"/>
-          <a:lstStyle/>
-          <a:p>
-            <a:pPr algn="ctr"/>
-            <a:endParaRPr lang="en-US"/>
-          </a:p>
-        </p:txBody>
-      </p:sp>
-      <p:sp>
-        <p:nvSpPr>
-          <p:cNvPr id="11" name="TextBox 10">
-            <a:extLst>
-              <a:ext uri="{FF2B5EF4-FFF2-40B4-BE49-F238E27FC236}">
-                <a16:creationId xmlns:a16="http://schemas.microsoft.com/office/drawing/2014/main" id="{44A3F1EE-F9DF-1B48-5551-EF7BAF08D0A3}"/>
-              </a:ext>
-            </a:extLst>
-          </p:cNvPr>
-          <p:cNvSpPr txBox="1"/>
-          <p:nvPr/>
-        </p:nvSpPr>
-        <p:spPr>
-          <a:xfrm>
-            <a:off x="786251" y="649363"/>
-            <a:ext cx="4764446" cy="523220"/>
-          </a:xfrm>
-          <a:prstGeom prst="rect">
-            <a:avLst/>
-          </a:prstGeom>
-          <a:noFill/>
-        </p:spPr>
-        <p:txBody>
-          <a:bodyPr wrap="none" rtlCol="0">
-            <a:spAutoFit/>
-          </a:bodyPr>
-          <a:lstStyle/>
-          <a:p>
-            <a:r>
-              <a:rPr lang="en-US" sz="2800" dirty="0"/>
-              <a:t>Decomposition Component 1</a:t>
-            </a:r>
-          </a:p>
-        </p:txBody>
-      </p:sp>
-      <p:sp>
-        <p:nvSpPr>
-          <p:cNvPr id="12" name="TextBox 11">
-            <a:extLst>
-              <a:ext uri="{FF2B5EF4-FFF2-40B4-BE49-F238E27FC236}">
-                <a16:creationId xmlns:a16="http://schemas.microsoft.com/office/drawing/2014/main" id="{718FACC6-1B82-D806-59A0-5CEAC3BE4064}"/>
-              </a:ext>
-            </a:extLst>
-          </p:cNvPr>
-          <p:cNvSpPr txBox="1"/>
-          <p:nvPr/>
-        </p:nvSpPr>
-        <p:spPr>
-          <a:xfrm>
-            <a:off x="6773868" y="649363"/>
-            <a:ext cx="4764446" cy="523220"/>
-          </a:xfrm>
-          <a:prstGeom prst="rect">
-            <a:avLst/>
-          </a:prstGeom>
-          <a:noFill/>
-        </p:spPr>
-        <p:txBody>
-          <a:bodyPr wrap="none" rtlCol="0">
-            <a:spAutoFit/>
-          </a:bodyPr>
-          <a:lstStyle/>
-          <a:p>
-            <a:r>
-              <a:rPr lang="en-US" sz="2800" dirty="0"/>
-              <a:t>Decomposition Component 2</a:t>
-            </a:r>
-          </a:p>
-        </p:txBody>
-      </p:sp>
-      <p:pic>
-        <p:nvPicPr>
-          <p:cNvPr id="38" name="Graphic 37" descr="Sleep with solid fill">
-            <a:extLst>
-              <a:ext uri="{FF2B5EF4-FFF2-40B4-BE49-F238E27FC236}">
-                <a16:creationId xmlns:a16="http://schemas.microsoft.com/office/drawing/2014/main" id="{C4ED998D-3CFC-98BE-D927-69310995CD41}"/>
-              </a:ext>
-            </a:extLst>
-          </p:cNvPr>
-          <p:cNvPicPr>
-            <a:picLocks noChangeAspect="1"/>
-          </p:cNvPicPr>
-          <p:nvPr/>
-        </p:nvPicPr>
-        <p:blipFill>
-          <a:blip>
-            <a:extLst>
-              <a:ext uri="{96DAC541-7B7A-43D3-8B79-37D633B846F1}">
-                <asvg:svgBlip xmlns:asvg="http://schemas.microsoft.com/office/drawing/2016/SVG/main" r:embed="rId2"/>
-              </a:ext>
-            </a:extLst>
-          </a:blip>
-          <a:srcRect/>
-          <a:stretch/>
-        </p:blipFill>
-        <p:spPr>
-          <a:xfrm>
-            <a:off x="709596" y="3929217"/>
-            <a:ext cx="634696" cy="634696"/>
-          </a:xfrm>
-          <a:prstGeom prst="rect">
-            <a:avLst/>
-          </a:prstGeom>
-        </p:spPr>
-      </p:pic>
-      <p:pic>
-        <p:nvPicPr>
-          <p:cNvPr id="39" name="Graphic 38" descr="Sleep with solid fill">
-            <a:extLst>
-              <a:ext uri="{FF2B5EF4-FFF2-40B4-BE49-F238E27FC236}">
-                <a16:creationId xmlns:a16="http://schemas.microsoft.com/office/drawing/2014/main" id="{B6DB1321-26FF-8F27-C394-804AA06BD785}"/>
-              </a:ext>
-            </a:extLst>
-          </p:cNvPr>
-          <p:cNvPicPr>
-            <a:picLocks noChangeAspect="1"/>
-          </p:cNvPicPr>
-          <p:nvPr/>
-        </p:nvPicPr>
-        <p:blipFill>
-          <a:blip>
-            <a:extLst>
-              <a:ext uri="{96DAC541-7B7A-43D3-8B79-37D633B846F1}">
-                <asvg:svgBlip xmlns:asvg="http://schemas.microsoft.com/office/drawing/2016/SVG/main" r:embed="rId2"/>
-              </a:ext>
-            </a:extLst>
-          </a:blip>
-          <a:srcRect/>
-          <a:stretch/>
-        </p:blipFill>
-        <p:spPr>
-          <a:xfrm>
-            <a:off x="1775428" y="3929217"/>
-            <a:ext cx="634696" cy="634696"/>
-          </a:xfrm>
-          <a:prstGeom prst="rect">
-            <a:avLst/>
-          </a:prstGeom>
-        </p:spPr>
-      </p:pic>
-      <p:pic>
-        <p:nvPicPr>
-          <p:cNvPr id="42" name="Graphic 41" descr="Sleep with solid fill">
-            <a:extLst>
-              <a:ext uri="{FF2B5EF4-FFF2-40B4-BE49-F238E27FC236}">
-                <a16:creationId xmlns:a16="http://schemas.microsoft.com/office/drawing/2014/main" id="{FF963B37-BEC6-F4EC-1646-708ADF11F945}"/>
-              </a:ext>
-            </a:extLst>
-          </p:cNvPr>
-          <p:cNvPicPr>
-            <a:picLocks noChangeAspect="1"/>
-          </p:cNvPicPr>
-          <p:nvPr/>
-        </p:nvPicPr>
-        <p:blipFill>
-          <a:blip>
-            <a:extLst>
-              <a:ext uri="{96DAC541-7B7A-43D3-8B79-37D633B846F1}">
-                <asvg:svgBlip xmlns:asvg="http://schemas.microsoft.com/office/drawing/2016/SVG/main" r:embed="rId2"/>
-              </a:ext>
-            </a:extLst>
-          </a:blip>
-          <a:srcRect/>
-          <a:stretch/>
-        </p:blipFill>
-        <p:spPr>
-          <a:xfrm>
-            <a:off x="709596" y="4768306"/>
-            <a:ext cx="634696" cy="634696"/>
-          </a:xfrm>
-          <a:prstGeom prst="rect">
-            <a:avLst/>
-          </a:prstGeom>
-        </p:spPr>
-      </p:pic>
-      <p:pic>
-        <p:nvPicPr>
-          <p:cNvPr id="43" name="Graphic 42" descr="Sleep with solid fill">
-            <a:extLst>
-              <a:ext uri="{FF2B5EF4-FFF2-40B4-BE49-F238E27FC236}">
-                <a16:creationId xmlns:a16="http://schemas.microsoft.com/office/drawing/2014/main" id="{956DEAE3-B522-7397-4E11-06A2E3634450}"/>
-              </a:ext>
-            </a:extLst>
-          </p:cNvPr>
-          <p:cNvPicPr>
-            <a:picLocks noChangeAspect="1"/>
-          </p:cNvPicPr>
-          <p:nvPr/>
-        </p:nvPicPr>
-        <p:blipFill>
-          <a:blip>
-            <a:extLst>
-              <a:ext uri="{96DAC541-7B7A-43D3-8B79-37D633B846F1}">
-                <asvg:svgBlip xmlns:asvg="http://schemas.microsoft.com/office/drawing/2016/SVG/main" r:embed="rId2"/>
-              </a:ext>
-            </a:extLst>
-          </a:blip>
-          <a:srcRect/>
-          <a:stretch/>
-        </p:blipFill>
-        <p:spPr>
-          <a:xfrm>
-            <a:off x="1775428" y="4768306"/>
-            <a:ext cx="634696" cy="634696"/>
-          </a:xfrm>
-          <a:prstGeom prst="rect">
-            <a:avLst/>
-          </a:prstGeom>
-        </p:spPr>
-      </p:pic>
-      <p:pic>
-        <p:nvPicPr>
-          <p:cNvPr id="55" name="Graphic 54" descr="Sleep with solid fill">
-            <a:extLst>
-              <a:ext uri="{FF2B5EF4-FFF2-40B4-BE49-F238E27FC236}">
-                <a16:creationId xmlns:a16="http://schemas.microsoft.com/office/drawing/2014/main" id="{B199787A-E6D8-16D6-7DB5-7D7F3C71B7C4}"/>
-              </a:ext>
-            </a:extLst>
-          </p:cNvPr>
-          <p:cNvPicPr>
-            <a:picLocks noChangeAspect="1"/>
-          </p:cNvPicPr>
-          <p:nvPr/>
-        </p:nvPicPr>
-        <p:blipFill>
-          <a:blip>
-            <a:extLst>
-              <a:ext uri="{96DAC541-7B7A-43D3-8B79-37D633B846F1}">
-                <asvg:svgBlip xmlns:asvg="http://schemas.microsoft.com/office/drawing/2016/SVG/main" r:embed="rId2"/>
-              </a:ext>
-            </a:extLst>
-          </a:blip>
-          <a:srcRect/>
-          <a:stretch/>
-        </p:blipFill>
-        <p:spPr>
-          <a:xfrm>
-            <a:off x="709596" y="1925641"/>
-            <a:ext cx="634696" cy="634696"/>
-          </a:xfrm>
-          <a:prstGeom prst="rect">
-            <a:avLst/>
-          </a:prstGeom>
-        </p:spPr>
-      </p:pic>
-      <p:pic>
-        <p:nvPicPr>
-          <p:cNvPr id="56" name="Graphic 55" descr="Sleep with solid fill">
-            <a:extLst>
-              <a:ext uri="{FF2B5EF4-FFF2-40B4-BE49-F238E27FC236}">
-                <a16:creationId xmlns:a16="http://schemas.microsoft.com/office/drawing/2014/main" id="{BFF7D3DF-22DE-A4C8-DE8E-1B2F3CBE34EB}"/>
-              </a:ext>
-            </a:extLst>
-          </p:cNvPr>
-          <p:cNvPicPr>
-            <a:picLocks noChangeAspect="1"/>
-          </p:cNvPicPr>
-          <p:nvPr/>
-        </p:nvPicPr>
-        <p:blipFill>
-          <a:blip>
-            <a:extLst>
-              <a:ext uri="{96DAC541-7B7A-43D3-8B79-37D633B846F1}">
-                <asvg:svgBlip xmlns:asvg="http://schemas.microsoft.com/office/drawing/2016/SVG/main" r:embed="rId2"/>
-              </a:ext>
-            </a:extLst>
-          </a:blip>
-          <a:srcRect/>
-          <a:stretch/>
-        </p:blipFill>
-        <p:spPr>
-          <a:xfrm>
-            <a:off x="1775428" y="1925641"/>
-            <a:ext cx="634696" cy="634696"/>
-          </a:xfrm>
-          <a:prstGeom prst="rect">
-            <a:avLst/>
-          </a:prstGeom>
-        </p:spPr>
-      </p:pic>
-      <p:pic>
-        <p:nvPicPr>
-          <p:cNvPr id="57" name="Graphic 56" descr="Sleep with solid fill">
-            <a:extLst>
-              <a:ext uri="{FF2B5EF4-FFF2-40B4-BE49-F238E27FC236}">
-                <a16:creationId xmlns:a16="http://schemas.microsoft.com/office/drawing/2014/main" id="{947FACD6-958A-C236-3DC5-3CD6532870AC}"/>
-              </a:ext>
-            </a:extLst>
-          </p:cNvPr>
-          <p:cNvPicPr>
-            <a:picLocks noChangeAspect="1"/>
-          </p:cNvPicPr>
-          <p:nvPr/>
-        </p:nvPicPr>
-        <p:blipFill>
-          <a:blip>
-            <a:extLst>
-              <a:ext uri="{96DAC541-7B7A-43D3-8B79-37D633B846F1}">
-                <asvg:svgBlip xmlns:asvg="http://schemas.microsoft.com/office/drawing/2016/SVG/main" r:embed="rId2"/>
-              </a:ext>
-            </a:extLst>
-          </a:blip>
-          <a:srcRect/>
-          <a:stretch/>
-        </p:blipFill>
-        <p:spPr>
-          <a:xfrm>
-            <a:off x="709596" y="2764730"/>
-            <a:ext cx="634696" cy="634696"/>
-          </a:xfrm>
-          <a:prstGeom prst="rect">
-            <a:avLst/>
-          </a:prstGeom>
-        </p:spPr>
-      </p:pic>
-      <p:pic>
-        <p:nvPicPr>
-          <p:cNvPr id="58" name="Graphic 57" descr="Sleep with solid fill">
-            <a:extLst>
-              <a:ext uri="{FF2B5EF4-FFF2-40B4-BE49-F238E27FC236}">
-                <a16:creationId xmlns:a16="http://schemas.microsoft.com/office/drawing/2014/main" id="{33680717-472D-4E57-D593-A1974299D2CE}"/>
-              </a:ext>
-            </a:extLst>
-          </p:cNvPr>
-          <p:cNvPicPr>
-            <a:picLocks noChangeAspect="1"/>
-          </p:cNvPicPr>
-          <p:nvPr/>
-        </p:nvPicPr>
-        <p:blipFill>
-          <a:blip>
-            <a:extLst>
-              <a:ext uri="{96DAC541-7B7A-43D3-8B79-37D633B846F1}">
-                <asvg:svgBlip xmlns:asvg="http://schemas.microsoft.com/office/drawing/2016/SVG/main" r:embed="rId2"/>
-              </a:ext>
-            </a:extLst>
-          </a:blip>
-          <a:srcRect/>
-          <a:stretch/>
-        </p:blipFill>
-        <p:spPr>
-          <a:xfrm>
-            <a:off x="1775428" y="2764730"/>
-            <a:ext cx="634696" cy="634696"/>
-          </a:xfrm>
-          <a:prstGeom prst="rect">
-            <a:avLst/>
-          </a:prstGeom>
-        </p:spPr>
-      </p:pic>
-      <p:pic>
-        <p:nvPicPr>
-          <p:cNvPr id="59" name="Graphic 58" descr="Sleep with solid fill">
-            <a:extLst>
-              <a:ext uri="{FF2B5EF4-FFF2-40B4-BE49-F238E27FC236}">
-                <a16:creationId xmlns:a16="http://schemas.microsoft.com/office/drawing/2014/main" id="{17F6F732-04AE-48B3-B8F1-ACCBD53CA390}"/>
-              </a:ext>
-            </a:extLst>
-          </p:cNvPr>
-          <p:cNvPicPr>
-            <a:picLocks noChangeAspect="1"/>
-          </p:cNvPicPr>
-          <p:nvPr/>
-        </p:nvPicPr>
-        <p:blipFill>
-          <a:blip>
-            <a:extLst>
-              <a:ext uri="{96DAC541-7B7A-43D3-8B79-37D633B846F1}">
-                <asvg:svgBlip xmlns:asvg="http://schemas.microsoft.com/office/drawing/2016/SVG/main" r:embed="rId2"/>
-              </a:ext>
-            </a:extLst>
-          </a:blip>
-          <a:srcRect/>
-          <a:stretch/>
-        </p:blipFill>
-        <p:spPr>
-          <a:xfrm>
-            <a:off x="4256446" y="1265370"/>
-            <a:ext cx="634696" cy="634696"/>
-          </a:xfrm>
-          <a:prstGeom prst="rect">
-            <a:avLst/>
-          </a:prstGeom>
-        </p:spPr>
-      </p:pic>
-      <p:pic>
-        <p:nvPicPr>
-          <p:cNvPr id="60" name="Graphic 59" descr="Sleep with solid fill">
-            <a:extLst>
-              <a:ext uri="{FF2B5EF4-FFF2-40B4-BE49-F238E27FC236}">
-                <a16:creationId xmlns:a16="http://schemas.microsoft.com/office/drawing/2014/main" id="{B29CF5B2-019C-F6ED-FE22-23592BDD59CA}"/>
-              </a:ext>
-            </a:extLst>
-          </p:cNvPr>
-          <p:cNvPicPr>
-            <a:picLocks noChangeAspect="1"/>
-          </p:cNvPicPr>
-          <p:nvPr/>
-        </p:nvPicPr>
-        <p:blipFill>
-          <a:blip>
-            <a:extLst>
-              <a:ext uri="{96DAC541-7B7A-43D3-8B79-37D633B846F1}">
-                <asvg:svgBlip xmlns:asvg="http://schemas.microsoft.com/office/drawing/2016/SVG/main" r:embed="rId2"/>
-              </a:ext>
-            </a:extLst>
-          </a:blip>
-          <a:srcRect/>
-          <a:stretch/>
-        </p:blipFill>
-        <p:spPr>
-          <a:xfrm>
-            <a:off x="7270380" y="1261784"/>
-            <a:ext cx="634696" cy="634696"/>
-          </a:xfrm>
-          <a:prstGeom prst="rect">
-            <a:avLst/>
-          </a:prstGeom>
-        </p:spPr>
-      </p:pic>
-      <p:pic>
-        <p:nvPicPr>
-          <p:cNvPr id="61" name="Graphic 60" descr="Sleep with solid fill">
-            <a:extLst>
-              <a:ext uri="{FF2B5EF4-FFF2-40B4-BE49-F238E27FC236}">
-                <a16:creationId xmlns:a16="http://schemas.microsoft.com/office/drawing/2014/main" id="{5E2C4D15-10F2-6304-AADB-CD06BF6F598D}"/>
-              </a:ext>
-            </a:extLst>
-          </p:cNvPr>
-          <p:cNvPicPr>
-            <a:picLocks noChangeAspect="1"/>
-          </p:cNvPicPr>
-          <p:nvPr/>
-        </p:nvPicPr>
-        <p:blipFill>
-          <a:blip>
-            <a:extLst>
-              <a:ext uri="{96DAC541-7B7A-43D3-8B79-37D633B846F1}">
-                <asvg:svgBlip xmlns:asvg="http://schemas.microsoft.com/office/drawing/2016/SVG/main" r:embed="rId2"/>
-              </a:ext>
-            </a:extLst>
-          </a:blip>
-          <a:srcRect/>
-          <a:stretch/>
-        </p:blipFill>
-        <p:spPr>
-          <a:xfrm>
-            <a:off x="10284314" y="1261784"/>
-            <a:ext cx="634696" cy="634696"/>
-          </a:xfrm>
-          <a:prstGeom prst="rect">
-            <a:avLst/>
-          </a:prstGeom>
-        </p:spPr>
-      </p:pic>
-      <p:pic>
-        <p:nvPicPr>
-          <p:cNvPr id="63" name="Graphic 62" descr="Sleep with solid fill">
-            <a:extLst>
-              <a:ext uri="{FF2B5EF4-FFF2-40B4-BE49-F238E27FC236}">
-                <a16:creationId xmlns:a16="http://schemas.microsoft.com/office/drawing/2014/main" id="{8385A6FF-8978-B738-A53E-9CDCD42CE8E3}"/>
-              </a:ext>
-            </a:extLst>
-          </p:cNvPr>
-          <p:cNvPicPr>
-            <a:picLocks noChangeAspect="1"/>
-          </p:cNvPicPr>
-          <p:nvPr/>
-        </p:nvPicPr>
-        <p:blipFill>
-          <a:blip>
-            <a:extLst>
-              <a:ext uri="{96DAC541-7B7A-43D3-8B79-37D633B846F1}">
-                <asvg:svgBlip xmlns:asvg="http://schemas.microsoft.com/office/drawing/2016/SVG/main" r:embed="rId2"/>
-              </a:ext>
-            </a:extLst>
-          </a:blip>
-          <a:srcRect/>
-          <a:stretch/>
-        </p:blipFill>
-        <p:spPr>
-          <a:xfrm>
-            <a:off x="3723530" y="3030079"/>
-            <a:ext cx="634696" cy="634696"/>
-          </a:xfrm>
-          <a:prstGeom prst="rect">
-            <a:avLst/>
-          </a:prstGeom>
-        </p:spPr>
-      </p:pic>
-      <p:pic>
-        <p:nvPicPr>
-          <p:cNvPr id="64" name="Graphic 63" descr="Sleep with solid fill">
-            <a:extLst>
-              <a:ext uri="{FF2B5EF4-FFF2-40B4-BE49-F238E27FC236}">
-                <a16:creationId xmlns:a16="http://schemas.microsoft.com/office/drawing/2014/main" id="{BEA8F744-8504-DD07-B4DB-D1A21B4F80B6}"/>
-              </a:ext>
-            </a:extLst>
-          </p:cNvPr>
-          <p:cNvPicPr>
-            <a:picLocks noChangeAspect="1"/>
-          </p:cNvPicPr>
-          <p:nvPr/>
-        </p:nvPicPr>
-        <p:blipFill>
-          <a:blip>
-            <a:extLst>
-              <a:ext uri="{96DAC541-7B7A-43D3-8B79-37D633B846F1}">
-                <asvg:svgBlip xmlns:asvg="http://schemas.microsoft.com/office/drawing/2016/SVG/main" r:embed="rId2"/>
-              </a:ext>
-            </a:extLst>
-          </a:blip>
-          <a:srcRect/>
-          <a:stretch/>
-        </p:blipFill>
-        <p:spPr>
-          <a:xfrm>
-            <a:off x="4789362" y="3030079"/>
-            <a:ext cx="634696" cy="634696"/>
-          </a:xfrm>
-          <a:prstGeom prst="rect">
-            <a:avLst/>
-          </a:prstGeom>
-        </p:spPr>
-      </p:pic>
-      <p:pic>
-        <p:nvPicPr>
-          <p:cNvPr id="65" name="Graphic 64" descr="Sleep with solid fill">
-            <a:extLst>
-              <a:ext uri="{FF2B5EF4-FFF2-40B4-BE49-F238E27FC236}">
-                <a16:creationId xmlns:a16="http://schemas.microsoft.com/office/drawing/2014/main" id="{27669CE2-317A-40CA-5F94-E72AFB174451}"/>
-              </a:ext>
-            </a:extLst>
-          </p:cNvPr>
-          <p:cNvPicPr>
-            <a:picLocks noChangeAspect="1"/>
-          </p:cNvPicPr>
-          <p:nvPr/>
-        </p:nvPicPr>
-        <p:blipFill>
-          <a:blip>
-            <a:extLst>
-              <a:ext uri="{96DAC541-7B7A-43D3-8B79-37D633B846F1}">
-                <asvg:svgBlip xmlns:asvg="http://schemas.microsoft.com/office/drawing/2016/SVG/main" r:embed="rId2"/>
-              </a:ext>
-            </a:extLst>
-          </a:blip>
-          <a:srcRect/>
-          <a:stretch/>
-        </p:blipFill>
-        <p:spPr>
-          <a:xfrm>
-            <a:off x="3723530" y="3869168"/>
-            <a:ext cx="634696" cy="634696"/>
-          </a:xfrm>
-          <a:prstGeom prst="rect">
-            <a:avLst/>
-          </a:prstGeom>
-        </p:spPr>
-      </p:pic>
-      <p:pic>
-        <p:nvPicPr>
-          <p:cNvPr id="66" name="Graphic 65" descr="Sleep with solid fill">
-            <a:extLst>
-              <a:ext uri="{FF2B5EF4-FFF2-40B4-BE49-F238E27FC236}">
-                <a16:creationId xmlns:a16="http://schemas.microsoft.com/office/drawing/2014/main" id="{C42BAA05-FE68-4D61-1F4A-5969EEB2E7BF}"/>
-              </a:ext>
-            </a:extLst>
-          </p:cNvPr>
-          <p:cNvPicPr>
-            <a:picLocks noChangeAspect="1"/>
-          </p:cNvPicPr>
-          <p:nvPr/>
-        </p:nvPicPr>
-        <p:blipFill>
-          <a:blip>
-            <a:extLst>
-              <a:ext uri="{96DAC541-7B7A-43D3-8B79-37D633B846F1}">
-                <asvg:svgBlip xmlns:asvg="http://schemas.microsoft.com/office/drawing/2016/SVG/main" r:embed="rId2"/>
-              </a:ext>
-            </a:extLst>
-          </a:blip>
-          <a:srcRect/>
-          <a:stretch/>
-        </p:blipFill>
-        <p:spPr>
-          <a:xfrm>
-            <a:off x="4789362" y="3869168"/>
-            <a:ext cx="634696" cy="634696"/>
-          </a:xfrm>
-          <a:prstGeom prst="rect">
-            <a:avLst/>
-          </a:prstGeom>
-        </p:spPr>
-      </p:pic>
-      <p:pic>
-        <p:nvPicPr>
-          <p:cNvPr id="75" name="Graphic 74" descr="Sleep with solid fill">
-            <a:extLst>
-              <a:ext uri="{FF2B5EF4-FFF2-40B4-BE49-F238E27FC236}">
-                <a16:creationId xmlns:a16="http://schemas.microsoft.com/office/drawing/2014/main" id="{E74E403F-A927-A096-8D2C-BC6D0776A6C5}"/>
-              </a:ext>
-            </a:extLst>
-          </p:cNvPr>
-          <p:cNvPicPr>
-            <a:picLocks noChangeAspect="1"/>
-          </p:cNvPicPr>
-          <p:nvPr/>
-        </p:nvPicPr>
-        <p:blipFill>
-          <a:blip>
-            <a:extLst>
-              <a:ext uri="{96DAC541-7B7A-43D3-8B79-37D633B846F1}">
-                <asvg:svgBlip xmlns:asvg="http://schemas.microsoft.com/office/drawing/2016/SVG/main" r:embed="rId2"/>
-              </a:ext>
-            </a:extLst>
-          </a:blip>
-          <a:srcRect/>
-          <a:stretch/>
-        </p:blipFill>
-        <p:spPr>
-          <a:xfrm>
-            <a:off x="3723530" y="4708256"/>
-            <a:ext cx="634696" cy="634696"/>
-          </a:xfrm>
-          <a:prstGeom prst="rect">
-            <a:avLst/>
-          </a:prstGeom>
-        </p:spPr>
-      </p:pic>
-      <p:pic>
-        <p:nvPicPr>
-          <p:cNvPr id="76" name="Graphic 75" descr="Sleep with solid fill">
-            <a:extLst>
-              <a:ext uri="{FF2B5EF4-FFF2-40B4-BE49-F238E27FC236}">
-                <a16:creationId xmlns:a16="http://schemas.microsoft.com/office/drawing/2014/main" id="{F00C648B-64BC-AAB2-0BDA-8BCAC8561FB1}"/>
-              </a:ext>
-            </a:extLst>
-          </p:cNvPr>
-          <p:cNvPicPr>
-            <a:picLocks noChangeAspect="1"/>
-          </p:cNvPicPr>
-          <p:nvPr/>
-        </p:nvPicPr>
-        <p:blipFill>
-          <a:blip>
-            <a:extLst>
-              <a:ext uri="{96DAC541-7B7A-43D3-8B79-37D633B846F1}">
-                <asvg:svgBlip xmlns:asvg="http://schemas.microsoft.com/office/drawing/2016/SVG/main" r:embed="rId2"/>
-              </a:ext>
-            </a:extLst>
-          </a:blip>
-          <a:srcRect/>
-          <a:stretch/>
-        </p:blipFill>
-        <p:spPr>
-          <a:xfrm>
-            <a:off x="4789362" y="4708256"/>
-            <a:ext cx="634696" cy="634696"/>
-          </a:xfrm>
-          <a:prstGeom prst="rect">
-            <a:avLst/>
-          </a:prstGeom>
-        </p:spPr>
-      </p:pic>
-      <p:pic>
-        <p:nvPicPr>
-          <p:cNvPr id="77" name="Graphic 76" descr="Sleep with solid fill">
-            <a:extLst>
-              <a:ext uri="{FF2B5EF4-FFF2-40B4-BE49-F238E27FC236}">
-                <a16:creationId xmlns:a16="http://schemas.microsoft.com/office/drawing/2014/main" id="{BE2844BB-70B7-8C84-D3FD-853E7E88A61B}"/>
-              </a:ext>
-            </a:extLst>
-          </p:cNvPr>
-          <p:cNvPicPr>
-            <a:picLocks noChangeAspect="1"/>
-          </p:cNvPicPr>
-          <p:nvPr/>
-        </p:nvPicPr>
-        <p:blipFill>
-          <a:blip>
-            <a:extLst>
-              <a:ext uri="{96DAC541-7B7A-43D3-8B79-37D633B846F1}">
-                <asvg:svgBlip xmlns:asvg="http://schemas.microsoft.com/office/drawing/2016/SVG/main" r:embed="rId2"/>
-              </a:ext>
-            </a:extLst>
-          </a:blip>
-          <a:srcRect/>
-          <a:stretch/>
-        </p:blipFill>
-        <p:spPr>
-          <a:xfrm>
-            <a:off x="3723530" y="5547345"/>
-            <a:ext cx="634696" cy="634696"/>
-          </a:xfrm>
-          <a:prstGeom prst="rect">
-            <a:avLst/>
-          </a:prstGeom>
-        </p:spPr>
-      </p:pic>
-      <p:pic>
-        <p:nvPicPr>
-          <p:cNvPr id="103" name="Graphic 102" descr="Sleep with solid fill">
-            <a:extLst>
-              <a:ext uri="{FF2B5EF4-FFF2-40B4-BE49-F238E27FC236}">
-                <a16:creationId xmlns:a16="http://schemas.microsoft.com/office/drawing/2014/main" id="{A0584E7F-C75C-6314-0BF7-65337EBC02BA}"/>
-              </a:ext>
-            </a:extLst>
-          </p:cNvPr>
-          <p:cNvPicPr>
-            <a:picLocks noChangeAspect="1"/>
-          </p:cNvPicPr>
-          <p:nvPr/>
-        </p:nvPicPr>
-        <p:blipFill>
-          <a:blip>
-            <a:extLst>
-              <a:ext uri="{96DAC541-7B7A-43D3-8B79-37D633B846F1}">
-                <asvg:svgBlip xmlns:asvg="http://schemas.microsoft.com/office/drawing/2016/SVG/main" r:embed="rId2"/>
-              </a:ext>
-            </a:extLst>
-          </a:blip>
-          <a:srcRect/>
-          <a:stretch/>
-        </p:blipFill>
-        <p:spPr>
-          <a:xfrm>
-            <a:off x="9781876" y="2444684"/>
-            <a:ext cx="634696" cy="634696"/>
-          </a:xfrm>
-          <a:prstGeom prst="rect">
-            <a:avLst/>
-          </a:prstGeom>
-        </p:spPr>
-      </p:pic>
-      <p:pic>
-        <p:nvPicPr>
-          <p:cNvPr id="104" name="Graphic 103" descr="Sleep with solid fill">
-            <a:extLst>
-              <a:ext uri="{FF2B5EF4-FFF2-40B4-BE49-F238E27FC236}">
-                <a16:creationId xmlns:a16="http://schemas.microsoft.com/office/drawing/2014/main" id="{5897C9C1-28F9-EAFB-1D20-8BD6D6CD21E5}"/>
-              </a:ext>
-            </a:extLst>
-          </p:cNvPr>
-          <p:cNvPicPr>
-            <a:picLocks noChangeAspect="1"/>
-          </p:cNvPicPr>
-          <p:nvPr/>
-        </p:nvPicPr>
-        <p:blipFill>
-          <a:blip>
-            <a:extLst>
-              <a:ext uri="{96DAC541-7B7A-43D3-8B79-37D633B846F1}">
-                <asvg:svgBlip xmlns:asvg="http://schemas.microsoft.com/office/drawing/2016/SVG/main" r:embed="rId2"/>
-              </a:ext>
-            </a:extLst>
-          </a:blip>
-          <a:srcRect/>
-          <a:stretch/>
-        </p:blipFill>
-        <p:spPr>
-          <a:xfrm>
-            <a:off x="10847708" y="2444684"/>
-            <a:ext cx="634696" cy="634696"/>
-          </a:xfrm>
-          <a:prstGeom prst="rect">
-            <a:avLst/>
-          </a:prstGeom>
-        </p:spPr>
-      </p:pic>
-      <p:pic>
-        <p:nvPicPr>
-          <p:cNvPr id="105" name="Graphic 104" descr="Sleep with solid fill">
-            <a:extLst>
-              <a:ext uri="{FF2B5EF4-FFF2-40B4-BE49-F238E27FC236}">
-                <a16:creationId xmlns:a16="http://schemas.microsoft.com/office/drawing/2014/main" id="{641B0F86-7C71-4620-01E8-E845328A3AD6}"/>
-              </a:ext>
-            </a:extLst>
-          </p:cNvPr>
-          <p:cNvPicPr>
-            <a:picLocks noChangeAspect="1"/>
-          </p:cNvPicPr>
-          <p:nvPr/>
-        </p:nvPicPr>
-        <p:blipFill>
-          <a:blip>
-            <a:extLst>
-              <a:ext uri="{96DAC541-7B7A-43D3-8B79-37D633B846F1}">
-                <asvg:svgBlip xmlns:asvg="http://schemas.microsoft.com/office/drawing/2016/SVG/main" r:embed="rId2"/>
-              </a:ext>
-            </a:extLst>
-          </a:blip>
-          <a:srcRect/>
-          <a:stretch/>
-        </p:blipFill>
-        <p:spPr>
-          <a:xfrm>
-            <a:off x="9781876" y="3283773"/>
-            <a:ext cx="634696" cy="634696"/>
-          </a:xfrm>
-          <a:prstGeom prst="rect">
-            <a:avLst/>
-          </a:prstGeom>
-        </p:spPr>
-      </p:pic>
-      <p:pic>
-        <p:nvPicPr>
-          <p:cNvPr id="106" name="Graphic 105" descr="Sleep with solid fill">
-            <a:extLst>
-              <a:ext uri="{FF2B5EF4-FFF2-40B4-BE49-F238E27FC236}">
-                <a16:creationId xmlns:a16="http://schemas.microsoft.com/office/drawing/2014/main" id="{DEB8B8F2-F3AE-BC1E-9ACD-ED51164F4413}"/>
-              </a:ext>
-            </a:extLst>
-          </p:cNvPr>
-          <p:cNvPicPr>
-            <a:picLocks noChangeAspect="1"/>
-          </p:cNvPicPr>
-          <p:nvPr/>
-        </p:nvPicPr>
-        <p:blipFill>
-          <a:blip>
-            <a:extLst>
-              <a:ext uri="{96DAC541-7B7A-43D3-8B79-37D633B846F1}">
-                <asvg:svgBlip xmlns:asvg="http://schemas.microsoft.com/office/drawing/2016/SVG/main" r:embed="rId2"/>
-              </a:ext>
-            </a:extLst>
-          </a:blip>
-          <a:srcRect/>
-          <a:stretch/>
-        </p:blipFill>
-        <p:spPr>
-          <a:xfrm>
-            <a:off x="10847708" y="3283773"/>
-            <a:ext cx="634696" cy="634696"/>
-          </a:xfrm>
-          <a:prstGeom prst="rect">
-            <a:avLst/>
-          </a:prstGeom>
-        </p:spPr>
-      </p:pic>
-      <p:pic>
-        <p:nvPicPr>
-          <p:cNvPr id="107" name="Graphic 106" descr="Sleep with solid fill">
-            <a:extLst>
-              <a:ext uri="{FF2B5EF4-FFF2-40B4-BE49-F238E27FC236}">
-                <a16:creationId xmlns:a16="http://schemas.microsoft.com/office/drawing/2014/main" id="{BDEE4171-4367-53C6-6198-2D0D842F588F}"/>
-              </a:ext>
-            </a:extLst>
-          </p:cNvPr>
-          <p:cNvPicPr>
-            <a:picLocks noChangeAspect="1"/>
-          </p:cNvPicPr>
-          <p:nvPr/>
-        </p:nvPicPr>
-        <p:blipFill>
-          <a:blip>
-            <a:extLst>
-              <a:ext uri="{96DAC541-7B7A-43D3-8B79-37D633B846F1}">
-                <asvg:svgBlip xmlns:asvg="http://schemas.microsoft.com/office/drawing/2016/SVG/main" r:embed="rId2"/>
-              </a:ext>
-            </a:extLst>
-          </a:blip>
-          <a:srcRect/>
-          <a:stretch/>
-        </p:blipFill>
-        <p:spPr>
-          <a:xfrm>
-            <a:off x="9781876" y="4122861"/>
-            <a:ext cx="634696" cy="634696"/>
-          </a:xfrm>
-          <a:prstGeom prst="rect">
-            <a:avLst/>
-          </a:prstGeom>
-        </p:spPr>
-      </p:pic>
-      <p:pic>
-        <p:nvPicPr>
-          <p:cNvPr id="108" name="Graphic 107" descr="Sleep with solid fill">
-            <a:extLst>
-              <a:ext uri="{FF2B5EF4-FFF2-40B4-BE49-F238E27FC236}">
-                <a16:creationId xmlns:a16="http://schemas.microsoft.com/office/drawing/2014/main" id="{ECCF987C-9672-68B7-DD6E-D35BD65D91EF}"/>
-              </a:ext>
-            </a:extLst>
-          </p:cNvPr>
-          <p:cNvPicPr>
-            <a:picLocks noChangeAspect="1"/>
-          </p:cNvPicPr>
-          <p:nvPr/>
-        </p:nvPicPr>
-        <p:blipFill>
-          <a:blip>
-            <a:extLst>
-              <a:ext uri="{96DAC541-7B7A-43D3-8B79-37D633B846F1}">
-                <asvg:svgBlip xmlns:asvg="http://schemas.microsoft.com/office/drawing/2016/SVG/main" r:embed="rId2"/>
-              </a:ext>
-            </a:extLst>
-          </a:blip>
-          <a:srcRect/>
-          <a:stretch/>
-        </p:blipFill>
-        <p:spPr>
-          <a:xfrm>
-            <a:off x="10847708" y="4122861"/>
-            <a:ext cx="634696" cy="634696"/>
-          </a:xfrm>
-          <a:prstGeom prst="rect">
-            <a:avLst/>
-          </a:prstGeom>
-        </p:spPr>
-      </p:pic>
-      <p:pic>
-        <p:nvPicPr>
-          <p:cNvPr id="109" name="Graphic 108" descr="Sleep with solid fill">
-            <a:extLst>
-              <a:ext uri="{FF2B5EF4-FFF2-40B4-BE49-F238E27FC236}">
-                <a16:creationId xmlns:a16="http://schemas.microsoft.com/office/drawing/2014/main" id="{5F8D50A8-61BD-4BDB-9D1E-4476E148179A}"/>
-              </a:ext>
-            </a:extLst>
-          </p:cNvPr>
-          <p:cNvPicPr>
-            <a:picLocks noChangeAspect="1"/>
-          </p:cNvPicPr>
-          <p:nvPr/>
-        </p:nvPicPr>
-        <p:blipFill>
-          <a:blip>
-            <a:extLst>
-              <a:ext uri="{96DAC541-7B7A-43D3-8B79-37D633B846F1}">
-                <asvg:svgBlip xmlns:asvg="http://schemas.microsoft.com/office/drawing/2016/SVG/main" r:embed="rId2"/>
-              </a:ext>
-            </a:extLst>
-          </a:blip>
-          <a:srcRect/>
-          <a:stretch/>
-        </p:blipFill>
-        <p:spPr>
-          <a:xfrm>
-            <a:off x="9781876" y="4961950"/>
-            <a:ext cx="634696" cy="634696"/>
-          </a:xfrm>
-          <a:prstGeom prst="rect">
-            <a:avLst/>
-          </a:prstGeom>
-        </p:spPr>
-      </p:pic>
-      <p:pic>
-        <p:nvPicPr>
-          <p:cNvPr id="110" name="Graphic 109" descr="Sleep with solid fill">
-            <a:extLst>
-              <a:ext uri="{FF2B5EF4-FFF2-40B4-BE49-F238E27FC236}">
-                <a16:creationId xmlns:a16="http://schemas.microsoft.com/office/drawing/2014/main" id="{D6F5A434-884F-3560-5384-DEA63566C711}"/>
-              </a:ext>
-            </a:extLst>
-          </p:cNvPr>
-          <p:cNvPicPr>
-            <a:picLocks noChangeAspect="1"/>
-          </p:cNvPicPr>
-          <p:nvPr/>
-        </p:nvPicPr>
-        <p:blipFill>
-          <a:blip>
-            <a:extLst>
-              <a:ext uri="{96DAC541-7B7A-43D3-8B79-37D633B846F1}">
-                <asvg:svgBlip xmlns:asvg="http://schemas.microsoft.com/office/drawing/2016/SVG/main" r:embed="rId2"/>
-              </a:ext>
-            </a:extLst>
-          </a:blip>
-          <a:srcRect/>
-          <a:stretch/>
-        </p:blipFill>
-        <p:spPr>
-          <a:xfrm>
-            <a:off x="10847708" y="4961950"/>
-            <a:ext cx="634696" cy="634696"/>
-          </a:xfrm>
-          <a:prstGeom prst="rect">
-            <a:avLst/>
-          </a:prstGeom>
-        </p:spPr>
-      </p:pic>
-      <p:pic>
-        <p:nvPicPr>
-          <p:cNvPr id="111" name="Graphic 110" descr="Sleep with solid fill">
-            <a:extLst>
-              <a:ext uri="{FF2B5EF4-FFF2-40B4-BE49-F238E27FC236}">
-                <a16:creationId xmlns:a16="http://schemas.microsoft.com/office/drawing/2014/main" id="{16FFA087-52DB-6D8C-63D7-780CF529A8D1}"/>
-              </a:ext>
-            </a:extLst>
-          </p:cNvPr>
-          <p:cNvPicPr>
-            <a:picLocks noChangeAspect="1"/>
-          </p:cNvPicPr>
-          <p:nvPr/>
-        </p:nvPicPr>
-        <p:blipFill>
-          <a:blip>
-            <a:extLst>
-              <a:ext uri="{96DAC541-7B7A-43D3-8B79-37D633B846F1}">
-                <asvg:svgBlip xmlns:asvg="http://schemas.microsoft.com/office/drawing/2016/SVG/main" r:embed="rId2"/>
-              </a:ext>
-            </a:extLst>
-          </a:blip>
-          <a:srcRect/>
-          <a:stretch/>
-        </p:blipFill>
-        <p:spPr>
-          <a:xfrm>
-            <a:off x="6737464" y="2395383"/>
-            <a:ext cx="634696" cy="634696"/>
-          </a:xfrm>
-          <a:prstGeom prst="rect">
-            <a:avLst/>
-          </a:prstGeom>
-        </p:spPr>
-      </p:pic>
-      <p:pic>
-        <p:nvPicPr>
-          <p:cNvPr id="112" name="Graphic 111" descr="Sleep with solid fill">
-            <a:extLst>
-              <a:ext uri="{FF2B5EF4-FFF2-40B4-BE49-F238E27FC236}">
-                <a16:creationId xmlns:a16="http://schemas.microsoft.com/office/drawing/2014/main" id="{AB060748-6A2D-2EF4-DB7D-3CF77321E4F2}"/>
-              </a:ext>
-            </a:extLst>
-          </p:cNvPr>
-          <p:cNvPicPr>
-            <a:picLocks noChangeAspect="1"/>
-          </p:cNvPicPr>
-          <p:nvPr/>
-        </p:nvPicPr>
-        <p:blipFill>
-          <a:blip>
-            <a:extLst>
-              <a:ext uri="{96DAC541-7B7A-43D3-8B79-37D633B846F1}">
-                <asvg:svgBlip xmlns:asvg="http://schemas.microsoft.com/office/drawing/2016/SVG/main" r:embed="rId2"/>
-              </a:ext>
-            </a:extLst>
-          </a:blip>
-          <a:srcRect/>
-          <a:stretch/>
-        </p:blipFill>
-        <p:spPr>
-          <a:xfrm>
-            <a:off x="7803296" y="2395383"/>
-            <a:ext cx="634696" cy="634696"/>
-          </a:xfrm>
-          <a:prstGeom prst="rect">
-            <a:avLst/>
-          </a:prstGeom>
-        </p:spPr>
-      </p:pic>
-      <p:pic>
-        <p:nvPicPr>
-          <p:cNvPr id="113" name="Graphic 112" descr="Sleep with solid fill">
-            <a:extLst>
-              <a:ext uri="{FF2B5EF4-FFF2-40B4-BE49-F238E27FC236}">
-                <a16:creationId xmlns:a16="http://schemas.microsoft.com/office/drawing/2014/main" id="{39BAD2B0-E0BC-F792-9A6A-63FD7C34D690}"/>
-              </a:ext>
-            </a:extLst>
-          </p:cNvPr>
-          <p:cNvPicPr>
-            <a:picLocks noChangeAspect="1"/>
-          </p:cNvPicPr>
-          <p:nvPr/>
-        </p:nvPicPr>
-        <p:blipFill>
-          <a:blip>
-            <a:extLst>
-              <a:ext uri="{96DAC541-7B7A-43D3-8B79-37D633B846F1}">
-                <asvg:svgBlip xmlns:asvg="http://schemas.microsoft.com/office/drawing/2016/SVG/main" r:embed="rId2"/>
-              </a:ext>
-            </a:extLst>
-          </a:blip>
-          <a:srcRect/>
-          <a:stretch/>
-        </p:blipFill>
-        <p:spPr>
-          <a:xfrm>
-            <a:off x="6737464" y="3234472"/>
-            <a:ext cx="634696" cy="634696"/>
-          </a:xfrm>
-          <a:prstGeom prst="rect">
-            <a:avLst/>
-          </a:prstGeom>
-        </p:spPr>
-      </p:pic>
-      <p:pic>
-        <p:nvPicPr>
-          <p:cNvPr id="114" name="Graphic 113" descr="Sleep with solid fill">
-            <a:extLst>
-              <a:ext uri="{FF2B5EF4-FFF2-40B4-BE49-F238E27FC236}">
-                <a16:creationId xmlns:a16="http://schemas.microsoft.com/office/drawing/2014/main" id="{E1D8C7F7-A2E9-3EDB-3364-EDAA72F9CF36}"/>
-              </a:ext>
-            </a:extLst>
-          </p:cNvPr>
-          <p:cNvPicPr>
-            <a:picLocks noChangeAspect="1"/>
-          </p:cNvPicPr>
-          <p:nvPr/>
-        </p:nvPicPr>
-        <p:blipFill>
-          <a:blip>
-            <a:extLst>
-              <a:ext uri="{96DAC541-7B7A-43D3-8B79-37D633B846F1}">
-                <asvg:svgBlip xmlns:asvg="http://schemas.microsoft.com/office/drawing/2016/SVG/main" r:embed="rId2"/>
-              </a:ext>
-            </a:extLst>
-          </a:blip>
-          <a:srcRect/>
-          <a:stretch/>
-        </p:blipFill>
-        <p:spPr>
-          <a:xfrm>
-            <a:off x="7803296" y="3234472"/>
-            <a:ext cx="634696" cy="634696"/>
-          </a:xfrm>
-          <a:prstGeom prst="rect">
-            <a:avLst/>
-          </a:prstGeom>
-        </p:spPr>
-      </p:pic>
-      <p:pic>
-        <p:nvPicPr>
-          <p:cNvPr id="115" name="Graphic 114" descr="Sleep with solid fill">
-            <a:extLst>
-              <a:ext uri="{FF2B5EF4-FFF2-40B4-BE49-F238E27FC236}">
-                <a16:creationId xmlns:a16="http://schemas.microsoft.com/office/drawing/2014/main" id="{50EE898B-C355-0541-83AC-CB4CB1709800}"/>
-              </a:ext>
-            </a:extLst>
-          </p:cNvPr>
-          <p:cNvPicPr>
-            <a:picLocks noChangeAspect="1"/>
-          </p:cNvPicPr>
-          <p:nvPr/>
-        </p:nvPicPr>
-        <p:blipFill>
-          <a:blip>
-            <a:extLst>
-              <a:ext uri="{96DAC541-7B7A-43D3-8B79-37D633B846F1}">
-                <asvg:svgBlip xmlns:asvg="http://schemas.microsoft.com/office/drawing/2016/SVG/main" r:embed="rId2"/>
-              </a:ext>
-            </a:extLst>
-          </a:blip>
-          <a:srcRect/>
-          <a:stretch/>
-        </p:blipFill>
-        <p:spPr>
-          <a:xfrm>
-            <a:off x="6737464" y="4073560"/>
-            <a:ext cx="634696" cy="634696"/>
-          </a:xfrm>
-          <a:prstGeom prst="rect">
-            <a:avLst/>
-          </a:prstGeom>
-        </p:spPr>
-      </p:pic>
-      <p:pic>
-        <p:nvPicPr>
-          <p:cNvPr id="116" name="Graphic 115" descr="Sleep with solid fill">
-            <a:extLst>
-              <a:ext uri="{FF2B5EF4-FFF2-40B4-BE49-F238E27FC236}">
-                <a16:creationId xmlns:a16="http://schemas.microsoft.com/office/drawing/2014/main" id="{3807EACB-4432-305A-4602-5DA4DC69B1BD}"/>
-              </a:ext>
-            </a:extLst>
-          </p:cNvPr>
-          <p:cNvPicPr>
-            <a:picLocks noChangeAspect="1"/>
-          </p:cNvPicPr>
-          <p:nvPr/>
-        </p:nvPicPr>
-        <p:blipFill>
-          <a:blip>
-            <a:extLst>
-              <a:ext uri="{96DAC541-7B7A-43D3-8B79-37D633B846F1}">
-                <asvg:svgBlip xmlns:asvg="http://schemas.microsoft.com/office/drawing/2016/SVG/main" r:embed="rId2"/>
-              </a:ext>
-            </a:extLst>
-          </a:blip>
-          <a:srcRect/>
-          <a:stretch/>
-        </p:blipFill>
-        <p:spPr>
-          <a:xfrm>
-            <a:off x="7803296" y="4073560"/>
-            <a:ext cx="634696" cy="634696"/>
-          </a:xfrm>
-          <a:prstGeom prst="rect">
-            <a:avLst/>
-          </a:prstGeom>
-        </p:spPr>
-      </p:pic>
-      <p:pic>
-        <p:nvPicPr>
-          <p:cNvPr id="117" name="Graphic 116" descr="Sleep with solid fill">
-            <a:extLst>
-              <a:ext uri="{FF2B5EF4-FFF2-40B4-BE49-F238E27FC236}">
-                <a16:creationId xmlns:a16="http://schemas.microsoft.com/office/drawing/2014/main" id="{8A8D8CA4-4798-F2B1-3129-5068BFC55B84}"/>
-              </a:ext>
-            </a:extLst>
-          </p:cNvPr>
-          <p:cNvPicPr>
-            <a:picLocks noChangeAspect="1"/>
-          </p:cNvPicPr>
-          <p:nvPr/>
-        </p:nvPicPr>
-        <p:blipFill>
-          <a:blip>
-            <a:extLst>
-              <a:ext uri="{96DAC541-7B7A-43D3-8B79-37D633B846F1}">
-                <asvg:svgBlip xmlns:asvg="http://schemas.microsoft.com/office/drawing/2016/SVG/main" r:embed="rId2"/>
-              </a:ext>
-            </a:extLst>
-          </a:blip>
-          <a:srcRect/>
-          <a:stretch/>
-        </p:blipFill>
-        <p:spPr>
-          <a:xfrm>
-            <a:off x="7232534" y="4912649"/>
-            <a:ext cx="634696" cy="634696"/>
-          </a:xfrm>
-          <a:prstGeom prst="rect">
-            <a:avLst/>
-          </a:prstGeom>
-        </p:spPr>
-      </p:pic>
-      <p:pic>
-        <p:nvPicPr>
-          <p:cNvPr id="142" name="Graphic 141" descr="Sleep with solid fill">
-            <a:extLst>
-              <a:ext uri="{FF2B5EF4-FFF2-40B4-BE49-F238E27FC236}">
-                <a16:creationId xmlns:a16="http://schemas.microsoft.com/office/drawing/2014/main" id="{935A8409-F02E-6838-D906-33FD10AFBD72}"/>
-              </a:ext>
-            </a:extLst>
-          </p:cNvPr>
-          <p:cNvPicPr>
-            <a:picLocks noChangeAspect="1"/>
-          </p:cNvPicPr>
-          <p:nvPr/>
-        </p:nvPicPr>
-        <p:blipFill>
-          <a:blip>
-            <a:extLst>
-              <a:ext uri="{96DAC541-7B7A-43D3-8B79-37D633B846F1}">
-                <asvg:svgBlip xmlns:asvg="http://schemas.microsoft.com/office/drawing/2016/SVG/main" r:embed="rId2"/>
-              </a:ext>
-            </a:extLst>
-          </a:blip>
-          <a:srcRect/>
-          <a:stretch/>
-        </p:blipFill>
-        <p:spPr>
-          <a:xfrm>
-            <a:off x="4256446" y="2056368"/>
-            <a:ext cx="634696" cy="634696"/>
-          </a:xfrm>
-          <a:prstGeom prst="rect">
-            <a:avLst/>
-          </a:prstGeom>
-        </p:spPr>
-      </p:pic>
-    </p:spTree>
-    <p:extLst>
-      <p:ext uri="{BB962C8B-B14F-4D97-AF65-F5344CB8AC3E}">
-        <p14:creationId xmlns:p14="http://schemas.microsoft.com/office/powerpoint/2010/main" val="1228970998"/>
-      </p:ext>
-    </p:extLst>
-  </p:cSld>
-  <p:clrMapOvr>
-    <a:masterClrMapping/>
-  </p:clrMapOvr>
-</p:sld>
-</file>
-
-<file path=ppt/slides/slide4.xml><?xml version="1.0" encoding="utf-8"?>
-<p:sld xmlns:a="http://schemas.openxmlformats.org/drawingml/2006/main" xmlns:r="http://schemas.openxmlformats.org/officeDocument/2006/relationships" xmlns:p="http://schemas.openxmlformats.org/presentationml/2006/main">
-  <p:cSld>
-    <p:spTree>
-      <p:nvGrpSpPr>
-        <p:cNvPr id="1" name="">
-          <a:extLst>
-            <a:ext uri="{FF2B5EF4-FFF2-40B4-BE49-F238E27FC236}">
               <a16:creationId xmlns:a16="http://schemas.microsoft.com/office/drawing/2014/main" id="{68EDE20F-ACC4-BE09-F2D2-84E3DC61BCB6}"/>
             </a:ext>
           </a:extLst>
@@ -11745,7 +6681,7 @@
 </p:sld>
 </file>
 
-<file path=ppt/slides/slide5.xml><?xml version="1.0" encoding="utf-8"?>
+<file path=ppt/slides/slide3.xml><?xml version="1.0" encoding="utf-8"?>
 <p:sld xmlns:a="http://schemas.openxmlformats.org/drawingml/2006/main" xmlns:r="http://schemas.openxmlformats.org/officeDocument/2006/relationships" xmlns:p="http://schemas.openxmlformats.org/presentationml/2006/main">
   <p:cSld>
     <p:spTree>
@@ -13392,7 +8328,7 @@
 </p:sld>
 </file>
 
-<file path=ppt/slides/slide6.xml><?xml version="1.0" encoding="utf-8"?>
+<file path=ppt/slides/slide4.xml><?xml version="1.0" encoding="utf-8"?>
 <p:sld xmlns:a="http://schemas.openxmlformats.org/drawingml/2006/main" xmlns:r="http://schemas.openxmlformats.org/officeDocument/2006/relationships" xmlns:p="http://schemas.openxmlformats.org/presentationml/2006/main">
   <p:cSld>
     <p:spTree>
@@ -15892,7 +10828,7 @@
 </p:sld>
 </file>
 
-<file path=ppt/slides/slide7.xml><?xml version="1.0" encoding="utf-8"?>
+<file path=ppt/slides/slide5.xml><?xml version="1.0" encoding="utf-8"?>
 <p:sld xmlns:a="http://schemas.openxmlformats.org/drawingml/2006/main" xmlns:r="http://schemas.openxmlformats.org/officeDocument/2006/relationships" xmlns:p="http://schemas.openxmlformats.org/presentationml/2006/main">
   <p:cSld>
     <p:spTree>
@@ -15917,1899 +10853,6 @@
       </p:grpSpPr>
       <p:grpSp>
         <p:nvGrpSpPr>
-          <p:cNvPr id="151" name="Group 150">
-            <a:extLst>
-              <a:ext uri="{FF2B5EF4-FFF2-40B4-BE49-F238E27FC236}">
-                <a16:creationId xmlns:a16="http://schemas.microsoft.com/office/drawing/2014/main" id="{FEFE4444-288E-9F92-35A8-814AA1E39F34}"/>
-              </a:ext>
-            </a:extLst>
-          </p:cNvPr>
-          <p:cNvGrpSpPr/>
-          <p:nvPr/>
-        </p:nvGrpSpPr>
-        <p:grpSpPr>
-          <a:xfrm>
-            <a:off x="84476" y="371799"/>
-            <a:ext cx="16750422" cy="2107707"/>
-            <a:chOff x="84476" y="371799"/>
-            <a:chExt cx="16750422" cy="2107707"/>
-          </a:xfrm>
-        </p:grpSpPr>
-        <p:sp>
-          <p:nvSpPr>
-            <p:cNvPr id="113" name="Rounded Rectangle 112">
-              <a:extLst>
-                <a:ext uri="{FF2B5EF4-FFF2-40B4-BE49-F238E27FC236}">
-                  <a16:creationId xmlns:a16="http://schemas.microsoft.com/office/drawing/2014/main" id="{A1540FC9-4ADD-FA5C-B4EC-26C61119D191}"/>
-                </a:ext>
-              </a:extLst>
-            </p:cNvPr>
-            <p:cNvSpPr/>
-            <p:nvPr/>
-          </p:nvSpPr>
-          <p:spPr>
-            <a:xfrm>
-              <a:off x="84476" y="371799"/>
-              <a:ext cx="7791352" cy="2097152"/>
-            </a:xfrm>
-            <a:prstGeom prst="roundRect">
-              <a:avLst>
-                <a:gd name="adj" fmla="val 21519"/>
-              </a:avLst>
-            </a:prstGeom>
-            <a:solidFill>
-              <a:srgbClr val="00B0F0">
-                <a:alpha val="25714"/>
-              </a:srgbClr>
-            </a:solidFill>
-            <a:ln w="34925">
-              <a:solidFill>
-                <a:srgbClr val="0070C0"/>
-              </a:solidFill>
-            </a:ln>
-          </p:spPr>
-          <p:style>
-            <a:lnRef idx="2">
-              <a:schemeClr val="accent1">
-                <a:shade val="15000"/>
-              </a:schemeClr>
-            </a:lnRef>
-            <a:fillRef idx="1">
-              <a:schemeClr val="accent1"/>
-            </a:fillRef>
-            <a:effectRef idx="0">
-              <a:schemeClr val="accent1"/>
-            </a:effectRef>
-            <a:fontRef idx="minor">
-              <a:schemeClr val="lt1"/>
-            </a:fontRef>
-          </p:style>
-          <p:txBody>
-            <a:bodyPr rtlCol="0" anchor="ctr"/>
-            <a:lstStyle/>
-            <a:p>
-              <a:pPr algn="ctr"/>
-              <a:endParaRPr lang="en-US"/>
-            </a:p>
-          </p:txBody>
-        </p:sp>
-        <p:pic>
-          <p:nvPicPr>
-            <p:cNvPr id="87" name="Graphic 86" descr="Bed with solid fill">
-              <a:extLst>
-                <a:ext uri="{FF2B5EF4-FFF2-40B4-BE49-F238E27FC236}">
-                  <a16:creationId xmlns:a16="http://schemas.microsoft.com/office/drawing/2014/main" id="{9386ABEC-692D-DC16-8CE3-86DB51B9C38A}"/>
-                </a:ext>
-              </a:extLst>
-            </p:cNvPr>
-            <p:cNvPicPr>
-              <a:picLocks noChangeAspect="1"/>
-            </p:cNvPicPr>
-            <p:nvPr/>
-          </p:nvPicPr>
-          <p:blipFill>
-            <a:blip>
-              <a:extLst>
-                <a:ext uri="{96DAC541-7B7A-43D3-8B79-37D633B846F1}">
-                  <asvg:svgBlip xmlns:asvg="http://schemas.microsoft.com/office/drawing/2016/SVG/main" r:embed="rId3"/>
-                </a:ext>
-              </a:extLst>
-            </a:blip>
-            <a:srcRect/>
-            <a:stretch/>
-          </p:blipFill>
-          <p:spPr>
-            <a:xfrm>
-              <a:off x="364115" y="707385"/>
-              <a:ext cx="634696" cy="634696"/>
-            </a:xfrm>
-            <a:prstGeom prst="rect">
-              <a:avLst/>
-            </a:prstGeom>
-          </p:spPr>
-        </p:pic>
-        <p:pic>
-          <p:nvPicPr>
-            <p:cNvPr id="88" name="Graphic 87" descr="Sleep with solid fill">
-              <a:extLst>
-                <a:ext uri="{FF2B5EF4-FFF2-40B4-BE49-F238E27FC236}">
-                  <a16:creationId xmlns:a16="http://schemas.microsoft.com/office/drawing/2014/main" id="{ACA9114A-50E6-3F9C-30AA-3DBF656020E9}"/>
-                </a:ext>
-              </a:extLst>
-            </p:cNvPr>
-            <p:cNvPicPr>
-              <a:picLocks noChangeAspect="1"/>
-            </p:cNvPicPr>
-            <p:nvPr/>
-          </p:nvPicPr>
-          <p:blipFill>
-            <a:blip>
-              <a:extLst>
-                <a:ext uri="{96DAC541-7B7A-43D3-8B79-37D633B846F1}">
-                  <asvg:svgBlip xmlns:asvg="http://schemas.microsoft.com/office/drawing/2016/SVG/main" r:embed="rId4"/>
-                </a:ext>
-              </a:extLst>
-            </a:blip>
-            <a:srcRect/>
-            <a:stretch/>
-          </p:blipFill>
-          <p:spPr>
-            <a:xfrm>
-              <a:off x="1429947" y="707385"/>
-              <a:ext cx="634696" cy="634696"/>
-            </a:xfrm>
-            <a:prstGeom prst="rect">
-              <a:avLst/>
-            </a:prstGeom>
-          </p:spPr>
-        </p:pic>
-        <p:pic>
-          <p:nvPicPr>
-            <p:cNvPr id="89" name="Graphic 88" descr="Sleep with solid fill">
-              <a:extLst>
-                <a:ext uri="{FF2B5EF4-FFF2-40B4-BE49-F238E27FC236}">
-                  <a16:creationId xmlns:a16="http://schemas.microsoft.com/office/drawing/2014/main" id="{7DE5CD83-1C46-15D6-E3D4-8B78B0E9C2D4}"/>
-                </a:ext>
-              </a:extLst>
-            </p:cNvPr>
-            <p:cNvPicPr>
-              <a:picLocks noChangeAspect="1"/>
-            </p:cNvPicPr>
-            <p:nvPr/>
-          </p:nvPicPr>
-          <p:blipFill>
-            <a:blip>
-              <a:extLst>
-                <a:ext uri="{96DAC541-7B7A-43D3-8B79-37D633B846F1}">
-                  <asvg:svgBlip xmlns:asvg="http://schemas.microsoft.com/office/drawing/2016/SVG/main" r:embed="rId5"/>
-                </a:ext>
-              </a:extLst>
-            </a:blip>
-            <a:srcRect/>
-            <a:stretch/>
-          </p:blipFill>
-          <p:spPr>
-            <a:xfrm>
-              <a:off x="2539280" y="707385"/>
-              <a:ext cx="634696" cy="634696"/>
-            </a:xfrm>
-            <a:prstGeom prst="rect">
-              <a:avLst/>
-            </a:prstGeom>
-          </p:spPr>
-        </p:pic>
-        <p:pic>
-          <p:nvPicPr>
-            <p:cNvPr id="90" name="Graphic 89" descr="Sleep with solid fill">
-              <a:extLst>
-                <a:ext uri="{FF2B5EF4-FFF2-40B4-BE49-F238E27FC236}">
-                  <a16:creationId xmlns:a16="http://schemas.microsoft.com/office/drawing/2014/main" id="{3DBDBF98-3A79-BE94-10D9-3224403209C6}"/>
-                </a:ext>
-              </a:extLst>
-            </p:cNvPr>
-            <p:cNvPicPr>
-              <a:picLocks noChangeAspect="1"/>
-            </p:cNvPicPr>
-            <p:nvPr/>
-          </p:nvPicPr>
-          <p:blipFill>
-            <a:blip>
-              <a:extLst>
-                <a:ext uri="{96DAC541-7B7A-43D3-8B79-37D633B846F1}">
-                  <asvg:svgBlip xmlns:asvg="http://schemas.microsoft.com/office/drawing/2016/SVG/main" r:embed="rId5"/>
-                </a:ext>
-              </a:extLst>
-            </a:blip>
-            <a:srcRect/>
-            <a:stretch/>
-          </p:blipFill>
-          <p:spPr>
-            <a:xfrm>
-              <a:off x="3605112" y="707385"/>
-              <a:ext cx="634696" cy="634696"/>
-            </a:xfrm>
-            <a:prstGeom prst="rect">
-              <a:avLst/>
-            </a:prstGeom>
-          </p:spPr>
-        </p:pic>
-        <p:pic>
-          <p:nvPicPr>
-            <p:cNvPr id="91" name="Graphic 90" descr="Bed with solid fill">
-              <a:extLst>
-                <a:ext uri="{FF2B5EF4-FFF2-40B4-BE49-F238E27FC236}">
-                  <a16:creationId xmlns:a16="http://schemas.microsoft.com/office/drawing/2014/main" id="{6A3E6F40-46C5-104D-FC8F-7013A1D557AE}"/>
-                </a:ext>
-              </a:extLst>
-            </p:cNvPr>
-            <p:cNvPicPr>
-              <a:picLocks noChangeAspect="1"/>
-            </p:cNvPicPr>
-            <p:nvPr/>
-          </p:nvPicPr>
-          <p:blipFill>
-            <a:blip>
-              <a:extLst>
-                <a:ext uri="{96DAC541-7B7A-43D3-8B79-37D633B846F1}">
-                  <asvg:svgBlip xmlns:asvg="http://schemas.microsoft.com/office/drawing/2016/SVG/main" r:embed="rId3"/>
-                </a:ext>
-              </a:extLst>
-            </a:blip>
-            <a:srcRect/>
-            <a:stretch/>
-          </p:blipFill>
-          <p:spPr>
-            <a:xfrm>
-              <a:off x="4724513" y="707385"/>
-              <a:ext cx="634696" cy="634696"/>
-            </a:xfrm>
-            <a:prstGeom prst="rect">
-              <a:avLst/>
-            </a:prstGeom>
-          </p:spPr>
-        </p:pic>
-        <p:pic>
-          <p:nvPicPr>
-            <p:cNvPr id="92" name="Graphic 91" descr="Sleep with solid fill">
-              <a:extLst>
-                <a:ext uri="{FF2B5EF4-FFF2-40B4-BE49-F238E27FC236}">
-                  <a16:creationId xmlns:a16="http://schemas.microsoft.com/office/drawing/2014/main" id="{A2CBB878-C5EA-7016-C24D-469F11982FF3}"/>
-                </a:ext>
-              </a:extLst>
-            </p:cNvPr>
-            <p:cNvPicPr>
-              <a:picLocks noChangeAspect="1"/>
-            </p:cNvPicPr>
-            <p:nvPr/>
-          </p:nvPicPr>
-          <p:blipFill>
-            <a:blip>
-              <a:extLst>
-                <a:ext uri="{96DAC541-7B7A-43D3-8B79-37D633B846F1}">
-                  <asvg:svgBlip xmlns:asvg="http://schemas.microsoft.com/office/drawing/2016/SVG/main" r:embed="rId6"/>
-                </a:ext>
-              </a:extLst>
-            </a:blip>
-            <a:srcRect/>
-            <a:stretch/>
-          </p:blipFill>
-          <p:spPr>
-            <a:xfrm>
-              <a:off x="5790345" y="707385"/>
-              <a:ext cx="634696" cy="634696"/>
-            </a:xfrm>
-            <a:prstGeom prst="rect">
-              <a:avLst/>
-            </a:prstGeom>
-          </p:spPr>
-        </p:pic>
-        <p:pic>
-          <p:nvPicPr>
-            <p:cNvPr id="93" name="Graphic 92" descr="Sleep with solid fill">
-              <a:extLst>
-                <a:ext uri="{FF2B5EF4-FFF2-40B4-BE49-F238E27FC236}">
-                  <a16:creationId xmlns:a16="http://schemas.microsoft.com/office/drawing/2014/main" id="{64EEB7D8-0889-631D-27B0-BC3E38B61367}"/>
-                </a:ext>
-              </a:extLst>
-            </p:cNvPr>
-            <p:cNvPicPr>
-              <a:picLocks noChangeAspect="1"/>
-            </p:cNvPicPr>
-            <p:nvPr/>
-          </p:nvPicPr>
-          <p:blipFill>
-            <a:blip>
-              <a:extLst>
-                <a:ext uri="{96DAC541-7B7A-43D3-8B79-37D633B846F1}">
-                  <asvg:svgBlip xmlns:asvg="http://schemas.microsoft.com/office/drawing/2016/SVG/main" r:embed="rId7"/>
-                </a:ext>
-              </a:extLst>
-            </a:blip>
-            <a:srcRect/>
-            <a:stretch/>
-          </p:blipFill>
-          <p:spPr>
-            <a:xfrm>
-              <a:off x="6899678" y="707385"/>
-              <a:ext cx="634696" cy="634696"/>
-            </a:xfrm>
-            <a:prstGeom prst="rect">
-              <a:avLst/>
-            </a:prstGeom>
-          </p:spPr>
-        </p:pic>
-        <p:sp>
-          <p:nvSpPr>
-            <p:cNvPr id="95" name="TextBox 94">
-              <a:extLst>
-                <a:ext uri="{FF2B5EF4-FFF2-40B4-BE49-F238E27FC236}">
-                  <a16:creationId xmlns:a16="http://schemas.microsoft.com/office/drawing/2014/main" id="{C824215A-B707-C9E4-B869-D290CF992198}"/>
-                </a:ext>
-              </a:extLst>
-            </p:cNvPr>
-            <p:cNvSpPr txBox="1"/>
-            <p:nvPr/>
-          </p:nvSpPr>
-          <p:spPr>
-            <a:xfrm>
-              <a:off x="432563" y="552869"/>
-              <a:ext cx="570990" cy="369332"/>
-            </a:xfrm>
-            <a:prstGeom prst="rect">
-              <a:avLst/>
-            </a:prstGeom>
-            <a:noFill/>
-          </p:spPr>
-          <p:txBody>
-            <a:bodyPr wrap="none" rtlCol="0">
-              <a:spAutoFit/>
-            </a:bodyPr>
-            <a:lstStyle/>
-            <a:p>
-              <a:r>
-                <a:rPr lang="en-US" dirty="0"/>
-                <a:t>B08</a:t>
-              </a:r>
-            </a:p>
-          </p:txBody>
-        </p:sp>
-        <p:sp>
-          <p:nvSpPr>
-            <p:cNvPr id="96" name="TextBox 95">
-              <a:extLst>
-                <a:ext uri="{FF2B5EF4-FFF2-40B4-BE49-F238E27FC236}">
-                  <a16:creationId xmlns:a16="http://schemas.microsoft.com/office/drawing/2014/main" id="{BFC54B12-C692-C3CD-B236-6FC8526CD127}"/>
-                </a:ext>
-              </a:extLst>
-            </p:cNvPr>
-            <p:cNvSpPr txBox="1"/>
-            <p:nvPr/>
-          </p:nvSpPr>
-          <p:spPr>
-            <a:xfrm>
-              <a:off x="1494368" y="552869"/>
-              <a:ext cx="570990" cy="369332"/>
-            </a:xfrm>
-            <a:prstGeom prst="rect">
-              <a:avLst/>
-            </a:prstGeom>
-            <a:noFill/>
-          </p:spPr>
-          <p:txBody>
-            <a:bodyPr wrap="none" rtlCol="0">
-              <a:spAutoFit/>
-            </a:bodyPr>
-            <a:lstStyle/>
-            <a:p>
-              <a:r>
-                <a:rPr lang="en-US" dirty="0"/>
-                <a:t>B09</a:t>
-              </a:r>
-            </a:p>
-          </p:txBody>
-        </p:sp>
-        <p:sp>
-          <p:nvSpPr>
-            <p:cNvPr id="97" name="TextBox 96">
-              <a:extLst>
-                <a:ext uri="{FF2B5EF4-FFF2-40B4-BE49-F238E27FC236}">
-                  <a16:creationId xmlns:a16="http://schemas.microsoft.com/office/drawing/2014/main" id="{C210A5F0-2679-8FA5-1250-14A64408EBFF}"/>
-                </a:ext>
-              </a:extLst>
-            </p:cNvPr>
-            <p:cNvSpPr txBox="1"/>
-            <p:nvPr/>
-          </p:nvSpPr>
-          <p:spPr>
-            <a:xfrm>
-              <a:off x="2561028" y="552869"/>
-              <a:ext cx="570990" cy="369332"/>
-            </a:xfrm>
-            <a:prstGeom prst="rect">
-              <a:avLst/>
-            </a:prstGeom>
-            <a:noFill/>
-          </p:spPr>
-          <p:txBody>
-            <a:bodyPr wrap="none" rtlCol="0">
-              <a:spAutoFit/>
-            </a:bodyPr>
-            <a:lstStyle/>
-            <a:p>
-              <a:r>
-                <a:rPr lang="en-US" dirty="0"/>
-                <a:t>B10</a:t>
-              </a:r>
-            </a:p>
-          </p:txBody>
-        </p:sp>
-        <p:sp>
-          <p:nvSpPr>
-            <p:cNvPr id="98" name="TextBox 97">
-              <a:extLst>
-                <a:ext uri="{FF2B5EF4-FFF2-40B4-BE49-F238E27FC236}">
-                  <a16:creationId xmlns:a16="http://schemas.microsoft.com/office/drawing/2014/main" id="{6A98972F-F41D-8BD9-BBC9-C1C4A8A2A62E}"/>
-                </a:ext>
-              </a:extLst>
-            </p:cNvPr>
-            <p:cNvSpPr txBox="1"/>
-            <p:nvPr/>
-          </p:nvSpPr>
-          <p:spPr>
-            <a:xfrm>
-              <a:off x="3650588" y="552869"/>
-              <a:ext cx="570990" cy="369332"/>
-            </a:xfrm>
-            <a:prstGeom prst="rect">
-              <a:avLst/>
-            </a:prstGeom>
-            <a:noFill/>
-          </p:spPr>
-          <p:txBody>
-            <a:bodyPr wrap="none" rtlCol="0">
-              <a:spAutoFit/>
-            </a:bodyPr>
-            <a:lstStyle/>
-            <a:p>
-              <a:r>
-                <a:rPr lang="en-US" dirty="0"/>
-                <a:t>B11</a:t>
-              </a:r>
-            </a:p>
-          </p:txBody>
-        </p:sp>
-        <p:sp>
-          <p:nvSpPr>
-            <p:cNvPr id="99" name="TextBox 98">
-              <a:extLst>
-                <a:ext uri="{FF2B5EF4-FFF2-40B4-BE49-F238E27FC236}">
-                  <a16:creationId xmlns:a16="http://schemas.microsoft.com/office/drawing/2014/main" id="{F1E2729E-D7BA-7607-952E-0FF750B6D6AC}"/>
-                </a:ext>
-              </a:extLst>
-            </p:cNvPr>
-            <p:cNvSpPr txBox="1"/>
-            <p:nvPr/>
-          </p:nvSpPr>
-          <p:spPr>
-            <a:xfrm>
-              <a:off x="4770382" y="557458"/>
-              <a:ext cx="570990" cy="369332"/>
-            </a:xfrm>
-            <a:prstGeom prst="rect">
-              <a:avLst/>
-            </a:prstGeom>
-            <a:noFill/>
-          </p:spPr>
-          <p:txBody>
-            <a:bodyPr wrap="none" rtlCol="0">
-              <a:spAutoFit/>
-            </a:bodyPr>
-            <a:lstStyle/>
-            <a:p>
-              <a:r>
-                <a:rPr lang="en-US" dirty="0"/>
-                <a:t>B12</a:t>
-              </a:r>
-            </a:p>
-          </p:txBody>
-        </p:sp>
-        <p:sp>
-          <p:nvSpPr>
-            <p:cNvPr id="100" name="TextBox 99">
-              <a:extLst>
-                <a:ext uri="{FF2B5EF4-FFF2-40B4-BE49-F238E27FC236}">
-                  <a16:creationId xmlns:a16="http://schemas.microsoft.com/office/drawing/2014/main" id="{8A72836C-15DC-874D-45B2-5AAFC07F9060}"/>
-                </a:ext>
-              </a:extLst>
-            </p:cNvPr>
-            <p:cNvSpPr txBox="1"/>
-            <p:nvPr/>
-          </p:nvSpPr>
-          <p:spPr>
-            <a:xfrm>
-              <a:off x="5832187" y="557458"/>
-              <a:ext cx="570990" cy="369332"/>
-            </a:xfrm>
-            <a:prstGeom prst="rect">
-              <a:avLst/>
-            </a:prstGeom>
-            <a:noFill/>
-          </p:spPr>
-          <p:txBody>
-            <a:bodyPr wrap="none" rtlCol="0">
-              <a:spAutoFit/>
-            </a:bodyPr>
-            <a:lstStyle/>
-            <a:p>
-              <a:r>
-                <a:rPr lang="en-US" dirty="0"/>
-                <a:t>B13</a:t>
-              </a:r>
-            </a:p>
-          </p:txBody>
-        </p:sp>
-        <p:sp>
-          <p:nvSpPr>
-            <p:cNvPr id="101" name="TextBox 100">
-              <a:extLst>
-                <a:ext uri="{FF2B5EF4-FFF2-40B4-BE49-F238E27FC236}">
-                  <a16:creationId xmlns:a16="http://schemas.microsoft.com/office/drawing/2014/main" id="{0DB17C08-71EF-190D-507B-A75ACA877BB6}"/>
-                </a:ext>
-              </a:extLst>
-            </p:cNvPr>
-            <p:cNvSpPr txBox="1"/>
-            <p:nvPr/>
-          </p:nvSpPr>
-          <p:spPr>
-            <a:xfrm>
-              <a:off x="6898847" y="557458"/>
-              <a:ext cx="570990" cy="369332"/>
-            </a:xfrm>
-            <a:prstGeom prst="rect">
-              <a:avLst/>
-            </a:prstGeom>
-            <a:noFill/>
-          </p:spPr>
-          <p:txBody>
-            <a:bodyPr wrap="none" rtlCol="0">
-              <a:spAutoFit/>
-            </a:bodyPr>
-            <a:lstStyle/>
-            <a:p>
-              <a:r>
-                <a:rPr lang="en-US" dirty="0"/>
-                <a:t>B14</a:t>
-              </a:r>
-            </a:p>
-          </p:txBody>
-        </p:sp>
-        <p:sp>
-          <p:nvSpPr>
-            <p:cNvPr id="103" name="Left Bracket 102">
-              <a:extLst>
-                <a:ext uri="{FF2B5EF4-FFF2-40B4-BE49-F238E27FC236}">
-                  <a16:creationId xmlns:a16="http://schemas.microsoft.com/office/drawing/2014/main" id="{A170DE1D-421D-2C53-6861-877010554EFC}"/>
-                </a:ext>
-              </a:extLst>
-            </p:cNvPr>
-            <p:cNvSpPr/>
-            <p:nvPr/>
-          </p:nvSpPr>
-          <p:spPr>
-            <a:xfrm rot="16200000">
-              <a:off x="3199409" y="324153"/>
-              <a:ext cx="369333" cy="2035851"/>
-            </a:xfrm>
-            <a:prstGeom prst="leftBracket">
-              <a:avLst/>
-            </a:prstGeom>
-            <a:ln w="25400">
-              <a:solidFill>
-                <a:schemeClr val="tx1"/>
-              </a:solidFill>
-            </a:ln>
-          </p:spPr>
-          <p:style>
-            <a:lnRef idx="2">
-              <a:schemeClr val="accent1"/>
-            </a:lnRef>
-            <a:fillRef idx="0">
-              <a:schemeClr val="accent1"/>
-            </a:fillRef>
-            <a:effectRef idx="1">
-              <a:schemeClr val="accent1"/>
-            </a:effectRef>
-            <a:fontRef idx="minor">
-              <a:schemeClr val="tx1"/>
-            </a:fontRef>
-          </p:style>
-          <p:txBody>
-            <a:bodyPr rtlCol="0" anchor="ctr"/>
-            <a:lstStyle/>
-            <a:p>
-              <a:pPr algn="ctr"/>
-              <a:endParaRPr lang="en-US"/>
-            </a:p>
-          </p:txBody>
-        </p:sp>
-        <p:sp>
-          <p:nvSpPr>
-            <p:cNvPr id="104" name="Left Bracket 103">
-              <a:extLst>
-                <a:ext uri="{FF2B5EF4-FFF2-40B4-BE49-F238E27FC236}">
-                  <a16:creationId xmlns:a16="http://schemas.microsoft.com/office/drawing/2014/main" id="{05921564-1889-9429-8749-01ADFF536291}"/>
-                </a:ext>
-              </a:extLst>
-            </p:cNvPr>
-            <p:cNvSpPr/>
-            <p:nvPr/>
-          </p:nvSpPr>
-          <p:spPr>
-            <a:xfrm rot="16200000">
-              <a:off x="1566183" y="891547"/>
-              <a:ext cx="369333" cy="901063"/>
-            </a:xfrm>
-            <a:prstGeom prst="leftBracket">
-              <a:avLst/>
-            </a:prstGeom>
-            <a:ln w="25400">
-              <a:solidFill>
-                <a:schemeClr val="tx1"/>
-              </a:solidFill>
-            </a:ln>
-          </p:spPr>
-          <p:style>
-            <a:lnRef idx="2">
-              <a:schemeClr val="accent1"/>
-            </a:lnRef>
-            <a:fillRef idx="0">
-              <a:schemeClr val="accent1"/>
-            </a:fillRef>
-            <a:effectRef idx="1">
-              <a:schemeClr val="accent1"/>
-            </a:effectRef>
-            <a:fontRef idx="minor">
-              <a:schemeClr val="tx1"/>
-            </a:fontRef>
-          </p:style>
-          <p:txBody>
-            <a:bodyPr rtlCol="0" anchor="ctr"/>
-            <a:lstStyle/>
-            <a:p>
-              <a:pPr algn="ctr"/>
-              <a:endParaRPr lang="en-US"/>
-            </a:p>
-          </p:txBody>
-        </p:sp>
-        <p:pic>
-          <p:nvPicPr>
-            <p:cNvPr id="108" name="Graphic 107" descr="Doctor male with solid fill">
-              <a:extLst>
-                <a:ext uri="{FF2B5EF4-FFF2-40B4-BE49-F238E27FC236}">
-                  <a16:creationId xmlns:a16="http://schemas.microsoft.com/office/drawing/2014/main" id="{CB2C7BDE-2E65-7ED0-1ABF-8AC256E520FC}"/>
-                </a:ext>
-              </a:extLst>
-            </p:cNvPr>
-            <p:cNvPicPr>
-              <a:picLocks noChangeAspect="1"/>
-            </p:cNvPicPr>
-            <p:nvPr/>
-          </p:nvPicPr>
-          <p:blipFill>
-            <a:blip>
-              <a:extLst>
-                <a:ext uri="{96DAC541-7B7A-43D3-8B79-37D633B846F1}">
-                  <asvg:svgBlip xmlns:asvg="http://schemas.microsoft.com/office/drawing/2016/SVG/main" r:embed="rId8"/>
-                </a:ext>
-              </a:extLst>
-            </a:blip>
-            <a:stretch>
-              <a:fillRect/>
-            </a:stretch>
-          </p:blipFill>
-          <p:spPr>
-            <a:xfrm>
-              <a:off x="3065647" y="1577292"/>
-              <a:ext cx="636856" cy="636856"/>
-            </a:xfrm>
-            <a:prstGeom prst="rect">
-              <a:avLst/>
-            </a:prstGeom>
-          </p:spPr>
-        </p:pic>
-        <p:pic>
-          <p:nvPicPr>
-            <p:cNvPr id="109" name="Graphic 108" descr="Doctor female with solid fill">
-              <a:extLst>
-                <a:ext uri="{FF2B5EF4-FFF2-40B4-BE49-F238E27FC236}">
-                  <a16:creationId xmlns:a16="http://schemas.microsoft.com/office/drawing/2014/main" id="{DA556557-4A21-B133-BC24-B60D9DAA6B42}"/>
-                </a:ext>
-              </a:extLst>
-            </p:cNvPr>
-            <p:cNvPicPr>
-              <a:picLocks noChangeAspect="1"/>
-            </p:cNvPicPr>
-            <p:nvPr/>
-          </p:nvPicPr>
-          <p:blipFill>
-            <a:blip>
-              <a:extLst>
-                <a:ext uri="{96DAC541-7B7A-43D3-8B79-37D633B846F1}">
-                  <asvg:svgBlip xmlns:asvg="http://schemas.microsoft.com/office/drawing/2016/SVG/main" r:embed="rId9"/>
-                </a:ext>
-              </a:extLst>
-            </a:blip>
-            <a:stretch>
-              <a:fillRect/>
-            </a:stretch>
-          </p:blipFill>
-          <p:spPr>
-            <a:xfrm>
-              <a:off x="1429947" y="1577292"/>
-              <a:ext cx="636856" cy="636856"/>
-            </a:xfrm>
-            <a:prstGeom prst="rect">
-              <a:avLst/>
-            </a:prstGeom>
-          </p:spPr>
-        </p:pic>
-        <p:pic>
-          <p:nvPicPr>
-            <p:cNvPr id="111" name="Graphic 110" descr="Doctor female with solid fill">
-              <a:extLst>
-                <a:ext uri="{FF2B5EF4-FFF2-40B4-BE49-F238E27FC236}">
-                  <a16:creationId xmlns:a16="http://schemas.microsoft.com/office/drawing/2014/main" id="{6477F368-C4F4-683A-BC4C-444F35517229}"/>
-                </a:ext>
-              </a:extLst>
-            </p:cNvPr>
-            <p:cNvPicPr>
-              <a:picLocks noChangeAspect="1"/>
-            </p:cNvPicPr>
-            <p:nvPr/>
-          </p:nvPicPr>
-          <p:blipFill>
-            <a:blip>
-              <a:extLst>
-                <a:ext uri="{96DAC541-7B7A-43D3-8B79-37D633B846F1}">
-                  <asvg:svgBlip xmlns:asvg="http://schemas.microsoft.com/office/drawing/2016/SVG/main" r:embed="rId9"/>
-                </a:ext>
-              </a:extLst>
-            </a:blip>
-            <a:stretch>
-              <a:fillRect/>
-            </a:stretch>
-          </p:blipFill>
-          <p:spPr>
-            <a:xfrm>
-              <a:off x="5766321" y="1577292"/>
-              <a:ext cx="636856" cy="636856"/>
-            </a:xfrm>
-            <a:prstGeom prst="rect">
-              <a:avLst/>
-            </a:prstGeom>
-          </p:spPr>
-        </p:pic>
-        <p:sp>
-          <p:nvSpPr>
-            <p:cNvPr id="50" name="Left Bracket 49">
-              <a:extLst>
-                <a:ext uri="{FF2B5EF4-FFF2-40B4-BE49-F238E27FC236}">
-                  <a16:creationId xmlns:a16="http://schemas.microsoft.com/office/drawing/2014/main" id="{1C651EA5-DDEA-6F80-A382-B3F7904FEE48}"/>
-                </a:ext>
-              </a:extLst>
-            </p:cNvPr>
-            <p:cNvSpPr/>
-            <p:nvPr/>
-          </p:nvSpPr>
-          <p:spPr>
-            <a:xfrm rot="16200000">
-              <a:off x="5923026" y="887124"/>
-              <a:ext cx="369333" cy="901063"/>
-            </a:xfrm>
-            <a:prstGeom prst="leftBracket">
-              <a:avLst/>
-            </a:prstGeom>
-            <a:ln w="25400">
-              <a:solidFill>
-                <a:schemeClr val="tx1"/>
-              </a:solidFill>
-            </a:ln>
-          </p:spPr>
-          <p:style>
-            <a:lnRef idx="2">
-              <a:schemeClr val="accent1"/>
-            </a:lnRef>
-            <a:fillRef idx="0">
-              <a:schemeClr val="accent1"/>
-            </a:fillRef>
-            <a:effectRef idx="1">
-              <a:schemeClr val="accent1"/>
-            </a:effectRef>
-            <a:fontRef idx="minor">
-              <a:schemeClr val="tx1"/>
-            </a:fontRef>
-          </p:style>
-          <p:txBody>
-            <a:bodyPr rtlCol="0" anchor="ctr"/>
-            <a:lstStyle/>
-            <a:p>
-              <a:pPr algn="ctr"/>
-              <a:endParaRPr lang="en-US"/>
-            </a:p>
-          </p:txBody>
-        </p:sp>
-        <p:sp>
-          <p:nvSpPr>
-            <p:cNvPr id="51" name="Left Bracket 50">
-              <a:extLst>
-                <a:ext uri="{FF2B5EF4-FFF2-40B4-BE49-F238E27FC236}">
-                  <a16:creationId xmlns:a16="http://schemas.microsoft.com/office/drawing/2014/main" id="{3F391361-F5A2-AD35-2AE1-7E4A3C51D4BE}"/>
-                </a:ext>
-              </a:extLst>
-            </p:cNvPr>
-            <p:cNvSpPr/>
-            <p:nvPr/>
-          </p:nvSpPr>
-          <p:spPr>
-            <a:xfrm rot="16200000">
-              <a:off x="6999675" y="887124"/>
-              <a:ext cx="369333" cy="901063"/>
-            </a:xfrm>
-            <a:prstGeom prst="leftBracket">
-              <a:avLst/>
-            </a:prstGeom>
-            <a:ln w="25400">
-              <a:solidFill>
-                <a:schemeClr val="tx1"/>
-              </a:solidFill>
-            </a:ln>
-          </p:spPr>
-          <p:style>
-            <a:lnRef idx="2">
-              <a:schemeClr val="accent1"/>
-            </a:lnRef>
-            <a:fillRef idx="0">
-              <a:schemeClr val="accent1"/>
-            </a:fillRef>
-            <a:effectRef idx="1">
-              <a:schemeClr val="accent1"/>
-            </a:effectRef>
-            <a:fontRef idx="minor">
-              <a:schemeClr val="tx1"/>
-            </a:fontRef>
-          </p:style>
-          <p:txBody>
-            <a:bodyPr rtlCol="0" anchor="ctr"/>
-            <a:lstStyle/>
-            <a:p>
-              <a:pPr algn="ctr"/>
-              <a:endParaRPr lang="en-US"/>
-            </a:p>
-          </p:txBody>
-        </p:sp>
-        <p:pic>
-          <p:nvPicPr>
-            <p:cNvPr id="52" name="Graphic 51" descr="Doctor male with solid fill">
-              <a:extLst>
-                <a:ext uri="{FF2B5EF4-FFF2-40B4-BE49-F238E27FC236}">
-                  <a16:creationId xmlns:a16="http://schemas.microsoft.com/office/drawing/2014/main" id="{1B08D3DB-F643-53FF-40D1-29AD16AA17A3}"/>
-                </a:ext>
-              </a:extLst>
-            </p:cNvPr>
-            <p:cNvPicPr>
-              <a:picLocks noChangeAspect="1"/>
-            </p:cNvPicPr>
-            <p:nvPr/>
-          </p:nvPicPr>
-          <p:blipFill>
-            <a:blip>
-              <a:extLst>
-                <a:ext uri="{96DAC541-7B7A-43D3-8B79-37D633B846F1}">
-                  <asvg:svgBlip xmlns:asvg="http://schemas.microsoft.com/office/drawing/2016/SVG/main" r:embed="rId8"/>
-                </a:ext>
-              </a:extLst>
-            </a:blip>
-            <a:stretch>
-              <a:fillRect/>
-            </a:stretch>
-          </p:blipFill>
-          <p:spPr>
-            <a:xfrm>
-              <a:off x="6872004" y="1588917"/>
-              <a:ext cx="636856" cy="636856"/>
-            </a:xfrm>
-            <a:prstGeom prst="rect">
-              <a:avLst/>
-            </a:prstGeom>
-          </p:spPr>
-        </p:pic>
-        <p:sp>
-          <p:nvSpPr>
-            <p:cNvPr id="122" name="Rounded Rectangle 121">
-              <a:extLst>
-                <a:ext uri="{FF2B5EF4-FFF2-40B4-BE49-F238E27FC236}">
-                  <a16:creationId xmlns:a16="http://schemas.microsoft.com/office/drawing/2014/main" id="{2AD281CF-5C4E-BD61-EF88-5F6EE52F32D1}"/>
-                </a:ext>
-              </a:extLst>
-            </p:cNvPr>
-            <p:cNvSpPr/>
-            <p:nvPr/>
-          </p:nvSpPr>
-          <p:spPr>
-            <a:xfrm>
-              <a:off x="9043546" y="382354"/>
-              <a:ext cx="7791352" cy="2097152"/>
-            </a:xfrm>
-            <a:prstGeom prst="roundRect">
-              <a:avLst>
-                <a:gd name="adj" fmla="val 21519"/>
-              </a:avLst>
-            </a:prstGeom>
-            <a:solidFill>
-              <a:srgbClr val="00B0F0">
-                <a:alpha val="25714"/>
-              </a:srgbClr>
-            </a:solidFill>
-            <a:ln w="34925">
-              <a:solidFill>
-                <a:srgbClr val="0070C0"/>
-              </a:solidFill>
-            </a:ln>
-          </p:spPr>
-          <p:style>
-            <a:lnRef idx="2">
-              <a:schemeClr val="accent1">
-                <a:shade val="15000"/>
-              </a:schemeClr>
-            </a:lnRef>
-            <a:fillRef idx="1">
-              <a:schemeClr val="accent1"/>
-            </a:fillRef>
-            <a:effectRef idx="0">
-              <a:schemeClr val="accent1"/>
-            </a:effectRef>
-            <a:fontRef idx="minor">
-              <a:schemeClr val="lt1"/>
-            </a:fontRef>
-          </p:style>
-          <p:txBody>
-            <a:bodyPr rtlCol="0" anchor="ctr"/>
-            <a:lstStyle/>
-            <a:p>
-              <a:pPr algn="ctr"/>
-              <a:endParaRPr lang="en-US"/>
-            </a:p>
-          </p:txBody>
-        </p:sp>
-        <p:pic>
-          <p:nvPicPr>
-            <p:cNvPr id="123" name="Graphic 122" descr="Sleep with solid fill">
-              <a:extLst>
-                <a:ext uri="{FF2B5EF4-FFF2-40B4-BE49-F238E27FC236}">
-                  <a16:creationId xmlns:a16="http://schemas.microsoft.com/office/drawing/2014/main" id="{A04AD26A-82E5-E2AB-2942-A5BC344E20E3}"/>
-                </a:ext>
-              </a:extLst>
-            </p:cNvPr>
-            <p:cNvPicPr>
-              <a:picLocks noChangeAspect="1"/>
-            </p:cNvPicPr>
-            <p:nvPr/>
-          </p:nvPicPr>
-          <p:blipFill>
-            <a:blip>
-              <a:extLst>
-                <a:ext uri="{96DAC541-7B7A-43D3-8B79-37D633B846F1}">
-                  <asvg:svgBlip xmlns:asvg="http://schemas.microsoft.com/office/drawing/2016/SVG/main" r:embed="rId7"/>
-                </a:ext>
-              </a:extLst>
-            </a:blip>
-            <a:srcRect/>
-            <a:stretch/>
-          </p:blipFill>
-          <p:spPr>
-            <a:xfrm>
-              <a:off x="9323185" y="717940"/>
-              <a:ext cx="634696" cy="634696"/>
-            </a:xfrm>
-            <a:prstGeom prst="rect">
-              <a:avLst/>
-            </a:prstGeom>
-          </p:spPr>
-        </p:pic>
-        <p:pic>
-          <p:nvPicPr>
-            <p:cNvPr id="124" name="Graphic 123" descr="Sleep with solid fill">
-              <a:extLst>
-                <a:ext uri="{FF2B5EF4-FFF2-40B4-BE49-F238E27FC236}">
-                  <a16:creationId xmlns:a16="http://schemas.microsoft.com/office/drawing/2014/main" id="{E5C33630-689E-FA0E-98B1-6B33DBB3C03D}"/>
-                </a:ext>
-              </a:extLst>
-            </p:cNvPr>
-            <p:cNvPicPr>
-              <a:picLocks noChangeAspect="1"/>
-            </p:cNvPicPr>
-            <p:nvPr/>
-          </p:nvPicPr>
-          <p:blipFill>
-            <a:blip>
-              <a:extLst>
-                <a:ext uri="{96DAC541-7B7A-43D3-8B79-37D633B846F1}">
-                  <asvg:svgBlip xmlns:asvg="http://schemas.microsoft.com/office/drawing/2016/SVG/main" r:embed="rId5"/>
-                </a:ext>
-              </a:extLst>
-            </a:blip>
-            <a:srcRect/>
-            <a:stretch/>
-          </p:blipFill>
-          <p:spPr>
-            <a:xfrm>
-              <a:off x="10389017" y="717940"/>
-              <a:ext cx="634696" cy="634696"/>
-            </a:xfrm>
-            <a:prstGeom prst="rect">
-              <a:avLst/>
-            </a:prstGeom>
-          </p:spPr>
-        </p:pic>
-        <p:pic>
-          <p:nvPicPr>
-            <p:cNvPr id="125" name="Graphic 124" descr="Bed with solid fill">
-              <a:extLst>
-                <a:ext uri="{FF2B5EF4-FFF2-40B4-BE49-F238E27FC236}">
-                  <a16:creationId xmlns:a16="http://schemas.microsoft.com/office/drawing/2014/main" id="{9D5800A1-C62C-FF09-BD70-4648019B4319}"/>
-                </a:ext>
-              </a:extLst>
-            </p:cNvPr>
-            <p:cNvPicPr>
-              <a:picLocks noChangeAspect="1"/>
-            </p:cNvPicPr>
-            <p:nvPr/>
-          </p:nvPicPr>
-          <p:blipFill>
-            <a:blip>
-              <a:extLst>
-                <a:ext uri="{96DAC541-7B7A-43D3-8B79-37D633B846F1}">
-                  <asvg:svgBlip xmlns:asvg="http://schemas.microsoft.com/office/drawing/2016/SVG/main" r:embed="rId3"/>
-                </a:ext>
-              </a:extLst>
-            </a:blip>
-            <a:srcRect/>
-            <a:stretch/>
-          </p:blipFill>
-          <p:spPr>
-            <a:xfrm>
-              <a:off x="11498350" y="717940"/>
-              <a:ext cx="634696" cy="634696"/>
-            </a:xfrm>
-            <a:prstGeom prst="rect">
-              <a:avLst/>
-            </a:prstGeom>
-          </p:spPr>
-        </p:pic>
-        <p:pic>
-          <p:nvPicPr>
-            <p:cNvPr id="126" name="Graphic 125" descr="Sleep with solid fill">
-              <a:extLst>
-                <a:ext uri="{FF2B5EF4-FFF2-40B4-BE49-F238E27FC236}">
-                  <a16:creationId xmlns:a16="http://schemas.microsoft.com/office/drawing/2014/main" id="{204D9E95-8CF9-E29A-3131-97DD0A74A626}"/>
-                </a:ext>
-              </a:extLst>
-            </p:cNvPr>
-            <p:cNvPicPr>
-              <a:picLocks noChangeAspect="1"/>
-            </p:cNvPicPr>
-            <p:nvPr/>
-          </p:nvPicPr>
-          <p:blipFill>
-            <a:blip>
-              <a:extLst>
-                <a:ext uri="{96DAC541-7B7A-43D3-8B79-37D633B846F1}">
-                  <asvg:svgBlip xmlns:asvg="http://schemas.microsoft.com/office/drawing/2016/SVG/main" r:embed="rId5"/>
-                </a:ext>
-              </a:extLst>
-            </a:blip>
-            <a:srcRect/>
-            <a:stretch/>
-          </p:blipFill>
-          <p:spPr>
-            <a:xfrm>
-              <a:off x="12564182" y="717940"/>
-              <a:ext cx="634696" cy="634696"/>
-            </a:xfrm>
-            <a:prstGeom prst="rect">
-              <a:avLst/>
-            </a:prstGeom>
-          </p:spPr>
-        </p:pic>
-        <p:pic>
-          <p:nvPicPr>
-            <p:cNvPr id="127" name="Graphic 126" descr="Sleep with solid fill">
-              <a:extLst>
-                <a:ext uri="{FF2B5EF4-FFF2-40B4-BE49-F238E27FC236}">
-                  <a16:creationId xmlns:a16="http://schemas.microsoft.com/office/drawing/2014/main" id="{3ADD6AC0-AC70-8A86-F894-EF802C6F02C6}"/>
-                </a:ext>
-              </a:extLst>
-            </p:cNvPr>
-            <p:cNvPicPr>
-              <a:picLocks noChangeAspect="1"/>
-            </p:cNvPicPr>
-            <p:nvPr/>
-          </p:nvPicPr>
-          <p:blipFill>
-            <a:blip>
-              <a:extLst>
-                <a:ext uri="{96DAC541-7B7A-43D3-8B79-37D633B846F1}">
-                  <asvg:svgBlip xmlns:asvg="http://schemas.microsoft.com/office/drawing/2016/SVG/main" r:embed="rId6"/>
-                </a:ext>
-              </a:extLst>
-            </a:blip>
-            <a:srcRect/>
-            <a:stretch/>
-          </p:blipFill>
-          <p:spPr>
-            <a:xfrm>
-              <a:off x="13683583" y="717940"/>
-              <a:ext cx="634696" cy="634696"/>
-            </a:xfrm>
-            <a:prstGeom prst="rect">
-              <a:avLst/>
-            </a:prstGeom>
-          </p:spPr>
-        </p:pic>
-        <p:pic>
-          <p:nvPicPr>
-            <p:cNvPr id="128" name="Graphic 127" descr="Sleep with solid fill">
-              <a:extLst>
-                <a:ext uri="{FF2B5EF4-FFF2-40B4-BE49-F238E27FC236}">
-                  <a16:creationId xmlns:a16="http://schemas.microsoft.com/office/drawing/2014/main" id="{E56DBECC-1042-1B20-57D3-E112E86D2D64}"/>
-                </a:ext>
-              </a:extLst>
-            </p:cNvPr>
-            <p:cNvPicPr>
-              <a:picLocks noChangeAspect="1"/>
-            </p:cNvPicPr>
-            <p:nvPr/>
-          </p:nvPicPr>
-          <p:blipFill>
-            <a:blip>
-              <a:extLst>
-                <a:ext uri="{96DAC541-7B7A-43D3-8B79-37D633B846F1}">
-                  <asvg:svgBlip xmlns:asvg="http://schemas.microsoft.com/office/drawing/2016/SVG/main" r:embed="rId10"/>
-                </a:ext>
-              </a:extLst>
-            </a:blip>
-            <a:srcRect/>
-            <a:stretch/>
-          </p:blipFill>
-          <p:spPr>
-            <a:xfrm>
-              <a:off x="14749415" y="717940"/>
-              <a:ext cx="634696" cy="634696"/>
-            </a:xfrm>
-            <a:prstGeom prst="rect">
-              <a:avLst/>
-            </a:prstGeom>
-          </p:spPr>
-        </p:pic>
-        <p:pic>
-          <p:nvPicPr>
-            <p:cNvPr id="129" name="Graphic 128" descr="Bed with solid fill">
-              <a:extLst>
-                <a:ext uri="{FF2B5EF4-FFF2-40B4-BE49-F238E27FC236}">
-                  <a16:creationId xmlns:a16="http://schemas.microsoft.com/office/drawing/2014/main" id="{72E44A4C-2670-CBCE-C1D5-84D98A8CA9A0}"/>
-                </a:ext>
-              </a:extLst>
-            </p:cNvPr>
-            <p:cNvPicPr>
-              <a:picLocks noChangeAspect="1"/>
-            </p:cNvPicPr>
-            <p:nvPr/>
-          </p:nvPicPr>
-          <p:blipFill>
-            <a:blip>
-              <a:extLst>
-                <a:ext uri="{96DAC541-7B7A-43D3-8B79-37D633B846F1}">
-                  <asvg:svgBlip xmlns:asvg="http://schemas.microsoft.com/office/drawing/2016/SVG/main" r:embed="rId3"/>
-                </a:ext>
-              </a:extLst>
-            </a:blip>
-            <a:srcRect/>
-            <a:stretch/>
-          </p:blipFill>
-          <p:spPr>
-            <a:xfrm>
-              <a:off x="15858748" y="717940"/>
-              <a:ext cx="634696" cy="634696"/>
-            </a:xfrm>
-            <a:prstGeom prst="rect">
-              <a:avLst/>
-            </a:prstGeom>
-          </p:spPr>
-        </p:pic>
-        <p:sp>
-          <p:nvSpPr>
-            <p:cNvPr id="130" name="TextBox 129">
-              <a:extLst>
-                <a:ext uri="{FF2B5EF4-FFF2-40B4-BE49-F238E27FC236}">
-                  <a16:creationId xmlns:a16="http://schemas.microsoft.com/office/drawing/2014/main" id="{CD4384E5-8837-BEA9-9895-600762788AA3}"/>
-                </a:ext>
-              </a:extLst>
-            </p:cNvPr>
-            <p:cNvSpPr txBox="1"/>
-            <p:nvPr/>
-          </p:nvSpPr>
-          <p:spPr>
-            <a:xfrm>
-              <a:off x="9391633" y="563424"/>
-              <a:ext cx="570990" cy="369332"/>
-            </a:xfrm>
-            <a:prstGeom prst="rect">
-              <a:avLst/>
-            </a:prstGeom>
-            <a:noFill/>
-          </p:spPr>
-          <p:txBody>
-            <a:bodyPr wrap="none" rtlCol="0">
-              <a:spAutoFit/>
-            </a:bodyPr>
-            <a:lstStyle/>
-            <a:p>
-              <a:r>
-                <a:rPr lang="en-US" dirty="0"/>
-                <a:t>B08</a:t>
-              </a:r>
-            </a:p>
-          </p:txBody>
-        </p:sp>
-        <p:sp>
-          <p:nvSpPr>
-            <p:cNvPr id="131" name="TextBox 130">
-              <a:extLst>
-                <a:ext uri="{FF2B5EF4-FFF2-40B4-BE49-F238E27FC236}">
-                  <a16:creationId xmlns:a16="http://schemas.microsoft.com/office/drawing/2014/main" id="{720B53ED-B65C-00C1-3819-0D779E72A287}"/>
-                </a:ext>
-              </a:extLst>
-            </p:cNvPr>
-            <p:cNvSpPr txBox="1"/>
-            <p:nvPr/>
-          </p:nvSpPr>
-          <p:spPr>
-            <a:xfrm>
-              <a:off x="10453438" y="563424"/>
-              <a:ext cx="570990" cy="369332"/>
-            </a:xfrm>
-            <a:prstGeom prst="rect">
-              <a:avLst/>
-            </a:prstGeom>
-            <a:noFill/>
-          </p:spPr>
-          <p:txBody>
-            <a:bodyPr wrap="none" rtlCol="0">
-              <a:spAutoFit/>
-            </a:bodyPr>
-            <a:lstStyle/>
-            <a:p>
-              <a:r>
-                <a:rPr lang="en-US" dirty="0"/>
-                <a:t>B09</a:t>
-              </a:r>
-            </a:p>
-          </p:txBody>
-        </p:sp>
-        <p:sp>
-          <p:nvSpPr>
-            <p:cNvPr id="132" name="TextBox 131">
-              <a:extLst>
-                <a:ext uri="{FF2B5EF4-FFF2-40B4-BE49-F238E27FC236}">
-                  <a16:creationId xmlns:a16="http://schemas.microsoft.com/office/drawing/2014/main" id="{40D76A9A-0B46-7AC9-1EF3-ADDB3B6D34F9}"/>
-                </a:ext>
-              </a:extLst>
-            </p:cNvPr>
-            <p:cNvSpPr txBox="1"/>
-            <p:nvPr/>
-          </p:nvSpPr>
-          <p:spPr>
-            <a:xfrm>
-              <a:off x="11520098" y="563424"/>
-              <a:ext cx="570990" cy="369332"/>
-            </a:xfrm>
-            <a:prstGeom prst="rect">
-              <a:avLst/>
-            </a:prstGeom>
-            <a:noFill/>
-          </p:spPr>
-          <p:txBody>
-            <a:bodyPr wrap="none" rtlCol="0">
-              <a:spAutoFit/>
-            </a:bodyPr>
-            <a:lstStyle/>
-            <a:p>
-              <a:r>
-                <a:rPr lang="en-US" dirty="0"/>
-                <a:t>B10</a:t>
-              </a:r>
-            </a:p>
-          </p:txBody>
-        </p:sp>
-        <p:sp>
-          <p:nvSpPr>
-            <p:cNvPr id="133" name="TextBox 132">
-              <a:extLst>
-                <a:ext uri="{FF2B5EF4-FFF2-40B4-BE49-F238E27FC236}">
-                  <a16:creationId xmlns:a16="http://schemas.microsoft.com/office/drawing/2014/main" id="{C9A6E232-7D86-0921-3055-1AB5C464A4C5}"/>
-                </a:ext>
-              </a:extLst>
-            </p:cNvPr>
-            <p:cNvSpPr txBox="1"/>
-            <p:nvPr/>
-          </p:nvSpPr>
-          <p:spPr>
-            <a:xfrm>
-              <a:off x="12609658" y="563424"/>
-              <a:ext cx="570990" cy="369332"/>
-            </a:xfrm>
-            <a:prstGeom prst="rect">
-              <a:avLst/>
-            </a:prstGeom>
-            <a:noFill/>
-          </p:spPr>
-          <p:txBody>
-            <a:bodyPr wrap="none" rtlCol="0">
-              <a:spAutoFit/>
-            </a:bodyPr>
-            <a:lstStyle/>
-            <a:p>
-              <a:r>
-                <a:rPr lang="en-US" dirty="0"/>
-                <a:t>B11</a:t>
-              </a:r>
-            </a:p>
-          </p:txBody>
-        </p:sp>
-        <p:sp>
-          <p:nvSpPr>
-            <p:cNvPr id="134" name="TextBox 133">
-              <a:extLst>
-                <a:ext uri="{FF2B5EF4-FFF2-40B4-BE49-F238E27FC236}">
-                  <a16:creationId xmlns:a16="http://schemas.microsoft.com/office/drawing/2014/main" id="{48EF9BE3-C761-E7EB-0D98-2BCFCAEB9A0B}"/>
-                </a:ext>
-              </a:extLst>
-            </p:cNvPr>
-            <p:cNvSpPr txBox="1"/>
-            <p:nvPr/>
-          </p:nvSpPr>
-          <p:spPr>
-            <a:xfrm>
-              <a:off x="13729452" y="568013"/>
-              <a:ext cx="570990" cy="369332"/>
-            </a:xfrm>
-            <a:prstGeom prst="rect">
-              <a:avLst/>
-            </a:prstGeom>
-            <a:noFill/>
-          </p:spPr>
-          <p:txBody>
-            <a:bodyPr wrap="none" rtlCol="0">
-              <a:spAutoFit/>
-            </a:bodyPr>
-            <a:lstStyle/>
-            <a:p>
-              <a:r>
-                <a:rPr lang="en-US" dirty="0"/>
-                <a:t>B12</a:t>
-              </a:r>
-            </a:p>
-          </p:txBody>
-        </p:sp>
-        <p:sp>
-          <p:nvSpPr>
-            <p:cNvPr id="135" name="TextBox 134">
-              <a:extLst>
-                <a:ext uri="{FF2B5EF4-FFF2-40B4-BE49-F238E27FC236}">
-                  <a16:creationId xmlns:a16="http://schemas.microsoft.com/office/drawing/2014/main" id="{7F9B0C0E-EC46-745B-415D-C289DF5F77E6}"/>
-                </a:ext>
-              </a:extLst>
-            </p:cNvPr>
-            <p:cNvSpPr txBox="1"/>
-            <p:nvPr/>
-          </p:nvSpPr>
-          <p:spPr>
-            <a:xfrm>
-              <a:off x="14791257" y="568013"/>
-              <a:ext cx="570990" cy="369332"/>
-            </a:xfrm>
-            <a:prstGeom prst="rect">
-              <a:avLst/>
-            </a:prstGeom>
-            <a:noFill/>
-          </p:spPr>
-          <p:txBody>
-            <a:bodyPr wrap="none" rtlCol="0">
-              <a:spAutoFit/>
-            </a:bodyPr>
-            <a:lstStyle/>
-            <a:p>
-              <a:r>
-                <a:rPr lang="en-US" dirty="0"/>
-                <a:t>B13</a:t>
-              </a:r>
-            </a:p>
-          </p:txBody>
-        </p:sp>
-        <p:sp>
-          <p:nvSpPr>
-            <p:cNvPr id="136" name="TextBox 135">
-              <a:extLst>
-                <a:ext uri="{FF2B5EF4-FFF2-40B4-BE49-F238E27FC236}">
-                  <a16:creationId xmlns:a16="http://schemas.microsoft.com/office/drawing/2014/main" id="{288F23AE-403F-FA68-AFFA-04EDD53B0DCC}"/>
-                </a:ext>
-              </a:extLst>
-            </p:cNvPr>
-            <p:cNvSpPr txBox="1"/>
-            <p:nvPr/>
-          </p:nvSpPr>
-          <p:spPr>
-            <a:xfrm>
-              <a:off x="15857917" y="568013"/>
-              <a:ext cx="570990" cy="369332"/>
-            </a:xfrm>
-            <a:prstGeom prst="rect">
-              <a:avLst/>
-            </a:prstGeom>
-            <a:noFill/>
-          </p:spPr>
-          <p:txBody>
-            <a:bodyPr wrap="none" rtlCol="0">
-              <a:spAutoFit/>
-            </a:bodyPr>
-            <a:lstStyle/>
-            <a:p>
-              <a:r>
-                <a:rPr lang="en-US" dirty="0"/>
-                <a:t>B14</a:t>
-              </a:r>
-            </a:p>
-          </p:txBody>
-        </p:sp>
-        <p:sp>
-          <p:nvSpPr>
-            <p:cNvPr id="137" name="Left Bracket 136">
-              <a:extLst>
-                <a:ext uri="{FF2B5EF4-FFF2-40B4-BE49-F238E27FC236}">
-                  <a16:creationId xmlns:a16="http://schemas.microsoft.com/office/drawing/2014/main" id="{F4D21987-36AC-84E9-EEC6-FF13513A5E0F}"/>
-                </a:ext>
-              </a:extLst>
-            </p:cNvPr>
-            <p:cNvSpPr/>
-            <p:nvPr/>
-          </p:nvSpPr>
-          <p:spPr>
-            <a:xfrm rot="16200000">
-              <a:off x="13276901" y="346332"/>
-              <a:ext cx="369333" cy="2035851"/>
-            </a:xfrm>
-            <a:prstGeom prst="leftBracket">
-              <a:avLst/>
-            </a:prstGeom>
-            <a:ln w="25400">
-              <a:solidFill>
-                <a:schemeClr val="tx1"/>
-              </a:solidFill>
-            </a:ln>
-          </p:spPr>
-          <p:style>
-            <a:lnRef idx="2">
-              <a:schemeClr val="accent1"/>
-            </a:lnRef>
-            <a:fillRef idx="0">
-              <a:schemeClr val="accent1"/>
-            </a:fillRef>
-            <a:effectRef idx="1">
-              <a:schemeClr val="accent1"/>
-            </a:effectRef>
-            <a:fontRef idx="minor">
-              <a:schemeClr val="tx1"/>
-            </a:fontRef>
-          </p:style>
-          <p:txBody>
-            <a:bodyPr rtlCol="0" anchor="ctr"/>
-            <a:lstStyle/>
-            <a:p>
-              <a:pPr algn="ctr"/>
-              <a:endParaRPr lang="en-US"/>
-            </a:p>
-          </p:txBody>
-        </p:sp>
-        <p:sp>
-          <p:nvSpPr>
-            <p:cNvPr id="138" name="Left Bracket 137">
-              <a:extLst>
-                <a:ext uri="{FF2B5EF4-FFF2-40B4-BE49-F238E27FC236}">
-                  <a16:creationId xmlns:a16="http://schemas.microsoft.com/office/drawing/2014/main" id="{54A99B00-6DDC-81D6-A6FC-0F3EBC30FE47}"/>
-                </a:ext>
-              </a:extLst>
-            </p:cNvPr>
-            <p:cNvSpPr/>
-            <p:nvPr/>
-          </p:nvSpPr>
-          <p:spPr>
-            <a:xfrm rot="16200000">
-              <a:off x="10525253" y="902102"/>
-              <a:ext cx="369333" cy="901063"/>
-            </a:xfrm>
-            <a:prstGeom prst="leftBracket">
-              <a:avLst/>
-            </a:prstGeom>
-            <a:ln w="25400">
-              <a:solidFill>
-                <a:schemeClr val="tx1"/>
-              </a:solidFill>
-            </a:ln>
-          </p:spPr>
-          <p:style>
-            <a:lnRef idx="2">
-              <a:schemeClr val="accent1"/>
-            </a:lnRef>
-            <a:fillRef idx="0">
-              <a:schemeClr val="accent1"/>
-            </a:fillRef>
-            <a:effectRef idx="1">
-              <a:schemeClr val="accent1"/>
-            </a:effectRef>
-            <a:fontRef idx="minor">
-              <a:schemeClr val="tx1"/>
-            </a:fontRef>
-          </p:style>
-          <p:txBody>
-            <a:bodyPr rtlCol="0" anchor="ctr"/>
-            <a:lstStyle/>
-            <a:p>
-              <a:pPr algn="ctr"/>
-              <a:endParaRPr lang="en-US"/>
-            </a:p>
-          </p:txBody>
-        </p:sp>
-        <p:pic>
-          <p:nvPicPr>
-            <p:cNvPr id="139" name="Graphic 138" descr="Doctor male with solid fill">
-              <a:extLst>
-                <a:ext uri="{FF2B5EF4-FFF2-40B4-BE49-F238E27FC236}">
-                  <a16:creationId xmlns:a16="http://schemas.microsoft.com/office/drawing/2014/main" id="{039E4A87-493F-3C25-B1BD-AC0C02FEC46E}"/>
-                </a:ext>
-              </a:extLst>
-            </p:cNvPr>
-            <p:cNvPicPr>
-              <a:picLocks noChangeAspect="1"/>
-            </p:cNvPicPr>
-            <p:nvPr/>
-          </p:nvPicPr>
-          <p:blipFill>
-            <a:blip>
-              <a:extLst>
-                <a:ext uri="{96DAC541-7B7A-43D3-8B79-37D633B846F1}">
-                  <asvg:svgBlip xmlns:asvg="http://schemas.microsoft.com/office/drawing/2016/SVG/main" r:embed="rId8"/>
-                </a:ext>
-              </a:extLst>
-            </a:blip>
-            <a:stretch>
-              <a:fillRect/>
-            </a:stretch>
-          </p:blipFill>
-          <p:spPr>
-            <a:xfrm>
-              <a:off x="13143139" y="1599471"/>
-              <a:ext cx="636856" cy="636856"/>
-            </a:xfrm>
-            <a:prstGeom prst="rect">
-              <a:avLst/>
-            </a:prstGeom>
-          </p:spPr>
-        </p:pic>
-        <p:pic>
-          <p:nvPicPr>
-            <p:cNvPr id="140" name="Graphic 139" descr="Doctor female with solid fill">
-              <a:extLst>
-                <a:ext uri="{FF2B5EF4-FFF2-40B4-BE49-F238E27FC236}">
-                  <a16:creationId xmlns:a16="http://schemas.microsoft.com/office/drawing/2014/main" id="{7AFFC943-A35F-DB5A-0782-3F8228616BAC}"/>
-                </a:ext>
-              </a:extLst>
-            </p:cNvPr>
-            <p:cNvPicPr>
-              <a:picLocks noChangeAspect="1"/>
-            </p:cNvPicPr>
-            <p:nvPr/>
-          </p:nvPicPr>
-          <p:blipFill>
-            <a:blip>
-              <a:extLst>
-                <a:ext uri="{96DAC541-7B7A-43D3-8B79-37D633B846F1}">
-                  <asvg:svgBlip xmlns:asvg="http://schemas.microsoft.com/office/drawing/2016/SVG/main" r:embed="rId9"/>
-                </a:ext>
-              </a:extLst>
-            </a:blip>
-            <a:stretch>
-              <a:fillRect/>
-            </a:stretch>
-          </p:blipFill>
-          <p:spPr>
-            <a:xfrm>
-              <a:off x="10389017" y="1587847"/>
-              <a:ext cx="636856" cy="636856"/>
-            </a:xfrm>
-            <a:prstGeom prst="rect">
-              <a:avLst/>
-            </a:prstGeom>
-          </p:spPr>
-        </p:pic>
-        <p:pic>
-          <p:nvPicPr>
-            <p:cNvPr id="141" name="Graphic 140" descr="Doctor female with solid fill">
-              <a:extLst>
-                <a:ext uri="{FF2B5EF4-FFF2-40B4-BE49-F238E27FC236}">
-                  <a16:creationId xmlns:a16="http://schemas.microsoft.com/office/drawing/2014/main" id="{F89F9C15-6FCE-2348-F955-9C2213C094BF}"/>
-                </a:ext>
-              </a:extLst>
-            </p:cNvPr>
-            <p:cNvPicPr>
-              <a:picLocks noChangeAspect="1"/>
-            </p:cNvPicPr>
-            <p:nvPr/>
-          </p:nvPicPr>
-          <p:blipFill>
-            <a:blip>
-              <a:extLst>
-                <a:ext uri="{96DAC541-7B7A-43D3-8B79-37D633B846F1}">
-                  <asvg:svgBlip xmlns:asvg="http://schemas.microsoft.com/office/drawing/2016/SVG/main" r:embed="rId9"/>
-                </a:ext>
-              </a:extLst>
-            </a:blip>
-            <a:stretch>
-              <a:fillRect/>
-            </a:stretch>
-          </p:blipFill>
-          <p:spPr>
-            <a:xfrm>
-              <a:off x="14725391" y="1587847"/>
-              <a:ext cx="636856" cy="636856"/>
-            </a:xfrm>
-            <a:prstGeom prst="rect">
-              <a:avLst/>
-            </a:prstGeom>
-          </p:spPr>
-        </p:pic>
-        <p:sp>
-          <p:nvSpPr>
-            <p:cNvPr id="142" name="Left Bracket 141">
-              <a:extLst>
-                <a:ext uri="{FF2B5EF4-FFF2-40B4-BE49-F238E27FC236}">
-                  <a16:creationId xmlns:a16="http://schemas.microsoft.com/office/drawing/2014/main" id="{6190EF7B-D9B9-3B7E-4206-1AE47AFA0CBA}"/>
-                </a:ext>
-              </a:extLst>
-            </p:cNvPr>
-            <p:cNvSpPr/>
-            <p:nvPr/>
-          </p:nvSpPr>
-          <p:spPr>
-            <a:xfrm rot="16200000">
-              <a:off x="14882096" y="897679"/>
-              <a:ext cx="369333" cy="901063"/>
-            </a:xfrm>
-            <a:prstGeom prst="leftBracket">
-              <a:avLst/>
-            </a:prstGeom>
-            <a:ln w="25400">
-              <a:solidFill>
-                <a:schemeClr val="tx1"/>
-              </a:solidFill>
-            </a:ln>
-          </p:spPr>
-          <p:style>
-            <a:lnRef idx="2">
-              <a:schemeClr val="accent1"/>
-            </a:lnRef>
-            <a:fillRef idx="0">
-              <a:schemeClr val="accent1"/>
-            </a:fillRef>
-            <a:effectRef idx="1">
-              <a:schemeClr val="accent1"/>
-            </a:effectRef>
-            <a:fontRef idx="minor">
-              <a:schemeClr val="tx1"/>
-            </a:fontRef>
-          </p:style>
-          <p:txBody>
-            <a:bodyPr rtlCol="0" anchor="ctr"/>
-            <a:lstStyle/>
-            <a:p>
-              <a:pPr algn="ctr"/>
-              <a:endParaRPr lang="en-US"/>
-            </a:p>
-          </p:txBody>
-        </p:sp>
-        <p:sp>
-          <p:nvSpPr>
-            <p:cNvPr id="143" name="Left Bracket 142">
-              <a:extLst>
-                <a:ext uri="{FF2B5EF4-FFF2-40B4-BE49-F238E27FC236}">
-                  <a16:creationId xmlns:a16="http://schemas.microsoft.com/office/drawing/2014/main" id="{3A2E2A98-A02D-9E38-6F03-743B5043FE1A}"/>
-                </a:ext>
-              </a:extLst>
-            </p:cNvPr>
-            <p:cNvSpPr/>
-            <p:nvPr/>
-          </p:nvSpPr>
-          <p:spPr>
-            <a:xfrm rot="16200000">
-              <a:off x="9467346" y="897678"/>
-              <a:ext cx="369333" cy="901063"/>
-            </a:xfrm>
-            <a:prstGeom prst="leftBracket">
-              <a:avLst/>
-            </a:prstGeom>
-            <a:ln w="25400">
-              <a:solidFill>
-                <a:schemeClr val="tx1"/>
-              </a:solidFill>
-            </a:ln>
-          </p:spPr>
-          <p:style>
-            <a:lnRef idx="2">
-              <a:schemeClr val="accent1"/>
-            </a:lnRef>
-            <a:fillRef idx="0">
-              <a:schemeClr val="accent1"/>
-            </a:fillRef>
-            <a:effectRef idx="1">
-              <a:schemeClr val="accent1"/>
-            </a:effectRef>
-            <a:fontRef idx="minor">
-              <a:schemeClr val="tx1"/>
-            </a:fontRef>
-          </p:style>
-          <p:txBody>
-            <a:bodyPr rtlCol="0" anchor="ctr"/>
-            <a:lstStyle/>
-            <a:p>
-              <a:pPr algn="ctr"/>
-              <a:endParaRPr lang="en-US"/>
-            </a:p>
-          </p:txBody>
-        </p:sp>
-        <p:pic>
-          <p:nvPicPr>
-            <p:cNvPr id="144" name="Graphic 143" descr="Doctor male with solid fill">
-              <a:extLst>
-                <a:ext uri="{FF2B5EF4-FFF2-40B4-BE49-F238E27FC236}">
-                  <a16:creationId xmlns:a16="http://schemas.microsoft.com/office/drawing/2014/main" id="{21832ED5-DFE3-3B09-5031-0D5EF240EC4F}"/>
-                </a:ext>
-              </a:extLst>
-            </p:cNvPr>
-            <p:cNvPicPr>
-              <a:picLocks noChangeAspect="1"/>
-            </p:cNvPicPr>
-            <p:nvPr/>
-          </p:nvPicPr>
-          <p:blipFill>
-            <a:blip>
-              <a:extLst>
-                <a:ext uri="{96DAC541-7B7A-43D3-8B79-37D633B846F1}">
-                  <asvg:svgBlip xmlns:asvg="http://schemas.microsoft.com/office/drawing/2016/SVG/main" r:embed="rId8"/>
-                </a:ext>
-              </a:extLst>
-            </a:blip>
-            <a:stretch>
-              <a:fillRect/>
-            </a:stretch>
-          </p:blipFill>
-          <p:spPr>
-            <a:xfrm>
-              <a:off x="9339675" y="1599471"/>
-              <a:ext cx="636856" cy="636856"/>
-            </a:xfrm>
-            <a:prstGeom prst="rect">
-              <a:avLst/>
-            </a:prstGeom>
-          </p:spPr>
-        </p:pic>
-        <mc:AlternateContent xmlns:mc="http://schemas.openxmlformats.org/markup-compatibility/2006" xmlns:a14="http://schemas.microsoft.com/office/drawing/2010/main">
-          <mc:Choice Requires="a14">
-            <p:sp>
-              <p:nvSpPr>
-                <p:cNvPr id="149" name="TextBox 148">
-                  <a:extLst>
-                    <a:ext uri="{FF2B5EF4-FFF2-40B4-BE49-F238E27FC236}">
-                      <a16:creationId xmlns:a16="http://schemas.microsoft.com/office/drawing/2014/main" id="{84CAEA05-165D-1B21-E127-F9C4C0683491}"/>
-                    </a:ext>
-                  </a:extLst>
-                </p:cNvPr>
-                <p:cNvSpPr txBox="1"/>
-                <p:nvPr/>
-              </p:nvSpPr>
-              <p:spPr>
-                <a:xfrm>
-                  <a:off x="7896231" y="707385"/>
-                  <a:ext cx="1126912" cy="1477328"/>
-                </a:xfrm>
-                <a:prstGeom prst="rect">
-                  <a:avLst/>
-                </a:prstGeom>
-                <a:noFill/>
-              </p:spPr>
-              <p:txBody>
-                <a:bodyPr wrap="none" lIns="0" tIns="0" rIns="0" bIns="0" rtlCol="0">
-                  <a:spAutoFit/>
-                </a:bodyPr>
-                <a:lstStyle/>
-                <a:p>
-                  <a:pPr/>
-                  <a14:m>
-                    <m:oMathPara xmlns:m="http://schemas.openxmlformats.org/officeDocument/2006/math">
-                      <m:oMathParaPr>
-                        <m:jc m:val="centerGroup"/>
-                      </m:oMathParaPr>
-                      <m:oMath xmlns:m="http://schemas.openxmlformats.org/officeDocument/2006/math">
-                        <m:r>
-                          <a:rPr lang="en-GB" sz="9600" b="0" i="1" smtClean="0">
-                            <a:latin typeface="Cambria Math" panose="02040503050406030204" pitchFamily="18" charset="0"/>
-                          </a:rPr>
-                          <m:t>~</m:t>
-                        </m:r>
-                      </m:oMath>
-                    </m:oMathPara>
-                  </a14:m>
-                  <a:endParaRPr lang="en-US" sz="9600" dirty="0"/>
-                </a:p>
-              </p:txBody>
-            </p:sp>
-          </mc:Choice>
-          <mc:Fallback xmlns="">
-            <p:sp>
-              <p:nvSpPr>
-                <p:cNvPr id="149" name="TextBox 148">
-                  <a:extLst>
-                    <a:ext uri="{FF2B5EF4-FFF2-40B4-BE49-F238E27FC236}">
-                      <a16:creationId xmlns:a16="http://schemas.microsoft.com/office/drawing/2014/main" id="{84CAEA05-165D-1B21-E127-F9C4C0683491}"/>
-                    </a:ext>
-                  </a:extLst>
-                </p:cNvPr>
-                <p:cNvSpPr txBox="1">
-                  <a:spLocks noRot="1" noChangeAspect="1" noMove="1" noResize="1" noEditPoints="1" noAdjustHandles="1" noChangeArrowheads="1" noChangeShapeType="1" noTextEdit="1"/>
-                </p:cNvSpPr>
-                <p:nvPr/>
-              </p:nvSpPr>
-              <p:spPr>
-                <a:xfrm>
-                  <a:off x="7896231" y="707385"/>
-                  <a:ext cx="1126912" cy="1477328"/>
-                </a:xfrm>
-                <a:prstGeom prst="rect">
-                  <a:avLst/>
-                </a:prstGeom>
-                <a:blipFill>
-                  <a:blip r:embed="rId11"/>
-                  <a:stretch>
-                    <a:fillRect l="-8889" r="-8889"/>
-                  </a:stretch>
-                </a:blipFill>
-              </p:spPr>
-              <p:txBody>
-                <a:bodyPr/>
-                <a:lstStyle/>
-                <a:p>
-                  <a:r>
-                    <a:rPr lang="en-US">
-                      <a:noFill/>
-                    </a:rPr>
-                    <a:t> </a:t>
-                  </a:r>
-                </a:p>
-              </p:txBody>
-            </p:sp>
-          </mc:Fallback>
-        </mc:AlternateContent>
-      </p:grpSp>
-      <p:grpSp>
-        <p:nvGrpSpPr>
           <p:cNvPr id="29" name="Group 28">
             <a:extLst>
               <a:ext uri="{FF2B5EF4-FFF2-40B4-BE49-F238E27FC236}">
@@ -17822,7 +10865,7 @@
         </p:nvGrpSpPr>
         <p:grpSpPr>
           <a:xfrm>
-            <a:off x="855237" y="3675232"/>
+            <a:off x="1092593" y="957790"/>
             <a:ext cx="10006814" cy="2175446"/>
             <a:chOff x="855237" y="3675232"/>
             <a:chExt cx="10006814" cy="2175446"/>
@@ -18282,7 +11325,7 @@
             <a:blip>
               <a:extLst>
                 <a:ext uri="{96DAC541-7B7A-43D3-8B79-37D633B846F1}">
-                  <asvg:svgBlip xmlns:asvg="http://schemas.microsoft.com/office/drawing/2016/SVG/main" r:embed="rId8"/>
+                  <asvg:svgBlip xmlns:asvg="http://schemas.microsoft.com/office/drawing/2016/SVG/main" r:embed="rId6"/>
                 </a:ext>
               </a:extLst>
             </a:blip>
@@ -18318,7 +11361,7 @@
             <a:blip>
               <a:extLst>
                 <a:ext uri="{96DAC541-7B7A-43D3-8B79-37D633B846F1}">
-                  <asvg:svgBlip xmlns:asvg="http://schemas.microsoft.com/office/drawing/2016/SVG/main" r:embed="rId9"/>
+                  <asvg:svgBlip xmlns:asvg="http://schemas.microsoft.com/office/drawing/2016/SVG/main" r:embed="rId7"/>
                 </a:ext>
               </a:extLst>
             </a:blip>
@@ -18412,7 +11455,7 @@
             <a:blip>
               <a:extLst>
                 <a:ext uri="{96DAC541-7B7A-43D3-8B79-37D633B846F1}">
-                  <asvg:svgBlip xmlns:asvg="http://schemas.microsoft.com/office/drawing/2016/SVG/main" r:embed="rId6"/>
+                  <asvg:svgBlip xmlns:asvg="http://schemas.microsoft.com/office/drawing/2016/SVG/main" r:embed="rId8"/>
                 </a:ext>
               </a:extLst>
             </a:blip>
@@ -18790,7 +11833,7 @@
             <a:blip>
               <a:extLst>
                 <a:ext uri="{96DAC541-7B7A-43D3-8B79-37D633B846F1}">
-                  <asvg:svgBlip xmlns:asvg="http://schemas.microsoft.com/office/drawing/2016/SVG/main" r:embed="rId8"/>
+                  <asvg:svgBlip xmlns:asvg="http://schemas.microsoft.com/office/drawing/2016/SVG/main" r:embed="rId6"/>
                 </a:ext>
               </a:extLst>
             </a:blip>
@@ -18826,7 +11869,7 @@
             <a:blip>
               <a:extLst>
                 <a:ext uri="{96DAC541-7B7A-43D3-8B79-37D633B846F1}">
-                  <asvg:svgBlip xmlns:asvg="http://schemas.microsoft.com/office/drawing/2016/SVG/main" r:embed="rId9"/>
+                  <asvg:svgBlip xmlns:asvg="http://schemas.microsoft.com/office/drawing/2016/SVG/main" r:embed="rId7"/>
                 </a:ext>
               </a:extLst>
             </a:blip>
@@ -18954,7 +11997,7 @@
 </p:sld>
 </file>
 
-<file path=ppt/slides/slide8.xml><?xml version="1.0" encoding="utf-8"?>
+<file path=ppt/slides/slide6.xml><?xml version="1.0" encoding="utf-8"?>
 <p:sld xmlns:a="http://schemas.openxmlformats.org/drawingml/2006/main" xmlns:r="http://schemas.openxmlformats.org/officeDocument/2006/relationships" xmlns:p="http://schemas.openxmlformats.org/presentationml/2006/main">
   <p:cSld>
     <p:spTree>
@@ -18979,10 +12022,10 @@
       </p:grpSpPr>
       <p:grpSp>
         <p:nvGrpSpPr>
-          <p:cNvPr id="405" name="Group 404">
+          <p:cNvPr id="214" name="Group 213">
             <a:extLst>
               <a:ext uri="{FF2B5EF4-FFF2-40B4-BE49-F238E27FC236}">
-                <a16:creationId xmlns:a16="http://schemas.microsoft.com/office/drawing/2014/main" id="{86971060-49B2-7A99-5E28-88B7219789F2}"/>
+                <a16:creationId xmlns:a16="http://schemas.microsoft.com/office/drawing/2014/main" id="{3406806A-B2F0-AF0B-E0F9-CA9B33A87237}"/>
               </a:ext>
             </a:extLst>
           </p:cNvPr>
@@ -18991,10 +12034,10 @@
         </p:nvGrpSpPr>
         <p:grpSpPr>
           <a:xfrm>
-            <a:off x="-3445945" y="-10479"/>
-            <a:ext cx="18999225" cy="5658105"/>
-            <a:chOff x="-3445945" y="-10479"/>
-            <a:chExt cx="18999225" cy="5658105"/>
+            <a:off x="-3835404" y="-10479"/>
+            <a:ext cx="20853201" cy="8781048"/>
+            <a:chOff x="-3835404" y="-10479"/>
+            <a:chExt cx="20853201" cy="8781048"/>
           </a:xfrm>
         </p:grpSpPr>
         <p:sp>
@@ -19011,7 +12054,7 @@
           </p:nvSpPr>
           <p:spPr>
             <a:xfrm>
-              <a:off x="7476080" y="3768026"/>
+              <a:off x="8940597" y="3700235"/>
               <a:ext cx="8077200" cy="1879600"/>
             </a:xfrm>
             <a:prstGeom prst="rect">
@@ -19061,7 +12104,7 @@
           </p:nvSpPr>
           <p:spPr>
             <a:xfrm>
-              <a:off x="-3445945" y="3717244"/>
+              <a:off x="-3835404" y="3717244"/>
               <a:ext cx="8077200" cy="1879600"/>
             </a:xfrm>
             <a:prstGeom prst="rect">
@@ -19111,7 +12154,7 @@
           </p:nvSpPr>
           <p:spPr>
             <a:xfrm>
-              <a:off x="5556309" y="-10479"/>
+              <a:off x="5234576" y="-10479"/>
               <a:ext cx="959007" cy="1879600"/>
             </a:xfrm>
             <a:prstGeom prst="rect">
@@ -19161,7 +12204,7 @@
           </p:nvSpPr>
           <p:spPr>
             <a:xfrm>
-              <a:off x="6515317" y="0"/>
+              <a:off x="7040249" y="0"/>
               <a:ext cx="1027604" cy="1879600"/>
             </a:xfrm>
             <a:prstGeom prst="rect">
@@ -19327,7 +12370,7 @@
           </p:nvSpPr>
           <p:spPr>
             <a:xfrm>
-              <a:off x="-3233232" y="3966219"/>
+              <a:off x="-3622691" y="3966219"/>
               <a:ext cx="4413929" cy="1216301"/>
             </a:xfrm>
             <a:prstGeom prst="roundRect">
@@ -19385,7 +12428,7 @@
           </p:nvSpPr>
           <p:spPr>
             <a:xfrm>
-              <a:off x="1252856" y="3982157"/>
+              <a:off x="863397" y="3982157"/>
               <a:ext cx="3208180" cy="1216301"/>
             </a:xfrm>
             <a:prstGeom prst="roundRect">
@@ -19443,7 +12486,7 @@
           </p:nvSpPr>
           <p:spPr>
             <a:xfrm>
-              <a:off x="7678423" y="3982157"/>
+              <a:off x="9142940" y="3914366"/>
               <a:ext cx="4413929" cy="1216301"/>
             </a:xfrm>
             <a:prstGeom prst="roundRect">
@@ -19501,7 +12544,7 @@
           </p:nvSpPr>
           <p:spPr>
             <a:xfrm>
-              <a:off x="12164511" y="3998095"/>
+              <a:off x="13629028" y="3930304"/>
               <a:ext cx="3208180" cy="1216301"/>
             </a:xfrm>
             <a:prstGeom prst="roundRect">
@@ -19582,7 +12625,7 @@
         </p:pic>
         <p:pic>
           <p:nvPicPr>
-            <p:cNvPr id="241" name="Graphic 240" descr="Sleep with solid fill">
+            <p:cNvPr id="241" name="Graphic 240" descr="Bed with solid fill">
               <a:extLst>
                 <a:ext uri="{FF2B5EF4-FFF2-40B4-BE49-F238E27FC236}">
                   <a16:creationId xmlns:a16="http://schemas.microsoft.com/office/drawing/2014/main" id="{6695471A-D6A9-D1D1-0115-D8B3C2ADFD7A}"/>
@@ -19617,7 +12660,7 @@
         </p:pic>
         <p:pic>
           <p:nvPicPr>
-            <p:cNvPr id="242" name="Graphic 241" descr="Sleep with solid fill">
+            <p:cNvPr id="242" name="Graphic 241" descr="Bed with solid fill">
               <a:extLst>
                 <a:ext uri="{FF2B5EF4-FFF2-40B4-BE49-F238E27FC236}">
                   <a16:creationId xmlns:a16="http://schemas.microsoft.com/office/drawing/2014/main" id="{0264FEF3-D28E-0981-9CCE-2AA9F871C976}"/>
@@ -19633,7 +12676,7 @@
             <a:blip>
               <a:extLst>
                 <a:ext uri="{96DAC541-7B7A-43D3-8B79-37D633B846F1}">
-                  <asvg:svgBlip xmlns:asvg="http://schemas.microsoft.com/office/drawing/2016/SVG/main" r:embed="rId3"/>
+                  <asvg:svgBlip xmlns:asvg="http://schemas.microsoft.com/office/drawing/2016/SVG/main" r:embed="rId5"/>
                 </a:ext>
               </a:extLst>
             </a:blip>
@@ -19687,7 +12730,7 @@
         </p:pic>
         <p:pic>
           <p:nvPicPr>
-            <p:cNvPr id="244" name="Graphic 243" descr="Sleep with solid fill">
+            <p:cNvPr id="244" name="Graphic 243" descr="Bed with solid fill">
               <a:extLst>
                 <a:ext uri="{FF2B5EF4-FFF2-40B4-BE49-F238E27FC236}">
                   <a16:creationId xmlns:a16="http://schemas.microsoft.com/office/drawing/2014/main" id="{4B20BE29-DA3F-0E0C-6A1C-67527BD12A8E}"/>
@@ -19738,7 +12781,7 @@
             <a:blip>
               <a:extLst>
                 <a:ext uri="{96DAC541-7B7A-43D3-8B79-37D633B846F1}">
-                  <asvg:svgBlip xmlns:asvg="http://schemas.microsoft.com/office/drawing/2016/SVG/main" r:embed="rId5"/>
+                  <asvg:svgBlip xmlns:asvg="http://schemas.microsoft.com/office/drawing/2016/SVG/main" r:embed="rId6"/>
                 </a:ext>
               </a:extLst>
             </a:blip>
@@ -19757,7 +12800,7 @@
         </p:pic>
         <p:pic>
           <p:nvPicPr>
-            <p:cNvPr id="246" name="Graphic 245" descr="Sleep with solid fill">
+            <p:cNvPr id="246" name="Graphic 245" descr="Bed with solid fill">
               <a:extLst>
                 <a:ext uri="{FF2B5EF4-FFF2-40B4-BE49-F238E27FC236}">
                   <a16:creationId xmlns:a16="http://schemas.microsoft.com/office/drawing/2014/main" id="{974DDC70-6CF2-410F-B25B-2AFD0038F8AA}"/>
@@ -20053,7 +13096,7 @@
             <a:blip>
               <a:extLst>
                 <a:ext uri="{96DAC541-7B7A-43D3-8B79-37D633B846F1}">
-                  <asvg:svgBlip xmlns:asvg="http://schemas.microsoft.com/office/drawing/2016/SVG/main" r:embed="rId6"/>
+                  <asvg:svgBlip xmlns:asvg="http://schemas.microsoft.com/office/drawing/2016/SVG/main" r:embed="rId7"/>
                 </a:ext>
               </a:extLst>
             </a:blip>
@@ -20062,7 +13105,7 @@
           </p:blipFill>
           <p:spPr>
             <a:xfrm>
-              <a:off x="-2947148" y="4323741"/>
+              <a:off x="-3336607" y="4323741"/>
               <a:ext cx="634696" cy="634696"/>
             </a:xfrm>
             <a:prstGeom prst="rect">
@@ -20072,7 +13115,7 @@
         </p:pic>
         <p:pic>
           <p:nvPicPr>
-            <p:cNvPr id="271" name="Graphic 270" descr="Sleep with solid fill">
+            <p:cNvPr id="271" name="Graphic 270" descr="Bed with solid fill">
               <a:extLst>
                 <a:ext uri="{FF2B5EF4-FFF2-40B4-BE49-F238E27FC236}">
                   <a16:creationId xmlns:a16="http://schemas.microsoft.com/office/drawing/2014/main" id="{3AD02126-D26D-185E-5798-D738A30FA30A}"/>
@@ -20097,7 +13140,7 @@
           </p:blipFill>
           <p:spPr>
             <a:xfrm>
-              <a:off x="-1881316" y="4323741"/>
+              <a:off x="-2270775" y="4323741"/>
               <a:ext cx="634696" cy="634696"/>
             </a:xfrm>
             <a:prstGeom prst="rect">
@@ -20107,7 +13150,7 @@
         </p:pic>
         <p:pic>
           <p:nvPicPr>
-            <p:cNvPr id="272" name="Graphic 271" descr="Sleep with solid fill">
+            <p:cNvPr id="272" name="Graphic 271" descr="Bed with solid fill">
               <a:extLst>
                 <a:ext uri="{FF2B5EF4-FFF2-40B4-BE49-F238E27FC236}">
                   <a16:creationId xmlns:a16="http://schemas.microsoft.com/office/drawing/2014/main" id="{008EDC99-941D-828B-8EC7-38AD475AAC6A}"/>
@@ -20123,7 +13166,7 @@
             <a:blip>
               <a:extLst>
                 <a:ext uri="{96DAC541-7B7A-43D3-8B79-37D633B846F1}">
-                  <asvg:svgBlip xmlns:asvg="http://schemas.microsoft.com/office/drawing/2016/SVG/main" r:embed="rId3"/>
+                  <asvg:svgBlip xmlns:asvg="http://schemas.microsoft.com/office/drawing/2016/SVG/main" r:embed="rId5"/>
                 </a:ext>
               </a:extLst>
             </a:blip>
@@ -20132,7 +13175,7 @@
           </p:blipFill>
           <p:spPr>
             <a:xfrm>
-              <a:off x="-771983" y="4323741"/>
+              <a:off x="-1161442" y="4323741"/>
               <a:ext cx="634696" cy="634696"/>
             </a:xfrm>
             <a:prstGeom prst="rect">
@@ -20167,7 +13210,7 @@
           </p:blipFill>
           <p:spPr>
             <a:xfrm>
-              <a:off x="293849" y="4323741"/>
+              <a:off x="-95610" y="4323741"/>
               <a:ext cx="634696" cy="634696"/>
             </a:xfrm>
             <a:prstGeom prst="rect">
@@ -20202,7 +13245,7 @@
           </p:blipFill>
           <p:spPr>
             <a:xfrm>
-              <a:off x="1413250" y="4323741"/>
+              <a:off x="1023791" y="4323741"/>
               <a:ext cx="634696" cy="634696"/>
             </a:xfrm>
             <a:prstGeom prst="rect">
@@ -20228,7 +13271,7 @@
             <a:blip>
               <a:extLst>
                 <a:ext uri="{96DAC541-7B7A-43D3-8B79-37D633B846F1}">
-                  <asvg:svgBlip xmlns:asvg="http://schemas.microsoft.com/office/drawing/2016/SVG/main" r:embed="rId5"/>
+                  <asvg:svgBlip xmlns:asvg="http://schemas.microsoft.com/office/drawing/2016/SVG/main" r:embed="rId6"/>
                 </a:ext>
               </a:extLst>
             </a:blip>
@@ -20237,7 +13280,7 @@
           </p:blipFill>
           <p:spPr>
             <a:xfrm>
-              <a:off x="2479082" y="4323741"/>
+              <a:off x="2089623" y="4323741"/>
               <a:ext cx="634696" cy="634696"/>
             </a:xfrm>
             <a:prstGeom prst="rect">
@@ -20247,7 +13290,7 @@
         </p:pic>
         <p:pic>
           <p:nvPicPr>
-            <p:cNvPr id="276" name="Graphic 275" descr="Sleep with solid fill">
+            <p:cNvPr id="276" name="Graphic 275" descr="Bed with solid fill">
               <a:extLst>
                 <a:ext uri="{FF2B5EF4-FFF2-40B4-BE49-F238E27FC236}">
                   <a16:creationId xmlns:a16="http://schemas.microsoft.com/office/drawing/2014/main" id="{A6838EC2-96B2-7C1D-D399-403B6DDFB88C}"/>
@@ -20272,7 +13315,7 @@
           </p:blipFill>
           <p:spPr>
             <a:xfrm>
-              <a:off x="3588415" y="4323741"/>
+              <a:off x="3198956" y="4323741"/>
               <a:ext cx="634696" cy="634696"/>
             </a:xfrm>
             <a:prstGeom prst="rect">
@@ -20294,7 +13337,7 @@
           </p:nvSpPr>
           <p:spPr>
             <a:xfrm>
-              <a:off x="-2878700" y="4160016"/>
+              <a:off x="-3268159" y="4160016"/>
               <a:ext cx="570990" cy="369332"/>
             </a:xfrm>
             <a:prstGeom prst="rect">
@@ -20329,7 +13372,7 @@
           </p:nvSpPr>
           <p:spPr>
             <a:xfrm>
-              <a:off x="-1816895" y="4160016"/>
+              <a:off x="-2206354" y="4160016"/>
               <a:ext cx="570990" cy="369332"/>
             </a:xfrm>
             <a:prstGeom prst="rect">
@@ -20364,7 +13407,7 @@
           </p:nvSpPr>
           <p:spPr>
             <a:xfrm>
-              <a:off x="-750235" y="4160016"/>
+              <a:off x="-1139694" y="4160016"/>
               <a:ext cx="570990" cy="369332"/>
             </a:xfrm>
             <a:prstGeom prst="rect">
@@ -20399,7 +13442,7 @@
           </p:nvSpPr>
           <p:spPr>
             <a:xfrm>
-              <a:off x="339325" y="4160016"/>
+              <a:off x="-50134" y="4160016"/>
               <a:ext cx="570990" cy="369332"/>
             </a:xfrm>
             <a:prstGeom prst="rect">
@@ -20434,7 +13477,7 @@
           </p:nvSpPr>
           <p:spPr>
             <a:xfrm>
-              <a:off x="1459119" y="4164605"/>
+              <a:off x="1069660" y="4164605"/>
               <a:ext cx="570990" cy="369332"/>
             </a:xfrm>
             <a:prstGeom prst="rect">
@@ -20469,7 +13512,7 @@
           </p:nvSpPr>
           <p:spPr>
             <a:xfrm>
-              <a:off x="2520924" y="4164605"/>
+              <a:off x="2131465" y="4164605"/>
               <a:ext cx="570990" cy="369332"/>
             </a:xfrm>
             <a:prstGeom prst="rect">
@@ -20504,7 +13547,7 @@
           </p:nvSpPr>
           <p:spPr>
             <a:xfrm>
-              <a:off x="3587584" y="4164605"/>
+              <a:off x="3198125" y="4164605"/>
               <a:ext cx="570990" cy="369332"/>
             </a:xfrm>
             <a:prstGeom prst="rect">
@@ -20543,7 +13586,7 @@
             <a:blip>
               <a:extLst>
                 <a:ext uri="{96DAC541-7B7A-43D3-8B79-37D633B846F1}">
-                  <asvg:svgBlip xmlns:asvg="http://schemas.microsoft.com/office/drawing/2016/SVG/main" r:embed="rId6"/>
+                  <asvg:svgBlip xmlns:asvg="http://schemas.microsoft.com/office/drawing/2016/SVG/main" r:embed="rId7"/>
                 </a:ext>
               </a:extLst>
             </a:blip>
@@ -20552,7 +13595,7 @@
           </p:blipFill>
           <p:spPr>
             <a:xfrm>
-              <a:off x="7964507" y="4339679"/>
+              <a:off x="9429024" y="4271888"/>
               <a:ext cx="634696" cy="634696"/>
             </a:xfrm>
             <a:prstGeom prst="rect">
@@ -20562,7 +13605,7 @@
         </p:pic>
         <p:pic>
           <p:nvPicPr>
-            <p:cNvPr id="287" name="Graphic 286" descr="Sleep with solid fill">
+            <p:cNvPr id="287" name="Graphic 286" descr="Bed with solid fill">
               <a:extLst>
                 <a:ext uri="{FF2B5EF4-FFF2-40B4-BE49-F238E27FC236}">
                   <a16:creationId xmlns:a16="http://schemas.microsoft.com/office/drawing/2014/main" id="{AB69509D-7147-3BF4-217F-AA9BD3D72CD2}"/>
@@ -20587,7 +13630,7 @@
           </p:blipFill>
           <p:spPr>
             <a:xfrm>
-              <a:off x="9030339" y="4339679"/>
+              <a:off x="10494856" y="4271888"/>
               <a:ext cx="634696" cy="634696"/>
             </a:xfrm>
             <a:prstGeom prst="rect">
@@ -20597,7 +13640,7 @@
         </p:pic>
         <p:pic>
           <p:nvPicPr>
-            <p:cNvPr id="288" name="Graphic 287" descr="Sleep with solid fill">
+            <p:cNvPr id="288" name="Graphic 287" descr="Bed with solid fill">
               <a:extLst>
                 <a:ext uri="{FF2B5EF4-FFF2-40B4-BE49-F238E27FC236}">
                   <a16:creationId xmlns:a16="http://schemas.microsoft.com/office/drawing/2014/main" id="{BFCAA446-8094-F6CF-3880-6B4AC9030990}"/>
@@ -20613,7 +13656,7 @@
             <a:blip>
               <a:extLst>
                 <a:ext uri="{96DAC541-7B7A-43D3-8B79-37D633B846F1}">
-                  <asvg:svgBlip xmlns:asvg="http://schemas.microsoft.com/office/drawing/2016/SVG/main" r:embed="rId3"/>
+                  <asvg:svgBlip xmlns:asvg="http://schemas.microsoft.com/office/drawing/2016/SVG/main" r:embed="rId5"/>
                 </a:ext>
               </a:extLst>
             </a:blip>
@@ -20622,7 +13665,7 @@
           </p:blipFill>
           <p:spPr>
             <a:xfrm>
-              <a:off x="10139672" y="4339679"/>
+              <a:off x="11604189" y="4271888"/>
               <a:ext cx="634696" cy="634696"/>
             </a:xfrm>
             <a:prstGeom prst="rect">
@@ -20657,7 +13700,7 @@
           </p:blipFill>
           <p:spPr>
             <a:xfrm>
-              <a:off x="11205504" y="4339679"/>
+              <a:off x="12670021" y="4271888"/>
               <a:ext cx="634696" cy="634696"/>
             </a:xfrm>
             <a:prstGeom prst="rect">
@@ -20667,7 +13710,7 @@
         </p:pic>
         <p:pic>
           <p:nvPicPr>
-            <p:cNvPr id="290" name="Graphic 289" descr="Sleep with solid fill">
+            <p:cNvPr id="290" name="Graphic 289" descr="Bed with solid fill">
               <a:extLst>
                 <a:ext uri="{FF2B5EF4-FFF2-40B4-BE49-F238E27FC236}">
                   <a16:creationId xmlns:a16="http://schemas.microsoft.com/office/drawing/2014/main" id="{6F291145-7E91-9D86-6C7B-3E0B96671097}"/>
@@ -20692,7 +13735,7 @@
           </p:blipFill>
           <p:spPr>
             <a:xfrm>
-              <a:off x="12324905" y="4339679"/>
+              <a:off x="13789422" y="4271888"/>
               <a:ext cx="634696" cy="634696"/>
             </a:xfrm>
             <a:prstGeom prst="rect">
@@ -20718,7 +13761,7 @@
             <a:blip>
               <a:extLst>
                 <a:ext uri="{96DAC541-7B7A-43D3-8B79-37D633B846F1}">
-                  <asvg:svgBlip xmlns:asvg="http://schemas.microsoft.com/office/drawing/2016/SVG/main" r:embed="rId5"/>
+                  <asvg:svgBlip xmlns:asvg="http://schemas.microsoft.com/office/drawing/2016/SVG/main" r:embed="rId6"/>
                 </a:ext>
               </a:extLst>
             </a:blip>
@@ -20727,7 +13770,7 @@
           </p:blipFill>
           <p:spPr>
             <a:xfrm>
-              <a:off x="13390737" y="4339679"/>
+              <a:off x="14855254" y="4271888"/>
               <a:ext cx="634696" cy="634696"/>
             </a:xfrm>
             <a:prstGeom prst="rect">
@@ -20762,7 +13805,7 @@
           </p:blipFill>
           <p:spPr>
             <a:xfrm>
-              <a:off x="14500070" y="4339679"/>
+              <a:off x="15964587" y="4271888"/>
               <a:ext cx="634696" cy="634696"/>
             </a:xfrm>
             <a:prstGeom prst="rect">
@@ -20784,7 +13827,7 @@
           </p:nvSpPr>
           <p:spPr>
             <a:xfrm>
-              <a:off x="8032955" y="4175954"/>
+              <a:off x="9497472" y="4108163"/>
               <a:ext cx="570990" cy="369332"/>
             </a:xfrm>
             <a:prstGeom prst="rect">
@@ -20819,7 +13862,7 @@
           </p:nvSpPr>
           <p:spPr>
             <a:xfrm>
-              <a:off x="9094760" y="4175954"/>
+              <a:off x="10559277" y="4108163"/>
               <a:ext cx="570990" cy="369332"/>
             </a:xfrm>
             <a:prstGeom prst="rect">
@@ -20854,7 +13897,7 @@
           </p:nvSpPr>
           <p:spPr>
             <a:xfrm>
-              <a:off x="10161420" y="4175954"/>
+              <a:off x="11625937" y="4108163"/>
               <a:ext cx="570990" cy="369332"/>
             </a:xfrm>
             <a:prstGeom prst="rect">
@@ -20889,7 +13932,7 @@
           </p:nvSpPr>
           <p:spPr>
             <a:xfrm>
-              <a:off x="11250980" y="4175954"/>
+              <a:off x="12715497" y="4108163"/>
               <a:ext cx="570990" cy="369332"/>
             </a:xfrm>
             <a:prstGeom prst="rect">
@@ -20924,7 +13967,7 @@
           </p:nvSpPr>
           <p:spPr>
             <a:xfrm>
-              <a:off x="12370774" y="4180543"/>
+              <a:off x="13835291" y="4112752"/>
               <a:ext cx="570990" cy="369332"/>
             </a:xfrm>
             <a:prstGeom prst="rect">
@@ -20959,7 +14002,7 @@
           </p:nvSpPr>
           <p:spPr>
             <a:xfrm>
-              <a:off x="13432579" y="4180543"/>
+              <a:off x="14897096" y="4112752"/>
               <a:ext cx="570990" cy="369332"/>
             </a:xfrm>
             <a:prstGeom prst="rect">
@@ -20994,7 +14037,7 @@
           </p:nvSpPr>
           <p:spPr>
             <a:xfrm>
-              <a:off x="14499239" y="4180543"/>
+              <a:off x="15963756" y="4112752"/>
               <a:ext cx="570990" cy="369332"/>
             </a:xfrm>
             <a:prstGeom prst="rect">
@@ -21033,8 +14076,8 @@
           </p:nvCxnSpPr>
           <p:spPr>
             <a:xfrm rot="5400000">
-              <a:off x="2390173" y="71603"/>
-              <a:ext cx="1848123" cy="5443158"/>
+              <a:off x="2034577" y="37740"/>
+              <a:ext cx="1848123" cy="5510884"/>
             </a:xfrm>
             <a:prstGeom prst="curvedConnector3">
               <a:avLst/>
@@ -21080,8 +14123,8 @@
           </p:nvCxnSpPr>
           <p:spPr>
             <a:xfrm rot="16200000" flipH="1">
-              <a:off x="8327686" y="581032"/>
-              <a:ext cx="1888426" cy="4485561"/>
+              <a:off x="9356307" y="77344"/>
+              <a:ext cx="1820635" cy="5425146"/>
             </a:xfrm>
             <a:prstGeom prst="curvedConnector3">
               <a:avLst>
@@ -21125,8 +14168,8 @@
           </p:nvSpPr>
           <p:spPr>
             <a:xfrm>
-              <a:off x="1391158" y="2967224"/>
-              <a:ext cx="2101857" cy="646331"/>
+              <a:off x="1982194" y="3286217"/>
+              <a:ext cx="2348720" cy="646331"/>
             </a:xfrm>
             <a:prstGeom prst="rect">
               <a:avLst/>
@@ -21141,7 +14184,15 @@
             <a:p>
               <a:r>
                 <a:rPr lang="en-US" sz="3600" dirty="0"/>
-                <a:t>a = (8, 12)</a:t>
+                <a:t>a</a:t>
+              </a:r>
+              <a:r>
+                <a:rPr lang="en-US" sz="3600" baseline="-25000" dirty="0"/>
+                <a:t>1</a:t>
+              </a:r>
+              <a:r>
+                <a:rPr lang="en-US" sz="3600" dirty="0"/>
+                <a:t> = (8, 12)</a:t>
               </a:r>
             </a:p>
           </p:txBody>
@@ -21160,8 +14211,8 @@
           </p:nvSpPr>
           <p:spPr>
             <a:xfrm>
-              <a:off x="8371523" y="2998530"/>
-              <a:ext cx="2101857" cy="646331"/>
+              <a:off x="9142940" y="3217629"/>
+              <a:ext cx="2348720" cy="646331"/>
             </a:xfrm>
             <a:prstGeom prst="rect">
               <a:avLst/>
@@ -21176,107 +14227,1611 @@
             <a:p>
               <a:r>
                 <a:rPr lang="en-US" sz="3600" dirty="0"/>
-                <a:t>a = (8, 14)</a:t>
+                <a:t>a</a:t>
+              </a:r>
+              <a:r>
+                <a:rPr lang="en-US" sz="3600" baseline="-25000" dirty="0"/>
+                <a:t>2</a:t>
+              </a:r>
+              <a:r>
+                <a:rPr lang="en-US" sz="3600" dirty="0"/>
+                <a:t> = (8, 14)</a:t>
               </a:r>
             </a:p>
           </p:txBody>
         </p:sp>
-        <mc:AlternateContent xmlns:mc="http://schemas.openxmlformats.org/markup-compatibility/2006">
-          <mc:Choice xmlns:a14="http://schemas.microsoft.com/office/drawing/2010/main" Requires="a14">
-            <p:sp>
-              <p:nvSpPr>
-                <p:cNvPr id="404" name="TextBox 403">
-                  <a:extLst>
-                    <a:ext uri="{FF2B5EF4-FFF2-40B4-BE49-F238E27FC236}">
-                      <a16:creationId xmlns:a16="http://schemas.microsoft.com/office/drawing/2014/main" id="{18E1D77A-D35E-53BD-B06F-9D4FD86ADB9D}"/>
-                    </a:ext>
-                  </a:extLst>
-                </p:cNvPr>
-                <p:cNvSpPr txBox="1"/>
-                <p:nvPr/>
-              </p:nvSpPr>
-              <p:spPr>
-                <a:xfrm>
-                  <a:off x="5765091" y="4103046"/>
-                  <a:ext cx="844783" cy="1107996"/>
-                </a:xfrm>
-                <a:prstGeom prst="rect">
-                  <a:avLst/>
-                </a:prstGeom>
-                <a:noFill/>
-              </p:spPr>
-              <p:txBody>
-                <a:bodyPr wrap="none" lIns="0" tIns="0" rIns="0" bIns="0" rtlCol="0">
-                  <a:spAutoFit/>
-                </a:bodyPr>
-                <a:lstStyle/>
-                <a:p>
-                  <a:pPr/>
-                  <a14:m>
-                    <m:oMathPara xmlns:m="http://schemas.openxmlformats.org/officeDocument/2006/math">
-                      <m:oMathParaPr>
-                        <m:jc m:val="centerGroup"/>
-                      </m:oMathParaPr>
-                      <m:oMath xmlns:m="http://schemas.openxmlformats.org/officeDocument/2006/math">
-                        <m:r>
-                          <a:rPr lang="en-GB" sz="7200" b="0" i="1" smtClean="0">
-                            <a:latin typeface="Cambria Math" panose="02040503050406030204" pitchFamily="18" charset="0"/>
-                          </a:rPr>
-                          <m:t>~</m:t>
-                        </m:r>
-                      </m:oMath>
-                    </m:oMathPara>
-                  </a14:m>
-                  <a:endParaRPr lang="en-US" sz="7200" dirty="0"/>
-                </a:p>
-              </p:txBody>
-            </p:sp>
-          </mc:Choice>
-          <mc:Fallback>
-            <p:sp>
-              <p:nvSpPr>
-                <p:cNvPr id="404" name="TextBox 403">
-                  <a:extLst>
-                    <a:ext uri="{FF2B5EF4-FFF2-40B4-BE49-F238E27FC236}">
-                      <a16:creationId xmlns:a16="http://schemas.microsoft.com/office/drawing/2014/main" id="{18E1D77A-D35E-53BD-B06F-9D4FD86ADB9D}"/>
-                    </a:ext>
-                  </a:extLst>
-                </p:cNvPr>
-                <p:cNvSpPr txBox="1">
-                  <a:spLocks noRot="1" noChangeAspect="1" noMove="1" noResize="1" noEditPoints="1" noAdjustHandles="1" noChangeArrowheads="1" noChangeShapeType="1" noTextEdit="1"/>
-                </p:cNvSpPr>
-                <p:nvPr/>
-              </p:nvSpPr>
-              <p:spPr>
-                <a:xfrm>
-                  <a:off x="5765091" y="4103046"/>
-                  <a:ext cx="844783" cy="1107996"/>
-                </a:xfrm>
-                <a:prstGeom prst="rect">
-                  <a:avLst/>
-                </a:prstGeom>
-                <a:blipFill>
-                  <a:blip r:embed="rId7"/>
-                  <a:stretch>
-                    <a:fillRect l="-10448" r="-8955"/>
-                  </a:stretch>
-                </a:blipFill>
-              </p:spPr>
-              <p:txBody>
-                <a:bodyPr/>
-                <a:lstStyle/>
-                <a:p>
-                  <a:r>
-                    <a:rPr lang="en-US">
-                      <a:noFill/>
-                    </a:rPr>
-                    <a:t> </a:t>
-                  </a:r>
-                </a:p>
-              </p:txBody>
-            </p:sp>
-          </mc:Fallback>
-        </mc:AlternateContent>
+        <p:sp>
+          <p:nvSpPr>
+            <p:cNvPr id="34" name="Rectangle 33">
+              <a:extLst>
+                <a:ext uri="{FF2B5EF4-FFF2-40B4-BE49-F238E27FC236}">
+                  <a16:creationId xmlns:a16="http://schemas.microsoft.com/office/drawing/2014/main" id="{C30B8588-25CF-61FB-1F5B-B6632B15CBE6}"/>
+                </a:ext>
+              </a:extLst>
+            </p:cNvPr>
+            <p:cNvSpPr/>
+            <p:nvPr/>
+          </p:nvSpPr>
+          <p:spPr>
+            <a:xfrm>
+              <a:off x="8940597" y="6873960"/>
+              <a:ext cx="8077200" cy="1879600"/>
+            </a:xfrm>
+            <a:prstGeom prst="rect">
+              <a:avLst/>
+            </a:prstGeom>
+            <a:noFill/>
+            <a:ln>
+              <a:noFill/>
+            </a:ln>
+          </p:spPr>
+          <p:style>
+            <a:lnRef idx="2">
+              <a:schemeClr val="accent1">
+                <a:shade val="15000"/>
+              </a:schemeClr>
+            </a:lnRef>
+            <a:fillRef idx="1">
+              <a:schemeClr val="accent1"/>
+            </a:fillRef>
+            <a:effectRef idx="0">
+              <a:schemeClr val="accent1"/>
+            </a:effectRef>
+            <a:fontRef idx="minor">
+              <a:schemeClr val="lt1"/>
+            </a:fontRef>
+          </p:style>
+          <p:txBody>
+            <a:bodyPr rtlCol="0" anchor="ctr"/>
+            <a:lstStyle/>
+            <a:p>
+              <a:pPr algn="ctr"/>
+              <a:endParaRPr lang="en-US"/>
+            </a:p>
+          </p:txBody>
+        </p:sp>
+        <p:sp>
+          <p:nvSpPr>
+            <p:cNvPr id="35" name="Rectangle 34">
+              <a:extLst>
+                <a:ext uri="{FF2B5EF4-FFF2-40B4-BE49-F238E27FC236}">
+                  <a16:creationId xmlns:a16="http://schemas.microsoft.com/office/drawing/2014/main" id="{6AFAC7EC-1F86-4B30-1886-9FA980865E92}"/>
+                </a:ext>
+              </a:extLst>
+            </p:cNvPr>
+            <p:cNvSpPr/>
+            <p:nvPr/>
+          </p:nvSpPr>
+          <p:spPr>
+            <a:xfrm>
+              <a:off x="-3835404" y="6890969"/>
+              <a:ext cx="8077200" cy="1879600"/>
+            </a:xfrm>
+            <a:prstGeom prst="rect">
+              <a:avLst/>
+            </a:prstGeom>
+            <a:noFill/>
+            <a:ln>
+              <a:noFill/>
+            </a:ln>
+          </p:spPr>
+          <p:style>
+            <a:lnRef idx="2">
+              <a:schemeClr val="accent1">
+                <a:shade val="15000"/>
+              </a:schemeClr>
+            </a:lnRef>
+            <a:fillRef idx="1">
+              <a:schemeClr val="accent1"/>
+            </a:fillRef>
+            <a:effectRef idx="0">
+              <a:schemeClr val="accent1"/>
+            </a:effectRef>
+            <a:fontRef idx="minor">
+              <a:schemeClr val="lt1"/>
+            </a:fontRef>
+          </p:style>
+          <p:txBody>
+            <a:bodyPr rtlCol="0" anchor="ctr"/>
+            <a:lstStyle/>
+            <a:p>
+              <a:pPr algn="ctr"/>
+              <a:endParaRPr lang="en-US"/>
+            </a:p>
+          </p:txBody>
+        </p:sp>
+        <p:sp>
+          <p:nvSpPr>
+            <p:cNvPr id="36" name="Rounded Rectangle 35">
+              <a:extLst>
+                <a:ext uri="{FF2B5EF4-FFF2-40B4-BE49-F238E27FC236}">
+                  <a16:creationId xmlns:a16="http://schemas.microsoft.com/office/drawing/2014/main" id="{E1F13F6E-8662-0D86-6085-1CC04FFE56E8}"/>
+                </a:ext>
+              </a:extLst>
+            </p:cNvPr>
+            <p:cNvSpPr/>
+            <p:nvPr/>
+          </p:nvSpPr>
+          <p:spPr>
+            <a:xfrm>
+              <a:off x="-3622691" y="7139944"/>
+              <a:ext cx="4413929" cy="1216301"/>
+            </a:xfrm>
+            <a:prstGeom prst="roundRect">
+              <a:avLst>
+                <a:gd name="adj" fmla="val 36591"/>
+              </a:avLst>
+            </a:prstGeom>
+            <a:solidFill>
+              <a:srgbClr val="00B0F0">
+                <a:alpha val="25714"/>
+              </a:srgbClr>
+            </a:solidFill>
+            <a:ln w="34925">
+              <a:solidFill>
+                <a:srgbClr val="0070C0"/>
+              </a:solidFill>
+            </a:ln>
+          </p:spPr>
+          <p:style>
+            <a:lnRef idx="2">
+              <a:schemeClr val="accent1">
+                <a:shade val="15000"/>
+              </a:schemeClr>
+            </a:lnRef>
+            <a:fillRef idx="1">
+              <a:schemeClr val="accent1"/>
+            </a:fillRef>
+            <a:effectRef idx="0">
+              <a:schemeClr val="accent1"/>
+            </a:effectRef>
+            <a:fontRef idx="minor">
+              <a:schemeClr val="lt1"/>
+            </a:fontRef>
+          </p:style>
+          <p:txBody>
+            <a:bodyPr rtlCol="0" anchor="ctr"/>
+            <a:lstStyle/>
+            <a:p>
+              <a:pPr algn="ctr"/>
+              <a:endParaRPr lang="en-US"/>
+            </a:p>
+          </p:txBody>
+        </p:sp>
+        <p:sp>
+          <p:nvSpPr>
+            <p:cNvPr id="37" name="Rounded Rectangle 36">
+              <a:extLst>
+                <a:ext uri="{FF2B5EF4-FFF2-40B4-BE49-F238E27FC236}">
+                  <a16:creationId xmlns:a16="http://schemas.microsoft.com/office/drawing/2014/main" id="{5F11D298-7FFE-FC0B-69C9-FFB66589884A}"/>
+                </a:ext>
+              </a:extLst>
+            </p:cNvPr>
+            <p:cNvSpPr/>
+            <p:nvPr/>
+          </p:nvSpPr>
+          <p:spPr>
+            <a:xfrm>
+              <a:off x="863397" y="7155882"/>
+              <a:ext cx="3208180" cy="1216301"/>
+            </a:xfrm>
+            <a:prstGeom prst="roundRect">
+              <a:avLst>
+                <a:gd name="adj" fmla="val 36591"/>
+              </a:avLst>
+            </a:prstGeom>
+            <a:solidFill>
+              <a:srgbClr val="00B0F0">
+                <a:alpha val="25714"/>
+              </a:srgbClr>
+            </a:solidFill>
+            <a:ln w="34925">
+              <a:solidFill>
+                <a:srgbClr val="0070C0"/>
+              </a:solidFill>
+            </a:ln>
+          </p:spPr>
+          <p:style>
+            <a:lnRef idx="2">
+              <a:schemeClr val="accent1">
+                <a:shade val="15000"/>
+              </a:schemeClr>
+            </a:lnRef>
+            <a:fillRef idx="1">
+              <a:schemeClr val="accent1"/>
+            </a:fillRef>
+            <a:effectRef idx="0">
+              <a:schemeClr val="accent1"/>
+            </a:effectRef>
+            <a:fontRef idx="minor">
+              <a:schemeClr val="lt1"/>
+            </a:fontRef>
+          </p:style>
+          <p:txBody>
+            <a:bodyPr rtlCol="0" anchor="ctr"/>
+            <a:lstStyle/>
+            <a:p>
+              <a:pPr algn="ctr"/>
+              <a:endParaRPr lang="en-US"/>
+            </a:p>
+          </p:txBody>
+        </p:sp>
+        <p:sp>
+          <p:nvSpPr>
+            <p:cNvPr id="38" name="Rounded Rectangle 37">
+              <a:extLst>
+                <a:ext uri="{FF2B5EF4-FFF2-40B4-BE49-F238E27FC236}">
+                  <a16:creationId xmlns:a16="http://schemas.microsoft.com/office/drawing/2014/main" id="{79A09BF7-CC16-4488-9D1B-7CA247000293}"/>
+                </a:ext>
+              </a:extLst>
+            </p:cNvPr>
+            <p:cNvSpPr/>
+            <p:nvPr/>
+          </p:nvSpPr>
+          <p:spPr>
+            <a:xfrm>
+              <a:off x="9142940" y="7088091"/>
+              <a:ext cx="4413929" cy="1216301"/>
+            </a:xfrm>
+            <a:prstGeom prst="roundRect">
+              <a:avLst>
+                <a:gd name="adj" fmla="val 36591"/>
+              </a:avLst>
+            </a:prstGeom>
+            <a:solidFill>
+              <a:srgbClr val="00B0F0">
+                <a:alpha val="25714"/>
+              </a:srgbClr>
+            </a:solidFill>
+            <a:ln w="34925">
+              <a:solidFill>
+                <a:srgbClr val="0070C0"/>
+              </a:solidFill>
+            </a:ln>
+          </p:spPr>
+          <p:style>
+            <a:lnRef idx="2">
+              <a:schemeClr val="accent1">
+                <a:shade val="15000"/>
+              </a:schemeClr>
+            </a:lnRef>
+            <a:fillRef idx="1">
+              <a:schemeClr val="accent1"/>
+            </a:fillRef>
+            <a:effectRef idx="0">
+              <a:schemeClr val="accent1"/>
+            </a:effectRef>
+            <a:fontRef idx="minor">
+              <a:schemeClr val="lt1"/>
+            </a:fontRef>
+          </p:style>
+          <p:txBody>
+            <a:bodyPr rtlCol="0" anchor="ctr"/>
+            <a:lstStyle/>
+            <a:p>
+              <a:pPr algn="ctr"/>
+              <a:endParaRPr lang="en-US"/>
+            </a:p>
+          </p:txBody>
+        </p:sp>
+        <p:sp>
+          <p:nvSpPr>
+            <p:cNvPr id="39" name="Rounded Rectangle 38">
+              <a:extLst>
+                <a:ext uri="{FF2B5EF4-FFF2-40B4-BE49-F238E27FC236}">
+                  <a16:creationId xmlns:a16="http://schemas.microsoft.com/office/drawing/2014/main" id="{4F0CB1A9-6609-4E2B-C91F-C8EF98BE1D0F}"/>
+                </a:ext>
+              </a:extLst>
+            </p:cNvPr>
+            <p:cNvSpPr/>
+            <p:nvPr/>
+          </p:nvSpPr>
+          <p:spPr>
+            <a:xfrm>
+              <a:off x="13629028" y="7104029"/>
+              <a:ext cx="3208180" cy="1216301"/>
+            </a:xfrm>
+            <a:prstGeom prst="roundRect">
+              <a:avLst>
+                <a:gd name="adj" fmla="val 36591"/>
+              </a:avLst>
+            </a:prstGeom>
+            <a:solidFill>
+              <a:srgbClr val="00B0F0">
+                <a:alpha val="25714"/>
+              </a:srgbClr>
+            </a:solidFill>
+            <a:ln w="34925">
+              <a:solidFill>
+                <a:srgbClr val="0070C0"/>
+              </a:solidFill>
+            </a:ln>
+          </p:spPr>
+          <p:style>
+            <a:lnRef idx="2">
+              <a:schemeClr val="accent1">
+                <a:shade val="15000"/>
+              </a:schemeClr>
+            </a:lnRef>
+            <a:fillRef idx="1">
+              <a:schemeClr val="accent1"/>
+            </a:fillRef>
+            <a:effectRef idx="0">
+              <a:schemeClr val="accent1"/>
+            </a:effectRef>
+            <a:fontRef idx="minor">
+              <a:schemeClr val="lt1"/>
+            </a:fontRef>
+          </p:style>
+          <p:txBody>
+            <a:bodyPr rtlCol="0" anchor="ctr"/>
+            <a:lstStyle/>
+            <a:p>
+              <a:pPr algn="ctr"/>
+              <a:endParaRPr lang="en-US"/>
+            </a:p>
+          </p:txBody>
+        </p:sp>
+        <p:pic>
+          <p:nvPicPr>
+            <p:cNvPr id="40" name="Graphic 39" descr="Sleep with solid fill">
+              <a:extLst>
+                <a:ext uri="{FF2B5EF4-FFF2-40B4-BE49-F238E27FC236}">
+                  <a16:creationId xmlns:a16="http://schemas.microsoft.com/office/drawing/2014/main" id="{3FD3F3DF-EC35-BF7E-52F5-70B53C559CCE}"/>
+                </a:ext>
+              </a:extLst>
+            </p:cNvPr>
+            <p:cNvPicPr>
+              <a:picLocks noChangeAspect="1"/>
+            </p:cNvPicPr>
+            <p:nvPr/>
+          </p:nvPicPr>
+          <p:blipFill>
+            <a:blip>
+              <a:extLst>
+                <a:ext uri="{96DAC541-7B7A-43D3-8B79-37D633B846F1}">
+                  <asvg:svgBlip xmlns:asvg="http://schemas.microsoft.com/office/drawing/2016/SVG/main" r:embed="rId3"/>
+                </a:ext>
+              </a:extLst>
+            </a:blip>
+            <a:srcRect/>
+            <a:stretch/>
+          </p:blipFill>
+          <p:spPr>
+            <a:xfrm>
+              <a:off x="-3336607" y="7497466"/>
+              <a:ext cx="634696" cy="634696"/>
+            </a:xfrm>
+            <a:prstGeom prst="rect">
+              <a:avLst/>
+            </a:prstGeom>
+          </p:spPr>
+        </p:pic>
+        <p:pic>
+          <p:nvPicPr>
+            <p:cNvPr id="41" name="Graphic 40" descr="Bed with solid fill">
+              <a:extLst>
+                <a:ext uri="{FF2B5EF4-FFF2-40B4-BE49-F238E27FC236}">
+                  <a16:creationId xmlns:a16="http://schemas.microsoft.com/office/drawing/2014/main" id="{1D5B883A-FE74-392D-FBB5-A9C04AD4173F}"/>
+                </a:ext>
+              </a:extLst>
+            </p:cNvPr>
+            <p:cNvPicPr>
+              <a:picLocks noChangeAspect="1"/>
+            </p:cNvPicPr>
+            <p:nvPr/>
+          </p:nvPicPr>
+          <p:blipFill>
+            <a:blip>
+              <a:extLst>
+                <a:ext uri="{96DAC541-7B7A-43D3-8B79-37D633B846F1}">
+                  <asvg:svgBlip xmlns:asvg="http://schemas.microsoft.com/office/drawing/2016/SVG/main" r:embed="rId4"/>
+                </a:ext>
+              </a:extLst>
+            </a:blip>
+            <a:srcRect/>
+            <a:stretch/>
+          </p:blipFill>
+          <p:spPr>
+            <a:xfrm>
+              <a:off x="-2270775" y="7497466"/>
+              <a:ext cx="634696" cy="634696"/>
+            </a:xfrm>
+            <a:prstGeom prst="rect">
+              <a:avLst/>
+            </a:prstGeom>
+          </p:spPr>
+        </p:pic>
+        <p:pic>
+          <p:nvPicPr>
+            <p:cNvPr id="42" name="Graphic 41" descr="Bed with solid fill">
+              <a:extLst>
+                <a:ext uri="{FF2B5EF4-FFF2-40B4-BE49-F238E27FC236}">
+                  <a16:creationId xmlns:a16="http://schemas.microsoft.com/office/drawing/2014/main" id="{94E7CF52-8659-F4E8-F810-0C3E20839491}"/>
+                </a:ext>
+              </a:extLst>
+            </p:cNvPr>
+            <p:cNvPicPr>
+              <a:picLocks noChangeAspect="1"/>
+            </p:cNvPicPr>
+            <p:nvPr/>
+          </p:nvPicPr>
+          <p:blipFill>
+            <a:blip>
+              <a:extLst>
+                <a:ext uri="{96DAC541-7B7A-43D3-8B79-37D633B846F1}">
+                  <asvg:svgBlip xmlns:asvg="http://schemas.microsoft.com/office/drawing/2016/SVG/main" r:embed="rId5"/>
+                </a:ext>
+              </a:extLst>
+            </a:blip>
+            <a:srcRect/>
+            <a:stretch/>
+          </p:blipFill>
+          <p:spPr>
+            <a:xfrm>
+              <a:off x="-1161442" y="7497466"/>
+              <a:ext cx="634696" cy="634696"/>
+            </a:xfrm>
+            <a:prstGeom prst="rect">
+              <a:avLst/>
+            </a:prstGeom>
+          </p:spPr>
+        </p:pic>
+        <p:pic>
+          <p:nvPicPr>
+            <p:cNvPr id="43" name="Graphic 42" descr="Sleep with solid fill">
+              <a:extLst>
+                <a:ext uri="{FF2B5EF4-FFF2-40B4-BE49-F238E27FC236}">
+                  <a16:creationId xmlns:a16="http://schemas.microsoft.com/office/drawing/2014/main" id="{9BA5B86D-2701-52D1-91BC-2BB07D4B700A}"/>
+                </a:ext>
+              </a:extLst>
+            </p:cNvPr>
+            <p:cNvPicPr>
+              <a:picLocks noChangeAspect="1"/>
+            </p:cNvPicPr>
+            <p:nvPr/>
+          </p:nvPicPr>
+          <p:blipFill>
+            <a:blip>
+              <a:extLst>
+                <a:ext uri="{96DAC541-7B7A-43D3-8B79-37D633B846F1}">
+                  <asvg:svgBlip xmlns:asvg="http://schemas.microsoft.com/office/drawing/2016/SVG/main" r:embed="rId7"/>
+                </a:ext>
+              </a:extLst>
+            </a:blip>
+            <a:srcRect/>
+            <a:stretch/>
+          </p:blipFill>
+          <p:spPr>
+            <a:xfrm>
+              <a:off x="-95610" y="7497466"/>
+              <a:ext cx="634696" cy="634696"/>
+            </a:xfrm>
+            <a:prstGeom prst="rect">
+              <a:avLst/>
+            </a:prstGeom>
+          </p:spPr>
+        </p:pic>
+        <p:pic>
+          <p:nvPicPr>
+            <p:cNvPr id="44" name="Graphic 43" descr="Sleep with solid fill">
+              <a:extLst>
+                <a:ext uri="{FF2B5EF4-FFF2-40B4-BE49-F238E27FC236}">
+                  <a16:creationId xmlns:a16="http://schemas.microsoft.com/office/drawing/2014/main" id="{52872C34-C780-5EF1-D9E1-B68BBC7A90C6}"/>
+                </a:ext>
+              </a:extLst>
+            </p:cNvPr>
+            <p:cNvPicPr>
+              <a:picLocks noChangeAspect="1"/>
+            </p:cNvPicPr>
+            <p:nvPr/>
+          </p:nvPicPr>
+          <p:blipFill>
+            <a:blip>
+              <a:extLst>
+                <a:ext uri="{96DAC541-7B7A-43D3-8B79-37D633B846F1}">
+                  <asvg:svgBlip xmlns:asvg="http://schemas.microsoft.com/office/drawing/2016/SVG/main" r:embed="rId3"/>
+                </a:ext>
+              </a:extLst>
+            </a:blip>
+            <a:srcRect/>
+            <a:stretch/>
+          </p:blipFill>
+          <p:spPr>
+            <a:xfrm>
+              <a:off x="1023791" y="7497466"/>
+              <a:ext cx="634696" cy="634696"/>
+            </a:xfrm>
+            <a:prstGeom prst="rect">
+              <a:avLst/>
+            </a:prstGeom>
+          </p:spPr>
+        </p:pic>
+        <p:pic>
+          <p:nvPicPr>
+            <p:cNvPr id="45" name="Graphic 44" descr="Sleep with solid fill">
+              <a:extLst>
+                <a:ext uri="{FF2B5EF4-FFF2-40B4-BE49-F238E27FC236}">
+                  <a16:creationId xmlns:a16="http://schemas.microsoft.com/office/drawing/2014/main" id="{23F908CB-7C04-A562-0AAC-0C3A966BB31B}"/>
+                </a:ext>
+              </a:extLst>
+            </p:cNvPr>
+            <p:cNvPicPr>
+              <a:picLocks noChangeAspect="1"/>
+            </p:cNvPicPr>
+            <p:nvPr/>
+          </p:nvPicPr>
+          <p:blipFill>
+            <a:blip>
+              <a:extLst>
+                <a:ext uri="{96DAC541-7B7A-43D3-8B79-37D633B846F1}">
+                  <asvg:svgBlip xmlns:asvg="http://schemas.microsoft.com/office/drawing/2016/SVG/main" r:embed="rId6"/>
+                </a:ext>
+              </a:extLst>
+            </a:blip>
+            <a:srcRect/>
+            <a:stretch/>
+          </p:blipFill>
+          <p:spPr>
+            <a:xfrm>
+              <a:off x="2089623" y="7497466"/>
+              <a:ext cx="634696" cy="634696"/>
+            </a:xfrm>
+            <a:prstGeom prst="rect">
+              <a:avLst/>
+            </a:prstGeom>
+          </p:spPr>
+        </p:pic>
+        <p:pic>
+          <p:nvPicPr>
+            <p:cNvPr id="46" name="Graphic 45" descr="Bed with solid fill">
+              <a:extLst>
+                <a:ext uri="{FF2B5EF4-FFF2-40B4-BE49-F238E27FC236}">
+                  <a16:creationId xmlns:a16="http://schemas.microsoft.com/office/drawing/2014/main" id="{BA1F1768-A68F-F83F-A992-48193C3E96EF}"/>
+                </a:ext>
+              </a:extLst>
+            </p:cNvPr>
+            <p:cNvPicPr>
+              <a:picLocks noChangeAspect="1"/>
+            </p:cNvPicPr>
+            <p:nvPr/>
+          </p:nvPicPr>
+          <p:blipFill>
+            <a:blip>
+              <a:extLst>
+                <a:ext uri="{96DAC541-7B7A-43D3-8B79-37D633B846F1}">
+                  <asvg:svgBlip xmlns:asvg="http://schemas.microsoft.com/office/drawing/2016/SVG/main" r:embed="rId4"/>
+                </a:ext>
+              </a:extLst>
+            </a:blip>
+            <a:srcRect/>
+            <a:stretch/>
+          </p:blipFill>
+          <p:spPr>
+            <a:xfrm>
+              <a:off x="3198956" y="7497466"/>
+              <a:ext cx="634696" cy="634696"/>
+            </a:xfrm>
+            <a:prstGeom prst="rect">
+              <a:avLst/>
+            </a:prstGeom>
+          </p:spPr>
+        </p:pic>
+        <p:sp>
+          <p:nvSpPr>
+            <p:cNvPr id="47" name="TextBox 46">
+              <a:extLst>
+                <a:ext uri="{FF2B5EF4-FFF2-40B4-BE49-F238E27FC236}">
+                  <a16:creationId xmlns:a16="http://schemas.microsoft.com/office/drawing/2014/main" id="{275FD452-5A57-0D1E-E5D7-465403E7D40D}"/>
+                </a:ext>
+              </a:extLst>
+            </p:cNvPr>
+            <p:cNvSpPr txBox="1"/>
+            <p:nvPr/>
+          </p:nvSpPr>
+          <p:spPr>
+            <a:xfrm>
+              <a:off x="-3268159" y="7333741"/>
+              <a:ext cx="570990" cy="369332"/>
+            </a:xfrm>
+            <a:prstGeom prst="rect">
+              <a:avLst/>
+            </a:prstGeom>
+            <a:noFill/>
+          </p:spPr>
+          <p:txBody>
+            <a:bodyPr wrap="none" rtlCol="0">
+              <a:spAutoFit/>
+            </a:bodyPr>
+            <a:lstStyle/>
+            <a:p>
+              <a:r>
+                <a:rPr lang="en-US" dirty="0"/>
+                <a:t>B08</a:t>
+              </a:r>
+            </a:p>
+          </p:txBody>
+        </p:sp>
+        <p:sp>
+          <p:nvSpPr>
+            <p:cNvPr id="48" name="TextBox 47">
+              <a:extLst>
+                <a:ext uri="{FF2B5EF4-FFF2-40B4-BE49-F238E27FC236}">
+                  <a16:creationId xmlns:a16="http://schemas.microsoft.com/office/drawing/2014/main" id="{F819CC8B-0B1F-D91F-DB13-C838EA5352E9}"/>
+                </a:ext>
+              </a:extLst>
+            </p:cNvPr>
+            <p:cNvSpPr txBox="1"/>
+            <p:nvPr/>
+          </p:nvSpPr>
+          <p:spPr>
+            <a:xfrm>
+              <a:off x="-2206354" y="7333741"/>
+              <a:ext cx="570990" cy="369332"/>
+            </a:xfrm>
+            <a:prstGeom prst="rect">
+              <a:avLst/>
+            </a:prstGeom>
+            <a:noFill/>
+          </p:spPr>
+          <p:txBody>
+            <a:bodyPr wrap="none" rtlCol="0">
+              <a:spAutoFit/>
+            </a:bodyPr>
+            <a:lstStyle/>
+            <a:p>
+              <a:r>
+                <a:rPr lang="en-US" dirty="0"/>
+                <a:t>B09</a:t>
+              </a:r>
+            </a:p>
+          </p:txBody>
+        </p:sp>
+        <p:sp>
+          <p:nvSpPr>
+            <p:cNvPr id="49" name="TextBox 48">
+              <a:extLst>
+                <a:ext uri="{FF2B5EF4-FFF2-40B4-BE49-F238E27FC236}">
+                  <a16:creationId xmlns:a16="http://schemas.microsoft.com/office/drawing/2014/main" id="{751E530C-FA7B-2D1C-ED5F-251652F395E4}"/>
+                </a:ext>
+              </a:extLst>
+            </p:cNvPr>
+            <p:cNvSpPr txBox="1"/>
+            <p:nvPr/>
+          </p:nvSpPr>
+          <p:spPr>
+            <a:xfrm>
+              <a:off x="-1139694" y="7333741"/>
+              <a:ext cx="570990" cy="369332"/>
+            </a:xfrm>
+            <a:prstGeom prst="rect">
+              <a:avLst/>
+            </a:prstGeom>
+            <a:noFill/>
+          </p:spPr>
+          <p:txBody>
+            <a:bodyPr wrap="none" rtlCol="0">
+              <a:spAutoFit/>
+            </a:bodyPr>
+            <a:lstStyle/>
+            <a:p>
+              <a:r>
+                <a:rPr lang="en-US" dirty="0"/>
+                <a:t>B10</a:t>
+              </a:r>
+            </a:p>
+          </p:txBody>
+        </p:sp>
+        <p:sp>
+          <p:nvSpPr>
+            <p:cNvPr id="50" name="TextBox 49">
+              <a:extLst>
+                <a:ext uri="{FF2B5EF4-FFF2-40B4-BE49-F238E27FC236}">
+                  <a16:creationId xmlns:a16="http://schemas.microsoft.com/office/drawing/2014/main" id="{5D6B108B-53A5-CCDB-34B1-9ADC26A19E3A}"/>
+                </a:ext>
+              </a:extLst>
+            </p:cNvPr>
+            <p:cNvSpPr txBox="1"/>
+            <p:nvPr/>
+          </p:nvSpPr>
+          <p:spPr>
+            <a:xfrm>
+              <a:off x="-50134" y="7333741"/>
+              <a:ext cx="570990" cy="369332"/>
+            </a:xfrm>
+            <a:prstGeom prst="rect">
+              <a:avLst/>
+            </a:prstGeom>
+            <a:noFill/>
+          </p:spPr>
+          <p:txBody>
+            <a:bodyPr wrap="none" rtlCol="0">
+              <a:spAutoFit/>
+            </a:bodyPr>
+            <a:lstStyle/>
+            <a:p>
+              <a:r>
+                <a:rPr lang="en-US" dirty="0"/>
+                <a:t>B11</a:t>
+              </a:r>
+            </a:p>
+          </p:txBody>
+        </p:sp>
+        <p:sp>
+          <p:nvSpPr>
+            <p:cNvPr id="51" name="TextBox 50">
+              <a:extLst>
+                <a:ext uri="{FF2B5EF4-FFF2-40B4-BE49-F238E27FC236}">
+                  <a16:creationId xmlns:a16="http://schemas.microsoft.com/office/drawing/2014/main" id="{1FD0AF88-E7D2-DDF5-ACF9-52F67DC57843}"/>
+                </a:ext>
+              </a:extLst>
+            </p:cNvPr>
+            <p:cNvSpPr txBox="1"/>
+            <p:nvPr/>
+          </p:nvSpPr>
+          <p:spPr>
+            <a:xfrm>
+              <a:off x="1069660" y="7338330"/>
+              <a:ext cx="570990" cy="369332"/>
+            </a:xfrm>
+            <a:prstGeom prst="rect">
+              <a:avLst/>
+            </a:prstGeom>
+            <a:noFill/>
+          </p:spPr>
+          <p:txBody>
+            <a:bodyPr wrap="none" rtlCol="0">
+              <a:spAutoFit/>
+            </a:bodyPr>
+            <a:lstStyle/>
+            <a:p>
+              <a:r>
+                <a:rPr lang="en-US" dirty="0"/>
+                <a:t>B12</a:t>
+              </a:r>
+            </a:p>
+          </p:txBody>
+        </p:sp>
+        <p:sp>
+          <p:nvSpPr>
+            <p:cNvPr id="52" name="TextBox 51">
+              <a:extLst>
+                <a:ext uri="{FF2B5EF4-FFF2-40B4-BE49-F238E27FC236}">
+                  <a16:creationId xmlns:a16="http://schemas.microsoft.com/office/drawing/2014/main" id="{5EC96440-920E-7E19-B83B-07D92AED55A8}"/>
+                </a:ext>
+              </a:extLst>
+            </p:cNvPr>
+            <p:cNvSpPr txBox="1"/>
+            <p:nvPr/>
+          </p:nvSpPr>
+          <p:spPr>
+            <a:xfrm>
+              <a:off x="2131465" y="7338330"/>
+              <a:ext cx="570990" cy="369332"/>
+            </a:xfrm>
+            <a:prstGeom prst="rect">
+              <a:avLst/>
+            </a:prstGeom>
+            <a:noFill/>
+          </p:spPr>
+          <p:txBody>
+            <a:bodyPr wrap="none" rtlCol="0">
+              <a:spAutoFit/>
+            </a:bodyPr>
+            <a:lstStyle/>
+            <a:p>
+              <a:r>
+                <a:rPr lang="en-US" dirty="0"/>
+                <a:t>B13</a:t>
+              </a:r>
+            </a:p>
+          </p:txBody>
+        </p:sp>
+        <p:sp>
+          <p:nvSpPr>
+            <p:cNvPr id="53" name="TextBox 52">
+              <a:extLst>
+                <a:ext uri="{FF2B5EF4-FFF2-40B4-BE49-F238E27FC236}">
+                  <a16:creationId xmlns:a16="http://schemas.microsoft.com/office/drawing/2014/main" id="{4F5270D2-4E22-64EB-5D0E-B53244FBB615}"/>
+                </a:ext>
+              </a:extLst>
+            </p:cNvPr>
+            <p:cNvSpPr txBox="1"/>
+            <p:nvPr/>
+          </p:nvSpPr>
+          <p:spPr>
+            <a:xfrm>
+              <a:off x="3198125" y="7338330"/>
+              <a:ext cx="570990" cy="369332"/>
+            </a:xfrm>
+            <a:prstGeom prst="rect">
+              <a:avLst/>
+            </a:prstGeom>
+            <a:noFill/>
+          </p:spPr>
+          <p:txBody>
+            <a:bodyPr wrap="none" rtlCol="0">
+              <a:spAutoFit/>
+            </a:bodyPr>
+            <a:lstStyle/>
+            <a:p>
+              <a:r>
+                <a:rPr lang="en-US" dirty="0"/>
+                <a:t>B14</a:t>
+              </a:r>
+            </a:p>
+          </p:txBody>
+        </p:sp>
+        <p:pic>
+          <p:nvPicPr>
+            <p:cNvPr id="54" name="Graphic 53" descr="Sleep with solid fill">
+              <a:extLst>
+                <a:ext uri="{FF2B5EF4-FFF2-40B4-BE49-F238E27FC236}">
+                  <a16:creationId xmlns:a16="http://schemas.microsoft.com/office/drawing/2014/main" id="{D81CE0E0-F7F6-910F-6DAB-2B0BA47E5FB0}"/>
+                </a:ext>
+              </a:extLst>
+            </p:cNvPr>
+            <p:cNvPicPr>
+              <a:picLocks noChangeAspect="1"/>
+            </p:cNvPicPr>
+            <p:nvPr/>
+          </p:nvPicPr>
+          <p:blipFill>
+            <a:blip>
+              <a:extLst>
+                <a:ext uri="{96DAC541-7B7A-43D3-8B79-37D633B846F1}">
+                  <asvg:svgBlip xmlns:asvg="http://schemas.microsoft.com/office/drawing/2016/SVG/main" r:embed="rId3"/>
+                </a:ext>
+              </a:extLst>
+            </a:blip>
+            <a:srcRect/>
+            <a:stretch/>
+          </p:blipFill>
+          <p:spPr>
+            <a:xfrm>
+              <a:off x="9429024" y="7445613"/>
+              <a:ext cx="634696" cy="634696"/>
+            </a:xfrm>
+            <a:prstGeom prst="rect">
+              <a:avLst/>
+            </a:prstGeom>
+          </p:spPr>
+        </p:pic>
+        <p:pic>
+          <p:nvPicPr>
+            <p:cNvPr id="55" name="Graphic 54" descr="Bed with solid fill">
+              <a:extLst>
+                <a:ext uri="{FF2B5EF4-FFF2-40B4-BE49-F238E27FC236}">
+                  <a16:creationId xmlns:a16="http://schemas.microsoft.com/office/drawing/2014/main" id="{5E835762-C89F-E172-FFD9-DC3E7D9B6F4D}"/>
+                </a:ext>
+              </a:extLst>
+            </p:cNvPr>
+            <p:cNvPicPr>
+              <a:picLocks noChangeAspect="1"/>
+            </p:cNvPicPr>
+            <p:nvPr/>
+          </p:nvPicPr>
+          <p:blipFill>
+            <a:blip>
+              <a:extLst>
+                <a:ext uri="{96DAC541-7B7A-43D3-8B79-37D633B846F1}">
+                  <asvg:svgBlip xmlns:asvg="http://schemas.microsoft.com/office/drawing/2016/SVG/main" r:embed="rId4"/>
+                </a:ext>
+              </a:extLst>
+            </a:blip>
+            <a:srcRect/>
+            <a:stretch/>
+          </p:blipFill>
+          <p:spPr>
+            <a:xfrm>
+              <a:off x="10494856" y="7445613"/>
+              <a:ext cx="634696" cy="634696"/>
+            </a:xfrm>
+            <a:prstGeom prst="rect">
+              <a:avLst/>
+            </a:prstGeom>
+          </p:spPr>
+        </p:pic>
+        <p:pic>
+          <p:nvPicPr>
+            <p:cNvPr id="56" name="Graphic 55" descr="Bed with solid fill">
+              <a:extLst>
+                <a:ext uri="{FF2B5EF4-FFF2-40B4-BE49-F238E27FC236}">
+                  <a16:creationId xmlns:a16="http://schemas.microsoft.com/office/drawing/2014/main" id="{3CDD0F15-94CE-CD33-1276-871AD2409922}"/>
+                </a:ext>
+              </a:extLst>
+            </p:cNvPr>
+            <p:cNvPicPr>
+              <a:picLocks noChangeAspect="1"/>
+            </p:cNvPicPr>
+            <p:nvPr/>
+          </p:nvPicPr>
+          <p:blipFill>
+            <a:blip>
+              <a:extLst>
+                <a:ext uri="{96DAC541-7B7A-43D3-8B79-37D633B846F1}">
+                  <asvg:svgBlip xmlns:asvg="http://schemas.microsoft.com/office/drawing/2016/SVG/main" r:embed="rId5"/>
+                </a:ext>
+              </a:extLst>
+            </a:blip>
+            <a:srcRect/>
+            <a:stretch/>
+          </p:blipFill>
+          <p:spPr>
+            <a:xfrm>
+              <a:off x="11604189" y="7445613"/>
+              <a:ext cx="634696" cy="634696"/>
+            </a:xfrm>
+            <a:prstGeom prst="rect">
+              <a:avLst/>
+            </a:prstGeom>
+          </p:spPr>
+        </p:pic>
+        <p:pic>
+          <p:nvPicPr>
+            <p:cNvPr id="57" name="Graphic 56" descr="Sleep with solid fill">
+              <a:extLst>
+                <a:ext uri="{FF2B5EF4-FFF2-40B4-BE49-F238E27FC236}">
+                  <a16:creationId xmlns:a16="http://schemas.microsoft.com/office/drawing/2014/main" id="{484C7BB8-1C0D-3CD0-CE82-FE9B10D7DA2D}"/>
+                </a:ext>
+              </a:extLst>
+            </p:cNvPr>
+            <p:cNvPicPr>
+              <a:picLocks noChangeAspect="1"/>
+            </p:cNvPicPr>
+            <p:nvPr/>
+          </p:nvPicPr>
+          <p:blipFill>
+            <a:blip>
+              <a:extLst>
+                <a:ext uri="{96DAC541-7B7A-43D3-8B79-37D633B846F1}">
+                  <asvg:svgBlip xmlns:asvg="http://schemas.microsoft.com/office/drawing/2016/SVG/main" r:embed="rId7"/>
+                </a:ext>
+              </a:extLst>
+            </a:blip>
+            <a:srcRect/>
+            <a:stretch/>
+          </p:blipFill>
+          <p:spPr>
+            <a:xfrm>
+              <a:off x="12670021" y="7445613"/>
+              <a:ext cx="634696" cy="634696"/>
+            </a:xfrm>
+            <a:prstGeom prst="rect">
+              <a:avLst/>
+            </a:prstGeom>
+          </p:spPr>
+        </p:pic>
+        <p:pic>
+          <p:nvPicPr>
+            <p:cNvPr id="58" name="Graphic 57" descr="Bed with solid fill">
+              <a:extLst>
+                <a:ext uri="{FF2B5EF4-FFF2-40B4-BE49-F238E27FC236}">
+                  <a16:creationId xmlns:a16="http://schemas.microsoft.com/office/drawing/2014/main" id="{84F080ED-3402-76B2-481F-D8C73551F818}"/>
+                </a:ext>
+              </a:extLst>
+            </p:cNvPr>
+            <p:cNvPicPr>
+              <a:picLocks noChangeAspect="1"/>
+            </p:cNvPicPr>
+            <p:nvPr/>
+          </p:nvPicPr>
+          <p:blipFill>
+            <a:blip>
+              <a:extLst>
+                <a:ext uri="{96DAC541-7B7A-43D3-8B79-37D633B846F1}">
+                  <asvg:svgBlip xmlns:asvg="http://schemas.microsoft.com/office/drawing/2016/SVG/main" r:embed="rId4"/>
+                </a:ext>
+              </a:extLst>
+            </a:blip>
+            <a:srcRect/>
+            <a:stretch/>
+          </p:blipFill>
+          <p:spPr>
+            <a:xfrm>
+              <a:off x="13789422" y="7445613"/>
+              <a:ext cx="634696" cy="634696"/>
+            </a:xfrm>
+            <a:prstGeom prst="rect">
+              <a:avLst/>
+            </a:prstGeom>
+          </p:spPr>
+        </p:pic>
+        <p:pic>
+          <p:nvPicPr>
+            <p:cNvPr id="59" name="Graphic 58" descr="Sleep with solid fill">
+              <a:extLst>
+                <a:ext uri="{FF2B5EF4-FFF2-40B4-BE49-F238E27FC236}">
+                  <a16:creationId xmlns:a16="http://schemas.microsoft.com/office/drawing/2014/main" id="{636A7A96-BB66-E4B8-B9EE-FBF40512C720}"/>
+                </a:ext>
+              </a:extLst>
+            </p:cNvPr>
+            <p:cNvPicPr>
+              <a:picLocks noChangeAspect="1"/>
+            </p:cNvPicPr>
+            <p:nvPr/>
+          </p:nvPicPr>
+          <p:blipFill>
+            <a:blip>
+              <a:extLst>
+                <a:ext uri="{96DAC541-7B7A-43D3-8B79-37D633B846F1}">
+                  <asvg:svgBlip xmlns:asvg="http://schemas.microsoft.com/office/drawing/2016/SVG/main" r:embed="rId6"/>
+                </a:ext>
+              </a:extLst>
+            </a:blip>
+            <a:srcRect/>
+            <a:stretch/>
+          </p:blipFill>
+          <p:spPr>
+            <a:xfrm>
+              <a:off x="14855254" y="7445613"/>
+              <a:ext cx="634696" cy="634696"/>
+            </a:xfrm>
+            <a:prstGeom prst="rect">
+              <a:avLst/>
+            </a:prstGeom>
+          </p:spPr>
+        </p:pic>
+        <p:pic>
+          <p:nvPicPr>
+            <p:cNvPr id="60" name="Graphic 59" descr="Sleep with solid fill">
+              <a:extLst>
+                <a:ext uri="{FF2B5EF4-FFF2-40B4-BE49-F238E27FC236}">
+                  <a16:creationId xmlns:a16="http://schemas.microsoft.com/office/drawing/2014/main" id="{0B6AD558-483F-DD21-0A0B-64486DDAFB60}"/>
+                </a:ext>
+              </a:extLst>
+            </p:cNvPr>
+            <p:cNvPicPr>
+              <a:picLocks noChangeAspect="1"/>
+            </p:cNvPicPr>
+            <p:nvPr/>
+          </p:nvPicPr>
+          <p:blipFill>
+            <a:blip>
+              <a:extLst>
+                <a:ext uri="{96DAC541-7B7A-43D3-8B79-37D633B846F1}">
+                  <asvg:svgBlip xmlns:asvg="http://schemas.microsoft.com/office/drawing/2016/SVG/main" r:embed="rId3"/>
+                </a:ext>
+              </a:extLst>
+            </a:blip>
+            <a:srcRect/>
+            <a:stretch/>
+          </p:blipFill>
+          <p:spPr>
+            <a:xfrm>
+              <a:off x="15964587" y="7445613"/>
+              <a:ext cx="634696" cy="634696"/>
+            </a:xfrm>
+            <a:prstGeom prst="rect">
+              <a:avLst/>
+            </a:prstGeom>
+          </p:spPr>
+        </p:pic>
+        <p:sp>
+          <p:nvSpPr>
+            <p:cNvPr id="61" name="TextBox 60">
+              <a:extLst>
+                <a:ext uri="{FF2B5EF4-FFF2-40B4-BE49-F238E27FC236}">
+                  <a16:creationId xmlns:a16="http://schemas.microsoft.com/office/drawing/2014/main" id="{E2C61C4F-0434-F114-BF6B-32DBE53506BC}"/>
+                </a:ext>
+              </a:extLst>
+            </p:cNvPr>
+            <p:cNvSpPr txBox="1"/>
+            <p:nvPr/>
+          </p:nvSpPr>
+          <p:spPr>
+            <a:xfrm>
+              <a:off x="9497472" y="7281888"/>
+              <a:ext cx="570990" cy="369332"/>
+            </a:xfrm>
+            <a:prstGeom prst="rect">
+              <a:avLst/>
+            </a:prstGeom>
+            <a:noFill/>
+          </p:spPr>
+          <p:txBody>
+            <a:bodyPr wrap="none" rtlCol="0">
+              <a:spAutoFit/>
+            </a:bodyPr>
+            <a:lstStyle/>
+            <a:p>
+              <a:r>
+                <a:rPr lang="en-US" dirty="0"/>
+                <a:t>B08</a:t>
+              </a:r>
+            </a:p>
+          </p:txBody>
+        </p:sp>
+        <p:sp>
+          <p:nvSpPr>
+            <p:cNvPr id="62" name="TextBox 61">
+              <a:extLst>
+                <a:ext uri="{FF2B5EF4-FFF2-40B4-BE49-F238E27FC236}">
+                  <a16:creationId xmlns:a16="http://schemas.microsoft.com/office/drawing/2014/main" id="{FC0DFEA5-DDA6-8267-70F9-F90A4247FFF9}"/>
+                </a:ext>
+              </a:extLst>
+            </p:cNvPr>
+            <p:cNvSpPr txBox="1"/>
+            <p:nvPr/>
+          </p:nvSpPr>
+          <p:spPr>
+            <a:xfrm>
+              <a:off x="10559277" y="7281888"/>
+              <a:ext cx="570990" cy="369332"/>
+            </a:xfrm>
+            <a:prstGeom prst="rect">
+              <a:avLst/>
+            </a:prstGeom>
+            <a:noFill/>
+          </p:spPr>
+          <p:txBody>
+            <a:bodyPr wrap="none" rtlCol="0">
+              <a:spAutoFit/>
+            </a:bodyPr>
+            <a:lstStyle/>
+            <a:p>
+              <a:r>
+                <a:rPr lang="en-US" dirty="0"/>
+                <a:t>B09</a:t>
+              </a:r>
+            </a:p>
+          </p:txBody>
+        </p:sp>
+        <p:sp>
+          <p:nvSpPr>
+            <p:cNvPr id="63" name="TextBox 62">
+              <a:extLst>
+                <a:ext uri="{FF2B5EF4-FFF2-40B4-BE49-F238E27FC236}">
+                  <a16:creationId xmlns:a16="http://schemas.microsoft.com/office/drawing/2014/main" id="{7CC1E523-5752-4757-B9CC-509B99ECD685}"/>
+                </a:ext>
+              </a:extLst>
+            </p:cNvPr>
+            <p:cNvSpPr txBox="1"/>
+            <p:nvPr/>
+          </p:nvSpPr>
+          <p:spPr>
+            <a:xfrm>
+              <a:off x="11625937" y="7281888"/>
+              <a:ext cx="570990" cy="369332"/>
+            </a:xfrm>
+            <a:prstGeom prst="rect">
+              <a:avLst/>
+            </a:prstGeom>
+            <a:noFill/>
+          </p:spPr>
+          <p:txBody>
+            <a:bodyPr wrap="none" rtlCol="0">
+              <a:spAutoFit/>
+            </a:bodyPr>
+            <a:lstStyle/>
+            <a:p>
+              <a:r>
+                <a:rPr lang="en-US" dirty="0"/>
+                <a:t>B10</a:t>
+              </a:r>
+            </a:p>
+          </p:txBody>
+        </p:sp>
+        <p:sp>
+          <p:nvSpPr>
+            <p:cNvPr id="192" name="TextBox 191">
+              <a:extLst>
+                <a:ext uri="{FF2B5EF4-FFF2-40B4-BE49-F238E27FC236}">
+                  <a16:creationId xmlns:a16="http://schemas.microsoft.com/office/drawing/2014/main" id="{40DA8FE4-2848-C5FE-1B01-E3919450741D}"/>
+                </a:ext>
+              </a:extLst>
+            </p:cNvPr>
+            <p:cNvSpPr txBox="1"/>
+            <p:nvPr/>
+          </p:nvSpPr>
+          <p:spPr>
+            <a:xfrm>
+              <a:off x="12715497" y="7281888"/>
+              <a:ext cx="570990" cy="369332"/>
+            </a:xfrm>
+            <a:prstGeom prst="rect">
+              <a:avLst/>
+            </a:prstGeom>
+            <a:noFill/>
+          </p:spPr>
+          <p:txBody>
+            <a:bodyPr wrap="none" rtlCol="0">
+              <a:spAutoFit/>
+            </a:bodyPr>
+            <a:lstStyle/>
+            <a:p>
+              <a:r>
+                <a:rPr lang="en-US" dirty="0"/>
+                <a:t>B11</a:t>
+              </a:r>
+            </a:p>
+          </p:txBody>
+        </p:sp>
+        <p:sp>
+          <p:nvSpPr>
+            <p:cNvPr id="193" name="TextBox 192">
+              <a:extLst>
+                <a:ext uri="{FF2B5EF4-FFF2-40B4-BE49-F238E27FC236}">
+                  <a16:creationId xmlns:a16="http://schemas.microsoft.com/office/drawing/2014/main" id="{E156B8F3-1EF4-A179-5BCA-30FDC77E834F}"/>
+                </a:ext>
+              </a:extLst>
+            </p:cNvPr>
+            <p:cNvSpPr txBox="1"/>
+            <p:nvPr/>
+          </p:nvSpPr>
+          <p:spPr>
+            <a:xfrm>
+              <a:off x="13835291" y="7286477"/>
+              <a:ext cx="570990" cy="369332"/>
+            </a:xfrm>
+            <a:prstGeom prst="rect">
+              <a:avLst/>
+            </a:prstGeom>
+            <a:noFill/>
+          </p:spPr>
+          <p:txBody>
+            <a:bodyPr wrap="none" rtlCol="0">
+              <a:spAutoFit/>
+            </a:bodyPr>
+            <a:lstStyle/>
+            <a:p>
+              <a:r>
+                <a:rPr lang="en-US" dirty="0"/>
+                <a:t>B12</a:t>
+              </a:r>
+            </a:p>
+          </p:txBody>
+        </p:sp>
+        <p:sp>
+          <p:nvSpPr>
+            <p:cNvPr id="194" name="TextBox 193">
+              <a:extLst>
+                <a:ext uri="{FF2B5EF4-FFF2-40B4-BE49-F238E27FC236}">
+                  <a16:creationId xmlns:a16="http://schemas.microsoft.com/office/drawing/2014/main" id="{14B89536-4583-1E4C-A48D-BB35EAC7EBD5}"/>
+                </a:ext>
+              </a:extLst>
+            </p:cNvPr>
+            <p:cNvSpPr txBox="1"/>
+            <p:nvPr/>
+          </p:nvSpPr>
+          <p:spPr>
+            <a:xfrm>
+              <a:off x="14897096" y="7286477"/>
+              <a:ext cx="570990" cy="369332"/>
+            </a:xfrm>
+            <a:prstGeom prst="rect">
+              <a:avLst/>
+            </a:prstGeom>
+            <a:noFill/>
+          </p:spPr>
+          <p:txBody>
+            <a:bodyPr wrap="none" rtlCol="0">
+              <a:spAutoFit/>
+            </a:bodyPr>
+            <a:lstStyle/>
+            <a:p>
+              <a:r>
+                <a:rPr lang="en-US" dirty="0"/>
+                <a:t>B13</a:t>
+              </a:r>
+            </a:p>
+          </p:txBody>
+        </p:sp>
+        <p:sp>
+          <p:nvSpPr>
+            <p:cNvPr id="195" name="TextBox 194">
+              <a:extLst>
+                <a:ext uri="{FF2B5EF4-FFF2-40B4-BE49-F238E27FC236}">
+                  <a16:creationId xmlns:a16="http://schemas.microsoft.com/office/drawing/2014/main" id="{93F059BD-A04A-2083-7283-BCE8D956AB15}"/>
+                </a:ext>
+              </a:extLst>
+            </p:cNvPr>
+            <p:cNvSpPr txBox="1"/>
+            <p:nvPr/>
+          </p:nvSpPr>
+          <p:spPr>
+            <a:xfrm>
+              <a:off x="15963756" y="7286477"/>
+              <a:ext cx="570990" cy="369332"/>
+            </a:xfrm>
+            <a:prstGeom prst="rect">
+              <a:avLst/>
+            </a:prstGeom>
+            <a:noFill/>
+          </p:spPr>
+          <p:txBody>
+            <a:bodyPr wrap="none" rtlCol="0">
+              <a:spAutoFit/>
+            </a:bodyPr>
+            <a:lstStyle/>
+            <a:p>
+              <a:r>
+                <a:rPr lang="en-US" dirty="0"/>
+                <a:t>B14</a:t>
+              </a:r>
+            </a:p>
+          </p:txBody>
+        </p:sp>
+        <p:sp>
+          <p:nvSpPr>
+            <p:cNvPr id="196" name="TextBox 195">
+              <a:extLst>
+                <a:ext uri="{FF2B5EF4-FFF2-40B4-BE49-F238E27FC236}">
+                  <a16:creationId xmlns:a16="http://schemas.microsoft.com/office/drawing/2014/main" id="{9B22E4D0-8BB9-B1D8-CFE5-B96212F6DDF1}"/>
+                </a:ext>
+              </a:extLst>
+            </p:cNvPr>
+            <p:cNvSpPr txBox="1"/>
+            <p:nvPr/>
+          </p:nvSpPr>
+          <p:spPr>
+            <a:xfrm>
+              <a:off x="1705070" y="6441760"/>
+              <a:ext cx="2595582" cy="646331"/>
+            </a:xfrm>
+            <a:prstGeom prst="rect">
+              <a:avLst/>
+            </a:prstGeom>
+            <a:noFill/>
+          </p:spPr>
+          <p:txBody>
+            <a:bodyPr wrap="none" rtlCol="0">
+              <a:spAutoFit/>
+            </a:bodyPr>
+            <a:lstStyle/>
+            <a:p>
+              <a:r>
+                <a:rPr lang="en-US" sz="3600" dirty="0"/>
+                <a:t>a</a:t>
+              </a:r>
+              <a:r>
+                <a:rPr lang="en-US" sz="3600" baseline="-25000" dirty="0"/>
+                <a:t>3</a:t>
+              </a:r>
+              <a:r>
+                <a:rPr lang="en-US" sz="3600" dirty="0"/>
+                <a:t> = (11, 12)</a:t>
+              </a:r>
+            </a:p>
+          </p:txBody>
+        </p:sp>
+        <p:sp>
+          <p:nvSpPr>
+            <p:cNvPr id="197" name="TextBox 196">
+              <a:extLst>
+                <a:ext uri="{FF2B5EF4-FFF2-40B4-BE49-F238E27FC236}">
+                  <a16:creationId xmlns:a16="http://schemas.microsoft.com/office/drawing/2014/main" id="{F7BD277A-264D-CDBF-E863-B9B53F21981D}"/>
+                </a:ext>
+              </a:extLst>
+            </p:cNvPr>
+            <p:cNvSpPr txBox="1"/>
+            <p:nvPr/>
+          </p:nvSpPr>
+          <p:spPr>
+            <a:xfrm>
+              <a:off x="9255469" y="6457698"/>
+              <a:ext cx="2595582" cy="646331"/>
+            </a:xfrm>
+            <a:prstGeom prst="rect">
+              <a:avLst/>
+            </a:prstGeom>
+            <a:noFill/>
+          </p:spPr>
+          <p:txBody>
+            <a:bodyPr wrap="none" rtlCol="0">
+              <a:spAutoFit/>
+            </a:bodyPr>
+            <a:lstStyle/>
+            <a:p>
+              <a:r>
+                <a:rPr lang="en-US" sz="3600" dirty="0"/>
+                <a:t>a</a:t>
+              </a:r>
+              <a:r>
+                <a:rPr lang="en-US" sz="3600" baseline="-25000" dirty="0"/>
+                <a:t>4</a:t>
+              </a:r>
+              <a:r>
+                <a:rPr lang="en-US" sz="3600" dirty="0"/>
+                <a:t> = (11, 14)</a:t>
+              </a:r>
+            </a:p>
+          </p:txBody>
+        </p:sp>
+        <p:sp>
+          <p:nvSpPr>
+            <p:cNvPr id="199" name="Rectangle 198">
+              <a:extLst>
+                <a:ext uri="{FF2B5EF4-FFF2-40B4-BE49-F238E27FC236}">
+                  <a16:creationId xmlns:a16="http://schemas.microsoft.com/office/drawing/2014/main" id="{6418230A-3203-06AC-543D-B8E2DACF1085}"/>
+                </a:ext>
+              </a:extLst>
+            </p:cNvPr>
+            <p:cNvSpPr/>
+            <p:nvPr/>
+          </p:nvSpPr>
+          <p:spPr>
+            <a:xfrm>
+              <a:off x="6193228" y="-10479"/>
+              <a:ext cx="416646" cy="1879600"/>
+            </a:xfrm>
+            <a:prstGeom prst="rect">
+              <a:avLst/>
+            </a:prstGeom>
+            <a:noFill/>
+            <a:ln>
+              <a:noFill/>
+            </a:ln>
+          </p:spPr>
+          <p:style>
+            <a:lnRef idx="2">
+              <a:schemeClr val="accent1">
+                <a:shade val="15000"/>
+              </a:schemeClr>
+            </a:lnRef>
+            <a:fillRef idx="1">
+              <a:schemeClr val="accent1"/>
+            </a:fillRef>
+            <a:effectRef idx="0">
+              <a:schemeClr val="accent1"/>
+            </a:effectRef>
+            <a:fontRef idx="minor">
+              <a:schemeClr val="lt1"/>
+            </a:fontRef>
+          </p:style>
+          <p:txBody>
+            <a:bodyPr rtlCol="0" anchor="ctr"/>
+            <a:lstStyle/>
+            <a:p>
+              <a:pPr algn="ctr"/>
+              <a:endParaRPr lang="en-US"/>
+            </a:p>
+          </p:txBody>
+        </p:sp>
+        <p:sp>
+          <p:nvSpPr>
+            <p:cNvPr id="200" name="Rectangle 199">
+              <a:extLst>
+                <a:ext uri="{FF2B5EF4-FFF2-40B4-BE49-F238E27FC236}">
+                  <a16:creationId xmlns:a16="http://schemas.microsoft.com/office/drawing/2014/main" id="{0CE0DD0D-79E8-3E3A-D729-49D44D9F5377}"/>
+                </a:ext>
+              </a:extLst>
+            </p:cNvPr>
+            <p:cNvSpPr/>
+            <p:nvPr/>
+          </p:nvSpPr>
+          <p:spPr>
+            <a:xfrm>
+              <a:off x="6618159" y="-10479"/>
+              <a:ext cx="416646" cy="1879600"/>
+            </a:xfrm>
+            <a:prstGeom prst="rect">
+              <a:avLst/>
+            </a:prstGeom>
+            <a:noFill/>
+            <a:ln>
+              <a:noFill/>
+            </a:ln>
+          </p:spPr>
+          <p:style>
+            <a:lnRef idx="2">
+              <a:schemeClr val="accent1">
+                <a:shade val="15000"/>
+              </a:schemeClr>
+            </a:lnRef>
+            <a:fillRef idx="1">
+              <a:schemeClr val="accent1"/>
+            </a:fillRef>
+            <a:effectRef idx="0">
+              <a:schemeClr val="accent1"/>
+            </a:effectRef>
+            <a:fontRef idx="minor">
+              <a:schemeClr val="lt1"/>
+            </a:fontRef>
+          </p:style>
+          <p:txBody>
+            <a:bodyPr rtlCol="0" anchor="ctr"/>
+            <a:lstStyle/>
+            <a:p>
+              <a:pPr algn="ctr"/>
+              <a:endParaRPr lang="en-US"/>
+            </a:p>
+          </p:txBody>
+        </p:sp>
+        <p:cxnSp>
+          <p:nvCxnSpPr>
+            <p:cNvPr id="201" name="Curved Connector 200">
+              <a:extLst>
+                <a:ext uri="{FF2B5EF4-FFF2-40B4-BE49-F238E27FC236}">
+                  <a16:creationId xmlns:a16="http://schemas.microsoft.com/office/drawing/2014/main" id="{69CB5571-87F0-77BD-71DB-AB8B22AD76B8}"/>
+                </a:ext>
+              </a:extLst>
+            </p:cNvPr>
+            <p:cNvCxnSpPr>
+              <a:cxnSpLocks/>
+              <a:stCxn id="200" idx="2"/>
+              <a:endCxn id="34" idx="1"/>
+            </p:cNvCxnSpPr>
+            <p:nvPr/>
+          </p:nvCxnSpPr>
+          <p:spPr>
+            <a:xfrm rot="16200000" flipH="1">
+              <a:off x="4911220" y="3784382"/>
+              <a:ext cx="5944639" cy="2114115"/>
+            </a:xfrm>
+            <a:prstGeom prst="curvedConnector2">
+              <a:avLst/>
+            </a:prstGeom>
+            <a:ln w="28575">
+              <a:solidFill>
+                <a:schemeClr val="tx1"/>
+              </a:solidFill>
+              <a:prstDash val="sysDash"/>
+              <a:tailEnd type="triangle" w="lg" len="lg"/>
+            </a:ln>
+          </p:spPr>
+          <p:style>
+            <a:lnRef idx="2">
+              <a:schemeClr val="accent1"/>
+            </a:lnRef>
+            <a:fillRef idx="0">
+              <a:schemeClr val="accent1"/>
+            </a:fillRef>
+            <a:effectRef idx="1">
+              <a:schemeClr val="accent1"/>
+            </a:effectRef>
+            <a:fontRef idx="minor">
+              <a:schemeClr val="tx1"/>
+            </a:fontRef>
+          </p:style>
+        </p:cxnSp>
+        <p:cxnSp>
+          <p:nvCxnSpPr>
+            <p:cNvPr id="204" name="Curved Connector 203">
+              <a:extLst>
+                <a:ext uri="{FF2B5EF4-FFF2-40B4-BE49-F238E27FC236}">
+                  <a16:creationId xmlns:a16="http://schemas.microsoft.com/office/drawing/2014/main" id="{239E04E5-DD99-382F-95D8-00899A286C07}"/>
+                </a:ext>
+              </a:extLst>
+            </p:cNvPr>
+            <p:cNvCxnSpPr>
+              <a:cxnSpLocks/>
+              <a:stCxn id="199" idx="2"/>
+              <a:endCxn id="35" idx="3"/>
+            </p:cNvCxnSpPr>
+            <p:nvPr/>
+          </p:nvCxnSpPr>
+          <p:spPr>
+            <a:xfrm rot="5400000">
+              <a:off x="2340850" y="3770068"/>
+              <a:ext cx="5961648" cy="2159755"/>
+            </a:xfrm>
+            <a:prstGeom prst="curvedConnector2">
+              <a:avLst/>
+            </a:prstGeom>
+            <a:ln w="28575">
+              <a:solidFill>
+                <a:schemeClr val="tx1"/>
+              </a:solidFill>
+              <a:prstDash val="sysDash"/>
+              <a:tailEnd type="triangle" w="lg" len="lg"/>
+            </a:ln>
+          </p:spPr>
+          <p:style>
+            <a:lnRef idx="2">
+              <a:schemeClr val="accent1"/>
+            </a:lnRef>
+            <a:fillRef idx="0">
+              <a:schemeClr val="accent1"/>
+            </a:fillRef>
+            <a:effectRef idx="1">
+              <a:schemeClr val="accent1"/>
+            </a:effectRef>
+            <a:fontRef idx="minor">
+              <a:schemeClr val="tx1"/>
+            </a:fontRef>
+          </p:style>
+        </p:cxnSp>
       </p:grpSp>
     </p:spTree>
     <p:extLst>

--- a/images/icu.pptx
+++ b/images/icu.pptx
@@ -5,7 +5,7 @@
     <p:sldMasterId id="2147483648" r:id="rId1"/>
   </p:sldMasterIdLst>
   <p:notesMasterIdLst>
-    <p:notesMasterId r:id="rId8"/>
+    <p:notesMasterId r:id="rId9"/>
   </p:notesMasterIdLst>
   <p:sldIdLst>
     <p:sldId id="256" r:id="rId2"/>
@@ -14,6 +14,7 @@
     <p:sldId id="262" r:id="rId5"/>
     <p:sldId id="263" r:id="rId6"/>
     <p:sldId id="264" r:id="rId7"/>
+    <p:sldId id="265" r:id="rId8"/>
   </p:sldIdLst>
   <p:sldSz cx="12192000" cy="6858000"/>
   <p:notesSz cx="6858000" cy="9144000"/>
@@ -202,7 +203,7 @@
           <a:p>
             <a:fld id="{AD42B31F-4ABA-274F-9BB4-DA3A6583FDB8}" type="datetimeFigureOut">
               <a:rPr lang="en-US" smtClean="0"/>
-              <a:t>5/22/26</a:t>
+              <a:t>5/26/26</a:t>
             </a:fld>
             <a:endParaRPr lang="en-US"/>
           </a:p>
@@ -770,6 +771,114 @@
 </p:notes>
 </file>
 
+<file path=ppt/notesSlides/notesSlide4.xml><?xml version="1.0" encoding="utf-8"?>
+<p:notes xmlns:a="http://schemas.openxmlformats.org/drawingml/2006/main" xmlns:r="http://schemas.openxmlformats.org/officeDocument/2006/relationships" xmlns:p="http://schemas.openxmlformats.org/presentationml/2006/main">
+  <p:cSld>
+    <p:spTree>
+      <p:nvGrpSpPr>
+        <p:cNvPr id="1" name="">
+          <a:extLst>
+            <a:ext uri="{FF2B5EF4-FFF2-40B4-BE49-F238E27FC236}">
+              <a16:creationId xmlns:a16="http://schemas.microsoft.com/office/drawing/2014/main" id="{651AC26B-C74D-A35E-558B-667997C54F86}"/>
+            </a:ext>
+          </a:extLst>
+        </p:cNvPr>
+        <p:cNvGrpSpPr/>
+        <p:nvPr/>
+      </p:nvGrpSpPr>
+      <p:grpSpPr>
+        <a:xfrm>
+          <a:off x="0" y="0"/>
+          <a:ext cx="0" cy="0"/>
+          <a:chOff x="0" y="0"/>
+          <a:chExt cx="0" cy="0"/>
+        </a:xfrm>
+      </p:grpSpPr>
+      <p:sp>
+        <p:nvSpPr>
+          <p:cNvPr id="2" name="Slide Image Placeholder 1">
+            <a:extLst>
+              <a:ext uri="{FF2B5EF4-FFF2-40B4-BE49-F238E27FC236}">
+                <a16:creationId xmlns:a16="http://schemas.microsoft.com/office/drawing/2014/main" id="{6FC6493E-B057-C753-3ED7-4A227D4F5FA4}"/>
+              </a:ext>
+            </a:extLst>
+          </p:cNvPr>
+          <p:cNvSpPr>
+            <a:spLocks noGrp="1" noRot="1" noChangeAspect="1"/>
+          </p:cNvSpPr>
+          <p:nvPr>
+            <p:ph type="sldImg"/>
+          </p:nvPr>
+        </p:nvSpPr>
+        <p:spPr/>
+      </p:sp>
+      <p:sp>
+        <p:nvSpPr>
+          <p:cNvPr id="3" name="Notes Placeholder 2">
+            <a:extLst>
+              <a:ext uri="{FF2B5EF4-FFF2-40B4-BE49-F238E27FC236}">
+                <a16:creationId xmlns:a16="http://schemas.microsoft.com/office/drawing/2014/main" id="{6D2515E2-DF84-2EEF-4C1A-BEBF916C88F0}"/>
+              </a:ext>
+            </a:extLst>
+          </p:cNvPr>
+          <p:cNvSpPr>
+            <a:spLocks noGrp="1"/>
+          </p:cNvSpPr>
+          <p:nvPr>
+            <p:ph type="body" idx="1"/>
+          </p:nvPr>
+        </p:nvSpPr>
+        <p:spPr/>
+        <p:txBody>
+          <a:bodyPr/>
+          <a:lstStyle/>
+          <a:p>
+            <a:endParaRPr lang="en-US" dirty="0"/>
+          </a:p>
+        </p:txBody>
+      </p:sp>
+      <p:sp>
+        <p:nvSpPr>
+          <p:cNvPr id="4" name="Slide Number Placeholder 3">
+            <a:extLst>
+              <a:ext uri="{FF2B5EF4-FFF2-40B4-BE49-F238E27FC236}">
+                <a16:creationId xmlns:a16="http://schemas.microsoft.com/office/drawing/2014/main" id="{AA7C50B0-AA21-29D4-9D95-AF07C06ABE06}"/>
+              </a:ext>
+            </a:extLst>
+          </p:cNvPr>
+          <p:cNvSpPr>
+            <a:spLocks noGrp="1"/>
+          </p:cNvSpPr>
+          <p:nvPr>
+            <p:ph type="sldNum" sz="quarter" idx="5"/>
+          </p:nvPr>
+        </p:nvSpPr>
+        <p:spPr/>
+        <p:txBody>
+          <a:bodyPr/>
+          <a:lstStyle/>
+          <a:p>
+            <a:fld id="{C0ECF21E-4684-E148-81FF-D3B1FD823314}" type="slidenum">
+              <a:rPr lang="en-US" smtClean="0"/>
+              <a:t>7</a:t>
+            </a:fld>
+            <a:endParaRPr lang="en-US"/>
+          </a:p>
+        </p:txBody>
+      </p:sp>
+    </p:spTree>
+    <p:extLst>
+      <p:ext uri="{BB962C8B-B14F-4D97-AF65-F5344CB8AC3E}">
+        <p14:creationId xmlns:p14="http://schemas.microsoft.com/office/powerpoint/2010/main" val="1485425327"/>
+      </p:ext>
+    </p:extLst>
+  </p:cSld>
+  <p:clrMapOvr>
+    <a:masterClrMapping/>
+  </p:clrMapOvr>
+</p:notes>
+</file>
+
 <file path=ppt/slideLayouts/slideLayout1.xml><?xml version="1.0" encoding="utf-8"?>
 <p:sldLayout xmlns:a="http://schemas.openxmlformats.org/drawingml/2006/main" xmlns:r="http://schemas.openxmlformats.org/officeDocument/2006/relationships" xmlns:p="http://schemas.openxmlformats.org/presentationml/2006/main" type="title" preserve="1">
   <p:cSld name="Title Slide">
@@ -919,7 +1028,7 @@
           <a:p>
             <a:fld id="{0D21F05F-ACFB-0C4D-9827-53BE568178E4}" type="datetimeFigureOut">
               <a:rPr lang="en-US" smtClean="0"/>
-              <a:t>5/22/26</a:t>
+              <a:t>5/26/26</a:t>
             </a:fld>
             <a:endParaRPr lang="en-US"/>
           </a:p>
@@ -1119,7 +1228,7 @@
           <a:p>
             <a:fld id="{0D21F05F-ACFB-0C4D-9827-53BE568178E4}" type="datetimeFigureOut">
               <a:rPr lang="en-US" smtClean="0"/>
-              <a:t>5/22/26</a:t>
+              <a:t>5/26/26</a:t>
             </a:fld>
             <a:endParaRPr lang="en-US"/>
           </a:p>
@@ -1329,7 +1438,7 @@
           <a:p>
             <a:fld id="{0D21F05F-ACFB-0C4D-9827-53BE568178E4}" type="datetimeFigureOut">
               <a:rPr lang="en-US" smtClean="0"/>
-              <a:t>5/22/26</a:t>
+              <a:t>5/26/26</a:t>
             </a:fld>
             <a:endParaRPr lang="en-US"/>
           </a:p>
@@ -1529,7 +1638,7 @@
           <a:p>
             <a:fld id="{0D21F05F-ACFB-0C4D-9827-53BE568178E4}" type="datetimeFigureOut">
               <a:rPr lang="en-US" smtClean="0"/>
-              <a:t>5/22/26</a:t>
+              <a:t>5/26/26</a:t>
             </a:fld>
             <a:endParaRPr lang="en-US"/>
           </a:p>
@@ -1805,7 +1914,7 @@
           <a:p>
             <a:fld id="{0D21F05F-ACFB-0C4D-9827-53BE568178E4}" type="datetimeFigureOut">
               <a:rPr lang="en-US" smtClean="0"/>
-              <a:t>5/22/26</a:t>
+              <a:t>5/26/26</a:t>
             </a:fld>
             <a:endParaRPr lang="en-US"/>
           </a:p>
@@ -2073,7 +2182,7 @@
           <a:p>
             <a:fld id="{0D21F05F-ACFB-0C4D-9827-53BE568178E4}" type="datetimeFigureOut">
               <a:rPr lang="en-US" smtClean="0"/>
-              <a:t>5/22/26</a:t>
+              <a:t>5/26/26</a:t>
             </a:fld>
             <a:endParaRPr lang="en-US"/>
           </a:p>
@@ -2488,7 +2597,7 @@
           <a:p>
             <a:fld id="{0D21F05F-ACFB-0C4D-9827-53BE568178E4}" type="datetimeFigureOut">
               <a:rPr lang="en-US" smtClean="0"/>
-              <a:t>5/22/26</a:t>
+              <a:t>5/26/26</a:t>
             </a:fld>
             <a:endParaRPr lang="en-US"/>
           </a:p>
@@ -2630,7 +2739,7 @@
           <a:p>
             <a:fld id="{0D21F05F-ACFB-0C4D-9827-53BE568178E4}" type="datetimeFigureOut">
               <a:rPr lang="en-US" smtClean="0"/>
-              <a:t>5/22/26</a:t>
+              <a:t>5/26/26</a:t>
             </a:fld>
             <a:endParaRPr lang="en-US"/>
           </a:p>
@@ -2743,7 +2852,7 @@
           <a:p>
             <a:fld id="{0D21F05F-ACFB-0C4D-9827-53BE568178E4}" type="datetimeFigureOut">
               <a:rPr lang="en-US" smtClean="0"/>
-              <a:t>5/22/26</a:t>
+              <a:t>5/26/26</a:t>
             </a:fld>
             <a:endParaRPr lang="en-US"/>
           </a:p>
@@ -3056,7 +3165,7 @@
           <a:p>
             <a:fld id="{0D21F05F-ACFB-0C4D-9827-53BE568178E4}" type="datetimeFigureOut">
               <a:rPr lang="en-US" smtClean="0"/>
-              <a:t>5/22/26</a:t>
+              <a:t>5/26/26</a:t>
             </a:fld>
             <a:endParaRPr lang="en-US"/>
           </a:p>
@@ -3345,7 +3454,7 @@
           <a:p>
             <a:fld id="{0D21F05F-ACFB-0C4D-9827-53BE568178E4}" type="datetimeFigureOut">
               <a:rPr lang="en-US" smtClean="0"/>
-              <a:t>5/22/26</a:t>
+              <a:t>5/26/26</a:t>
             </a:fld>
             <a:endParaRPr lang="en-US"/>
           </a:p>
@@ -3588,7 +3697,7 @@
           <a:p>
             <a:fld id="{0D21F05F-ACFB-0C4D-9827-53BE568178E4}" type="datetimeFigureOut">
               <a:rPr lang="en-US" smtClean="0"/>
-              <a:t>5/22/26</a:t>
+              <a:t>5/26/26</a:t>
             </a:fld>
             <a:endParaRPr lang="en-US"/>
           </a:p>
@@ -15837,6 +15946,6838 @@
     <p:extLst>
       <p:ext uri="{BB962C8B-B14F-4D97-AF65-F5344CB8AC3E}">
         <p14:creationId xmlns:p14="http://schemas.microsoft.com/office/powerpoint/2010/main" val="2642535439"/>
+      </p:ext>
+    </p:extLst>
+  </p:cSld>
+  <p:clrMapOvr>
+    <a:masterClrMapping/>
+  </p:clrMapOvr>
+</p:sld>
+</file>
+
+<file path=ppt/slides/slide7.xml><?xml version="1.0" encoding="utf-8"?>
+<p:sld xmlns:a="http://schemas.openxmlformats.org/drawingml/2006/main" xmlns:r="http://schemas.openxmlformats.org/officeDocument/2006/relationships" xmlns:p="http://schemas.openxmlformats.org/presentationml/2006/main">
+  <p:cSld>
+    <p:spTree>
+      <p:nvGrpSpPr>
+        <p:cNvPr id="1" name="">
+          <a:extLst>
+            <a:ext uri="{FF2B5EF4-FFF2-40B4-BE49-F238E27FC236}">
+              <a16:creationId xmlns:a16="http://schemas.microsoft.com/office/drawing/2014/main" id="{8D1BF1E9-55BF-5AB6-2CB1-A3D6BD8690B9}"/>
+            </a:ext>
+          </a:extLst>
+        </p:cNvPr>
+        <p:cNvGrpSpPr/>
+        <p:nvPr/>
+      </p:nvGrpSpPr>
+      <p:grpSpPr>
+        <a:xfrm>
+          <a:off x="0" y="0"/>
+          <a:ext cx="0" cy="0"/>
+          <a:chOff x="0" y="0"/>
+          <a:chExt cx="0" cy="0"/>
+        </a:xfrm>
+      </p:grpSpPr>
+      <p:grpSp>
+        <p:nvGrpSpPr>
+          <p:cNvPr id="223" name="Group 222">
+            <a:extLst>
+              <a:ext uri="{FF2B5EF4-FFF2-40B4-BE49-F238E27FC236}">
+                <a16:creationId xmlns:a16="http://schemas.microsoft.com/office/drawing/2014/main" id="{BD62D18A-4A03-FB4E-8CD9-7447188EC421}"/>
+              </a:ext>
+            </a:extLst>
+          </p:cNvPr>
+          <p:cNvGrpSpPr/>
+          <p:nvPr/>
+        </p:nvGrpSpPr>
+        <p:grpSpPr>
+          <a:xfrm>
+            <a:off x="-1330710" y="234175"/>
+            <a:ext cx="15327103" cy="11036336"/>
+            <a:chOff x="-1330710" y="234175"/>
+            <a:chExt cx="15327103" cy="11036336"/>
+          </a:xfrm>
+        </p:grpSpPr>
+        <p:sp>
+          <p:nvSpPr>
+            <p:cNvPr id="222" name="Rectangle 221">
+              <a:extLst>
+                <a:ext uri="{FF2B5EF4-FFF2-40B4-BE49-F238E27FC236}">
+                  <a16:creationId xmlns:a16="http://schemas.microsoft.com/office/drawing/2014/main" id="{93C4B155-2A7F-5B2E-F03A-85A8C684933E}"/>
+                </a:ext>
+              </a:extLst>
+            </p:cNvPr>
+            <p:cNvSpPr/>
+            <p:nvPr/>
+          </p:nvSpPr>
+          <p:spPr>
+            <a:xfrm>
+              <a:off x="7700096" y="8919197"/>
+              <a:ext cx="6296297" cy="2351314"/>
+            </a:xfrm>
+            <a:prstGeom prst="rect">
+              <a:avLst/>
+            </a:prstGeom>
+            <a:noFill/>
+            <a:ln w="19050">
+              <a:prstDash val="sysDash"/>
+            </a:ln>
+          </p:spPr>
+          <p:style>
+            <a:lnRef idx="2">
+              <a:schemeClr val="accent1">
+                <a:shade val="15000"/>
+              </a:schemeClr>
+            </a:lnRef>
+            <a:fillRef idx="1">
+              <a:schemeClr val="accent1"/>
+            </a:fillRef>
+            <a:effectRef idx="0">
+              <a:schemeClr val="accent1"/>
+            </a:effectRef>
+            <a:fontRef idx="minor">
+              <a:schemeClr val="lt1"/>
+            </a:fontRef>
+          </p:style>
+          <p:txBody>
+            <a:bodyPr rtlCol="0" anchor="ctr"/>
+            <a:lstStyle/>
+            <a:p>
+              <a:pPr algn="ctr"/>
+              <a:endParaRPr lang="en-US"/>
+            </a:p>
+          </p:txBody>
+        </p:sp>
+        <p:grpSp>
+          <p:nvGrpSpPr>
+            <p:cNvPr id="39" name="Group 38">
+              <a:extLst>
+                <a:ext uri="{FF2B5EF4-FFF2-40B4-BE49-F238E27FC236}">
+                  <a16:creationId xmlns:a16="http://schemas.microsoft.com/office/drawing/2014/main" id="{7AA13DA8-C4AB-604F-C65F-F46121289403}"/>
+                </a:ext>
+              </a:extLst>
+            </p:cNvPr>
+            <p:cNvGrpSpPr/>
+            <p:nvPr/>
+          </p:nvGrpSpPr>
+          <p:grpSpPr>
+            <a:xfrm>
+              <a:off x="5270810" y="234175"/>
+              <a:ext cx="1650380" cy="836342"/>
+              <a:chOff x="2364059" y="1226634"/>
+              <a:chExt cx="1650380" cy="836342"/>
+            </a:xfrm>
+          </p:grpSpPr>
+          <p:sp>
+            <p:nvSpPr>
+              <p:cNvPr id="30" name="Rounded Rectangle 29">
+                <a:extLst>
+                  <a:ext uri="{FF2B5EF4-FFF2-40B4-BE49-F238E27FC236}">
+                    <a16:creationId xmlns:a16="http://schemas.microsoft.com/office/drawing/2014/main" id="{61784172-A35B-36E7-DC08-AF6641E5E2CB}"/>
+                  </a:ext>
+                </a:extLst>
+              </p:cNvPr>
+              <p:cNvSpPr/>
+              <p:nvPr/>
+            </p:nvSpPr>
+            <p:spPr>
+              <a:xfrm>
+                <a:off x="2364059" y="1226634"/>
+                <a:ext cx="1650380" cy="836342"/>
+              </a:xfrm>
+              <a:prstGeom prst="roundRect">
+                <a:avLst/>
+              </a:prstGeom>
+              <a:solidFill>
+                <a:schemeClr val="bg2"/>
+              </a:solidFill>
+              <a:ln w="22225"/>
+            </p:spPr>
+            <p:style>
+              <a:lnRef idx="2">
+                <a:schemeClr val="accent1">
+                  <a:shade val="15000"/>
+                </a:schemeClr>
+              </a:lnRef>
+              <a:fillRef idx="1">
+                <a:schemeClr val="accent1"/>
+              </a:fillRef>
+              <a:effectRef idx="0">
+                <a:schemeClr val="accent1"/>
+              </a:effectRef>
+              <a:fontRef idx="minor">
+                <a:schemeClr val="lt1"/>
+              </a:fontRef>
+            </p:style>
+            <p:txBody>
+              <a:bodyPr rtlCol="0" anchor="ctr"/>
+              <a:lstStyle/>
+              <a:p>
+                <a:pPr algn="ctr"/>
+                <a:endParaRPr lang="en-US"/>
+              </a:p>
+            </p:txBody>
+          </p:sp>
+          <p:sp>
+            <p:nvSpPr>
+              <p:cNvPr id="31" name="Oval 30">
+                <a:extLst>
+                  <a:ext uri="{FF2B5EF4-FFF2-40B4-BE49-F238E27FC236}">
+                    <a16:creationId xmlns:a16="http://schemas.microsoft.com/office/drawing/2014/main" id="{A788A1D4-2E74-F4F3-1562-2B1529CB9756}"/>
+                  </a:ext>
+                </a:extLst>
+              </p:cNvPr>
+              <p:cNvSpPr/>
+              <p:nvPr/>
+            </p:nvSpPr>
+            <p:spPr>
+              <a:xfrm>
+                <a:off x="2486722" y="1321419"/>
+                <a:ext cx="267629" cy="267629"/>
+              </a:xfrm>
+              <a:prstGeom prst="ellipse">
+                <a:avLst/>
+              </a:prstGeom>
+              <a:solidFill>
+                <a:schemeClr val="bg2"/>
+              </a:solidFill>
+              <a:ln w="22225"/>
+            </p:spPr>
+            <p:style>
+              <a:lnRef idx="2">
+                <a:schemeClr val="accent1">
+                  <a:shade val="15000"/>
+                </a:schemeClr>
+              </a:lnRef>
+              <a:fillRef idx="1">
+                <a:schemeClr val="accent1"/>
+              </a:fillRef>
+              <a:effectRef idx="0">
+                <a:schemeClr val="accent1"/>
+              </a:effectRef>
+              <a:fontRef idx="minor">
+                <a:schemeClr val="lt1"/>
+              </a:fontRef>
+            </p:style>
+            <p:txBody>
+              <a:bodyPr rtlCol="0" anchor="ctr"/>
+              <a:lstStyle/>
+              <a:p>
+                <a:pPr algn="ctr"/>
+                <a:endParaRPr lang="en-US"/>
+              </a:p>
+            </p:txBody>
+          </p:sp>
+          <p:sp>
+            <p:nvSpPr>
+              <p:cNvPr id="32" name="Oval 31">
+                <a:extLst>
+                  <a:ext uri="{FF2B5EF4-FFF2-40B4-BE49-F238E27FC236}">
+                    <a16:creationId xmlns:a16="http://schemas.microsoft.com/office/drawing/2014/main" id="{E72AA6E9-2AB3-9786-C6CD-CF38D49BE2B3}"/>
+                  </a:ext>
+                </a:extLst>
+              </p:cNvPr>
+              <p:cNvSpPr/>
+              <p:nvPr/>
+            </p:nvSpPr>
+            <p:spPr>
+              <a:xfrm>
+                <a:off x="2486721" y="1678257"/>
+                <a:ext cx="267629" cy="267629"/>
+              </a:xfrm>
+              <a:prstGeom prst="ellipse">
+                <a:avLst/>
+              </a:prstGeom>
+              <a:solidFill>
+                <a:schemeClr val="bg2"/>
+              </a:solidFill>
+              <a:ln w="22225"/>
+            </p:spPr>
+            <p:style>
+              <a:lnRef idx="2">
+                <a:schemeClr val="accent1">
+                  <a:shade val="15000"/>
+                </a:schemeClr>
+              </a:lnRef>
+              <a:fillRef idx="1">
+                <a:schemeClr val="accent1"/>
+              </a:fillRef>
+              <a:effectRef idx="0">
+                <a:schemeClr val="accent1"/>
+              </a:effectRef>
+              <a:fontRef idx="minor">
+                <a:schemeClr val="lt1"/>
+              </a:fontRef>
+            </p:style>
+            <p:txBody>
+              <a:bodyPr rtlCol="0" anchor="ctr"/>
+              <a:lstStyle/>
+              <a:p>
+                <a:pPr algn="ctr"/>
+                <a:endParaRPr lang="en-US"/>
+              </a:p>
+            </p:txBody>
+          </p:sp>
+          <p:sp>
+            <p:nvSpPr>
+              <p:cNvPr id="33" name="Oval 32">
+                <a:extLst>
+                  <a:ext uri="{FF2B5EF4-FFF2-40B4-BE49-F238E27FC236}">
+                    <a16:creationId xmlns:a16="http://schemas.microsoft.com/office/drawing/2014/main" id="{5842504D-F41D-2476-EBD7-7728E21918DE}"/>
+                  </a:ext>
+                </a:extLst>
+              </p:cNvPr>
+              <p:cNvSpPr/>
+              <p:nvPr/>
+            </p:nvSpPr>
+            <p:spPr>
+              <a:xfrm>
+                <a:off x="2877013" y="1321419"/>
+                <a:ext cx="267629" cy="267629"/>
+              </a:xfrm>
+              <a:prstGeom prst="ellipse">
+                <a:avLst/>
+              </a:prstGeom>
+              <a:solidFill>
+                <a:schemeClr val="bg2"/>
+              </a:solidFill>
+              <a:ln w="22225"/>
+            </p:spPr>
+            <p:style>
+              <a:lnRef idx="2">
+                <a:schemeClr val="accent1">
+                  <a:shade val="15000"/>
+                </a:schemeClr>
+              </a:lnRef>
+              <a:fillRef idx="1">
+                <a:schemeClr val="accent1"/>
+              </a:fillRef>
+              <a:effectRef idx="0">
+                <a:schemeClr val="accent1"/>
+              </a:effectRef>
+              <a:fontRef idx="minor">
+                <a:schemeClr val="lt1"/>
+              </a:fontRef>
+            </p:style>
+            <p:txBody>
+              <a:bodyPr rtlCol="0" anchor="ctr"/>
+              <a:lstStyle/>
+              <a:p>
+                <a:pPr algn="ctr"/>
+                <a:endParaRPr lang="en-US"/>
+              </a:p>
+            </p:txBody>
+          </p:sp>
+          <p:sp>
+            <p:nvSpPr>
+              <p:cNvPr id="34" name="Oval 33">
+                <a:extLst>
+                  <a:ext uri="{FF2B5EF4-FFF2-40B4-BE49-F238E27FC236}">
+                    <a16:creationId xmlns:a16="http://schemas.microsoft.com/office/drawing/2014/main" id="{AB246926-98AF-6B21-EFB8-425EC38FC35E}"/>
+                  </a:ext>
+                </a:extLst>
+              </p:cNvPr>
+              <p:cNvSpPr/>
+              <p:nvPr/>
+            </p:nvSpPr>
+            <p:spPr>
+              <a:xfrm>
+                <a:off x="2877012" y="1678257"/>
+                <a:ext cx="267629" cy="267629"/>
+              </a:xfrm>
+              <a:prstGeom prst="ellipse">
+                <a:avLst/>
+              </a:prstGeom>
+              <a:solidFill>
+                <a:schemeClr val="bg2"/>
+              </a:solidFill>
+              <a:ln w="22225"/>
+            </p:spPr>
+            <p:style>
+              <a:lnRef idx="2">
+                <a:schemeClr val="accent1">
+                  <a:shade val="15000"/>
+                </a:schemeClr>
+              </a:lnRef>
+              <a:fillRef idx="1">
+                <a:schemeClr val="accent1"/>
+              </a:fillRef>
+              <a:effectRef idx="0">
+                <a:schemeClr val="accent1"/>
+              </a:effectRef>
+              <a:fontRef idx="minor">
+                <a:schemeClr val="lt1"/>
+              </a:fontRef>
+            </p:style>
+            <p:txBody>
+              <a:bodyPr rtlCol="0" anchor="ctr"/>
+              <a:lstStyle/>
+              <a:p>
+                <a:pPr algn="ctr"/>
+                <a:endParaRPr lang="en-US"/>
+              </a:p>
+            </p:txBody>
+          </p:sp>
+          <p:sp>
+            <p:nvSpPr>
+              <p:cNvPr id="35" name="Oval 34">
+                <a:extLst>
+                  <a:ext uri="{FF2B5EF4-FFF2-40B4-BE49-F238E27FC236}">
+                    <a16:creationId xmlns:a16="http://schemas.microsoft.com/office/drawing/2014/main" id="{2D24827A-C039-4B0C-7474-564F6179193F}"/>
+                  </a:ext>
+                </a:extLst>
+              </p:cNvPr>
+              <p:cNvSpPr/>
+              <p:nvPr/>
+            </p:nvSpPr>
+            <p:spPr>
+              <a:xfrm>
+                <a:off x="3244999" y="1321419"/>
+                <a:ext cx="267629" cy="267629"/>
+              </a:xfrm>
+              <a:prstGeom prst="ellipse">
+                <a:avLst/>
+              </a:prstGeom>
+              <a:solidFill>
+                <a:schemeClr val="bg2"/>
+              </a:solidFill>
+              <a:ln w="22225"/>
+            </p:spPr>
+            <p:style>
+              <a:lnRef idx="2">
+                <a:schemeClr val="accent1">
+                  <a:shade val="15000"/>
+                </a:schemeClr>
+              </a:lnRef>
+              <a:fillRef idx="1">
+                <a:schemeClr val="accent1"/>
+              </a:fillRef>
+              <a:effectRef idx="0">
+                <a:schemeClr val="accent1"/>
+              </a:effectRef>
+              <a:fontRef idx="minor">
+                <a:schemeClr val="lt1"/>
+              </a:fontRef>
+            </p:style>
+            <p:txBody>
+              <a:bodyPr rtlCol="0" anchor="ctr"/>
+              <a:lstStyle/>
+              <a:p>
+                <a:pPr algn="ctr"/>
+                <a:endParaRPr lang="en-US"/>
+              </a:p>
+            </p:txBody>
+          </p:sp>
+          <p:sp>
+            <p:nvSpPr>
+              <p:cNvPr id="36" name="Oval 35">
+                <a:extLst>
+                  <a:ext uri="{FF2B5EF4-FFF2-40B4-BE49-F238E27FC236}">
+                    <a16:creationId xmlns:a16="http://schemas.microsoft.com/office/drawing/2014/main" id="{DA416E27-3ED0-E344-E7EF-900D4F4F8126}"/>
+                  </a:ext>
+                </a:extLst>
+              </p:cNvPr>
+              <p:cNvSpPr/>
+              <p:nvPr/>
+            </p:nvSpPr>
+            <p:spPr>
+              <a:xfrm>
+                <a:off x="3244998" y="1678257"/>
+                <a:ext cx="267629" cy="267629"/>
+              </a:xfrm>
+              <a:prstGeom prst="ellipse">
+                <a:avLst/>
+              </a:prstGeom>
+              <a:solidFill>
+                <a:schemeClr val="bg2"/>
+              </a:solidFill>
+              <a:ln w="22225"/>
+            </p:spPr>
+            <p:style>
+              <a:lnRef idx="2">
+                <a:schemeClr val="accent1">
+                  <a:shade val="15000"/>
+                </a:schemeClr>
+              </a:lnRef>
+              <a:fillRef idx="1">
+                <a:schemeClr val="accent1"/>
+              </a:fillRef>
+              <a:effectRef idx="0">
+                <a:schemeClr val="accent1"/>
+              </a:effectRef>
+              <a:fontRef idx="minor">
+                <a:schemeClr val="lt1"/>
+              </a:fontRef>
+            </p:style>
+            <p:txBody>
+              <a:bodyPr rtlCol="0" anchor="ctr"/>
+              <a:lstStyle/>
+              <a:p>
+                <a:pPr algn="ctr"/>
+                <a:endParaRPr lang="en-US"/>
+              </a:p>
+            </p:txBody>
+          </p:sp>
+          <p:sp>
+            <p:nvSpPr>
+              <p:cNvPr id="37" name="Oval 36">
+                <a:extLst>
+                  <a:ext uri="{FF2B5EF4-FFF2-40B4-BE49-F238E27FC236}">
+                    <a16:creationId xmlns:a16="http://schemas.microsoft.com/office/drawing/2014/main" id="{EF41D6EF-9175-12F4-EC43-D49DAFF5A583}"/>
+                  </a:ext>
+                </a:extLst>
+              </p:cNvPr>
+              <p:cNvSpPr/>
+              <p:nvPr/>
+            </p:nvSpPr>
+            <p:spPr>
+              <a:xfrm>
+                <a:off x="3612984" y="1516562"/>
+                <a:ext cx="267629" cy="267629"/>
+              </a:xfrm>
+              <a:prstGeom prst="ellipse">
+                <a:avLst/>
+              </a:prstGeom>
+              <a:solidFill>
+                <a:schemeClr val="bg2"/>
+              </a:solidFill>
+              <a:ln w="22225"/>
+            </p:spPr>
+            <p:style>
+              <a:lnRef idx="2">
+                <a:schemeClr val="accent1">
+                  <a:shade val="15000"/>
+                </a:schemeClr>
+              </a:lnRef>
+              <a:fillRef idx="1">
+                <a:schemeClr val="accent1"/>
+              </a:fillRef>
+              <a:effectRef idx="0">
+                <a:schemeClr val="accent1"/>
+              </a:effectRef>
+              <a:fontRef idx="minor">
+                <a:schemeClr val="lt1"/>
+              </a:fontRef>
+            </p:style>
+            <p:txBody>
+              <a:bodyPr rtlCol="0" anchor="ctr"/>
+              <a:lstStyle/>
+              <a:p>
+                <a:pPr algn="ctr"/>
+                <a:endParaRPr lang="en-US"/>
+              </a:p>
+            </p:txBody>
+          </p:sp>
+        </p:grpSp>
+        <p:grpSp>
+          <p:nvGrpSpPr>
+            <p:cNvPr id="40" name="Group 39">
+              <a:extLst>
+                <a:ext uri="{FF2B5EF4-FFF2-40B4-BE49-F238E27FC236}">
+                  <a16:creationId xmlns:a16="http://schemas.microsoft.com/office/drawing/2014/main" id="{17521E7D-1A9C-8D25-0CAC-E1B4619255EB}"/>
+                </a:ext>
+              </a:extLst>
+            </p:cNvPr>
+            <p:cNvGrpSpPr/>
+            <p:nvPr/>
+          </p:nvGrpSpPr>
+          <p:grpSpPr>
+            <a:xfrm>
+              <a:off x="319670" y="3849026"/>
+              <a:ext cx="1650380" cy="836342"/>
+              <a:chOff x="2364059" y="1226634"/>
+              <a:chExt cx="1650380" cy="836342"/>
+            </a:xfrm>
+          </p:grpSpPr>
+          <p:sp>
+            <p:nvSpPr>
+              <p:cNvPr id="41" name="Rounded Rectangle 40">
+                <a:extLst>
+                  <a:ext uri="{FF2B5EF4-FFF2-40B4-BE49-F238E27FC236}">
+                    <a16:creationId xmlns:a16="http://schemas.microsoft.com/office/drawing/2014/main" id="{A601F111-6147-5CEF-50E8-8D0EB9F23EF6}"/>
+                  </a:ext>
+                </a:extLst>
+              </p:cNvPr>
+              <p:cNvSpPr/>
+              <p:nvPr/>
+            </p:nvSpPr>
+            <p:spPr>
+              <a:xfrm>
+                <a:off x="2364059" y="1226634"/>
+                <a:ext cx="1650380" cy="836342"/>
+              </a:xfrm>
+              <a:prstGeom prst="roundRect">
+                <a:avLst/>
+              </a:prstGeom>
+              <a:solidFill>
+                <a:schemeClr val="bg2"/>
+              </a:solidFill>
+              <a:ln w="22225"/>
+            </p:spPr>
+            <p:style>
+              <a:lnRef idx="2">
+                <a:schemeClr val="accent1">
+                  <a:shade val="15000"/>
+                </a:schemeClr>
+              </a:lnRef>
+              <a:fillRef idx="1">
+                <a:schemeClr val="accent1"/>
+              </a:fillRef>
+              <a:effectRef idx="0">
+                <a:schemeClr val="accent1"/>
+              </a:effectRef>
+              <a:fontRef idx="minor">
+                <a:schemeClr val="lt1"/>
+              </a:fontRef>
+            </p:style>
+            <p:txBody>
+              <a:bodyPr rtlCol="0" anchor="ctr"/>
+              <a:lstStyle/>
+              <a:p>
+                <a:pPr algn="ctr"/>
+                <a:endParaRPr lang="en-US"/>
+              </a:p>
+            </p:txBody>
+          </p:sp>
+          <p:sp>
+            <p:nvSpPr>
+              <p:cNvPr id="42" name="Oval 41">
+                <a:extLst>
+                  <a:ext uri="{FF2B5EF4-FFF2-40B4-BE49-F238E27FC236}">
+                    <a16:creationId xmlns:a16="http://schemas.microsoft.com/office/drawing/2014/main" id="{1ED90464-CB62-4686-2799-0B82813C4FA1}"/>
+                  </a:ext>
+                </a:extLst>
+              </p:cNvPr>
+              <p:cNvSpPr/>
+              <p:nvPr/>
+            </p:nvSpPr>
+            <p:spPr>
+              <a:xfrm>
+                <a:off x="2486722" y="1321419"/>
+                <a:ext cx="267629" cy="267629"/>
+              </a:xfrm>
+              <a:prstGeom prst="ellipse">
+                <a:avLst/>
+              </a:prstGeom>
+              <a:solidFill>
+                <a:srgbClr val="FF0000"/>
+              </a:solidFill>
+              <a:ln w="22225"/>
+            </p:spPr>
+            <p:style>
+              <a:lnRef idx="2">
+                <a:schemeClr val="accent1">
+                  <a:shade val="15000"/>
+                </a:schemeClr>
+              </a:lnRef>
+              <a:fillRef idx="1">
+                <a:schemeClr val="accent1"/>
+              </a:fillRef>
+              <a:effectRef idx="0">
+                <a:schemeClr val="accent1"/>
+              </a:effectRef>
+              <a:fontRef idx="minor">
+                <a:schemeClr val="lt1"/>
+              </a:fontRef>
+            </p:style>
+            <p:txBody>
+              <a:bodyPr rtlCol="0" anchor="ctr"/>
+              <a:lstStyle/>
+              <a:p>
+                <a:pPr algn="ctr"/>
+                <a:endParaRPr lang="en-US"/>
+              </a:p>
+            </p:txBody>
+          </p:sp>
+          <p:sp>
+            <p:nvSpPr>
+              <p:cNvPr id="43" name="Oval 42">
+                <a:extLst>
+                  <a:ext uri="{FF2B5EF4-FFF2-40B4-BE49-F238E27FC236}">
+                    <a16:creationId xmlns:a16="http://schemas.microsoft.com/office/drawing/2014/main" id="{AD76E06B-C423-7DA7-2A01-ECD06EF8186F}"/>
+                  </a:ext>
+                </a:extLst>
+              </p:cNvPr>
+              <p:cNvSpPr/>
+              <p:nvPr/>
+            </p:nvSpPr>
+            <p:spPr>
+              <a:xfrm>
+                <a:off x="2486721" y="1678257"/>
+                <a:ext cx="267629" cy="267629"/>
+              </a:xfrm>
+              <a:prstGeom prst="ellipse">
+                <a:avLst/>
+              </a:prstGeom>
+              <a:solidFill>
+                <a:srgbClr val="FF0000"/>
+              </a:solidFill>
+              <a:ln w="22225"/>
+            </p:spPr>
+            <p:style>
+              <a:lnRef idx="2">
+                <a:schemeClr val="accent1">
+                  <a:shade val="15000"/>
+                </a:schemeClr>
+              </a:lnRef>
+              <a:fillRef idx="1">
+                <a:schemeClr val="accent1"/>
+              </a:fillRef>
+              <a:effectRef idx="0">
+                <a:schemeClr val="accent1"/>
+              </a:effectRef>
+              <a:fontRef idx="minor">
+                <a:schemeClr val="lt1"/>
+              </a:fontRef>
+            </p:style>
+            <p:txBody>
+              <a:bodyPr rtlCol="0" anchor="ctr"/>
+              <a:lstStyle/>
+              <a:p>
+                <a:pPr algn="ctr"/>
+                <a:endParaRPr lang="en-US"/>
+              </a:p>
+            </p:txBody>
+          </p:sp>
+          <p:sp>
+            <p:nvSpPr>
+              <p:cNvPr id="44" name="Oval 43">
+                <a:extLst>
+                  <a:ext uri="{FF2B5EF4-FFF2-40B4-BE49-F238E27FC236}">
+                    <a16:creationId xmlns:a16="http://schemas.microsoft.com/office/drawing/2014/main" id="{EAD46599-7AD3-D479-F043-C74E66EF60E0}"/>
+                  </a:ext>
+                </a:extLst>
+              </p:cNvPr>
+              <p:cNvSpPr/>
+              <p:nvPr/>
+            </p:nvSpPr>
+            <p:spPr>
+              <a:xfrm>
+                <a:off x="2877013" y="1321419"/>
+                <a:ext cx="267629" cy="267629"/>
+              </a:xfrm>
+              <a:prstGeom prst="ellipse">
+                <a:avLst/>
+              </a:prstGeom>
+              <a:solidFill>
+                <a:srgbClr val="FF0000"/>
+              </a:solidFill>
+              <a:ln w="22225"/>
+            </p:spPr>
+            <p:style>
+              <a:lnRef idx="2">
+                <a:schemeClr val="accent1">
+                  <a:shade val="15000"/>
+                </a:schemeClr>
+              </a:lnRef>
+              <a:fillRef idx="1">
+                <a:schemeClr val="accent1"/>
+              </a:fillRef>
+              <a:effectRef idx="0">
+                <a:schemeClr val="accent1"/>
+              </a:effectRef>
+              <a:fontRef idx="minor">
+                <a:schemeClr val="lt1"/>
+              </a:fontRef>
+            </p:style>
+            <p:txBody>
+              <a:bodyPr rtlCol="0" anchor="ctr"/>
+              <a:lstStyle/>
+              <a:p>
+                <a:pPr algn="ctr"/>
+                <a:endParaRPr lang="en-US"/>
+              </a:p>
+            </p:txBody>
+          </p:sp>
+          <p:sp>
+            <p:nvSpPr>
+              <p:cNvPr id="45" name="Oval 44">
+                <a:extLst>
+                  <a:ext uri="{FF2B5EF4-FFF2-40B4-BE49-F238E27FC236}">
+                    <a16:creationId xmlns:a16="http://schemas.microsoft.com/office/drawing/2014/main" id="{4AEE65BE-2EB6-5F37-FA9A-B98F8E4B6C7B}"/>
+                  </a:ext>
+                </a:extLst>
+              </p:cNvPr>
+              <p:cNvSpPr/>
+              <p:nvPr/>
+            </p:nvSpPr>
+            <p:spPr>
+              <a:xfrm>
+                <a:off x="2877012" y="1678257"/>
+                <a:ext cx="267629" cy="267629"/>
+              </a:xfrm>
+              <a:prstGeom prst="ellipse">
+                <a:avLst/>
+              </a:prstGeom>
+              <a:solidFill>
+                <a:schemeClr val="bg2"/>
+              </a:solidFill>
+              <a:ln w="22225"/>
+            </p:spPr>
+            <p:style>
+              <a:lnRef idx="2">
+                <a:schemeClr val="accent1">
+                  <a:shade val="15000"/>
+                </a:schemeClr>
+              </a:lnRef>
+              <a:fillRef idx="1">
+                <a:schemeClr val="accent1"/>
+              </a:fillRef>
+              <a:effectRef idx="0">
+                <a:schemeClr val="accent1"/>
+              </a:effectRef>
+              <a:fontRef idx="minor">
+                <a:schemeClr val="lt1"/>
+              </a:fontRef>
+            </p:style>
+            <p:txBody>
+              <a:bodyPr rtlCol="0" anchor="ctr"/>
+              <a:lstStyle/>
+              <a:p>
+                <a:pPr algn="ctr"/>
+                <a:endParaRPr lang="en-US"/>
+              </a:p>
+            </p:txBody>
+          </p:sp>
+          <p:sp>
+            <p:nvSpPr>
+              <p:cNvPr id="46" name="Oval 45">
+                <a:extLst>
+                  <a:ext uri="{FF2B5EF4-FFF2-40B4-BE49-F238E27FC236}">
+                    <a16:creationId xmlns:a16="http://schemas.microsoft.com/office/drawing/2014/main" id="{D1736F86-A604-8EC9-AE39-D9617658B4A3}"/>
+                  </a:ext>
+                </a:extLst>
+              </p:cNvPr>
+              <p:cNvSpPr/>
+              <p:nvPr/>
+            </p:nvSpPr>
+            <p:spPr>
+              <a:xfrm>
+                <a:off x="3244999" y="1321419"/>
+                <a:ext cx="267629" cy="267629"/>
+              </a:xfrm>
+              <a:prstGeom prst="ellipse">
+                <a:avLst/>
+              </a:prstGeom>
+              <a:solidFill>
+                <a:schemeClr val="bg2"/>
+              </a:solidFill>
+              <a:ln w="22225"/>
+            </p:spPr>
+            <p:style>
+              <a:lnRef idx="2">
+                <a:schemeClr val="accent1">
+                  <a:shade val="15000"/>
+                </a:schemeClr>
+              </a:lnRef>
+              <a:fillRef idx="1">
+                <a:schemeClr val="accent1"/>
+              </a:fillRef>
+              <a:effectRef idx="0">
+                <a:schemeClr val="accent1"/>
+              </a:effectRef>
+              <a:fontRef idx="minor">
+                <a:schemeClr val="lt1"/>
+              </a:fontRef>
+            </p:style>
+            <p:txBody>
+              <a:bodyPr rtlCol="0" anchor="ctr"/>
+              <a:lstStyle/>
+              <a:p>
+                <a:pPr algn="ctr"/>
+                <a:endParaRPr lang="en-US"/>
+              </a:p>
+            </p:txBody>
+          </p:sp>
+          <p:sp>
+            <p:nvSpPr>
+              <p:cNvPr id="47" name="Oval 46">
+                <a:extLst>
+                  <a:ext uri="{FF2B5EF4-FFF2-40B4-BE49-F238E27FC236}">
+                    <a16:creationId xmlns:a16="http://schemas.microsoft.com/office/drawing/2014/main" id="{7969E388-264E-59C6-2A61-CB7209516ABC}"/>
+                  </a:ext>
+                </a:extLst>
+              </p:cNvPr>
+              <p:cNvSpPr/>
+              <p:nvPr/>
+            </p:nvSpPr>
+            <p:spPr>
+              <a:xfrm>
+                <a:off x="3244998" y="1678257"/>
+                <a:ext cx="267629" cy="267629"/>
+              </a:xfrm>
+              <a:prstGeom prst="ellipse">
+                <a:avLst/>
+              </a:prstGeom>
+              <a:solidFill>
+                <a:schemeClr val="bg2"/>
+              </a:solidFill>
+              <a:ln w="22225"/>
+            </p:spPr>
+            <p:style>
+              <a:lnRef idx="2">
+                <a:schemeClr val="accent1">
+                  <a:shade val="15000"/>
+                </a:schemeClr>
+              </a:lnRef>
+              <a:fillRef idx="1">
+                <a:schemeClr val="accent1"/>
+              </a:fillRef>
+              <a:effectRef idx="0">
+                <a:schemeClr val="accent1"/>
+              </a:effectRef>
+              <a:fontRef idx="minor">
+                <a:schemeClr val="lt1"/>
+              </a:fontRef>
+            </p:style>
+            <p:txBody>
+              <a:bodyPr rtlCol="0" anchor="ctr"/>
+              <a:lstStyle/>
+              <a:p>
+                <a:pPr algn="ctr"/>
+                <a:endParaRPr lang="en-US"/>
+              </a:p>
+            </p:txBody>
+          </p:sp>
+          <p:sp>
+            <p:nvSpPr>
+              <p:cNvPr id="48" name="Oval 47">
+                <a:extLst>
+                  <a:ext uri="{FF2B5EF4-FFF2-40B4-BE49-F238E27FC236}">
+                    <a16:creationId xmlns:a16="http://schemas.microsoft.com/office/drawing/2014/main" id="{28A7DF82-A229-D907-7852-AF88502D7345}"/>
+                  </a:ext>
+                </a:extLst>
+              </p:cNvPr>
+              <p:cNvSpPr/>
+              <p:nvPr/>
+            </p:nvSpPr>
+            <p:spPr>
+              <a:xfrm>
+                <a:off x="3612984" y="1516562"/>
+                <a:ext cx="267629" cy="267629"/>
+              </a:xfrm>
+              <a:prstGeom prst="ellipse">
+                <a:avLst/>
+              </a:prstGeom>
+              <a:solidFill>
+                <a:schemeClr val="bg2"/>
+              </a:solidFill>
+              <a:ln w="22225"/>
+            </p:spPr>
+            <p:style>
+              <a:lnRef idx="2">
+                <a:schemeClr val="accent1">
+                  <a:shade val="15000"/>
+                </a:schemeClr>
+              </a:lnRef>
+              <a:fillRef idx="1">
+                <a:schemeClr val="accent1"/>
+              </a:fillRef>
+              <a:effectRef idx="0">
+                <a:schemeClr val="accent1"/>
+              </a:effectRef>
+              <a:fontRef idx="minor">
+                <a:schemeClr val="lt1"/>
+              </a:fontRef>
+            </p:style>
+            <p:txBody>
+              <a:bodyPr rtlCol="0" anchor="ctr"/>
+              <a:lstStyle/>
+              <a:p>
+                <a:pPr algn="ctr"/>
+                <a:endParaRPr lang="en-US"/>
+              </a:p>
+            </p:txBody>
+          </p:sp>
+        </p:grpSp>
+        <p:grpSp>
+          <p:nvGrpSpPr>
+            <p:cNvPr id="49" name="Group 48">
+              <a:extLst>
+                <a:ext uri="{FF2B5EF4-FFF2-40B4-BE49-F238E27FC236}">
+                  <a16:creationId xmlns:a16="http://schemas.microsoft.com/office/drawing/2014/main" id="{39FB87DE-E265-B45B-AB57-00B3258918C4}"/>
+                </a:ext>
+              </a:extLst>
+            </p:cNvPr>
+            <p:cNvGrpSpPr/>
+            <p:nvPr/>
+          </p:nvGrpSpPr>
+          <p:grpSpPr>
+            <a:xfrm>
+              <a:off x="3620430" y="3849026"/>
+              <a:ext cx="1650380" cy="836342"/>
+              <a:chOff x="2364059" y="1226634"/>
+              <a:chExt cx="1650380" cy="836342"/>
+            </a:xfrm>
+          </p:grpSpPr>
+          <p:sp>
+            <p:nvSpPr>
+              <p:cNvPr id="50" name="Rounded Rectangle 49">
+                <a:extLst>
+                  <a:ext uri="{FF2B5EF4-FFF2-40B4-BE49-F238E27FC236}">
+                    <a16:creationId xmlns:a16="http://schemas.microsoft.com/office/drawing/2014/main" id="{4BEDA129-6057-B4D4-F6D0-FA6BD2EF5C75}"/>
+                  </a:ext>
+                </a:extLst>
+              </p:cNvPr>
+              <p:cNvSpPr/>
+              <p:nvPr/>
+            </p:nvSpPr>
+            <p:spPr>
+              <a:xfrm>
+                <a:off x="2364059" y="1226634"/>
+                <a:ext cx="1650380" cy="836342"/>
+              </a:xfrm>
+              <a:prstGeom prst="roundRect">
+                <a:avLst/>
+              </a:prstGeom>
+              <a:solidFill>
+                <a:schemeClr val="bg2"/>
+              </a:solidFill>
+              <a:ln w="22225"/>
+            </p:spPr>
+            <p:style>
+              <a:lnRef idx="2">
+                <a:schemeClr val="accent1">
+                  <a:shade val="15000"/>
+                </a:schemeClr>
+              </a:lnRef>
+              <a:fillRef idx="1">
+                <a:schemeClr val="accent1"/>
+              </a:fillRef>
+              <a:effectRef idx="0">
+                <a:schemeClr val="accent1"/>
+              </a:effectRef>
+              <a:fontRef idx="minor">
+                <a:schemeClr val="lt1"/>
+              </a:fontRef>
+            </p:style>
+            <p:txBody>
+              <a:bodyPr rtlCol="0" anchor="ctr"/>
+              <a:lstStyle/>
+              <a:p>
+                <a:pPr algn="ctr"/>
+                <a:endParaRPr lang="en-US"/>
+              </a:p>
+            </p:txBody>
+          </p:sp>
+          <p:sp>
+            <p:nvSpPr>
+              <p:cNvPr id="51" name="Oval 50">
+                <a:extLst>
+                  <a:ext uri="{FF2B5EF4-FFF2-40B4-BE49-F238E27FC236}">
+                    <a16:creationId xmlns:a16="http://schemas.microsoft.com/office/drawing/2014/main" id="{C18A51FB-E9C4-EA31-FDDA-2A2935E6E350}"/>
+                  </a:ext>
+                </a:extLst>
+              </p:cNvPr>
+              <p:cNvSpPr/>
+              <p:nvPr/>
+            </p:nvSpPr>
+            <p:spPr>
+              <a:xfrm>
+                <a:off x="2486722" y="1321419"/>
+                <a:ext cx="267629" cy="267629"/>
+              </a:xfrm>
+              <a:prstGeom prst="ellipse">
+                <a:avLst/>
+              </a:prstGeom>
+              <a:solidFill>
+                <a:srgbClr val="00B050"/>
+              </a:solidFill>
+              <a:ln w="22225"/>
+            </p:spPr>
+            <p:style>
+              <a:lnRef idx="2">
+                <a:schemeClr val="accent1">
+                  <a:shade val="15000"/>
+                </a:schemeClr>
+              </a:lnRef>
+              <a:fillRef idx="1">
+                <a:schemeClr val="accent1"/>
+              </a:fillRef>
+              <a:effectRef idx="0">
+                <a:schemeClr val="accent1"/>
+              </a:effectRef>
+              <a:fontRef idx="minor">
+                <a:schemeClr val="lt1"/>
+              </a:fontRef>
+            </p:style>
+            <p:txBody>
+              <a:bodyPr rtlCol="0" anchor="ctr"/>
+              <a:lstStyle/>
+              <a:p>
+                <a:pPr algn="ctr"/>
+                <a:endParaRPr lang="en-US"/>
+              </a:p>
+            </p:txBody>
+          </p:sp>
+          <p:sp>
+            <p:nvSpPr>
+              <p:cNvPr id="52" name="Oval 51">
+                <a:extLst>
+                  <a:ext uri="{FF2B5EF4-FFF2-40B4-BE49-F238E27FC236}">
+                    <a16:creationId xmlns:a16="http://schemas.microsoft.com/office/drawing/2014/main" id="{D674F619-8C6F-DF8C-895F-1873257C0282}"/>
+                  </a:ext>
+                </a:extLst>
+              </p:cNvPr>
+              <p:cNvSpPr/>
+              <p:nvPr/>
+            </p:nvSpPr>
+            <p:spPr>
+              <a:xfrm>
+                <a:off x="2486721" y="1678257"/>
+                <a:ext cx="267629" cy="267629"/>
+              </a:xfrm>
+              <a:prstGeom prst="ellipse">
+                <a:avLst/>
+              </a:prstGeom>
+              <a:solidFill>
+                <a:srgbClr val="FF0000"/>
+              </a:solidFill>
+              <a:ln w="22225"/>
+            </p:spPr>
+            <p:style>
+              <a:lnRef idx="2">
+                <a:schemeClr val="accent1">
+                  <a:shade val="15000"/>
+                </a:schemeClr>
+              </a:lnRef>
+              <a:fillRef idx="1">
+                <a:schemeClr val="accent1"/>
+              </a:fillRef>
+              <a:effectRef idx="0">
+                <a:schemeClr val="accent1"/>
+              </a:effectRef>
+              <a:fontRef idx="minor">
+                <a:schemeClr val="lt1"/>
+              </a:fontRef>
+            </p:style>
+            <p:txBody>
+              <a:bodyPr rtlCol="0" anchor="ctr"/>
+              <a:lstStyle/>
+              <a:p>
+                <a:pPr algn="ctr"/>
+                <a:endParaRPr lang="en-US"/>
+              </a:p>
+            </p:txBody>
+          </p:sp>
+          <p:sp>
+            <p:nvSpPr>
+              <p:cNvPr id="53" name="Oval 52">
+                <a:extLst>
+                  <a:ext uri="{FF2B5EF4-FFF2-40B4-BE49-F238E27FC236}">
+                    <a16:creationId xmlns:a16="http://schemas.microsoft.com/office/drawing/2014/main" id="{A000DEA4-65F7-5666-59C0-541FCF616907}"/>
+                  </a:ext>
+                </a:extLst>
+              </p:cNvPr>
+              <p:cNvSpPr/>
+              <p:nvPr/>
+            </p:nvSpPr>
+            <p:spPr>
+              <a:xfrm>
+                <a:off x="2877013" y="1321419"/>
+                <a:ext cx="267629" cy="267629"/>
+              </a:xfrm>
+              <a:prstGeom prst="ellipse">
+                <a:avLst/>
+              </a:prstGeom>
+              <a:solidFill>
+                <a:srgbClr val="FF0000"/>
+              </a:solidFill>
+              <a:ln w="22225"/>
+            </p:spPr>
+            <p:style>
+              <a:lnRef idx="2">
+                <a:schemeClr val="accent1">
+                  <a:shade val="15000"/>
+                </a:schemeClr>
+              </a:lnRef>
+              <a:fillRef idx="1">
+                <a:schemeClr val="accent1"/>
+              </a:fillRef>
+              <a:effectRef idx="0">
+                <a:schemeClr val="accent1"/>
+              </a:effectRef>
+              <a:fontRef idx="minor">
+                <a:schemeClr val="lt1"/>
+              </a:fontRef>
+            </p:style>
+            <p:txBody>
+              <a:bodyPr rtlCol="0" anchor="ctr"/>
+              <a:lstStyle/>
+              <a:p>
+                <a:pPr algn="ctr"/>
+                <a:endParaRPr lang="en-US"/>
+              </a:p>
+            </p:txBody>
+          </p:sp>
+          <p:sp>
+            <p:nvSpPr>
+              <p:cNvPr id="54" name="Oval 53">
+                <a:extLst>
+                  <a:ext uri="{FF2B5EF4-FFF2-40B4-BE49-F238E27FC236}">
+                    <a16:creationId xmlns:a16="http://schemas.microsoft.com/office/drawing/2014/main" id="{E0F2934C-EAF4-252D-F0C6-5035D0F0235C}"/>
+                  </a:ext>
+                </a:extLst>
+              </p:cNvPr>
+              <p:cNvSpPr/>
+              <p:nvPr/>
+            </p:nvSpPr>
+            <p:spPr>
+              <a:xfrm>
+                <a:off x="2877012" y="1678257"/>
+                <a:ext cx="267629" cy="267629"/>
+              </a:xfrm>
+              <a:prstGeom prst="ellipse">
+                <a:avLst/>
+              </a:prstGeom>
+              <a:solidFill>
+                <a:srgbClr val="FF0000"/>
+              </a:solidFill>
+              <a:ln w="22225"/>
+            </p:spPr>
+            <p:style>
+              <a:lnRef idx="2">
+                <a:schemeClr val="accent1">
+                  <a:shade val="15000"/>
+                </a:schemeClr>
+              </a:lnRef>
+              <a:fillRef idx="1">
+                <a:schemeClr val="accent1"/>
+              </a:fillRef>
+              <a:effectRef idx="0">
+                <a:schemeClr val="accent1"/>
+              </a:effectRef>
+              <a:fontRef idx="minor">
+                <a:schemeClr val="lt1"/>
+              </a:fontRef>
+            </p:style>
+            <p:txBody>
+              <a:bodyPr rtlCol="0" anchor="ctr"/>
+              <a:lstStyle/>
+              <a:p>
+                <a:pPr algn="ctr"/>
+                <a:endParaRPr lang="en-US"/>
+              </a:p>
+            </p:txBody>
+          </p:sp>
+          <p:sp>
+            <p:nvSpPr>
+              <p:cNvPr id="55" name="Oval 54">
+                <a:extLst>
+                  <a:ext uri="{FF2B5EF4-FFF2-40B4-BE49-F238E27FC236}">
+                    <a16:creationId xmlns:a16="http://schemas.microsoft.com/office/drawing/2014/main" id="{BA398F84-B7AB-71D1-9FE3-1E89F6C01FB8}"/>
+                  </a:ext>
+                </a:extLst>
+              </p:cNvPr>
+              <p:cNvSpPr/>
+              <p:nvPr/>
+            </p:nvSpPr>
+            <p:spPr>
+              <a:xfrm>
+                <a:off x="3244999" y="1321419"/>
+                <a:ext cx="267629" cy="267629"/>
+              </a:xfrm>
+              <a:prstGeom prst="ellipse">
+                <a:avLst/>
+              </a:prstGeom>
+              <a:solidFill>
+                <a:srgbClr val="FF0000"/>
+              </a:solidFill>
+              <a:ln w="22225"/>
+            </p:spPr>
+            <p:style>
+              <a:lnRef idx="2">
+                <a:schemeClr val="accent1">
+                  <a:shade val="15000"/>
+                </a:schemeClr>
+              </a:lnRef>
+              <a:fillRef idx="1">
+                <a:schemeClr val="accent1"/>
+              </a:fillRef>
+              <a:effectRef idx="0">
+                <a:schemeClr val="accent1"/>
+              </a:effectRef>
+              <a:fontRef idx="minor">
+                <a:schemeClr val="lt1"/>
+              </a:fontRef>
+            </p:style>
+            <p:txBody>
+              <a:bodyPr rtlCol="0" anchor="ctr"/>
+              <a:lstStyle/>
+              <a:p>
+                <a:pPr algn="ctr"/>
+                <a:endParaRPr lang="en-US"/>
+              </a:p>
+            </p:txBody>
+          </p:sp>
+          <p:sp>
+            <p:nvSpPr>
+              <p:cNvPr id="56" name="Oval 55">
+                <a:extLst>
+                  <a:ext uri="{FF2B5EF4-FFF2-40B4-BE49-F238E27FC236}">
+                    <a16:creationId xmlns:a16="http://schemas.microsoft.com/office/drawing/2014/main" id="{A3777A17-F988-ECB7-7A6F-8E782768E67B}"/>
+                  </a:ext>
+                </a:extLst>
+              </p:cNvPr>
+              <p:cNvSpPr/>
+              <p:nvPr/>
+            </p:nvSpPr>
+            <p:spPr>
+              <a:xfrm>
+                <a:off x="3244998" y="1678257"/>
+                <a:ext cx="267629" cy="267629"/>
+              </a:xfrm>
+              <a:prstGeom prst="ellipse">
+                <a:avLst/>
+              </a:prstGeom>
+              <a:solidFill>
+                <a:srgbClr val="FF0000"/>
+              </a:solidFill>
+              <a:ln w="22225"/>
+            </p:spPr>
+            <p:style>
+              <a:lnRef idx="2">
+                <a:schemeClr val="accent1">
+                  <a:shade val="15000"/>
+                </a:schemeClr>
+              </a:lnRef>
+              <a:fillRef idx="1">
+                <a:schemeClr val="accent1"/>
+              </a:fillRef>
+              <a:effectRef idx="0">
+                <a:schemeClr val="accent1"/>
+              </a:effectRef>
+              <a:fontRef idx="minor">
+                <a:schemeClr val="lt1"/>
+              </a:fontRef>
+            </p:style>
+            <p:txBody>
+              <a:bodyPr rtlCol="0" anchor="ctr"/>
+              <a:lstStyle/>
+              <a:p>
+                <a:pPr algn="ctr"/>
+                <a:endParaRPr lang="en-US"/>
+              </a:p>
+            </p:txBody>
+          </p:sp>
+          <p:sp>
+            <p:nvSpPr>
+              <p:cNvPr id="57" name="Oval 56">
+                <a:extLst>
+                  <a:ext uri="{FF2B5EF4-FFF2-40B4-BE49-F238E27FC236}">
+                    <a16:creationId xmlns:a16="http://schemas.microsoft.com/office/drawing/2014/main" id="{37CD79ED-811B-9BAC-F201-5A861FEC5989}"/>
+                  </a:ext>
+                </a:extLst>
+              </p:cNvPr>
+              <p:cNvSpPr/>
+              <p:nvPr/>
+            </p:nvSpPr>
+            <p:spPr>
+              <a:xfrm>
+                <a:off x="3612984" y="1516562"/>
+                <a:ext cx="267629" cy="267629"/>
+              </a:xfrm>
+              <a:prstGeom prst="ellipse">
+                <a:avLst/>
+              </a:prstGeom>
+              <a:solidFill>
+                <a:srgbClr val="FF0000"/>
+              </a:solidFill>
+              <a:ln w="22225"/>
+            </p:spPr>
+            <p:style>
+              <a:lnRef idx="2">
+                <a:schemeClr val="accent1">
+                  <a:shade val="15000"/>
+                </a:schemeClr>
+              </a:lnRef>
+              <a:fillRef idx="1">
+                <a:schemeClr val="accent1"/>
+              </a:fillRef>
+              <a:effectRef idx="0">
+                <a:schemeClr val="accent1"/>
+              </a:effectRef>
+              <a:fontRef idx="minor">
+                <a:schemeClr val="lt1"/>
+              </a:fontRef>
+            </p:style>
+            <p:txBody>
+              <a:bodyPr rtlCol="0" anchor="ctr"/>
+              <a:lstStyle/>
+              <a:p>
+                <a:pPr algn="ctr"/>
+                <a:endParaRPr lang="en-US"/>
+              </a:p>
+            </p:txBody>
+          </p:sp>
+        </p:grpSp>
+        <p:grpSp>
+          <p:nvGrpSpPr>
+            <p:cNvPr id="58" name="Group 57">
+              <a:extLst>
+                <a:ext uri="{FF2B5EF4-FFF2-40B4-BE49-F238E27FC236}">
+                  <a16:creationId xmlns:a16="http://schemas.microsoft.com/office/drawing/2014/main" id="{845E6F0C-D43B-76C3-F1AC-B378FECB40DE}"/>
+                </a:ext>
+              </a:extLst>
+            </p:cNvPr>
+            <p:cNvGrpSpPr/>
+            <p:nvPr/>
+          </p:nvGrpSpPr>
+          <p:grpSpPr>
+            <a:xfrm>
+              <a:off x="6921190" y="3904783"/>
+              <a:ext cx="1650380" cy="836342"/>
+              <a:chOff x="2364059" y="1226634"/>
+              <a:chExt cx="1650380" cy="836342"/>
+            </a:xfrm>
+          </p:grpSpPr>
+          <p:sp>
+            <p:nvSpPr>
+              <p:cNvPr id="59" name="Rounded Rectangle 58">
+                <a:extLst>
+                  <a:ext uri="{FF2B5EF4-FFF2-40B4-BE49-F238E27FC236}">
+                    <a16:creationId xmlns:a16="http://schemas.microsoft.com/office/drawing/2014/main" id="{BA5B17BB-E857-9B92-61AA-D8E8430047F8}"/>
+                  </a:ext>
+                </a:extLst>
+              </p:cNvPr>
+              <p:cNvSpPr/>
+              <p:nvPr/>
+            </p:nvSpPr>
+            <p:spPr>
+              <a:xfrm>
+                <a:off x="2364059" y="1226634"/>
+                <a:ext cx="1650380" cy="836342"/>
+              </a:xfrm>
+              <a:prstGeom prst="roundRect">
+                <a:avLst/>
+              </a:prstGeom>
+              <a:solidFill>
+                <a:schemeClr val="bg2"/>
+              </a:solidFill>
+              <a:ln w="22225"/>
+            </p:spPr>
+            <p:style>
+              <a:lnRef idx="2">
+                <a:schemeClr val="accent1">
+                  <a:shade val="15000"/>
+                </a:schemeClr>
+              </a:lnRef>
+              <a:fillRef idx="1">
+                <a:schemeClr val="accent1"/>
+              </a:fillRef>
+              <a:effectRef idx="0">
+                <a:schemeClr val="accent1"/>
+              </a:effectRef>
+              <a:fontRef idx="minor">
+                <a:schemeClr val="lt1"/>
+              </a:fontRef>
+            </p:style>
+            <p:txBody>
+              <a:bodyPr rtlCol="0" anchor="ctr"/>
+              <a:lstStyle/>
+              <a:p>
+                <a:pPr algn="ctr"/>
+                <a:endParaRPr lang="en-US"/>
+              </a:p>
+            </p:txBody>
+          </p:sp>
+          <p:sp>
+            <p:nvSpPr>
+              <p:cNvPr id="60" name="Oval 59">
+                <a:extLst>
+                  <a:ext uri="{FF2B5EF4-FFF2-40B4-BE49-F238E27FC236}">
+                    <a16:creationId xmlns:a16="http://schemas.microsoft.com/office/drawing/2014/main" id="{5CAB439C-AEFF-EA20-056C-F379B6847542}"/>
+                  </a:ext>
+                </a:extLst>
+              </p:cNvPr>
+              <p:cNvSpPr/>
+              <p:nvPr/>
+            </p:nvSpPr>
+            <p:spPr>
+              <a:xfrm>
+                <a:off x="2486722" y="1321419"/>
+                <a:ext cx="267629" cy="267629"/>
+              </a:xfrm>
+              <a:prstGeom prst="ellipse">
+                <a:avLst/>
+              </a:prstGeom>
+              <a:solidFill>
+                <a:srgbClr val="FF0000"/>
+              </a:solidFill>
+              <a:ln w="22225"/>
+            </p:spPr>
+            <p:style>
+              <a:lnRef idx="2">
+                <a:schemeClr val="accent1">
+                  <a:shade val="15000"/>
+                </a:schemeClr>
+              </a:lnRef>
+              <a:fillRef idx="1">
+                <a:schemeClr val="accent1"/>
+              </a:fillRef>
+              <a:effectRef idx="0">
+                <a:schemeClr val="accent1"/>
+              </a:effectRef>
+              <a:fontRef idx="minor">
+                <a:schemeClr val="lt1"/>
+              </a:fontRef>
+            </p:style>
+            <p:txBody>
+              <a:bodyPr rtlCol="0" anchor="ctr"/>
+              <a:lstStyle/>
+              <a:p>
+                <a:pPr algn="ctr"/>
+                <a:endParaRPr lang="en-US"/>
+              </a:p>
+            </p:txBody>
+          </p:sp>
+          <p:sp>
+            <p:nvSpPr>
+              <p:cNvPr id="61" name="Oval 60">
+                <a:extLst>
+                  <a:ext uri="{FF2B5EF4-FFF2-40B4-BE49-F238E27FC236}">
+                    <a16:creationId xmlns:a16="http://schemas.microsoft.com/office/drawing/2014/main" id="{EC0098AB-8C42-5C34-5DCD-904ACE63BBFA}"/>
+                  </a:ext>
+                </a:extLst>
+              </p:cNvPr>
+              <p:cNvSpPr/>
+              <p:nvPr/>
+            </p:nvSpPr>
+            <p:spPr>
+              <a:xfrm>
+                <a:off x="2486721" y="1678257"/>
+                <a:ext cx="267629" cy="267629"/>
+              </a:xfrm>
+              <a:prstGeom prst="ellipse">
+                <a:avLst/>
+              </a:prstGeom>
+              <a:solidFill>
+                <a:srgbClr val="FF0000"/>
+              </a:solidFill>
+              <a:ln w="22225"/>
+            </p:spPr>
+            <p:style>
+              <a:lnRef idx="2">
+                <a:schemeClr val="accent1">
+                  <a:shade val="15000"/>
+                </a:schemeClr>
+              </a:lnRef>
+              <a:fillRef idx="1">
+                <a:schemeClr val="accent1"/>
+              </a:fillRef>
+              <a:effectRef idx="0">
+                <a:schemeClr val="accent1"/>
+              </a:effectRef>
+              <a:fontRef idx="minor">
+                <a:schemeClr val="lt1"/>
+              </a:fontRef>
+            </p:style>
+            <p:txBody>
+              <a:bodyPr rtlCol="0" anchor="ctr"/>
+              <a:lstStyle/>
+              <a:p>
+                <a:pPr algn="ctr"/>
+                <a:endParaRPr lang="en-US"/>
+              </a:p>
+            </p:txBody>
+          </p:sp>
+          <p:sp>
+            <p:nvSpPr>
+              <p:cNvPr id="62" name="Oval 61">
+                <a:extLst>
+                  <a:ext uri="{FF2B5EF4-FFF2-40B4-BE49-F238E27FC236}">
+                    <a16:creationId xmlns:a16="http://schemas.microsoft.com/office/drawing/2014/main" id="{0752012D-9746-7238-378C-8B40AD35A4E5}"/>
+                  </a:ext>
+                </a:extLst>
+              </p:cNvPr>
+              <p:cNvSpPr/>
+              <p:nvPr/>
+            </p:nvSpPr>
+            <p:spPr>
+              <a:xfrm>
+                <a:off x="2877013" y="1321419"/>
+                <a:ext cx="267629" cy="267629"/>
+              </a:xfrm>
+              <a:prstGeom prst="ellipse">
+                <a:avLst/>
+              </a:prstGeom>
+              <a:solidFill>
+                <a:srgbClr val="00B050"/>
+              </a:solidFill>
+              <a:ln w="22225"/>
+            </p:spPr>
+            <p:style>
+              <a:lnRef idx="2">
+                <a:schemeClr val="accent1">
+                  <a:shade val="15000"/>
+                </a:schemeClr>
+              </a:lnRef>
+              <a:fillRef idx="1">
+                <a:schemeClr val="accent1"/>
+              </a:fillRef>
+              <a:effectRef idx="0">
+                <a:schemeClr val="accent1"/>
+              </a:effectRef>
+              <a:fontRef idx="minor">
+                <a:schemeClr val="lt1"/>
+              </a:fontRef>
+            </p:style>
+            <p:txBody>
+              <a:bodyPr rtlCol="0" anchor="ctr"/>
+              <a:lstStyle/>
+              <a:p>
+                <a:pPr algn="ctr"/>
+                <a:endParaRPr lang="en-US"/>
+              </a:p>
+            </p:txBody>
+          </p:sp>
+          <p:sp>
+            <p:nvSpPr>
+              <p:cNvPr id="63" name="Oval 62">
+                <a:extLst>
+                  <a:ext uri="{FF2B5EF4-FFF2-40B4-BE49-F238E27FC236}">
+                    <a16:creationId xmlns:a16="http://schemas.microsoft.com/office/drawing/2014/main" id="{55873228-FB9F-66CD-844F-E128EF2DC6C0}"/>
+                  </a:ext>
+                </a:extLst>
+              </p:cNvPr>
+              <p:cNvSpPr/>
+              <p:nvPr/>
+            </p:nvSpPr>
+            <p:spPr>
+              <a:xfrm>
+                <a:off x="2877012" y="1678257"/>
+                <a:ext cx="267629" cy="267629"/>
+              </a:xfrm>
+              <a:prstGeom prst="ellipse">
+                <a:avLst/>
+              </a:prstGeom>
+              <a:solidFill>
+                <a:srgbClr val="FF0000"/>
+              </a:solidFill>
+              <a:ln w="22225"/>
+            </p:spPr>
+            <p:style>
+              <a:lnRef idx="2">
+                <a:schemeClr val="accent1">
+                  <a:shade val="15000"/>
+                </a:schemeClr>
+              </a:lnRef>
+              <a:fillRef idx="1">
+                <a:schemeClr val="accent1"/>
+              </a:fillRef>
+              <a:effectRef idx="0">
+                <a:schemeClr val="accent1"/>
+              </a:effectRef>
+              <a:fontRef idx="minor">
+                <a:schemeClr val="lt1"/>
+              </a:fontRef>
+            </p:style>
+            <p:txBody>
+              <a:bodyPr rtlCol="0" anchor="ctr"/>
+              <a:lstStyle/>
+              <a:p>
+                <a:pPr algn="ctr"/>
+                <a:endParaRPr lang="en-US"/>
+              </a:p>
+            </p:txBody>
+          </p:sp>
+          <p:sp>
+            <p:nvSpPr>
+              <p:cNvPr id="64" name="Oval 63">
+                <a:extLst>
+                  <a:ext uri="{FF2B5EF4-FFF2-40B4-BE49-F238E27FC236}">
+                    <a16:creationId xmlns:a16="http://schemas.microsoft.com/office/drawing/2014/main" id="{D80B84E0-43E0-0414-6A1D-D55271F3C0F0}"/>
+                  </a:ext>
+                </a:extLst>
+              </p:cNvPr>
+              <p:cNvSpPr/>
+              <p:nvPr/>
+            </p:nvSpPr>
+            <p:spPr>
+              <a:xfrm>
+                <a:off x="3244999" y="1321419"/>
+                <a:ext cx="267629" cy="267629"/>
+              </a:xfrm>
+              <a:prstGeom prst="ellipse">
+                <a:avLst/>
+              </a:prstGeom>
+              <a:solidFill>
+                <a:srgbClr val="FF0000"/>
+              </a:solidFill>
+              <a:ln w="22225"/>
+            </p:spPr>
+            <p:style>
+              <a:lnRef idx="2">
+                <a:schemeClr val="accent1">
+                  <a:shade val="15000"/>
+                </a:schemeClr>
+              </a:lnRef>
+              <a:fillRef idx="1">
+                <a:schemeClr val="accent1"/>
+              </a:fillRef>
+              <a:effectRef idx="0">
+                <a:schemeClr val="accent1"/>
+              </a:effectRef>
+              <a:fontRef idx="minor">
+                <a:schemeClr val="lt1"/>
+              </a:fontRef>
+            </p:style>
+            <p:txBody>
+              <a:bodyPr rtlCol="0" anchor="ctr"/>
+              <a:lstStyle/>
+              <a:p>
+                <a:pPr algn="ctr"/>
+                <a:endParaRPr lang="en-US"/>
+              </a:p>
+            </p:txBody>
+          </p:sp>
+          <p:sp>
+            <p:nvSpPr>
+              <p:cNvPr id="65" name="Oval 64">
+                <a:extLst>
+                  <a:ext uri="{FF2B5EF4-FFF2-40B4-BE49-F238E27FC236}">
+                    <a16:creationId xmlns:a16="http://schemas.microsoft.com/office/drawing/2014/main" id="{F5B23921-34D3-3964-CE6D-F18892DBAF74}"/>
+                  </a:ext>
+                </a:extLst>
+              </p:cNvPr>
+              <p:cNvSpPr/>
+              <p:nvPr/>
+            </p:nvSpPr>
+            <p:spPr>
+              <a:xfrm>
+                <a:off x="3244998" y="1678257"/>
+                <a:ext cx="267629" cy="267629"/>
+              </a:xfrm>
+              <a:prstGeom prst="ellipse">
+                <a:avLst/>
+              </a:prstGeom>
+              <a:solidFill>
+                <a:srgbClr val="FF0000"/>
+              </a:solidFill>
+              <a:ln w="22225"/>
+            </p:spPr>
+            <p:style>
+              <a:lnRef idx="2">
+                <a:schemeClr val="accent1">
+                  <a:shade val="15000"/>
+                </a:schemeClr>
+              </a:lnRef>
+              <a:fillRef idx="1">
+                <a:schemeClr val="accent1"/>
+              </a:fillRef>
+              <a:effectRef idx="0">
+                <a:schemeClr val="accent1"/>
+              </a:effectRef>
+              <a:fontRef idx="minor">
+                <a:schemeClr val="lt1"/>
+              </a:fontRef>
+            </p:style>
+            <p:txBody>
+              <a:bodyPr rtlCol="0" anchor="ctr"/>
+              <a:lstStyle/>
+              <a:p>
+                <a:pPr algn="ctr"/>
+                <a:endParaRPr lang="en-US"/>
+              </a:p>
+            </p:txBody>
+          </p:sp>
+          <p:sp>
+            <p:nvSpPr>
+              <p:cNvPr id="66" name="Oval 65">
+                <a:extLst>
+                  <a:ext uri="{FF2B5EF4-FFF2-40B4-BE49-F238E27FC236}">
+                    <a16:creationId xmlns:a16="http://schemas.microsoft.com/office/drawing/2014/main" id="{4FC6C726-3E55-C57A-B903-E379456C94BA}"/>
+                  </a:ext>
+                </a:extLst>
+              </p:cNvPr>
+              <p:cNvSpPr/>
+              <p:nvPr/>
+            </p:nvSpPr>
+            <p:spPr>
+              <a:xfrm>
+                <a:off x="3612984" y="1516562"/>
+                <a:ext cx="267629" cy="267629"/>
+              </a:xfrm>
+              <a:prstGeom prst="ellipse">
+                <a:avLst/>
+              </a:prstGeom>
+              <a:solidFill>
+                <a:srgbClr val="FF0000"/>
+              </a:solidFill>
+              <a:ln w="22225"/>
+            </p:spPr>
+            <p:style>
+              <a:lnRef idx="2">
+                <a:schemeClr val="accent1">
+                  <a:shade val="15000"/>
+                </a:schemeClr>
+              </a:lnRef>
+              <a:fillRef idx="1">
+                <a:schemeClr val="accent1"/>
+              </a:fillRef>
+              <a:effectRef idx="0">
+                <a:schemeClr val="accent1"/>
+              </a:effectRef>
+              <a:fontRef idx="minor">
+                <a:schemeClr val="lt1"/>
+              </a:fontRef>
+            </p:style>
+            <p:txBody>
+              <a:bodyPr rtlCol="0" anchor="ctr"/>
+              <a:lstStyle/>
+              <a:p>
+                <a:pPr algn="ctr"/>
+                <a:endParaRPr lang="en-US"/>
+              </a:p>
+            </p:txBody>
+          </p:sp>
+        </p:grpSp>
+        <p:grpSp>
+          <p:nvGrpSpPr>
+            <p:cNvPr id="67" name="Group 66">
+              <a:extLst>
+                <a:ext uri="{FF2B5EF4-FFF2-40B4-BE49-F238E27FC236}">
+                  <a16:creationId xmlns:a16="http://schemas.microsoft.com/office/drawing/2014/main" id="{6683A412-7FF6-0F56-A91C-88AAC4B2E18A}"/>
+                </a:ext>
+              </a:extLst>
+            </p:cNvPr>
+            <p:cNvGrpSpPr/>
+            <p:nvPr/>
+          </p:nvGrpSpPr>
+          <p:grpSpPr>
+            <a:xfrm>
+              <a:off x="10221950" y="3904783"/>
+              <a:ext cx="1650380" cy="836342"/>
+              <a:chOff x="2364059" y="1226634"/>
+              <a:chExt cx="1650380" cy="836342"/>
+            </a:xfrm>
+          </p:grpSpPr>
+          <p:sp>
+            <p:nvSpPr>
+              <p:cNvPr id="68" name="Rounded Rectangle 67">
+                <a:extLst>
+                  <a:ext uri="{FF2B5EF4-FFF2-40B4-BE49-F238E27FC236}">
+                    <a16:creationId xmlns:a16="http://schemas.microsoft.com/office/drawing/2014/main" id="{25F55C71-428D-3885-10B0-6AF28CF579E1}"/>
+                  </a:ext>
+                </a:extLst>
+              </p:cNvPr>
+              <p:cNvSpPr/>
+              <p:nvPr/>
+            </p:nvSpPr>
+            <p:spPr>
+              <a:xfrm>
+                <a:off x="2364059" y="1226634"/>
+                <a:ext cx="1650380" cy="836342"/>
+              </a:xfrm>
+              <a:prstGeom prst="roundRect">
+                <a:avLst/>
+              </a:prstGeom>
+              <a:solidFill>
+                <a:schemeClr val="bg2"/>
+              </a:solidFill>
+              <a:ln w="22225"/>
+            </p:spPr>
+            <p:style>
+              <a:lnRef idx="2">
+                <a:schemeClr val="accent1">
+                  <a:shade val="15000"/>
+                </a:schemeClr>
+              </a:lnRef>
+              <a:fillRef idx="1">
+                <a:schemeClr val="accent1"/>
+              </a:fillRef>
+              <a:effectRef idx="0">
+                <a:schemeClr val="accent1"/>
+              </a:effectRef>
+              <a:fontRef idx="minor">
+                <a:schemeClr val="lt1"/>
+              </a:fontRef>
+            </p:style>
+            <p:txBody>
+              <a:bodyPr rtlCol="0" anchor="ctr"/>
+              <a:lstStyle/>
+              <a:p>
+                <a:pPr algn="ctr"/>
+                <a:endParaRPr lang="en-US"/>
+              </a:p>
+            </p:txBody>
+          </p:sp>
+          <p:sp>
+            <p:nvSpPr>
+              <p:cNvPr id="69" name="Oval 68">
+                <a:extLst>
+                  <a:ext uri="{FF2B5EF4-FFF2-40B4-BE49-F238E27FC236}">
+                    <a16:creationId xmlns:a16="http://schemas.microsoft.com/office/drawing/2014/main" id="{0B678FEC-FF91-7536-AC41-0E7555FD1B64}"/>
+                  </a:ext>
+                </a:extLst>
+              </p:cNvPr>
+              <p:cNvSpPr/>
+              <p:nvPr/>
+            </p:nvSpPr>
+            <p:spPr>
+              <a:xfrm>
+                <a:off x="2486722" y="1321419"/>
+                <a:ext cx="267629" cy="267629"/>
+              </a:xfrm>
+              <a:prstGeom prst="ellipse">
+                <a:avLst/>
+              </a:prstGeom>
+              <a:solidFill>
+                <a:srgbClr val="00B050"/>
+              </a:solidFill>
+              <a:ln w="22225"/>
+            </p:spPr>
+            <p:style>
+              <a:lnRef idx="2">
+                <a:schemeClr val="accent1">
+                  <a:shade val="15000"/>
+                </a:schemeClr>
+              </a:lnRef>
+              <a:fillRef idx="1">
+                <a:schemeClr val="accent1"/>
+              </a:fillRef>
+              <a:effectRef idx="0">
+                <a:schemeClr val="accent1"/>
+              </a:effectRef>
+              <a:fontRef idx="minor">
+                <a:schemeClr val="lt1"/>
+              </a:fontRef>
+            </p:style>
+            <p:txBody>
+              <a:bodyPr rtlCol="0" anchor="ctr"/>
+              <a:lstStyle/>
+              <a:p>
+                <a:pPr algn="ctr"/>
+                <a:endParaRPr lang="en-US"/>
+              </a:p>
+            </p:txBody>
+          </p:sp>
+          <p:sp>
+            <p:nvSpPr>
+              <p:cNvPr id="70" name="Oval 69">
+                <a:extLst>
+                  <a:ext uri="{FF2B5EF4-FFF2-40B4-BE49-F238E27FC236}">
+                    <a16:creationId xmlns:a16="http://schemas.microsoft.com/office/drawing/2014/main" id="{C1F7ADC2-D698-373F-E167-501779B60D1C}"/>
+                  </a:ext>
+                </a:extLst>
+              </p:cNvPr>
+              <p:cNvSpPr/>
+              <p:nvPr/>
+            </p:nvSpPr>
+            <p:spPr>
+              <a:xfrm>
+                <a:off x="2486721" y="1678257"/>
+                <a:ext cx="267629" cy="267629"/>
+              </a:xfrm>
+              <a:prstGeom prst="ellipse">
+                <a:avLst/>
+              </a:prstGeom>
+              <a:solidFill>
+                <a:srgbClr val="00B050"/>
+              </a:solidFill>
+              <a:ln w="22225"/>
+            </p:spPr>
+            <p:style>
+              <a:lnRef idx="2">
+                <a:schemeClr val="accent1">
+                  <a:shade val="15000"/>
+                </a:schemeClr>
+              </a:lnRef>
+              <a:fillRef idx="1">
+                <a:schemeClr val="accent1"/>
+              </a:fillRef>
+              <a:effectRef idx="0">
+                <a:schemeClr val="accent1"/>
+              </a:effectRef>
+              <a:fontRef idx="minor">
+                <a:schemeClr val="lt1"/>
+              </a:fontRef>
+            </p:style>
+            <p:txBody>
+              <a:bodyPr rtlCol="0" anchor="ctr"/>
+              <a:lstStyle/>
+              <a:p>
+                <a:pPr algn="ctr"/>
+                <a:endParaRPr lang="en-US"/>
+              </a:p>
+            </p:txBody>
+          </p:sp>
+          <p:sp>
+            <p:nvSpPr>
+              <p:cNvPr id="71" name="Oval 70">
+                <a:extLst>
+                  <a:ext uri="{FF2B5EF4-FFF2-40B4-BE49-F238E27FC236}">
+                    <a16:creationId xmlns:a16="http://schemas.microsoft.com/office/drawing/2014/main" id="{E8C57108-DA51-F7F6-F4E3-DA9BBF766D48}"/>
+                  </a:ext>
+                </a:extLst>
+              </p:cNvPr>
+              <p:cNvSpPr/>
+              <p:nvPr/>
+            </p:nvSpPr>
+            <p:spPr>
+              <a:xfrm>
+                <a:off x="2877013" y="1321419"/>
+                <a:ext cx="267629" cy="267629"/>
+              </a:xfrm>
+              <a:prstGeom prst="ellipse">
+                <a:avLst/>
+              </a:prstGeom>
+              <a:solidFill>
+                <a:srgbClr val="00B050"/>
+              </a:solidFill>
+              <a:ln w="22225"/>
+            </p:spPr>
+            <p:style>
+              <a:lnRef idx="2">
+                <a:schemeClr val="accent1">
+                  <a:shade val="15000"/>
+                </a:schemeClr>
+              </a:lnRef>
+              <a:fillRef idx="1">
+                <a:schemeClr val="accent1"/>
+              </a:fillRef>
+              <a:effectRef idx="0">
+                <a:schemeClr val="accent1"/>
+              </a:effectRef>
+              <a:fontRef idx="minor">
+                <a:schemeClr val="lt1"/>
+              </a:fontRef>
+            </p:style>
+            <p:txBody>
+              <a:bodyPr rtlCol="0" anchor="ctr"/>
+              <a:lstStyle/>
+              <a:p>
+                <a:pPr algn="ctr"/>
+                <a:endParaRPr lang="en-US"/>
+              </a:p>
+            </p:txBody>
+          </p:sp>
+          <p:sp>
+            <p:nvSpPr>
+              <p:cNvPr id="72" name="Oval 71">
+                <a:extLst>
+                  <a:ext uri="{FF2B5EF4-FFF2-40B4-BE49-F238E27FC236}">
+                    <a16:creationId xmlns:a16="http://schemas.microsoft.com/office/drawing/2014/main" id="{685B1FA8-15CC-DCB9-ACC5-B61CC31BBA98}"/>
+                  </a:ext>
+                </a:extLst>
+              </p:cNvPr>
+              <p:cNvSpPr/>
+              <p:nvPr/>
+            </p:nvSpPr>
+            <p:spPr>
+              <a:xfrm>
+                <a:off x="2877012" y="1678257"/>
+                <a:ext cx="267629" cy="267629"/>
+              </a:xfrm>
+              <a:prstGeom prst="ellipse">
+                <a:avLst/>
+              </a:prstGeom>
+              <a:solidFill>
+                <a:schemeClr val="bg2"/>
+              </a:solidFill>
+              <a:ln w="22225"/>
+            </p:spPr>
+            <p:style>
+              <a:lnRef idx="2">
+                <a:schemeClr val="accent1">
+                  <a:shade val="15000"/>
+                </a:schemeClr>
+              </a:lnRef>
+              <a:fillRef idx="1">
+                <a:schemeClr val="accent1"/>
+              </a:fillRef>
+              <a:effectRef idx="0">
+                <a:schemeClr val="accent1"/>
+              </a:effectRef>
+              <a:fontRef idx="minor">
+                <a:schemeClr val="lt1"/>
+              </a:fontRef>
+            </p:style>
+            <p:txBody>
+              <a:bodyPr rtlCol="0" anchor="ctr"/>
+              <a:lstStyle/>
+              <a:p>
+                <a:pPr algn="ctr"/>
+                <a:endParaRPr lang="en-US"/>
+              </a:p>
+            </p:txBody>
+          </p:sp>
+          <p:sp>
+            <p:nvSpPr>
+              <p:cNvPr id="73" name="Oval 72">
+                <a:extLst>
+                  <a:ext uri="{FF2B5EF4-FFF2-40B4-BE49-F238E27FC236}">
+                    <a16:creationId xmlns:a16="http://schemas.microsoft.com/office/drawing/2014/main" id="{2B37BF76-A9BA-836C-A65E-D5C87605280C}"/>
+                  </a:ext>
+                </a:extLst>
+              </p:cNvPr>
+              <p:cNvSpPr/>
+              <p:nvPr/>
+            </p:nvSpPr>
+            <p:spPr>
+              <a:xfrm>
+                <a:off x="3244999" y="1321419"/>
+                <a:ext cx="267629" cy="267629"/>
+              </a:xfrm>
+              <a:prstGeom prst="ellipse">
+                <a:avLst/>
+              </a:prstGeom>
+              <a:solidFill>
+                <a:schemeClr val="bg2"/>
+              </a:solidFill>
+              <a:ln w="22225"/>
+            </p:spPr>
+            <p:style>
+              <a:lnRef idx="2">
+                <a:schemeClr val="accent1">
+                  <a:shade val="15000"/>
+                </a:schemeClr>
+              </a:lnRef>
+              <a:fillRef idx="1">
+                <a:schemeClr val="accent1"/>
+              </a:fillRef>
+              <a:effectRef idx="0">
+                <a:schemeClr val="accent1"/>
+              </a:effectRef>
+              <a:fontRef idx="minor">
+                <a:schemeClr val="lt1"/>
+              </a:fontRef>
+            </p:style>
+            <p:txBody>
+              <a:bodyPr rtlCol="0" anchor="ctr"/>
+              <a:lstStyle/>
+              <a:p>
+                <a:pPr algn="ctr"/>
+                <a:endParaRPr lang="en-US"/>
+              </a:p>
+            </p:txBody>
+          </p:sp>
+          <p:sp>
+            <p:nvSpPr>
+              <p:cNvPr id="74" name="Oval 73">
+                <a:extLst>
+                  <a:ext uri="{FF2B5EF4-FFF2-40B4-BE49-F238E27FC236}">
+                    <a16:creationId xmlns:a16="http://schemas.microsoft.com/office/drawing/2014/main" id="{C403E048-507E-8983-32F0-FBEC93AFA196}"/>
+                  </a:ext>
+                </a:extLst>
+              </p:cNvPr>
+              <p:cNvSpPr/>
+              <p:nvPr/>
+            </p:nvSpPr>
+            <p:spPr>
+              <a:xfrm>
+                <a:off x="3244998" y="1678257"/>
+                <a:ext cx="267629" cy="267629"/>
+              </a:xfrm>
+              <a:prstGeom prst="ellipse">
+                <a:avLst/>
+              </a:prstGeom>
+              <a:solidFill>
+                <a:schemeClr val="bg2"/>
+              </a:solidFill>
+              <a:ln w="22225"/>
+            </p:spPr>
+            <p:style>
+              <a:lnRef idx="2">
+                <a:schemeClr val="accent1">
+                  <a:shade val="15000"/>
+                </a:schemeClr>
+              </a:lnRef>
+              <a:fillRef idx="1">
+                <a:schemeClr val="accent1"/>
+              </a:fillRef>
+              <a:effectRef idx="0">
+                <a:schemeClr val="accent1"/>
+              </a:effectRef>
+              <a:fontRef idx="minor">
+                <a:schemeClr val="lt1"/>
+              </a:fontRef>
+            </p:style>
+            <p:txBody>
+              <a:bodyPr rtlCol="0" anchor="ctr"/>
+              <a:lstStyle/>
+              <a:p>
+                <a:pPr algn="ctr"/>
+                <a:endParaRPr lang="en-US"/>
+              </a:p>
+            </p:txBody>
+          </p:sp>
+          <p:sp>
+            <p:nvSpPr>
+              <p:cNvPr id="75" name="Oval 74">
+                <a:extLst>
+                  <a:ext uri="{FF2B5EF4-FFF2-40B4-BE49-F238E27FC236}">
+                    <a16:creationId xmlns:a16="http://schemas.microsoft.com/office/drawing/2014/main" id="{2C8FC205-C2D0-AE7E-CDE6-C6EDA05F65E1}"/>
+                  </a:ext>
+                </a:extLst>
+              </p:cNvPr>
+              <p:cNvSpPr/>
+              <p:nvPr/>
+            </p:nvSpPr>
+            <p:spPr>
+              <a:xfrm>
+                <a:off x="3612984" y="1516562"/>
+                <a:ext cx="267629" cy="267629"/>
+              </a:xfrm>
+              <a:prstGeom prst="ellipse">
+                <a:avLst/>
+              </a:prstGeom>
+              <a:solidFill>
+                <a:schemeClr val="bg2"/>
+              </a:solidFill>
+              <a:ln w="22225"/>
+            </p:spPr>
+            <p:style>
+              <a:lnRef idx="2">
+                <a:schemeClr val="accent1">
+                  <a:shade val="15000"/>
+                </a:schemeClr>
+              </a:lnRef>
+              <a:fillRef idx="1">
+                <a:schemeClr val="accent1"/>
+              </a:fillRef>
+              <a:effectRef idx="0">
+                <a:schemeClr val="accent1"/>
+              </a:effectRef>
+              <a:fontRef idx="minor">
+                <a:schemeClr val="lt1"/>
+              </a:fontRef>
+            </p:style>
+            <p:txBody>
+              <a:bodyPr rtlCol="0" anchor="ctr"/>
+              <a:lstStyle/>
+              <a:p>
+                <a:pPr algn="ctr"/>
+                <a:endParaRPr lang="en-US"/>
+              </a:p>
+            </p:txBody>
+          </p:sp>
+        </p:grpSp>
+        <p:sp>
+          <p:nvSpPr>
+            <p:cNvPr id="76" name="TextBox 75">
+              <a:extLst>
+                <a:ext uri="{FF2B5EF4-FFF2-40B4-BE49-F238E27FC236}">
+                  <a16:creationId xmlns:a16="http://schemas.microsoft.com/office/drawing/2014/main" id="{33EAA336-D726-0871-5126-529AEFFE63F6}"/>
+                </a:ext>
+              </a:extLst>
+            </p:cNvPr>
+            <p:cNvSpPr txBox="1"/>
+            <p:nvPr/>
+          </p:nvSpPr>
+          <p:spPr>
+            <a:xfrm>
+              <a:off x="4793351" y="1175779"/>
+              <a:ext cx="2774606" cy="369332"/>
+            </a:xfrm>
+            <a:prstGeom prst="rect">
+              <a:avLst/>
+            </a:prstGeom>
+            <a:noFill/>
+          </p:spPr>
+          <p:txBody>
+            <a:bodyPr wrap="none" rtlCol="0">
+              <a:spAutoFit/>
+            </a:bodyPr>
+            <a:lstStyle/>
+            <a:p>
+              <a:r>
+                <a:rPr lang="en-US" dirty="0"/>
+                <a:t>Is a fixed point of T</a:t>
+              </a:r>
+              <a:r>
+                <a:rPr lang="en-US" baseline="-25000" dirty="0"/>
+                <a:t>1</a:t>
+              </a:r>
+              <a:r>
+                <a:rPr lang="en-US" dirty="0"/>
+                <a:t> or T</a:t>
+              </a:r>
+              <a:r>
+                <a:rPr lang="en-US" baseline="-25000" dirty="0"/>
+                <a:t>2</a:t>
+              </a:r>
+              <a:r>
+                <a:rPr lang="en-US" dirty="0"/>
+                <a:t>?</a:t>
+              </a:r>
+            </a:p>
+          </p:txBody>
+        </p:sp>
+        <p:sp>
+          <p:nvSpPr>
+            <p:cNvPr id="77" name="TextBox 76">
+              <a:extLst>
+                <a:ext uri="{FF2B5EF4-FFF2-40B4-BE49-F238E27FC236}">
+                  <a16:creationId xmlns:a16="http://schemas.microsoft.com/office/drawing/2014/main" id="{9C24B657-11F0-B616-209D-9FDA2AAC08CF}"/>
+                </a:ext>
+              </a:extLst>
+            </p:cNvPr>
+            <p:cNvSpPr txBox="1"/>
+            <p:nvPr/>
+          </p:nvSpPr>
+          <p:spPr>
+            <a:xfrm>
+              <a:off x="190396" y="3295694"/>
+              <a:ext cx="1779654" cy="369332"/>
+            </a:xfrm>
+            <a:prstGeom prst="rect">
+              <a:avLst/>
+            </a:prstGeom>
+            <a:noFill/>
+          </p:spPr>
+          <p:txBody>
+            <a:bodyPr wrap="none" rtlCol="0">
+              <a:spAutoFit/>
+            </a:bodyPr>
+            <a:lstStyle/>
+            <a:p>
+              <a:r>
+                <a:rPr lang="en-US" dirty="0"/>
+                <a:t>Neither T</a:t>
+              </a:r>
+              <a:r>
+                <a:rPr lang="en-US" baseline="-25000" dirty="0"/>
+                <a:t>1</a:t>
+              </a:r>
+              <a:r>
+                <a:rPr lang="en-US" dirty="0"/>
+                <a:t> nor T</a:t>
+              </a:r>
+              <a:r>
+                <a:rPr lang="en-US" baseline="-25000" dirty="0"/>
+                <a:t>2</a:t>
+              </a:r>
+            </a:p>
+          </p:txBody>
+        </p:sp>
+        <p:sp>
+          <p:nvSpPr>
+            <p:cNvPr id="78" name="TextBox 77">
+              <a:extLst>
+                <a:ext uri="{FF2B5EF4-FFF2-40B4-BE49-F238E27FC236}">
+                  <a16:creationId xmlns:a16="http://schemas.microsoft.com/office/drawing/2014/main" id="{62B97477-1DA3-F9C8-9F19-F8375288B3AB}"/>
+                </a:ext>
+              </a:extLst>
+            </p:cNvPr>
+            <p:cNvSpPr txBox="1"/>
+            <p:nvPr/>
+          </p:nvSpPr>
+          <p:spPr>
+            <a:xfrm>
+              <a:off x="3715568" y="3295694"/>
+              <a:ext cx="1370888" cy="369332"/>
+            </a:xfrm>
+            <a:prstGeom prst="rect">
+              <a:avLst/>
+            </a:prstGeom>
+            <a:noFill/>
+          </p:spPr>
+          <p:txBody>
+            <a:bodyPr wrap="none" rtlCol="0">
+              <a:spAutoFit/>
+            </a:bodyPr>
+            <a:lstStyle/>
+            <a:p>
+              <a:r>
+                <a:rPr lang="en-US" dirty="0"/>
+                <a:t>T</a:t>
+              </a:r>
+              <a:r>
+                <a:rPr lang="en-US" baseline="-25000" dirty="0"/>
+                <a:t>1</a:t>
+              </a:r>
+              <a:r>
+                <a:rPr lang="en-US" dirty="0"/>
+                <a:t> but not T</a:t>
+              </a:r>
+              <a:r>
+                <a:rPr lang="en-US" baseline="-25000" dirty="0"/>
+                <a:t>2</a:t>
+              </a:r>
+            </a:p>
+          </p:txBody>
+        </p:sp>
+        <p:sp>
+          <p:nvSpPr>
+            <p:cNvPr id="79" name="TextBox 78">
+              <a:extLst>
+                <a:ext uri="{FF2B5EF4-FFF2-40B4-BE49-F238E27FC236}">
+                  <a16:creationId xmlns:a16="http://schemas.microsoft.com/office/drawing/2014/main" id="{D79E0951-301B-E7FA-48FB-1CFF69E9E31C}"/>
+                </a:ext>
+              </a:extLst>
+            </p:cNvPr>
+            <p:cNvSpPr txBox="1"/>
+            <p:nvPr/>
+          </p:nvSpPr>
+          <p:spPr>
+            <a:xfrm>
+              <a:off x="7116685" y="3290118"/>
+              <a:ext cx="1370888" cy="369332"/>
+            </a:xfrm>
+            <a:prstGeom prst="rect">
+              <a:avLst/>
+            </a:prstGeom>
+            <a:noFill/>
+          </p:spPr>
+          <p:txBody>
+            <a:bodyPr wrap="none" rtlCol="0">
+              <a:spAutoFit/>
+            </a:bodyPr>
+            <a:lstStyle/>
+            <a:p>
+              <a:r>
+                <a:rPr lang="en-US" dirty="0"/>
+                <a:t>T</a:t>
+              </a:r>
+              <a:r>
+                <a:rPr lang="en-US" baseline="-25000" dirty="0"/>
+                <a:t>2</a:t>
+              </a:r>
+              <a:r>
+                <a:rPr lang="en-US" dirty="0"/>
+                <a:t> but not T</a:t>
+              </a:r>
+              <a:r>
+                <a:rPr lang="en-US" baseline="-25000" dirty="0"/>
+                <a:t>1</a:t>
+              </a:r>
+            </a:p>
+          </p:txBody>
+        </p:sp>
+        <p:sp>
+          <p:nvSpPr>
+            <p:cNvPr id="80" name="TextBox 79">
+              <a:extLst>
+                <a:ext uri="{FF2B5EF4-FFF2-40B4-BE49-F238E27FC236}">
+                  <a16:creationId xmlns:a16="http://schemas.microsoft.com/office/drawing/2014/main" id="{2DA9AAEF-1946-E689-D904-81B6CA1121FE}"/>
+                </a:ext>
+              </a:extLst>
+            </p:cNvPr>
+            <p:cNvSpPr txBox="1"/>
+            <p:nvPr/>
+          </p:nvSpPr>
+          <p:spPr>
+            <a:xfrm>
+              <a:off x="10676160" y="3298154"/>
+              <a:ext cx="652743" cy="369332"/>
+            </a:xfrm>
+            <a:prstGeom prst="rect">
+              <a:avLst/>
+            </a:prstGeom>
+            <a:noFill/>
+          </p:spPr>
+          <p:txBody>
+            <a:bodyPr wrap="none" rtlCol="0">
+              <a:spAutoFit/>
+            </a:bodyPr>
+            <a:lstStyle/>
+            <a:p>
+              <a:r>
+                <a:rPr lang="en-US" dirty="0"/>
+                <a:t>Both</a:t>
+              </a:r>
+              <a:endParaRPr lang="en-US" baseline="-25000" dirty="0"/>
+            </a:p>
+          </p:txBody>
+        </p:sp>
+        <p:sp>
+          <p:nvSpPr>
+            <p:cNvPr id="81" name="TextBox 80">
+              <a:extLst>
+                <a:ext uri="{FF2B5EF4-FFF2-40B4-BE49-F238E27FC236}">
+                  <a16:creationId xmlns:a16="http://schemas.microsoft.com/office/drawing/2014/main" id="{7C950A0C-7BE5-040D-7507-BCAF23D7E362}"/>
+                </a:ext>
+              </a:extLst>
+            </p:cNvPr>
+            <p:cNvSpPr txBox="1"/>
+            <p:nvPr/>
+          </p:nvSpPr>
+          <p:spPr>
+            <a:xfrm>
+              <a:off x="9945973" y="4846387"/>
+              <a:ext cx="2202334" cy="369332"/>
+            </a:xfrm>
+            <a:prstGeom prst="rect">
+              <a:avLst/>
+            </a:prstGeom>
+            <a:noFill/>
+          </p:spPr>
+          <p:txBody>
+            <a:bodyPr wrap="none" rtlCol="0">
+              <a:spAutoFit/>
+            </a:bodyPr>
+            <a:lstStyle/>
+            <a:p>
+              <a:r>
+                <a:rPr lang="en-US" dirty="0"/>
+                <a:t>Is a fixed point of T</a:t>
+              </a:r>
+              <a:r>
+                <a:rPr lang="en-US" baseline="-25000" dirty="0"/>
+                <a:t>5</a:t>
+              </a:r>
+              <a:r>
+                <a:rPr lang="en-US" dirty="0"/>
+                <a:t>?</a:t>
+              </a:r>
+            </a:p>
+          </p:txBody>
+        </p:sp>
+        <p:sp>
+          <p:nvSpPr>
+            <p:cNvPr id="82" name="TextBox 81">
+              <a:extLst>
+                <a:ext uri="{FF2B5EF4-FFF2-40B4-BE49-F238E27FC236}">
+                  <a16:creationId xmlns:a16="http://schemas.microsoft.com/office/drawing/2014/main" id="{AD20BA42-B191-EA23-B16E-73DE5B02E394}"/>
+                </a:ext>
+              </a:extLst>
+            </p:cNvPr>
+            <p:cNvSpPr txBox="1"/>
+            <p:nvPr/>
+          </p:nvSpPr>
+          <p:spPr>
+            <a:xfrm>
+              <a:off x="43693" y="4846387"/>
+              <a:ext cx="2202334" cy="369332"/>
+            </a:xfrm>
+            <a:prstGeom prst="rect">
+              <a:avLst/>
+            </a:prstGeom>
+            <a:noFill/>
+          </p:spPr>
+          <p:txBody>
+            <a:bodyPr wrap="none" rtlCol="0">
+              <a:spAutoFit/>
+            </a:bodyPr>
+            <a:lstStyle/>
+            <a:p>
+              <a:r>
+                <a:rPr lang="en-US" dirty="0"/>
+                <a:t>Is a fixed point of T</a:t>
+              </a:r>
+              <a:r>
+                <a:rPr lang="en-US" baseline="-25000" dirty="0"/>
+                <a:t>5</a:t>
+              </a:r>
+              <a:r>
+                <a:rPr lang="en-US" dirty="0"/>
+                <a:t>?</a:t>
+              </a:r>
+            </a:p>
+          </p:txBody>
+        </p:sp>
+        <p:grpSp>
+          <p:nvGrpSpPr>
+            <p:cNvPr id="83" name="Group 82">
+              <a:extLst>
+                <a:ext uri="{FF2B5EF4-FFF2-40B4-BE49-F238E27FC236}">
+                  <a16:creationId xmlns:a16="http://schemas.microsoft.com/office/drawing/2014/main" id="{293BC228-141A-73AE-2E66-30FAEF775D07}"/>
+                </a:ext>
+              </a:extLst>
+            </p:cNvPr>
+            <p:cNvGrpSpPr/>
+            <p:nvPr/>
+          </p:nvGrpSpPr>
+          <p:grpSpPr>
+            <a:xfrm>
+              <a:off x="-1330710" y="6858000"/>
+              <a:ext cx="1650380" cy="836342"/>
+              <a:chOff x="2364059" y="1226634"/>
+              <a:chExt cx="1650380" cy="836342"/>
+            </a:xfrm>
+          </p:grpSpPr>
+          <p:sp>
+            <p:nvSpPr>
+              <p:cNvPr id="84" name="Rounded Rectangle 83">
+                <a:extLst>
+                  <a:ext uri="{FF2B5EF4-FFF2-40B4-BE49-F238E27FC236}">
+                    <a16:creationId xmlns:a16="http://schemas.microsoft.com/office/drawing/2014/main" id="{AB5BC4E6-3B4E-D407-3C5D-59EF9AC07E03}"/>
+                  </a:ext>
+                </a:extLst>
+              </p:cNvPr>
+              <p:cNvSpPr/>
+              <p:nvPr/>
+            </p:nvSpPr>
+            <p:spPr>
+              <a:xfrm>
+                <a:off x="2364059" y="1226634"/>
+                <a:ext cx="1650380" cy="836342"/>
+              </a:xfrm>
+              <a:prstGeom prst="roundRect">
+                <a:avLst/>
+              </a:prstGeom>
+              <a:solidFill>
+                <a:schemeClr val="bg2"/>
+              </a:solidFill>
+              <a:ln w="22225"/>
+            </p:spPr>
+            <p:style>
+              <a:lnRef idx="2">
+                <a:schemeClr val="accent1">
+                  <a:shade val="15000"/>
+                </a:schemeClr>
+              </a:lnRef>
+              <a:fillRef idx="1">
+                <a:schemeClr val="accent1"/>
+              </a:fillRef>
+              <a:effectRef idx="0">
+                <a:schemeClr val="accent1"/>
+              </a:effectRef>
+              <a:fontRef idx="minor">
+                <a:schemeClr val="lt1"/>
+              </a:fontRef>
+            </p:style>
+            <p:txBody>
+              <a:bodyPr rtlCol="0" anchor="ctr"/>
+              <a:lstStyle/>
+              <a:p>
+                <a:pPr algn="ctr"/>
+                <a:endParaRPr lang="en-US"/>
+              </a:p>
+            </p:txBody>
+          </p:sp>
+          <p:sp>
+            <p:nvSpPr>
+              <p:cNvPr id="85" name="Oval 84">
+                <a:extLst>
+                  <a:ext uri="{FF2B5EF4-FFF2-40B4-BE49-F238E27FC236}">
+                    <a16:creationId xmlns:a16="http://schemas.microsoft.com/office/drawing/2014/main" id="{2185C35A-0AE1-0CFA-74DA-D40AFE42C3DD}"/>
+                  </a:ext>
+                </a:extLst>
+              </p:cNvPr>
+              <p:cNvSpPr/>
+              <p:nvPr/>
+            </p:nvSpPr>
+            <p:spPr>
+              <a:xfrm>
+                <a:off x="2486722" y="1321419"/>
+                <a:ext cx="267629" cy="267629"/>
+              </a:xfrm>
+              <a:prstGeom prst="ellipse">
+                <a:avLst/>
+              </a:prstGeom>
+              <a:solidFill>
+                <a:srgbClr val="FF0000"/>
+              </a:solidFill>
+              <a:ln w="22225"/>
+            </p:spPr>
+            <p:style>
+              <a:lnRef idx="2">
+                <a:schemeClr val="accent1">
+                  <a:shade val="15000"/>
+                </a:schemeClr>
+              </a:lnRef>
+              <a:fillRef idx="1">
+                <a:schemeClr val="accent1"/>
+              </a:fillRef>
+              <a:effectRef idx="0">
+                <a:schemeClr val="accent1"/>
+              </a:effectRef>
+              <a:fontRef idx="minor">
+                <a:schemeClr val="lt1"/>
+              </a:fontRef>
+            </p:style>
+            <p:txBody>
+              <a:bodyPr rtlCol="0" anchor="ctr"/>
+              <a:lstStyle/>
+              <a:p>
+                <a:pPr algn="ctr"/>
+                <a:endParaRPr lang="en-US"/>
+              </a:p>
+            </p:txBody>
+          </p:sp>
+          <p:sp>
+            <p:nvSpPr>
+              <p:cNvPr id="86" name="Oval 85">
+                <a:extLst>
+                  <a:ext uri="{FF2B5EF4-FFF2-40B4-BE49-F238E27FC236}">
+                    <a16:creationId xmlns:a16="http://schemas.microsoft.com/office/drawing/2014/main" id="{5865C5F1-E95B-7C8A-2D60-7D2FB92CFB11}"/>
+                  </a:ext>
+                </a:extLst>
+              </p:cNvPr>
+              <p:cNvSpPr/>
+              <p:nvPr/>
+            </p:nvSpPr>
+            <p:spPr>
+              <a:xfrm>
+                <a:off x="2486721" y="1678257"/>
+                <a:ext cx="267629" cy="267629"/>
+              </a:xfrm>
+              <a:prstGeom prst="ellipse">
+                <a:avLst/>
+              </a:prstGeom>
+              <a:solidFill>
+                <a:srgbClr val="FF0000"/>
+              </a:solidFill>
+              <a:ln w="22225"/>
+            </p:spPr>
+            <p:style>
+              <a:lnRef idx="2">
+                <a:schemeClr val="accent1">
+                  <a:shade val="15000"/>
+                </a:schemeClr>
+              </a:lnRef>
+              <a:fillRef idx="1">
+                <a:schemeClr val="accent1"/>
+              </a:fillRef>
+              <a:effectRef idx="0">
+                <a:schemeClr val="accent1"/>
+              </a:effectRef>
+              <a:fontRef idx="minor">
+                <a:schemeClr val="lt1"/>
+              </a:fontRef>
+            </p:style>
+            <p:txBody>
+              <a:bodyPr rtlCol="0" anchor="ctr"/>
+              <a:lstStyle/>
+              <a:p>
+                <a:pPr algn="ctr"/>
+                <a:endParaRPr lang="en-US"/>
+              </a:p>
+            </p:txBody>
+          </p:sp>
+          <p:sp>
+            <p:nvSpPr>
+              <p:cNvPr id="87" name="Oval 86">
+                <a:extLst>
+                  <a:ext uri="{FF2B5EF4-FFF2-40B4-BE49-F238E27FC236}">
+                    <a16:creationId xmlns:a16="http://schemas.microsoft.com/office/drawing/2014/main" id="{53EAE907-F7F3-8770-97CC-40192D9116A1}"/>
+                  </a:ext>
+                </a:extLst>
+              </p:cNvPr>
+              <p:cNvSpPr/>
+              <p:nvPr/>
+            </p:nvSpPr>
+            <p:spPr>
+              <a:xfrm>
+                <a:off x="2877013" y="1321419"/>
+                <a:ext cx="267629" cy="267629"/>
+              </a:xfrm>
+              <a:prstGeom prst="ellipse">
+                <a:avLst/>
+              </a:prstGeom>
+              <a:solidFill>
+                <a:srgbClr val="FF0000"/>
+              </a:solidFill>
+              <a:ln w="22225"/>
+            </p:spPr>
+            <p:style>
+              <a:lnRef idx="2">
+                <a:schemeClr val="accent1">
+                  <a:shade val="15000"/>
+                </a:schemeClr>
+              </a:lnRef>
+              <a:fillRef idx="1">
+                <a:schemeClr val="accent1"/>
+              </a:fillRef>
+              <a:effectRef idx="0">
+                <a:schemeClr val="accent1"/>
+              </a:effectRef>
+              <a:fontRef idx="minor">
+                <a:schemeClr val="lt1"/>
+              </a:fontRef>
+            </p:style>
+            <p:txBody>
+              <a:bodyPr rtlCol="0" anchor="ctr"/>
+              <a:lstStyle/>
+              <a:p>
+                <a:pPr algn="ctr"/>
+                <a:endParaRPr lang="en-US"/>
+              </a:p>
+            </p:txBody>
+          </p:sp>
+          <p:sp>
+            <p:nvSpPr>
+              <p:cNvPr id="88" name="Oval 87">
+                <a:extLst>
+                  <a:ext uri="{FF2B5EF4-FFF2-40B4-BE49-F238E27FC236}">
+                    <a16:creationId xmlns:a16="http://schemas.microsoft.com/office/drawing/2014/main" id="{2AA30F52-5C9C-C5C3-5A0A-6B71F71D2AC8}"/>
+                  </a:ext>
+                </a:extLst>
+              </p:cNvPr>
+              <p:cNvSpPr/>
+              <p:nvPr/>
+            </p:nvSpPr>
+            <p:spPr>
+              <a:xfrm>
+                <a:off x="2877012" y="1678257"/>
+                <a:ext cx="267629" cy="267629"/>
+              </a:xfrm>
+              <a:prstGeom prst="ellipse">
+                <a:avLst/>
+              </a:prstGeom>
+              <a:solidFill>
+                <a:srgbClr val="FF0000"/>
+              </a:solidFill>
+              <a:ln w="22225"/>
+            </p:spPr>
+            <p:style>
+              <a:lnRef idx="2">
+                <a:schemeClr val="accent1">
+                  <a:shade val="15000"/>
+                </a:schemeClr>
+              </a:lnRef>
+              <a:fillRef idx="1">
+                <a:schemeClr val="accent1"/>
+              </a:fillRef>
+              <a:effectRef idx="0">
+                <a:schemeClr val="accent1"/>
+              </a:effectRef>
+              <a:fontRef idx="minor">
+                <a:schemeClr val="lt1"/>
+              </a:fontRef>
+            </p:style>
+            <p:txBody>
+              <a:bodyPr rtlCol="0" anchor="ctr"/>
+              <a:lstStyle/>
+              <a:p>
+                <a:pPr algn="ctr"/>
+                <a:endParaRPr lang="en-US"/>
+              </a:p>
+            </p:txBody>
+          </p:sp>
+          <p:sp>
+            <p:nvSpPr>
+              <p:cNvPr id="89" name="Oval 88">
+                <a:extLst>
+                  <a:ext uri="{FF2B5EF4-FFF2-40B4-BE49-F238E27FC236}">
+                    <a16:creationId xmlns:a16="http://schemas.microsoft.com/office/drawing/2014/main" id="{3CFB4961-8CE1-4F64-065E-5E8893B69B1B}"/>
+                  </a:ext>
+                </a:extLst>
+              </p:cNvPr>
+              <p:cNvSpPr/>
+              <p:nvPr/>
+            </p:nvSpPr>
+            <p:spPr>
+              <a:xfrm>
+                <a:off x="3244999" y="1321419"/>
+                <a:ext cx="267629" cy="267629"/>
+              </a:xfrm>
+              <a:prstGeom prst="ellipse">
+                <a:avLst/>
+              </a:prstGeom>
+              <a:solidFill>
+                <a:srgbClr val="00B050"/>
+              </a:solidFill>
+              <a:ln w="22225"/>
+            </p:spPr>
+            <p:style>
+              <a:lnRef idx="2">
+                <a:schemeClr val="accent1">
+                  <a:shade val="15000"/>
+                </a:schemeClr>
+              </a:lnRef>
+              <a:fillRef idx="1">
+                <a:schemeClr val="accent1"/>
+              </a:fillRef>
+              <a:effectRef idx="0">
+                <a:schemeClr val="accent1"/>
+              </a:effectRef>
+              <a:fontRef idx="minor">
+                <a:schemeClr val="lt1"/>
+              </a:fontRef>
+            </p:style>
+            <p:txBody>
+              <a:bodyPr rtlCol="0" anchor="ctr"/>
+              <a:lstStyle/>
+              <a:p>
+                <a:pPr algn="ctr"/>
+                <a:endParaRPr lang="en-US"/>
+              </a:p>
+            </p:txBody>
+          </p:sp>
+          <p:sp>
+            <p:nvSpPr>
+              <p:cNvPr id="90" name="Oval 89">
+                <a:extLst>
+                  <a:ext uri="{FF2B5EF4-FFF2-40B4-BE49-F238E27FC236}">
+                    <a16:creationId xmlns:a16="http://schemas.microsoft.com/office/drawing/2014/main" id="{8BED503C-A4B6-12D0-0382-38257DF411F2}"/>
+                  </a:ext>
+                </a:extLst>
+              </p:cNvPr>
+              <p:cNvSpPr/>
+              <p:nvPr/>
+            </p:nvSpPr>
+            <p:spPr>
+              <a:xfrm>
+                <a:off x="3244998" y="1678257"/>
+                <a:ext cx="267629" cy="267629"/>
+              </a:xfrm>
+              <a:prstGeom prst="ellipse">
+                <a:avLst/>
+              </a:prstGeom>
+              <a:solidFill>
+                <a:srgbClr val="FF0000"/>
+              </a:solidFill>
+              <a:ln w="22225"/>
+            </p:spPr>
+            <p:style>
+              <a:lnRef idx="2">
+                <a:schemeClr val="accent1">
+                  <a:shade val="15000"/>
+                </a:schemeClr>
+              </a:lnRef>
+              <a:fillRef idx="1">
+                <a:schemeClr val="accent1"/>
+              </a:fillRef>
+              <a:effectRef idx="0">
+                <a:schemeClr val="accent1"/>
+              </a:effectRef>
+              <a:fontRef idx="minor">
+                <a:schemeClr val="lt1"/>
+              </a:fontRef>
+            </p:style>
+            <p:txBody>
+              <a:bodyPr rtlCol="0" anchor="ctr"/>
+              <a:lstStyle/>
+              <a:p>
+                <a:pPr algn="ctr"/>
+                <a:endParaRPr lang="en-US"/>
+              </a:p>
+            </p:txBody>
+          </p:sp>
+          <p:sp>
+            <p:nvSpPr>
+              <p:cNvPr id="91" name="Oval 90">
+                <a:extLst>
+                  <a:ext uri="{FF2B5EF4-FFF2-40B4-BE49-F238E27FC236}">
+                    <a16:creationId xmlns:a16="http://schemas.microsoft.com/office/drawing/2014/main" id="{1259E306-E248-E474-9000-07DEB21EECF8}"/>
+                  </a:ext>
+                </a:extLst>
+              </p:cNvPr>
+              <p:cNvSpPr/>
+              <p:nvPr/>
+            </p:nvSpPr>
+            <p:spPr>
+              <a:xfrm>
+                <a:off x="3612984" y="1516562"/>
+                <a:ext cx="267629" cy="267629"/>
+              </a:xfrm>
+              <a:prstGeom prst="ellipse">
+                <a:avLst/>
+              </a:prstGeom>
+              <a:solidFill>
+                <a:srgbClr val="FF0000"/>
+              </a:solidFill>
+              <a:ln w="22225"/>
+            </p:spPr>
+            <p:style>
+              <a:lnRef idx="2">
+                <a:schemeClr val="accent1">
+                  <a:shade val="15000"/>
+                </a:schemeClr>
+              </a:lnRef>
+              <a:fillRef idx="1">
+                <a:schemeClr val="accent1"/>
+              </a:fillRef>
+              <a:effectRef idx="0">
+                <a:schemeClr val="accent1"/>
+              </a:effectRef>
+              <a:fontRef idx="minor">
+                <a:schemeClr val="lt1"/>
+              </a:fontRef>
+            </p:style>
+            <p:txBody>
+              <a:bodyPr rtlCol="0" anchor="ctr"/>
+              <a:lstStyle/>
+              <a:p>
+                <a:pPr algn="ctr"/>
+                <a:endParaRPr lang="en-US"/>
+              </a:p>
+            </p:txBody>
+          </p:sp>
+        </p:grpSp>
+        <p:grpSp>
+          <p:nvGrpSpPr>
+            <p:cNvPr id="92" name="Group 91">
+              <a:extLst>
+                <a:ext uri="{FF2B5EF4-FFF2-40B4-BE49-F238E27FC236}">
+                  <a16:creationId xmlns:a16="http://schemas.microsoft.com/office/drawing/2014/main" id="{06BF3DD6-AF4C-ABF0-B65D-DE82FF4352C6}"/>
+                </a:ext>
+              </a:extLst>
+            </p:cNvPr>
+            <p:cNvGrpSpPr/>
+            <p:nvPr/>
+          </p:nvGrpSpPr>
+          <p:grpSpPr>
+            <a:xfrm>
+              <a:off x="1970050" y="6858000"/>
+              <a:ext cx="1650380" cy="836342"/>
+              <a:chOff x="2364059" y="1226634"/>
+              <a:chExt cx="1650380" cy="836342"/>
+            </a:xfrm>
+          </p:grpSpPr>
+          <p:sp>
+            <p:nvSpPr>
+              <p:cNvPr id="93" name="Rounded Rectangle 92">
+                <a:extLst>
+                  <a:ext uri="{FF2B5EF4-FFF2-40B4-BE49-F238E27FC236}">
+                    <a16:creationId xmlns:a16="http://schemas.microsoft.com/office/drawing/2014/main" id="{34DC2A8F-552B-47C0-B1A8-4CBB91CE3D1C}"/>
+                  </a:ext>
+                </a:extLst>
+              </p:cNvPr>
+              <p:cNvSpPr/>
+              <p:nvPr/>
+            </p:nvSpPr>
+            <p:spPr>
+              <a:xfrm>
+                <a:off x="2364059" y="1226634"/>
+                <a:ext cx="1650380" cy="836342"/>
+              </a:xfrm>
+              <a:prstGeom prst="roundRect">
+                <a:avLst/>
+              </a:prstGeom>
+              <a:solidFill>
+                <a:schemeClr val="bg2"/>
+              </a:solidFill>
+              <a:ln w="22225"/>
+            </p:spPr>
+            <p:style>
+              <a:lnRef idx="2">
+                <a:schemeClr val="accent1">
+                  <a:shade val="15000"/>
+                </a:schemeClr>
+              </a:lnRef>
+              <a:fillRef idx="1">
+                <a:schemeClr val="accent1"/>
+              </a:fillRef>
+              <a:effectRef idx="0">
+                <a:schemeClr val="accent1"/>
+              </a:effectRef>
+              <a:fontRef idx="minor">
+                <a:schemeClr val="lt1"/>
+              </a:fontRef>
+            </p:style>
+            <p:txBody>
+              <a:bodyPr rtlCol="0" anchor="ctr"/>
+              <a:lstStyle/>
+              <a:p>
+                <a:pPr algn="ctr"/>
+                <a:endParaRPr lang="en-US"/>
+              </a:p>
+            </p:txBody>
+          </p:sp>
+          <p:sp>
+            <p:nvSpPr>
+              <p:cNvPr id="94" name="Oval 93">
+                <a:extLst>
+                  <a:ext uri="{FF2B5EF4-FFF2-40B4-BE49-F238E27FC236}">
+                    <a16:creationId xmlns:a16="http://schemas.microsoft.com/office/drawing/2014/main" id="{408F394A-8AA7-B750-F33F-E2449A741AF2}"/>
+                  </a:ext>
+                </a:extLst>
+              </p:cNvPr>
+              <p:cNvSpPr/>
+              <p:nvPr/>
+            </p:nvSpPr>
+            <p:spPr>
+              <a:xfrm>
+                <a:off x="2486722" y="1321419"/>
+                <a:ext cx="267629" cy="267629"/>
+              </a:xfrm>
+              <a:prstGeom prst="ellipse">
+                <a:avLst/>
+              </a:prstGeom>
+              <a:solidFill>
+                <a:srgbClr val="FF0000"/>
+              </a:solidFill>
+              <a:ln w="22225"/>
+            </p:spPr>
+            <p:style>
+              <a:lnRef idx="2">
+                <a:schemeClr val="accent1">
+                  <a:shade val="15000"/>
+                </a:schemeClr>
+              </a:lnRef>
+              <a:fillRef idx="1">
+                <a:schemeClr val="accent1"/>
+              </a:fillRef>
+              <a:effectRef idx="0">
+                <a:schemeClr val="accent1"/>
+              </a:effectRef>
+              <a:fontRef idx="minor">
+                <a:schemeClr val="lt1"/>
+              </a:fontRef>
+            </p:style>
+            <p:txBody>
+              <a:bodyPr rtlCol="0" anchor="ctr"/>
+              <a:lstStyle/>
+              <a:p>
+                <a:pPr algn="ctr"/>
+                <a:endParaRPr lang="en-US"/>
+              </a:p>
+            </p:txBody>
+          </p:sp>
+          <p:sp>
+            <p:nvSpPr>
+              <p:cNvPr id="95" name="Oval 94">
+                <a:extLst>
+                  <a:ext uri="{FF2B5EF4-FFF2-40B4-BE49-F238E27FC236}">
+                    <a16:creationId xmlns:a16="http://schemas.microsoft.com/office/drawing/2014/main" id="{E7B0AEB7-ED62-F5DE-9856-533495FB43A7}"/>
+                  </a:ext>
+                </a:extLst>
+              </p:cNvPr>
+              <p:cNvSpPr/>
+              <p:nvPr/>
+            </p:nvSpPr>
+            <p:spPr>
+              <a:xfrm>
+                <a:off x="2486721" y="1678257"/>
+                <a:ext cx="267629" cy="267629"/>
+              </a:xfrm>
+              <a:prstGeom prst="ellipse">
+                <a:avLst/>
+              </a:prstGeom>
+              <a:solidFill>
+                <a:srgbClr val="FF0000"/>
+              </a:solidFill>
+              <a:ln w="22225"/>
+            </p:spPr>
+            <p:style>
+              <a:lnRef idx="2">
+                <a:schemeClr val="accent1">
+                  <a:shade val="15000"/>
+                </a:schemeClr>
+              </a:lnRef>
+              <a:fillRef idx="1">
+                <a:schemeClr val="accent1"/>
+              </a:fillRef>
+              <a:effectRef idx="0">
+                <a:schemeClr val="accent1"/>
+              </a:effectRef>
+              <a:fontRef idx="minor">
+                <a:schemeClr val="lt1"/>
+              </a:fontRef>
+            </p:style>
+            <p:txBody>
+              <a:bodyPr rtlCol="0" anchor="ctr"/>
+              <a:lstStyle/>
+              <a:p>
+                <a:pPr algn="ctr"/>
+                <a:endParaRPr lang="en-US"/>
+              </a:p>
+            </p:txBody>
+          </p:sp>
+          <p:sp>
+            <p:nvSpPr>
+              <p:cNvPr id="96" name="Oval 95">
+                <a:extLst>
+                  <a:ext uri="{FF2B5EF4-FFF2-40B4-BE49-F238E27FC236}">
+                    <a16:creationId xmlns:a16="http://schemas.microsoft.com/office/drawing/2014/main" id="{14B36456-1607-1699-5CB0-09C7A2BEBE1D}"/>
+                  </a:ext>
+                </a:extLst>
+              </p:cNvPr>
+              <p:cNvSpPr/>
+              <p:nvPr/>
+            </p:nvSpPr>
+            <p:spPr>
+              <a:xfrm>
+                <a:off x="2877013" y="1321419"/>
+                <a:ext cx="267629" cy="267629"/>
+              </a:xfrm>
+              <a:prstGeom prst="ellipse">
+                <a:avLst/>
+              </a:prstGeom>
+              <a:solidFill>
+                <a:srgbClr val="FF0000"/>
+              </a:solidFill>
+              <a:ln w="22225"/>
+            </p:spPr>
+            <p:style>
+              <a:lnRef idx="2">
+                <a:schemeClr val="accent1">
+                  <a:shade val="15000"/>
+                </a:schemeClr>
+              </a:lnRef>
+              <a:fillRef idx="1">
+                <a:schemeClr val="accent1"/>
+              </a:fillRef>
+              <a:effectRef idx="0">
+                <a:schemeClr val="accent1"/>
+              </a:effectRef>
+              <a:fontRef idx="minor">
+                <a:schemeClr val="lt1"/>
+              </a:fontRef>
+            </p:style>
+            <p:txBody>
+              <a:bodyPr rtlCol="0" anchor="ctr"/>
+              <a:lstStyle/>
+              <a:p>
+                <a:pPr algn="ctr"/>
+                <a:endParaRPr lang="en-US"/>
+              </a:p>
+            </p:txBody>
+          </p:sp>
+          <p:sp>
+            <p:nvSpPr>
+              <p:cNvPr id="97" name="Oval 96">
+                <a:extLst>
+                  <a:ext uri="{FF2B5EF4-FFF2-40B4-BE49-F238E27FC236}">
+                    <a16:creationId xmlns:a16="http://schemas.microsoft.com/office/drawing/2014/main" id="{D4E92594-50B8-5C3A-BDFE-3256872BA371}"/>
+                  </a:ext>
+                </a:extLst>
+              </p:cNvPr>
+              <p:cNvSpPr/>
+              <p:nvPr/>
+            </p:nvSpPr>
+            <p:spPr>
+              <a:xfrm>
+                <a:off x="2877012" y="1678257"/>
+                <a:ext cx="267629" cy="267629"/>
+              </a:xfrm>
+              <a:prstGeom prst="ellipse">
+                <a:avLst/>
+              </a:prstGeom>
+              <a:solidFill>
+                <a:schemeClr val="bg2"/>
+              </a:solidFill>
+              <a:ln w="22225"/>
+            </p:spPr>
+            <p:style>
+              <a:lnRef idx="2">
+                <a:schemeClr val="accent1">
+                  <a:shade val="15000"/>
+                </a:schemeClr>
+              </a:lnRef>
+              <a:fillRef idx="1">
+                <a:schemeClr val="accent1"/>
+              </a:fillRef>
+              <a:effectRef idx="0">
+                <a:schemeClr val="accent1"/>
+              </a:effectRef>
+              <a:fontRef idx="minor">
+                <a:schemeClr val="lt1"/>
+              </a:fontRef>
+            </p:style>
+            <p:txBody>
+              <a:bodyPr rtlCol="0" anchor="ctr"/>
+              <a:lstStyle/>
+              <a:p>
+                <a:pPr algn="ctr"/>
+                <a:endParaRPr lang="en-US"/>
+              </a:p>
+            </p:txBody>
+          </p:sp>
+          <p:sp>
+            <p:nvSpPr>
+              <p:cNvPr id="98" name="Oval 97">
+                <a:extLst>
+                  <a:ext uri="{FF2B5EF4-FFF2-40B4-BE49-F238E27FC236}">
+                    <a16:creationId xmlns:a16="http://schemas.microsoft.com/office/drawing/2014/main" id="{6368DF84-E589-AA24-7918-1EF76922798C}"/>
+                  </a:ext>
+                </a:extLst>
+              </p:cNvPr>
+              <p:cNvSpPr/>
+              <p:nvPr/>
+            </p:nvSpPr>
+            <p:spPr>
+              <a:xfrm>
+                <a:off x="3244999" y="1321419"/>
+                <a:ext cx="267629" cy="267629"/>
+              </a:xfrm>
+              <a:prstGeom prst="ellipse">
+                <a:avLst/>
+              </a:prstGeom>
+              <a:solidFill>
+                <a:srgbClr val="FF0000"/>
+              </a:solidFill>
+              <a:ln w="22225"/>
+            </p:spPr>
+            <p:style>
+              <a:lnRef idx="2">
+                <a:schemeClr val="accent1">
+                  <a:shade val="15000"/>
+                </a:schemeClr>
+              </a:lnRef>
+              <a:fillRef idx="1">
+                <a:schemeClr val="accent1"/>
+              </a:fillRef>
+              <a:effectRef idx="0">
+                <a:schemeClr val="accent1"/>
+              </a:effectRef>
+              <a:fontRef idx="minor">
+                <a:schemeClr val="lt1"/>
+              </a:fontRef>
+            </p:style>
+            <p:txBody>
+              <a:bodyPr rtlCol="0" anchor="ctr"/>
+              <a:lstStyle/>
+              <a:p>
+                <a:pPr algn="ctr"/>
+                <a:endParaRPr lang="en-US"/>
+              </a:p>
+            </p:txBody>
+          </p:sp>
+          <p:sp>
+            <p:nvSpPr>
+              <p:cNvPr id="99" name="Oval 98">
+                <a:extLst>
+                  <a:ext uri="{FF2B5EF4-FFF2-40B4-BE49-F238E27FC236}">
+                    <a16:creationId xmlns:a16="http://schemas.microsoft.com/office/drawing/2014/main" id="{F28301AA-000B-DA03-5317-C82E2E14B440}"/>
+                  </a:ext>
+                </a:extLst>
+              </p:cNvPr>
+              <p:cNvSpPr/>
+              <p:nvPr/>
+            </p:nvSpPr>
+            <p:spPr>
+              <a:xfrm>
+                <a:off x="3244998" y="1678257"/>
+                <a:ext cx="267629" cy="267629"/>
+              </a:xfrm>
+              <a:prstGeom prst="ellipse">
+                <a:avLst/>
+              </a:prstGeom>
+              <a:solidFill>
+                <a:schemeClr val="bg2"/>
+              </a:solidFill>
+              <a:ln w="22225"/>
+            </p:spPr>
+            <p:style>
+              <a:lnRef idx="2">
+                <a:schemeClr val="accent1">
+                  <a:shade val="15000"/>
+                </a:schemeClr>
+              </a:lnRef>
+              <a:fillRef idx="1">
+                <a:schemeClr val="accent1"/>
+              </a:fillRef>
+              <a:effectRef idx="0">
+                <a:schemeClr val="accent1"/>
+              </a:effectRef>
+              <a:fontRef idx="minor">
+                <a:schemeClr val="lt1"/>
+              </a:fontRef>
+            </p:style>
+            <p:txBody>
+              <a:bodyPr rtlCol="0" anchor="ctr"/>
+              <a:lstStyle/>
+              <a:p>
+                <a:pPr algn="ctr"/>
+                <a:endParaRPr lang="en-US"/>
+              </a:p>
+            </p:txBody>
+          </p:sp>
+          <p:sp>
+            <p:nvSpPr>
+              <p:cNvPr id="100" name="Oval 99">
+                <a:extLst>
+                  <a:ext uri="{FF2B5EF4-FFF2-40B4-BE49-F238E27FC236}">
+                    <a16:creationId xmlns:a16="http://schemas.microsoft.com/office/drawing/2014/main" id="{A33A9695-DA44-95F4-E013-64E89F15035F}"/>
+                  </a:ext>
+                </a:extLst>
+              </p:cNvPr>
+              <p:cNvSpPr/>
+              <p:nvPr/>
+            </p:nvSpPr>
+            <p:spPr>
+              <a:xfrm>
+                <a:off x="3612984" y="1516562"/>
+                <a:ext cx="267629" cy="267629"/>
+              </a:xfrm>
+              <a:prstGeom prst="ellipse">
+                <a:avLst/>
+              </a:prstGeom>
+              <a:solidFill>
+                <a:srgbClr val="FF0000"/>
+              </a:solidFill>
+              <a:ln w="22225"/>
+            </p:spPr>
+            <p:style>
+              <a:lnRef idx="2">
+                <a:schemeClr val="accent1">
+                  <a:shade val="15000"/>
+                </a:schemeClr>
+              </a:lnRef>
+              <a:fillRef idx="1">
+                <a:schemeClr val="accent1"/>
+              </a:fillRef>
+              <a:effectRef idx="0">
+                <a:schemeClr val="accent1"/>
+              </a:effectRef>
+              <a:fontRef idx="minor">
+                <a:schemeClr val="lt1"/>
+              </a:fontRef>
+            </p:style>
+            <p:txBody>
+              <a:bodyPr rtlCol="0" anchor="ctr"/>
+              <a:lstStyle/>
+              <a:p>
+                <a:pPr algn="ctr"/>
+                <a:endParaRPr lang="en-US"/>
+              </a:p>
+            </p:txBody>
+          </p:sp>
+        </p:grpSp>
+        <p:grpSp>
+          <p:nvGrpSpPr>
+            <p:cNvPr id="101" name="Group 100">
+              <a:extLst>
+                <a:ext uri="{FF2B5EF4-FFF2-40B4-BE49-F238E27FC236}">
+                  <a16:creationId xmlns:a16="http://schemas.microsoft.com/office/drawing/2014/main" id="{0125B954-EF80-7AB2-AD21-D569B38D138C}"/>
+                </a:ext>
+              </a:extLst>
+            </p:cNvPr>
+            <p:cNvGrpSpPr/>
+            <p:nvPr/>
+          </p:nvGrpSpPr>
+          <p:grpSpPr>
+            <a:xfrm>
+              <a:off x="8571570" y="6858000"/>
+              <a:ext cx="1650380" cy="836342"/>
+              <a:chOff x="2364059" y="1226634"/>
+              <a:chExt cx="1650380" cy="836342"/>
+            </a:xfrm>
+          </p:grpSpPr>
+          <p:sp>
+            <p:nvSpPr>
+              <p:cNvPr id="102" name="Rounded Rectangle 101">
+                <a:extLst>
+                  <a:ext uri="{FF2B5EF4-FFF2-40B4-BE49-F238E27FC236}">
+                    <a16:creationId xmlns:a16="http://schemas.microsoft.com/office/drawing/2014/main" id="{87EB1A0E-2661-BEC0-A541-D211C89A36EE}"/>
+                  </a:ext>
+                </a:extLst>
+              </p:cNvPr>
+              <p:cNvSpPr/>
+              <p:nvPr/>
+            </p:nvSpPr>
+            <p:spPr>
+              <a:xfrm>
+                <a:off x="2364059" y="1226634"/>
+                <a:ext cx="1650380" cy="836342"/>
+              </a:xfrm>
+              <a:prstGeom prst="roundRect">
+                <a:avLst/>
+              </a:prstGeom>
+              <a:solidFill>
+                <a:schemeClr val="bg2"/>
+              </a:solidFill>
+              <a:ln w="22225"/>
+            </p:spPr>
+            <p:style>
+              <a:lnRef idx="2">
+                <a:schemeClr val="accent1">
+                  <a:shade val="15000"/>
+                </a:schemeClr>
+              </a:lnRef>
+              <a:fillRef idx="1">
+                <a:schemeClr val="accent1"/>
+              </a:fillRef>
+              <a:effectRef idx="0">
+                <a:schemeClr val="accent1"/>
+              </a:effectRef>
+              <a:fontRef idx="minor">
+                <a:schemeClr val="lt1"/>
+              </a:fontRef>
+            </p:style>
+            <p:txBody>
+              <a:bodyPr rtlCol="0" anchor="ctr"/>
+              <a:lstStyle/>
+              <a:p>
+                <a:pPr algn="ctr"/>
+                <a:endParaRPr lang="en-US"/>
+              </a:p>
+            </p:txBody>
+          </p:sp>
+          <p:sp>
+            <p:nvSpPr>
+              <p:cNvPr id="103" name="Oval 102">
+                <a:extLst>
+                  <a:ext uri="{FF2B5EF4-FFF2-40B4-BE49-F238E27FC236}">
+                    <a16:creationId xmlns:a16="http://schemas.microsoft.com/office/drawing/2014/main" id="{990E5CDF-3F94-E8E9-367C-A4E2809E2BF4}"/>
+                  </a:ext>
+                </a:extLst>
+              </p:cNvPr>
+              <p:cNvSpPr/>
+              <p:nvPr/>
+            </p:nvSpPr>
+            <p:spPr>
+              <a:xfrm>
+                <a:off x="2486722" y="1321419"/>
+                <a:ext cx="267629" cy="267629"/>
+              </a:xfrm>
+              <a:prstGeom prst="ellipse">
+                <a:avLst/>
+              </a:prstGeom>
+              <a:solidFill>
+                <a:srgbClr val="00B050"/>
+              </a:solidFill>
+              <a:ln w="22225"/>
+            </p:spPr>
+            <p:style>
+              <a:lnRef idx="2">
+                <a:schemeClr val="accent1">
+                  <a:shade val="15000"/>
+                </a:schemeClr>
+              </a:lnRef>
+              <a:fillRef idx="1">
+                <a:schemeClr val="accent1"/>
+              </a:fillRef>
+              <a:effectRef idx="0">
+                <a:schemeClr val="accent1"/>
+              </a:effectRef>
+              <a:fontRef idx="minor">
+                <a:schemeClr val="lt1"/>
+              </a:fontRef>
+            </p:style>
+            <p:txBody>
+              <a:bodyPr rtlCol="0" anchor="ctr"/>
+              <a:lstStyle/>
+              <a:p>
+                <a:pPr algn="ctr"/>
+                <a:endParaRPr lang="en-US"/>
+              </a:p>
+            </p:txBody>
+          </p:sp>
+          <p:sp>
+            <p:nvSpPr>
+              <p:cNvPr id="104" name="Oval 103">
+                <a:extLst>
+                  <a:ext uri="{FF2B5EF4-FFF2-40B4-BE49-F238E27FC236}">
+                    <a16:creationId xmlns:a16="http://schemas.microsoft.com/office/drawing/2014/main" id="{64FA3C91-9D29-8AA0-86AC-6B415AE7F826}"/>
+                  </a:ext>
+                </a:extLst>
+              </p:cNvPr>
+              <p:cNvSpPr/>
+              <p:nvPr/>
+            </p:nvSpPr>
+            <p:spPr>
+              <a:xfrm>
+                <a:off x="2486721" y="1678257"/>
+                <a:ext cx="267629" cy="267629"/>
+              </a:xfrm>
+              <a:prstGeom prst="ellipse">
+                <a:avLst/>
+              </a:prstGeom>
+              <a:solidFill>
+                <a:srgbClr val="00B050"/>
+              </a:solidFill>
+              <a:ln w="22225"/>
+            </p:spPr>
+            <p:style>
+              <a:lnRef idx="2">
+                <a:schemeClr val="accent1">
+                  <a:shade val="15000"/>
+                </a:schemeClr>
+              </a:lnRef>
+              <a:fillRef idx="1">
+                <a:schemeClr val="accent1"/>
+              </a:fillRef>
+              <a:effectRef idx="0">
+                <a:schemeClr val="accent1"/>
+              </a:effectRef>
+              <a:fontRef idx="minor">
+                <a:schemeClr val="lt1"/>
+              </a:fontRef>
+            </p:style>
+            <p:txBody>
+              <a:bodyPr rtlCol="0" anchor="ctr"/>
+              <a:lstStyle/>
+              <a:p>
+                <a:pPr algn="ctr"/>
+                <a:endParaRPr lang="en-US"/>
+              </a:p>
+            </p:txBody>
+          </p:sp>
+          <p:sp>
+            <p:nvSpPr>
+              <p:cNvPr id="105" name="Oval 104">
+                <a:extLst>
+                  <a:ext uri="{FF2B5EF4-FFF2-40B4-BE49-F238E27FC236}">
+                    <a16:creationId xmlns:a16="http://schemas.microsoft.com/office/drawing/2014/main" id="{B461CBD3-C17E-EDC4-4C6B-14288B5BB737}"/>
+                  </a:ext>
+                </a:extLst>
+              </p:cNvPr>
+              <p:cNvSpPr/>
+              <p:nvPr/>
+            </p:nvSpPr>
+            <p:spPr>
+              <a:xfrm>
+                <a:off x="2877013" y="1321419"/>
+                <a:ext cx="267629" cy="267629"/>
+              </a:xfrm>
+              <a:prstGeom prst="ellipse">
+                <a:avLst/>
+              </a:prstGeom>
+              <a:solidFill>
+                <a:srgbClr val="00B050"/>
+              </a:solidFill>
+              <a:ln w="22225"/>
+            </p:spPr>
+            <p:style>
+              <a:lnRef idx="2">
+                <a:schemeClr val="accent1">
+                  <a:shade val="15000"/>
+                </a:schemeClr>
+              </a:lnRef>
+              <a:fillRef idx="1">
+                <a:schemeClr val="accent1"/>
+              </a:fillRef>
+              <a:effectRef idx="0">
+                <a:schemeClr val="accent1"/>
+              </a:effectRef>
+              <a:fontRef idx="minor">
+                <a:schemeClr val="lt1"/>
+              </a:fontRef>
+            </p:style>
+            <p:txBody>
+              <a:bodyPr rtlCol="0" anchor="ctr"/>
+              <a:lstStyle/>
+              <a:p>
+                <a:pPr algn="ctr"/>
+                <a:endParaRPr lang="en-US"/>
+              </a:p>
+            </p:txBody>
+          </p:sp>
+          <p:sp>
+            <p:nvSpPr>
+              <p:cNvPr id="106" name="Oval 105">
+                <a:extLst>
+                  <a:ext uri="{FF2B5EF4-FFF2-40B4-BE49-F238E27FC236}">
+                    <a16:creationId xmlns:a16="http://schemas.microsoft.com/office/drawing/2014/main" id="{77CF1FB9-2836-2902-C447-A1A0746EDD0C}"/>
+                  </a:ext>
+                </a:extLst>
+              </p:cNvPr>
+              <p:cNvSpPr/>
+              <p:nvPr/>
+            </p:nvSpPr>
+            <p:spPr>
+              <a:xfrm>
+                <a:off x="2877012" y="1678257"/>
+                <a:ext cx="267629" cy="267629"/>
+              </a:xfrm>
+              <a:prstGeom prst="ellipse">
+                <a:avLst/>
+              </a:prstGeom>
+              <a:solidFill>
+                <a:srgbClr val="00B050"/>
+              </a:solidFill>
+              <a:ln w="22225"/>
+            </p:spPr>
+            <p:style>
+              <a:lnRef idx="2">
+                <a:schemeClr val="accent1">
+                  <a:shade val="15000"/>
+                </a:schemeClr>
+              </a:lnRef>
+              <a:fillRef idx="1">
+                <a:schemeClr val="accent1"/>
+              </a:fillRef>
+              <a:effectRef idx="0">
+                <a:schemeClr val="accent1"/>
+              </a:effectRef>
+              <a:fontRef idx="minor">
+                <a:schemeClr val="lt1"/>
+              </a:fontRef>
+            </p:style>
+            <p:txBody>
+              <a:bodyPr rtlCol="0" anchor="ctr"/>
+              <a:lstStyle/>
+              <a:p>
+                <a:pPr algn="ctr"/>
+                <a:endParaRPr lang="en-US"/>
+              </a:p>
+            </p:txBody>
+          </p:sp>
+          <p:sp>
+            <p:nvSpPr>
+              <p:cNvPr id="107" name="Oval 106">
+                <a:extLst>
+                  <a:ext uri="{FF2B5EF4-FFF2-40B4-BE49-F238E27FC236}">
+                    <a16:creationId xmlns:a16="http://schemas.microsoft.com/office/drawing/2014/main" id="{5F9761AC-BFCF-F4FF-0B8D-3A55A645BFF8}"/>
+                  </a:ext>
+                </a:extLst>
+              </p:cNvPr>
+              <p:cNvSpPr/>
+              <p:nvPr/>
+            </p:nvSpPr>
+            <p:spPr>
+              <a:xfrm>
+                <a:off x="3244999" y="1321419"/>
+                <a:ext cx="267629" cy="267629"/>
+              </a:xfrm>
+              <a:prstGeom prst="ellipse">
+                <a:avLst/>
+              </a:prstGeom>
+              <a:solidFill>
+                <a:srgbClr val="00B050"/>
+              </a:solidFill>
+              <a:ln w="22225"/>
+            </p:spPr>
+            <p:style>
+              <a:lnRef idx="2">
+                <a:schemeClr val="accent1">
+                  <a:shade val="15000"/>
+                </a:schemeClr>
+              </a:lnRef>
+              <a:fillRef idx="1">
+                <a:schemeClr val="accent1"/>
+              </a:fillRef>
+              <a:effectRef idx="0">
+                <a:schemeClr val="accent1"/>
+              </a:effectRef>
+              <a:fontRef idx="minor">
+                <a:schemeClr val="lt1"/>
+              </a:fontRef>
+            </p:style>
+            <p:txBody>
+              <a:bodyPr rtlCol="0" anchor="ctr"/>
+              <a:lstStyle/>
+              <a:p>
+                <a:pPr algn="ctr"/>
+                <a:endParaRPr lang="en-US"/>
+              </a:p>
+            </p:txBody>
+          </p:sp>
+          <p:sp>
+            <p:nvSpPr>
+              <p:cNvPr id="108" name="Oval 107">
+                <a:extLst>
+                  <a:ext uri="{FF2B5EF4-FFF2-40B4-BE49-F238E27FC236}">
+                    <a16:creationId xmlns:a16="http://schemas.microsoft.com/office/drawing/2014/main" id="{AD862EDD-BBFB-19F8-E033-E22BD05D8AB7}"/>
+                  </a:ext>
+                </a:extLst>
+              </p:cNvPr>
+              <p:cNvSpPr/>
+              <p:nvPr/>
+            </p:nvSpPr>
+            <p:spPr>
+              <a:xfrm>
+                <a:off x="3244998" y="1678257"/>
+                <a:ext cx="267629" cy="267629"/>
+              </a:xfrm>
+              <a:prstGeom prst="ellipse">
+                <a:avLst/>
+              </a:prstGeom>
+              <a:solidFill>
+                <a:srgbClr val="00B050"/>
+              </a:solidFill>
+              <a:ln w="22225"/>
+            </p:spPr>
+            <p:style>
+              <a:lnRef idx="2">
+                <a:schemeClr val="accent1">
+                  <a:shade val="15000"/>
+                </a:schemeClr>
+              </a:lnRef>
+              <a:fillRef idx="1">
+                <a:schemeClr val="accent1"/>
+              </a:fillRef>
+              <a:effectRef idx="0">
+                <a:schemeClr val="accent1"/>
+              </a:effectRef>
+              <a:fontRef idx="minor">
+                <a:schemeClr val="lt1"/>
+              </a:fontRef>
+            </p:style>
+            <p:txBody>
+              <a:bodyPr rtlCol="0" anchor="ctr"/>
+              <a:lstStyle/>
+              <a:p>
+                <a:pPr algn="ctr"/>
+                <a:endParaRPr lang="en-US"/>
+              </a:p>
+            </p:txBody>
+          </p:sp>
+          <p:sp>
+            <p:nvSpPr>
+              <p:cNvPr id="109" name="Oval 108">
+                <a:extLst>
+                  <a:ext uri="{FF2B5EF4-FFF2-40B4-BE49-F238E27FC236}">
+                    <a16:creationId xmlns:a16="http://schemas.microsoft.com/office/drawing/2014/main" id="{BA02EA3B-D3DC-DED4-E42A-81F3547C16E6}"/>
+                  </a:ext>
+                </a:extLst>
+              </p:cNvPr>
+              <p:cNvSpPr/>
+              <p:nvPr/>
+            </p:nvSpPr>
+            <p:spPr>
+              <a:xfrm>
+                <a:off x="3612984" y="1516562"/>
+                <a:ext cx="267629" cy="267629"/>
+              </a:xfrm>
+              <a:prstGeom prst="ellipse">
+                <a:avLst/>
+              </a:prstGeom>
+              <a:solidFill>
+                <a:srgbClr val="00B050"/>
+              </a:solidFill>
+              <a:ln w="22225"/>
+            </p:spPr>
+            <p:style>
+              <a:lnRef idx="2">
+                <a:schemeClr val="accent1">
+                  <a:shade val="15000"/>
+                </a:schemeClr>
+              </a:lnRef>
+              <a:fillRef idx="1">
+                <a:schemeClr val="accent1"/>
+              </a:fillRef>
+              <a:effectRef idx="0">
+                <a:schemeClr val="accent1"/>
+              </a:effectRef>
+              <a:fontRef idx="minor">
+                <a:schemeClr val="lt1"/>
+              </a:fontRef>
+            </p:style>
+            <p:txBody>
+              <a:bodyPr rtlCol="0" anchor="ctr"/>
+              <a:lstStyle/>
+              <a:p>
+                <a:pPr algn="ctr"/>
+                <a:endParaRPr lang="en-US"/>
+              </a:p>
+            </p:txBody>
+          </p:sp>
+        </p:grpSp>
+        <p:grpSp>
+          <p:nvGrpSpPr>
+            <p:cNvPr id="110" name="Group 109">
+              <a:extLst>
+                <a:ext uri="{FF2B5EF4-FFF2-40B4-BE49-F238E27FC236}">
+                  <a16:creationId xmlns:a16="http://schemas.microsoft.com/office/drawing/2014/main" id="{61F392B9-51F6-03B0-CABB-F8D5F62487B1}"/>
+                </a:ext>
+              </a:extLst>
+            </p:cNvPr>
+            <p:cNvGrpSpPr/>
+            <p:nvPr/>
+          </p:nvGrpSpPr>
+          <p:grpSpPr>
+            <a:xfrm>
+              <a:off x="11872330" y="6858000"/>
+              <a:ext cx="1650380" cy="836342"/>
+              <a:chOff x="2364059" y="1226634"/>
+              <a:chExt cx="1650380" cy="836342"/>
+            </a:xfrm>
+          </p:grpSpPr>
+          <p:sp>
+            <p:nvSpPr>
+              <p:cNvPr id="111" name="Rounded Rectangle 110">
+                <a:extLst>
+                  <a:ext uri="{FF2B5EF4-FFF2-40B4-BE49-F238E27FC236}">
+                    <a16:creationId xmlns:a16="http://schemas.microsoft.com/office/drawing/2014/main" id="{1C6777B5-9490-03C0-D0DB-D90B16757051}"/>
+                  </a:ext>
+                </a:extLst>
+              </p:cNvPr>
+              <p:cNvSpPr/>
+              <p:nvPr/>
+            </p:nvSpPr>
+            <p:spPr>
+              <a:xfrm>
+                <a:off x="2364059" y="1226634"/>
+                <a:ext cx="1650380" cy="836342"/>
+              </a:xfrm>
+              <a:prstGeom prst="roundRect">
+                <a:avLst/>
+              </a:prstGeom>
+              <a:solidFill>
+                <a:schemeClr val="bg2"/>
+              </a:solidFill>
+              <a:ln w="22225"/>
+            </p:spPr>
+            <p:style>
+              <a:lnRef idx="2">
+                <a:schemeClr val="accent1">
+                  <a:shade val="15000"/>
+                </a:schemeClr>
+              </a:lnRef>
+              <a:fillRef idx="1">
+                <a:schemeClr val="accent1"/>
+              </a:fillRef>
+              <a:effectRef idx="0">
+                <a:schemeClr val="accent1"/>
+              </a:effectRef>
+              <a:fontRef idx="minor">
+                <a:schemeClr val="lt1"/>
+              </a:fontRef>
+            </p:style>
+            <p:txBody>
+              <a:bodyPr rtlCol="0" anchor="ctr"/>
+              <a:lstStyle/>
+              <a:p>
+                <a:pPr algn="ctr"/>
+                <a:endParaRPr lang="en-US"/>
+              </a:p>
+            </p:txBody>
+          </p:sp>
+          <p:sp>
+            <p:nvSpPr>
+              <p:cNvPr id="112" name="Oval 111">
+                <a:extLst>
+                  <a:ext uri="{FF2B5EF4-FFF2-40B4-BE49-F238E27FC236}">
+                    <a16:creationId xmlns:a16="http://schemas.microsoft.com/office/drawing/2014/main" id="{94D128E1-E3C2-9A39-1CD7-A857682C6F9D}"/>
+                  </a:ext>
+                </a:extLst>
+              </p:cNvPr>
+              <p:cNvSpPr/>
+              <p:nvPr/>
+            </p:nvSpPr>
+            <p:spPr>
+              <a:xfrm>
+                <a:off x="2486722" y="1321419"/>
+                <a:ext cx="267629" cy="267629"/>
+              </a:xfrm>
+              <a:prstGeom prst="ellipse">
+                <a:avLst/>
+              </a:prstGeom>
+              <a:solidFill>
+                <a:srgbClr val="00B050"/>
+              </a:solidFill>
+              <a:ln w="22225"/>
+            </p:spPr>
+            <p:style>
+              <a:lnRef idx="2">
+                <a:schemeClr val="accent1">
+                  <a:shade val="15000"/>
+                </a:schemeClr>
+              </a:lnRef>
+              <a:fillRef idx="1">
+                <a:schemeClr val="accent1"/>
+              </a:fillRef>
+              <a:effectRef idx="0">
+                <a:schemeClr val="accent1"/>
+              </a:effectRef>
+              <a:fontRef idx="minor">
+                <a:schemeClr val="lt1"/>
+              </a:fontRef>
+            </p:style>
+            <p:txBody>
+              <a:bodyPr rtlCol="0" anchor="ctr"/>
+              <a:lstStyle/>
+              <a:p>
+                <a:pPr algn="ctr"/>
+                <a:endParaRPr lang="en-US"/>
+              </a:p>
+            </p:txBody>
+          </p:sp>
+          <p:sp>
+            <p:nvSpPr>
+              <p:cNvPr id="113" name="Oval 112">
+                <a:extLst>
+                  <a:ext uri="{FF2B5EF4-FFF2-40B4-BE49-F238E27FC236}">
+                    <a16:creationId xmlns:a16="http://schemas.microsoft.com/office/drawing/2014/main" id="{C8714773-F2DD-4B9E-A4B1-E0BE82DDA31F}"/>
+                  </a:ext>
+                </a:extLst>
+              </p:cNvPr>
+              <p:cNvSpPr/>
+              <p:nvPr/>
+            </p:nvSpPr>
+            <p:spPr>
+              <a:xfrm>
+                <a:off x="2486721" y="1678257"/>
+                <a:ext cx="267629" cy="267629"/>
+              </a:xfrm>
+              <a:prstGeom prst="ellipse">
+                <a:avLst/>
+              </a:prstGeom>
+              <a:solidFill>
+                <a:srgbClr val="00B050"/>
+              </a:solidFill>
+              <a:ln w="22225"/>
+            </p:spPr>
+            <p:style>
+              <a:lnRef idx="2">
+                <a:schemeClr val="accent1">
+                  <a:shade val="15000"/>
+                </a:schemeClr>
+              </a:lnRef>
+              <a:fillRef idx="1">
+                <a:schemeClr val="accent1"/>
+              </a:fillRef>
+              <a:effectRef idx="0">
+                <a:schemeClr val="accent1"/>
+              </a:effectRef>
+              <a:fontRef idx="minor">
+                <a:schemeClr val="lt1"/>
+              </a:fontRef>
+            </p:style>
+            <p:txBody>
+              <a:bodyPr rtlCol="0" anchor="ctr"/>
+              <a:lstStyle/>
+              <a:p>
+                <a:pPr algn="ctr"/>
+                <a:endParaRPr lang="en-US"/>
+              </a:p>
+            </p:txBody>
+          </p:sp>
+          <p:sp>
+            <p:nvSpPr>
+              <p:cNvPr id="114" name="Oval 113">
+                <a:extLst>
+                  <a:ext uri="{FF2B5EF4-FFF2-40B4-BE49-F238E27FC236}">
+                    <a16:creationId xmlns:a16="http://schemas.microsoft.com/office/drawing/2014/main" id="{2AC21F91-52BE-39D8-5C92-CD9BAC398235}"/>
+                  </a:ext>
+                </a:extLst>
+              </p:cNvPr>
+              <p:cNvSpPr/>
+              <p:nvPr/>
+            </p:nvSpPr>
+            <p:spPr>
+              <a:xfrm>
+                <a:off x="2877013" y="1321419"/>
+                <a:ext cx="267629" cy="267629"/>
+              </a:xfrm>
+              <a:prstGeom prst="ellipse">
+                <a:avLst/>
+              </a:prstGeom>
+              <a:solidFill>
+                <a:srgbClr val="00B050"/>
+              </a:solidFill>
+              <a:ln w="22225"/>
+            </p:spPr>
+            <p:style>
+              <a:lnRef idx="2">
+                <a:schemeClr val="accent1">
+                  <a:shade val="15000"/>
+                </a:schemeClr>
+              </a:lnRef>
+              <a:fillRef idx="1">
+                <a:schemeClr val="accent1"/>
+              </a:fillRef>
+              <a:effectRef idx="0">
+                <a:schemeClr val="accent1"/>
+              </a:effectRef>
+              <a:fontRef idx="minor">
+                <a:schemeClr val="lt1"/>
+              </a:fontRef>
+            </p:style>
+            <p:txBody>
+              <a:bodyPr rtlCol="0" anchor="ctr"/>
+              <a:lstStyle/>
+              <a:p>
+                <a:pPr algn="ctr"/>
+                <a:endParaRPr lang="en-US"/>
+              </a:p>
+            </p:txBody>
+          </p:sp>
+          <p:sp>
+            <p:nvSpPr>
+              <p:cNvPr id="115" name="Oval 114">
+                <a:extLst>
+                  <a:ext uri="{FF2B5EF4-FFF2-40B4-BE49-F238E27FC236}">
+                    <a16:creationId xmlns:a16="http://schemas.microsoft.com/office/drawing/2014/main" id="{62A912A5-7EA1-218C-8930-6EBE8511BF7D}"/>
+                  </a:ext>
+                </a:extLst>
+              </p:cNvPr>
+              <p:cNvSpPr/>
+              <p:nvPr/>
+            </p:nvSpPr>
+            <p:spPr>
+              <a:xfrm>
+                <a:off x="2877012" y="1678257"/>
+                <a:ext cx="267629" cy="267629"/>
+              </a:xfrm>
+              <a:prstGeom prst="ellipse">
+                <a:avLst/>
+              </a:prstGeom>
+              <a:solidFill>
+                <a:srgbClr val="FF0000"/>
+              </a:solidFill>
+              <a:ln w="22225"/>
+            </p:spPr>
+            <p:style>
+              <a:lnRef idx="2">
+                <a:schemeClr val="accent1">
+                  <a:shade val="15000"/>
+                </a:schemeClr>
+              </a:lnRef>
+              <a:fillRef idx="1">
+                <a:schemeClr val="accent1"/>
+              </a:fillRef>
+              <a:effectRef idx="0">
+                <a:schemeClr val="accent1"/>
+              </a:effectRef>
+              <a:fontRef idx="minor">
+                <a:schemeClr val="lt1"/>
+              </a:fontRef>
+            </p:style>
+            <p:txBody>
+              <a:bodyPr rtlCol="0" anchor="ctr"/>
+              <a:lstStyle/>
+              <a:p>
+                <a:pPr algn="ctr"/>
+                <a:endParaRPr lang="en-US"/>
+              </a:p>
+            </p:txBody>
+          </p:sp>
+          <p:sp>
+            <p:nvSpPr>
+              <p:cNvPr id="116" name="Oval 115">
+                <a:extLst>
+                  <a:ext uri="{FF2B5EF4-FFF2-40B4-BE49-F238E27FC236}">
+                    <a16:creationId xmlns:a16="http://schemas.microsoft.com/office/drawing/2014/main" id="{EE6F518F-86DE-1ED6-34AE-5C7F9A1FBDA7}"/>
+                  </a:ext>
+                </a:extLst>
+              </p:cNvPr>
+              <p:cNvSpPr/>
+              <p:nvPr/>
+            </p:nvSpPr>
+            <p:spPr>
+              <a:xfrm>
+                <a:off x="3244999" y="1321419"/>
+                <a:ext cx="267629" cy="267629"/>
+              </a:xfrm>
+              <a:prstGeom prst="ellipse">
+                <a:avLst/>
+              </a:prstGeom>
+              <a:solidFill>
+                <a:srgbClr val="FF0000"/>
+              </a:solidFill>
+              <a:ln w="22225"/>
+            </p:spPr>
+            <p:style>
+              <a:lnRef idx="2">
+                <a:schemeClr val="accent1">
+                  <a:shade val="15000"/>
+                </a:schemeClr>
+              </a:lnRef>
+              <a:fillRef idx="1">
+                <a:schemeClr val="accent1"/>
+              </a:fillRef>
+              <a:effectRef idx="0">
+                <a:schemeClr val="accent1"/>
+              </a:effectRef>
+              <a:fontRef idx="minor">
+                <a:schemeClr val="lt1"/>
+              </a:fontRef>
+            </p:style>
+            <p:txBody>
+              <a:bodyPr rtlCol="0" anchor="ctr"/>
+              <a:lstStyle/>
+              <a:p>
+                <a:pPr algn="ctr"/>
+                <a:endParaRPr lang="en-US"/>
+              </a:p>
+            </p:txBody>
+          </p:sp>
+          <p:sp>
+            <p:nvSpPr>
+              <p:cNvPr id="117" name="Oval 116">
+                <a:extLst>
+                  <a:ext uri="{FF2B5EF4-FFF2-40B4-BE49-F238E27FC236}">
+                    <a16:creationId xmlns:a16="http://schemas.microsoft.com/office/drawing/2014/main" id="{EC376618-4AA1-1831-AF2D-838BC87616CC}"/>
+                  </a:ext>
+                </a:extLst>
+              </p:cNvPr>
+              <p:cNvSpPr/>
+              <p:nvPr/>
+            </p:nvSpPr>
+            <p:spPr>
+              <a:xfrm>
+                <a:off x="3244998" y="1678257"/>
+                <a:ext cx="267629" cy="267629"/>
+              </a:xfrm>
+              <a:prstGeom prst="ellipse">
+                <a:avLst/>
+              </a:prstGeom>
+              <a:solidFill>
+                <a:srgbClr val="FF0000"/>
+              </a:solidFill>
+              <a:ln w="22225"/>
+            </p:spPr>
+            <p:style>
+              <a:lnRef idx="2">
+                <a:schemeClr val="accent1">
+                  <a:shade val="15000"/>
+                </a:schemeClr>
+              </a:lnRef>
+              <a:fillRef idx="1">
+                <a:schemeClr val="accent1"/>
+              </a:fillRef>
+              <a:effectRef idx="0">
+                <a:schemeClr val="accent1"/>
+              </a:effectRef>
+              <a:fontRef idx="minor">
+                <a:schemeClr val="lt1"/>
+              </a:fontRef>
+            </p:style>
+            <p:txBody>
+              <a:bodyPr rtlCol="0" anchor="ctr"/>
+              <a:lstStyle/>
+              <a:p>
+                <a:pPr algn="ctr"/>
+                <a:endParaRPr lang="en-US"/>
+              </a:p>
+            </p:txBody>
+          </p:sp>
+          <p:sp>
+            <p:nvSpPr>
+              <p:cNvPr id="118" name="Oval 117">
+                <a:extLst>
+                  <a:ext uri="{FF2B5EF4-FFF2-40B4-BE49-F238E27FC236}">
+                    <a16:creationId xmlns:a16="http://schemas.microsoft.com/office/drawing/2014/main" id="{74B361BD-DD96-2CB5-A7B0-C50B262D0B37}"/>
+                  </a:ext>
+                </a:extLst>
+              </p:cNvPr>
+              <p:cNvSpPr/>
+              <p:nvPr/>
+            </p:nvSpPr>
+            <p:spPr>
+              <a:xfrm>
+                <a:off x="3612984" y="1516562"/>
+                <a:ext cx="267629" cy="267629"/>
+              </a:xfrm>
+              <a:prstGeom prst="ellipse">
+                <a:avLst/>
+              </a:prstGeom>
+              <a:solidFill>
+                <a:srgbClr val="FF0000"/>
+              </a:solidFill>
+              <a:ln w="22225"/>
+            </p:spPr>
+            <p:style>
+              <a:lnRef idx="2">
+                <a:schemeClr val="accent1">
+                  <a:shade val="15000"/>
+                </a:schemeClr>
+              </a:lnRef>
+              <a:fillRef idx="1">
+                <a:schemeClr val="accent1"/>
+              </a:fillRef>
+              <a:effectRef idx="0">
+                <a:schemeClr val="accent1"/>
+              </a:effectRef>
+              <a:fontRef idx="minor">
+                <a:schemeClr val="lt1"/>
+              </a:fontRef>
+            </p:style>
+            <p:txBody>
+              <a:bodyPr rtlCol="0" anchor="ctr"/>
+              <a:lstStyle/>
+              <a:p>
+                <a:pPr algn="ctr"/>
+                <a:endParaRPr lang="en-US"/>
+              </a:p>
+            </p:txBody>
+          </p:sp>
+        </p:grpSp>
+        <p:sp>
+          <p:nvSpPr>
+            <p:cNvPr id="119" name="TextBox 118">
+              <a:extLst>
+                <a:ext uri="{FF2B5EF4-FFF2-40B4-BE49-F238E27FC236}">
+                  <a16:creationId xmlns:a16="http://schemas.microsoft.com/office/drawing/2014/main" id="{6FB980BA-3612-3EE3-F757-AF81CF5DA355}"/>
+                </a:ext>
+              </a:extLst>
+            </p:cNvPr>
+            <p:cNvSpPr txBox="1"/>
+            <p:nvPr/>
+          </p:nvSpPr>
+          <p:spPr>
+            <a:xfrm>
+              <a:off x="-677112" y="6488668"/>
+              <a:ext cx="527645" cy="369332"/>
+            </a:xfrm>
+            <a:prstGeom prst="rect">
+              <a:avLst/>
+            </a:prstGeom>
+            <a:noFill/>
+          </p:spPr>
+          <p:txBody>
+            <a:bodyPr wrap="none" rtlCol="0">
+              <a:spAutoFit/>
+            </a:bodyPr>
+            <a:lstStyle/>
+            <a:p>
+              <a:r>
+                <a:rPr lang="en-US" dirty="0"/>
+                <a:t>Yes</a:t>
+              </a:r>
+              <a:endParaRPr lang="en-US" baseline="-25000" dirty="0"/>
+            </a:p>
+          </p:txBody>
+        </p:sp>
+        <p:sp>
+          <p:nvSpPr>
+            <p:cNvPr id="120" name="TextBox 119">
+              <a:extLst>
+                <a:ext uri="{FF2B5EF4-FFF2-40B4-BE49-F238E27FC236}">
+                  <a16:creationId xmlns:a16="http://schemas.microsoft.com/office/drawing/2014/main" id="{898B2A6B-E448-AC10-1AD3-710E4CB2D357}"/>
+                </a:ext>
+              </a:extLst>
+            </p:cNvPr>
+            <p:cNvSpPr txBox="1"/>
+            <p:nvPr/>
+          </p:nvSpPr>
+          <p:spPr>
+            <a:xfrm>
+              <a:off x="2567927" y="6488668"/>
+              <a:ext cx="474810" cy="369332"/>
+            </a:xfrm>
+            <a:prstGeom prst="rect">
+              <a:avLst/>
+            </a:prstGeom>
+            <a:noFill/>
+          </p:spPr>
+          <p:txBody>
+            <a:bodyPr wrap="none" rtlCol="0">
+              <a:spAutoFit/>
+            </a:bodyPr>
+            <a:lstStyle/>
+            <a:p>
+              <a:r>
+                <a:rPr lang="en-US" dirty="0"/>
+                <a:t>No</a:t>
+              </a:r>
+              <a:endParaRPr lang="en-US" baseline="-25000" dirty="0"/>
+            </a:p>
+          </p:txBody>
+        </p:sp>
+        <p:sp>
+          <p:nvSpPr>
+            <p:cNvPr id="121" name="TextBox 120">
+              <a:extLst>
+                <a:ext uri="{FF2B5EF4-FFF2-40B4-BE49-F238E27FC236}">
+                  <a16:creationId xmlns:a16="http://schemas.microsoft.com/office/drawing/2014/main" id="{7669C507-9B74-28E3-0E5C-58F70FE537D1}"/>
+                </a:ext>
+              </a:extLst>
+            </p:cNvPr>
+            <p:cNvSpPr txBox="1"/>
+            <p:nvPr/>
+          </p:nvSpPr>
+          <p:spPr>
+            <a:xfrm>
+              <a:off x="9219520" y="6488668"/>
+              <a:ext cx="527645" cy="369332"/>
+            </a:xfrm>
+            <a:prstGeom prst="rect">
+              <a:avLst/>
+            </a:prstGeom>
+            <a:noFill/>
+          </p:spPr>
+          <p:txBody>
+            <a:bodyPr wrap="none" rtlCol="0">
+              <a:spAutoFit/>
+            </a:bodyPr>
+            <a:lstStyle/>
+            <a:p>
+              <a:r>
+                <a:rPr lang="en-US" dirty="0"/>
+                <a:t>Yes</a:t>
+              </a:r>
+              <a:endParaRPr lang="en-US" baseline="-25000" dirty="0"/>
+            </a:p>
+          </p:txBody>
+        </p:sp>
+        <p:sp>
+          <p:nvSpPr>
+            <p:cNvPr id="122" name="TextBox 121">
+              <a:extLst>
+                <a:ext uri="{FF2B5EF4-FFF2-40B4-BE49-F238E27FC236}">
+                  <a16:creationId xmlns:a16="http://schemas.microsoft.com/office/drawing/2014/main" id="{B05AC92E-83ED-CB5C-8D3D-ED6BDCD66E26}"/>
+                </a:ext>
+              </a:extLst>
+            </p:cNvPr>
+            <p:cNvSpPr txBox="1"/>
+            <p:nvPr/>
+          </p:nvSpPr>
+          <p:spPr>
+            <a:xfrm>
+              <a:off x="12464559" y="6488668"/>
+              <a:ext cx="474810" cy="369332"/>
+            </a:xfrm>
+            <a:prstGeom prst="rect">
+              <a:avLst/>
+            </a:prstGeom>
+            <a:noFill/>
+          </p:spPr>
+          <p:txBody>
+            <a:bodyPr wrap="none" rtlCol="0">
+              <a:spAutoFit/>
+            </a:bodyPr>
+            <a:lstStyle/>
+            <a:p>
+              <a:r>
+                <a:rPr lang="en-US" dirty="0"/>
+                <a:t>No</a:t>
+              </a:r>
+              <a:endParaRPr lang="en-US" baseline="-25000" dirty="0"/>
+            </a:p>
+          </p:txBody>
+        </p:sp>
+        <p:sp>
+          <p:nvSpPr>
+            <p:cNvPr id="123" name="TextBox 122">
+              <a:extLst>
+                <a:ext uri="{FF2B5EF4-FFF2-40B4-BE49-F238E27FC236}">
+                  <a16:creationId xmlns:a16="http://schemas.microsoft.com/office/drawing/2014/main" id="{B403A596-4AB4-B906-F337-C66EC0AD5FA0}"/>
+                </a:ext>
+              </a:extLst>
+            </p:cNvPr>
+            <p:cNvSpPr txBox="1"/>
+            <p:nvPr/>
+          </p:nvSpPr>
+          <p:spPr>
+            <a:xfrm>
+              <a:off x="1704165" y="7777157"/>
+              <a:ext cx="2590261" cy="369332"/>
+            </a:xfrm>
+            <a:prstGeom prst="rect">
+              <a:avLst/>
+            </a:prstGeom>
+            <a:noFill/>
+          </p:spPr>
+          <p:txBody>
+            <a:bodyPr wrap="none" rtlCol="0">
+              <a:spAutoFit/>
+            </a:bodyPr>
+            <a:lstStyle/>
+            <a:p>
+              <a:r>
+                <a:rPr lang="en-US" dirty="0"/>
+                <a:t>Is a fixed point of T</a:t>
+              </a:r>
+              <a:r>
+                <a:rPr lang="en-US" baseline="-25000" dirty="0"/>
+                <a:t>1</a:t>
+              </a:r>
+              <a:r>
+                <a:rPr lang="en-US" dirty="0"/>
+                <a:t> ∘ T</a:t>
+              </a:r>
+              <a:r>
+                <a:rPr lang="en-US" baseline="-25000" dirty="0"/>
+                <a:t>5</a:t>
+              </a:r>
+              <a:r>
+                <a:rPr lang="en-US" dirty="0"/>
+                <a:t>?</a:t>
+              </a:r>
+            </a:p>
+          </p:txBody>
+        </p:sp>
+        <p:grpSp>
+          <p:nvGrpSpPr>
+            <p:cNvPr id="124" name="Group 123">
+              <a:extLst>
+                <a:ext uri="{FF2B5EF4-FFF2-40B4-BE49-F238E27FC236}">
+                  <a16:creationId xmlns:a16="http://schemas.microsoft.com/office/drawing/2014/main" id="{7529EB8F-8288-4458-4340-BD46A5E4B304}"/>
+                </a:ext>
+              </a:extLst>
+            </p:cNvPr>
+            <p:cNvGrpSpPr/>
+            <p:nvPr/>
+          </p:nvGrpSpPr>
+          <p:grpSpPr>
+            <a:xfrm>
+              <a:off x="431982" y="9957820"/>
+              <a:ext cx="1650380" cy="836342"/>
+              <a:chOff x="2364059" y="1226634"/>
+              <a:chExt cx="1650380" cy="836342"/>
+            </a:xfrm>
+          </p:grpSpPr>
+          <p:sp>
+            <p:nvSpPr>
+              <p:cNvPr id="125" name="Rounded Rectangle 124">
+                <a:extLst>
+                  <a:ext uri="{FF2B5EF4-FFF2-40B4-BE49-F238E27FC236}">
+                    <a16:creationId xmlns:a16="http://schemas.microsoft.com/office/drawing/2014/main" id="{50179DC0-8D3D-4BC7-6003-6C4DCBB805A0}"/>
+                  </a:ext>
+                </a:extLst>
+              </p:cNvPr>
+              <p:cNvSpPr/>
+              <p:nvPr/>
+            </p:nvSpPr>
+            <p:spPr>
+              <a:xfrm>
+                <a:off x="2364059" y="1226634"/>
+                <a:ext cx="1650380" cy="836342"/>
+              </a:xfrm>
+              <a:prstGeom prst="roundRect">
+                <a:avLst/>
+              </a:prstGeom>
+              <a:solidFill>
+                <a:schemeClr val="bg2"/>
+              </a:solidFill>
+              <a:ln w="22225"/>
+            </p:spPr>
+            <p:style>
+              <a:lnRef idx="2">
+                <a:schemeClr val="accent1">
+                  <a:shade val="15000"/>
+                </a:schemeClr>
+              </a:lnRef>
+              <a:fillRef idx="1">
+                <a:schemeClr val="accent1"/>
+              </a:fillRef>
+              <a:effectRef idx="0">
+                <a:schemeClr val="accent1"/>
+              </a:effectRef>
+              <a:fontRef idx="minor">
+                <a:schemeClr val="lt1"/>
+              </a:fontRef>
+            </p:style>
+            <p:txBody>
+              <a:bodyPr rtlCol="0" anchor="ctr"/>
+              <a:lstStyle/>
+              <a:p>
+                <a:pPr algn="ctr"/>
+                <a:endParaRPr lang="en-US"/>
+              </a:p>
+            </p:txBody>
+          </p:sp>
+          <p:sp>
+            <p:nvSpPr>
+              <p:cNvPr id="126" name="Oval 125">
+                <a:extLst>
+                  <a:ext uri="{FF2B5EF4-FFF2-40B4-BE49-F238E27FC236}">
+                    <a16:creationId xmlns:a16="http://schemas.microsoft.com/office/drawing/2014/main" id="{BBA5DEBF-4D43-1144-CA6E-26822EA88F1E}"/>
+                  </a:ext>
+                </a:extLst>
+              </p:cNvPr>
+              <p:cNvSpPr/>
+              <p:nvPr/>
+            </p:nvSpPr>
+            <p:spPr>
+              <a:xfrm>
+                <a:off x="2486722" y="1321419"/>
+                <a:ext cx="267629" cy="267629"/>
+              </a:xfrm>
+              <a:prstGeom prst="ellipse">
+                <a:avLst/>
+              </a:prstGeom>
+              <a:solidFill>
+                <a:srgbClr val="FF0000"/>
+              </a:solidFill>
+              <a:ln w="22225"/>
+            </p:spPr>
+            <p:style>
+              <a:lnRef idx="2">
+                <a:schemeClr val="accent1">
+                  <a:shade val="15000"/>
+                </a:schemeClr>
+              </a:lnRef>
+              <a:fillRef idx="1">
+                <a:schemeClr val="accent1"/>
+              </a:fillRef>
+              <a:effectRef idx="0">
+                <a:schemeClr val="accent1"/>
+              </a:effectRef>
+              <a:fontRef idx="minor">
+                <a:schemeClr val="lt1"/>
+              </a:fontRef>
+            </p:style>
+            <p:txBody>
+              <a:bodyPr rtlCol="0" anchor="ctr"/>
+              <a:lstStyle/>
+              <a:p>
+                <a:pPr algn="ctr"/>
+                <a:endParaRPr lang="en-US"/>
+              </a:p>
+            </p:txBody>
+          </p:sp>
+          <p:sp>
+            <p:nvSpPr>
+              <p:cNvPr id="127" name="Oval 126">
+                <a:extLst>
+                  <a:ext uri="{FF2B5EF4-FFF2-40B4-BE49-F238E27FC236}">
+                    <a16:creationId xmlns:a16="http://schemas.microsoft.com/office/drawing/2014/main" id="{5508AF4B-2356-7A34-099E-20D8AC3B453E}"/>
+                  </a:ext>
+                </a:extLst>
+              </p:cNvPr>
+              <p:cNvSpPr/>
+              <p:nvPr/>
+            </p:nvSpPr>
+            <p:spPr>
+              <a:xfrm>
+                <a:off x="2486721" y="1678257"/>
+                <a:ext cx="267629" cy="267629"/>
+              </a:xfrm>
+              <a:prstGeom prst="ellipse">
+                <a:avLst/>
+              </a:prstGeom>
+              <a:solidFill>
+                <a:srgbClr val="FF0000"/>
+              </a:solidFill>
+              <a:ln w="22225"/>
+            </p:spPr>
+            <p:style>
+              <a:lnRef idx="2">
+                <a:schemeClr val="accent1">
+                  <a:shade val="15000"/>
+                </a:schemeClr>
+              </a:lnRef>
+              <a:fillRef idx="1">
+                <a:schemeClr val="accent1"/>
+              </a:fillRef>
+              <a:effectRef idx="0">
+                <a:schemeClr val="accent1"/>
+              </a:effectRef>
+              <a:fontRef idx="minor">
+                <a:schemeClr val="lt1"/>
+              </a:fontRef>
+            </p:style>
+            <p:txBody>
+              <a:bodyPr rtlCol="0" anchor="ctr"/>
+              <a:lstStyle/>
+              <a:p>
+                <a:pPr algn="ctr"/>
+                <a:endParaRPr lang="en-US"/>
+              </a:p>
+            </p:txBody>
+          </p:sp>
+          <p:sp>
+            <p:nvSpPr>
+              <p:cNvPr id="128" name="Oval 127">
+                <a:extLst>
+                  <a:ext uri="{FF2B5EF4-FFF2-40B4-BE49-F238E27FC236}">
+                    <a16:creationId xmlns:a16="http://schemas.microsoft.com/office/drawing/2014/main" id="{9E9EF49B-ED4D-DC04-F8D5-FB5132710AE6}"/>
+                  </a:ext>
+                </a:extLst>
+              </p:cNvPr>
+              <p:cNvSpPr/>
+              <p:nvPr/>
+            </p:nvSpPr>
+            <p:spPr>
+              <a:xfrm>
+                <a:off x="2877013" y="1321419"/>
+                <a:ext cx="267629" cy="267629"/>
+              </a:xfrm>
+              <a:prstGeom prst="ellipse">
+                <a:avLst/>
+              </a:prstGeom>
+              <a:solidFill>
+                <a:srgbClr val="FF0000"/>
+              </a:solidFill>
+              <a:ln w="22225"/>
+            </p:spPr>
+            <p:style>
+              <a:lnRef idx="2">
+                <a:schemeClr val="accent1">
+                  <a:shade val="15000"/>
+                </a:schemeClr>
+              </a:lnRef>
+              <a:fillRef idx="1">
+                <a:schemeClr val="accent1"/>
+              </a:fillRef>
+              <a:effectRef idx="0">
+                <a:schemeClr val="accent1"/>
+              </a:effectRef>
+              <a:fontRef idx="minor">
+                <a:schemeClr val="lt1"/>
+              </a:fontRef>
+            </p:style>
+            <p:txBody>
+              <a:bodyPr rtlCol="0" anchor="ctr"/>
+              <a:lstStyle/>
+              <a:p>
+                <a:pPr algn="ctr"/>
+                <a:endParaRPr lang="en-US"/>
+              </a:p>
+            </p:txBody>
+          </p:sp>
+          <p:sp>
+            <p:nvSpPr>
+              <p:cNvPr id="129" name="Oval 128">
+                <a:extLst>
+                  <a:ext uri="{FF2B5EF4-FFF2-40B4-BE49-F238E27FC236}">
+                    <a16:creationId xmlns:a16="http://schemas.microsoft.com/office/drawing/2014/main" id="{374ADF31-2CA2-A0E3-C701-1777112DCDFC}"/>
+                  </a:ext>
+                </a:extLst>
+              </p:cNvPr>
+              <p:cNvSpPr/>
+              <p:nvPr/>
+            </p:nvSpPr>
+            <p:spPr>
+              <a:xfrm>
+                <a:off x="2877012" y="1678257"/>
+                <a:ext cx="267629" cy="267629"/>
+              </a:xfrm>
+              <a:prstGeom prst="ellipse">
+                <a:avLst/>
+              </a:prstGeom>
+              <a:solidFill>
+                <a:srgbClr val="00B050"/>
+              </a:solidFill>
+              <a:ln w="22225"/>
+            </p:spPr>
+            <p:style>
+              <a:lnRef idx="2">
+                <a:schemeClr val="accent1">
+                  <a:shade val="15000"/>
+                </a:schemeClr>
+              </a:lnRef>
+              <a:fillRef idx="1">
+                <a:schemeClr val="accent1"/>
+              </a:fillRef>
+              <a:effectRef idx="0">
+                <a:schemeClr val="accent1"/>
+              </a:effectRef>
+              <a:fontRef idx="minor">
+                <a:schemeClr val="lt1"/>
+              </a:fontRef>
+            </p:style>
+            <p:txBody>
+              <a:bodyPr rtlCol="0" anchor="ctr"/>
+              <a:lstStyle/>
+              <a:p>
+                <a:pPr algn="ctr"/>
+                <a:endParaRPr lang="en-US"/>
+              </a:p>
+            </p:txBody>
+          </p:sp>
+          <p:sp>
+            <p:nvSpPr>
+              <p:cNvPr id="130" name="Oval 129">
+                <a:extLst>
+                  <a:ext uri="{FF2B5EF4-FFF2-40B4-BE49-F238E27FC236}">
+                    <a16:creationId xmlns:a16="http://schemas.microsoft.com/office/drawing/2014/main" id="{E05D5504-C9C4-BD70-F9DE-13869C7DB4E4}"/>
+                  </a:ext>
+                </a:extLst>
+              </p:cNvPr>
+              <p:cNvSpPr/>
+              <p:nvPr/>
+            </p:nvSpPr>
+            <p:spPr>
+              <a:xfrm>
+                <a:off x="3244999" y="1321419"/>
+                <a:ext cx="267629" cy="267629"/>
+              </a:xfrm>
+              <a:prstGeom prst="ellipse">
+                <a:avLst/>
+              </a:prstGeom>
+              <a:solidFill>
+                <a:srgbClr val="FF0000"/>
+              </a:solidFill>
+              <a:ln w="22225"/>
+            </p:spPr>
+            <p:style>
+              <a:lnRef idx="2">
+                <a:schemeClr val="accent1">
+                  <a:shade val="15000"/>
+                </a:schemeClr>
+              </a:lnRef>
+              <a:fillRef idx="1">
+                <a:schemeClr val="accent1"/>
+              </a:fillRef>
+              <a:effectRef idx="0">
+                <a:schemeClr val="accent1"/>
+              </a:effectRef>
+              <a:fontRef idx="minor">
+                <a:schemeClr val="lt1"/>
+              </a:fontRef>
+            </p:style>
+            <p:txBody>
+              <a:bodyPr rtlCol="0" anchor="ctr"/>
+              <a:lstStyle/>
+              <a:p>
+                <a:pPr algn="ctr"/>
+                <a:endParaRPr lang="en-US"/>
+              </a:p>
+            </p:txBody>
+          </p:sp>
+          <p:sp>
+            <p:nvSpPr>
+              <p:cNvPr id="131" name="Oval 130">
+                <a:extLst>
+                  <a:ext uri="{FF2B5EF4-FFF2-40B4-BE49-F238E27FC236}">
+                    <a16:creationId xmlns:a16="http://schemas.microsoft.com/office/drawing/2014/main" id="{DE1EF5C7-E56F-0D0F-0F3C-251F451691AF}"/>
+                  </a:ext>
+                </a:extLst>
+              </p:cNvPr>
+              <p:cNvSpPr/>
+              <p:nvPr/>
+            </p:nvSpPr>
+            <p:spPr>
+              <a:xfrm>
+                <a:off x="3244998" y="1678257"/>
+                <a:ext cx="267629" cy="267629"/>
+              </a:xfrm>
+              <a:prstGeom prst="ellipse">
+                <a:avLst/>
+              </a:prstGeom>
+              <a:solidFill>
+                <a:srgbClr val="00B050"/>
+              </a:solidFill>
+              <a:ln w="22225"/>
+            </p:spPr>
+            <p:style>
+              <a:lnRef idx="2">
+                <a:schemeClr val="accent1">
+                  <a:shade val="15000"/>
+                </a:schemeClr>
+              </a:lnRef>
+              <a:fillRef idx="1">
+                <a:schemeClr val="accent1"/>
+              </a:fillRef>
+              <a:effectRef idx="0">
+                <a:schemeClr val="accent1"/>
+              </a:effectRef>
+              <a:fontRef idx="minor">
+                <a:schemeClr val="lt1"/>
+              </a:fontRef>
+            </p:style>
+            <p:txBody>
+              <a:bodyPr rtlCol="0" anchor="ctr"/>
+              <a:lstStyle/>
+              <a:p>
+                <a:pPr algn="ctr"/>
+                <a:endParaRPr lang="en-US"/>
+              </a:p>
+            </p:txBody>
+          </p:sp>
+          <p:sp>
+            <p:nvSpPr>
+              <p:cNvPr id="132" name="Oval 131">
+                <a:extLst>
+                  <a:ext uri="{FF2B5EF4-FFF2-40B4-BE49-F238E27FC236}">
+                    <a16:creationId xmlns:a16="http://schemas.microsoft.com/office/drawing/2014/main" id="{D621CEDD-9280-7369-1ED3-FA69C4ED39BB}"/>
+                  </a:ext>
+                </a:extLst>
+              </p:cNvPr>
+              <p:cNvSpPr/>
+              <p:nvPr/>
+            </p:nvSpPr>
+            <p:spPr>
+              <a:xfrm>
+                <a:off x="3612984" y="1516562"/>
+                <a:ext cx="267629" cy="267629"/>
+              </a:xfrm>
+              <a:prstGeom prst="ellipse">
+                <a:avLst/>
+              </a:prstGeom>
+              <a:solidFill>
+                <a:srgbClr val="FF0000"/>
+              </a:solidFill>
+              <a:ln w="22225"/>
+            </p:spPr>
+            <p:style>
+              <a:lnRef idx="2">
+                <a:schemeClr val="accent1">
+                  <a:shade val="15000"/>
+                </a:schemeClr>
+              </a:lnRef>
+              <a:fillRef idx="1">
+                <a:schemeClr val="accent1"/>
+              </a:fillRef>
+              <a:effectRef idx="0">
+                <a:schemeClr val="accent1"/>
+              </a:effectRef>
+              <a:fontRef idx="minor">
+                <a:schemeClr val="lt1"/>
+              </a:fontRef>
+            </p:style>
+            <p:txBody>
+              <a:bodyPr rtlCol="0" anchor="ctr"/>
+              <a:lstStyle/>
+              <a:p>
+                <a:pPr algn="ctr"/>
+                <a:endParaRPr lang="en-US"/>
+              </a:p>
+            </p:txBody>
+          </p:sp>
+        </p:grpSp>
+        <p:grpSp>
+          <p:nvGrpSpPr>
+            <p:cNvPr id="133" name="Group 132">
+              <a:extLst>
+                <a:ext uri="{FF2B5EF4-FFF2-40B4-BE49-F238E27FC236}">
+                  <a16:creationId xmlns:a16="http://schemas.microsoft.com/office/drawing/2014/main" id="{2799B712-8AE6-62E1-044C-0AB1A7F83FB1}"/>
+                </a:ext>
+              </a:extLst>
+            </p:cNvPr>
+            <p:cNvGrpSpPr/>
+            <p:nvPr/>
+          </p:nvGrpSpPr>
+          <p:grpSpPr>
+            <a:xfrm>
+              <a:off x="3732742" y="9957820"/>
+              <a:ext cx="1650380" cy="836342"/>
+              <a:chOff x="2364059" y="1226634"/>
+              <a:chExt cx="1650380" cy="836342"/>
+            </a:xfrm>
+          </p:grpSpPr>
+          <p:sp>
+            <p:nvSpPr>
+              <p:cNvPr id="134" name="Rounded Rectangle 133">
+                <a:extLst>
+                  <a:ext uri="{FF2B5EF4-FFF2-40B4-BE49-F238E27FC236}">
+                    <a16:creationId xmlns:a16="http://schemas.microsoft.com/office/drawing/2014/main" id="{82975FA3-9280-F7C0-F8BA-7B2C5565195D}"/>
+                  </a:ext>
+                </a:extLst>
+              </p:cNvPr>
+              <p:cNvSpPr/>
+              <p:nvPr/>
+            </p:nvSpPr>
+            <p:spPr>
+              <a:xfrm>
+                <a:off x="2364059" y="1226634"/>
+                <a:ext cx="1650380" cy="836342"/>
+              </a:xfrm>
+              <a:prstGeom prst="roundRect">
+                <a:avLst/>
+              </a:prstGeom>
+              <a:solidFill>
+                <a:schemeClr val="bg2"/>
+              </a:solidFill>
+              <a:ln w="22225"/>
+            </p:spPr>
+            <p:style>
+              <a:lnRef idx="2">
+                <a:schemeClr val="accent1">
+                  <a:shade val="15000"/>
+                </a:schemeClr>
+              </a:lnRef>
+              <a:fillRef idx="1">
+                <a:schemeClr val="accent1"/>
+              </a:fillRef>
+              <a:effectRef idx="0">
+                <a:schemeClr val="accent1"/>
+              </a:effectRef>
+              <a:fontRef idx="minor">
+                <a:schemeClr val="lt1"/>
+              </a:fontRef>
+            </p:style>
+            <p:txBody>
+              <a:bodyPr rtlCol="0" anchor="ctr"/>
+              <a:lstStyle/>
+              <a:p>
+                <a:pPr algn="ctr"/>
+                <a:endParaRPr lang="en-US"/>
+              </a:p>
+            </p:txBody>
+          </p:sp>
+          <p:sp>
+            <p:nvSpPr>
+              <p:cNvPr id="135" name="Oval 134">
+                <a:extLst>
+                  <a:ext uri="{FF2B5EF4-FFF2-40B4-BE49-F238E27FC236}">
+                    <a16:creationId xmlns:a16="http://schemas.microsoft.com/office/drawing/2014/main" id="{24B3E04E-BB4D-E26C-95BA-78E1B6D833C8}"/>
+                  </a:ext>
+                </a:extLst>
+              </p:cNvPr>
+              <p:cNvSpPr/>
+              <p:nvPr/>
+            </p:nvSpPr>
+            <p:spPr>
+              <a:xfrm>
+                <a:off x="2486722" y="1321419"/>
+                <a:ext cx="267629" cy="267629"/>
+              </a:xfrm>
+              <a:prstGeom prst="ellipse">
+                <a:avLst/>
+              </a:prstGeom>
+              <a:solidFill>
+                <a:srgbClr val="FF0000"/>
+              </a:solidFill>
+              <a:ln w="22225"/>
+            </p:spPr>
+            <p:style>
+              <a:lnRef idx="2">
+                <a:schemeClr val="accent1">
+                  <a:shade val="15000"/>
+                </a:schemeClr>
+              </a:lnRef>
+              <a:fillRef idx="1">
+                <a:schemeClr val="accent1"/>
+              </a:fillRef>
+              <a:effectRef idx="0">
+                <a:schemeClr val="accent1"/>
+              </a:effectRef>
+              <a:fontRef idx="minor">
+                <a:schemeClr val="lt1"/>
+              </a:fontRef>
+            </p:style>
+            <p:txBody>
+              <a:bodyPr rtlCol="0" anchor="ctr"/>
+              <a:lstStyle/>
+              <a:p>
+                <a:pPr algn="ctr"/>
+                <a:endParaRPr lang="en-US"/>
+              </a:p>
+            </p:txBody>
+          </p:sp>
+          <p:sp>
+            <p:nvSpPr>
+              <p:cNvPr id="136" name="Oval 135">
+                <a:extLst>
+                  <a:ext uri="{FF2B5EF4-FFF2-40B4-BE49-F238E27FC236}">
+                    <a16:creationId xmlns:a16="http://schemas.microsoft.com/office/drawing/2014/main" id="{A05C4571-C922-8246-689D-4E363B48BF80}"/>
+                  </a:ext>
+                </a:extLst>
+              </p:cNvPr>
+              <p:cNvSpPr/>
+              <p:nvPr/>
+            </p:nvSpPr>
+            <p:spPr>
+              <a:xfrm>
+                <a:off x="2486721" y="1678257"/>
+                <a:ext cx="267629" cy="267629"/>
+              </a:xfrm>
+              <a:prstGeom prst="ellipse">
+                <a:avLst/>
+              </a:prstGeom>
+              <a:solidFill>
+                <a:srgbClr val="FF0000"/>
+              </a:solidFill>
+              <a:ln w="22225"/>
+            </p:spPr>
+            <p:style>
+              <a:lnRef idx="2">
+                <a:schemeClr val="accent1">
+                  <a:shade val="15000"/>
+                </a:schemeClr>
+              </a:lnRef>
+              <a:fillRef idx="1">
+                <a:schemeClr val="accent1"/>
+              </a:fillRef>
+              <a:effectRef idx="0">
+                <a:schemeClr val="accent1"/>
+              </a:effectRef>
+              <a:fontRef idx="minor">
+                <a:schemeClr val="lt1"/>
+              </a:fontRef>
+            </p:style>
+            <p:txBody>
+              <a:bodyPr rtlCol="0" anchor="ctr"/>
+              <a:lstStyle/>
+              <a:p>
+                <a:pPr algn="ctr"/>
+                <a:endParaRPr lang="en-US"/>
+              </a:p>
+            </p:txBody>
+          </p:sp>
+          <p:sp>
+            <p:nvSpPr>
+              <p:cNvPr id="137" name="Oval 136">
+                <a:extLst>
+                  <a:ext uri="{FF2B5EF4-FFF2-40B4-BE49-F238E27FC236}">
+                    <a16:creationId xmlns:a16="http://schemas.microsoft.com/office/drawing/2014/main" id="{8D7652C2-A9F5-4B3E-5380-9FC094619015}"/>
+                  </a:ext>
+                </a:extLst>
+              </p:cNvPr>
+              <p:cNvSpPr/>
+              <p:nvPr/>
+            </p:nvSpPr>
+            <p:spPr>
+              <a:xfrm>
+                <a:off x="2877013" y="1321419"/>
+                <a:ext cx="267629" cy="267629"/>
+              </a:xfrm>
+              <a:prstGeom prst="ellipse">
+                <a:avLst/>
+              </a:prstGeom>
+              <a:solidFill>
+                <a:srgbClr val="FF0000"/>
+              </a:solidFill>
+              <a:ln w="22225"/>
+            </p:spPr>
+            <p:style>
+              <a:lnRef idx="2">
+                <a:schemeClr val="accent1">
+                  <a:shade val="15000"/>
+                </a:schemeClr>
+              </a:lnRef>
+              <a:fillRef idx="1">
+                <a:schemeClr val="accent1"/>
+              </a:fillRef>
+              <a:effectRef idx="0">
+                <a:schemeClr val="accent1"/>
+              </a:effectRef>
+              <a:fontRef idx="minor">
+                <a:schemeClr val="lt1"/>
+              </a:fontRef>
+            </p:style>
+            <p:txBody>
+              <a:bodyPr rtlCol="0" anchor="ctr"/>
+              <a:lstStyle/>
+              <a:p>
+                <a:pPr algn="ctr"/>
+                <a:endParaRPr lang="en-US"/>
+              </a:p>
+            </p:txBody>
+          </p:sp>
+          <p:sp>
+            <p:nvSpPr>
+              <p:cNvPr id="138" name="Oval 137">
+                <a:extLst>
+                  <a:ext uri="{FF2B5EF4-FFF2-40B4-BE49-F238E27FC236}">
+                    <a16:creationId xmlns:a16="http://schemas.microsoft.com/office/drawing/2014/main" id="{02D8D5DC-136A-EFEB-C181-06087D8ED4B6}"/>
+                  </a:ext>
+                </a:extLst>
+              </p:cNvPr>
+              <p:cNvSpPr/>
+              <p:nvPr/>
+            </p:nvSpPr>
+            <p:spPr>
+              <a:xfrm>
+                <a:off x="2877012" y="1678257"/>
+                <a:ext cx="267629" cy="267629"/>
+              </a:xfrm>
+              <a:prstGeom prst="ellipse">
+                <a:avLst/>
+              </a:prstGeom>
+              <a:solidFill>
+                <a:srgbClr val="FF0000"/>
+              </a:solidFill>
+              <a:ln w="22225"/>
+            </p:spPr>
+            <p:style>
+              <a:lnRef idx="2">
+                <a:schemeClr val="accent1">
+                  <a:shade val="15000"/>
+                </a:schemeClr>
+              </a:lnRef>
+              <a:fillRef idx="1">
+                <a:schemeClr val="accent1"/>
+              </a:fillRef>
+              <a:effectRef idx="0">
+                <a:schemeClr val="accent1"/>
+              </a:effectRef>
+              <a:fontRef idx="minor">
+                <a:schemeClr val="lt1"/>
+              </a:fontRef>
+            </p:style>
+            <p:txBody>
+              <a:bodyPr rtlCol="0" anchor="ctr"/>
+              <a:lstStyle/>
+              <a:p>
+                <a:pPr algn="ctr"/>
+                <a:endParaRPr lang="en-US"/>
+              </a:p>
+            </p:txBody>
+          </p:sp>
+          <p:sp>
+            <p:nvSpPr>
+              <p:cNvPr id="139" name="Oval 138">
+                <a:extLst>
+                  <a:ext uri="{FF2B5EF4-FFF2-40B4-BE49-F238E27FC236}">
+                    <a16:creationId xmlns:a16="http://schemas.microsoft.com/office/drawing/2014/main" id="{82CD3D1A-4254-0345-09BE-59CE76C9E3F4}"/>
+                  </a:ext>
+                </a:extLst>
+              </p:cNvPr>
+              <p:cNvSpPr/>
+              <p:nvPr/>
+            </p:nvSpPr>
+            <p:spPr>
+              <a:xfrm>
+                <a:off x="3244999" y="1321419"/>
+                <a:ext cx="267629" cy="267629"/>
+              </a:xfrm>
+              <a:prstGeom prst="ellipse">
+                <a:avLst/>
+              </a:prstGeom>
+              <a:solidFill>
+                <a:srgbClr val="FF0000"/>
+              </a:solidFill>
+              <a:ln w="22225"/>
+            </p:spPr>
+            <p:style>
+              <a:lnRef idx="2">
+                <a:schemeClr val="accent1">
+                  <a:shade val="15000"/>
+                </a:schemeClr>
+              </a:lnRef>
+              <a:fillRef idx="1">
+                <a:schemeClr val="accent1"/>
+              </a:fillRef>
+              <a:effectRef idx="0">
+                <a:schemeClr val="accent1"/>
+              </a:effectRef>
+              <a:fontRef idx="minor">
+                <a:schemeClr val="lt1"/>
+              </a:fontRef>
+            </p:style>
+            <p:txBody>
+              <a:bodyPr rtlCol="0" anchor="ctr"/>
+              <a:lstStyle/>
+              <a:p>
+                <a:pPr algn="ctr"/>
+                <a:endParaRPr lang="en-US"/>
+              </a:p>
+            </p:txBody>
+          </p:sp>
+          <p:sp>
+            <p:nvSpPr>
+              <p:cNvPr id="140" name="Oval 139">
+                <a:extLst>
+                  <a:ext uri="{FF2B5EF4-FFF2-40B4-BE49-F238E27FC236}">
+                    <a16:creationId xmlns:a16="http://schemas.microsoft.com/office/drawing/2014/main" id="{E6825DD7-D8E0-A808-47DE-E5AE8E589438}"/>
+                  </a:ext>
+                </a:extLst>
+              </p:cNvPr>
+              <p:cNvSpPr/>
+              <p:nvPr/>
+            </p:nvSpPr>
+            <p:spPr>
+              <a:xfrm>
+                <a:off x="3244998" y="1678257"/>
+                <a:ext cx="267629" cy="267629"/>
+              </a:xfrm>
+              <a:prstGeom prst="ellipse">
+                <a:avLst/>
+              </a:prstGeom>
+              <a:solidFill>
+                <a:srgbClr val="FF0000"/>
+              </a:solidFill>
+              <a:ln w="22225"/>
+            </p:spPr>
+            <p:style>
+              <a:lnRef idx="2">
+                <a:schemeClr val="accent1">
+                  <a:shade val="15000"/>
+                </a:schemeClr>
+              </a:lnRef>
+              <a:fillRef idx="1">
+                <a:schemeClr val="accent1"/>
+              </a:fillRef>
+              <a:effectRef idx="0">
+                <a:schemeClr val="accent1"/>
+              </a:effectRef>
+              <a:fontRef idx="minor">
+                <a:schemeClr val="lt1"/>
+              </a:fontRef>
+            </p:style>
+            <p:txBody>
+              <a:bodyPr rtlCol="0" anchor="ctr"/>
+              <a:lstStyle/>
+              <a:p>
+                <a:pPr algn="ctr"/>
+                <a:endParaRPr lang="en-US"/>
+              </a:p>
+            </p:txBody>
+          </p:sp>
+          <p:sp>
+            <p:nvSpPr>
+              <p:cNvPr id="141" name="Oval 140">
+                <a:extLst>
+                  <a:ext uri="{FF2B5EF4-FFF2-40B4-BE49-F238E27FC236}">
+                    <a16:creationId xmlns:a16="http://schemas.microsoft.com/office/drawing/2014/main" id="{F96837AA-D1E1-C7D5-34CA-49900ED09D2D}"/>
+                  </a:ext>
+                </a:extLst>
+              </p:cNvPr>
+              <p:cNvSpPr/>
+              <p:nvPr/>
+            </p:nvSpPr>
+            <p:spPr>
+              <a:xfrm>
+                <a:off x="3612984" y="1516562"/>
+                <a:ext cx="267629" cy="267629"/>
+              </a:xfrm>
+              <a:prstGeom prst="ellipse">
+                <a:avLst/>
+              </a:prstGeom>
+              <a:solidFill>
+                <a:srgbClr val="FF0000"/>
+              </a:solidFill>
+              <a:ln w="22225"/>
+            </p:spPr>
+            <p:style>
+              <a:lnRef idx="2">
+                <a:schemeClr val="accent1">
+                  <a:shade val="15000"/>
+                </a:schemeClr>
+              </a:lnRef>
+              <a:fillRef idx="1">
+                <a:schemeClr val="accent1"/>
+              </a:fillRef>
+              <a:effectRef idx="0">
+                <a:schemeClr val="accent1"/>
+              </a:effectRef>
+              <a:fontRef idx="minor">
+                <a:schemeClr val="lt1"/>
+              </a:fontRef>
+            </p:style>
+            <p:txBody>
+              <a:bodyPr rtlCol="0" anchor="ctr"/>
+              <a:lstStyle/>
+              <a:p>
+                <a:pPr algn="ctr"/>
+                <a:endParaRPr lang="en-US"/>
+              </a:p>
+            </p:txBody>
+          </p:sp>
+        </p:grpSp>
+        <p:sp>
+          <p:nvSpPr>
+            <p:cNvPr id="142" name="TextBox 141">
+              <a:extLst>
+                <a:ext uri="{FF2B5EF4-FFF2-40B4-BE49-F238E27FC236}">
+                  <a16:creationId xmlns:a16="http://schemas.microsoft.com/office/drawing/2014/main" id="{C43B9AA2-2AF5-770F-7A11-87C6B982BAA5}"/>
+                </a:ext>
+              </a:extLst>
+            </p:cNvPr>
+            <p:cNvSpPr txBox="1"/>
+            <p:nvPr/>
+          </p:nvSpPr>
+          <p:spPr>
+            <a:xfrm>
+              <a:off x="1079932" y="9588488"/>
+              <a:ext cx="527645" cy="369332"/>
+            </a:xfrm>
+            <a:prstGeom prst="rect">
+              <a:avLst/>
+            </a:prstGeom>
+            <a:noFill/>
+          </p:spPr>
+          <p:txBody>
+            <a:bodyPr wrap="none" rtlCol="0">
+              <a:spAutoFit/>
+            </a:bodyPr>
+            <a:lstStyle/>
+            <a:p>
+              <a:r>
+                <a:rPr lang="en-US" dirty="0"/>
+                <a:t>Yes</a:t>
+              </a:r>
+              <a:endParaRPr lang="en-US" baseline="-25000" dirty="0"/>
+            </a:p>
+          </p:txBody>
+        </p:sp>
+        <p:sp>
+          <p:nvSpPr>
+            <p:cNvPr id="143" name="TextBox 142">
+              <a:extLst>
+                <a:ext uri="{FF2B5EF4-FFF2-40B4-BE49-F238E27FC236}">
+                  <a16:creationId xmlns:a16="http://schemas.microsoft.com/office/drawing/2014/main" id="{CE60B2ED-46AC-B82E-25A9-3AC60CC7544D}"/>
+                </a:ext>
+              </a:extLst>
+            </p:cNvPr>
+            <p:cNvSpPr txBox="1"/>
+            <p:nvPr/>
+          </p:nvSpPr>
+          <p:spPr>
+            <a:xfrm>
+              <a:off x="4324971" y="9588488"/>
+              <a:ext cx="474810" cy="369332"/>
+            </a:xfrm>
+            <a:prstGeom prst="rect">
+              <a:avLst/>
+            </a:prstGeom>
+            <a:noFill/>
+          </p:spPr>
+          <p:txBody>
+            <a:bodyPr wrap="none" rtlCol="0">
+              <a:spAutoFit/>
+            </a:bodyPr>
+            <a:lstStyle/>
+            <a:p>
+              <a:r>
+                <a:rPr lang="en-US" dirty="0"/>
+                <a:t>No</a:t>
+              </a:r>
+              <a:endParaRPr lang="en-US" baseline="-25000" dirty="0"/>
+            </a:p>
+          </p:txBody>
+        </p:sp>
+        <p:cxnSp>
+          <p:nvCxnSpPr>
+            <p:cNvPr id="145" name="Straight Arrow Connector 144">
+              <a:extLst>
+                <a:ext uri="{FF2B5EF4-FFF2-40B4-BE49-F238E27FC236}">
+                  <a16:creationId xmlns:a16="http://schemas.microsoft.com/office/drawing/2014/main" id="{C1D3CDC6-8DB6-A603-2A46-A022E2714E0F}"/>
+                </a:ext>
+              </a:extLst>
+            </p:cNvPr>
+            <p:cNvCxnSpPr>
+              <a:cxnSpLocks/>
+              <a:endCxn id="77" idx="0"/>
+            </p:cNvCxnSpPr>
+            <p:nvPr/>
+          </p:nvCxnSpPr>
+          <p:spPr>
+            <a:xfrm flipH="1">
+              <a:off x="1080223" y="1642281"/>
+              <a:ext cx="3954167" cy="1653413"/>
+            </a:xfrm>
+            <a:prstGeom prst="straightConnector1">
+              <a:avLst/>
+            </a:prstGeom>
+            <a:ln w="22225">
+              <a:solidFill>
+                <a:schemeClr val="tx1"/>
+              </a:solidFill>
+              <a:tailEnd type="triangle" w="lg" len="lg"/>
+            </a:ln>
+          </p:spPr>
+          <p:style>
+            <a:lnRef idx="2">
+              <a:schemeClr val="accent1"/>
+            </a:lnRef>
+            <a:fillRef idx="0">
+              <a:schemeClr val="accent1"/>
+            </a:fillRef>
+            <a:effectRef idx="1">
+              <a:schemeClr val="accent1"/>
+            </a:effectRef>
+            <a:fontRef idx="minor">
+              <a:schemeClr val="tx1"/>
+            </a:fontRef>
+          </p:style>
+        </p:cxnSp>
+        <p:cxnSp>
+          <p:nvCxnSpPr>
+            <p:cNvPr id="146" name="Straight Arrow Connector 145">
+              <a:extLst>
+                <a:ext uri="{FF2B5EF4-FFF2-40B4-BE49-F238E27FC236}">
+                  <a16:creationId xmlns:a16="http://schemas.microsoft.com/office/drawing/2014/main" id="{EBE4E6D7-234B-87B4-CE60-03229AAD6B6C}"/>
+                </a:ext>
+              </a:extLst>
+            </p:cNvPr>
+            <p:cNvCxnSpPr>
+              <a:cxnSpLocks/>
+              <a:endCxn id="80" idx="0"/>
+            </p:cNvCxnSpPr>
+            <p:nvPr/>
+          </p:nvCxnSpPr>
+          <p:spPr>
+            <a:xfrm>
+              <a:off x="7275043" y="1634739"/>
+              <a:ext cx="3727489" cy="1663415"/>
+            </a:xfrm>
+            <a:prstGeom prst="straightConnector1">
+              <a:avLst/>
+            </a:prstGeom>
+            <a:ln w="22225">
+              <a:solidFill>
+                <a:schemeClr val="tx1"/>
+              </a:solidFill>
+              <a:tailEnd type="triangle" w="lg" len="lg"/>
+            </a:ln>
+          </p:spPr>
+          <p:style>
+            <a:lnRef idx="2">
+              <a:schemeClr val="accent1"/>
+            </a:lnRef>
+            <a:fillRef idx="0">
+              <a:schemeClr val="accent1"/>
+            </a:fillRef>
+            <a:effectRef idx="1">
+              <a:schemeClr val="accent1"/>
+            </a:effectRef>
+            <a:fontRef idx="minor">
+              <a:schemeClr val="tx1"/>
+            </a:fontRef>
+          </p:style>
+        </p:cxnSp>
+        <p:cxnSp>
+          <p:nvCxnSpPr>
+            <p:cNvPr id="149" name="Straight Arrow Connector 148">
+              <a:extLst>
+                <a:ext uri="{FF2B5EF4-FFF2-40B4-BE49-F238E27FC236}">
+                  <a16:creationId xmlns:a16="http://schemas.microsoft.com/office/drawing/2014/main" id="{7AA55C03-7694-44E0-0C40-5A09A9BDB2D5}"/>
+                </a:ext>
+              </a:extLst>
+            </p:cNvPr>
+            <p:cNvCxnSpPr>
+              <a:cxnSpLocks/>
+              <a:endCxn id="78" idx="0"/>
+            </p:cNvCxnSpPr>
+            <p:nvPr/>
+          </p:nvCxnSpPr>
+          <p:spPr>
+            <a:xfrm flipH="1">
+              <a:off x="4401012" y="1635233"/>
+              <a:ext cx="1443299" cy="1660461"/>
+            </a:xfrm>
+            <a:prstGeom prst="straightConnector1">
+              <a:avLst/>
+            </a:prstGeom>
+            <a:ln w="22225">
+              <a:solidFill>
+                <a:schemeClr val="tx1"/>
+              </a:solidFill>
+              <a:tailEnd type="triangle" w="lg" len="lg"/>
+            </a:ln>
+          </p:spPr>
+          <p:style>
+            <a:lnRef idx="2">
+              <a:schemeClr val="accent1"/>
+            </a:lnRef>
+            <a:fillRef idx="0">
+              <a:schemeClr val="accent1"/>
+            </a:fillRef>
+            <a:effectRef idx="1">
+              <a:schemeClr val="accent1"/>
+            </a:effectRef>
+            <a:fontRef idx="minor">
+              <a:schemeClr val="tx1"/>
+            </a:fontRef>
+          </p:style>
+        </p:cxnSp>
+        <p:cxnSp>
+          <p:nvCxnSpPr>
+            <p:cNvPr id="154" name="Straight Arrow Connector 153">
+              <a:extLst>
+                <a:ext uri="{FF2B5EF4-FFF2-40B4-BE49-F238E27FC236}">
+                  <a16:creationId xmlns:a16="http://schemas.microsoft.com/office/drawing/2014/main" id="{D080D902-6D5E-7F71-3C67-2406546268A0}"/>
+                </a:ext>
+              </a:extLst>
+            </p:cNvPr>
+            <p:cNvCxnSpPr>
+              <a:cxnSpLocks/>
+              <a:endCxn id="79" idx="0"/>
+            </p:cNvCxnSpPr>
+            <p:nvPr/>
+          </p:nvCxnSpPr>
+          <p:spPr>
+            <a:xfrm>
+              <a:off x="6529755" y="1635233"/>
+              <a:ext cx="1272374" cy="1654885"/>
+            </a:xfrm>
+            <a:prstGeom prst="straightConnector1">
+              <a:avLst/>
+            </a:prstGeom>
+            <a:ln w="22225">
+              <a:solidFill>
+                <a:schemeClr val="tx1"/>
+              </a:solidFill>
+              <a:tailEnd type="triangle" w="lg" len="lg"/>
+            </a:ln>
+          </p:spPr>
+          <p:style>
+            <a:lnRef idx="2">
+              <a:schemeClr val="accent1"/>
+            </a:lnRef>
+            <a:fillRef idx="0">
+              <a:schemeClr val="accent1"/>
+            </a:fillRef>
+            <a:effectRef idx="1">
+              <a:schemeClr val="accent1"/>
+            </a:effectRef>
+            <a:fontRef idx="minor">
+              <a:schemeClr val="tx1"/>
+            </a:fontRef>
+          </p:style>
+        </p:cxnSp>
+        <p:cxnSp>
+          <p:nvCxnSpPr>
+            <p:cNvPr id="161" name="Straight Arrow Connector 160">
+              <a:extLst>
+                <a:ext uri="{FF2B5EF4-FFF2-40B4-BE49-F238E27FC236}">
+                  <a16:creationId xmlns:a16="http://schemas.microsoft.com/office/drawing/2014/main" id="{4DF4CD0C-8C26-2028-703D-29BBF451EE49}"/>
+                </a:ext>
+              </a:extLst>
+            </p:cNvPr>
+            <p:cNvCxnSpPr>
+              <a:cxnSpLocks/>
+              <a:endCxn id="119" idx="0"/>
+            </p:cNvCxnSpPr>
+            <p:nvPr/>
+          </p:nvCxnSpPr>
+          <p:spPr>
+            <a:xfrm flipH="1">
+              <a:off x="-413289" y="5270603"/>
+              <a:ext cx="1274935" cy="1218065"/>
+            </a:xfrm>
+            <a:prstGeom prst="straightConnector1">
+              <a:avLst/>
+            </a:prstGeom>
+            <a:ln w="22225">
+              <a:solidFill>
+                <a:schemeClr val="tx1"/>
+              </a:solidFill>
+              <a:tailEnd type="triangle" w="lg" len="lg"/>
+            </a:ln>
+          </p:spPr>
+          <p:style>
+            <a:lnRef idx="2">
+              <a:schemeClr val="accent1"/>
+            </a:lnRef>
+            <a:fillRef idx="0">
+              <a:schemeClr val="accent1"/>
+            </a:fillRef>
+            <a:effectRef idx="1">
+              <a:schemeClr val="accent1"/>
+            </a:effectRef>
+            <a:fontRef idx="minor">
+              <a:schemeClr val="tx1"/>
+            </a:fontRef>
+          </p:style>
+        </p:cxnSp>
+        <p:cxnSp>
+          <p:nvCxnSpPr>
+            <p:cNvPr id="164" name="Straight Arrow Connector 163">
+              <a:extLst>
+                <a:ext uri="{FF2B5EF4-FFF2-40B4-BE49-F238E27FC236}">
+                  <a16:creationId xmlns:a16="http://schemas.microsoft.com/office/drawing/2014/main" id="{E0087506-85A0-C18F-3194-25E5B8ACE307}"/>
+                </a:ext>
+              </a:extLst>
+            </p:cNvPr>
+            <p:cNvCxnSpPr>
+              <a:cxnSpLocks/>
+              <a:endCxn id="120" idx="0"/>
+            </p:cNvCxnSpPr>
+            <p:nvPr/>
+          </p:nvCxnSpPr>
+          <p:spPr>
+            <a:xfrm>
+              <a:off x="1507870" y="5270603"/>
+              <a:ext cx="1297462" cy="1218065"/>
+            </a:xfrm>
+            <a:prstGeom prst="straightConnector1">
+              <a:avLst/>
+            </a:prstGeom>
+            <a:ln w="22225">
+              <a:solidFill>
+                <a:schemeClr val="tx1"/>
+              </a:solidFill>
+              <a:tailEnd type="triangle" w="lg" len="lg"/>
+            </a:ln>
+          </p:spPr>
+          <p:style>
+            <a:lnRef idx="2">
+              <a:schemeClr val="accent1"/>
+            </a:lnRef>
+            <a:fillRef idx="0">
+              <a:schemeClr val="accent1"/>
+            </a:fillRef>
+            <a:effectRef idx="1">
+              <a:schemeClr val="accent1"/>
+            </a:effectRef>
+            <a:fontRef idx="minor">
+              <a:schemeClr val="tx1"/>
+            </a:fontRef>
+          </p:style>
+        </p:cxnSp>
+        <p:cxnSp>
+          <p:nvCxnSpPr>
+            <p:cNvPr id="170" name="Straight Arrow Connector 169">
+              <a:extLst>
+                <a:ext uri="{FF2B5EF4-FFF2-40B4-BE49-F238E27FC236}">
+                  <a16:creationId xmlns:a16="http://schemas.microsoft.com/office/drawing/2014/main" id="{9A69909C-F678-C557-4423-0D9C45D94165}"/>
+                </a:ext>
+              </a:extLst>
+            </p:cNvPr>
+            <p:cNvCxnSpPr>
+              <a:cxnSpLocks/>
+              <a:endCxn id="121" idx="0"/>
+            </p:cNvCxnSpPr>
+            <p:nvPr/>
+          </p:nvCxnSpPr>
+          <p:spPr>
+            <a:xfrm flipH="1">
+              <a:off x="9483343" y="5270603"/>
+              <a:ext cx="1399478" cy="1218065"/>
+            </a:xfrm>
+            <a:prstGeom prst="straightConnector1">
+              <a:avLst/>
+            </a:prstGeom>
+            <a:ln w="22225">
+              <a:solidFill>
+                <a:schemeClr val="tx1"/>
+              </a:solidFill>
+              <a:tailEnd type="triangle" w="lg" len="lg"/>
+            </a:ln>
+          </p:spPr>
+          <p:style>
+            <a:lnRef idx="2">
+              <a:schemeClr val="accent1"/>
+            </a:lnRef>
+            <a:fillRef idx="0">
+              <a:schemeClr val="accent1"/>
+            </a:fillRef>
+            <a:effectRef idx="1">
+              <a:schemeClr val="accent1"/>
+            </a:effectRef>
+            <a:fontRef idx="minor">
+              <a:schemeClr val="tx1"/>
+            </a:fontRef>
+          </p:style>
+        </p:cxnSp>
+        <p:cxnSp>
+          <p:nvCxnSpPr>
+            <p:cNvPr id="171" name="Straight Arrow Connector 170">
+              <a:extLst>
+                <a:ext uri="{FF2B5EF4-FFF2-40B4-BE49-F238E27FC236}">
+                  <a16:creationId xmlns:a16="http://schemas.microsoft.com/office/drawing/2014/main" id="{D17C25AF-CEDE-A62B-587C-C4AA47AAFFBA}"/>
+                </a:ext>
+              </a:extLst>
+            </p:cNvPr>
+            <p:cNvCxnSpPr>
+              <a:cxnSpLocks/>
+              <a:endCxn id="122" idx="0"/>
+            </p:cNvCxnSpPr>
+            <p:nvPr/>
+          </p:nvCxnSpPr>
+          <p:spPr>
+            <a:xfrm>
+              <a:off x="11328903" y="5270603"/>
+              <a:ext cx="1373061" cy="1218065"/>
+            </a:xfrm>
+            <a:prstGeom prst="straightConnector1">
+              <a:avLst/>
+            </a:prstGeom>
+            <a:ln w="22225">
+              <a:solidFill>
+                <a:schemeClr val="tx1"/>
+              </a:solidFill>
+              <a:tailEnd type="triangle" w="lg" len="lg"/>
+            </a:ln>
+          </p:spPr>
+          <p:style>
+            <a:lnRef idx="2">
+              <a:schemeClr val="accent1"/>
+            </a:lnRef>
+            <a:fillRef idx="0">
+              <a:schemeClr val="accent1"/>
+            </a:fillRef>
+            <a:effectRef idx="1">
+              <a:schemeClr val="accent1"/>
+            </a:effectRef>
+            <a:fontRef idx="minor">
+              <a:schemeClr val="tx1"/>
+            </a:fontRef>
+          </p:style>
+        </p:cxnSp>
+        <p:cxnSp>
+          <p:nvCxnSpPr>
+            <p:cNvPr id="178" name="Straight Arrow Connector 177">
+              <a:extLst>
+                <a:ext uri="{FF2B5EF4-FFF2-40B4-BE49-F238E27FC236}">
+                  <a16:creationId xmlns:a16="http://schemas.microsoft.com/office/drawing/2014/main" id="{729DAC07-D938-2688-707C-021A058DC6AB}"/>
+                </a:ext>
+              </a:extLst>
+            </p:cNvPr>
+            <p:cNvCxnSpPr>
+              <a:cxnSpLocks/>
+              <a:endCxn id="142" idx="0"/>
+            </p:cNvCxnSpPr>
+            <p:nvPr/>
+          </p:nvCxnSpPr>
+          <p:spPr>
+            <a:xfrm flipH="1">
+              <a:off x="1343755" y="8202472"/>
+              <a:ext cx="1270491" cy="1386016"/>
+            </a:xfrm>
+            <a:prstGeom prst="straightConnector1">
+              <a:avLst/>
+            </a:prstGeom>
+            <a:ln w="22225">
+              <a:solidFill>
+                <a:schemeClr val="tx1"/>
+              </a:solidFill>
+              <a:tailEnd type="triangle" w="lg" len="lg"/>
+            </a:ln>
+          </p:spPr>
+          <p:style>
+            <a:lnRef idx="2">
+              <a:schemeClr val="accent1"/>
+            </a:lnRef>
+            <a:fillRef idx="0">
+              <a:schemeClr val="accent1"/>
+            </a:fillRef>
+            <a:effectRef idx="1">
+              <a:schemeClr val="accent1"/>
+            </a:effectRef>
+            <a:fontRef idx="minor">
+              <a:schemeClr val="tx1"/>
+            </a:fontRef>
+          </p:style>
+        </p:cxnSp>
+        <p:cxnSp>
+          <p:nvCxnSpPr>
+            <p:cNvPr id="179" name="Straight Arrow Connector 178">
+              <a:extLst>
+                <a:ext uri="{FF2B5EF4-FFF2-40B4-BE49-F238E27FC236}">
+                  <a16:creationId xmlns:a16="http://schemas.microsoft.com/office/drawing/2014/main" id="{A4F6CBE7-91EC-0E3D-1A48-CED9C959DE55}"/>
+                </a:ext>
+              </a:extLst>
+            </p:cNvPr>
+            <p:cNvCxnSpPr>
+              <a:cxnSpLocks/>
+              <a:endCxn id="143" idx="0"/>
+            </p:cNvCxnSpPr>
+            <p:nvPr/>
+          </p:nvCxnSpPr>
+          <p:spPr>
+            <a:xfrm>
+              <a:off x="3318302" y="8202472"/>
+              <a:ext cx="1244074" cy="1386016"/>
+            </a:xfrm>
+            <a:prstGeom prst="straightConnector1">
+              <a:avLst/>
+            </a:prstGeom>
+            <a:ln w="22225">
+              <a:solidFill>
+                <a:schemeClr val="tx1"/>
+              </a:solidFill>
+              <a:tailEnd type="triangle" w="lg" len="lg"/>
+            </a:ln>
+          </p:spPr>
+          <p:style>
+            <a:lnRef idx="2">
+              <a:schemeClr val="accent1"/>
+            </a:lnRef>
+            <a:fillRef idx="0">
+              <a:schemeClr val="accent1"/>
+            </a:fillRef>
+            <a:effectRef idx="1">
+              <a:schemeClr val="accent1"/>
+            </a:effectRef>
+            <a:fontRef idx="minor">
+              <a:schemeClr val="tx1"/>
+            </a:fontRef>
+          </p:style>
+        </p:cxnSp>
+        <p:sp>
+          <p:nvSpPr>
+            <p:cNvPr id="190" name="Rounded Rectangle 189">
+              <a:extLst>
+                <a:ext uri="{FF2B5EF4-FFF2-40B4-BE49-F238E27FC236}">
+                  <a16:creationId xmlns:a16="http://schemas.microsoft.com/office/drawing/2014/main" id="{F0ECEEDE-CB00-580C-D779-35CB11389799}"/>
+                </a:ext>
+              </a:extLst>
+            </p:cNvPr>
+            <p:cNvSpPr/>
+            <p:nvPr/>
+          </p:nvSpPr>
+          <p:spPr>
+            <a:xfrm>
+              <a:off x="8051262" y="9313459"/>
+              <a:ext cx="3277641" cy="1663415"/>
+            </a:xfrm>
+            <a:prstGeom prst="roundRect">
+              <a:avLst/>
+            </a:prstGeom>
+            <a:solidFill>
+              <a:schemeClr val="bg2"/>
+            </a:solidFill>
+            <a:ln w="22225"/>
+          </p:spPr>
+          <p:style>
+            <a:lnRef idx="2">
+              <a:schemeClr val="accent1">
+                <a:shade val="15000"/>
+              </a:schemeClr>
+            </a:lnRef>
+            <a:fillRef idx="1">
+              <a:schemeClr val="accent1"/>
+            </a:fillRef>
+            <a:effectRef idx="0">
+              <a:schemeClr val="accent1"/>
+            </a:effectRef>
+            <a:fontRef idx="minor">
+              <a:schemeClr val="lt1"/>
+            </a:fontRef>
+          </p:style>
+          <p:txBody>
+            <a:bodyPr rtlCol="0" anchor="ctr"/>
+            <a:lstStyle/>
+            <a:p>
+              <a:pPr algn="ctr"/>
+              <a:endParaRPr lang="en-US"/>
+            </a:p>
+          </p:txBody>
+        </p:sp>
+        <p:sp>
+          <p:nvSpPr>
+            <p:cNvPr id="197" name="Oval 196">
+              <a:extLst>
+                <a:ext uri="{FF2B5EF4-FFF2-40B4-BE49-F238E27FC236}">
+                  <a16:creationId xmlns:a16="http://schemas.microsoft.com/office/drawing/2014/main" id="{E5016161-360C-309B-E1F3-E1ACCAF33FA3}"/>
+                </a:ext>
+              </a:extLst>
+            </p:cNvPr>
+            <p:cNvSpPr/>
+            <p:nvPr/>
+          </p:nvSpPr>
+          <p:spPr>
+            <a:xfrm>
+              <a:off x="8200671" y="9405608"/>
+              <a:ext cx="684999" cy="689246"/>
+            </a:xfrm>
+            <a:prstGeom prst="ellipse">
+              <a:avLst/>
+            </a:prstGeom>
+            <a:solidFill>
+              <a:schemeClr val="bg2"/>
+            </a:solidFill>
+            <a:ln w="22225"/>
+          </p:spPr>
+          <p:style>
+            <a:lnRef idx="2">
+              <a:schemeClr val="accent1">
+                <a:shade val="15000"/>
+              </a:schemeClr>
+            </a:lnRef>
+            <a:fillRef idx="1">
+              <a:schemeClr val="accent1"/>
+            </a:fillRef>
+            <a:effectRef idx="0">
+              <a:schemeClr val="accent1"/>
+            </a:effectRef>
+            <a:fontRef idx="minor">
+              <a:schemeClr val="lt1"/>
+            </a:fontRef>
+          </p:style>
+          <p:txBody>
+            <a:bodyPr rtlCol="0" anchor="ctr"/>
+            <a:lstStyle/>
+            <a:p>
+              <a:pPr algn="ctr"/>
+              <a:endParaRPr lang="en-US"/>
+            </a:p>
+          </p:txBody>
+        </p:sp>
+        <p:sp>
+          <p:nvSpPr>
+            <p:cNvPr id="204" name="Oval 203">
+              <a:extLst>
+                <a:ext uri="{FF2B5EF4-FFF2-40B4-BE49-F238E27FC236}">
+                  <a16:creationId xmlns:a16="http://schemas.microsoft.com/office/drawing/2014/main" id="{6021BD98-17B1-1D3C-241B-4B198A201007}"/>
+                </a:ext>
+              </a:extLst>
+            </p:cNvPr>
+            <p:cNvSpPr/>
+            <p:nvPr/>
+          </p:nvSpPr>
+          <p:spPr>
+            <a:xfrm>
+              <a:off x="8200671" y="10187003"/>
+              <a:ext cx="684999" cy="689246"/>
+            </a:xfrm>
+            <a:prstGeom prst="ellipse">
+              <a:avLst/>
+            </a:prstGeom>
+            <a:solidFill>
+              <a:schemeClr val="bg2"/>
+            </a:solidFill>
+            <a:ln w="22225"/>
+          </p:spPr>
+          <p:style>
+            <a:lnRef idx="2">
+              <a:schemeClr val="accent1">
+                <a:shade val="15000"/>
+              </a:schemeClr>
+            </a:lnRef>
+            <a:fillRef idx="1">
+              <a:schemeClr val="accent1"/>
+            </a:fillRef>
+            <a:effectRef idx="0">
+              <a:schemeClr val="accent1"/>
+            </a:effectRef>
+            <a:fontRef idx="minor">
+              <a:schemeClr val="lt1"/>
+            </a:fontRef>
+          </p:style>
+          <p:txBody>
+            <a:bodyPr rtlCol="0" anchor="ctr"/>
+            <a:lstStyle/>
+            <a:p>
+              <a:pPr algn="ctr"/>
+              <a:endParaRPr lang="en-US"/>
+            </a:p>
+          </p:txBody>
+        </p:sp>
+        <p:sp>
+          <p:nvSpPr>
+            <p:cNvPr id="205" name="Oval 204">
+              <a:extLst>
+                <a:ext uri="{FF2B5EF4-FFF2-40B4-BE49-F238E27FC236}">
+                  <a16:creationId xmlns:a16="http://schemas.microsoft.com/office/drawing/2014/main" id="{7A41D075-CE16-5107-F667-22526F4EAAE6}"/>
+                </a:ext>
+              </a:extLst>
+            </p:cNvPr>
+            <p:cNvSpPr/>
+            <p:nvPr/>
+          </p:nvSpPr>
+          <p:spPr>
+            <a:xfrm>
+              <a:off x="8990344" y="9405608"/>
+              <a:ext cx="684999" cy="689246"/>
+            </a:xfrm>
+            <a:prstGeom prst="ellipse">
+              <a:avLst/>
+            </a:prstGeom>
+            <a:solidFill>
+              <a:schemeClr val="bg2"/>
+            </a:solidFill>
+            <a:ln w="22225"/>
+          </p:spPr>
+          <p:style>
+            <a:lnRef idx="2">
+              <a:schemeClr val="accent1">
+                <a:shade val="15000"/>
+              </a:schemeClr>
+            </a:lnRef>
+            <a:fillRef idx="1">
+              <a:schemeClr val="accent1"/>
+            </a:fillRef>
+            <a:effectRef idx="0">
+              <a:schemeClr val="accent1"/>
+            </a:effectRef>
+            <a:fontRef idx="minor">
+              <a:schemeClr val="lt1"/>
+            </a:fontRef>
+          </p:style>
+          <p:txBody>
+            <a:bodyPr rtlCol="0" anchor="ctr"/>
+            <a:lstStyle/>
+            <a:p>
+              <a:pPr algn="ctr"/>
+              <a:endParaRPr lang="en-US"/>
+            </a:p>
+          </p:txBody>
+        </p:sp>
+        <p:sp>
+          <p:nvSpPr>
+            <p:cNvPr id="206" name="Oval 205">
+              <a:extLst>
+                <a:ext uri="{FF2B5EF4-FFF2-40B4-BE49-F238E27FC236}">
+                  <a16:creationId xmlns:a16="http://schemas.microsoft.com/office/drawing/2014/main" id="{1C30829F-7B86-E12B-C622-CBD1DD83645F}"/>
+                </a:ext>
+              </a:extLst>
+            </p:cNvPr>
+            <p:cNvSpPr/>
+            <p:nvPr/>
+          </p:nvSpPr>
+          <p:spPr>
+            <a:xfrm>
+              <a:off x="8990344" y="10187003"/>
+              <a:ext cx="684999" cy="689246"/>
+            </a:xfrm>
+            <a:prstGeom prst="ellipse">
+              <a:avLst/>
+            </a:prstGeom>
+            <a:solidFill>
+              <a:schemeClr val="bg2"/>
+            </a:solidFill>
+            <a:ln w="22225"/>
+          </p:spPr>
+          <p:style>
+            <a:lnRef idx="2">
+              <a:schemeClr val="accent1">
+                <a:shade val="15000"/>
+              </a:schemeClr>
+            </a:lnRef>
+            <a:fillRef idx="1">
+              <a:schemeClr val="accent1"/>
+            </a:fillRef>
+            <a:effectRef idx="0">
+              <a:schemeClr val="accent1"/>
+            </a:effectRef>
+            <a:fontRef idx="minor">
+              <a:schemeClr val="lt1"/>
+            </a:fontRef>
+          </p:style>
+          <p:txBody>
+            <a:bodyPr rtlCol="0" anchor="ctr"/>
+            <a:lstStyle/>
+            <a:p>
+              <a:pPr algn="ctr"/>
+              <a:endParaRPr lang="en-US"/>
+            </a:p>
+          </p:txBody>
+        </p:sp>
+        <p:sp>
+          <p:nvSpPr>
+            <p:cNvPr id="207" name="Oval 206">
+              <a:extLst>
+                <a:ext uri="{FF2B5EF4-FFF2-40B4-BE49-F238E27FC236}">
+                  <a16:creationId xmlns:a16="http://schemas.microsoft.com/office/drawing/2014/main" id="{A77B2F02-5765-FED8-94E3-734B2F32FFD4}"/>
+                </a:ext>
+              </a:extLst>
+            </p:cNvPr>
+            <p:cNvSpPr/>
+            <p:nvPr/>
+          </p:nvSpPr>
+          <p:spPr>
+            <a:xfrm>
+              <a:off x="9780017" y="9405608"/>
+              <a:ext cx="684999" cy="689246"/>
+            </a:xfrm>
+            <a:prstGeom prst="ellipse">
+              <a:avLst/>
+            </a:prstGeom>
+            <a:solidFill>
+              <a:schemeClr val="bg2"/>
+            </a:solidFill>
+            <a:ln w="22225"/>
+          </p:spPr>
+          <p:style>
+            <a:lnRef idx="2">
+              <a:schemeClr val="accent1">
+                <a:shade val="15000"/>
+              </a:schemeClr>
+            </a:lnRef>
+            <a:fillRef idx="1">
+              <a:schemeClr val="accent1"/>
+            </a:fillRef>
+            <a:effectRef idx="0">
+              <a:schemeClr val="accent1"/>
+            </a:effectRef>
+            <a:fontRef idx="minor">
+              <a:schemeClr val="lt1"/>
+            </a:fontRef>
+          </p:style>
+          <p:txBody>
+            <a:bodyPr rtlCol="0" anchor="ctr"/>
+            <a:lstStyle/>
+            <a:p>
+              <a:pPr algn="ctr"/>
+              <a:endParaRPr lang="en-US"/>
+            </a:p>
+          </p:txBody>
+        </p:sp>
+        <p:sp>
+          <p:nvSpPr>
+            <p:cNvPr id="208" name="Oval 207">
+              <a:extLst>
+                <a:ext uri="{FF2B5EF4-FFF2-40B4-BE49-F238E27FC236}">
+                  <a16:creationId xmlns:a16="http://schemas.microsoft.com/office/drawing/2014/main" id="{C37EBCCB-94B2-2036-31B8-B52F3DE42280}"/>
+                </a:ext>
+              </a:extLst>
+            </p:cNvPr>
+            <p:cNvSpPr/>
+            <p:nvPr/>
+          </p:nvSpPr>
+          <p:spPr>
+            <a:xfrm>
+              <a:off x="9780017" y="10187003"/>
+              <a:ext cx="684999" cy="689246"/>
+            </a:xfrm>
+            <a:prstGeom prst="ellipse">
+              <a:avLst/>
+            </a:prstGeom>
+            <a:solidFill>
+              <a:schemeClr val="bg2"/>
+            </a:solidFill>
+            <a:ln w="22225"/>
+          </p:spPr>
+          <p:style>
+            <a:lnRef idx="2">
+              <a:schemeClr val="accent1">
+                <a:shade val="15000"/>
+              </a:schemeClr>
+            </a:lnRef>
+            <a:fillRef idx="1">
+              <a:schemeClr val="accent1"/>
+            </a:fillRef>
+            <a:effectRef idx="0">
+              <a:schemeClr val="accent1"/>
+            </a:effectRef>
+            <a:fontRef idx="minor">
+              <a:schemeClr val="lt1"/>
+            </a:fontRef>
+          </p:style>
+          <p:txBody>
+            <a:bodyPr rtlCol="0" anchor="ctr"/>
+            <a:lstStyle/>
+            <a:p>
+              <a:pPr algn="ctr"/>
+              <a:endParaRPr lang="en-US"/>
+            </a:p>
+          </p:txBody>
+        </p:sp>
+        <p:sp>
+          <p:nvSpPr>
+            <p:cNvPr id="209" name="Oval 208">
+              <a:extLst>
+                <a:ext uri="{FF2B5EF4-FFF2-40B4-BE49-F238E27FC236}">
+                  <a16:creationId xmlns:a16="http://schemas.microsoft.com/office/drawing/2014/main" id="{C7F9E47A-7BFC-DEEE-CFFF-46C0F5F49E2C}"/>
+                </a:ext>
+              </a:extLst>
+            </p:cNvPr>
+            <p:cNvSpPr/>
+            <p:nvPr/>
+          </p:nvSpPr>
+          <p:spPr>
+            <a:xfrm>
+              <a:off x="10547561" y="9842380"/>
+              <a:ext cx="684999" cy="689246"/>
+            </a:xfrm>
+            <a:prstGeom prst="ellipse">
+              <a:avLst/>
+            </a:prstGeom>
+            <a:solidFill>
+              <a:schemeClr val="bg2"/>
+            </a:solidFill>
+            <a:ln w="22225"/>
+          </p:spPr>
+          <p:style>
+            <a:lnRef idx="2">
+              <a:schemeClr val="accent1">
+                <a:shade val="15000"/>
+              </a:schemeClr>
+            </a:lnRef>
+            <a:fillRef idx="1">
+              <a:schemeClr val="accent1"/>
+            </a:fillRef>
+            <a:effectRef idx="0">
+              <a:schemeClr val="accent1"/>
+            </a:effectRef>
+            <a:fontRef idx="minor">
+              <a:schemeClr val="lt1"/>
+            </a:fontRef>
+          </p:style>
+          <p:txBody>
+            <a:bodyPr rtlCol="0" anchor="ctr"/>
+            <a:lstStyle/>
+            <a:p>
+              <a:pPr algn="ctr"/>
+              <a:endParaRPr lang="en-US"/>
+            </a:p>
+          </p:txBody>
+        </p:sp>
+        <p:sp>
+          <p:nvSpPr>
+            <p:cNvPr id="203" name="TextBox 202">
+              <a:extLst>
+                <a:ext uri="{FF2B5EF4-FFF2-40B4-BE49-F238E27FC236}">
+                  <a16:creationId xmlns:a16="http://schemas.microsoft.com/office/drawing/2014/main" id="{BDC6CA83-9391-7B2D-A9F6-BBBB070A3D25}"/>
+                </a:ext>
+              </a:extLst>
+            </p:cNvPr>
+            <p:cNvSpPr txBox="1"/>
+            <p:nvPr/>
+          </p:nvSpPr>
+          <p:spPr>
+            <a:xfrm>
+              <a:off x="10491741" y="10063892"/>
+              <a:ext cx="796638" cy="261610"/>
+            </a:xfrm>
+            <a:prstGeom prst="rect">
+              <a:avLst/>
+            </a:prstGeom>
+            <a:noFill/>
+          </p:spPr>
+          <p:txBody>
+            <a:bodyPr wrap="square">
+              <a:spAutoFit/>
+            </a:bodyPr>
+            <a:lstStyle/>
+            <a:p>
+              <a:pPr algn="ctr"/>
+              <a:r>
+                <a:rPr lang="en-US" sz="1100" dirty="0">
+                  <a:solidFill>
+                    <a:schemeClr val="tx1"/>
+                  </a:solidFill>
+                </a:rPr>
+                <a:t>T</a:t>
+              </a:r>
+              <a:r>
+                <a:rPr lang="en-US" sz="1100" baseline="-25000" dirty="0">
+                  <a:solidFill>
+                    <a:schemeClr val="tx1"/>
+                  </a:solidFill>
+                </a:rPr>
+                <a:t>1</a:t>
+              </a:r>
+              <a:r>
+                <a:rPr lang="en-US" sz="1100" dirty="0">
+                  <a:solidFill>
+                    <a:schemeClr val="tx1"/>
+                  </a:solidFill>
+                </a:rPr>
+                <a:t> ∘ T</a:t>
+              </a:r>
+              <a:r>
+                <a:rPr lang="en-US" sz="1100" baseline="-25000" dirty="0">
+                  <a:solidFill>
+                    <a:schemeClr val="tx1"/>
+                  </a:solidFill>
+                </a:rPr>
+                <a:t>2 </a:t>
+              </a:r>
+              <a:r>
+                <a:rPr lang="en-US" sz="1100" dirty="0"/>
+                <a:t>∘ T</a:t>
+              </a:r>
+              <a:r>
+                <a:rPr lang="en-US" sz="1100" baseline="-25000" dirty="0"/>
+                <a:t>5</a:t>
+              </a:r>
+            </a:p>
+          </p:txBody>
+        </p:sp>
+        <p:sp>
+          <p:nvSpPr>
+            <p:cNvPr id="210" name="TextBox 209">
+              <a:extLst>
+                <a:ext uri="{FF2B5EF4-FFF2-40B4-BE49-F238E27FC236}">
+                  <a16:creationId xmlns:a16="http://schemas.microsoft.com/office/drawing/2014/main" id="{6F0A0F59-27B6-42DC-EA9A-22F6803E493E}"/>
+                </a:ext>
+              </a:extLst>
+            </p:cNvPr>
+            <p:cNvSpPr txBox="1"/>
+            <p:nvPr/>
+          </p:nvSpPr>
+          <p:spPr>
+            <a:xfrm>
+              <a:off x="8137887" y="10400821"/>
+              <a:ext cx="796638" cy="261610"/>
+            </a:xfrm>
+            <a:prstGeom prst="rect">
+              <a:avLst/>
+            </a:prstGeom>
+            <a:noFill/>
+          </p:spPr>
+          <p:txBody>
+            <a:bodyPr wrap="square">
+              <a:spAutoFit/>
+            </a:bodyPr>
+            <a:lstStyle/>
+            <a:p>
+              <a:pPr algn="ctr"/>
+              <a:r>
+                <a:rPr lang="en-US" sz="1100" dirty="0">
+                  <a:solidFill>
+                    <a:schemeClr val="tx1"/>
+                  </a:solidFill>
+                </a:rPr>
+                <a:t>T</a:t>
+              </a:r>
+              <a:r>
+                <a:rPr lang="en-US" sz="1100" baseline="-25000" dirty="0">
+                  <a:solidFill>
+                    <a:schemeClr val="tx1"/>
+                  </a:solidFill>
+                </a:rPr>
+                <a:t>1</a:t>
+              </a:r>
+              <a:r>
+                <a:rPr lang="en-US" sz="1100" dirty="0">
+                  <a:solidFill>
+                    <a:schemeClr val="tx1"/>
+                  </a:solidFill>
+                </a:rPr>
+                <a:t> ∘ T</a:t>
+              </a:r>
+              <a:r>
+                <a:rPr lang="en-US" sz="1100" baseline="-25000" dirty="0">
+                  <a:solidFill>
+                    <a:schemeClr val="tx1"/>
+                  </a:solidFill>
+                </a:rPr>
+                <a:t>2</a:t>
+              </a:r>
+              <a:endParaRPr lang="en-US" sz="1100" baseline="-25000" dirty="0"/>
+            </a:p>
+          </p:txBody>
+        </p:sp>
+        <p:sp>
+          <p:nvSpPr>
+            <p:cNvPr id="211" name="TextBox 210">
+              <a:extLst>
+                <a:ext uri="{FF2B5EF4-FFF2-40B4-BE49-F238E27FC236}">
+                  <a16:creationId xmlns:a16="http://schemas.microsoft.com/office/drawing/2014/main" id="{1C5AFF65-D9DD-9944-0A72-9A46B78112F8}"/>
+                </a:ext>
+              </a:extLst>
+            </p:cNvPr>
+            <p:cNvSpPr txBox="1"/>
+            <p:nvPr/>
+          </p:nvSpPr>
+          <p:spPr>
+            <a:xfrm>
+              <a:off x="8948454" y="10400821"/>
+              <a:ext cx="796638" cy="261610"/>
+            </a:xfrm>
+            <a:prstGeom prst="rect">
+              <a:avLst/>
+            </a:prstGeom>
+            <a:noFill/>
+          </p:spPr>
+          <p:txBody>
+            <a:bodyPr wrap="square">
+              <a:spAutoFit/>
+            </a:bodyPr>
+            <a:lstStyle/>
+            <a:p>
+              <a:pPr algn="ctr"/>
+              <a:r>
+                <a:rPr lang="en-US" sz="1100" dirty="0">
+                  <a:solidFill>
+                    <a:schemeClr val="tx1"/>
+                  </a:solidFill>
+                </a:rPr>
+                <a:t>T</a:t>
+              </a:r>
+              <a:r>
+                <a:rPr lang="en-US" sz="1100" baseline="-25000" dirty="0">
+                  <a:solidFill>
+                    <a:schemeClr val="tx1"/>
+                  </a:solidFill>
+                </a:rPr>
+                <a:t>1</a:t>
+              </a:r>
+              <a:r>
+                <a:rPr lang="en-US" sz="1100" dirty="0">
+                  <a:solidFill>
+                    <a:schemeClr val="tx1"/>
+                  </a:solidFill>
+                </a:rPr>
+                <a:t> ∘ T</a:t>
+              </a:r>
+              <a:r>
+                <a:rPr lang="en-US" sz="1100" baseline="-25000" dirty="0">
+                  <a:solidFill>
+                    <a:schemeClr val="tx1"/>
+                  </a:solidFill>
+                </a:rPr>
+                <a:t>5</a:t>
+              </a:r>
+              <a:endParaRPr lang="en-US" sz="1100" baseline="-25000" dirty="0"/>
+            </a:p>
+          </p:txBody>
+        </p:sp>
+        <p:sp>
+          <p:nvSpPr>
+            <p:cNvPr id="212" name="TextBox 211">
+              <a:extLst>
+                <a:ext uri="{FF2B5EF4-FFF2-40B4-BE49-F238E27FC236}">
+                  <a16:creationId xmlns:a16="http://schemas.microsoft.com/office/drawing/2014/main" id="{B463F4F8-1288-6257-F382-B06872FB2040}"/>
+                </a:ext>
+              </a:extLst>
+            </p:cNvPr>
+            <p:cNvSpPr txBox="1"/>
+            <p:nvPr/>
+          </p:nvSpPr>
+          <p:spPr>
+            <a:xfrm>
+              <a:off x="9731162" y="10400821"/>
+              <a:ext cx="796638" cy="261610"/>
+            </a:xfrm>
+            <a:prstGeom prst="rect">
+              <a:avLst/>
+            </a:prstGeom>
+            <a:noFill/>
+          </p:spPr>
+          <p:txBody>
+            <a:bodyPr wrap="square">
+              <a:spAutoFit/>
+            </a:bodyPr>
+            <a:lstStyle/>
+            <a:p>
+              <a:pPr algn="ctr"/>
+              <a:r>
+                <a:rPr lang="en-US" sz="1100" dirty="0">
+                  <a:solidFill>
+                    <a:schemeClr val="tx1"/>
+                  </a:solidFill>
+                </a:rPr>
+                <a:t>T</a:t>
+              </a:r>
+              <a:r>
+                <a:rPr lang="en-US" sz="1100" baseline="-25000" dirty="0">
+                  <a:solidFill>
+                    <a:schemeClr val="tx1"/>
+                  </a:solidFill>
+                </a:rPr>
+                <a:t>2</a:t>
+              </a:r>
+              <a:r>
+                <a:rPr lang="en-US" sz="1100" dirty="0">
+                  <a:solidFill>
+                    <a:schemeClr val="tx1"/>
+                  </a:solidFill>
+                </a:rPr>
+                <a:t> ∘ T</a:t>
+              </a:r>
+              <a:r>
+                <a:rPr lang="en-US" sz="1100" baseline="-25000" dirty="0">
+                  <a:solidFill>
+                    <a:schemeClr val="tx1"/>
+                  </a:solidFill>
+                </a:rPr>
+                <a:t>5</a:t>
+              </a:r>
+              <a:endParaRPr lang="en-US" sz="1100" baseline="-25000" dirty="0"/>
+            </a:p>
+          </p:txBody>
+        </p:sp>
+        <p:sp>
+          <p:nvSpPr>
+            <p:cNvPr id="213" name="TextBox 212">
+              <a:extLst>
+                <a:ext uri="{FF2B5EF4-FFF2-40B4-BE49-F238E27FC236}">
+                  <a16:creationId xmlns:a16="http://schemas.microsoft.com/office/drawing/2014/main" id="{732C086B-4413-0501-4613-C4C93A65D112}"/>
+                </a:ext>
+              </a:extLst>
+            </p:cNvPr>
+            <p:cNvSpPr txBox="1"/>
+            <p:nvPr/>
+          </p:nvSpPr>
+          <p:spPr>
+            <a:xfrm>
+              <a:off x="8152434" y="9619426"/>
+              <a:ext cx="796638" cy="261610"/>
+            </a:xfrm>
+            <a:prstGeom prst="rect">
+              <a:avLst/>
+            </a:prstGeom>
+            <a:noFill/>
+          </p:spPr>
+          <p:txBody>
+            <a:bodyPr wrap="square">
+              <a:spAutoFit/>
+            </a:bodyPr>
+            <a:lstStyle/>
+            <a:p>
+              <a:pPr algn="ctr"/>
+              <a:r>
+                <a:rPr lang="en-US" sz="1100" dirty="0">
+                  <a:solidFill>
+                    <a:schemeClr val="tx1"/>
+                  </a:solidFill>
+                </a:rPr>
+                <a:t>T</a:t>
+              </a:r>
+              <a:r>
+                <a:rPr lang="en-US" sz="1100" baseline="-25000" dirty="0">
+                  <a:solidFill>
+                    <a:schemeClr val="tx1"/>
+                  </a:solidFill>
+                </a:rPr>
+                <a:t>1</a:t>
+              </a:r>
+              <a:endParaRPr lang="en-US" sz="1100" baseline="-25000" dirty="0"/>
+            </a:p>
+          </p:txBody>
+        </p:sp>
+        <p:sp>
+          <p:nvSpPr>
+            <p:cNvPr id="214" name="TextBox 213">
+              <a:extLst>
+                <a:ext uri="{FF2B5EF4-FFF2-40B4-BE49-F238E27FC236}">
+                  <a16:creationId xmlns:a16="http://schemas.microsoft.com/office/drawing/2014/main" id="{FD363BB7-0CD7-BA65-202C-1A2468D2DD94}"/>
+                </a:ext>
+              </a:extLst>
+            </p:cNvPr>
+            <p:cNvSpPr txBox="1"/>
+            <p:nvPr/>
+          </p:nvSpPr>
+          <p:spPr>
+            <a:xfrm>
+              <a:off x="8942107" y="9624897"/>
+              <a:ext cx="796638" cy="261610"/>
+            </a:xfrm>
+            <a:prstGeom prst="rect">
+              <a:avLst/>
+            </a:prstGeom>
+            <a:noFill/>
+          </p:spPr>
+          <p:txBody>
+            <a:bodyPr wrap="square">
+              <a:spAutoFit/>
+            </a:bodyPr>
+            <a:lstStyle/>
+            <a:p>
+              <a:pPr algn="ctr"/>
+              <a:r>
+                <a:rPr lang="en-US" sz="1100" dirty="0">
+                  <a:solidFill>
+                    <a:schemeClr val="tx1"/>
+                  </a:solidFill>
+                </a:rPr>
+                <a:t>T</a:t>
+              </a:r>
+              <a:r>
+                <a:rPr lang="en-US" sz="1100" baseline="-25000" dirty="0"/>
+                <a:t>2</a:t>
+              </a:r>
+            </a:p>
+          </p:txBody>
+        </p:sp>
+        <p:sp>
+          <p:nvSpPr>
+            <p:cNvPr id="215" name="TextBox 214">
+              <a:extLst>
+                <a:ext uri="{FF2B5EF4-FFF2-40B4-BE49-F238E27FC236}">
+                  <a16:creationId xmlns:a16="http://schemas.microsoft.com/office/drawing/2014/main" id="{0549EFD8-C758-6BBE-F799-2AE2940C7A74}"/>
+                </a:ext>
+              </a:extLst>
+            </p:cNvPr>
+            <p:cNvSpPr txBox="1"/>
+            <p:nvPr/>
+          </p:nvSpPr>
+          <p:spPr>
+            <a:xfrm>
+              <a:off x="9738745" y="9618644"/>
+              <a:ext cx="796638" cy="261610"/>
+            </a:xfrm>
+            <a:prstGeom prst="rect">
+              <a:avLst/>
+            </a:prstGeom>
+            <a:noFill/>
+          </p:spPr>
+          <p:txBody>
+            <a:bodyPr wrap="square">
+              <a:spAutoFit/>
+            </a:bodyPr>
+            <a:lstStyle/>
+            <a:p>
+              <a:pPr algn="ctr"/>
+              <a:r>
+                <a:rPr lang="en-US" sz="1100" dirty="0">
+                  <a:solidFill>
+                    <a:schemeClr val="tx1"/>
+                  </a:solidFill>
+                </a:rPr>
+                <a:t>T</a:t>
+              </a:r>
+              <a:r>
+                <a:rPr lang="en-US" sz="1100" baseline="-25000" dirty="0"/>
+                <a:t>5</a:t>
+              </a:r>
+            </a:p>
+          </p:txBody>
+        </p:sp>
+        <p:sp>
+          <p:nvSpPr>
+            <p:cNvPr id="216" name="Oval 215">
+              <a:extLst>
+                <a:ext uri="{FF2B5EF4-FFF2-40B4-BE49-F238E27FC236}">
+                  <a16:creationId xmlns:a16="http://schemas.microsoft.com/office/drawing/2014/main" id="{9DCE1626-B735-1DD1-6F94-E6FF84025459}"/>
+                </a:ext>
+              </a:extLst>
+            </p:cNvPr>
+            <p:cNvSpPr/>
+            <p:nvPr/>
+          </p:nvSpPr>
+          <p:spPr>
+            <a:xfrm>
+              <a:off x="11668205" y="9595481"/>
+              <a:ext cx="267629" cy="267629"/>
+            </a:xfrm>
+            <a:prstGeom prst="ellipse">
+              <a:avLst/>
+            </a:prstGeom>
+            <a:solidFill>
+              <a:schemeClr val="bg2"/>
+            </a:solidFill>
+            <a:ln w="22225"/>
+          </p:spPr>
+          <p:style>
+            <a:lnRef idx="2">
+              <a:schemeClr val="accent1">
+                <a:shade val="15000"/>
+              </a:schemeClr>
+            </a:lnRef>
+            <a:fillRef idx="1">
+              <a:schemeClr val="accent1"/>
+            </a:fillRef>
+            <a:effectRef idx="0">
+              <a:schemeClr val="accent1"/>
+            </a:effectRef>
+            <a:fontRef idx="minor">
+              <a:schemeClr val="lt1"/>
+            </a:fontRef>
+          </p:style>
+          <p:txBody>
+            <a:bodyPr rtlCol="0" anchor="ctr"/>
+            <a:lstStyle/>
+            <a:p>
+              <a:pPr algn="ctr"/>
+              <a:endParaRPr lang="en-US"/>
+            </a:p>
+          </p:txBody>
+        </p:sp>
+        <p:sp>
+          <p:nvSpPr>
+            <p:cNvPr id="217" name="Oval 216">
+              <a:extLst>
+                <a:ext uri="{FF2B5EF4-FFF2-40B4-BE49-F238E27FC236}">
+                  <a16:creationId xmlns:a16="http://schemas.microsoft.com/office/drawing/2014/main" id="{0D97623D-61D4-2142-BE71-9472726F2E06}"/>
+                </a:ext>
+              </a:extLst>
+            </p:cNvPr>
+            <p:cNvSpPr/>
+            <p:nvPr/>
+          </p:nvSpPr>
+          <p:spPr>
+            <a:xfrm>
+              <a:off x="11681980" y="10049209"/>
+              <a:ext cx="267629" cy="267629"/>
+            </a:xfrm>
+            <a:prstGeom prst="ellipse">
+              <a:avLst/>
+            </a:prstGeom>
+            <a:solidFill>
+              <a:srgbClr val="00B050"/>
+            </a:solidFill>
+            <a:ln w="22225"/>
+          </p:spPr>
+          <p:style>
+            <a:lnRef idx="2">
+              <a:schemeClr val="accent1">
+                <a:shade val="15000"/>
+              </a:schemeClr>
+            </a:lnRef>
+            <a:fillRef idx="1">
+              <a:schemeClr val="accent1"/>
+            </a:fillRef>
+            <a:effectRef idx="0">
+              <a:schemeClr val="accent1"/>
+            </a:effectRef>
+            <a:fontRef idx="minor">
+              <a:schemeClr val="lt1"/>
+            </a:fontRef>
+          </p:style>
+          <p:txBody>
+            <a:bodyPr rtlCol="0" anchor="ctr"/>
+            <a:lstStyle/>
+            <a:p>
+              <a:pPr algn="ctr"/>
+              <a:endParaRPr lang="en-US" dirty="0"/>
+            </a:p>
+          </p:txBody>
+        </p:sp>
+        <p:sp>
+          <p:nvSpPr>
+            <p:cNvPr id="218" name="Oval 217">
+              <a:extLst>
+                <a:ext uri="{FF2B5EF4-FFF2-40B4-BE49-F238E27FC236}">
+                  <a16:creationId xmlns:a16="http://schemas.microsoft.com/office/drawing/2014/main" id="{9F983B1A-0EC6-E7D6-F220-DCBAFD3547E4}"/>
+                </a:ext>
+              </a:extLst>
+            </p:cNvPr>
+            <p:cNvSpPr/>
+            <p:nvPr/>
+          </p:nvSpPr>
+          <p:spPr>
+            <a:xfrm>
+              <a:off x="11681979" y="10508782"/>
+              <a:ext cx="267629" cy="267629"/>
+            </a:xfrm>
+            <a:prstGeom prst="ellipse">
+              <a:avLst/>
+            </a:prstGeom>
+            <a:solidFill>
+              <a:srgbClr val="FF0000"/>
+            </a:solidFill>
+            <a:ln w="22225"/>
+          </p:spPr>
+          <p:style>
+            <a:lnRef idx="2">
+              <a:schemeClr val="accent1">
+                <a:shade val="15000"/>
+              </a:schemeClr>
+            </a:lnRef>
+            <a:fillRef idx="1">
+              <a:schemeClr val="accent1"/>
+            </a:fillRef>
+            <a:effectRef idx="0">
+              <a:schemeClr val="accent1"/>
+            </a:effectRef>
+            <a:fontRef idx="minor">
+              <a:schemeClr val="lt1"/>
+            </a:fontRef>
+          </p:style>
+          <p:txBody>
+            <a:bodyPr rtlCol="0" anchor="ctr"/>
+            <a:lstStyle/>
+            <a:p>
+              <a:pPr algn="ctr"/>
+              <a:endParaRPr lang="en-US" dirty="0">
+                <a:solidFill>
+                  <a:srgbClr val="FF0000"/>
+                </a:solidFill>
+              </a:endParaRPr>
+            </a:p>
+          </p:txBody>
+        </p:sp>
+        <p:sp>
+          <p:nvSpPr>
+            <p:cNvPr id="219" name="TextBox 218">
+              <a:extLst>
+                <a:ext uri="{FF2B5EF4-FFF2-40B4-BE49-F238E27FC236}">
+                  <a16:creationId xmlns:a16="http://schemas.microsoft.com/office/drawing/2014/main" id="{6BF6343E-E58E-5272-E7CC-3F48EB1C84E0}"/>
+                </a:ext>
+              </a:extLst>
+            </p:cNvPr>
+            <p:cNvSpPr txBox="1"/>
+            <p:nvPr/>
+          </p:nvSpPr>
+          <p:spPr>
+            <a:xfrm>
+              <a:off x="11971560" y="9544629"/>
+              <a:ext cx="1673663" cy="369332"/>
+            </a:xfrm>
+            <a:prstGeom prst="rect">
+              <a:avLst/>
+            </a:prstGeom>
+            <a:noFill/>
+          </p:spPr>
+          <p:txBody>
+            <a:bodyPr wrap="none" rtlCol="0">
+              <a:spAutoFit/>
+            </a:bodyPr>
+            <a:lstStyle/>
+            <a:p>
+              <a:r>
+                <a:rPr lang="en-US" dirty="0"/>
+                <a:t>No information</a:t>
+              </a:r>
+            </a:p>
+          </p:txBody>
+        </p:sp>
+        <p:sp>
+          <p:nvSpPr>
+            <p:cNvPr id="220" name="TextBox 219">
+              <a:extLst>
+                <a:ext uri="{FF2B5EF4-FFF2-40B4-BE49-F238E27FC236}">
+                  <a16:creationId xmlns:a16="http://schemas.microsoft.com/office/drawing/2014/main" id="{95BC2AE5-DB98-9CE6-8630-B1314766CE9C}"/>
+                </a:ext>
+              </a:extLst>
+            </p:cNvPr>
+            <p:cNvSpPr txBox="1"/>
+            <p:nvPr/>
+          </p:nvSpPr>
+          <p:spPr>
+            <a:xfrm>
+              <a:off x="11971560" y="9998357"/>
+              <a:ext cx="1400833" cy="369332"/>
+            </a:xfrm>
+            <a:prstGeom prst="rect">
+              <a:avLst/>
+            </a:prstGeom>
+            <a:noFill/>
+          </p:spPr>
+          <p:txBody>
+            <a:bodyPr wrap="none" rtlCol="0">
+              <a:spAutoFit/>
+            </a:bodyPr>
+            <a:lstStyle/>
+            <a:p>
+              <a:r>
+                <a:rPr lang="en-US" dirty="0"/>
+                <a:t>A fixed point</a:t>
+              </a:r>
+            </a:p>
+          </p:txBody>
+        </p:sp>
+        <p:sp>
+          <p:nvSpPr>
+            <p:cNvPr id="221" name="TextBox 220">
+              <a:extLst>
+                <a:ext uri="{FF2B5EF4-FFF2-40B4-BE49-F238E27FC236}">
+                  <a16:creationId xmlns:a16="http://schemas.microsoft.com/office/drawing/2014/main" id="{9331B05D-42D8-9C3C-6A65-57F2FFC7BCD5}"/>
+                </a:ext>
+              </a:extLst>
+            </p:cNvPr>
+            <p:cNvSpPr txBox="1"/>
+            <p:nvPr/>
+          </p:nvSpPr>
+          <p:spPr>
+            <a:xfrm>
+              <a:off x="11971560" y="10457930"/>
+              <a:ext cx="1799980" cy="369332"/>
+            </a:xfrm>
+            <a:prstGeom prst="rect">
+              <a:avLst/>
+            </a:prstGeom>
+            <a:noFill/>
+          </p:spPr>
+          <p:txBody>
+            <a:bodyPr wrap="none" rtlCol="0">
+              <a:spAutoFit/>
+            </a:bodyPr>
+            <a:lstStyle/>
+            <a:p>
+              <a:r>
+                <a:rPr lang="en-US" dirty="0"/>
+                <a:t>Not a fixed point</a:t>
+              </a:r>
+            </a:p>
+          </p:txBody>
+        </p:sp>
+      </p:grpSp>
+    </p:spTree>
+    <p:extLst>
+      <p:ext uri="{BB962C8B-B14F-4D97-AF65-F5344CB8AC3E}">
+        <p14:creationId xmlns:p14="http://schemas.microsoft.com/office/powerpoint/2010/main" val="3541273664"/>
       </p:ext>
     </p:extLst>
   </p:cSld>

--- a/images/icu.pptx
+++ b/images/icu.pptx
@@ -6922,10 +6922,10 @@
       </p:grpSpPr>
       <p:grpSp>
         <p:nvGrpSpPr>
-          <p:cNvPr id="11" name="Group 10">
+          <p:cNvPr id="32" name="Group 31">
             <a:extLst>
               <a:ext uri="{FF2B5EF4-FFF2-40B4-BE49-F238E27FC236}">
-                <a16:creationId xmlns:a16="http://schemas.microsoft.com/office/drawing/2014/main" id="{5003E878-E299-B5E5-89E5-C1453CD14CFA}"/>
+                <a16:creationId xmlns:a16="http://schemas.microsoft.com/office/drawing/2014/main" id="{1C7713F5-0FDF-9235-9A4C-E932B7478D85}"/>
               </a:ext>
             </a:extLst>
           </p:cNvPr>
@@ -6934,10 +6934,10 @@
         </p:nvGrpSpPr>
         <p:grpSpPr>
           <a:xfrm>
-            <a:off x="338600" y="2325510"/>
-            <a:ext cx="9499881" cy="3575753"/>
-            <a:chOff x="338600" y="2325510"/>
-            <a:chExt cx="9499881" cy="3575753"/>
+            <a:off x="637952" y="2456121"/>
+            <a:ext cx="10228521" cy="3445142"/>
+            <a:chOff x="637952" y="2456121"/>
+            <a:chExt cx="10228521" cy="3445142"/>
           </a:xfrm>
         </p:grpSpPr>
         <p:sp>
@@ -6954,8 +6954,8 @@
           </p:nvSpPr>
           <p:spPr>
             <a:xfrm>
-              <a:off x="338600" y="2325510"/>
-              <a:ext cx="9499881" cy="3575753"/>
+              <a:off x="637952" y="2456121"/>
+              <a:ext cx="10228521" cy="3445142"/>
             </a:xfrm>
             <a:prstGeom prst="roundRect">
               <a:avLst>
@@ -7019,7 +7019,7 @@
           </p:blipFill>
           <p:spPr>
             <a:xfrm>
-              <a:off x="8650724" y="3124451"/>
+              <a:off x="9607658" y="3124451"/>
               <a:ext cx="634696" cy="634696"/>
             </a:xfrm>
             <a:prstGeom prst="rect">
@@ -7054,7 +7054,7 @@
           </p:blipFill>
           <p:spPr>
             <a:xfrm>
-              <a:off x="844863" y="4754391"/>
+              <a:off x="1174474" y="4754391"/>
               <a:ext cx="634696" cy="634696"/>
             </a:xfrm>
             <a:prstGeom prst="rect">
@@ -7089,7 +7089,7 @@
           </p:blipFill>
           <p:spPr>
             <a:xfrm>
-              <a:off x="1910695" y="4754391"/>
+              <a:off x="2240306" y="4754391"/>
               <a:ext cx="634696" cy="634696"/>
             </a:xfrm>
             <a:prstGeom prst="rect">
@@ -7124,7 +7124,7 @@
           </p:blipFill>
           <p:spPr>
             <a:xfrm>
-              <a:off x="8616035" y="4774079"/>
+              <a:off x="9572969" y="4774079"/>
               <a:ext cx="634696" cy="634696"/>
             </a:xfrm>
             <a:prstGeom prst="rect">
@@ -7159,7 +7159,7 @@
           </p:blipFill>
           <p:spPr>
             <a:xfrm>
-              <a:off x="3020028" y="4754391"/>
+              <a:off x="3349639" y="4754391"/>
               <a:ext cx="634696" cy="634696"/>
             </a:xfrm>
             <a:prstGeom prst="rect">
@@ -7194,7 +7194,7 @@
           </p:blipFill>
           <p:spPr>
             <a:xfrm>
-              <a:off x="4085860" y="4754391"/>
+              <a:off x="4415471" y="4754391"/>
               <a:ext cx="634696" cy="634696"/>
             </a:xfrm>
             <a:prstGeom prst="rect">
@@ -7229,7 +7229,7 @@
           </p:blipFill>
           <p:spPr>
             <a:xfrm>
-              <a:off x="5205261" y="4754391"/>
+              <a:off x="5821951" y="4754391"/>
               <a:ext cx="634696" cy="634696"/>
             </a:xfrm>
             <a:prstGeom prst="rect">
@@ -7264,7 +7264,7 @@
           </p:blipFill>
           <p:spPr>
             <a:xfrm>
-              <a:off x="6271093" y="4754391"/>
+              <a:off x="6887783" y="4754391"/>
               <a:ext cx="634696" cy="634696"/>
             </a:xfrm>
             <a:prstGeom prst="rect">
@@ -7299,7 +7299,7 @@
           </p:blipFill>
           <p:spPr>
             <a:xfrm>
-              <a:off x="7380426" y="4754391"/>
+              <a:off x="7997116" y="4754391"/>
               <a:ext cx="634696" cy="634696"/>
             </a:xfrm>
             <a:prstGeom prst="rect">
@@ -7334,7 +7334,7 @@
           </p:blipFill>
           <p:spPr>
             <a:xfrm>
-              <a:off x="844863" y="3110637"/>
+              <a:off x="1174474" y="3110637"/>
               <a:ext cx="634696" cy="634696"/>
             </a:xfrm>
             <a:prstGeom prst="rect">
@@ -7369,7 +7369,7 @@
           </p:blipFill>
           <p:spPr>
             <a:xfrm>
-              <a:off x="1910695" y="3110637"/>
+              <a:off x="2240306" y="3110637"/>
               <a:ext cx="634696" cy="634696"/>
             </a:xfrm>
             <a:prstGeom prst="rect">
@@ -7404,7 +7404,7 @@
           </p:blipFill>
           <p:spPr>
             <a:xfrm>
-              <a:off x="3020028" y="3110637"/>
+              <a:off x="3349639" y="3110637"/>
               <a:ext cx="634696" cy="634696"/>
             </a:xfrm>
             <a:prstGeom prst="rect">
@@ -7439,7 +7439,7 @@
           </p:blipFill>
           <p:spPr>
             <a:xfrm>
-              <a:off x="4085860" y="3110637"/>
+              <a:off x="4415471" y="3110637"/>
               <a:ext cx="634696" cy="634696"/>
             </a:xfrm>
             <a:prstGeom prst="rect">
@@ -7474,7 +7474,7 @@
           </p:blipFill>
           <p:spPr>
             <a:xfrm>
-              <a:off x="5205261" y="3110637"/>
+              <a:off x="5821951" y="3110637"/>
               <a:ext cx="634696" cy="634696"/>
             </a:xfrm>
             <a:prstGeom prst="rect">
@@ -7509,7 +7509,7 @@
           </p:blipFill>
           <p:spPr>
             <a:xfrm>
-              <a:off x="6271093" y="3110637"/>
+              <a:off x="6887783" y="3110637"/>
               <a:ext cx="634696" cy="634696"/>
             </a:xfrm>
             <a:prstGeom prst="rect">
@@ -7544,7 +7544,7 @@
           </p:blipFill>
           <p:spPr>
             <a:xfrm>
-              <a:off x="7380426" y="3110637"/>
+              <a:off x="7997116" y="3110637"/>
               <a:ext cx="634696" cy="634696"/>
             </a:xfrm>
             <a:prstGeom prst="rect">
@@ -7566,7 +7566,7 @@
           </p:nvSpPr>
           <p:spPr>
             <a:xfrm>
-              <a:off x="519315" y="4402744"/>
+              <a:off x="848926" y="4402744"/>
               <a:ext cx="4413929" cy="1216301"/>
             </a:xfrm>
             <a:prstGeom prst="roundRect">
@@ -7624,7 +7624,7 @@
           </p:nvSpPr>
           <p:spPr>
             <a:xfrm>
-              <a:off x="558779" y="2753115"/>
+              <a:off x="888390" y="2753115"/>
               <a:ext cx="4413929" cy="1216301"/>
             </a:xfrm>
             <a:prstGeom prst="roundRect">
@@ -7682,7 +7682,7 @@
           </p:nvSpPr>
           <p:spPr>
             <a:xfrm>
-              <a:off x="8314691" y="4435481"/>
+              <a:off x="9271625" y="4435481"/>
               <a:ext cx="1306761" cy="1216301"/>
             </a:xfrm>
             <a:prstGeom prst="roundRect">
@@ -7740,7 +7740,7 @@
           </p:nvSpPr>
           <p:spPr>
             <a:xfrm>
-              <a:off x="8314691" y="2772345"/>
+              <a:off x="9271625" y="2772345"/>
               <a:ext cx="1306761" cy="1216301"/>
             </a:xfrm>
             <a:prstGeom prst="roundRect">
@@ -7798,7 +7798,7 @@
           </p:nvSpPr>
           <p:spPr>
             <a:xfrm>
-              <a:off x="913311" y="4599875"/>
+              <a:off x="1242922" y="4599875"/>
               <a:ext cx="570990" cy="369332"/>
             </a:xfrm>
             <a:prstGeom prst="rect">
@@ -7833,7 +7833,7 @@
           </p:nvSpPr>
           <p:spPr>
             <a:xfrm>
-              <a:off x="1975116" y="4599875"/>
+              <a:off x="2304727" y="4599875"/>
               <a:ext cx="570990" cy="369332"/>
             </a:xfrm>
             <a:prstGeom prst="rect">
@@ -7868,7 +7868,7 @@
           </p:nvSpPr>
           <p:spPr>
             <a:xfrm>
-              <a:off x="3041776" y="4599875"/>
+              <a:off x="3371387" y="4599875"/>
               <a:ext cx="570990" cy="369332"/>
             </a:xfrm>
             <a:prstGeom prst="rect">
@@ -7903,7 +7903,7 @@
           </p:nvSpPr>
           <p:spPr>
             <a:xfrm>
-              <a:off x="4131336" y="4599875"/>
+              <a:off x="4460947" y="4599875"/>
               <a:ext cx="570990" cy="369332"/>
             </a:xfrm>
             <a:prstGeom prst="rect">
@@ -7938,7 +7938,7 @@
           </p:nvSpPr>
           <p:spPr>
             <a:xfrm>
-              <a:off x="5251130" y="4604464"/>
+              <a:off x="5867820" y="4604464"/>
               <a:ext cx="570990" cy="369332"/>
             </a:xfrm>
             <a:prstGeom prst="rect">
@@ -7973,7 +7973,7 @@
           </p:nvSpPr>
           <p:spPr>
             <a:xfrm>
-              <a:off x="6312935" y="4604464"/>
+              <a:off x="6929625" y="4604464"/>
               <a:ext cx="570990" cy="369332"/>
             </a:xfrm>
             <a:prstGeom prst="rect">
@@ -8008,7 +8008,7 @@
           </p:nvSpPr>
           <p:spPr>
             <a:xfrm>
-              <a:off x="7379595" y="4604464"/>
+              <a:off x="7996285" y="4604464"/>
               <a:ext cx="570990" cy="369332"/>
             </a:xfrm>
             <a:prstGeom prst="rect">
@@ -8043,7 +8043,7 @@
           </p:nvSpPr>
           <p:spPr>
             <a:xfrm>
-              <a:off x="913311" y="2946912"/>
+              <a:off x="1242922" y="2946912"/>
               <a:ext cx="570990" cy="369332"/>
             </a:xfrm>
             <a:prstGeom prst="rect">
@@ -8078,7 +8078,7 @@
           </p:nvSpPr>
           <p:spPr>
             <a:xfrm>
-              <a:off x="1975116" y="2946912"/>
+              <a:off x="2304727" y="2946912"/>
               <a:ext cx="570990" cy="369332"/>
             </a:xfrm>
             <a:prstGeom prst="rect">
@@ -8113,7 +8113,7 @@
           </p:nvSpPr>
           <p:spPr>
             <a:xfrm>
-              <a:off x="3041776" y="2946912"/>
+              <a:off x="3371387" y="2946912"/>
               <a:ext cx="570990" cy="369332"/>
             </a:xfrm>
             <a:prstGeom prst="rect">
@@ -8148,7 +8148,7 @@
           </p:nvSpPr>
           <p:spPr>
             <a:xfrm>
-              <a:off x="4131336" y="2946912"/>
+              <a:off x="4460947" y="2946912"/>
               <a:ext cx="570990" cy="369332"/>
             </a:xfrm>
             <a:prstGeom prst="rect">
@@ -8183,7 +8183,7 @@
           </p:nvSpPr>
           <p:spPr>
             <a:xfrm>
-              <a:off x="5251130" y="2951501"/>
+              <a:off x="5867820" y="2951501"/>
               <a:ext cx="570990" cy="369332"/>
             </a:xfrm>
             <a:prstGeom prst="rect">
@@ -8218,7 +8218,7 @@
           </p:nvSpPr>
           <p:spPr>
             <a:xfrm>
-              <a:off x="6312935" y="2951501"/>
+              <a:off x="6929625" y="2951501"/>
               <a:ext cx="570990" cy="369332"/>
             </a:xfrm>
             <a:prstGeom prst="rect">
@@ -8253,7 +8253,7 @@
           </p:nvSpPr>
           <p:spPr>
             <a:xfrm>
-              <a:off x="7379595" y="2951501"/>
+              <a:off x="7996285" y="2951501"/>
               <a:ext cx="570990" cy="369332"/>
             </a:xfrm>
             <a:prstGeom prst="rect">
@@ -8288,7 +8288,7 @@
           </p:nvSpPr>
           <p:spPr>
             <a:xfrm>
-              <a:off x="8689618" y="4657969"/>
+              <a:off x="9646552" y="4657969"/>
               <a:ext cx="570990" cy="369332"/>
             </a:xfrm>
             <a:prstGeom prst="rect">
@@ -8323,7 +8323,7 @@
           </p:nvSpPr>
           <p:spPr>
             <a:xfrm>
-              <a:off x="8714430" y="3008341"/>
+              <a:off x="9671364" y="3008341"/>
               <a:ext cx="570990" cy="369332"/>
             </a:xfrm>
             <a:prstGeom prst="rect">
@@ -8358,7 +8358,7 @@
           </p:nvSpPr>
           <p:spPr>
             <a:xfrm>
-              <a:off x="5064037" y="2782328"/>
+              <a:off x="5680727" y="2782328"/>
               <a:ext cx="3153989" cy="1216301"/>
             </a:xfrm>
             <a:prstGeom prst="roundRect">
@@ -8416,7 +8416,7 @@
           </p:nvSpPr>
           <p:spPr>
             <a:xfrm>
-              <a:off x="5064037" y="4415710"/>
+              <a:off x="5680727" y="4415710"/>
               <a:ext cx="3153989" cy="1216301"/>
             </a:xfrm>
             <a:prstGeom prst="roundRect">
@@ -8460,6 +8460,94 @@
             </a:p>
           </p:txBody>
         </p:sp>
+        <p:cxnSp>
+          <p:nvCxnSpPr>
+            <p:cNvPr id="2" name="Straight Connector 1">
+              <a:extLst>
+                <a:ext uri="{FF2B5EF4-FFF2-40B4-BE49-F238E27FC236}">
+                  <a16:creationId xmlns:a16="http://schemas.microsoft.com/office/drawing/2014/main" id="{2FD956A6-2CE6-30AD-2444-D97B04A6F43C}"/>
+                </a:ext>
+              </a:extLst>
+            </p:cNvPr>
+            <p:cNvCxnSpPr>
+              <a:cxnSpLocks/>
+            </p:cNvCxnSpPr>
+            <p:nvPr/>
+          </p:nvCxnSpPr>
+          <p:spPr>
+            <a:xfrm flipV="1">
+              <a:off x="5507658" y="2456121"/>
+              <a:ext cx="0" cy="3445142"/>
+            </a:xfrm>
+            <a:prstGeom prst="line">
+              <a:avLst/>
+            </a:prstGeom>
+            <a:ln w="47625">
+              <a:solidFill>
+                <a:schemeClr val="tx1"/>
+              </a:solidFill>
+              <a:prstDash val="sysDot"/>
+            </a:ln>
+          </p:spPr>
+          <p:style>
+            <a:lnRef idx="2">
+              <a:schemeClr val="accent1"/>
+            </a:lnRef>
+            <a:fillRef idx="0">
+              <a:schemeClr val="accent1"/>
+            </a:fillRef>
+            <a:effectRef idx="1">
+              <a:schemeClr val="accent1"/>
+            </a:effectRef>
+            <a:fontRef idx="minor">
+              <a:schemeClr val="tx1"/>
+            </a:fontRef>
+          </p:style>
+        </p:cxnSp>
+        <p:cxnSp>
+          <p:nvCxnSpPr>
+            <p:cNvPr id="13" name="Straight Connector 12">
+              <a:extLst>
+                <a:ext uri="{FF2B5EF4-FFF2-40B4-BE49-F238E27FC236}">
+                  <a16:creationId xmlns:a16="http://schemas.microsoft.com/office/drawing/2014/main" id="{7D8A89CE-0F1B-3442-724D-BD1E2189ED50}"/>
+                </a:ext>
+              </a:extLst>
+            </p:cNvPr>
+            <p:cNvCxnSpPr>
+              <a:cxnSpLocks/>
+            </p:cNvCxnSpPr>
+            <p:nvPr/>
+          </p:nvCxnSpPr>
+          <p:spPr>
+            <a:xfrm flipV="1">
+              <a:off x="9069577" y="2456121"/>
+              <a:ext cx="0" cy="3445142"/>
+            </a:xfrm>
+            <a:prstGeom prst="line">
+              <a:avLst/>
+            </a:prstGeom>
+            <a:ln w="47625">
+              <a:solidFill>
+                <a:schemeClr val="tx1"/>
+              </a:solidFill>
+              <a:prstDash val="sysDot"/>
+            </a:ln>
+          </p:spPr>
+          <p:style>
+            <a:lnRef idx="2">
+              <a:schemeClr val="accent1"/>
+            </a:lnRef>
+            <a:fillRef idx="0">
+              <a:schemeClr val="accent1"/>
+            </a:fillRef>
+            <a:effectRef idx="1">
+              <a:schemeClr val="accent1"/>
+            </a:effectRef>
+            <a:fontRef idx="minor">
+              <a:schemeClr val="tx1"/>
+            </a:fontRef>
+          </p:style>
+        </p:cxnSp>
       </p:grpSp>
     </p:spTree>
     <p:extLst>
@@ -8499,10 +8587,10 @@
       </p:grpSpPr>
       <p:grpSp>
         <p:nvGrpSpPr>
-          <p:cNvPr id="4" name="Group 3">
+          <p:cNvPr id="22" name="Group 21">
             <a:extLst>
               <a:ext uri="{FF2B5EF4-FFF2-40B4-BE49-F238E27FC236}">
-                <a16:creationId xmlns:a16="http://schemas.microsoft.com/office/drawing/2014/main" id="{F8DACEA2-E486-B018-30AF-CB8DB19D4EB3}"/>
+                <a16:creationId xmlns:a16="http://schemas.microsoft.com/office/drawing/2014/main" id="{A9619962-32E2-7C58-352A-F3B8E35E3E49}"/>
               </a:ext>
             </a:extLst>
           </p:cNvPr>
@@ -8512,9 +8600,9 @@
         <p:grpSpPr>
           <a:xfrm>
             <a:off x="410218" y="1098449"/>
-            <a:ext cx="10283551" cy="4907241"/>
+            <a:ext cx="10983050" cy="4907241"/>
             <a:chOff x="410218" y="1098449"/>
-            <a:chExt cx="10283551" cy="4907241"/>
+            <a:chExt cx="10983050" cy="4907241"/>
           </a:xfrm>
         </p:grpSpPr>
         <p:sp>
@@ -8532,7 +8620,7 @@
           <p:spPr>
             <a:xfrm>
               <a:off x="410218" y="1098449"/>
-              <a:ext cx="10283551" cy="4907241"/>
+              <a:ext cx="10983050" cy="4907241"/>
             </a:xfrm>
             <a:prstGeom prst="roundRect">
               <a:avLst>
@@ -8586,7 +8674,7 @@
           </p:nvSpPr>
           <p:spPr>
             <a:xfrm>
-              <a:off x="5255768" y="3614372"/>
+              <a:off x="5627904" y="3614372"/>
               <a:ext cx="3360898" cy="2097152"/>
             </a:xfrm>
             <a:prstGeom prst="roundRect">
@@ -8644,7 +8732,7 @@
           </p:nvSpPr>
           <p:spPr>
             <a:xfrm>
-              <a:off x="5255766" y="1367293"/>
+              <a:off x="5627902" y="1367293"/>
               <a:ext cx="3360899" cy="2097152"/>
             </a:xfrm>
             <a:prstGeom prst="roundRect">
@@ -8971,7 +9059,7 @@
           </p:blipFill>
           <p:spPr>
             <a:xfrm>
-              <a:off x="5515521" y="3977496"/>
+              <a:off x="5887657" y="3977496"/>
               <a:ext cx="634696" cy="634696"/>
             </a:xfrm>
             <a:prstGeom prst="rect">
@@ -9006,7 +9094,7 @@
           </p:blipFill>
           <p:spPr>
             <a:xfrm>
-              <a:off x="6624854" y="3977496"/>
+              <a:off x="6996990" y="3977496"/>
               <a:ext cx="634696" cy="634696"/>
             </a:xfrm>
             <a:prstGeom prst="rect">
@@ -9041,7 +9129,7 @@
           </p:blipFill>
           <p:spPr>
             <a:xfrm>
-              <a:off x="7690686" y="3977496"/>
+              <a:off x="8062822" y="3977496"/>
               <a:ext cx="634696" cy="634696"/>
             </a:xfrm>
             <a:prstGeom prst="rect">
@@ -9203,7 +9291,7 @@
           </p:nvSpPr>
           <p:spPr>
             <a:xfrm>
-              <a:off x="5557363" y="3827569"/>
+              <a:off x="5929499" y="3827569"/>
               <a:ext cx="570990" cy="369332"/>
             </a:xfrm>
             <a:prstGeom prst="rect">
@@ -9238,7 +9326,7 @@
           </p:nvSpPr>
           <p:spPr>
             <a:xfrm>
-              <a:off x="6624023" y="3827569"/>
+              <a:off x="6996159" y="3827569"/>
               <a:ext cx="570990" cy="369332"/>
             </a:xfrm>
             <a:prstGeom prst="rect">
@@ -9273,7 +9361,7 @@
           </p:nvSpPr>
           <p:spPr>
             <a:xfrm>
-              <a:off x="7713583" y="3827569"/>
+              <a:off x="8085719" y="3827569"/>
               <a:ext cx="570990" cy="369332"/>
             </a:xfrm>
             <a:prstGeom prst="rect">
@@ -9455,7 +9543,7 @@
           </p:nvSpPr>
           <p:spPr>
             <a:xfrm rot="16200000">
-              <a:off x="5648202" y="4161658"/>
+              <a:off x="6020338" y="4161658"/>
               <a:ext cx="369333" cy="901063"/>
             </a:xfrm>
             <a:prstGeom prst="leftBracket">
@@ -9504,7 +9592,7 @@
           </p:nvSpPr>
           <p:spPr>
             <a:xfrm rot="16200000">
-              <a:off x="7866869" y="4161658"/>
+              <a:off x="8239005" y="4161658"/>
               <a:ext cx="369333" cy="901063"/>
             </a:xfrm>
             <a:prstGeom prst="leftBracket">
@@ -9639,7 +9727,7 @@
           </p:blipFill>
           <p:spPr>
             <a:xfrm>
-              <a:off x="5524430" y="4851763"/>
+              <a:off x="5896566" y="4851763"/>
               <a:ext cx="636856" cy="636856"/>
             </a:xfrm>
             <a:prstGeom prst="rect">
@@ -9711,7 +9799,7 @@
           </p:blipFill>
           <p:spPr>
             <a:xfrm>
-              <a:off x="7733107" y="4842814"/>
+              <a:off x="8105243" y="4842814"/>
               <a:ext cx="636856" cy="636856"/>
             </a:xfrm>
             <a:prstGeom prst="rect">
@@ -9886,7 +9974,7 @@
           </p:blipFill>
           <p:spPr>
             <a:xfrm>
-              <a:off x="5507225" y="1709327"/>
+              <a:off x="5879361" y="1709327"/>
               <a:ext cx="634696" cy="634696"/>
             </a:xfrm>
             <a:prstGeom prst="rect">
@@ -9921,7 +10009,7 @@
           </p:blipFill>
           <p:spPr>
             <a:xfrm>
-              <a:off x="6573057" y="1709327"/>
+              <a:off x="6945193" y="1709327"/>
               <a:ext cx="634696" cy="634696"/>
             </a:xfrm>
             <a:prstGeom prst="rect">
@@ -9956,7 +10044,7 @@
           </p:blipFill>
           <p:spPr>
             <a:xfrm>
-              <a:off x="7682390" y="1709327"/>
+              <a:off x="8054526" y="1709327"/>
               <a:ext cx="634696" cy="634696"/>
             </a:xfrm>
             <a:prstGeom prst="rect">
@@ -10118,7 +10206,7 @@
           </p:nvSpPr>
           <p:spPr>
             <a:xfrm>
-              <a:off x="5553094" y="1559400"/>
+              <a:off x="5925230" y="1559400"/>
               <a:ext cx="570990" cy="369332"/>
             </a:xfrm>
             <a:prstGeom prst="rect">
@@ -10153,7 +10241,7 @@
           </p:nvSpPr>
           <p:spPr>
             <a:xfrm>
-              <a:off x="6614899" y="1559400"/>
+              <a:off x="6987035" y="1559400"/>
               <a:ext cx="570990" cy="369332"/>
             </a:xfrm>
             <a:prstGeom prst="rect">
@@ -10188,7 +10276,7 @@
           </p:nvSpPr>
           <p:spPr>
             <a:xfrm>
-              <a:off x="7681559" y="1559400"/>
+              <a:off x="8053695" y="1559400"/>
               <a:ext cx="570990" cy="369332"/>
             </a:xfrm>
             <a:prstGeom prst="rect">
@@ -10407,7 +10495,7 @@
           </p:blipFill>
           <p:spPr>
             <a:xfrm>
-              <a:off x="9285550" y="2524265"/>
+              <a:off x="10019194" y="2524265"/>
               <a:ext cx="636856" cy="636856"/>
             </a:xfrm>
             <a:prstGeom prst="rect">
@@ -10443,7 +10531,7 @@
           </p:blipFill>
           <p:spPr>
             <a:xfrm>
-              <a:off x="6057340" y="2570222"/>
+              <a:off x="6429476" y="2570222"/>
               <a:ext cx="636856" cy="636856"/>
             </a:xfrm>
             <a:prstGeom prst="rect">
@@ -10465,7 +10553,7 @@
           </p:nvSpPr>
           <p:spPr>
             <a:xfrm>
-              <a:off x="8772875" y="1367293"/>
+              <a:off x="9506519" y="1367293"/>
               <a:ext cx="1662206" cy="2097152"/>
             </a:xfrm>
             <a:prstGeom prst="roundRect">
@@ -10536,7 +10624,7 @@
           </p:blipFill>
           <p:spPr>
             <a:xfrm>
-              <a:off x="9243129" y="1636349"/>
+              <a:off x="9976773" y="1636349"/>
               <a:ext cx="634696" cy="634696"/>
             </a:xfrm>
             <a:prstGeom prst="rect">
@@ -10558,7 +10646,7 @@
           </p:nvSpPr>
           <p:spPr>
             <a:xfrm>
-              <a:off x="9266026" y="1486422"/>
+              <a:off x="9999670" y="1486422"/>
               <a:ext cx="570990" cy="369332"/>
             </a:xfrm>
             <a:prstGeom prst="rect">
@@ -10593,7 +10681,7 @@
           </p:nvSpPr>
           <p:spPr>
             <a:xfrm rot="16200000">
-              <a:off x="9375810" y="1829502"/>
+              <a:off x="10109454" y="1829502"/>
               <a:ext cx="369333" cy="901063"/>
             </a:xfrm>
             <a:prstGeom prst="leftBracket">
@@ -10642,7 +10730,7 @@
           </p:nvSpPr>
           <p:spPr>
             <a:xfrm rot="16200000">
-              <a:off x="6191102" y="1321673"/>
+              <a:off x="6563238" y="1321673"/>
               <a:ext cx="369333" cy="2035851"/>
             </a:xfrm>
             <a:prstGeom prst="leftBracket">
@@ -10691,7 +10779,7 @@
           </p:nvSpPr>
           <p:spPr>
             <a:xfrm>
-              <a:off x="8772875" y="3637753"/>
+              <a:off x="9506519" y="3637753"/>
               <a:ext cx="1662206" cy="2097152"/>
             </a:xfrm>
             <a:prstGeom prst="roundRect">
@@ -10762,7 +10850,7 @@
           </p:blipFill>
           <p:spPr>
             <a:xfrm>
-              <a:off x="9243129" y="3906809"/>
+              <a:off x="9976773" y="3906809"/>
               <a:ext cx="634696" cy="634696"/>
             </a:xfrm>
             <a:prstGeom prst="rect">
@@ -10784,7 +10872,7 @@
           </p:nvSpPr>
           <p:spPr>
             <a:xfrm>
-              <a:off x="9266026" y="3756882"/>
+              <a:off x="9999670" y="3756882"/>
               <a:ext cx="570990" cy="369332"/>
             </a:xfrm>
             <a:prstGeom prst="rect">
@@ -10819,7 +10907,7 @@
           </p:nvSpPr>
           <p:spPr>
             <a:xfrm rot="16200000">
-              <a:off x="9366214" y="4100317"/>
+              <a:off x="10099858" y="4100317"/>
               <a:ext cx="369333" cy="901063"/>
             </a:xfrm>
             <a:prstGeom prst="leftBracket">
@@ -10882,7 +10970,7 @@
           </p:blipFill>
           <p:spPr>
             <a:xfrm>
-              <a:off x="9232453" y="4842814"/>
+              <a:off x="9966097" y="4842814"/>
               <a:ext cx="636856" cy="636856"/>
             </a:xfrm>
             <a:prstGeom prst="rect">
@@ -10890,6 +10978,94 @@
             </a:prstGeom>
           </p:spPr>
         </p:pic>
+        <p:cxnSp>
+          <p:nvCxnSpPr>
+            <p:cNvPr id="5" name="Straight Connector 4">
+              <a:extLst>
+                <a:ext uri="{FF2B5EF4-FFF2-40B4-BE49-F238E27FC236}">
+                  <a16:creationId xmlns:a16="http://schemas.microsoft.com/office/drawing/2014/main" id="{EF3B7E46-F956-D3E2-B099-81D5FFBE7BE0}"/>
+                </a:ext>
+              </a:extLst>
+            </p:cNvPr>
+            <p:cNvCxnSpPr>
+              <a:cxnSpLocks/>
+            </p:cNvCxnSpPr>
+            <p:nvPr/>
+          </p:nvCxnSpPr>
+          <p:spPr>
+            <a:xfrm flipV="1">
+              <a:off x="5359476" y="1098449"/>
+              <a:ext cx="0" cy="4907241"/>
+            </a:xfrm>
+            <a:prstGeom prst="line">
+              <a:avLst/>
+            </a:prstGeom>
+            <a:ln w="47625">
+              <a:solidFill>
+                <a:schemeClr val="tx1"/>
+              </a:solidFill>
+              <a:prstDash val="sysDot"/>
+            </a:ln>
+          </p:spPr>
+          <p:style>
+            <a:lnRef idx="2">
+              <a:schemeClr val="accent1"/>
+            </a:lnRef>
+            <a:fillRef idx="0">
+              <a:schemeClr val="accent1"/>
+            </a:fillRef>
+            <a:effectRef idx="1">
+              <a:schemeClr val="accent1"/>
+            </a:effectRef>
+            <a:fontRef idx="minor">
+              <a:schemeClr val="tx1"/>
+            </a:fontRef>
+          </p:style>
+        </p:cxnSp>
+        <p:cxnSp>
+          <p:nvCxnSpPr>
+            <p:cNvPr id="11" name="Straight Connector 10">
+              <a:extLst>
+                <a:ext uri="{FF2B5EF4-FFF2-40B4-BE49-F238E27FC236}">
+                  <a16:creationId xmlns:a16="http://schemas.microsoft.com/office/drawing/2014/main" id="{32F9B20D-004F-6B52-CF4E-485C435A49D3}"/>
+                </a:ext>
+              </a:extLst>
+            </p:cNvPr>
+            <p:cNvCxnSpPr>
+              <a:cxnSpLocks/>
+            </p:cNvCxnSpPr>
+            <p:nvPr/>
+          </p:nvCxnSpPr>
+          <p:spPr>
+            <a:xfrm flipV="1">
+              <a:off x="9251006" y="1098449"/>
+              <a:ext cx="0" cy="4907241"/>
+            </a:xfrm>
+            <a:prstGeom prst="line">
+              <a:avLst/>
+            </a:prstGeom>
+            <a:ln w="47625">
+              <a:solidFill>
+                <a:schemeClr val="tx1"/>
+              </a:solidFill>
+              <a:prstDash val="sysDot"/>
+            </a:ln>
+          </p:spPr>
+          <p:style>
+            <a:lnRef idx="2">
+              <a:schemeClr val="accent1"/>
+            </a:lnRef>
+            <a:fillRef idx="0">
+              <a:schemeClr val="accent1"/>
+            </a:fillRef>
+            <a:effectRef idx="1">
+              <a:schemeClr val="accent1"/>
+            </a:effectRef>
+            <a:fontRef idx="minor">
+              <a:schemeClr val="tx1"/>
+            </a:fontRef>
+          </p:style>
+        </p:cxnSp>
       </p:grpSp>
     </p:spTree>
     <p:extLst>

--- a/images/icu.pptx
+++ b/images/icu.pptx
@@ -203,7 +203,7 @@
           <a:p>
             <a:fld id="{AD42B31F-4ABA-274F-9BB4-DA3A6583FDB8}" type="datetimeFigureOut">
               <a:rPr lang="en-US" smtClean="0"/>
-              <a:t>8/10/26</a:t>
+              <a:t>8/11/26</a:t>
             </a:fld>
             <a:endParaRPr lang="en-US"/>
           </a:p>
@@ -1112,7 +1112,7 @@
           <a:p>
             <a:fld id="{0D21F05F-ACFB-0C4D-9827-53BE568178E4}" type="datetimeFigureOut">
               <a:rPr lang="en-US" smtClean="0"/>
-              <a:t>8/10/26</a:t>
+              <a:t>8/11/26</a:t>
             </a:fld>
             <a:endParaRPr lang="en-US"/>
           </a:p>
@@ -1312,7 +1312,7 @@
           <a:p>
             <a:fld id="{0D21F05F-ACFB-0C4D-9827-53BE568178E4}" type="datetimeFigureOut">
               <a:rPr lang="en-US" smtClean="0"/>
-              <a:t>8/10/26</a:t>
+              <a:t>8/11/26</a:t>
             </a:fld>
             <a:endParaRPr lang="en-US"/>
           </a:p>
@@ -1522,7 +1522,7 @@
           <a:p>
             <a:fld id="{0D21F05F-ACFB-0C4D-9827-53BE568178E4}" type="datetimeFigureOut">
               <a:rPr lang="en-US" smtClean="0"/>
-              <a:t>8/10/26</a:t>
+              <a:t>8/11/26</a:t>
             </a:fld>
             <a:endParaRPr lang="en-US"/>
           </a:p>
@@ -1722,7 +1722,7 @@
           <a:p>
             <a:fld id="{0D21F05F-ACFB-0C4D-9827-53BE568178E4}" type="datetimeFigureOut">
               <a:rPr lang="en-US" smtClean="0"/>
-              <a:t>8/10/26</a:t>
+              <a:t>8/11/26</a:t>
             </a:fld>
             <a:endParaRPr lang="en-US"/>
           </a:p>
@@ -1998,7 +1998,7 @@
           <a:p>
             <a:fld id="{0D21F05F-ACFB-0C4D-9827-53BE568178E4}" type="datetimeFigureOut">
               <a:rPr lang="en-US" smtClean="0"/>
-              <a:t>8/10/26</a:t>
+              <a:t>8/11/26</a:t>
             </a:fld>
             <a:endParaRPr lang="en-US"/>
           </a:p>
@@ -2266,7 +2266,7 @@
           <a:p>
             <a:fld id="{0D21F05F-ACFB-0C4D-9827-53BE568178E4}" type="datetimeFigureOut">
               <a:rPr lang="en-US" smtClean="0"/>
-              <a:t>8/10/26</a:t>
+              <a:t>8/11/26</a:t>
             </a:fld>
             <a:endParaRPr lang="en-US"/>
           </a:p>
@@ -2681,7 +2681,7 @@
           <a:p>
             <a:fld id="{0D21F05F-ACFB-0C4D-9827-53BE568178E4}" type="datetimeFigureOut">
               <a:rPr lang="en-US" smtClean="0"/>
-              <a:t>8/10/26</a:t>
+              <a:t>8/11/26</a:t>
             </a:fld>
             <a:endParaRPr lang="en-US"/>
           </a:p>
@@ -2823,7 +2823,7 @@
           <a:p>
             <a:fld id="{0D21F05F-ACFB-0C4D-9827-53BE568178E4}" type="datetimeFigureOut">
               <a:rPr lang="en-US" smtClean="0"/>
-              <a:t>8/10/26</a:t>
+              <a:t>8/11/26</a:t>
             </a:fld>
             <a:endParaRPr lang="en-US"/>
           </a:p>
@@ -2936,7 +2936,7 @@
           <a:p>
             <a:fld id="{0D21F05F-ACFB-0C4D-9827-53BE568178E4}" type="datetimeFigureOut">
               <a:rPr lang="en-US" smtClean="0"/>
-              <a:t>8/10/26</a:t>
+              <a:t>8/11/26</a:t>
             </a:fld>
             <a:endParaRPr lang="en-US"/>
           </a:p>
@@ -3249,7 +3249,7 @@
           <a:p>
             <a:fld id="{0D21F05F-ACFB-0C4D-9827-53BE568178E4}" type="datetimeFigureOut">
               <a:rPr lang="en-US" smtClean="0"/>
-              <a:t>8/10/26</a:t>
+              <a:t>8/11/26</a:t>
             </a:fld>
             <a:endParaRPr lang="en-US"/>
           </a:p>
@@ -3538,7 +3538,7 @@
           <a:p>
             <a:fld id="{0D21F05F-ACFB-0C4D-9827-53BE568178E4}" type="datetimeFigureOut">
               <a:rPr lang="en-US" smtClean="0"/>
-              <a:t>8/10/26</a:t>
+              <a:t>8/11/26</a:t>
             </a:fld>
             <a:endParaRPr lang="en-US"/>
           </a:p>
@@ -3781,7 +3781,7 @@
           <a:p>
             <a:fld id="{0D21F05F-ACFB-0C4D-9827-53BE568178E4}" type="datetimeFigureOut">
               <a:rPr lang="en-US" smtClean="0"/>
-              <a:t>8/10/26</a:t>
+              <a:t>8/11/26</a:t>
             </a:fld>
             <a:endParaRPr lang="en-US"/>
           </a:p>
@@ -16120,10 +16120,10 @@
       </p:grpSpPr>
       <p:grpSp>
         <p:nvGrpSpPr>
-          <p:cNvPr id="236" name="Group 235">
+          <p:cNvPr id="100" name="Group 99">
             <a:extLst>
               <a:ext uri="{FF2B5EF4-FFF2-40B4-BE49-F238E27FC236}">
-                <a16:creationId xmlns:a16="http://schemas.microsoft.com/office/drawing/2014/main" id="{3EE945A8-BD10-05A2-3F7E-DF13B63670C7}"/>
+                <a16:creationId xmlns:a16="http://schemas.microsoft.com/office/drawing/2014/main" id="{9E65C308-C099-68DE-CE62-7931B7024718}"/>
               </a:ext>
             </a:extLst>
           </p:cNvPr>
@@ -16132,10 +16132,10 @@
         </p:nvGrpSpPr>
         <p:grpSpPr>
           <a:xfrm>
-            <a:off x="-1168710" y="946448"/>
-            <a:ext cx="15349915" cy="9048426"/>
-            <a:chOff x="-1168710" y="946448"/>
-            <a:chExt cx="15349915" cy="9048426"/>
+            <a:off x="-734906" y="949292"/>
+            <a:ext cx="15171293" cy="9057340"/>
+            <a:chOff x="-734906" y="949292"/>
+            <a:chExt cx="15171293" cy="9057340"/>
           </a:xfrm>
         </p:grpSpPr>
         <p:sp>
@@ -16152,8 +16152,8 @@
           </p:nvSpPr>
           <p:spPr>
             <a:xfrm>
-              <a:off x="7117820" y="8270799"/>
-              <a:ext cx="7063385" cy="1654885"/>
+              <a:off x="7276781" y="8281432"/>
+              <a:ext cx="7159606" cy="1654885"/>
             </a:xfrm>
             <a:prstGeom prst="rect">
               <a:avLst/>
@@ -16202,7 +16202,7 @@
           </p:nvSpPr>
           <p:spPr>
             <a:xfrm>
-              <a:off x="5059165" y="1420328"/>
+              <a:off x="5314346" y="1430961"/>
               <a:ext cx="2691250" cy="369332"/>
             </a:xfrm>
             <a:prstGeom prst="rect">
@@ -16253,7 +16253,7 @@
           </p:nvSpPr>
           <p:spPr>
             <a:xfrm>
-              <a:off x="456210" y="3540243"/>
+              <a:off x="711391" y="3550876"/>
               <a:ext cx="1779654" cy="369332"/>
             </a:xfrm>
             <a:prstGeom prst="rect">
@@ -16300,7 +16300,7 @@
           </p:nvSpPr>
           <p:spPr>
             <a:xfrm>
-              <a:off x="3981382" y="3540243"/>
+              <a:off x="4236563" y="3550876"/>
               <a:ext cx="1370888" cy="369332"/>
             </a:xfrm>
             <a:prstGeom prst="rect">
@@ -16347,7 +16347,7 @@
           </p:nvSpPr>
           <p:spPr>
             <a:xfrm>
-              <a:off x="7382499" y="3534667"/>
+              <a:off x="7637680" y="3545300"/>
               <a:ext cx="1370888" cy="369332"/>
             </a:xfrm>
             <a:prstGeom prst="rect">
@@ -16394,7 +16394,7 @@
           </p:nvSpPr>
           <p:spPr>
             <a:xfrm>
-              <a:off x="10941974" y="3542703"/>
+              <a:off x="11197155" y="3553336"/>
               <a:ext cx="652743" cy="369332"/>
             </a:xfrm>
             <a:prstGeom prst="rect">
@@ -16430,7 +16430,7 @@
           </p:nvSpPr>
           <p:spPr>
             <a:xfrm>
-              <a:off x="10211787" y="4666390"/>
+              <a:off x="10466968" y="4677023"/>
               <a:ext cx="2202334" cy="369332"/>
             </a:xfrm>
             <a:prstGeom prst="rect">
@@ -16473,7 +16473,7 @@
           </p:nvSpPr>
           <p:spPr>
             <a:xfrm>
-              <a:off x="309507" y="4584747"/>
+              <a:off x="564688" y="4595380"/>
               <a:ext cx="2202334" cy="369332"/>
             </a:xfrm>
             <a:prstGeom prst="rect">
@@ -16516,7 +16516,7 @@
           </p:nvSpPr>
           <p:spPr>
             <a:xfrm>
-              <a:off x="-411298" y="6227028"/>
+              <a:off x="-156117" y="6237661"/>
               <a:ext cx="527645" cy="369332"/>
             </a:xfrm>
             <a:prstGeom prst="rect">
@@ -16552,7 +16552,7 @@
           </p:nvSpPr>
           <p:spPr>
             <a:xfrm>
-              <a:off x="2833741" y="6227028"/>
+              <a:off x="3088922" y="6237661"/>
               <a:ext cx="474810" cy="369332"/>
             </a:xfrm>
             <a:prstGeom prst="rect">
@@ -16588,7 +16588,7 @@
           </p:nvSpPr>
           <p:spPr>
             <a:xfrm>
-              <a:off x="9485334" y="6308671"/>
+              <a:off x="9740515" y="6319304"/>
               <a:ext cx="527645" cy="369332"/>
             </a:xfrm>
             <a:prstGeom prst="rect">
@@ -16624,7 +16624,7 @@
           </p:nvSpPr>
           <p:spPr>
             <a:xfrm>
-              <a:off x="12730373" y="6308671"/>
+              <a:off x="12985554" y="6319304"/>
               <a:ext cx="474810" cy="369332"/>
             </a:xfrm>
             <a:prstGeom prst="rect">
@@ -16660,8 +16660,8 @@
           </p:nvSpPr>
           <p:spPr>
             <a:xfrm>
-              <a:off x="1855676" y="7286911"/>
-              <a:ext cx="2590261" cy="369332"/>
+              <a:off x="1852062" y="7263038"/>
+              <a:ext cx="2978188" cy="369332"/>
             </a:xfrm>
             <a:prstGeom prst="rect">
               <a:avLst/>
@@ -16688,6 +16688,14 @@
               </a:r>
               <a:r>
                 <a:rPr lang="en-US" baseline="-25000" dirty="0"/>
+                <a:t>3</a:t>
+              </a:r>
+              <a:r>
+                <a:rPr lang="en-US" dirty="0"/>
+                <a:t> ∘ T</a:t>
+              </a:r>
+              <a:r>
+                <a:rPr lang="en-US" baseline="-25000" dirty="0"/>
                 <a:t>5</a:t>
               </a:r>
               <a:r>
@@ -16711,7 +16719,7 @@
           </p:nvSpPr>
           <p:spPr>
             <a:xfrm>
-              <a:off x="1231443" y="9098242"/>
+              <a:off x="1486624" y="9108875"/>
               <a:ext cx="527645" cy="369332"/>
             </a:xfrm>
             <a:prstGeom prst="rect">
@@ -16747,7 +16755,7 @@
           </p:nvSpPr>
           <p:spPr>
             <a:xfrm>
-              <a:off x="4476482" y="9098242"/>
+              <a:off x="4731663" y="9108875"/>
               <a:ext cx="474810" cy="369332"/>
             </a:xfrm>
             <a:prstGeom prst="rect">
@@ -16786,7 +16794,7 @@
           </p:nvCxnSpPr>
           <p:spPr>
             <a:xfrm flipH="1">
-              <a:off x="1346037" y="1886830"/>
+              <a:off x="1601218" y="1897463"/>
               <a:ext cx="3954167" cy="1653413"/>
             </a:xfrm>
             <a:prstGeom prst="straightConnector1">
@@ -16831,7 +16839,7 @@
           </p:nvCxnSpPr>
           <p:spPr>
             <a:xfrm>
-              <a:off x="7540857" y="1879288"/>
+              <a:off x="7796038" y="1889921"/>
               <a:ext cx="3727489" cy="1663415"/>
             </a:xfrm>
             <a:prstGeom prst="straightConnector1">
@@ -16876,7 +16884,7 @@
           </p:nvCxnSpPr>
           <p:spPr>
             <a:xfrm flipH="1">
-              <a:off x="4666826" y="1879782"/>
+              <a:off x="4922007" y="1890415"/>
               <a:ext cx="1443299" cy="1660461"/>
             </a:xfrm>
             <a:prstGeom prst="straightConnector1">
@@ -16921,7 +16929,7 @@
           </p:nvCxnSpPr>
           <p:spPr>
             <a:xfrm>
-              <a:off x="6795569" y="1879782"/>
+              <a:off x="7050750" y="1890415"/>
               <a:ext cx="1272374" cy="1654885"/>
             </a:xfrm>
             <a:prstGeom prst="straightConnector1">
@@ -16966,7 +16974,7 @@
           </p:nvCxnSpPr>
           <p:spPr>
             <a:xfrm flipH="1">
-              <a:off x="-147475" y="5008963"/>
+              <a:off x="107706" y="5019596"/>
               <a:ext cx="1274935" cy="1218065"/>
             </a:xfrm>
             <a:prstGeom prst="straightConnector1">
@@ -17011,7 +17019,7 @@
           </p:nvCxnSpPr>
           <p:spPr>
             <a:xfrm>
-              <a:off x="1773684" y="5008963"/>
+              <a:off x="2028865" y="5019596"/>
               <a:ext cx="1297462" cy="1218065"/>
             </a:xfrm>
             <a:prstGeom prst="straightConnector1">
@@ -17056,7 +17064,7 @@
           </p:nvCxnSpPr>
           <p:spPr>
             <a:xfrm flipH="1">
-              <a:off x="9749157" y="5090606"/>
+              <a:off x="10004338" y="5101239"/>
               <a:ext cx="1399478" cy="1218065"/>
             </a:xfrm>
             <a:prstGeom prst="straightConnector1">
@@ -17101,7 +17109,7 @@
           </p:nvCxnSpPr>
           <p:spPr>
             <a:xfrm>
-              <a:off x="11594717" y="5090606"/>
+              <a:off x="11849898" y="5101239"/>
               <a:ext cx="1373061" cy="1218065"/>
             </a:xfrm>
             <a:prstGeom prst="straightConnector1">
@@ -17146,7 +17154,7 @@
           </p:nvCxnSpPr>
           <p:spPr>
             <a:xfrm flipH="1">
-              <a:off x="1495266" y="7712226"/>
+              <a:off x="1750447" y="7722859"/>
               <a:ext cx="1270491" cy="1386016"/>
             </a:xfrm>
             <a:prstGeom prst="straightConnector1">
@@ -17191,7 +17199,7 @@
           </p:nvCxnSpPr>
           <p:spPr>
             <a:xfrm>
-              <a:off x="3469813" y="7712226"/>
+              <a:off x="3724994" y="7722859"/>
               <a:ext cx="1244074" cy="1386016"/>
             </a:xfrm>
             <a:prstGeom prst="straightConnector1">
@@ -17233,110 +17241,10 @@
           </p:nvSpPr>
           <p:spPr>
             <a:xfrm>
-              <a:off x="7387746" y="8595545"/>
-              <a:ext cx="4254192" cy="940967"/>
+              <a:off x="7392799" y="8617612"/>
+              <a:ext cx="4295202" cy="1159540"/>
             </a:xfrm>
             <a:prstGeom prst="roundRect">
-              <a:avLst/>
-            </a:prstGeom>
-            <a:solidFill>
-              <a:schemeClr val="bg2"/>
-            </a:solidFill>
-            <a:ln w="22225"/>
-          </p:spPr>
-          <p:style>
-            <a:lnRef idx="2">
-              <a:schemeClr val="accent1">
-                <a:shade val="15000"/>
-              </a:schemeClr>
-            </a:lnRef>
-            <a:fillRef idx="1">
-              <a:schemeClr val="accent1"/>
-            </a:fillRef>
-            <a:effectRef idx="0">
-              <a:schemeClr val="accent1"/>
-            </a:effectRef>
-            <a:fontRef idx="minor">
-              <a:schemeClr val="lt1"/>
-            </a:fontRef>
-          </p:style>
-          <p:txBody>
-            <a:bodyPr rtlCol="0" anchor="ctr"/>
-            <a:lstStyle/>
-            <a:p>
-              <a:pPr algn="ctr"/>
-              <a:endParaRPr lang="en-US" sz="1600"/>
-            </a:p>
-          </p:txBody>
-        </p:sp>
-        <p:sp>
-          <p:nvSpPr>
-            <p:cNvPr id="197" name="Oval 196">
-              <a:extLst>
-                <a:ext uri="{FF2B5EF4-FFF2-40B4-BE49-F238E27FC236}">
-                  <a16:creationId xmlns:a16="http://schemas.microsoft.com/office/drawing/2014/main" id="{E5016161-360C-309B-E1F3-E1ACCAF33FA3}"/>
-                </a:ext>
-              </a:extLst>
-            </p:cNvPr>
-            <p:cNvSpPr/>
-            <p:nvPr/>
-          </p:nvSpPr>
-          <p:spPr>
-            <a:xfrm>
-              <a:off x="7537154" y="8687694"/>
-              <a:ext cx="684999" cy="689246"/>
-            </a:xfrm>
-            <a:prstGeom prst="ellipse">
-              <a:avLst/>
-            </a:prstGeom>
-            <a:solidFill>
-              <a:schemeClr val="bg2"/>
-            </a:solidFill>
-            <a:ln w="22225"/>
-          </p:spPr>
-          <p:style>
-            <a:lnRef idx="2">
-              <a:schemeClr val="accent1">
-                <a:shade val="15000"/>
-              </a:schemeClr>
-            </a:lnRef>
-            <a:fillRef idx="1">
-              <a:schemeClr val="accent1"/>
-            </a:fillRef>
-            <a:effectRef idx="0">
-              <a:schemeClr val="accent1"/>
-            </a:effectRef>
-            <a:fontRef idx="minor">
-              <a:schemeClr val="lt1"/>
-            </a:fontRef>
-          </p:style>
-          <p:txBody>
-            <a:bodyPr rtlCol="0" anchor="ctr"/>
-            <a:lstStyle/>
-            <a:p>
-              <a:pPr algn="ctr"/>
-              <a:endParaRPr lang="en-US" sz="1600"/>
-            </a:p>
-          </p:txBody>
-        </p:sp>
-        <p:sp>
-          <p:nvSpPr>
-            <p:cNvPr id="205" name="Oval 204">
-              <a:extLst>
-                <a:ext uri="{FF2B5EF4-FFF2-40B4-BE49-F238E27FC236}">
-                  <a16:creationId xmlns:a16="http://schemas.microsoft.com/office/drawing/2014/main" id="{7A41D075-CE16-5107-F667-22526F4EAAE6}"/>
-                </a:ext>
-              </a:extLst>
-            </p:cNvPr>
-            <p:cNvSpPr/>
-            <p:nvPr/>
-          </p:nvSpPr>
-          <p:spPr>
-            <a:xfrm>
-              <a:off x="8326827" y="8687694"/>
-              <a:ext cx="684999" cy="689246"/>
-            </a:xfrm>
-            <a:prstGeom prst="ellipse">
               <a:avLst/>
             </a:prstGeom>
             <a:solidFill>
@@ -17383,108 +17291,8 @@
           </p:nvSpPr>
           <p:spPr>
             <a:xfrm>
-              <a:off x="9968651" y="8687694"/>
-              <a:ext cx="684999" cy="689246"/>
-            </a:xfrm>
-            <a:prstGeom prst="ellipse">
-              <a:avLst/>
-            </a:prstGeom>
-            <a:solidFill>
-              <a:schemeClr val="bg2"/>
-            </a:solidFill>
-            <a:ln w="22225"/>
-          </p:spPr>
-          <p:style>
-            <a:lnRef idx="2">
-              <a:schemeClr val="accent1">
-                <a:shade val="15000"/>
-              </a:schemeClr>
-            </a:lnRef>
-            <a:fillRef idx="1">
-              <a:schemeClr val="accent1"/>
-            </a:fillRef>
-            <a:effectRef idx="0">
-              <a:schemeClr val="accent1"/>
-            </a:effectRef>
-            <a:fontRef idx="minor">
-              <a:schemeClr val="lt1"/>
-            </a:fontRef>
-          </p:style>
-          <p:txBody>
-            <a:bodyPr rtlCol="0" anchor="ctr"/>
-            <a:lstStyle/>
-            <a:p>
-              <a:pPr algn="ctr"/>
-              <a:endParaRPr lang="en-US" sz="1600"/>
-            </a:p>
-          </p:txBody>
-        </p:sp>
-        <p:sp>
-          <p:nvSpPr>
-            <p:cNvPr id="207" name="Oval 206">
-              <a:extLst>
-                <a:ext uri="{FF2B5EF4-FFF2-40B4-BE49-F238E27FC236}">
-                  <a16:creationId xmlns:a16="http://schemas.microsoft.com/office/drawing/2014/main" id="{A77B2F02-5765-FED8-94E3-734B2F32FFD4}"/>
-                </a:ext>
-              </a:extLst>
-            </p:cNvPr>
-            <p:cNvSpPr/>
-            <p:nvPr/>
-          </p:nvSpPr>
-          <p:spPr>
-            <a:xfrm>
-              <a:off x="9116500" y="8687694"/>
-              <a:ext cx="684999" cy="689246"/>
-            </a:xfrm>
-            <a:prstGeom prst="ellipse">
-              <a:avLst/>
-            </a:prstGeom>
-            <a:solidFill>
-              <a:schemeClr val="bg2"/>
-            </a:solidFill>
-            <a:ln w="22225"/>
-          </p:spPr>
-          <p:style>
-            <a:lnRef idx="2">
-              <a:schemeClr val="accent1">
-                <a:shade val="15000"/>
-              </a:schemeClr>
-            </a:lnRef>
-            <a:fillRef idx="1">
-              <a:schemeClr val="accent1"/>
-            </a:fillRef>
-            <a:effectRef idx="0">
-              <a:schemeClr val="accent1"/>
-            </a:effectRef>
-            <a:fontRef idx="minor">
-              <a:schemeClr val="lt1"/>
-            </a:fontRef>
-          </p:style>
-          <p:txBody>
-            <a:bodyPr rtlCol="0" anchor="ctr"/>
-            <a:lstStyle/>
-            <a:p>
-              <a:pPr algn="ctr"/>
-              <a:endParaRPr lang="en-US" sz="1600"/>
-            </a:p>
-          </p:txBody>
-        </p:sp>
-        <p:sp>
-          <p:nvSpPr>
-            <p:cNvPr id="208" name="Oval 207">
-              <a:extLst>
-                <a:ext uri="{FF2B5EF4-FFF2-40B4-BE49-F238E27FC236}">
-                  <a16:creationId xmlns:a16="http://schemas.microsoft.com/office/drawing/2014/main" id="{C37EBCCB-94B2-2036-31B8-B52F3DE42280}"/>
-                </a:ext>
-              </a:extLst>
-            </p:cNvPr>
-            <p:cNvSpPr/>
-            <p:nvPr/>
-          </p:nvSpPr>
-          <p:spPr>
-            <a:xfrm>
-              <a:off x="10766637" y="8687694"/>
-              <a:ext cx="684999" cy="689246"/>
+              <a:off x="10654941" y="8729498"/>
+              <a:ext cx="894965" cy="896381"/>
             </a:xfrm>
             <a:prstGeom prst="ellipse">
               <a:avLst/>
@@ -17533,8 +17341,8 @@
           </p:nvSpPr>
           <p:spPr>
             <a:xfrm>
-              <a:off x="9918448" y="8867647"/>
-              <a:ext cx="796638" cy="338554"/>
+              <a:off x="10629179" y="9025058"/>
+              <a:ext cx="945168" cy="307777"/>
             </a:xfrm>
             <a:prstGeom prst="rect">
               <a:avLst/>
@@ -17549,7 +17357,7 @@
             <a:p>
               <a:pPr algn="ctr"/>
               <a:r>
-                <a:rPr lang="en-US" sz="1600" dirty="0">
+                <a:rPr lang="en-US" sz="1400" dirty="0">
                   <a:solidFill>
                     <a:schemeClr val="tx1"/>
                   </a:solidFill>
@@ -17557,7 +17365,7 @@
                 <a:t>T</a:t>
               </a:r>
               <a:r>
-                <a:rPr lang="en-US" sz="1600" baseline="-25000" dirty="0">
+                <a:rPr lang="en-US" sz="1400" baseline="-25000" dirty="0">
                   <a:solidFill>
                     <a:schemeClr val="tx1"/>
                   </a:solidFill>
@@ -17565,56 +17373,27 @@
                 <a:t>1</a:t>
               </a:r>
               <a:r>
-                <a:rPr lang="en-US" sz="1600" dirty="0">
+                <a:rPr lang="en-US" sz="1400" dirty="0">
                   <a:solidFill>
                     <a:schemeClr val="tx1"/>
                   </a:solidFill>
                 </a:rPr>
-                <a:t> ∘ T</a:t>
+                <a:t> </a:t>
               </a:r>
               <a:r>
-                <a:rPr lang="en-US" sz="1600" baseline="-25000" dirty="0">
-                  <a:solidFill>
-                    <a:schemeClr val="tx1"/>
-                  </a:solidFill>
-                </a:rPr>
-                <a:t>5</a:t>
+                <a:rPr lang="en-US" sz="1400" dirty="0"/>
+                <a:t>∘ T</a:t>
               </a:r>
-              <a:endParaRPr lang="en-US" sz="1600" baseline="-25000" dirty="0"/>
-            </a:p>
-          </p:txBody>
-        </p:sp>
-        <p:sp>
-          <p:nvSpPr>
-            <p:cNvPr id="212" name="TextBox 211">
-              <a:extLst>
-                <a:ext uri="{FF2B5EF4-FFF2-40B4-BE49-F238E27FC236}">
-                  <a16:creationId xmlns:a16="http://schemas.microsoft.com/office/drawing/2014/main" id="{B463F4F8-1288-6257-F382-B06872FB2040}"/>
-                </a:ext>
-              </a:extLst>
-            </p:cNvPr>
-            <p:cNvSpPr txBox="1"/>
-            <p:nvPr/>
-          </p:nvSpPr>
-          <p:spPr>
-            <a:xfrm>
-              <a:off x="10717782" y="8867647"/>
-              <a:ext cx="796638" cy="338554"/>
-            </a:xfrm>
-            <a:prstGeom prst="rect">
-              <a:avLst/>
-            </a:prstGeom>
-            <a:noFill/>
-          </p:spPr>
-          <p:txBody>
-            <a:bodyPr wrap="square">
-              <a:spAutoFit/>
-            </a:bodyPr>
-            <a:lstStyle/>
-            <a:p>
-              <a:pPr algn="ctr"/>
               <a:r>
-                <a:rPr lang="en-US" sz="1600" dirty="0">
+                <a:rPr lang="en-US" sz="1400" baseline="-25000" dirty="0"/>
+                <a:t>3</a:t>
+              </a:r>
+              <a:r>
+                <a:rPr lang="en-US" sz="1400" dirty="0"/>
+                <a:t> ∘ </a:t>
+              </a:r>
+              <a:r>
+                <a:rPr lang="en-US" sz="1400" dirty="0">
                   <a:solidFill>
                     <a:schemeClr val="tx1"/>
                   </a:solidFill>
@@ -17622,168 +17401,14 @@
                 <a:t>T</a:t>
               </a:r>
               <a:r>
-                <a:rPr lang="en-US" sz="1600" baseline="-25000" dirty="0"/>
-                <a:t>3</a:t>
-              </a:r>
-              <a:r>
-                <a:rPr lang="en-US" sz="1600" dirty="0">
-                  <a:solidFill>
-                    <a:schemeClr val="tx1"/>
-                  </a:solidFill>
-                </a:rPr>
-                <a:t> ∘ T</a:t>
-              </a:r>
-              <a:r>
-                <a:rPr lang="en-US" sz="1600" baseline="-25000" dirty="0">
+                <a:rPr lang="en-US" sz="1400" baseline="-25000" dirty="0">
                   <a:solidFill>
                     <a:schemeClr val="tx1"/>
                   </a:solidFill>
                 </a:rPr>
                 <a:t>5</a:t>
               </a:r>
-              <a:endParaRPr lang="en-US" sz="1600" baseline="-25000" dirty="0"/>
-            </a:p>
-          </p:txBody>
-        </p:sp>
-        <p:sp>
-          <p:nvSpPr>
-            <p:cNvPr id="213" name="TextBox 212">
-              <a:extLst>
-                <a:ext uri="{FF2B5EF4-FFF2-40B4-BE49-F238E27FC236}">
-                  <a16:creationId xmlns:a16="http://schemas.microsoft.com/office/drawing/2014/main" id="{732C086B-4413-0501-4613-C4C93A65D112}"/>
-                </a:ext>
-              </a:extLst>
-            </p:cNvPr>
-            <p:cNvSpPr txBox="1"/>
-            <p:nvPr/>
-          </p:nvSpPr>
-          <p:spPr>
-            <a:xfrm>
-              <a:off x="7488917" y="8867647"/>
-              <a:ext cx="796638" cy="338554"/>
-            </a:xfrm>
-            <a:prstGeom prst="rect">
-              <a:avLst/>
-            </a:prstGeom>
-            <a:noFill/>
-          </p:spPr>
-          <p:txBody>
-            <a:bodyPr wrap="square">
-              <a:spAutoFit/>
-            </a:bodyPr>
-            <a:lstStyle/>
-            <a:p>
-              <a:pPr algn="ctr"/>
-              <a:r>
-                <a:rPr lang="en-US" sz="1600" dirty="0">
-                  <a:solidFill>
-                    <a:schemeClr val="tx1"/>
-                  </a:solidFill>
-                </a:rPr>
-                <a:t>T</a:t>
-              </a:r>
-              <a:r>
-                <a:rPr lang="en-US" sz="1600" baseline="-25000" dirty="0">
-                  <a:solidFill>
-                    <a:schemeClr val="tx1"/>
-                  </a:solidFill>
-                </a:rPr>
-                <a:t>1</a:t>
-              </a:r>
-              <a:endParaRPr lang="en-US" sz="1600" baseline="-25000" dirty="0"/>
-            </a:p>
-          </p:txBody>
-        </p:sp>
-        <p:sp>
-          <p:nvSpPr>
-            <p:cNvPr id="214" name="TextBox 213">
-              <a:extLst>
-                <a:ext uri="{FF2B5EF4-FFF2-40B4-BE49-F238E27FC236}">
-                  <a16:creationId xmlns:a16="http://schemas.microsoft.com/office/drawing/2014/main" id="{FD363BB7-0CD7-BA65-202C-1A2468D2DD94}"/>
-                </a:ext>
-              </a:extLst>
-            </p:cNvPr>
-            <p:cNvSpPr txBox="1"/>
-            <p:nvPr/>
-          </p:nvSpPr>
-          <p:spPr>
-            <a:xfrm>
-              <a:off x="8278590" y="8873118"/>
-              <a:ext cx="796638" cy="338554"/>
-            </a:xfrm>
-            <a:prstGeom prst="rect">
-              <a:avLst/>
-            </a:prstGeom>
-            <a:noFill/>
-          </p:spPr>
-          <p:txBody>
-            <a:bodyPr wrap="square">
-              <a:spAutoFit/>
-            </a:bodyPr>
-            <a:lstStyle/>
-            <a:p>
-              <a:pPr algn="ctr"/>
-              <a:r>
-                <a:rPr lang="en-US" sz="1600" dirty="0">
-                  <a:solidFill>
-                    <a:schemeClr val="tx1"/>
-                  </a:solidFill>
-                </a:rPr>
-                <a:t>T</a:t>
-              </a:r>
-              <a:r>
-                <a:rPr lang="en-US" sz="1600" baseline="-25000" dirty="0">
-                  <a:solidFill>
-                    <a:schemeClr val="tx1"/>
-                  </a:solidFill>
-                </a:rPr>
-                <a:t>3</a:t>
-              </a:r>
-              <a:endParaRPr lang="en-US" sz="1600" baseline="-25000" dirty="0"/>
-            </a:p>
-          </p:txBody>
-        </p:sp>
-        <p:sp>
-          <p:nvSpPr>
-            <p:cNvPr id="215" name="TextBox 214">
-              <a:extLst>
-                <a:ext uri="{FF2B5EF4-FFF2-40B4-BE49-F238E27FC236}">
-                  <a16:creationId xmlns:a16="http://schemas.microsoft.com/office/drawing/2014/main" id="{0549EFD8-C758-6BBE-F799-2AE2940C7A74}"/>
-                </a:ext>
-              </a:extLst>
-            </p:cNvPr>
-            <p:cNvSpPr txBox="1"/>
-            <p:nvPr/>
-          </p:nvSpPr>
-          <p:spPr>
-            <a:xfrm>
-              <a:off x="9075228" y="8866865"/>
-              <a:ext cx="796638" cy="338554"/>
-            </a:xfrm>
-            <a:prstGeom prst="rect">
-              <a:avLst/>
-            </a:prstGeom>
-            <a:noFill/>
-          </p:spPr>
-          <p:txBody>
-            <a:bodyPr wrap="square">
-              <a:spAutoFit/>
-            </a:bodyPr>
-            <a:lstStyle/>
-            <a:p>
-              <a:pPr algn="ctr"/>
-              <a:r>
-                <a:rPr lang="en-US" sz="1600" dirty="0">
-                  <a:solidFill>
-                    <a:schemeClr val="tx1"/>
-                  </a:solidFill>
-                </a:rPr>
-                <a:t>T</a:t>
-              </a:r>
-              <a:r>
-                <a:rPr lang="en-US" sz="1600" baseline="-25000" dirty="0"/>
-                <a:t>5</a:t>
-              </a:r>
+              <a:endParaRPr lang="en-US" sz="1400" baseline="-25000" dirty="0"/>
             </a:p>
           </p:txBody>
         </p:sp>
@@ -17801,7 +17426,7 @@
           </p:nvSpPr>
           <p:spPr>
             <a:xfrm>
-              <a:off x="11853017" y="8459753"/>
+              <a:off x="12108198" y="8470386"/>
               <a:ext cx="267629" cy="267629"/>
             </a:xfrm>
             <a:prstGeom prst="ellipse">
@@ -17851,7 +17476,7 @@
           </p:nvSpPr>
           <p:spPr>
             <a:xfrm>
-              <a:off x="11866792" y="8913481"/>
+              <a:off x="12121973" y="8924114"/>
               <a:ext cx="267629" cy="267629"/>
             </a:xfrm>
             <a:prstGeom prst="ellipse">
@@ -17901,7 +17526,7 @@
           </p:nvSpPr>
           <p:spPr>
             <a:xfrm>
-              <a:off x="11866791" y="9373054"/>
+              <a:off x="12121972" y="9383687"/>
               <a:ext cx="267629" cy="267629"/>
             </a:xfrm>
             <a:prstGeom prst="ellipse">
@@ -17955,7 +17580,7 @@
           </p:nvSpPr>
           <p:spPr>
             <a:xfrm>
-              <a:off x="12156372" y="8408901"/>
+              <a:off x="12411553" y="8419534"/>
               <a:ext cx="1673663" cy="369332"/>
             </a:xfrm>
             <a:prstGeom prst="rect">
@@ -17990,7 +17615,7 @@
           </p:nvSpPr>
           <p:spPr>
             <a:xfrm>
-              <a:off x="12156372" y="8862629"/>
+              <a:off x="12411553" y="8873262"/>
               <a:ext cx="1400833" cy="369332"/>
             </a:xfrm>
             <a:prstGeom prst="rect">
@@ -18025,7 +17650,7 @@
           </p:nvSpPr>
           <p:spPr>
             <a:xfrm>
-              <a:off x="12156372" y="9322202"/>
+              <a:off x="12411553" y="9332835"/>
               <a:ext cx="1799980" cy="369332"/>
             </a:xfrm>
             <a:prstGeom prst="rect">
@@ -18046,12 +17671,57 @@
             </a:p>
           </p:txBody>
         </p:sp>
+        <p:sp>
+          <p:nvSpPr>
+            <p:cNvPr id="235" name="TextBox 234">
+              <a:extLst>
+                <a:ext uri="{FF2B5EF4-FFF2-40B4-BE49-F238E27FC236}">
+                  <a16:creationId xmlns:a16="http://schemas.microsoft.com/office/drawing/2014/main" id="{77D7C0AB-C5FA-CF36-50C6-FFFC45935BEB}"/>
+                </a:ext>
+              </a:extLst>
+            </p:cNvPr>
+            <p:cNvSpPr txBox="1"/>
+            <p:nvPr/>
+          </p:nvSpPr>
+          <p:spPr>
+            <a:xfrm>
+              <a:off x="7703904" y="8098255"/>
+              <a:ext cx="575607" cy="400110"/>
+            </a:xfrm>
+            <a:prstGeom prst="rect">
+              <a:avLst/>
+            </a:prstGeom>
+            <a:solidFill>
+              <a:schemeClr val="bg1"/>
+            </a:solidFill>
+            <a:ln w="19050">
+              <a:solidFill>
+                <a:schemeClr val="accent1">
+                  <a:shade val="15000"/>
+                </a:schemeClr>
+              </a:solidFill>
+              <a:prstDash val="sysDash"/>
+            </a:ln>
+          </p:spPr>
+          <p:txBody>
+            <a:bodyPr wrap="none" rtlCol="0">
+              <a:spAutoFit/>
+            </a:bodyPr>
+            <a:lstStyle/>
+            <a:p>
+              <a:r>
+                <a:rPr lang="en-US" sz="2000" dirty="0"/>
+                <a:t>Key</a:t>
+              </a:r>
+            </a:p>
+          </p:txBody>
+        </p:sp>
         <p:grpSp>
           <p:nvGrpSpPr>
-            <p:cNvPr id="17" name="Group 16">
-              <a:extLst>
-                <a:ext uri="{FF2B5EF4-FFF2-40B4-BE49-F238E27FC236}">
-                  <a16:creationId xmlns:a16="http://schemas.microsoft.com/office/drawing/2014/main" id="{6A6FB9AD-CEFF-370F-D268-AD54FC435EA4}"/>
+            <p:cNvPr id="13" name="Group 12">
+              <a:extLst>
+                <a:ext uri="{FF2B5EF4-FFF2-40B4-BE49-F238E27FC236}">
+                  <a16:creationId xmlns:a16="http://schemas.microsoft.com/office/drawing/2014/main" id="{18BEDD3B-D933-15D2-7522-A992F7991ABF}"/>
                 </a:ext>
               </a:extLst>
             </p:cNvPr>
@@ -18060,18 +17730,18 @@
           </p:nvGrpSpPr>
           <p:grpSpPr>
             <a:xfrm>
-              <a:off x="5340031" y="946448"/>
-              <a:ext cx="2042468" cy="473633"/>
-              <a:chOff x="-4846261" y="583986"/>
-              <a:chExt cx="2042468" cy="473633"/>
+              <a:off x="5780928" y="949292"/>
+              <a:ext cx="1671045" cy="473633"/>
+              <a:chOff x="343224" y="555912"/>
+              <a:chExt cx="1671045" cy="473633"/>
             </a:xfrm>
           </p:grpSpPr>
           <p:sp>
             <p:nvSpPr>
-              <p:cNvPr id="4" name="Rounded Rectangle 3">
+              <p:cNvPr id="3" name="Rounded Rectangle 2">
                 <a:extLst>
                   <a:ext uri="{FF2B5EF4-FFF2-40B4-BE49-F238E27FC236}">
-                    <a16:creationId xmlns:a16="http://schemas.microsoft.com/office/drawing/2014/main" id="{4CB7E85A-74DE-8F41-CDE2-E4CE9533CB0B}"/>
+                    <a16:creationId xmlns:a16="http://schemas.microsoft.com/office/drawing/2014/main" id="{7B1269EE-803F-0D02-DDBD-B7BCA712750D}"/>
                   </a:ext>
                 </a:extLst>
               </p:cNvPr>
@@ -18080,8 +17750,8 @@
             </p:nvSpPr>
             <p:spPr>
               <a:xfrm>
-                <a:off x="-4846261" y="583986"/>
-                <a:ext cx="2042468" cy="473633"/>
+                <a:off x="343224" y="555912"/>
+                <a:ext cx="1671045" cy="473633"/>
               </a:xfrm>
               <a:prstGeom prst="roundRect">
                 <a:avLst/>
@@ -18118,10 +17788,10 @@
           </p:sp>
           <p:sp>
             <p:nvSpPr>
-              <p:cNvPr id="5" name="Oval 4">
+              <p:cNvPr id="6" name="Oval 5">
                 <a:extLst>
                   <a:ext uri="{FF2B5EF4-FFF2-40B4-BE49-F238E27FC236}">
-                    <a16:creationId xmlns:a16="http://schemas.microsoft.com/office/drawing/2014/main" id="{C8850932-98D2-21D3-FA26-A4835580E2EA}"/>
+                    <a16:creationId xmlns:a16="http://schemas.microsoft.com/office/drawing/2014/main" id="{ABD0020E-2C4E-2A10-A214-48AF62A1B094}"/>
                   </a:ext>
                 </a:extLst>
               </p:cNvPr>
@@ -18130,7 +17800,7 @@
             </p:nvSpPr>
             <p:spPr>
               <a:xfrm>
-                <a:off x="-4723598" y="678771"/>
+                <a:off x="465887" y="650697"/>
                 <a:ext cx="267629" cy="267629"/>
               </a:xfrm>
               <a:prstGeom prst="ellipse">
@@ -18168,10 +17838,10 @@
           </p:sp>
           <p:sp>
             <p:nvSpPr>
-              <p:cNvPr id="7" name="Oval 6">
+              <p:cNvPr id="8" name="Oval 7">
                 <a:extLst>
                   <a:ext uri="{FF2B5EF4-FFF2-40B4-BE49-F238E27FC236}">
-                    <a16:creationId xmlns:a16="http://schemas.microsoft.com/office/drawing/2014/main" id="{8E080A93-7496-02C9-2FD7-433726C1D17A}"/>
+                    <a16:creationId xmlns:a16="http://schemas.microsoft.com/office/drawing/2014/main" id="{873CEA07-345C-9B7C-FADC-4FD05CD46EBD}"/>
                   </a:ext>
                 </a:extLst>
               </p:cNvPr>
@@ -18180,7 +17850,7 @@
             </p:nvSpPr>
             <p:spPr>
               <a:xfrm>
-                <a:off x="-4333307" y="678771"/>
+                <a:off x="856178" y="650697"/>
                 <a:ext cx="267629" cy="267629"/>
               </a:xfrm>
               <a:prstGeom prst="ellipse">
@@ -18218,10 +17888,10 @@
           </p:sp>
           <p:sp>
             <p:nvSpPr>
-              <p:cNvPr id="9" name="Oval 8">
+              <p:cNvPr id="10" name="Oval 9">
                 <a:extLst>
                   <a:ext uri="{FF2B5EF4-FFF2-40B4-BE49-F238E27FC236}">
-                    <a16:creationId xmlns:a16="http://schemas.microsoft.com/office/drawing/2014/main" id="{63AD1EAE-2667-13A3-F743-EC861DAF22BB}"/>
+                    <a16:creationId xmlns:a16="http://schemas.microsoft.com/office/drawing/2014/main" id="{78BAA630-1A49-ABF7-5C4F-97951032481D}"/>
                   </a:ext>
                 </a:extLst>
               </p:cNvPr>
@@ -18230,7 +17900,7 @@
             </p:nvSpPr>
             <p:spPr>
               <a:xfrm>
-                <a:off x="-3965321" y="678771"/>
+                <a:off x="1224164" y="650697"/>
                 <a:ext cx="267629" cy="267629"/>
               </a:xfrm>
               <a:prstGeom prst="ellipse">
@@ -18268,10 +17938,10 @@
           </p:sp>
           <p:sp>
             <p:nvSpPr>
-              <p:cNvPr id="15" name="Oval 14">
+              <p:cNvPr id="11" name="Oval 10">
                 <a:extLst>
                   <a:ext uri="{FF2B5EF4-FFF2-40B4-BE49-F238E27FC236}">
-                    <a16:creationId xmlns:a16="http://schemas.microsoft.com/office/drawing/2014/main" id="{D3B3AC56-ED2E-AFCC-5613-1A648E1B92D1}"/>
+                    <a16:creationId xmlns:a16="http://schemas.microsoft.com/office/drawing/2014/main" id="{AA0278AB-7ACD-6FC6-A8BB-A06EB5BDB080}"/>
                   </a:ext>
                 </a:extLst>
               </p:cNvPr>
@@ -18280,57 +17950,7 @@
             </p:nvSpPr>
             <p:spPr>
               <a:xfrm>
-                <a:off x="-3574981" y="681233"/>
-                <a:ext cx="267629" cy="267629"/>
-              </a:xfrm>
-              <a:prstGeom prst="ellipse">
-                <a:avLst/>
-              </a:prstGeom>
-              <a:solidFill>
-                <a:schemeClr val="bg2"/>
-              </a:solidFill>
-              <a:ln w="22225"/>
-            </p:spPr>
-            <p:style>
-              <a:lnRef idx="2">
-                <a:schemeClr val="accent1">
-                  <a:shade val="15000"/>
-                </a:schemeClr>
-              </a:lnRef>
-              <a:fillRef idx="1">
-                <a:schemeClr val="accent1"/>
-              </a:fillRef>
-              <a:effectRef idx="0">
-                <a:schemeClr val="accent1"/>
-              </a:effectRef>
-              <a:fontRef idx="minor">
-                <a:schemeClr val="lt1"/>
-              </a:fontRef>
-            </p:style>
-            <p:txBody>
-              <a:bodyPr rtlCol="0" anchor="ctr"/>
-              <a:lstStyle/>
-              <a:p>
-                <a:pPr algn="ctr"/>
-                <a:endParaRPr lang="en-US"/>
-              </a:p>
-            </p:txBody>
-          </p:sp>
-          <p:sp>
-            <p:nvSpPr>
-              <p:cNvPr id="16" name="Oval 15">
-                <a:extLst>
-                  <a:ext uri="{FF2B5EF4-FFF2-40B4-BE49-F238E27FC236}">
-                    <a16:creationId xmlns:a16="http://schemas.microsoft.com/office/drawing/2014/main" id="{D9533773-1BD2-B13C-7A54-8BBEF44F6BA0}"/>
-                  </a:ext>
-                </a:extLst>
-              </p:cNvPr>
-              <p:cNvSpPr/>
-              <p:nvPr/>
-            </p:nvSpPr>
-            <p:spPr>
-              <a:xfrm>
-                <a:off x="-3206995" y="681233"/>
+                <a:off x="1614504" y="653159"/>
                 <a:ext cx="267629" cy="267629"/>
               </a:xfrm>
               <a:prstGeom prst="ellipse">
@@ -18369,10 +17989,10 @@
         </p:grpSp>
         <p:grpSp>
           <p:nvGrpSpPr>
-            <p:cNvPr id="18" name="Group 17">
-              <a:extLst>
-                <a:ext uri="{FF2B5EF4-FFF2-40B4-BE49-F238E27FC236}">
-                  <a16:creationId xmlns:a16="http://schemas.microsoft.com/office/drawing/2014/main" id="{7F0EF33E-0241-B99A-9745-5B1C303EBD40}"/>
+            <p:cNvPr id="14" name="Group 13">
+              <a:extLst>
+                <a:ext uri="{FF2B5EF4-FFF2-40B4-BE49-F238E27FC236}">
+                  <a16:creationId xmlns:a16="http://schemas.microsoft.com/office/drawing/2014/main" id="{A2354EEC-2A47-EE60-73CE-A4DF5E0CD61E}"/>
                 </a:ext>
               </a:extLst>
             </p:cNvPr>
@@ -18381,18 +18001,18 @@
           </p:nvGrpSpPr>
           <p:grpSpPr>
             <a:xfrm>
-              <a:off x="389440" y="3964459"/>
-              <a:ext cx="2042468" cy="473633"/>
-              <a:chOff x="-4846261" y="583986"/>
-              <a:chExt cx="2042468" cy="473633"/>
+              <a:off x="830332" y="3976516"/>
+              <a:ext cx="1671045" cy="473633"/>
+              <a:chOff x="343224" y="555912"/>
+              <a:chExt cx="1671045" cy="473633"/>
             </a:xfrm>
           </p:grpSpPr>
           <p:sp>
             <p:nvSpPr>
-              <p:cNvPr id="19" name="Rounded Rectangle 18">
+              <p:cNvPr id="30" name="Rounded Rectangle 29">
                 <a:extLst>
                   <a:ext uri="{FF2B5EF4-FFF2-40B4-BE49-F238E27FC236}">
-                    <a16:creationId xmlns:a16="http://schemas.microsoft.com/office/drawing/2014/main" id="{EED0A924-CDAE-B69C-CF49-4BCE900FBDBB}"/>
+                    <a16:creationId xmlns:a16="http://schemas.microsoft.com/office/drawing/2014/main" id="{5EE1C7A5-D013-1733-4188-F3A770999077}"/>
                   </a:ext>
                 </a:extLst>
               </p:cNvPr>
@@ -18401,8 +18021,8 @@
             </p:nvSpPr>
             <p:spPr>
               <a:xfrm>
-                <a:off x="-4846261" y="583986"/>
-                <a:ext cx="2042468" cy="473633"/>
+                <a:off x="343224" y="555912"/>
+                <a:ext cx="1671045" cy="473633"/>
               </a:xfrm>
               <a:prstGeom prst="roundRect">
                 <a:avLst/>
@@ -18439,10 +18059,10 @@
           </p:sp>
           <p:sp>
             <p:nvSpPr>
-              <p:cNvPr id="20" name="Oval 19">
+              <p:cNvPr id="31" name="Oval 30">
                 <a:extLst>
                   <a:ext uri="{FF2B5EF4-FFF2-40B4-BE49-F238E27FC236}">
-                    <a16:creationId xmlns:a16="http://schemas.microsoft.com/office/drawing/2014/main" id="{210238D1-84E7-4D73-E03C-93D2AABD2F4D}"/>
+                    <a16:creationId xmlns:a16="http://schemas.microsoft.com/office/drawing/2014/main" id="{531215EC-11F6-DB2A-0B97-473DBFAE0649}"/>
                   </a:ext>
                 </a:extLst>
               </p:cNvPr>
@@ -18451,7 +18071,7 @@
             </p:nvSpPr>
             <p:spPr>
               <a:xfrm>
-                <a:off x="-4723598" y="678771"/>
+                <a:off x="465887" y="650697"/>
                 <a:ext cx="267629" cy="267629"/>
               </a:xfrm>
               <a:prstGeom prst="ellipse">
@@ -18489,10 +18109,10 @@
           </p:sp>
           <p:sp>
             <p:nvSpPr>
-              <p:cNvPr id="21" name="Oval 20">
+              <p:cNvPr id="32" name="Oval 31">
                 <a:extLst>
                   <a:ext uri="{FF2B5EF4-FFF2-40B4-BE49-F238E27FC236}">
-                    <a16:creationId xmlns:a16="http://schemas.microsoft.com/office/drawing/2014/main" id="{8067705C-D380-DEE2-3328-BAC1561EA6EF}"/>
+                    <a16:creationId xmlns:a16="http://schemas.microsoft.com/office/drawing/2014/main" id="{613CD9D3-C21A-E19B-8C8E-7B44A70FE67D}"/>
                   </a:ext>
                 </a:extLst>
               </p:cNvPr>
@@ -18501,7 +18121,7 @@
             </p:nvSpPr>
             <p:spPr>
               <a:xfrm>
-                <a:off x="-4333307" y="678771"/>
+                <a:off x="856178" y="650697"/>
                 <a:ext cx="267629" cy="267629"/>
               </a:xfrm>
               <a:prstGeom prst="ellipse">
@@ -18539,10 +18159,10 @@
           </p:sp>
           <p:sp>
             <p:nvSpPr>
-              <p:cNvPr id="22" name="Oval 21">
+              <p:cNvPr id="33" name="Oval 32">
                 <a:extLst>
                   <a:ext uri="{FF2B5EF4-FFF2-40B4-BE49-F238E27FC236}">
-                    <a16:creationId xmlns:a16="http://schemas.microsoft.com/office/drawing/2014/main" id="{3008032A-E6D4-03C0-E225-4F459C4408E2}"/>
+                    <a16:creationId xmlns:a16="http://schemas.microsoft.com/office/drawing/2014/main" id="{928F5E96-F737-8A58-9070-B6217F9ADC10}"/>
                   </a:ext>
                 </a:extLst>
               </p:cNvPr>
@@ -18551,7 +18171,7 @@
             </p:nvSpPr>
             <p:spPr>
               <a:xfrm>
-                <a:off x="-3965321" y="678771"/>
+                <a:off x="1224164" y="650697"/>
                 <a:ext cx="267629" cy="267629"/>
               </a:xfrm>
               <a:prstGeom prst="ellipse">
@@ -18589,10 +18209,10 @@
           </p:sp>
           <p:sp>
             <p:nvSpPr>
-              <p:cNvPr id="23" name="Oval 22">
+              <p:cNvPr id="34" name="Oval 33">
                 <a:extLst>
                   <a:ext uri="{FF2B5EF4-FFF2-40B4-BE49-F238E27FC236}">
-                    <a16:creationId xmlns:a16="http://schemas.microsoft.com/office/drawing/2014/main" id="{CA5C127E-E199-0BB8-08F3-67019A83E4EC}"/>
+                    <a16:creationId xmlns:a16="http://schemas.microsoft.com/office/drawing/2014/main" id="{0C91DBE6-9984-EEC1-9FFF-32CAB10E34DF}"/>
                   </a:ext>
                 </a:extLst>
               </p:cNvPr>
@@ -18601,57 +18221,7 @@
             </p:nvSpPr>
             <p:spPr>
               <a:xfrm>
-                <a:off x="-3574981" y="681233"/>
-                <a:ext cx="267629" cy="267629"/>
-              </a:xfrm>
-              <a:prstGeom prst="ellipse">
-                <a:avLst/>
-              </a:prstGeom>
-              <a:solidFill>
-                <a:schemeClr val="bg2"/>
-              </a:solidFill>
-              <a:ln w="22225"/>
-            </p:spPr>
-            <p:style>
-              <a:lnRef idx="2">
-                <a:schemeClr val="accent1">
-                  <a:shade val="15000"/>
-                </a:schemeClr>
-              </a:lnRef>
-              <a:fillRef idx="1">
-                <a:schemeClr val="accent1"/>
-              </a:fillRef>
-              <a:effectRef idx="0">
-                <a:schemeClr val="accent1"/>
-              </a:effectRef>
-              <a:fontRef idx="minor">
-                <a:schemeClr val="lt1"/>
-              </a:fontRef>
-            </p:style>
-            <p:txBody>
-              <a:bodyPr rtlCol="0" anchor="ctr"/>
-              <a:lstStyle/>
-              <a:p>
-                <a:pPr algn="ctr"/>
-                <a:endParaRPr lang="en-US"/>
-              </a:p>
-            </p:txBody>
-          </p:sp>
-          <p:sp>
-            <p:nvSpPr>
-              <p:cNvPr id="24" name="Oval 23">
-                <a:extLst>
-                  <a:ext uri="{FF2B5EF4-FFF2-40B4-BE49-F238E27FC236}">
-                    <a16:creationId xmlns:a16="http://schemas.microsoft.com/office/drawing/2014/main" id="{8E8E94DC-5271-C51C-C9C5-B7078E3A3D65}"/>
-                  </a:ext>
-                </a:extLst>
-              </p:cNvPr>
-              <p:cNvSpPr/>
-              <p:nvPr/>
-            </p:nvSpPr>
-            <p:spPr>
-              <a:xfrm>
-                <a:off x="-3206995" y="681233"/>
+                <a:off x="1614504" y="653159"/>
                 <a:ext cx="267629" cy="267629"/>
               </a:xfrm>
               <a:prstGeom prst="ellipse">
@@ -18690,10 +18260,10 @@
         </p:grpSp>
         <p:grpSp>
           <p:nvGrpSpPr>
-            <p:cNvPr id="25" name="Group 24">
-              <a:extLst>
-                <a:ext uri="{FF2B5EF4-FFF2-40B4-BE49-F238E27FC236}">
-                  <a16:creationId xmlns:a16="http://schemas.microsoft.com/office/drawing/2014/main" id="{F0420CA2-4417-9DDA-A420-D39AA7316D0B}"/>
+            <p:cNvPr id="35" name="Group 34">
+              <a:extLst>
+                <a:ext uri="{FF2B5EF4-FFF2-40B4-BE49-F238E27FC236}">
+                  <a16:creationId xmlns:a16="http://schemas.microsoft.com/office/drawing/2014/main" id="{F6613A23-8992-5756-682B-6953C355C6B1}"/>
                 </a:ext>
               </a:extLst>
             </p:cNvPr>
@@ -18702,18 +18272,18 @@
           </p:nvGrpSpPr>
           <p:grpSpPr>
             <a:xfrm>
-              <a:off x="3645592" y="3965558"/>
-              <a:ext cx="2042468" cy="473633"/>
-              <a:chOff x="-4846261" y="583986"/>
-              <a:chExt cx="2042468" cy="473633"/>
+              <a:off x="4086484" y="3976191"/>
+              <a:ext cx="1671045" cy="473633"/>
+              <a:chOff x="343224" y="555912"/>
+              <a:chExt cx="1671045" cy="473633"/>
             </a:xfrm>
           </p:grpSpPr>
           <p:sp>
             <p:nvSpPr>
-              <p:cNvPr id="26" name="Rounded Rectangle 25">
+              <p:cNvPr id="36" name="Rounded Rectangle 35">
                 <a:extLst>
                   <a:ext uri="{FF2B5EF4-FFF2-40B4-BE49-F238E27FC236}">
-                    <a16:creationId xmlns:a16="http://schemas.microsoft.com/office/drawing/2014/main" id="{025C2D03-F3DF-8E6C-71E8-27D7E6323C47}"/>
+                    <a16:creationId xmlns:a16="http://schemas.microsoft.com/office/drawing/2014/main" id="{7C1E1C08-B98E-BBD1-F52B-34E0C716F586}"/>
                   </a:ext>
                 </a:extLst>
               </p:cNvPr>
@@ -18722,8 +18292,8 @@
             </p:nvSpPr>
             <p:spPr>
               <a:xfrm>
-                <a:off x="-4846261" y="583986"/>
-                <a:ext cx="2042468" cy="473633"/>
+                <a:off x="343224" y="555912"/>
+                <a:ext cx="1671045" cy="473633"/>
               </a:xfrm>
               <a:prstGeom prst="roundRect">
                 <a:avLst/>
@@ -18760,10 +18330,10 @@
           </p:sp>
           <p:sp>
             <p:nvSpPr>
-              <p:cNvPr id="27" name="Oval 26">
+              <p:cNvPr id="37" name="Oval 36">
                 <a:extLst>
                   <a:ext uri="{FF2B5EF4-FFF2-40B4-BE49-F238E27FC236}">
-                    <a16:creationId xmlns:a16="http://schemas.microsoft.com/office/drawing/2014/main" id="{985730C1-6C56-FEC1-41A0-1A33F746B011}"/>
+                    <a16:creationId xmlns:a16="http://schemas.microsoft.com/office/drawing/2014/main" id="{A9B7E52D-398D-95FD-39EB-03CA3382FCBC}"/>
                   </a:ext>
                 </a:extLst>
               </p:cNvPr>
@@ -18772,7 +18342,7 @@
             </p:nvSpPr>
             <p:spPr>
               <a:xfrm>
-                <a:off x="-4723598" y="678771"/>
+                <a:off x="465887" y="650697"/>
                 <a:ext cx="267629" cy="267629"/>
               </a:xfrm>
               <a:prstGeom prst="ellipse">
@@ -18810,10 +18380,10 @@
           </p:sp>
           <p:sp>
             <p:nvSpPr>
-              <p:cNvPr id="28" name="Oval 27">
+              <p:cNvPr id="39" name="Oval 38">
                 <a:extLst>
                   <a:ext uri="{FF2B5EF4-FFF2-40B4-BE49-F238E27FC236}">
-                    <a16:creationId xmlns:a16="http://schemas.microsoft.com/office/drawing/2014/main" id="{FF9ECF22-9880-8BE9-031D-B84FF85CF7B1}"/>
+                    <a16:creationId xmlns:a16="http://schemas.microsoft.com/office/drawing/2014/main" id="{B0509D31-3E9D-1F44-8430-91D197F6FACD}"/>
                   </a:ext>
                 </a:extLst>
               </p:cNvPr>
@@ -18822,7 +18392,7 @@
             </p:nvSpPr>
             <p:spPr>
               <a:xfrm>
-                <a:off x="-4333307" y="678771"/>
+                <a:off x="856178" y="650697"/>
                 <a:ext cx="267629" cy="267629"/>
               </a:xfrm>
               <a:prstGeom prst="ellipse">
@@ -18860,10 +18430,10 @@
           </p:sp>
           <p:sp>
             <p:nvSpPr>
-              <p:cNvPr id="29" name="Oval 28">
+              <p:cNvPr id="40" name="Oval 39">
                 <a:extLst>
                   <a:ext uri="{FF2B5EF4-FFF2-40B4-BE49-F238E27FC236}">
-                    <a16:creationId xmlns:a16="http://schemas.microsoft.com/office/drawing/2014/main" id="{D9F9DDF4-66B1-291B-7865-39685EC77173}"/>
+                    <a16:creationId xmlns:a16="http://schemas.microsoft.com/office/drawing/2014/main" id="{E783B98D-A97F-C5FC-01C0-15929E446448}"/>
                   </a:ext>
                 </a:extLst>
               </p:cNvPr>
@@ -18872,7 +18442,7 @@
             </p:nvSpPr>
             <p:spPr>
               <a:xfrm>
-                <a:off x="-3965321" y="678771"/>
+                <a:off x="1224164" y="650697"/>
                 <a:ext cx="267629" cy="267629"/>
               </a:xfrm>
               <a:prstGeom prst="ellipse">
@@ -18910,10 +18480,10 @@
           </p:sp>
           <p:sp>
             <p:nvSpPr>
-              <p:cNvPr id="38" name="Oval 37">
+              <p:cNvPr id="41" name="Oval 40">
                 <a:extLst>
                   <a:ext uri="{FF2B5EF4-FFF2-40B4-BE49-F238E27FC236}">
-                    <a16:creationId xmlns:a16="http://schemas.microsoft.com/office/drawing/2014/main" id="{F36EE89F-A9E2-CE0A-4124-8D908E05E28F}"/>
+                    <a16:creationId xmlns:a16="http://schemas.microsoft.com/office/drawing/2014/main" id="{BF02967A-A49F-9E48-2A95-E666F7795DEC}"/>
                   </a:ext>
                 </a:extLst>
               </p:cNvPr>
@@ -18922,57 +18492,7 @@
             </p:nvSpPr>
             <p:spPr>
               <a:xfrm>
-                <a:off x="-3574981" y="681233"/>
-                <a:ext cx="267629" cy="267629"/>
-              </a:xfrm>
-              <a:prstGeom prst="ellipse">
-                <a:avLst/>
-              </a:prstGeom>
-              <a:solidFill>
-                <a:srgbClr val="FF0000"/>
-              </a:solidFill>
-              <a:ln w="22225"/>
-            </p:spPr>
-            <p:style>
-              <a:lnRef idx="2">
-                <a:schemeClr val="accent1">
-                  <a:shade val="15000"/>
-                </a:schemeClr>
-              </a:lnRef>
-              <a:fillRef idx="1">
-                <a:schemeClr val="accent1"/>
-              </a:fillRef>
-              <a:effectRef idx="0">
-                <a:schemeClr val="accent1"/>
-              </a:effectRef>
-              <a:fontRef idx="minor">
-                <a:schemeClr val="lt1"/>
-              </a:fontRef>
-            </p:style>
-            <p:txBody>
-              <a:bodyPr rtlCol="0" anchor="ctr"/>
-              <a:lstStyle/>
-              <a:p>
-                <a:pPr algn="ctr"/>
-                <a:endParaRPr lang="en-US"/>
-              </a:p>
-            </p:txBody>
-          </p:sp>
-          <p:sp>
-            <p:nvSpPr>
-              <p:cNvPr id="144" name="Oval 143">
-                <a:extLst>
-                  <a:ext uri="{FF2B5EF4-FFF2-40B4-BE49-F238E27FC236}">
-                    <a16:creationId xmlns:a16="http://schemas.microsoft.com/office/drawing/2014/main" id="{3382AFD5-7381-3132-D54E-57DCC0259AE6}"/>
-                  </a:ext>
-                </a:extLst>
-              </p:cNvPr>
-              <p:cNvSpPr/>
-              <p:nvPr/>
-            </p:nvSpPr>
-            <p:spPr>
-              <a:xfrm>
-                <a:off x="-3206995" y="681233"/>
+                <a:off x="1614504" y="653159"/>
                 <a:ext cx="267629" cy="267629"/>
               </a:xfrm>
               <a:prstGeom prst="ellipse">
@@ -19011,10 +18531,10 @@
         </p:grpSp>
         <p:grpSp>
           <p:nvGrpSpPr>
-            <p:cNvPr id="147" name="Group 146">
-              <a:extLst>
-                <a:ext uri="{FF2B5EF4-FFF2-40B4-BE49-F238E27FC236}">
-                  <a16:creationId xmlns:a16="http://schemas.microsoft.com/office/drawing/2014/main" id="{C7AABAF7-D364-D468-AF58-5C7C6B79732E}"/>
+            <p:cNvPr id="42" name="Group 41">
+              <a:extLst>
+                <a:ext uri="{FF2B5EF4-FFF2-40B4-BE49-F238E27FC236}">
+                  <a16:creationId xmlns:a16="http://schemas.microsoft.com/office/drawing/2014/main" id="{45603744-A350-C330-1239-F697AA631B9F}"/>
                 </a:ext>
               </a:extLst>
             </p:cNvPr>
@@ -19023,18 +18543,18 @@
           </p:nvGrpSpPr>
           <p:grpSpPr>
             <a:xfrm>
-              <a:off x="6944676" y="3996148"/>
-              <a:ext cx="2042468" cy="473633"/>
-              <a:chOff x="-4846261" y="583986"/>
-              <a:chExt cx="2042468" cy="473633"/>
+              <a:off x="7373001" y="4006781"/>
+              <a:ext cx="1671045" cy="473633"/>
+              <a:chOff x="343224" y="555912"/>
+              <a:chExt cx="1671045" cy="473633"/>
             </a:xfrm>
           </p:grpSpPr>
           <p:sp>
             <p:nvSpPr>
-              <p:cNvPr id="148" name="Rounded Rectangle 147">
+              <p:cNvPr id="43" name="Rounded Rectangle 42">
                 <a:extLst>
                   <a:ext uri="{FF2B5EF4-FFF2-40B4-BE49-F238E27FC236}">
-                    <a16:creationId xmlns:a16="http://schemas.microsoft.com/office/drawing/2014/main" id="{14E03437-72E6-BBA4-956A-896FA1D9FD8A}"/>
+                    <a16:creationId xmlns:a16="http://schemas.microsoft.com/office/drawing/2014/main" id="{FE757683-A5D3-D9A7-DE27-56D1B7710E3F}"/>
                   </a:ext>
                 </a:extLst>
               </p:cNvPr>
@@ -19043,8 +18563,8 @@
             </p:nvSpPr>
             <p:spPr>
               <a:xfrm>
-                <a:off x="-4846261" y="583986"/>
-                <a:ext cx="2042468" cy="473633"/>
+                <a:off x="343224" y="555912"/>
+                <a:ext cx="1671045" cy="473633"/>
               </a:xfrm>
               <a:prstGeom prst="roundRect">
                 <a:avLst/>
@@ -19081,10 +18601,10 @@
           </p:sp>
           <p:sp>
             <p:nvSpPr>
-              <p:cNvPr id="150" name="Oval 149">
+              <p:cNvPr id="44" name="Oval 43">
                 <a:extLst>
                   <a:ext uri="{FF2B5EF4-FFF2-40B4-BE49-F238E27FC236}">
-                    <a16:creationId xmlns:a16="http://schemas.microsoft.com/office/drawing/2014/main" id="{B961F2FD-A388-D4F4-3C77-E228B4DFDB49}"/>
+                    <a16:creationId xmlns:a16="http://schemas.microsoft.com/office/drawing/2014/main" id="{E603DB83-8CF7-35D8-0290-2EC10BEE825D}"/>
                   </a:ext>
                 </a:extLst>
               </p:cNvPr>
@@ -19093,7 +18613,7 @@
             </p:nvSpPr>
             <p:spPr>
               <a:xfrm>
-                <a:off x="-4723598" y="678771"/>
+                <a:off x="465887" y="650697"/>
                 <a:ext cx="267629" cy="267629"/>
               </a:xfrm>
               <a:prstGeom prst="ellipse">
@@ -19131,10 +18651,10 @@
           </p:sp>
           <p:sp>
             <p:nvSpPr>
-              <p:cNvPr id="151" name="Oval 150">
+              <p:cNvPr id="45" name="Oval 44">
                 <a:extLst>
                   <a:ext uri="{FF2B5EF4-FFF2-40B4-BE49-F238E27FC236}">
-                    <a16:creationId xmlns:a16="http://schemas.microsoft.com/office/drawing/2014/main" id="{DF908C2F-AFD7-65E4-0B02-F1A34BA966B7}"/>
+                    <a16:creationId xmlns:a16="http://schemas.microsoft.com/office/drawing/2014/main" id="{B6290318-F576-1A0B-0EFC-14BB6C464674}"/>
                   </a:ext>
                 </a:extLst>
               </p:cNvPr>
@@ -19143,7 +18663,7 @@
             </p:nvSpPr>
             <p:spPr>
               <a:xfrm>
-                <a:off x="-4333307" y="678771"/>
+                <a:off x="856178" y="650697"/>
                 <a:ext cx="267629" cy="267629"/>
               </a:xfrm>
               <a:prstGeom prst="ellipse">
@@ -19181,10 +18701,10 @@
           </p:sp>
           <p:sp>
             <p:nvSpPr>
-              <p:cNvPr id="152" name="Oval 151">
+              <p:cNvPr id="46" name="Oval 45">
                 <a:extLst>
                   <a:ext uri="{FF2B5EF4-FFF2-40B4-BE49-F238E27FC236}">
-                    <a16:creationId xmlns:a16="http://schemas.microsoft.com/office/drawing/2014/main" id="{09B93D00-89BE-47C7-BA05-B5259BFA776F}"/>
+                    <a16:creationId xmlns:a16="http://schemas.microsoft.com/office/drawing/2014/main" id="{D0FB732C-BE70-FACE-C580-39387E0EFE36}"/>
                   </a:ext>
                 </a:extLst>
               </p:cNvPr>
@@ -19193,7 +18713,7 @@
             </p:nvSpPr>
             <p:spPr>
               <a:xfrm>
-                <a:off x="-3965321" y="678771"/>
+                <a:off x="1224164" y="650697"/>
                 <a:ext cx="267629" cy="267629"/>
               </a:xfrm>
               <a:prstGeom prst="ellipse">
@@ -19231,10 +18751,10 @@
           </p:sp>
           <p:sp>
             <p:nvSpPr>
-              <p:cNvPr id="153" name="Oval 152">
+              <p:cNvPr id="47" name="Oval 46">
                 <a:extLst>
                   <a:ext uri="{FF2B5EF4-FFF2-40B4-BE49-F238E27FC236}">
-                    <a16:creationId xmlns:a16="http://schemas.microsoft.com/office/drawing/2014/main" id="{01AD31AE-A698-CCE5-DB1E-148F14509709}"/>
+                    <a16:creationId xmlns:a16="http://schemas.microsoft.com/office/drawing/2014/main" id="{205E0C5D-0E85-EA82-7DA7-072D1E7928E7}"/>
                   </a:ext>
                 </a:extLst>
               </p:cNvPr>
@@ -19243,57 +18763,7 @@
             </p:nvSpPr>
             <p:spPr>
               <a:xfrm>
-                <a:off x="-3574981" y="681233"/>
-                <a:ext cx="267629" cy="267629"/>
-              </a:xfrm>
-              <a:prstGeom prst="ellipse">
-                <a:avLst/>
-              </a:prstGeom>
-              <a:solidFill>
-                <a:srgbClr val="FF0000"/>
-              </a:solidFill>
-              <a:ln w="22225"/>
-            </p:spPr>
-            <p:style>
-              <a:lnRef idx="2">
-                <a:schemeClr val="accent1">
-                  <a:shade val="15000"/>
-                </a:schemeClr>
-              </a:lnRef>
-              <a:fillRef idx="1">
-                <a:schemeClr val="accent1"/>
-              </a:fillRef>
-              <a:effectRef idx="0">
-                <a:schemeClr val="accent1"/>
-              </a:effectRef>
-              <a:fontRef idx="minor">
-                <a:schemeClr val="lt1"/>
-              </a:fontRef>
-            </p:style>
-            <p:txBody>
-              <a:bodyPr rtlCol="0" anchor="ctr"/>
-              <a:lstStyle/>
-              <a:p>
-                <a:pPr algn="ctr"/>
-                <a:endParaRPr lang="en-US"/>
-              </a:p>
-            </p:txBody>
-          </p:sp>
-          <p:sp>
-            <p:nvSpPr>
-              <p:cNvPr id="155" name="Oval 154">
-                <a:extLst>
-                  <a:ext uri="{FF2B5EF4-FFF2-40B4-BE49-F238E27FC236}">
-                    <a16:creationId xmlns:a16="http://schemas.microsoft.com/office/drawing/2014/main" id="{3D0BA777-3C6C-173B-CCC8-E99AE3E6C507}"/>
-                  </a:ext>
-                </a:extLst>
-              </p:cNvPr>
-              <p:cNvSpPr/>
-              <p:nvPr/>
-            </p:nvSpPr>
-            <p:spPr>
-              <a:xfrm>
-                <a:off x="-3206995" y="681233"/>
+                <a:off x="1614504" y="653159"/>
                 <a:ext cx="267629" cy="267629"/>
               </a:xfrm>
               <a:prstGeom prst="ellipse">
@@ -19332,10 +18802,10 @@
         </p:grpSp>
         <p:grpSp>
           <p:nvGrpSpPr>
-            <p:cNvPr id="156" name="Group 155">
-              <a:extLst>
-                <a:ext uri="{FF2B5EF4-FFF2-40B4-BE49-F238E27FC236}">
-                  <a16:creationId xmlns:a16="http://schemas.microsoft.com/office/drawing/2014/main" id="{CFE256D3-04E8-442A-1DA6-CA6327002990}"/>
+            <p:cNvPr id="48" name="Group 47">
+              <a:extLst>
+                <a:ext uri="{FF2B5EF4-FFF2-40B4-BE49-F238E27FC236}">
+                  <a16:creationId xmlns:a16="http://schemas.microsoft.com/office/drawing/2014/main" id="{DAAC3E4F-60BB-6972-3BD5-09841070F7AA}"/>
                 </a:ext>
               </a:extLst>
             </p:cNvPr>
@@ -19344,18 +18814,18 @@
           </p:nvGrpSpPr>
           <p:grpSpPr>
             <a:xfrm>
-              <a:off x="10211787" y="3966919"/>
-              <a:ext cx="2042468" cy="473633"/>
-              <a:chOff x="-4846261" y="583986"/>
-              <a:chExt cx="2042468" cy="473633"/>
+              <a:off x="10638112" y="3977552"/>
+              <a:ext cx="1671045" cy="473633"/>
+              <a:chOff x="343224" y="555912"/>
+              <a:chExt cx="1671045" cy="473633"/>
             </a:xfrm>
           </p:grpSpPr>
           <p:sp>
             <p:nvSpPr>
-              <p:cNvPr id="157" name="Rounded Rectangle 156">
+              <p:cNvPr id="49" name="Rounded Rectangle 48">
                 <a:extLst>
                   <a:ext uri="{FF2B5EF4-FFF2-40B4-BE49-F238E27FC236}">
-                    <a16:creationId xmlns:a16="http://schemas.microsoft.com/office/drawing/2014/main" id="{8B7D9BE0-E83E-D30A-5123-08A47EBC92EC}"/>
+                    <a16:creationId xmlns:a16="http://schemas.microsoft.com/office/drawing/2014/main" id="{AF2858D9-DBA1-958F-9999-FA8335E8D0D2}"/>
                   </a:ext>
                 </a:extLst>
               </p:cNvPr>
@@ -19364,8 +18834,8 @@
             </p:nvSpPr>
             <p:spPr>
               <a:xfrm>
-                <a:off x="-4846261" y="583986"/>
-                <a:ext cx="2042468" cy="473633"/>
+                <a:off x="343224" y="555912"/>
+                <a:ext cx="1671045" cy="473633"/>
               </a:xfrm>
               <a:prstGeom prst="roundRect">
                 <a:avLst/>
@@ -19402,10 +18872,10 @@
           </p:sp>
           <p:sp>
             <p:nvSpPr>
-              <p:cNvPr id="158" name="Oval 157">
+              <p:cNvPr id="50" name="Oval 49">
                 <a:extLst>
                   <a:ext uri="{FF2B5EF4-FFF2-40B4-BE49-F238E27FC236}">
-                    <a16:creationId xmlns:a16="http://schemas.microsoft.com/office/drawing/2014/main" id="{4A256447-0243-7B31-27E5-498FF1585366}"/>
+                    <a16:creationId xmlns:a16="http://schemas.microsoft.com/office/drawing/2014/main" id="{54C36190-E5E9-7F10-3A61-752B0484AFED}"/>
                   </a:ext>
                 </a:extLst>
               </p:cNvPr>
@@ -19414,7 +18884,7 @@
             </p:nvSpPr>
             <p:spPr>
               <a:xfrm>
-                <a:off x="-4723598" y="678771"/>
+                <a:off x="465887" y="650697"/>
                 <a:ext cx="267629" cy="267629"/>
               </a:xfrm>
               <a:prstGeom prst="ellipse">
@@ -19452,10 +18922,10 @@
           </p:sp>
           <p:sp>
             <p:nvSpPr>
-              <p:cNvPr id="159" name="Oval 158">
+              <p:cNvPr id="51" name="Oval 50">
                 <a:extLst>
                   <a:ext uri="{FF2B5EF4-FFF2-40B4-BE49-F238E27FC236}">
-                    <a16:creationId xmlns:a16="http://schemas.microsoft.com/office/drawing/2014/main" id="{90374730-F617-8011-1103-9F905254F4D9}"/>
+                    <a16:creationId xmlns:a16="http://schemas.microsoft.com/office/drawing/2014/main" id="{1D2C1EBF-5248-E1EC-FA1E-33A56ED9B59A}"/>
                   </a:ext>
                 </a:extLst>
               </p:cNvPr>
@@ -19464,7 +18934,7 @@
             </p:nvSpPr>
             <p:spPr>
               <a:xfrm>
-                <a:off x="-4333307" y="678771"/>
+                <a:off x="856178" y="650697"/>
                 <a:ext cx="267629" cy="267629"/>
               </a:xfrm>
               <a:prstGeom prst="ellipse">
@@ -19502,10 +18972,10 @@
           </p:sp>
           <p:sp>
             <p:nvSpPr>
-              <p:cNvPr id="160" name="Oval 159">
+              <p:cNvPr id="52" name="Oval 51">
                 <a:extLst>
                   <a:ext uri="{FF2B5EF4-FFF2-40B4-BE49-F238E27FC236}">
-                    <a16:creationId xmlns:a16="http://schemas.microsoft.com/office/drawing/2014/main" id="{E8760936-9F5F-E1F8-EAC3-97B114EFAA97}"/>
+                    <a16:creationId xmlns:a16="http://schemas.microsoft.com/office/drawing/2014/main" id="{9D7331E2-155A-FDF3-6252-37B3991F927E}"/>
                   </a:ext>
                 </a:extLst>
               </p:cNvPr>
@@ -19514,7 +18984,7 @@
             </p:nvSpPr>
             <p:spPr>
               <a:xfrm>
-                <a:off x="-3965321" y="678771"/>
+                <a:off x="1224164" y="650697"/>
                 <a:ext cx="267629" cy="267629"/>
               </a:xfrm>
               <a:prstGeom prst="ellipse">
@@ -19552,10 +19022,10 @@
           </p:sp>
           <p:sp>
             <p:nvSpPr>
-              <p:cNvPr id="162" name="Oval 161">
+              <p:cNvPr id="53" name="Oval 52">
                 <a:extLst>
                   <a:ext uri="{FF2B5EF4-FFF2-40B4-BE49-F238E27FC236}">
-                    <a16:creationId xmlns:a16="http://schemas.microsoft.com/office/drawing/2014/main" id="{6F20D6C5-B10F-3A1E-E87A-5C72FC433CC3}"/>
+                    <a16:creationId xmlns:a16="http://schemas.microsoft.com/office/drawing/2014/main" id="{B4D888DE-C45F-7C7A-49FE-7FB6D9EAE5C5}"/>
                   </a:ext>
                 </a:extLst>
               </p:cNvPr>
@@ -19564,57 +19034,7 @@
             </p:nvSpPr>
             <p:spPr>
               <a:xfrm>
-                <a:off x="-3574981" y="681233"/>
-                <a:ext cx="267629" cy="267629"/>
-              </a:xfrm>
-              <a:prstGeom prst="ellipse">
-                <a:avLst/>
-              </a:prstGeom>
-              <a:solidFill>
-                <a:schemeClr val="bg2"/>
-              </a:solidFill>
-              <a:ln w="22225"/>
-            </p:spPr>
-            <p:style>
-              <a:lnRef idx="2">
-                <a:schemeClr val="accent1">
-                  <a:shade val="15000"/>
-                </a:schemeClr>
-              </a:lnRef>
-              <a:fillRef idx="1">
-                <a:schemeClr val="accent1"/>
-              </a:fillRef>
-              <a:effectRef idx="0">
-                <a:schemeClr val="accent1"/>
-              </a:effectRef>
-              <a:fontRef idx="minor">
-                <a:schemeClr val="lt1"/>
-              </a:fontRef>
-            </p:style>
-            <p:txBody>
-              <a:bodyPr rtlCol="0" anchor="ctr"/>
-              <a:lstStyle/>
-              <a:p>
-                <a:pPr algn="ctr"/>
-                <a:endParaRPr lang="en-US"/>
-              </a:p>
-            </p:txBody>
-          </p:sp>
-          <p:sp>
-            <p:nvSpPr>
-              <p:cNvPr id="163" name="Oval 162">
-                <a:extLst>
-                  <a:ext uri="{FF2B5EF4-FFF2-40B4-BE49-F238E27FC236}">
-                    <a16:creationId xmlns:a16="http://schemas.microsoft.com/office/drawing/2014/main" id="{FE7CB567-D3C7-C346-89D6-EC104DF3B76F}"/>
-                  </a:ext>
-                </a:extLst>
-              </p:cNvPr>
-              <p:cNvSpPr/>
-              <p:nvPr/>
-            </p:nvSpPr>
-            <p:spPr>
-              <a:xfrm>
-                <a:off x="-3206995" y="681233"/>
+                <a:off x="1614504" y="653159"/>
                 <a:ext cx="267629" cy="267629"/>
               </a:xfrm>
               <a:prstGeom prst="ellipse">
@@ -19653,10 +19073,10 @@
         </p:grpSp>
         <p:grpSp>
           <p:nvGrpSpPr>
-            <p:cNvPr id="165" name="Group 164">
-              <a:extLst>
-                <a:ext uri="{FF2B5EF4-FFF2-40B4-BE49-F238E27FC236}">
-                  <a16:creationId xmlns:a16="http://schemas.microsoft.com/office/drawing/2014/main" id="{04F034E3-7698-1B5E-6EDA-F681C4086854}"/>
+            <p:cNvPr id="54" name="Group 53">
+              <a:extLst>
+                <a:ext uri="{FF2B5EF4-FFF2-40B4-BE49-F238E27FC236}">
+                  <a16:creationId xmlns:a16="http://schemas.microsoft.com/office/drawing/2014/main" id="{87992DEC-0E60-F47D-03F1-7250256D01D3}"/>
                 </a:ext>
               </a:extLst>
             </p:cNvPr>
@@ -19665,18 +19085,18 @@
           </p:nvGrpSpPr>
           <p:grpSpPr>
             <a:xfrm>
-              <a:off x="-1168710" y="6666830"/>
-              <a:ext cx="2042468" cy="473633"/>
-              <a:chOff x="-4846261" y="583986"/>
-              <a:chExt cx="2042468" cy="473633"/>
+              <a:off x="9154071" y="6706902"/>
+              <a:ext cx="1671045" cy="473633"/>
+              <a:chOff x="343224" y="555912"/>
+              <a:chExt cx="1671045" cy="473633"/>
             </a:xfrm>
           </p:grpSpPr>
           <p:sp>
             <p:nvSpPr>
-              <p:cNvPr id="166" name="Rounded Rectangle 165">
+              <p:cNvPr id="55" name="Rounded Rectangle 54">
                 <a:extLst>
                   <a:ext uri="{FF2B5EF4-FFF2-40B4-BE49-F238E27FC236}">
-                    <a16:creationId xmlns:a16="http://schemas.microsoft.com/office/drawing/2014/main" id="{B35C3A83-819A-EA16-C0EF-88C72653F875}"/>
+                    <a16:creationId xmlns:a16="http://schemas.microsoft.com/office/drawing/2014/main" id="{F61F116C-CAD1-5D3F-DB48-E1C29AAF8EAD}"/>
                   </a:ext>
                 </a:extLst>
               </p:cNvPr>
@@ -19685,8 +19105,8 @@
             </p:nvSpPr>
             <p:spPr>
               <a:xfrm>
-                <a:off x="-4846261" y="583986"/>
-                <a:ext cx="2042468" cy="473633"/>
+                <a:off x="343224" y="555912"/>
+                <a:ext cx="1671045" cy="473633"/>
               </a:xfrm>
               <a:prstGeom prst="roundRect">
                 <a:avLst/>
@@ -19723,10 +19143,10 @@
           </p:sp>
           <p:sp>
             <p:nvSpPr>
-              <p:cNvPr id="167" name="Oval 166">
+              <p:cNvPr id="56" name="Oval 55">
                 <a:extLst>
                   <a:ext uri="{FF2B5EF4-FFF2-40B4-BE49-F238E27FC236}">
-                    <a16:creationId xmlns:a16="http://schemas.microsoft.com/office/drawing/2014/main" id="{FDF9DB3B-7B7F-3209-700E-67C71442664A}"/>
+                    <a16:creationId xmlns:a16="http://schemas.microsoft.com/office/drawing/2014/main" id="{95BFC3F8-358E-4FE2-F4D9-2FDD4DD3AC79}"/>
                   </a:ext>
                 </a:extLst>
               </p:cNvPr>
@@ -19735,7 +19155,378 @@
             </p:nvSpPr>
             <p:spPr>
               <a:xfrm>
-                <a:off x="-4723598" y="678771"/>
+                <a:off x="465887" y="650697"/>
+                <a:ext cx="267629" cy="267629"/>
+              </a:xfrm>
+              <a:prstGeom prst="ellipse">
+                <a:avLst/>
+              </a:prstGeom>
+              <a:solidFill>
+                <a:srgbClr val="00B050"/>
+              </a:solidFill>
+              <a:ln w="22225"/>
+            </p:spPr>
+            <p:style>
+              <a:lnRef idx="2">
+                <a:schemeClr val="accent1">
+                  <a:shade val="15000"/>
+                </a:schemeClr>
+              </a:lnRef>
+              <a:fillRef idx="1">
+                <a:schemeClr val="accent1"/>
+              </a:fillRef>
+              <a:effectRef idx="0">
+                <a:schemeClr val="accent1"/>
+              </a:effectRef>
+              <a:fontRef idx="minor">
+                <a:schemeClr val="lt1"/>
+              </a:fontRef>
+            </p:style>
+            <p:txBody>
+              <a:bodyPr rtlCol="0" anchor="ctr"/>
+              <a:lstStyle/>
+              <a:p>
+                <a:pPr algn="ctr"/>
+                <a:endParaRPr lang="en-US"/>
+              </a:p>
+            </p:txBody>
+          </p:sp>
+          <p:sp>
+            <p:nvSpPr>
+              <p:cNvPr id="57" name="Oval 56">
+                <a:extLst>
+                  <a:ext uri="{FF2B5EF4-FFF2-40B4-BE49-F238E27FC236}">
+                    <a16:creationId xmlns:a16="http://schemas.microsoft.com/office/drawing/2014/main" id="{2475B3B9-A011-AC56-6AE4-3E663BC8C85C}"/>
+                  </a:ext>
+                </a:extLst>
+              </p:cNvPr>
+              <p:cNvSpPr/>
+              <p:nvPr/>
+            </p:nvSpPr>
+            <p:spPr>
+              <a:xfrm>
+                <a:off x="856178" y="650697"/>
+                <a:ext cx="267629" cy="267629"/>
+              </a:xfrm>
+              <a:prstGeom prst="ellipse">
+                <a:avLst/>
+              </a:prstGeom>
+              <a:solidFill>
+                <a:srgbClr val="00B050"/>
+              </a:solidFill>
+              <a:ln w="22225"/>
+            </p:spPr>
+            <p:style>
+              <a:lnRef idx="2">
+                <a:schemeClr val="accent1">
+                  <a:shade val="15000"/>
+                </a:schemeClr>
+              </a:lnRef>
+              <a:fillRef idx="1">
+                <a:schemeClr val="accent1"/>
+              </a:fillRef>
+              <a:effectRef idx="0">
+                <a:schemeClr val="accent1"/>
+              </a:effectRef>
+              <a:fontRef idx="minor">
+                <a:schemeClr val="lt1"/>
+              </a:fontRef>
+            </p:style>
+            <p:txBody>
+              <a:bodyPr rtlCol="0" anchor="ctr"/>
+              <a:lstStyle/>
+              <a:p>
+                <a:pPr algn="ctr"/>
+                <a:endParaRPr lang="en-US"/>
+              </a:p>
+            </p:txBody>
+          </p:sp>
+          <p:sp>
+            <p:nvSpPr>
+              <p:cNvPr id="58" name="Oval 57">
+                <a:extLst>
+                  <a:ext uri="{FF2B5EF4-FFF2-40B4-BE49-F238E27FC236}">
+                    <a16:creationId xmlns:a16="http://schemas.microsoft.com/office/drawing/2014/main" id="{5FCAD21F-2E97-2A02-46BE-C6EAB2D17BCC}"/>
+                  </a:ext>
+                </a:extLst>
+              </p:cNvPr>
+              <p:cNvSpPr/>
+              <p:nvPr/>
+            </p:nvSpPr>
+            <p:spPr>
+              <a:xfrm>
+                <a:off x="1224164" y="650697"/>
+                <a:ext cx="267629" cy="267629"/>
+              </a:xfrm>
+              <a:prstGeom prst="ellipse">
+                <a:avLst/>
+              </a:prstGeom>
+              <a:solidFill>
+                <a:srgbClr val="00B050"/>
+              </a:solidFill>
+              <a:ln w="22225"/>
+            </p:spPr>
+            <p:style>
+              <a:lnRef idx="2">
+                <a:schemeClr val="accent1">
+                  <a:shade val="15000"/>
+                </a:schemeClr>
+              </a:lnRef>
+              <a:fillRef idx="1">
+                <a:schemeClr val="accent1"/>
+              </a:fillRef>
+              <a:effectRef idx="0">
+                <a:schemeClr val="accent1"/>
+              </a:effectRef>
+              <a:fontRef idx="minor">
+                <a:schemeClr val="lt1"/>
+              </a:fontRef>
+            </p:style>
+            <p:txBody>
+              <a:bodyPr rtlCol="0" anchor="ctr"/>
+              <a:lstStyle/>
+              <a:p>
+                <a:pPr algn="ctr"/>
+                <a:endParaRPr lang="en-US"/>
+              </a:p>
+            </p:txBody>
+          </p:sp>
+          <p:sp>
+            <p:nvSpPr>
+              <p:cNvPr id="59" name="Oval 58">
+                <a:extLst>
+                  <a:ext uri="{FF2B5EF4-FFF2-40B4-BE49-F238E27FC236}">
+                    <a16:creationId xmlns:a16="http://schemas.microsoft.com/office/drawing/2014/main" id="{F02918E6-1154-4D75-DF0D-057990C091A2}"/>
+                  </a:ext>
+                </a:extLst>
+              </p:cNvPr>
+              <p:cNvSpPr/>
+              <p:nvPr/>
+            </p:nvSpPr>
+            <p:spPr>
+              <a:xfrm>
+                <a:off x="1614504" y="653159"/>
+                <a:ext cx="267629" cy="267629"/>
+              </a:xfrm>
+              <a:prstGeom prst="ellipse">
+                <a:avLst/>
+              </a:prstGeom>
+              <a:solidFill>
+                <a:srgbClr val="00B050"/>
+              </a:solidFill>
+              <a:ln w="22225"/>
+            </p:spPr>
+            <p:style>
+              <a:lnRef idx="2">
+                <a:schemeClr val="accent1">
+                  <a:shade val="15000"/>
+                </a:schemeClr>
+              </a:lnRef>
+              <a:fillRef idx="1">
+                <a:schemeClr val="accent1"/>
+              </a:fillRef>
+              <a:effectRef idx="0">
+                <a:schemeClr val="accent1"/>
+              </a:effectRef>
+              <a:fontRef idx="minor">
+                <a:schemeClr val="lt1"/>
+              </a:fontRef>
+            </p:style>
+            <p:txBody>
+              <a:bodyPr rtlCol="0" anchor="ctr"/>
+              <a:lstStyle/>
+              <a:p>
+                <a:pPr algn="ctr"/>
+                <a:endParaRPr lang="en-US"/>
+              </a:p>
+            </p:txBody>
+          </p:sp>
+        </p:grpSp>
+        <p:grpSp>
+          <p:nvGrpSpPr>
+            <p:cNvPr id="60" name="Group 59">
+              <a:extLst>
+                <a:ext uri="{FF2B5EF4-FFF2-40B4-BE49-F238E27FC236}">
+                  <a16:creationId xmlns:a16="http://schemas.microsoft.com/office/drawing/2014/main" id="{23890C77-D3BA-BC61-63F7-2A05A48F513D}"/>
+                </a:ext>
+              </a:extLst>
+            </p:cNvPr>
+            <p:cNvGrpSpPr/>
+            <p:nvPr/>
+          </p:nvGrpSpPr>
+          <p:grpSpPr>
+            <a:xfrm>
+              <a:off x="12365007" y="6698034"/>
+              <a:ext cx="1671045" cy="473633"/>
+              <a:chOff x="343224" y="555912"/>
+              <a:chExt cx="1671045" cy="473633"/>
+            </a:xfrm>
+          </p:grpSpPr>
+          <p:sp>
+            <p:nvSpPr>
+              <p:cNvPr id="61" name="Rounded Rectangle 60">
+                <a:extLst>
+                  <a:ext uri="{FF2B5EF4-FFF2-40B4-BE49-F238E27FC236}">
+                    <a16:creationId xmlns:a16="http://schemas.microsoft.com/office/drawing/2014/main" id="{0B3C3F81-50B7-8DE9-4F14-B54B4DE6B949}"/>
+                  </a:ext>
+                </a:extLst>
+              </p:cNvPr>
+              <p:cNvSpPr/>
+              <p:nvPr/>
+            </p:nvSpPr>
+            <p:spPr>
+              <a:xfrm>
+                <a:off x="343224" y="555912"/>
+                <a:ext cx="1671045" cy="473633"/>
+              </a:xfrm>
+              <a:prstGeom prst="roundRect">
+                <a:avLst/>
+              </a:prstGeom>
+              <a:solidFill>
+                <a:schemeClr val="bg2"/>
+              </a:solidFill>
+              <a:ln w="22225"/>
+            </p:spPr>
+            <p:style>
+              <a:lnRef idx="2">
+                <a:schemeClr val="accent1">
+                  <a:shade val="15000"/>
+                </a:schemeClr>
+              </a:lnRef>
+              <a:fillRef idx="1">
+                <a:schemeClr val="accent1"/>
+              </a:fillRef>
+              <a:effectRef idx="0">
+                <a:schemeClr val="accent1"/>
+              </a:effectRef>
+              <a:fontRef idx="minor">
+                <a:schemeClr val="lt1"/>
+              </a:fontRef>
+            </p:style>
+            <p:txBody>
+              <a:bodyPr rtlCol="0" anchor="ctr"/>
+              <a:lstStyle/>
+              <a:p>
+                <a:pPr algn="ctr"/>
+                <a:endParaRPr lang="en-US"/>
+              </a:p>
+            </p:txBody>
+          </p:sp>
+          <p:sp>
+            <p:nvSpPr>
+              <p:cNvPr id="62" name="Oval 61">
+                <a:extLst>
+                  <a:ext uri="{FF2B5EF4-FFF2-40B4-BE49-F238E27FC236}">
+                    <a16:creationId xmlns:a16="http://schemas.microsoft.com/office/drawing/2014/main" id="{55C4E3E3-7831-8E75-5EA8-61042E77FB58}"/>
+                  </a:ext>
+                </a:extLst>
+              </p:cNvPr>
+              <p:cNvSpPr/>
+              <p:nvPr/>
+            </p:nvSpPr>
+            <p:spPr>
+              <a:xfrm>
+                <a:off x="465887" y="650697"/>
+                <a:ext cx="267629" cy="267629"/>
+              </a:xfrm>
+              <a:prstGeom prst="ellipse">
+                <a:avLst/>
+              </a:prstGeom>
+              <a:solidFill>
+                <a:srgbClr val="00B050"/>
+              </a:solidFill>
+              <a:ln w="22225"/>
+            </p:spPr>
+            <p:style>
+              <a:lnRef idx="2">
+                <a:schemeClr val="accent1">
+                  <a:shade val="15000"/>
+                </a:schemeClr>
+              </a:lnRef>
+              <a:fillRef idx="1">
+                <a:schemeClr val="accent1"/>
+              </a:fillRef>
+              <a:effectRef idx="0">
+                <a:schemeClr val="accent1"/>
+              </a:effectRef>
+              <a:fontRef idx="minor">
+                <a:schemeClr val="lt1"/>
+              </a:fontRef>
+            </p:style>
+            <p:txBody>
+              <a:bodyPr rtlCol="0" anchor="ctr"/>
+              <a:lstStyle/>
+              <a:p>
+                <a:pPr algn="ctr"/>
+                <a:endParaRPr lang="en-US"/>
+              </a:p>
+            </p:txBody>
+          </p:sp>
+          <p:sp>
+            <p:nvSpPr>
+              <p:cNvPr id="63" name="Oval 62">
+                <a:extLst>
+                  <a:ext uri="{FF2B5EF4-FFF2-40B4-BE49-F238E27FC236}">
+                    <a16:creationId xmlns:a16="http://schemas.microsoft.com/office/drawing/2014/main" id="{1909CBB9-8983-6F7F-C062-3F7E94DDD9CB}"/>
+                  </a:ext>
+                </a:extLst>
+              </p:cNvPr>
+              <p:cNvSpPr/>
+              <p:nvPr/>
+            </p:nvSpPr>
+            <p:spPr>
+              <a:xfrm>
+                <a:off x="856178" y="650697"/>
+                <a:ext cx="267629" cy="267629"/>
+              </a:xfrm>
+              <a:prstGeom prst="ellipse">
+                <a:avLst/>
+              </a:prstGeom>
+              <a:solidFill>
+                <a:srgbClr val="00B050"/>
+              </a:solidFill>
+              <a:ln w="22225"/>
+            </p:spPr>
+            <p:style>
+              <a:lnRef idx="2">
+                <a:schemeClr val="accent1">
+                  <a:shade val="15000"/>
+                </a:schemeClr>
+              </a:lnRef>
+              <a:fillRef idx="1">
+                <a:schemeClr val="accent1"/>
+              </a:fillRef>
+              <a:effectRef idx="0">
+                <a:schemeClr val="accent1"/>
+              </a:effectRef>
+              <a:fontRef idx="minor">
+                <a:schemeClr val="lt1"/>
+              </a:fontRef>
+            </p:style>
+            <p:txBody>
+              <a:bodyPr rtlCol="0" anchor="ctr"/>
+              <a:lstStyle/>
+              <a:p>
+                <a:pPr algn="ctr"/>
+                <a:endParaRPr lang="en-US"/>
+              </a:p>
+            </p:txBody>
+          </p:sp>
+          <p:sp>
+            <p:nvSpPr>
+              <p:cNvPr id="64" name="Oval 63">
+                <a:extLst>
+                  <a:ext uri="{FF2B5EF4-FFF2-40B4-BE49-F238E27FC236}">
+                    <a16:creationId xmlns:a16="http://schemas.microsoft.com/office/drawing/2014/main" id="{DA09A74A-1D43-B21A-20E8-1FE0EF308010}"/>
+                  </a:ext>
+                </a:extLst>
+              </p:cNvPr>
+              <p:cNvSpPr/>
+              <p:nvPr/>
+            </p:nvSpPr>
+            <p:spPr>
+              <a:xfrm>
+                <a:off x="1224164" y="650697"/>
                 <a:ext cx="267629" cy="267629"/>
               </a:xfrm>
               <a:prstGeom prst="ellipse">
@@ -19773,10 +19564,10 @@
           </p:sp>
           <p:sp>
             <p:nvSpPr>
-              <p:cNvPr id="168" name="Oval 167">
+              <p:cNvPr id="65" name="Oval 64">
                 <a:extLst>
                   <a:ext uri="{FF2B5EF4-FFF2-40B4-BE49-F238E27FC236}">
-                    <a16:creationId xmlns:a16="http://schemas.microsoft.com/office/drawing/2014/main" id="{B9231D36-A325-5C20-189D-5C05CD599144}"/>
+                    <a16:creationId xmlns:a16="http://schemas.microsoft.com/office/drawing/2014/main" id="{83E18EA1-57C1-AD00-A68B-8FD16F0FDDED}"/>
                   </a:ext>
                 </a:extLst>
               </p:cNvPr>
@@ -19785,157 +19576,7 @@
             </p:nvSpPr>
             <p:spPr>
               <a:xfrm>
-                <a:off x="-4333307" y="678771"/>
-                <a:ext cx="267629" cy="267629"/>
-              </a:xfrm>
-              <a:prstGeom prst="ellipse">
-                <a:avLst/>
-              </a:prstGeom>
-              <a:solidFill>
-                <a:srgbClr val="FF0000"/>
-              </a:solidFill>
-              <a:ln w="22225"/>
-            </p:spPr>
-            <p:style>
-              <a:lnRef idx="2">
-                <a:schemeClr val="accent1">
-                  <a:shade val="15000"/>
-                </a:schemeClr>
-              </a:lnRef>
-              <a:fillRef idx="1">
-                <a:schemeClr val="accent1"/>
-              </a:fillRef>
-              <a:effectRef idx="0">
-                <a:schemeClr val="accent1"/>
-              </a:effectRef>
-              <a:fontRef idx="minor">
-                <a:schemeClr val="lt1"/>
-              </a:fontRef>
-            </p:style>
-            <p:txBody>
-              <a:bodyPr rtlCol="0" anchor="ctr"/>
-              <a:lstStyle/>
-              <a:p>
-                <a:pPr algn="ctr"/>
-                <a:endParaRPr lang="en-US"/>
-              </a:p>
-            </p:txBody>
-          </p:sp>
-          <p:sp>
-            <p:nvSpPr>
-              <p:cNvPr id="169" name="Oval 168">
-                <a:extLst>
-                  <a:ext uri="{FF2B5EF4-FFF2-40B4-BE49-F238E27FC236}">
-                    <a16:creationId xmlns:a16="http://schemas.microsoft.com/office/drawing/2014/main" id="{1F75044C-7CDF-331D-6184-4A919717E53F}"/>
-                  </a:ext>
-                </a:extLst>
-              </p:cNvPr>
-              <p:cNvSpPr/>
-              <p:nvPr/>
-            </p:nvSpPr>
-            <p:spPr>
-              <a:xfrm>
-                <a:off x="-3965321" y="678771"/>
-                <a:ext cx="267629" cy="267629"/>
-              </a:xfrm>
-              <a:prstGeom prst="ellipse">
-                <a:avLst/>
-              </a:prstGeom>
-              <a:solidFill>
-                <a:srgbClr val="00B050"/>
-              </a:solidFill>
-              <a:ln w="22225"/>
-            </p:spPr>
-            <p:style>
-              <a:lnRef idx="2">
-                <a:schemeClr val="accent1">
-                  <a:shade val="15000"/>
-                </a:schemeClr>
-              </a:lnRef>
-              <a:fillRef idx="1">
-                <a:schemeClr val="accent1"/>
-              </a:fillRef>
-              <a:effectRef idx="0">
-                <a:schemeClr val="accent1"/>
-              </a:effectRef>
-              <a:fontRef idx="minor">
-                <a:schemeClr val="lt1"/>
-              </a:fontRef>
-            </p:style>
-            <p:txBody>
-              <a:bodyPr rtlCol="0" anchor="ctr"/>
-              <a:lstStyle/>
-              <a:p>
-                <a:pPr algn="ctr"/>
-                <a:endParaRPr lang="en-US"/>
-              </a:p>
-            </p:txBody>
-          </p:sp>
-          <p:sp>
-            <p:nvSpPr>
-              <p:cNvPr id="172" name="Oval 171">
-                <a:extLst>
-                  <a:ext uri="{FF2B5EF4-FFF2-40B4-BE49-F238E27FC236}">
-                    <a16:creationId xmlns:a16="http://schemas.microsoft.com/office/drawing/2014/main" id="{7A0FDFD3-1771-DA7A-5B06-F4369831F8D3}"/>
-                  </a:ext>
-                </a:extLst>
-              </p:cNvPr>
-              <p:cNvSpPr/>
-              <p:nvPr/>
-            </p:nvSpPr>
-            <p:spPr>
-              <a:xfrm>
-                <a:off x="-3574981" y="681233"/>
-                <a:ext cx="267629" cy="267629"/>
-              </a:xfrm>
-              <a:prstGeom prst="ellipse">
-                <a:avLst/>
-              </a:prstGeom>
-              <a:solidFill>
-                <a:srgbClr val="FF0000"/>
-              </a:solidFill>
-              <a:ln w="22225"/>
-            </p:spPr>
-            <p:style>
-              <a:lnRef idx="2">
-                <a:schemeClr val="accent1">
-                  <a:shade val="15000"/>
-                </a:schemeClr>
-              </a:lnRef>
-              <a:fillRef idx="1">
-                <a:schemeClr val="accent1"/>
-              </a:fillRef>
-              <a:effectRef idx="0">
-                <a:schemeClr val="accent1"/>
-              </a:effectRef>
-              <a:fontRef idx="minor">
-                <a:schemeClr val="lt1"/>
-              </a:fontRef>
-            </p:style>
-            <p:txBody>
-              <a:bodyPr rtlCol="0" anchor="ctr"/>
-              <a:lstStyle/>
-              <a:p>
-                <a:pPr algn="ctr"/>
-                <a:endParaRPr lang="en-US"/>
-              </a:p>
-            </p:txBody>
-          </p:sp>
-          <p:sp>
-            <p:nvSpPr>
-              <p:cNvPr id="173" name="Oval 172">
-                <a:extLst>
-                  <a:ext uri="{FF2B5EF4-FFF2-40B4-BE49-F238E27FC236}">
-                    <a16:creationId xmlns:a16="http://schemas.microsoft.com/office/drawing/2014/main" id="{A6EED840-CD01-64F5-4C8D-8CA632D33101}"/>
-                  </a:ext>
-                </a:extLst>
-              </p:cNvPr>
-              <p:cNvSpPr/>
-              <p:nvPr/>
-            </p:nvSpPr>
-            <p:spPr>
-              <a:xfrm>
-                <a:off x="-3206995" y="681233"/>
+                <a:off x="1614504" y="653159"/>
                 <a:ext cx="267629" cy="267629"/>
               </a:xfrm>
               <a:prstGeom prst="ellipse">
@@ -19974,10 +19615,10 @@
         </p:grpSp>
         <p:grpSp>
           <p:nvGrpSpPr>
-            <p:cNvPr id="174" name="Group 173">
-              <a:extLst>
-                <a:ext uri="{FF2B5EF4-FFF2-40B4-BE49-F238E27FC236}">
-                  <a16:creationId xmlns:a16="http://schemas.microsoft.com/office/drawing/2014/main" id="{6288357B-2D2D-3718-98E2-5DEA7A119A50}"/>
+            <p:cNvPr id="66" name="Group 65">
+              <a:extLst>
+                <a:ext uri="{FF2B5EF4-FFF2-40B4-BE49-F238E27FC236}">
+                  <a16:creationId xmlns:a16="http://schemas.microsoft.com/office/drawing/2014/main" id="{449D3CAA-4CB9-1F83-EEA1-78C387861C03}"/>
                 </a:ext>
               </a:extLst>
             </p:cNvPr>
@@ -19986,18 +19627,18 @@
           </p:nvGrpSpPr>
           <p:grpSpPr>
             <a:xfrm>
-              <a:off x="2049912" y="6652343"/>
-              <a:ext cx="2042468" cy="473633"/>
-              <a:chOff x="-4846261" y="583986"/>
-              <a:chExt cx="2042468" cy="473633"/>
+              <a:off x="922672" y="9532999"/>
+              <a:ext cx="1671045" cy="473633"/>
+              <a:chOff x="343224" y="555912"/>
+              <a:chExt cx="1671045" cy="473633"/>
             </a:xfrm>
           </p:grpSpPr>
           <p:sp>
             <p:nvSpPr>
-              <p:cNvPr id="175" name="Rounded Rectangle 174">
+              <p:cNvPr id="67" name="Rounded Rectangle 66">
                 <a:extLst>
                   <a:ext uri="{FF2B5EF4-FFF2-40B4-BE49-F238E27FC236}">
-                    <a16:creationId xmlns:a16="http://schemas.microsoft.com/office/drawing/2014/main" id="{D8862FBF-5D19-8CCD-1795-EF7E665D8E70}"/>
+                    <a16:creationId xmlns:a16="http://schemas.microsoft.com/office/drawing/2014/main" id="{1ACCDD10-20D1-B93F-07C2-16742D7D27B3}"/>
                   </a:ext>
                 </a:extLst>
               </p:cNvPr>
@@ -20006,8 +19647,8 @@
             </p:nvSpPr>
             <p:spPr>
               <a:xfrm>
-                <a:off x="-4846261" y="583986"/>
-                <a:ext cx="2042468" cy="473633"/>
+                <a:off x="343224" y="555912"/>
+                <a:ext cx="1671045" cy="473633"/>
               </a:xfrm>
               <a:prstGeom prst="roundRect">
                 <a:avLst/>
@@ -20044,10 +19685,10 @@
           </p:sp>
           <p:sp>
             <p:nvSpPr>
-              <p:cNvPr id="176" name="Oval 175">
+              <p:cNvPr id="68" name="Oval 67">
                 <a:extLst>
                   <a:ext uri="{FF2B5EF4-FFF2-40B4-BE49-F238E27FC236}">
-                    <a16:creationId xmlns:a16="http://schemas.microsoft.com/office/drawing/2014/main" id="{34F0122E-5996-C600-6774-4CFD8C87BCE1}"/>
+                    <a16:creationId xmlns:a16="http://schemas.microsoft.com/office/drawing/2014/main" id="{8753501F-37EE-38E6-D604-0B9F7CED8D0F}"/>
                   </a:ext>
                 </a:extLst>
               </p:cNvPr>
@@ -20056,7 +19697,7 @@
             </p:nvSpPr>
             <p:spPr>
               <a:xfrm>
-                <a:off x="-4723598" y="678771"/>
+                <a:off x="465887" y="650697"/>
                 <a:ext cx="267629" cy="267629"/>
               </a:xfrm>
               <a:prstGeom prst="ellipse">
@@ -20094,10 +19735,10 @@
           </p:sp>
           <p:sp>
             <p:nvSpPr>
-              <p:cNvPr id="177" name="Oval 176">
+              <p:cNvPr id="69" name="Oval 68">
                 <a:extLst>
                   <a:ext uri="{FF2B5EF4-FFF2-40B4-BE49-F238E27FC236}">
-                    <a16:creationId xmlns:a16="http://schemas.microsoft.com/office/drawing/2014/main" id="{3E7413BA-F4F7-5078-3B3C-EFB51B4FDDEF}"/>
+                    <a16:creationId xmlns:a16="http://schemas.microsoft.com/office/drawing/2014/main" id="{FBC3065D-842D-5059-AC91-59191FC7B272}"/>
                   </a:ext>
                 </a:extLst>
               </p:cNvPr>
@@ -20106,7 +19747,7 @@
             </p:nvSpPr>
             <p:spPr>
               <a:xfrm>
-                <a:off x="-4333307" y="678771"/>
+                <a:off x="856178" y="650697"/>
                 <a:ext cx="267629" cy="267629"/>
               </a:xfrm>
               <a:prstGeom prst="ellipse">
@@ -20144,10 +19785,10 @@
           </p:sp>
           <p:sp>
             <p:nvSpPr>
-              <p:cNvPr id="180" name="Oval 179">
+              <p:cNvPr id="70" name="Oval 69">
                 <a:extLst>
                   <a:ext uri="{FF2B5EF4-FFF2-40B4-BE49-F238E27FC236}">
-                    <a16:creationId xmlns:a16="http://schemas.microsoft.com/office/drawing/2014/main" id="{CE010673-FC1D-5526-8D1B-413AC21E2793}"/>
+                    <a16:creationId xmlns:a16="http://schemas.microsoft.com/office/drawing/2014/main" id="{26D866B9-3123-D437-A969-619DCCB10EF8}"/>
                   </a:ext>
                 </a:extLst>
               </p:cNvPr>
@@ -20156,7 +19797,7 @@
             </p:nvSpPr>
             <p:spPr>
               <a:xfrm>
-                <a:off x="-3965321" y="678771"/>
+                <a:off x="1224164" y="650697"/>
                 <a:ext cx="267629" cy="267629"/>
               </a:xfrm>
               <a:prstGeom prst="ellipse">
@@ -20194,10 +19835,10 @@
           </p:sp>
           <p:sp>
             <p:nvSpPr>
-              <p:cNvPr id="181" name="Oval 180">
+              <p:cNvPr id="71" name="Oval 70">
                 <a:extLst>
                   <a:ext uri="{FF2B5EF4-FFF2-40B4-BE49-F238E27FC236}">
-                    <a16:creationId xmlns:a16="http://schemas.microsoft.com/office/drawing/2014/main" id="{6701A573-85FA-4B54-ED9C-84DBFBECE80A}"/>
+                    <a16:creationId xmlns:a16="http://schemas.microsoft.com/office/drawing/2014/main" id="{33D09218-9DD6-99A2-6D49-7BA7E18F52DC}"/>
                   </a:ext>
                 </a:extLst>
               </p:cNvPr>
@@ -20206,10 +19847,81 @@
             </p:nvSpPr>
             <p:spPr>
               <a:xfrm>
-                <a:off x="-3574981" y="681233"/>
+                <a:off x="1614504" y="653159"/>
                 <a:ext cx="267629" cy="267629"/>
               </a:xfrm>
               <a:prstGeom prst="ellipse">
+                <a:avLst/>
+              </a:prstGeom>
+              <a:solidFill>
+                <a:srgbClr val="00B050"/>
+              </a:solidFill>
+              <a:ln w="22225"/>
+            </p:spPr>
+            <p:style>
+              <a:lnRef idx="2">
+                <a:schemeClr val="accent1">
+                  <a:shade val="15000"/>
+                </a:schemeClr>
+              </a:lnRef>
+              <a:fillRef idx="1">
+                <a:schemeClr val="accent1"/>
+              </a:fillRef>
+              <a:effectRef idx="0">
+                <a:schemeClr val="accent1"/>
+              </a:effectRef>
+              <a:fontRef idx="minor">
+                <a:schemeClr val="lt1"/>
+              </a:fontRef>
+            </p:style>
+            <p:txBody>
+              <a:bodyPr rtlCol="0" anchor="ctr"/>
+              <a:lstStyle/>
+              <a:p>
+                <a:pPr algn="ctr"/>
+                <a:endParaRPr lang="en-US"/>
+              </a:p>
+            </p:txBody>
+          </p:sp>
+        </p:grpSp>
+        <p:grpSp>
+          <p:nvGrpSpPr>
+            <p:cNvPr id="72" name="Group 71">
+              <a:extLst>
+                <a:ext uri="{FF2B5EF4-FFF2-40B4-BE49-F238E27FC236}">
+                  <a16:creationId xmlns:a16="http://schemas.microsoft.com/office/drawing/2014/main" id="{01E78D64-3CB0-09A6-3CC0-2D8AF09152D5}"/>
+                </a:ext>
+              </a:extLst>
+            </p:cNvPr>
+            <p:cNvGrpSpPr/>
+            <p:nvPr/>
+          </p:nvGrpSpPr>
+          <p:grpSpPr>
+            <a:xfrm>
+              <a:off x="2490804" y="6662976"/>
+              <a:ext cx="1671045" cy="473633"/>
+              <a:chOff x="343224" y="555912"/>
+              <a:chExt cx="1671045" cy="473633"/>
+            </a:xfrm>
+          </p:grpSpPr>
+          <p:sp>
+            <p:nvSpPr>
+              <p:cNvPr id="73" name="Rounded Rectangle 72">
+                <a:extLst>
+                  <a:ext uri="{FF2B5EF4-FFF2-40B4-BE49-F238E27FC236}">
+                    <a16:creationId xmlns:a16="http://schemas.microsoft.com/office/drawing/2014/main" id="{00FE1E01-3E7C-B2E8-FF96-6BF0B5602FCF}"/>
+                  </a:ext>
+                </a:extLst>
+              </p:cNvPr>
+              <p:cNvSpPr/>
+              <p:nvPr/>
+            </p:nvSpPr>
+            <p:spPr>
+              <a:xfrm>
+                <a:off x="343224" y="555912"/>
+                <a:ext cx="1671045" cy="473633"/>
+              </a:xfrm>
+              <a:prstGeom prst="roundRect">
                 <a:avLst/>
               </a:prstGeom>
               <a:solidFill>
@@ -20244,10 +19956,10 @@
           </p:sp>
           <p:sp>
             <p:nvSpPr>
-              <p:cNvPr id="182" name="Oval 181">
+              <p:cNvPr id="74" name="Oval 73">
                 <a:extLst>
                   <a:ext uri="{FF2B5EF4-FFF2-40B4-BE49-F238E27FC236}">
-                    <a16:creationId xmlns:a16="http://schemas.microsoft.com/office/drawing/2014/main" id="{231C180D-1B0E-B2C5-D484-89D5C70D93D0}"/>
+                    <a16:creationId xmlns:a16="http://schemas.microsoft.com/office/drawing/2014/main" id="{44D49F02-0326-F49B-8950-CBC3220A63DB}"/>
                   </a:ext>
                 </a:extLst>
               </p:cNvPr>
@@ -20256,7 +19968,157 @@
             </p:nvSpPr>
             <p:spPr>
               <a:xfrm>
-                <a:off x="-3206995" y="681233"/>
+                <a:off x="465887" y="650697"/>
+                <a:ext cx="267629" cy="267629"/>
+              </a:xfrm>
+              <a:prstGeom prst="ellipse">
+                <a:avLst/>
+              </a:prstGeom>
+              <a:solidFill>
+                <a:srgbClr val="FF0000"/>
+              </a:solidFill>
+              <a:ln w="22225"/>
+            </p:spPr>
+            <p:style>
+              <a:lnRef idx="2">
+                <a:schemeClr val="accent1">
+                  <a:shade val="15000"/>
+                </a:schemeClr>
+              </a:lnRef>
+              <a:fillRef idx="1">
+                <a:schemeClr val="accent1"/>
+              </a:fillRef>
+              <a:effectRef idx="0">
+                <a:schemeClr val="accent1"/>
+              </a:effectRef>
+              <a:fontRef idx="minor">
+                <a:schemeClr val="lt1"/>
+              </a:fontRef>
+            </p:style>
+            <p:txBody>
+              <a:bodyPr rtlCol="0" anchor="ctr"/>
+              <a:lstStyle/>
+              <a:p>
+                <a:pPr algn="ctr"/>
+                <a:endParaRPr lang="en-US"/>
+              </a:p>
+            </p:txBody>
+          </p:sp>
+          <p:sp>
+            <p:nvSpPr>
+              <p:cNvPr id="75" name="Oval 74">
+                <a:extLst>
+                  <a:ext uri="{FF2B5EF4-FFF2-40B4-BE49-F238E27FC236}">
+                    <a16:creationId xmlns:a16="http://schemas.microsoft.com/office/drawing/2014/main" id="{5FE4B235-7657-41BC-1742-77ABBC88F80A}"/>
+                  </a:ext>
+                </a:extLst>
+              </p:cNvPr>
+              <p:cNvSpPr/>
+              <p:nvPr/>
+            </p:nvSpPr>
+            <p:spPr>
+              <a:xfrm>
+                <a:off x="856178" y="650697"/>
+                <a:ext cx="267629" cy="267629"/>
+              </a:xfrm>
+              <a:prstGeom prst="ellipse">
+                <a:avLst/>
+              </a:prstGeom>
+              <a:solidFill>
+                <a:srgbClr val="FF0000"/>
+              </a:solidFill>
+              <a:ln w="22225"/>
+            </p:spPr>
+            <p:style>
+              <a:lnRef idx="2">
+                <a:schemeClr val="accent1">
+                  <a:shade val="15000"/>
+                </a:schemeClr>
+              </a:lnRef>
+              <a:fillRef idx="1">
+                <a:schemeClr val="accent1"/>
+              </a:fillRef>
+              <a:effectRef idx="0">
+                <a:schemeClr val="accent1"/>
+              </a:effectRef>
+              <a:fontRef idx="minor">
+                <a:schemeClr val="lt1"/>
+              </a:fontRef>
+            </p:style>
+            <p:txBody>
+              <a:bodyPr rtlCol="0" anchor="ctr"/>
+              <a:lstStyle/>
+              <a:p>
+                <a:pPr algn="ctr"/>
+                <a:endParaRPr lang="en-US"/>
+              </a:p>
+            </p:txBody>
+          </p:sp>
+          <p:sp>
+            <p:nvSpPr>
+              <p:cNvPr id="83" name="Oval 82">
+                <a:extLst>
+                  <a:ext uri="{FF2B5EF4-FFF2-40B4-BE49-F238E27FC236}">
+                    <a16:creationId xmlns:a16="http://schemas.microsoft.com/office/drawing/2014/main" id="{75ECD5D3-05FB-FC10-B2A1-F4AF93AB107A}"/>
+                  </a:ext>
+                </a:extLst>
+              </p:cNvPr>
+              <p:cNvSpPr/>
+              <p:nvPr/>
+            </p:nvSpPr>
+            <p:spPr>
+              <a:xfrm>
+                <a:off x="1224164" y="650697"/>
+                <a:ext cx="267629" cy="267629"/>
+              </a:xfrm>
+              <a:prstGeom prst="ellipse">
+                <a:avLst/>
+              </a:prstGeom>
+              <a:solidFill>
+                <a:srgbClr val="FF0000"/>
+              </a:solidFill>
+              <a:ln w="22225"/>
+            </p:spPr>
+            <p:style>
+              <a:lnRef idx="2">
+                <a:schemeClr val="accent1">
+                  <a:shade val="15000"/>
+                </a:schemeClr>
+              </a:lnRef>
+              <a:fillRef idx="1">
+                <a:schemeClr val="accent1"/>
+              </a:fillRef>
+              <a:effectRef idx="0">
+                <a:schemeClr val="accent1"/>
+              </a:effectRef>
+              <a:fontRef idx="minor">
+                <a:schemeClr val="lt1"/>
+              </a:fontRef>
+            </p:style>
+            <p:txBody>
+              <a:bodyPr rtlCol="0" anchor="ctr"/>
+              <a:lstStyle/>
+              <a:p>
+                <a:pPr algn="ctr"/>
+                <a:endParaRPr lang="en-US"/>
+              </a:p>
+            </p:txBody>
+          </p:sp>
+          <p:sp>
+            <p:nvSpPr>
+              <p:cNvPr id="84" name="Oval 83">
+                <a:extLst>
+                  <a:ext uri="{FF2B5EF4-FFF2-40B4-BE49-F238E27FC236}">
+                    <a16:creationId xmlns:a16="http://schemas.microsoft.com/office/drawing/2014/main" id="{2D5CF6B1-CE80-9DCB-2588-89DDC8F68699}"/>
+                  </a:ext>
+                </a:extLst>
+              </p:cNvPr>
+              <p:cNvSpPr/>
+              <p:nvPr/>
+            </p:nvSpPr>
+            <p:spPr>
+              <a:xfrm>
+                <a:off x="1614504" y="653159"/>
                 <a:ext cx="267629" cy="267629"/>
               </a:xfrm>
               <a:prstGeom prst="ellipse">
@@ -20295,10 +20157,10 @@
         </p:grpSp>
         <p:grpSp>
           <p:nvGrpSpPr>
-            <p:cNvPr id="183" name="Group 182">
-              <a:extLst>
-                <a:ext uri="{FF2B5EF4-FFF2-40B4-BE49-F238E27FC236}">
-                  <a16:creationId xmlns:a16="http://schemas.microsoft.com/office/drawing/2014/main" id="{B874B7DE-7D17-7594-8765-3F8B21F0BFDA}"/>
+            <p:cNvPr id="85" name="Group 84">
+              <a:extLst>
+                <a:ext uri="{FF2B5EF4-FFF2-40B4-BE49-F238E27FC236}">
+                  <a16:creationId xmlns:a16="http://schemas.microsoft.com/office/drawing/2014/main" id="{B8FFA319-105C-8719-7AC1-80135F2CB906}"/>
                 </a:ext>
               </a:extLst>
             </p:cNvPr>
@@ -20307,18 +20169,18 @@
           </p:nvGrpSpPr>
           <p:grpSpPr>
             <a:xfrm>
-              <a:off x="8727922" y="6698343"/>
-              <a:ext cx="2042468" cy="473633"/>
-              <a:chOff x="-4846261" y="583986"/>
-              <a:chExt cx="2042468" cy="473633"/>
+              <a:off x="-734906" y="6674460"/>
+              <a:ext cx="1671045" cy="473633"/>
+              <a:chOff x="343224" y="555912"/>
+              <a:chExt cx="1671045" cy="473633"/>
             </a:xfrm>
           </p:grpSpPr>
           <p:sp>
             <p:nvSpPr>
-              <p:cNvPr id="184" name="Rounded Rectangle 183">
+              <p:cNvPr id="86" name="Rounded Rectangle 85">
                 <a:extLst>
                   <a:ext uri="{FF2B5EF4-FFF2-40B4-BE49-F238E27FC236}">
-                    <a16:creationId xmlns:a16="http://schemas.microsoft.com/office/drawing/2014/main" id="{50BBB71D-3E87-2891-71F1-831B7548FABA}"/>
+                    <a16:creationId xmlns:a16="http://schemas.microsoft.com/office/drawing/2014/main" id="{37F09ADE-5429-C4C9-BE45-91CFD5667D08}"/>
                   </a:ext>
                 </a:extLst>
               </p:cNvPr>
@@ -20327,8 +20189,8 @@
             </p:nvSpPr>
             <p:spPr>
               <a:xfrm>
-                <a:off x="-4846261" y="583986"/>
-                <a:ext cx="2042468" cy="473633"/>
+                <a:off x="343224" y="555912"/>
+                <a:ext cx="1671045" cy="473633"/>
               </a:xfrm>
               <a:prstGeom prst="roundRect">
                 <a:avLst/>
@@ -20365,10 +20227,10 @@
           </p:sp>
           <p:sp>
             <p:nvSpPr>
-              <p:cNvPr id="185" name="Oval 184">
+              <p:cNvPr id="87" name="Oval 86">
                 <a:extLst>
                   <a:ext uri="{FF2B5EF4-FFF2-40B4-BE49-F238E27FC236}">
-                    <a16:creationId xmlns:a16="http://schemas.microsoft.com/office/drawing/2014/main" id="{7B8421C5-4A27-34F7-F412-F6B7E8E3478B}"/>
+                    <a16:creationId xmlns:a16="http://schemas.microsoft.com/office/drawing/2014/main" id="{FE21E09C-6D1E-51E8-4753-9E4020CFEB27}"/>
                   </a:ext>
                 </a:extLst>
               </p:cNvPr>
@@ -20377,7 +20239,107 @@
             </p:nvSpPr>
             <p:spPr>
               <a:xfrm>
-                <a:off x="-4723598" y="678771"/>
+                <a:off x="465887" y="650697"/>
+                <a:ext cx="267629" cy="267629"/>
+              </a:xfrm>
+              <a:prstGeom prst="ellipse">
+                <a:avLst/>
+              </a:prstGeom>
+              <a:solidFill>
+                <a:srgbClr val="FF0000"/>
+              </a:solidFill>
+              <a:ln w="22225"/>
+            </p:spPr>
+            <p:style>
+              <a:lnRef idx="2">
+                <a:schemeClr val="accent1">
+                  <a:shade val="15000"/>
+                </a:schemeClr>
+              </a:lnRef>
+              <a:fillRef idx="1">
+                <a:schemeClr val="accent1"/>
+              </a:fillRef>
+              <a:effectRef idx="0">
+                <a:schemeClr val="accent1"/>
+              </a:effectRef>
+              <a:fontRef idx="minor">
+                <a:schemeClr val="lt1"/>
+              </a:fontRef>
+            </p:style>
+            <p:txBody>
+              <a:bodyPr rtlCol="0" anchor="ctr"/>
+              <a:lstStyle/>
+              <a:p>
+                <a:pPr algn="ctr"/>
+                <a:endParaRPr lang="en-US"/>
+              </a:p>
+            </p:txBody>
+          </p:sp>
+          <p:sp>
+            <p:nvSpPr>
+              <p:cNvPr id="88" name="Oval 87">
+                <a:extLst>
+                  <a:ext uri="{FF2B5EF4-FFF2-40B4-BE49-F238E27FC236}">
+                    <a16:creationId xmlns:a16="http://schemas.microsoft.com/office/drawing/2014/main" id="{8AC74043-A6EB-37B3-88EC-26680C779BBC}"/>
+                  </a:ext>
+                </a:extLst>
+              </p:cNvPr>
+              <p:cNvSpPr/>
+              <p:nvPr/>
+            </p:nvSpPr>
+            <p:spPr>
+              <a:xfrm>
+                <a:off x="856178" y="650697"/>
+                <a:ext cx="267629" cy="267629"/>
+              </a:xfrm>
+              <a:prstGeom prst="ellipse">
+                <a:avLst/>
+              </a:prstGeom>
+              <a:solidFill>
+                <a:srgbClr val="FF0000"/>
+              </a:solidFill>
+              <a:ln w="22225"/>
+            </p:spPr>
+            <p:style>
+              <a:lnRef idx="2">
+                <a:schemeClr val="accent1">
+                  <a:shade val="15000"/>
+                </a:schemeClr>
+              </a:lnRef>
+              <a:fillRef idx="1">
+                <a:schemeClr val="accent1"/>
+              </a:fillRef>
+              <a:effectRef idx="0">
+                <a:schemeClr val="accent1"/>
+              </a:effectRef>
+              <a:fontRef idx="minor">
+                <a:schemeClr val="lt1"/>
+              </a:fontRef>
+            </p:style>
+            <p:txBody>
+              <a:bodyPr rtlCol="0" anchor="ctr"/>
+              <a:lstStyle/>
+              <a:p>
+                <a:pPr algn="ctr"/>
+                <a:endParaRPr lang="en-US"/>
+              </a:p>
+            </p:txBody>
+          </p:sp>
+          <p:sp>
+            <p:nvSpPr>
+              <p:cNvPr id="89" name="Oval 88">
+                <a:extLst>
+                  <a:ext uri="{FF2B5EF4-FFF2-40B4-BE49-F238E27FC236}">
+                    <a16:creationId xmlns:a16="http://schemas.microsoft.com/office/drawing/2014/main" id="{24809D62-DCB5-DAD1-1424-3B9EF59773E8}"/>
+                  </a:ext>
+                </a:extLst>
+              </p:cNvPr>
+              <p:cNvSpPr/>
+              <p:nvPr/>
+            </p:nvSpPr>
+            <p:spPr>
+              <a:xfrm>
+                <a:off x="1224164" y="650697"/>
                 <a:ext cx="267629" cy="267629"/>
               </a:xfrm>
               <a:prstGeom prst="ellipse">
@@ -20415,10 +20377,10 @@
           </p:sp>
           <p:sp>
             <p:nvSpPr>
-              <p:cNvPr id="186" name="Oval 185">
+              <p:cNvPr id="90" name="Oval 89">
                 <a:extLst>
                   <a:ext uri="{FF2B5EF4-FFF2-40B4-BE49-F238E27FC236}">
-                    <a16:creationId xmlns:a16="http://schemas.microsoft.com/office/drawing/2014/main" id="{34E12A0E-42DD-460E-4507-E1BEBE26347A}"/>
+                    <a16:creationId xmlns:a16="http://schemas.microsoft.com/office/drawing/2014/main" id="{31C7E47D-78B8-1EF7-F86F-F17DF3055412}"/>
                   </a:ext>
                 </a:extLst>
               </p:cNvPr>
@@ -20427,478 +20389,7 @@
             </p:nvSpPr>
             <p:spPr>
               <a:xfrm>
-                <a:off x="-4333307" y="678771"/>
-                <a:ext cx="267629" cy="267629"/>
-              </a:xfrm>
-              <a:prstGeom prst="ellipse">
-                <a:avLst/>
-              </a:prstGeom>
-              <a:solidFill>
-                <a:srgbClr val="00B050"/>
-              </a:solidFill>
-              <a:ln w="22225"/>
-            </p:spPr>
-            <p:style>
-              <a:lnRef idx="2">
-                <a:schemeClr val="accent1">
-                  <a:shade val="15000"/>
-                </a:schemeClr>
-              </a:lnRef>
-              <a:fillRef idx="1">
-                <a:schemeClr val="accent1"/>
-              </a:fillRef>
-              <a:effectRef idx="0">
-                <a:schemeClr val="accent1"/>
-              </a:effectRef>
-              <a:fontRef idx="minor">
-                <a:schemeClr val="lt1"/>
-              </a:fontRef>
-            </p:style>
-            <p:txBody>
-              <a:bodyPr rtlCol="0" anchor="ctr"/>
-              <a:lstStyle/>
-              <a:p>
-                <a:pPr algn="ctr"/>
-                <a:endParaRPr lang="en-US"/>
-              </a:p>
-            </p:txBody>
-          </p:sp>
-          <p:sp>
-            <p:nvSpPr>
-              <p:cNvPr id="187" name="Oval 186">
-                <a:extLst>
-                  <a:ext uri="{FF2B5EF4-FFF2-40B4-BE49-F238E27FC236}">
-                    <a16:creationId xmlns:a16="http://schemas.microsoft.com/office/drawing/2014/main" id="{906C8111-2B1D-E073-0718-762635FBED05}"/>
-                  </a:ext>
-                </a:extLst>
-              </p:cNvPr>
-              <p:cNvSpPr/>
-              <p:nvPr/>
-            </p:nvSpPr>
-            <p:spPr>
-              <a:xfrm>
-                <a:off x="-3965321" y="678771"/>
-                <a:ext cx="267629" cy="267629"/>
-              </a:xfrm>
-              <a:prstGeom prst="ellipse">
-                <a:avLst/>
-              </a:prstGeom>
-              <a:solidFill>
-                <a:srgbClr val="00B050"/>
-              </a:solidFill>
-              <a:ln w="22225"/>
-            </p:spPr>
-            <p:style>
-              <a:lnRef idx="2">
-                <a:schemeClr val="accent1">
-                  <a:shade val="15000"/>
-                </a:schemeClr>
-              </a:lnRef>
-              <a:fillRef idx="1">
-                <a:schemeClr val="accent1"/>
-              </a:fillRef>
-              <a:effectRef idx="0">
-                <a:schemeClr val="accent1"/>
-              </a:effectRef>
-              <a:fontRef idx="minor">
-                <a:schemeClr val="lt1"/>
-              </a:fontRef>
-            </p:style>
-            <p:txBody>
-              <a:bodyPr rtlCol="0" anchor="ctr"/>
-              <a:lstStyle/>
-              <a:p>
-                <a:pPr algn="ctr"/>
-                <a:endParaRPr lang="en-US"/>
-              </a:p>
-            </p:txBody>
-          </p:sp>
-          <p:sp>
-            <p:nvSpPr>
-              <p:cNvPr id="188" name="Oval 187">
-                <a:extLst>
-                  <a:ext uri="{FF2B5EF4-FFF2-40B4-BE49-F238E27FC236}">
-                    <a16:creationId xmlns:a16="http://schemas.microsoft.com/office/drawing/2014/main" id="{0EF14BA9-80F1-F9BF-408E-2D7CF7B4C17E}"/>
-                  </a:ext>
-                </a:extLst>
-              </p:cNvPr>
-              <p:cNvSpPr/>
-              <p:nvPr/>
-            </p:nvSpPr>
-            <p:spPr>
-              <a:xfrm>
-                <a:off x="-3574981" y="681233"/>
-                <a:ext cx="267629" cy="267629"/>
-              </a:xfrm>
-              <a:prstGeom prst="ellipse">
-                <a:avLst/>
-              </a:prstGeom>
-              <a:solidFill>
-                <a:srgbClr val="00B050"/>
-              </a:solidFill>
-              <a:ln w="22225"/>
-            </p:spPr>
-            <p:style>
-              <a:lnRef idx="2">
-                <a:schemeClr val="accent1">
-                  <a:shade val="15000"/>
-                </a:schemeClr>
-              </a:lnRef>
-              <a:fillRef idx="1">
-                <a:schemeClr val="accent1"/>
-              </a:fillRef>
-              <a:effectRef idx="0">
-                <a:schemeClr val="accent1"/>
-              </a:effectRef>
-              <a:fontRef idx="minor">
-                <a:schemeClr val="lt1"/>
-              </a:fontRef>
-            </p:style>
-            <p:txBody>
-              <a:bodyPr rtlCol="0" anchor="ctr"/>
-              <a:lstStyle/>
-              <a:p>
-                <a:pPr algn="ctr"/>
-                <a:endParaRPr lang="en-US"/>
-              </a:p>
-            </p:txBody>
-          </p:sp>
-          <p:sp>
-            <p:nvSpPr>
-              <p:cNvPr id="189" name="Oval 188">
-                <a:extLst>
-                  <a:ext uri="{FF2B5EF4-FFF2-40B4-BE49-F238E27FC236}">
-                    <a16:creationId xmlns:a16="http://schemas.microsoft.com/office/drawing/2014/main" id="{578EAFA5-091D-92F9-62C7-739962777885}"/>
-                  </a:ext>
-                </a:extLst>
-              </p:cNvPr>
-              <p:cNvSpPr/>
-              <p:nvPr/>
-            </p:nvSpPr>
-            <p:spPr>
-              <a:xfrm>
-                <a:off x="-3206995" y="681233"/>
-                <a:ext cx="267629" cy="267629"/>
-              </a:xfrm>
-              <a:prstGeom prst="ellipse">
-                <a:avLst/>
-              </a:prstGeom>
-              <a:solidFill>
-                <a:srgbClr val="00B050"/>
-              </a:solidFill>
-              <a:ln w="22225"/>
-            </p:spPr>
-            <p:style>
-              <a:lnRef idx="2">
-                <a:schemeClr val="accent1">
-                  <a:shade val="15000"/>
-                </a:schemeClr>
-              </a:lnRef>
-              <a:fillRef idx="1">
-                <a:schemeClr val="accent1"/>
-              </a:fillRef>
-              <a:effectRef idx="0">
-                <a:schemeClr val="accent1"/>
-              </a:effectRef>
-              <a:fontRef idx="minor">
-                <a:schemeClr val="lt1"/>
-              </a:fontRef>
-            </p:style>
-            <p:txBody>
-              <a:bodyPr rtlCol="0" anchor="ctr"/>
-              <a:lstStyle/>
-              <a:p>
-                <a:pPr algn="ctr"/>
-                <a:endParaRPr lang="en-US"/>
-              </a:p>
-            </p:txBody>
-          </p:sp>
-        </p:grpSp>
-        <p:grpSp>
-          <p:nvGrpSpPr>
-            <p:cNvPr id="191" name="Group 190">
-              <a:extLst>
-                <a:ext uri="{FF2B5EF4-FFF2-40B4-BE49-F238E27FC236}">
-                  <a16:creationId xmlns:a16="http://schemas.microsoft.com/office/drawing/2014/main" id="{D4FCF598-A02B-7464-4635-C166E5214A9D}"/>
-                </a:ext>
-              </a:extLst>
-            </p:cNvPr>
-            <p:cNvGrpSpPr/>
-            <p:nvPr/>
-          </p:nvGrpSpPr>
-          <p:grpSpPr>
-            <a:xfrm>
-              <a:off x="11934019" y="6688236"/>
-              <a:ext cx="2042468" cy="473633"/>
-              <a:chOff x="-4846261" y="583986"/>
-              <a:chExt cx="2042468" cy="473633"/>
-            </a:xfrm>
-          </p:grpSpPr>
-          <p:sp>
-            <p:nvSpPr>
-              <p:cNvPr id="192" name="Rounded Rectangle 191">
-                <a:extLst>
-                  <a:ext uri="{FF2B5EF4-FFF2-40B4-BE49-F238E27FC236}">
-                    <a16:creationId xmlns:a16="http://schemas.microsoft.com/office/drawing/2014/main" id="{E8B367A6-4DEE-76D6-FB1B-F63C5285EC1F}"/>
-                  </a:ext>
-                </a:extLst>
-              </p:cNvPr>
-              <p:cNvSpPr/>
-              <p:nvPr/>
-            </p:nvSpPr>
-            <p:spPr>
-              <a:xfrm>
-                <a:off x="-4846261" y="583986"/>
-                <a:ext cx="2042468" cy="473633"/>
-              </a:xfrm>
-              <a:prstGeom prst="roundRect">
-                <a:avLst/>
-              </a:prstGeom>
-              <a:solidFill>
-                <a:schemeClr val="bg2"/>
-              </a:solidFill>
-              <a:ln w="22225"/>
-            </p:spPr>
-            <p:style>
-              <a:lnRef idx="2">
-                <a:schemeClr val="accent1">
-                  <a:shade val="15000"/>
-                </a:schemeClr>
-              </a:lnRef>
-              <a:fillRef idx="1">
-                <a:schemeClr val="accent1"/>
-              </a:fillRef>
-              <a:effectRef idx="0">
-                <a:schemeClr val="accent1"/>
-              </a:effectRef>
-              <a:fontRef idx="minor">
-                <a:schemeClr val="lt1"/>
-              </a:fontRef>
-            </p:style>
-            <p:txBody>
-              <a:bodyPr rtlCol="0" anchor="ctr"/>
-              <a:lstStyle/>
-              <a:p>
-                <a:pPr algn="ctr"/>
-                <a:endParaRPr lang="en-US"/>
-              </a:p>
-            </p:txBody>
-          </p:sp>
-          <p:sp>
-            <p:nvSpPr>
-              <p:cNvPr id="193" name="Oval 192">
-                <a:extLst>
-                  <a:ext uri="{FF2B5EF4-FFF2-40B4-BE49-F238E27FC236}">
-                    <a16:creationId xmlns:a16="http://schemas.microsoft.com/office/drawing/2014/main" id="{5E0606BF-DD1B-1536-8293-5713D2645BAF}"/>
-                  </a:ext>
-                </a:extLst>
-              </p:cNvPr>
-              <p:cNvSpPr/>
-              <p:nvPr/>
-            </p:nvSpPr>
-            <p:spPr>
-              <a:xfrm>
-                <a:off x="-4723598" y="678771"/>
-                <a:ext cx="267629" cy="267629"/>
-              </a:xfrm>
-              <a:prstGeom prst="ellipse">
-                <a:avLst/>
-              </a:prstGeom>
-              <a:solidFill>
-                <a:srgbClr val="00B050"/>
-              </a:solidFill>
-              <a:ln w="22225"/>
-            </p:spPr>
-            <p:style>
-              <a:lnRef idx="2">
-                <a:schemeClr val="accent1">
-                  <a:shade val="15000"/>
-                </a:schemeClr>
-              </a:lnRef>
-              <a:fillRef idx="1">
-                <a:schemeClr val="accent1"/>
-              </a:fillRef>
-              <a:effectRef idx="0">
-                <a:schemeClr val="accent1"/>
-              </a:effectRef>
-              <a:fontRef idx="minor">
-                <a:schemeClr val="lt1"/>
-              </a:fontRef>
-            </p:style>
-            <p:txBody>
-              <a:bodyPr rtlCol="0" anchor="ctr"/>
-              <a:lstStyle/>
-              <a:p>
-                <a:pPr algn="ctr"/>
-                <a:endParaRPr lang="en-US"/>
-              </a:p>
-            </p:txBody>
-          </p:sp>
-          <p:sp>
-            <p:nvSpPr>
-              <p:cNvPr id="194" name="Oval 193">
-                <a:extLst>
-                  <a:ext uri="{FF2B5EF4-FFF2-40B4-BE49-F238E27FC236}">
-                    <a16:creationId xmlns:a16="http://schemas.microsoft.com/office/drawing/2014/main" id="{82B82AC5-396F-EF35-5D1B-F1845A0997C2}"/>
-                  </a:ext>
-                </a:extLst>
-              </p:cNvPr>
-              <p:cNvSpPr/>
-              <p:nvPr/>
-            </p:nvSpPr>
-            <p:spPr>
-              <a:xfrm>
-                <a:off x="-4333307" y="678771"/>
-                <a:ext cx="267629" cy="267629"/>
-              </a:xfrm>
-              <a:prstGeom prst="ellipse">
-                <a:avLst/>
-              </a:prstGeom>
-              <a:solidFill>
-                <a:srgbClr val="00B050"/>
-              </a:solidFill>
-              <a:ln w="22225"/>
-            </p:spPr>
-            <p:style>
-              <a:lnRef idx="2">
-                <a:schemeClr val="accent1">
-                  <a:shade val="15000"/>
-                </a:schemeClr>
-              </a:lnRef>
-              <a:fillRef idx="1">
-                <a:schemeClr val="accent1"/>
-              </a:fillRef>
-              <a:effectRef idx="0">
-                <a:schemeClr val="accent1"/>
-              </a:effectRef>
-              <a:fontRef idx="minor">
-                <a:schemeClr val="lt1"/>
-              </a:fontRef>
-            </p:style>
-            <p:txBody>
-              <a:bodyPr rtlCol="0" anchor="ctr"/>
-              <a:lstStyle/>
-              <a:p>
-                <a:pPr algn="ctr"/>
-                <a:endParaRPr lang="en-US"/>
-              </a:p>
-            </p:txBody>
-          </p:sp>
-          <p:sp>
-            <p:nvSpPr>
-              <p:cNvPr id="195" name="Oval 194">
-                <a:extLst>
-                  <a:ext uri="{FF2B5EF4-FFF2-40B4-BE49-F238E27FC236}">
-                    <a16:creationId xmlns:a16="http://schemas.microsoft.com/office/drawing/2014/main" id="{B7099D5B-1102-E229-842E-CB5A7BE04E22}"/>
-                  </a:ext>
-                </a:extLst>
-              </p:cNvPr>
-              <p:cNvSpPr/>
-              <p:nvPr/>
-            </p:nvSpPr>
-            <p:spPr>
-              <a:xfrm>
-                <a:off x="-3965321" y="678771"/>
-                <a:ext cx="267629" cy="267629"/>
-              </a:xfrm>
-              <a:prstGeom prst="ellipse">
-                <a:avLst/>
-              </a:prstGeom>
-              <a:solidFill>
-                <a:srgbClr val="FF0000"/>
-              </a:solidFill>
-              <a:ln w="22225"/>
-            </p:spPr>
-            <p:style>
-              <a:lnRef idx="2">
-                <a:schemeClr val="accent1">
-                  <a:shade val="15000"/>
-                </a:schemeClr>
-              </a:lnRef>
-              <a:fillRef idx="1">
-                <a:schemeClr val="accent1"/>
-              </a:fillRef>
-              <a:effectRef idx="0">
-                <a:schemeClr val="accent1"/>
-              </a:effectRef>
-              <a:fontRef idx="minor">
-                <a:schemeClr val="lt1"/>
-              </a:fontRef>
-            </p:style>
-            <p:txBody>
-              <a:bodyPr rtlCol="0" anchor="ctr"/>
-              <a:lstStyle/>
-              <a:p>
-                <a:pPr algn="ctr"/>
-                <a:endParaRPr lang="en-US"/>
-              </a:p>
-            </p:txBody>
-          </p:sp>
-          <p:sp>
-            <p:nvSpPr>
-              <p:cNvPr id="196" name="Oval 195">
-                <a:extLst>
-                  <a:ext uri="{FF2B5EF4-FFF2-40B4-BE49-F238E27FC236}">
-                    <a16:creationId xmlns:a16="http://schemas.microsoft.com/office/drawing/2014/main" id="{3CB6FB05-1DB2-FAD8-5C19-C65DB4DCA68A}"/>
-                  </a:ext>
-                </a:extLst>
-              </p:cNvPr>
-              <p:cNvSpPr/>
-              <p:nvPr/>
-            </p:nvSpPr>
-            <p:spPr>
-              <a:xfrm>
-                <a:off x="-3574981" y="681233"/>
-                <a:ext cx="267629" cy="267629"/>
-              </a:xfrm>
-              <a:prstGeom prst="ellipse">
-                <a:avLst/>
-              </a:prstGeom>
-              <a:solidFill>
-                <a:srgbClr val="FF0000"/>
-              </a:solidFill>
-              <a:ln w="22225"/>
-            </p:spPr>
-            <p:style>
-              <a:lnRef idx="2">
-                <a:schemeClr val="accent1">
-                  <a:shade val="15000"/>
-                </a:schemeClr>
-              </a:lnRef>
-              <a:fillRef idx="1">
-                <a:schemeClr val="accent1"/>
-              </a:fillRef>
-              <a:effectRef idx="0">
-                <a:schemeClr val="accent1"/>
-              </a:effectRef>
-              <a:fontRef idx="minor">
-                <a:schemeClr val="lt1"/>
-              </a:fontRef>
-            </p:style>
-            <p:txBody>
-              <a:bodyPr rtlCol="0" anchor="ctr"/>
-              <a:lstStyle/>
-              <a:p>
-                <a:pPr algn="ctr"/>
-                <a:endParaRPr lang="en-US"/>
-              </a:p>
-            </p:txBody>
-          </p:sp>
-          <p:sp>
-            <p:nvSpPr>
-              <p:cNvPr id="198" name="Oval 197">
-                <a:extLst>
-                  <a:ext uri="{FF2B5EF4-FFF2-40B4-BE49-F238E27FC236}">
-                    <a16:creationId xmlns:a16="http://schemas.microsoft.com/office/drawing/2014/main" id="{8FE30223-6800-FA0B-11FF-45EAD84C3D3C}"/>
-                  </a:ext>
-                </a:extLst>
-              </p:cNvPr>
-              <p:cNvSpPr/>
-              <p:nvPr/>
-            </p:nvSpPr>
-            <p:spPr>
-              <a:xfrm>
-                <a:off x="-3206995" y="681233"/>
+                <a:off x="1614504" y="653159"/>
                 <a:ext cx="267629" cy="267629"/>
               </a:xfrm>
               <a:prstGeom prst="ellipse">
@@ -20937,10 +20428,10 @@
         </p:grpSp>
         <p:grpSp>
           <p:nvGrpSpPr>
-            <p:cNvPr id="199" name="Group 198">
-              <a:extLst>
-                <a:ext uri="{FF2B5EF4-FFF2-40B4-BE49-F238E27FC236}">
-                  <a16:creationId xmlns:a16="http://schemas.microsoft.com/office/drawing/2014/main" id="{23A791D0-023D-DA79-39D8-276C86E04384}"/>
+            <p:cNvPr id="91" name="Group 90">
+              <a:extLst>
+                <a:ext uri="{FF2B5EF4-FFF2-40B4-BE49-F238E27FC236}">
+                  <a16:creationId xmlns:a16="http://schemas.microsoft.com/office/drawing/2014/main" id="{43616AF5-DD12-4BF9-68F8-1B8309DE4B4F}"/>
                 </a:ext>
               </a:extLst>
             </p:cNvPr>
@@ -20949,18 +20440,18 @@
           </p:nvGrpSpPr>
           <p:grpSpPr>
             <a:xfrm>
-              <a:off x="482980" y="9521241"/>
-              <a:ext cx="2042468" cy="473633"/>
-              <a:chOff x="-4846261" y="583986"/>
-              <a:chExt cx="2042468" cy="473633"/>
+              <a:off x="4127553" y="9503325"/>
+              <a:ext cx="1671045" cy="473633"/>
+              <a:chOff x="343224" y="555912"/>
+              <a:chExt cx="1671045" cy="473633"/>
             </a:xfrm>
           </p:grpSpPr>
           <p:sp>
             <p:nvSpPr>
-              <p:cNvPr id="200" name="Rounded Rectangle 199">
+              <p:cNvPr id="92" name="Rounded Rectangle 91">
                 <a:extLst>
                   <a:ext uri="{FF2B5EF4-FFF2-40B4-BE49-F238E27FC236}">
-                    <a16:creationId xmlns:a16="http://schemas.microsoft.com/office/drawing/2014/main" id="{6DFB6D19-466B-C081-E990-43869FC8F4C7}"/>
+                    <a16:creationId xmlns:a16="http://schemas.microsoft.com/office/drawing/2014/main" id="{E9A1A45D-7293-CCE6-62A9-E49D2EE357A5}"/>
                   </a:ext>
                 </a:extLst>
               </p:cNvPr>
@@ -20969,8 +20460,8 @@
             </p:nvSpPr>
             <p:spPr>
               <a:xfrm>
-                <a:off x="-4846261" y="583986"/>
-                <a:ext cx="2042468" cy="473633"/>
+                <a:off x="343224" y="555912"/>
+                <a:ext cx="1671045" cy="473633"/>
               </a:xfrm>
               <a:prstGeom prst="roundRect">
                 <a:avLst/>
@@ -21007,10 +20498,10 @@
           </p:sp>
           <p:sp>
             <p:nvSpPr>
-              <p:cNvPr id="201" name="Oval 200">
+              <p:cNvPr id="93" name="Oval 92">
                 <a:extLst>
                   <a:ext uri="{FF2B5EF4-FFF2-40B4-BE49-F238E27FC236}">
-                    <a16:creationId xmlns:a16="http://schemas.microsoft.com/office/drawing/2014/main" id="{9D2D3F9C-289B-3AAD-B08A-682B0604D567}"/>
+                    <a16:creationId xmlns:a16="http://schemas.microsoft.com/office/drawing/2014/main" id="{1BC01EEE-3A05-BF5B-7AA8-71B6FC6029BB}"/>
                   </a:ext>
                 </a:extLst>
               </p:cNvPr>
@@ -21019,7 +20510,7 @@
             </p:nvSpPr>
             <p:spPr>
               <a:xfrm>
-                <a:off x="-4723598" y="678771"/>
+                <a:off x="465887" y="650697"/>
                 <a:ext cx="267629" cy="267629"/>
               </a:xfrm>
               <a:prstGeom prst="ellipse">
@@ -21057,10 +20548,10 @@
           </p:sp>
           <p:sp>
             <p:nvSpPr>
-              <p:cNvPr id="202" name="Oval 201">
+              <p:cNvPr id="94" name="Oval 93">
                 <a:extLst>
                   <a:ext uri="{FF2B5EF4-FFF2-40B4-BE49-F238E27FC236}">
-                    <a16:creationId xmlns:a16="http://schemas.microsoft.com/office/drawing/2014/main" id="{D353144F-5464-991D-D996-15AB1303801E}"/>
+                    <a16:creationId xmlns:a16="http://schemas.microsoft.com/office/drawing/2014/main" id="{FB400595-5CEA-6752-4FAE-2DF7229A8568}"/>
                   </a:ext>
                 </a:extLst>
               </p:cNvPr>
@@ -21069,7 +20560,7 @@
             </p:nvSpPr>
             <p:spPr>
               <a:xfrm>
-                <a:off x="-4333307" y="678771"/>
+                <a:off x="856178" y="650697"/>
                 <a:ext cx="267629" cy="267629"/>
               </a:xfrm>
               <a:prstGeom prst="ellipse">
@@ -21107,10 +20598,10 @@
           </p:sp>
           <p:sp>
             <p:nvSpPr>
-              <p:cNvPr id="224" name="Oval 223">
+              <p:cNvPr id="95" name="Oval 94">
                 <a:extLst>
                   <a:ext uri="{FF2B5EF4-FFF2-40B4-BE49-F238E27FC236}">
-                    <a16:creationId xmlns:a16="http://schemas.microsoft.com/office/drawing/2014/main" id="{425BC304-D610-9AC8-F90F-2559558B6C75}"/>
+                    <a16:creationId xmlns:a16="http://schemas.microsoft.com/office/drawing/2014/main" id="{E1574AC4-834F-31F0-28A5-9FAD5F8C4E2A}"/>
                   </a:ext>
                 </a:extLst>
               </p:cNvPr>
@@ -21119,7 +20610,7 @@
             </p:nvSpPr>
             <p:spPr>
               <a:xfrm>
-                <a:off x="-3965321" y="678771"/>
+                <a:off x="1224164" y="650697"/>
                 <a:ext cx="267629" cy="267629"/>
               </a:xfrm>
               <a:prstGeom prst="ellipse">
@@ -21157,10 +20648,10 @@
           </p:sp>
           <p:sp>
             <p:nvSpPr>
-              <p:cNvPr id="225" name="Oval 224">
+              <p:cNvPr id="96" name="Oval 95">
                 <a:extLst>
                   <a:ext uri="{FF2B5EF4-FFF2-40B4-BE49-F238E27FC236}">
-                    <a16:creationId xmlns:a16="http://schemas.microsoft.com/office/drawing/2014/main" id="{5C793F61-E9EE-96BC-A056-7E1E488275A5}"/>
+                    <a16:creationId xmlns:a16="http://schemas.microsoft.com/office/drawing/2014/main" id="{F7DD7DE5-3316-F2AB-782C-40E0EB49AB62}"/>
                   </a:ext>
                 </a:extLst>
               </p:cNvPr>
@@ -21169,378 +20660,7 @@
             </p:nvSpPr>
             <p:spPr>
               <a:xfrm>
-                <a:off x="-3574981" y="681233"/>
-                <a:ext cx="267629" cy="267629"/>
-              </a:xfrm>
-              <a:prstGeom prst="ellipse">
-                <a:avLst/>
-              </a:prstGeom>
-              <a:solidFill>
-                <a:srgbClr val="00B050"/>
-              </a:solidFill>
-              <a:ln w="22225"/>
-            </p:spPr>
-            <p:style>
-              <a:lnRef idx="2">
-                <a:schemeClr val="accent1">
-                  <a:shade val="15000"/>
-                </a:schemeClr>
-              </a:lnRef>
-              <a:fillRef idx="1">
-                <a:schemeClr val="accent1"/>
-              </a:fillRef>
-              <a:effectRef idx="0">
-                <a:schemeClr val="accent1"/>
-              </a:effectRef>
-              <a:fontRef idx="minor">
-                <a:schemeClr val="lt1"/>
-              </a:fontRef>
-            </p:style>
-            <p:txBody>
-              <a:bodyPr rtlCol="0" anchor="ctr"/>
-              <a:lstStyle/>
-              <a:p>
-                <a:pPr algn="ctr"/>
-                <a:endParaRPr lang="en-US"/>
-              </a:p>
-            </p:txBody>
-          </p:sp>
-          <p:sp>
-            <p:nvSpPr>
-              <p:cNvPr id="226" name="Oval 225">
-                <a:extLst>
-                  <a:ext uri="{FF2B5EF4-FFF2-40B4-BE49-F238E27FC236}">
-                    <a16:creationId xmlns:a16="http://schemas.microsoft.com/office/drawing/2014/main" id="{77E4A063-101E-BFF2-80C6-4FA1D1AED630}"/>
-                  </a:ext>
-                </a:extLst>
-              </p:cNvPr>
-              <p:cNvSpPr/>
-              <p:nvPr/>
-            </p:nvSpPr>
-            <p:spPr>
-              <a:xfrm>
-                <a:off x="-3206995" y="681233"/>
-                <a:ext cx="267629" cy="267629"/>
-              </a:xfrm>
-              <a:prstGeom prst="ellipse">
-                <a:avLst/>
-              </a:prstGeom>
-              <a:solidFill>
-                <a:srgbClr val="00B050"/>
-              </a:solidFill>
-              <a:ln w="22225"/>
-            </p:spPr>
-            <p:style>
-              <a:lnRef idx="2">
-                <a:schemeClr val="accent1">
-                  <a:shade val="15000"/>
-                </a:schemeClr>
-              </a:lnRef>
-              <a:fillRef idx="1">
-                <a:schemeClr val="accent1"/>
-              </a:fillRef>
-              <a:effectRef idx="0">
-                <a:schemeClr val="accent1"/>
-              </a:effectRef>
-              <a:fontRef idx="minor">
-                <a:schemeClr val="lt1"/>
-              </a:fontRef>
-            </p:style>
-            <p:txBody>
-              <a:bodyPr rtlCol="0" anchor="ctr"/>
-              <a:lstStyle/>
-              <a:p>
-                <a:pPr algn="ctr"/>
-                <a:endParaRPr lang="en-US"/>
-              </a:p>
-            </p:txBody>
-          </p:sp>
-        </p:grpSp>
-        <p:grpSp>
-          <p:nvGrpSpPr>
-            <p:cNvPr id="227" name="Group 226">
-              <a:extLst>
-                <a:ext uri="{FF2B5EF4-FFF2-40B4-BE49-F238E27FC236}">
-                  <a16:creationId xmlns:a16="http://schemas.microsoft.com/office/drawing/2014/main" id="{E11C6681-74B4-5BFD-D6F3-5D3C44E62450}"/>
-                </a:ext>
-              </a:extLst>
-            </p:cNvPr>
-            <p:cNvGrpSpPr/>
-            <p:nvPr/>
-          </p:nvGrpSpPr>
-          <p:grpSpPr>
-            <a:xfrm>
-              <a:off x="3692653" y="9494051"/>
-              <a:ext cx="2042468" cy="473633"/>
-              <a:chOff x="-4846261" y="583986"/>
-              <a:chExt cx="2042468" cy="473633"/>
-            </a:xfrm>
-          </p:grpSpPr>
-          <p:sp>
-            <p:nvSpPr>
-              <p:cNvPr id="228" name="Rounded Rectangle 227">
-                <a:extLst>
-                  <a:ext uri="{FF2B5EF4-FFF2-40B4-BE49-F238E27FC236}">
-                    <a16:creationId xmlns:a16="http://schemas.microsoft.com/office/drawing/2014/main" id="{A74679C8-387A-08CF-E47D-4D5AA111C6A8}"/>
-                  </a:ext>
-                </a:extLst>
-              </p:cNvPr>
-              <p:cNvSpPr/>
-              <p:nvPr/>
-            </p:nvSpPr>
-            <p:spPr>
-              <a:xfrm>
-                <a:off x="-4846261" y="583986"/>
-                <a:ext cx="2042468" cy="473633"/>
-              </a:xfrm>
-              <a:prstGeom prst="roundRect">
-                <a:avLst/>
-              </a:prstGeom>
-              <a:solidFill>
-                <a:schemeClr val="bg2"/>
-              </a:solidFill>
-              <a:ln w="22225"/>
-            </p:spPr>
-            <p:style>
-              <a:lnRef idx="2">
-                <a:schemeClr val="accent1">
-                  <a:shade val="15000"/>
-                </a:schemeClr>
-              </a:lnRef>
-              <a:fillRef idx="1">
-                <a:schemeClr val="accent1"/>
-              </a:fillRef>
-              <a:effectRef idx="0">
-                <a:schemeClr val="accent1"/>
-              </a:effectRef>
-              <a:fontRef idx="minor">
-                <a:schemeClr val="lt1"/>
-              </a:fontRef>
-            </p:style>
-            <p:txBody>
-              <a:bodyPr rtlCol="0" anchor="ctr"/>
-              <a:lstStyle/>
-              <a:p>
-                <a:pPr algn="ctr"/>
-                <a:endParaRPr lang="en-US"/>
-              </a:p>
-            </p:txBody>
-          </p:sp>
-          <p:sp>
-            <p:nvSpPr>
-              <p:cNvPr id="229" name="Oval 228">
-                <a:extLst>
-                  <a:ext uri="{FF2B5EF4-FFF2-40B4-BE49-F238E27FC236}">
-                    <a16:creationId xmlns:a16="http://schemas.microsoft.com/office/drawing/2014/main" id="{F345627E-7287-DFD7-7212-E5B445731393}"/>
-                  </a:ext>
-                </a:extLst>
-              </p:cNvPr>
-              <p:cNvSpPr/>
-              <p:nvPr/>
-            </p:nvSpPr>
-            <p:spPr>
-              <a:xfrm>
-                <a:off x="-4723598" y="678771"/>
-                <a:ext cx="267629" cy="267629"/>
-              </a:xfrm>
-              <a:prstGeom prst="ellipse">
-                <a:avLst/>
-              </a:prstGeom>
-              <a:solidFill>
-                <a:srgbClr val="FF0000"/>
-              </a:solidFill>
-              <a:ln w="22225"/>
-            </p:spPr>
-            <p:style>
-              <a:lnRef idx="2">
-                <a:schemeClr val="accent1">
-                  <a:shade val="15000"/>
-                </a:schemeClr>
-              </a:lnRef>
-              <a:fillRef idx="1">
-                <a:schemeClr val="accent1"/>
-              </a:fillRef>
-              <a:effectRef idx="0">
-                <a:schemeClr val="accent1"/>
-              </a:effectRef>
-              <a:fontRef idx="minor">
-                <a:schemeClr val="lt1"/>
-              </a:fontRef>
-            </p:style>
-            <p:txBody>
-              <a:bodyPr rtlCol="0" anchor="ctr"/>
-              <a:lstStyle/>
-              <a:p>
-                <a:pPr algn="ctr"/>
-                <a:endParaRPr lang="en-US"/>
-              </a:p>
-            </p:txBody>
-          </p:sp>
-          <p:sp>
-            <p:nvSpPr>
-              <p:cNvPr id="230" name="Oval 229">
-                <a:extLst>
-                  <a:ext uri="{FF2B5EF4-FFF2-40B4-BE49-F238E27FC236}">
-                    <a16:creationId xmlns:a16="http://schemas.microsoft.com/office/drawing/2014/main" id="{90938086-6D67-6184-0802-7C394D58143F}"/>
-                  </a:ext>
-                </a:extLst>
-              </p:cNvPr>
-              <p:cNvSpPr/>
-              <p:nvPr/>
-            </p:nvSpPr>
-            <p:spPr>
-              <a:xfrm>
-                <a:off x="-4333307" y="678771"/>
-                <a:ext cx="267629" cy="267629"/>
-              </a:xfrm>
-              <a:prstGeom prst="ellipse">
-                <a:avLst/>
-              </a:prstGeom>
-              <a:solidFill>
-                <a:srgbClr val="FF0000"/>
-              </a:solidFill>
-              <a:ln w="22225"/>
-            </p:spPr>
-            <p:style>
-              <a:lnRef idx="2">
-                <a:schemeClr val="accent1">
-                  <a:shade val="15000"/>
-                </a:schemeClr>
-              </a:lnRef>
-              <a:fillRef idx="1">
-                <a:schemeClr val="accent1"/>
-              </a:fillRef>
-              <a:effectRef idx="0">
-                <a:schemeClr val="accent1"/>
-              </a:effectRef>
-              <a:fontRef idx="minor">
-                <a:schemeClr val="lt1"/>
-              </a:fontRef>
-            </p:style>
-            <p:txBody>
-              <a:bodyPr rtlCol="0" anchor="ctr"/>
-              <a:lstStyle/>
-              <a:p>
-                <a:pPr algn="ctr"/>
-                <a:endParaRPr lang="en-US"/>
-              </a:p>
-            </p:txBody>
-          </p:sp>
-          <p:sp>
-            <p:nvSpPr>
-              <p:cNvPr id="231" name="Oval 230">
-                <a:extLst>
-                  <a:ext uri="{FF2B5EF4-FFF2-40B4-BE49-F238E27FC236}">
-                    <a16:creationId xmlns:a16="http://schemas.microsoft.com/office/drawing/2014/main" id="{86812ACB-7825-8D0A-B8F2-020CE6429F04}"/>
-                  </a:ext>
-                </a:extLst>
-              </p:cNvPr>
-              <p:cNvSpPr/>
-              <p:nvPr/>
-            </p:nvSpPr>
-            <p:spPr>
-              <a:xfrm>
-                <a:off x="-3965321" y="678771"/>
-                <a:ext cx="267629" cy="267629"/>
-              </a:xfrm>
-              <a:prstGeom prst="ellipse">
-                <a:avLst/>
-              </a:prstGeom>
-              <a:solidFill>
-                <a:srgbClr val="FF0000"/>
-              </a:solidFill>
-              <a:ln w="22225"/>
-            </p:spPr>
-            <p:style>
-              <a:lnRef idx="2">
-                <a:schemeClr val="accent1">
-                  <a:shade val="15000"/>
-                </a:schemeClr>
-              </a:lnRef>
-              <a:fillRef idx="1">
-                <a:schemeClr val="accent1"/>
-              </a:fillRef>
-              <a:effectRef idx="0">
-                <a:schemeClr val="accent1"/>
-              </a:effectRef>
-              <a:fontRef idx="minor">
-                <a:schemeClr val="lt1"/>
-              </a:fontRef>
-            </p:style>
-            <p:txBody>
-              <a:bodyPr rtlCol="0" anchor="ctr"/>
-              <a:lstStyle/>
-              <a:p>
-                <a:pPr algn="ctr"/>
-                <a:endParaRPr lang="en-US"/>
-              </a:p>
-            </p:txBody>
-          </p:sp>
-          <p:sp>
-            <p:nvSpPr>
-              <p:cNvPr id="232" name="Oval 231">
-                <a:extLst>
-                  <a:ext uri="{FF2B5EF4-FFF2-40B4-BE49-F238E27FC236}">
-                    <a16:creationId xmlns:a16="http://schemas.microsoft.com/office/drawing/2014/main" id="{88999B70-CD0F-3643-F48D-800C46241A83}"/>
-                  </a:ext>
-                </a:extLst>
-              </p:cNvPr>
-              <p:cNvSpPr/>
-              <p:nvPr/>
-            </p:nvSpPr>
-            <p:spPr>
-              <a:xfrm>
-                <a:off x="-3574981" y="681233"/>
-                <a:ext cx="267629" cy="267629"/>
-              </a:xfrm>
-              <a:prstGeom prst="ellipse">
-                <a:avLst/>
-              </a:prstGeom>
-              <a:solidFill>
-                <a:srgbClr val="FF0000"/>
-              </a:solidFill>
-              <a:ln w="22225"/>
-            </p:spPr>
-            <p:style>
-              <a:lnRef idx="2">
-                <a:schemeClr val="accent1">
-                  <a:shade val="15000"/>
-                </a:schemeClr>
-              </a:lnRef>
-              <a:fillRef idx="1">
-                <a:schemeClr val="accent1"/>
-              </a:fillRef>
-              <a:effectRef idx="0">
-                <a:schemeClr val="accent1"/>
-              </a:effectRef>
-              <a:fontRef idx="minor">
-                <a:schemeClr val="lt1"/>
-              </a:fontRef>
-            </p:style>
-            <p:txBody>
-              <a:bodyPr rtlCol="0" anchor="ctr"/>
-              <a:lstStyle/>
-              <a:p>
-                <a:pPr algn="ctr"/>
-                <a:endParaRPr lang="en-US"/>
-              </a:p>
-            </p:txBody>
-          </p:sp>
-          <p:sp>
-            <p:nvSpPr>
-              <p:cNvPr id="233" name="Oval 232">
-                <a:extLst>
-                  <a:ext uri="{FF2B5EF4-FFF2-40B4-BE49-F238E27FC236}">
-                    <a16:creationId xmlns:a16="http://schemas.microsoft.com/office/drawing/2014/main" id="{93B6CBC1-2AD6-0FE4-FF5B-C6022168E1A8}"/>
-                  </a:ext>
-                </a:extLst>
-              </p:cNvPr>
-              <p:cNvSpPr/>
-              <p:nvPr/>
-            </p:nvSpPr>
-            <p:spPr>
-              <a:xfrm>
-                <a:off x="-3206995" y="681233"/>
+                <a:off x="1614504" y="653159"/>
                 <a:ext cx="267629" cy="267629"/>
               </a:xfrm>
               <a:prstGeom prst="ellipse">
@@ -21579,10 +20699,160 @@
         </p:grpSp>
         <p:sp>
           <p:nvSpPr>
-            <p:cNvPr id="235" name="TextBox 234">
-              <a:extLst>
-                <a:ext uri="{FF2B5EF4-FFF2-40B4-BE49-F238E27FC236}">
-                  <a16:creationId xmlns:a16="http://schemas.microsoft.com/office/drawing/2014/main" id="{77D7C0AB-C5FA-CF36-50C6-FFFC45935BEB}"/>
+            <p:cNvPr id="97" name="Oval 96">
+              <a:extLst>
+                <a:ext uri="{FF2B5EF4-FFF2-40B4-BE49-F238E27FC236}">
+                  <a16:creationId xmlns:a16="http://schemas.microsoft.com/office/drawing/2014/main" id="{DFC68E3C-94B6-3DFF-01D8-AECC307CDDBC}"/>
+                </a:ext>
+              </a:extLst>
+            </p:cNvPr>
+            <p:cNvSpPr/>
+            <p:nvPr/>
+          </p:nvSpPr>
+          <p:spPr>
+            <a:xfrm>
+              <a:off x="7502570" y="8733283"/>
+              <a:ext cx="894965" cy="896381"/>
+            </a:xfrm>
+            <a:prstGeom prst="ellipse">
+              <a:avLst/>
+            </a:prstGeom>
+            <a:solidFill>
+              <a:schemeClr val="bg2"/>
+            </a:solidFill>
+            <a:ln w="22225"/>
+          </p:spPr>
+          <p:style>
+            <a:lnRef idx="2">
+              <a:schemeClr val="accent1">
+                <a:shade val="15000"/>
+              </a:schemeClr>
+            </a:lnRef>
+            <a:fillRef idx="1">
+              <a:schemeClr val="accent1"/>
+            </a:fillRef>
+            <a:effectRef idx="0">
+              <a:schemeClr val="accent1"/>
+            </a:effectRef>
+            <a:fontRef idx="minor">
+              <a:schemeClr val="lt1"/>
+            </a:fontRef>
+          </p:style>
+          <p:txBody>
+            <a:bodyPr rtlCol="0" anchor="ctr"/>
+            <a:lstStyle/>
+            <a:p>
+              <a:pPr algn="ctr"/>
+              <a:endParaRPr lang="en-US" sz="1600"/>
+            </a:p>
+          </p:txBody>
+        </p:sp>
+        <p:sp>
+          <p:nvSpPr>
+            <p:cNvPr id="98" name="Oval 97">
+              <a:extLst>
+                <a:ext uri="{FF2B5EF4-FFF2-40B4-BE49-F238E27FC236}">
+                  <a16:creationId xmlns:a16="http://schemas.microsoft.com/office/drawing/2014/main" id="{824DDEB2-3A38-A4AE-4DA7-2B179A7E7DF1}"/>
+                </a:ext>
+              </a:extLst>
+            </p:cNvPr>
+            <p:cNvSpPr/>
+            <p:nvPr/>
+          </p:nvSpPr>
+          <p:spPr>
+            <a:xfrm>
+              <a:off x="8562987" y="8729497"/>
+              <a:ext cx="894965" cy="896381"/>
+            </a:xfrm>
+            <a:prstGeom prst="ellipse">
+              <a:avLst/>
+            </a:prstGeom>
+            <a:solidFill>
+              <a:schemeClr val="bg2"/>
+            </a:solidFill>
+            <a:ln w="22225"/>
+          </p:spPr>
+          <p:style>
+            <a:lnRef idx="2">
+              <a:schemeClr val="accent1">
+                <a:shade val="15000"/>
+              </a:schemeClr>
+            </a:lnRef>
+            <a:fillRef idx="1">
+              <a:schemeClr val="accent1"/>
+            </a:fillRef>
+            <a:effectRef idx="0">
+              <a:schemeClr val="accent1"/>
+            </a:effectRef>
+            <a:fontRef idx="minor">
+              <a:schemeClr val="lt1"/>
+            </a:fontRef>
+          </p:style>
+          <p:txBody>
+            <a:bodyPr rtlCol="0" anchor="ctr"/>
+            <a:lstStyle/>
+            <a:p>
+              <a:pPr algn="ctr"/>
+              <a:endParaRPr lang="en-US" sz="1600"/>
+            </a:p>
+          </p:txBody>
+        </p:sp>
+        <p:sp>
+          <p:nvSpPr>
+            <p:cNvPr id="99" name="Oval 98">
+              <a:extLst>
+                <a:ext uri="{FF2B5EF4-FFF2-40B4-BE49-F238E27FC236}">
+                  <a16:creationId xmlns:a16="http://schemas.microsoft.com/office/drawing/2014/main" id="{493C2ED9-B0C1-1507-1E2A-2FF10DEE2D2F}"/>
+                </a:ext>
+              </a:extLst>
+            </p:cNvPr>
+            <p:cNvSpPr/>
+            <p:nvPr/>
+          </p:nvSpPr>
+          <p:spPr>
+            <a:xfrm>
+              <a:off x="9623404" y="8729545"/>
+              <a:ext cx="894965" cy="896381"/>
+            </a:xfrm>
+            <a:prstGeom prst="ellipse">
+              <a:avLst/>
+            </a:prstGeom>
+            <a:solidFill>
+              <a:schemeClr val="bg2"/>
+            </a:solidFill>
+            <a:ln w="22225"/>
+          </p:spPr>
+          <p:style>
+            <a:lnRef idx="2">
+              <a:schemeClr val="accent1">
+                <a:shade val="15000"/>
+              </a:schemeClr>
+            </a:lnRef>
+            <a:fillRef idx="1">
+              <a:schemeClr val="accent1"/>
+            </a:fillRef>
+            <a:effectRef idx="0">
+              <a:schemeClr val="accent1"/>
+            </a:effectRef>
+            <a:fontRef idx="minor">
+              <a:schemeClr val="lt1"/>
+            </a:fontRef>
+          </p:style>
+          <p:txBody>
+            <a:bodyPr rtlCol="0" anchor="ctr"/>
+            <a:lstStyle/>
+            <a:p>
+              <a:pPr algn="ctr"/>
+              <a:endParaRPr lang="en-US" sz="1600"/>
+            </a:p>
+          </p:txBody>
+        </p:sp>
+        <p:sp>
+          <p:nvSpPr>
+            <p:cNvPr id="213" name="TextBox 212">
+              <a:extLst>
+                <a:ext uri="{FF2B5EF4-FFF2-40B4-BE49-F238E27FC236}">
+                  <a16:creationId xmlns:a16="http://schemas.microsoft.com/office/drawing/2014/main" id="{732C086B-4413-0501-4613-C4C93A65D112}"/>
                 </a:ext>
               </a:extLst>
             </p:cNvPr>
@@ -21591,33 +20861,130 @@
           </p:nvSpPr>
           <p:spPr>
             <a:xfrm>
-              <a:off x="7448723" y="8087622"/>
-              <a:ext cx="575607" cy="400110"/>
-            </a:xfrm>
-            <a:prstGeom prst="rect">
-              <a:avLst/>
-            </a:prstGeom>
-            <a:solidFill>
-              <a:schemeClr val="bg1"/>
-            </a:solidFill>
-            <a:ln w="19050">
-              <a:solidFill>
-                <a:schemeClr val="accent1">
-                  <a:shade val="15000"/>
-                </a:schemeClr>
-              </a:solidFill>
-              <a:prstDash val="sysDash"/>
-            </a:ln>
+              <a:off x="7545413" y="9037854"/>
+              <a:ext cx="796638" cy="307777"/>
+            </a:xfrm>
+            <a:prstGeom prst="rect">
+              <a:avLst/>
+            </a:prstGeom>
+            <a:noFill/>
           </p:spPr>
           <p:txBody>
-            <a:bodyPr wrap="none" rtlCol="0">
+            <a:bodyPr wrap="square">
               <a:spAutoFit/>
             </a:bodyPr>
             <a:lstStyle/>
             <a:p>
+              <a:pPr algn="ctr"/>
               <a:r>
-                <a:rPr lang="en-US" sz="2000" dirty="0"/>
-                <a:t>Key</a:t>
+                <a:rPr lang="en-US" sz="1400" dirty="0">
+                  <a:solidFill>
+                    <a:schemeClr val="tx1"/>
+                  </a:solidFill>
+                </a:rPr>
+                <a:t>T</a:t>
+              </a:r>
+              <a:r>
+                <a:rPr lang="en-US" sz="1400" baseline="-25000" dirty="0">
+                  <a:solidFill>
+                    <a:schemeClr val="tx1"/>
+                  </a:solidFill>
+                </a:rPr>
+                <a:t>1</a:t>
+              </a:r>
+              <a:endParaRPr lang="en-US" sz="1400" baseline="-25000" dirty="0"/>
+            </a:p>
+          </p:txBody>
+        </p:sp>
+        <p:sp>
+          <p:nvSpPr>
+            <p:cNvPr id="214" name="TextBox 213">
+              <a:extLst>
+                <a:ext uri="{FF2B5EF4-FFF2-40B4-BE49-F238E27FC236}">
+                  <a16:creationId xmlns:a16="http://schemas.microsoft.com/office/drawing/2014/main" id="{FD363BB7-0CD7-BA65-202C-1A2468D2DD94}"/>
+                </a:ext>
+              </a:extLst>
+            </p:cNvPr>
+            <p:cNvSpPr txBox="1"/>
+            <p:nvPr/>
+          </p:nvSpPr>
+          <p:spPr>
+            <a:xfrm>
+              <a:off x="8612150" y="9033147"/>
+              <a:ext cx="796638" cy="307777"/>
+            </a:xfrm>
+            <a:prstGeom prst="rect">
+              <a:avLst/>
+            </a:prstGeom>
+            <a:noFill/>
+          </p:spPr>
+          <p:txBody>
+            <a:bodyPr wrap="square">
+              <a:spAutoFit/>
+            </a:bodyPr>
+            <a:lstStyle/>
+            <a:p>
+              <a:pPr algn="ctr"/>
+              <a:r>
+                <a:rPr lang="en-US" sz="1400" dirty="0">
+                  <a:solidFill>
+                    <a:schemeClr val="tx1"/>
+                  </a:solidFill>
+                </a:rPr>
+                <a:t>T</a:t>
+              </a:r>
+              <a:r>
+                <a:rPr lang="en-US" sz="1400" baseline="-25000" dirty="0">
+                  <a:solidFill>
+                    <a:schemeClr val="tx1"/>
+                  </a:solidFill>
+                </a:rPr>
+                <a:t>3</a:t>
+              </a:r>
+              <a:endParaRPr lang="en-US" sz="1400" baseline="-25000" dirty="0"/>
+            </a:p>
+          </p:txBody>
+        </p:sp>
+        <p:sp>
+          <p:nvSpPr>
+            <p:cNvPr id="215" name="TextBox 214">
+              <a:extLst>
+                <a:ext uri="{FF2B5EF4-FFF2-40B4-BE49-F238E27FC236}">
+                  <a16:creationId xmlns:a16="http://schemas.microsoft.com/office/drawing/2014/main" id="{0549EFD8-C758-6BBE-F799-2AE2940C7A74}"/>
+                </a:ext>
+              </a:extLst>
+            </p:cNvPr>
+            <p:cNvSpPr txBox="1"/>
+            <p:nvPr/>
+          </p:nvSpPr>
+          <p:spPr>
+            <a:xfrm>
+              <a:off x="9670330" y="9030211"/>
+              <a:ext cx="796638" cy="307777"/>
+            </a:xfrm>
+            <a:prstGeom prst="rect">
+              <a:avLst/>
+            </a:prstGeom>
+            <a:noFill/>
+          </p:spPr>
+          <p:txBody>
+            <a:bodyPr wrap="square">
+              <a:spAutoFit/>
+            </a:bodyPr>
+            <a:lstStyle/>
+            <a:p>
+              <a:pPr algn="ctr"/>
+              <a:r>
+                <a:rPr lang="en-US" sz="1400" dirty="0">
+                  <a:solidFill>
+                    <a:schemeClr val="tx1"/>
+                  </a:solidFill>
+                </a:rPr>
+                <a:t>T</a:t>
+              </a:r>
+              <a:r>
+                <a:rPr lang="en-US" sz="1400" baseline="-25000" dirty="0"/>
+                <a:t>5</a:t>
               </a:r>
             </a:p>
           </p:txBody>
